--- a/apresentacao_tcc.pptx
+++ b/apresentacao_tcc.pptx
@@ -4133,7 +4133,7 @@
                 </a:solidFill>
                 <a:latin typeface="Calibri"/>
               </a:rPr>
-              <a:t>OR = 0,705</a:t>
+              <a:t>OR = 0,704</a:t>
             </a:r>
           </a:p>
         </p:txBody>
@@ -10306,7 +10306,7 @@
                 </a:solidFill>
                 <a:latin typeface="Calibri"/>
               </a:rPr>
-              <a:t>• HLM M4: gap residual 5,4%</a:t>
+              <a:t>• HLM M4: gap residual 6,2%</a:t>
             </a:r>
           </a:p>
         </p:txBody>
@@ -11377,7 +11377,7 @@
                 <a:latin typeface="Calibri"/>
               </a:rPr>
               <a:t>▸  Piso salarial indexado nas categorias com
-maior gap racial residual (5,4% HLM M4)</a:t>
+maior gap racial residual (6,2% HLM M4)</a:t>
             </a:r>
           </a:p>
         </p:txBody>
@@ -13201,7 +13201,7 @@
                 </a:solidFill>
                 <a:latin typeface="Calibri"/>
               </a:rPr>
-              <a:t>19,5%</a:t>
+              <a:t>19,3%</a:t>
             </a:r>
           </a:p>
         </p:txBody>
@@ -13317,7 +13317,7 @@
                 </a:solidFill>
                 <a:latin typeface="Calibri"/>
               </a:rPr>
-              <a:t>5,4%</a:t>
+              <a:t>6,2%</a:t>
             </a:r>
           </a:p>
         </p:txBody>
@@ -13745,7 +13745,7 @@
                 </a:solidFill>
                 <a:latin typeface="Calibri"/>
               </a:rPr>
-              <a:t>2. A discriminação opera em dois estágios independentes: barreiras de ACESSO a ocupações qualificadas (GLMM: OR=0,747, AME=−1,07 p.p.) e discriminação de REMUNERAÇÃO dentro das mesmas funções (HLM M4: 5,4%).</a:t>
+              <a:t>2. A discriminação opera em dois estágios independentes: barreiras de ACESSO a ocupações qualificadas (GLMM: OR=0,747, AME=−1,07 p.p.) e discriminação de REMUNERAÇÃO dentro das mesmas funções (HLM M4: 6,2%).</a:t>
             </a:r>
           </a:p>
         </p:txBody>
@@ -18024,7 +18024,7 @@
                 </a:solidFill>
                 <a:latin typeface="Calibri"/>
               </a:rPr>
-              <a:t>Do gap bruto de 19,5% ao resíduo de discriminação pura de 5,4%</a:t>
+              <a:t>Do gap bruto de 19,3% ao resíduo de discriminação pura de 6,2%</a:t>
             </a:r>
           </a:p>
         </p:txBody>
@@ -18038,7 +18038,7 @@
         <p:spPr>
           <a:xfrm>
             <a:off x="365760" y="1188720"/>
-            <a:ext cx="10520172" cy="658368"/>
+            <a:ext cx="10412272" cy="658368"/>
           </a:xfrm>
           <a:prstGeom prst="rect">
             <a:avLst/>
@@ -18078,7 +18078,7 @@
         </p:nvSpPr>
         <p:spPr>
           <a:xfrm>
-            <a:off x="10977372" y="1353312"/>
+            <a:off x="10869472" y="1353312"/>
             <a:ext cx="731520" cy="365760"/>
           </a:xfrm>
           <a:prstGeom prst="rect">
@@ -18100,7 +18100,7 @@
                 </a:solidFill>
                 <a:latin typeface="Calibri"/>
               </a:rPr>
-              <a:t>19.5%</a:t>
+              <a:t>19.3%</a:t>
             </a:r>
           </a:p>
         </p:txBody>
@@ -18149,7 +18149,7 @@
         </p:nvSpPr>
         <p:spPr>
           <a:xfrm>
-            <a:off x="11800332" y="1280160"/>
+            <a:off x="11692432" y="1280160"/>
             <a:ext cx="5029200" cy="502920"/>
           </a:xfrm>
           <a:prstGeom prst="rect">
@@ -18186,7 +18186,7 @@
         <p:spPr>
           <a:xfrm>
             <a:off x="365760" y="2075688"/>
-            <a:ext cx="5664708" cy="658368"/>
+            <a:ext cx="5179161" cy="658368"/>
           </a:xfrm>
           <a:prstGeom prst="rect">
             <a:avLst/>
@@ -18226,7 +18226,7 @@
         </p:nvSpPr>
         <p:spPr>
           <a:xfrm>
-            <a:off x="6121908" y="2240280"/>
+            <a:off x="5636361" y="2240280"/>
             <a:ext cx="731520" cy="365760"/>
           </a:xfrm>
           <a:prstGeom prst="rect">
@@ -18248,7 +18248,7 @@
                 </a:solidFill>
                 <a:latin typeface="Calibri"/>
               </a:rPr>
-              <a:t>10.5%</a:t>
+              <a:t>9.6%</a:t>
             </a:r>
           </a:p>
         </p:txBody>
@@ -18297,7 +18297,7 @@
         </p:nvSpPr>
         <p:spPr>
           <a:xfrm>
-            <a:off x="6944868" y="2167128"/>
+            <a:off x="6459321" y="2167128"/>
             <a:ext cx="5029200" cy="502920"/>
           </a:xfrm>
           <a:prstGeom prst="rect">
@@ -18320,7 +18320,7 @@
                 <a:latin typeface="Calibri"/>
               </a:rPr>
               <a:t>Local de moradia explica
-54% do gap bruto</a:t>
+52% do gap bruto</a:t>
             </a:r>
           </a:p>
         </p:txBody>
@@ -18334,7 +18334,7 @@
         <p:spPr>
           <a:xfrm>
             <a:off x="365760" y="2962656"/>
-            <a:ext cx="5125212" cy="658368"/>
+            <a:ext cx="5233111" cy="658368"/>
           </a:xfrm>
           <a:prstGeom prst="rect">
             <a:avLst/>
@@ -18374,7 +18374,7 @@
         </p:nvSpPr>
         <p:spPr>
           <a:xfrm>
-            <a:off x="5582412" y="3127248"/>
+            <a:off x="5690311" y="3127248"/>
             <a:ext cx="731520" cy="365760"/>
           </a:xfrm>
           <a:prstGeom prst="rect">
@@ -18396,7 +18396,7 @@
                 </a:solidFill>
                 <a:latin typeface="Calibri"/>
               </a:rPr>
-              <a:t>9.5%</a:t>
+              <a:t>9.7%</a:t>
             </a:r>
           </a:p>
         </p:txBody>
@@ -18445,7 +18445,7 @@
         </p:nvSpPr>
         <p:spPr>
           <a:xfrm>
-            <a:off x="6405372" y="3054096"/>
+            <a:off x="6513271" y="3054096"/>
             <a:ext cx="5029200" cy="502920"/>
           </a:xfrm>
           <a:prstGeom prst="rect">
@@ -18482,7 +18482,7 @@
         <p:spPr>
           <a:xfrm>
             <a:off x="365760" y="3849624"/>
-            <a:ext cx="2211933" cy="658368"/>
+            <a:ext cx="1888235" cy="658368"/>
           </a:xfrm>
           <a:prstGeom prst="rect">
             <a:avLst/>
@@ -18522,7 +18522,7 @@
         </p:nvSpPr>
         <p:spPr>
           <a:xfrm>
-            <a:off x="2669133" y="4014216"/>
+            <a:off x="2345436" y="4014216"/>
             <a:ext cx="731520" cy="365760"/>
           </a:xfrm>
           <a:prstGeom prst="rect">
@@ -18544,7 +18544,7 @@
                 </a:solidFill>
                 <a:latin typeface="Calibri"/>
               </a:rPr>
-              <a:t>4.1%</a:t>
+              <a:t>3.5%</a:t>
             </a:r>
           </a:p>
         </p:txBody>
@@ -18593,7 +18593,7 @@
         </p:nvSpPr>
         <p:spPr>
           <a:xfrm>
-            <a:off x="3492093" y="3941064"/>
+            <a:off x="3168396" y="3941064"/>
             <a:ext cx="5029200" cy="502920"/>
           </a:xfrm>
           <a:prstGeom prst="rect">
@@ -18616,7 +18616,7 @@
                 <a:latin typeface="Calibri"/>
               </a:rPr>
               <a:t>CBO + formalidade + horas
-explicam mais 20,5%</a:t>
+explicam mais 18,1%</a:t>
             </a:r>
           </a:p>
         </p:txBody>
@@ -18630,7 +18630,7 @@
         <p:spPr>
           <a:xfrm>
             <a:off x="365760" y="4736592"/>
-            <a:ext cx="2913278" cy="658368"/>
+            <a:ext cx="3344875" cy="658368"/>
           </a:xfrm>
           <a:prstGeom prst="rect">
             <a:avLst/>
@@ -18670,7 +18670,7 @@
         </p:nvSpPr>
         <p:spPr>
           <a:xfrm>
-            <a:off x="3370478" y="4901184"/>
+            <a:off x="3802075" y="4901184"/>
             <a:ext cx="731520" cy="365760"/>
           </a:xfrm>
           <a:prstGeom prst="rect">
@@ -18692,7 +18692,7 @@
                 </a:solidFill>
                 <a:latin typeface="Calibri"/>
               </a:rPr>
-              <a:t>5.4%</a:t>
+              <a:t>6.2%</a:t>
             </a:r>
           </a:p>
         </p:txBody>
@@ -18741,7 +18741,7 @@
         </p:nvSpPr>
         <p:spPr>
           <a:xfrm>
-            <a:off x="4193438" y="4828032"/>
+            <a:off x="4625035" y="4828032"/>
             <a:ext cx="5029200" cy="502920"/>
           </a:xfrm>
           <a:prstGeom prst="rect">
@@ -18844,7 +18844,7 @@
                 </a:solidFill>
                 <a:latin typeface="Calibri"/>
               </a:rPr>
-              <a:t>Achado central: 74,5% do gap é explicado por mediação contextual (UPA) e ocupacional — mas 5,4% persiste como discriminação de remuneração pura.</a:t>
+              <a:t>Achado central: 70,0% do gap é explicado por mediação contextual (UPA) e ocupacional — mas 6,2% persiste como discriminação de remuneração pura.</a:t>
             </a:r>
           </a:p>
         </p:txBody>
@@ -19452,7 +19452,7 @@
                 </a:solidFill>
                 <a:latin typeface="Calibri"/>
               </a:rPr>
-              <a:t>Gap total 52,6% | 84% explicado por diferenças nas características dos trabalhadores</a:t>
+              <a:t>Gap total 53,0% | 84% explicado por diferenças nas características dos trabalhadores</a:t>
             </a:r>
           </a:p>
         </p:txBody>

--- a/apresentacao_tcc.pptx
+++ b/apresentacao_tcc.pptx
@@ -3964,7 +3964,7 @@
                 </a:solidFill>
                 <a:latin typeface="Calibri"/>
               </a:rPr>
-              <a:t>7. Logit Multinível — Gap de Oportunidades Racial</a:t>
+              <a:t>9. Logit Multinível — Gap de Oportunidades Racial</a:t>
             </a:r>
           </a:p>
         </p:txBody>
@@ -4807,7 +4807,7 @@
                 </a:solidFill>
                 <a:latin typeface="Calibri"/>
               </a:rPr>
-              <a:t>8. Regressão Quantílica — Formalização do Glass Ceiling</a:t>
+              <a:t>10. Regressão Quantílica — Formalização do Glass Ceiling</a:t>
             </a:r>
           </a:p>
         </p:txBody>
@@ -5369,7 +5369,7 @@
                 </a:solidFill>
                 <a:latin typeface="Calibri"/>
               </a:rPr>
-              <a:t>12. RIF-OB — Sticky Floor Discriminatório vs. Glass Ceiling por Dotações</a:t>
+              <a:t>11. RIF-OB — Sticky Floor Discriminatório vs. Glass Ceiling por Dotações</a:t>
             </a:r>
           </a:p>
         </p:txBody>
@@ -6550,7 +6550,7 @@
                 </a:solidFill>
                 <a:latin typeface="Calibri"/>
               </a:rPr>
-              <a:t>13. Interseccionalidade — OB em 4 Grupos (Crenshaw, 1989)</a:t>
+              <a:t>12. Interseccionalidade — OB em 4 Grupos (Crenshaw, 1989)</a:t>
             </a:r>
           </a:p>
         </p:txBody>
@@ -7403,7 +7403,7 @@
                 </a:solidFill>
                 <a:latin typeface="Calibri"/>
               </a:rPr>
-              <a:t>14. Sensibilidade — Konfound, E-values e Oster Bounds</a:t>
+              <a:t>13. Sensibilidade — Konfound, E-values e Oster Bounds</a:t>
             </a:r>
           </a:p>
         </p:txBody>
@@ -7912,7 +7912,7 @@
                 </a:solidFill>
                 <a:latin typeface="Calibri"/>
               </a:rPr>
-              <a:t>E ≥ 2,17× (M1)  |  E ≥ 2,04× (M2)  para anular OR = 0,704 / 0,741</a:t>
+              <a:t>E ≥ 2,17× (M1)  |  E ≥ 2,04× (M2)  para anular OR = 0,704 / 0,747</a:t>
             </a:r>
           </a:p>
         </p:txBody>
@@ -8302,7 +8302,7 @@
                 </a:solidFill>
                 <a:latin typeface="Calibri"/>
               </a:rPr>
-              <a:t>15. Análises Temporais e Seleção — Chow, Heckman e Event Study COVID</a:t>
+              <a:t>14. Análises Temporais e Seleção — Chow, Heckman e Event Study COVID</a:t>
             </a:r>
           </a:p>
         </p:txBody>
@@ -9092,7 +9092,7 @@
                 </a:solidFill>
                 <a:latin typeface="Calibri"/>
               </a:rPr>
-              <a:t>9. ML/SHAP — O Que Mais Determina a Renda?</a:t>
+              <a:t>15. ML/SHAP — O Que Mais Determina a Renda?</a:t>
             </a:r>
           </a:p>
         </p:txBody>
@@ -10316,7 +10316,7 @@
                 </a:solidFill>
                 <a:latin typeface="Calibri"/>
               </a:rPr>
-              <a:t>10. Análise de Redes Sociais — Capital Social e Mobilidade</a:t>
+              <a:t>16. Análise de Redes Sociais — Capital Social e Mobilidade</a:t>
             </a:r>
           </a:p>
         </p:txBody>
@@ -10843,7 +10843,7 @@
                 </a:solidFill>
                 <a:latin typeface="Calibri"/>
               </a:rPr>
-              <a:t>11. Estado e Desigualdade — H1 / H2 / H3</a:t>
+              <a:t>17. Estado e Desigualdade — H1 / H2 / H3</a:t>
             </a:r>
           </a:p>
         </p:txBody>
@@ -11811,7 +11811,7 @@
                 </a:solidFill>
                 <a:latin typeface="Calibri"/>
               </a:rPr>
-              <a:t>12. Renda Real, Armadilha e Inclusão — H4 / H5</a:t>
+              <a:t>18. Renda Real, Armadilha e Inclusão — H4 / H5</a:t>
             </a:r>
           </a:p>
         </p:txBody>
@@ -13432,7 +13432,7 @@
                 </a:solidFill>
                 <a:latin typeface="Calibri"/>
               </a:rPr>
-              <a:t>13. Por Que Esses Modelos? — Justificação Estatística</a:t>
+              <a:t>19. Por Que Esses Modelos? — Justificação Estatística</a:t>
             </a:r>
           </a:p>
         </p:txBody>
@@ -14268,7 +14268,7 @@
                 </a:solidFill>
                 <a:latin typeface="Calibri"/>
               </a:rPr>
-              <a:t>14. Síntese — Triângulo de Evidências</a:t>
+              <a:t>20. Síntese — Triângulo de Evidências</a:t>
             </a:r>
           </a:p>
         </p:txBody>
@@ -15265,7 +15265,7 @@
                 </a:solidFill>
                 <a:latin typeface="Calibri"/>
               </a:rPr>
-              <a:t>22. Pesquisa Operacional — Priorização Multicritério Anti-Discriminação</a:t>
+              <a:t>21. Pesquisa Operacional — Priorização Multicritério Anti-Discriminação</a:t>
             </a:r>
           </a:p>
         </p:txBody>
@@ -16540,7 +16540,7 @@
                 </a:solidFill>
                 <a:latin typeface="Calibri"/>
               </a:rPr>
-              <a:t>15. Implicações de Política</a:t>
+              <a:t>22. Implicações de Política</a:t>
             </a:r>
           </a:p>
         </p:txBody>
@@ -17502,7 +17502,7 @@
                 </a:solidFill>
                 <a:latin typeface="Calibri"/>
               </a:rPr>
-              <a:t>16. Limitações e Agenda Futura</a:t>
+              <a:t>23. Limitações e Agenda Futura</a:t>
             </a:r>
           </a:p>
         </p:txBody>
@@ -20337,7 +20337,7 @@
                 </a:solidFill>
                 <a:latin typeface="Calibri"/>
               </a:rPr>
-              <a:t>3b. Análise Descritiva — A Desigualdade nos Dados</a:t>
+              <a:t>3. Análise Descritiva — A Desigualdade nos Dados</a:t>
             </a:r>
           </a:p>
         </p:txBody>
@@ -21467,7 +21467,7 @@
                 </a:solidFill>
                 <a:latin typeface="Calibri"/>
               </a:rPr>
-              <a:t>3. Arquitetura Metodológica</a:t>
+              <a:t>4. Arquitetura Metodológica</a:t>
             </a:r>
           </a:p>
         </p:txBody>
@@ -22992,7 +22992,7 @@
                 </a:solidFill>
                 <a:latin typeface="Calibri"/>
               </a:rPr>
-              <a:t>4. HLM — Decomposição do Gap em Camadas</a:t>
+              <a:t>5. HLM — Decomposição do Gap em Camadas</a:t>
             </a:r>
           </a:p>
         </p:txBody>
@@ -24052,7 +24052,7 @@
                 </a:solidFill>
                 <a:latin typeface="Calibri"/>
               </a:rPr>
-              <a:t>5. Composição Ocupacional — Onde Estão Negros e Brancos?</a:t>
+              <a:t>6. Composição Ocupacional — Onde Estão Negros e Brancos?</a:t>
             </a:r>
           </a:p>
         </p:txBody>
@@ -24420,7 +24420,7 @@
                 </a:solidFill>
                 <a:latin typeface="Calibri"/>
               </a:rPr>
-              <a:t>6. Oaxaca-Blinder — Onde Opera a Discriminação?</a:t>
+              <a:t>7. Oaxaca-Blinder — Onde Opera a Discriminação?</a:t>
             </a:r>
           </a:p>
         </p:txBody>
@@ -24934,7 +24934,7 @@
                 </a:solidFill>
                 <a:latin typeface="Calibri"/>
               </a:rPr>
-              <a:t>7b. Gap por Subgrupo e Ciclo de Vida</a:t>
+              <a:t>8. Gap por Subgrupo e Ciclo de Vida</a:t>
             </a:r>
           </a:p>
         </p:txBody>

--- a/apresentacao_tcc.pptx
+++ b/apresentacao_tcc.pptx
@@ -3999,7 +3999,7 @@
                 </a:solidFill>
                 <a:latin typeface="Calibri"/>
               </a:rPr>
-              <a:t>GLMM lme4 com efeito aleatório de UPA — discriminação de ACESSO confirmada (n=2,4M, 39,8k UPAs)</a:t>
+              <a:t>GLMM lme4 com efeito aleatório de UPA — discriminação de ACESSO confirmada (n=7,7M, 40,9k UPAs)</a:t>
             </a:r>
           </a:p>
         </p:txBody>
@@ -4138,7 +4138,7 @@
                 </a:solidFill>
                 <a:latin typeface="Calibri"/>
               </a:rPr>
-              <a:t>OR = 0,704</a:t>
+              <a:t>OR = 0,674</a:t>
             </a:r>
           </a:p>
         </p:txBody>
@@ -4254,7 +4254,7 @@
                 </a:solidFill>
                 <a:latin typeface="Calibri"/>
               </a:rPr>
-              <a:t>OR = 0,747</a:t>
+              <a:t>OR = 0,691</a:t>
             </a:r>
           </a:p>
         </p:txBody>
@@ -4370,7 +4370,7 @@
                 </a:solidFill>
                 <a:latin typeface="Calibri"/>
               </a:rPr>
-              <a:t>AME = −1,30 p.p.</a:t>
+              <a:t>AME = −5,16 p.p.</a:t>
             </a:r>
           </a:p>
         </p:txBody>
@@ -4486,7 +4486,7 @@
                 </a:solidFill>
                 <a:latin typeface="Calibri"/>
               </a:rPr>
-              <a:t>AME = −1,07 p.p.</a:t>
+              <a:t>AME = −4,84 p.p.</a:t>
             </a:r>
           </a:p>
         </p:txBody>
@@ -4602,7 +4602,7 @@
                 </a:solidFill>
                 <a:latin typeface="Calibri"/>
               </a:rPr>
-              <a:t>Mesmo com educação, sexo, idade e local de moradia IDÊNTICOS, negros têm 25,3% menor odds de estar em ocupação qualificada (OR=0,747 GLMM M2).</a:t>
+              <a:t>Mesmo com educação, sexo, idade e local de moradia IDÊNTICOS, negros têm 30,9% menor odds de estar em ocupação qualificada (OR=0,691 GLMM M2).</a:t>
             </a:r>
           </a:p>
         </p:txBody>
@@ -7877,7 +7877,7 @@
                 </a:solidFill>
                 <a:latin typeface="Calibri"/>
               </a:rPr>
-              <a:t>E-values GLMM (VanderWeele &amp; Ding, 2017)</a:t>
+              <a:t>E-values GLMM lme4 (VanderWeele &amp; Ding, 2017)</a:t>
             </a:r>
           </a:p>
         </p:txBody>
@@ -7912,7 +7912,7 @@
                 </a:solidFill>
                 <a:latin typeface="Calibri"/>
               </a:rPr>
-              <a:t>E ≥ 2,17× (M1)  |  E ≥ 2,04× (M2)  para anular OR = 0,704 / 0,747</a:t>
+              <a:t>E ≥ 2,33× (M1)  |  E ≥ 2,25× (M2)  para anular OR = 0,674 / 0,691</a:t>
             </a:r>
           </a:p>
         </p:txBody>
@@ -7947,7 +7947,7 @@
                 </a:solidFill>
                 <a:latin typeface="Calibri"/>
               </a:rPr>
-              <a:t>Confounder precisaria ter associação ≥ 2× com raça E com ocupação — implausível</a:t>
+              <a:t>Confounder precisaria ter associação ≥ 2,3× com raça E com ocupação — implausível</a:t>
             </a:r>
           </a:p>
         </p:txBody>
@@ -14460,7 +14460,7 @@
                 </a:solidFill>
                 <a:latin typeface="Calibri"/>
               </a:rPr>
-              <a:t>• GLMM: OR=0,747 para ocp. qualificada</a:t>
+              <a:t>• GLMM: OR=0,691 para ocp. qualificada</a:t>
             </a:r>
           </a:p>
         </p:txBody>
@@ -14495,7 +14495,7 @@
                 </a:solidFill>
                 <a:latin typeface="Calibri"/>
               </a:rPr>
-              <a:t>• AME=−1,07 p.p. residual (M2)</a:t>
+              <a:t>• AME=−4,84 p.p. residual (M2)</a:t>
             </a:r>
           </a:p>
         </p:txBody>
@@ -15060,7 +15060,7 @@
                 </a:solidFill>
                 <a:latin typeface="Calibri"/>
               </a:rPr>
-              <a:t>Oaxaca-Blinder une os três vértices: 84% do gap é de ACESSO (dotações) | 16% de REMUNERAÇÃO (retornos) | SNA explica por que o acesso é estruturalmente negado  |  GLMM: OR=0,747</a:t>
+              <a:t>Oaxaca-Blinder une os três vértices: 84% do gap é de ACESSO (dotações) | 16% de REMUNERAÇÃO (retornos) | SNA explica por que o acesso é estruturalmente negado  |  GLMM: OR=0,691</a:t>
             </a:r>
           </a:p>
         </p:txBody>
@@ -17670,7 +17670,7 @@
                 </a:solidFill>
                 <a:latin typeface="Calibri"/>
               </a:rPr>
-              <a:t>GLMM estimado na população completa via lme4::glmer (nAGQ=0, bobyqa, n=2,4M, 39,8k UPAs) — M3 com inclinação aleatória de negro não estimado por custo computacional</a:t>
+              <a:t>GLMM estimado na PEA completa via lme4::glmer (nAGQ=0, bobyqa, n=7,7M, 40,9k UPAs) — M3 com inclinação aleatória de negro não estimado por custo computacional</a:t>
             </a:r>
           </a:p>
           <a:p>
@@ -18436,7 +18436,7 @@
                 </a:solidFill>
                 <a:latin typeface="Calibri"/>
               </a:rPr>
-              <a:t>OR=0,747</a:t>
+              <a:t>OR=0,691</a:t>
             </a:r>
           </a:p>
         </p:txBody>
@@ -18748,7 +18748,7 @@
                 </a:solidFill>
                 <a:latin typeface="Calibri"/>
               </a:rPr>
-              <a:t>2. A discriminação opera em dois estágios independentes: barreiras de ACESSO a ocupações qualificadas (GLMM: OR=0,747, AME=−1,07 p.p.) e discriminação de REMUNERAÇÃO dentro das mesmas funções (HLM M4: 6,2%).</a:t>
+              <a:t>2. A discriminação opera em dois estágios independentes: barreiras de ACESSO a ocupações qualificadas (GLMM: OR=0,691, AME=−4,84 p.p.) e discriminação de REMUNERAÇÃO dentro das mesmas funções (HLM M4: 6,2%).</a:t>
             </a:r>
           </a:p>
         </p:txBody>

--- a/apresentacao_tcc.pptx
+++ b/apresentacao_tcc.pptx
@@ -15509,7 +15509,7 @@
                 </a:solidFill>
                 <a:latin typeface="Calibri"/>
               </a:rPr>
-              <a:t>CC = 0,799</a:t>
+              <a:t>CC = 0,835</a:t>
             </a:r>
           </a:p>
         </p:txBody>
@@ -15659,7 +15659,7 @@
                 </a:solidFill>
                 <a:latin typeface="Calibri"/>
               </a:rPr>
-              <a:t>CC = 0,558</a:t>
+              <a:t>CC = 0,588</a:t>
             </a:r>
           </a:p>
         </p:txBody>
@@ -15809,7 +15809,7 @@
                 </a:solidFill>
                 <a:latin typeface="Calibri"/>
               </a:rPr>
-              <a:t>CC = 0,388</a:t>
+              <a:t>CC = 0,396</a:t>
             </a:r>
           </a:p>
         </p:txBody>
@@ -15959,7 +15959,7 @@
                 </a:solidFill>
                 <a:latin typeface="Calibri"/>
               </a:rPr>
-              <a:t>CC = 0,324</a:t>
+              <a:t>CC = 0,342</a:t>
             </a:r>
           </a:p>
         </p:txBody>
@@ -16109,7 +16109,7 @@
                 </a:solidFill>
                 <a:latin typeface="Calibri"/>
               </a:rPr>
-              <a:t>CC = 0,241</a:t>
+              <a:t>CC = 0,270</a:t>
             </a:r>
           </a:p>
         </p:txBody>
@@ -16259,7 +16259,7 @@
                 </a:solidFill>
                 <a:latin typeface="Calibri"/>
               </a:rPr>
-              <a:t>CC = 0,109</a:t>
+              <a:t>CC = 0,081</a:t>
             </a:r>
           </a:p>
         </p:txBody>
@@ -16335,7 +16335,7 @@
                 </a:solidFill>
                 <a:latin typeface="Calibri"/>
               </a:rPr>
-              <a:t>84% do gap é de ACESSO → P1 (Cotas CBO) lidera com CC=0,799 — 2× superior ao 2º colocado.  Pareto (λ=0,5): alocação ótima = P1+P5 (cotas + mentoria).  PL-1 (orçamento B=5): redução projetada de 24% do gap bruto.</a:t>
+              <a:t>84% do gap é de ACESSO → P1 (Cotas CBO) lidera com CC=0,835 — 2,1× superior ao 2º colocado.  Pareto (λ=0,5): alocação ótima = P1+P5 (cotas + mentoria).  PL-1 (orçamento B=5): redução projetada de 25% do gap bruto.</a:t>
             </a:r>
           </a:p>
         </p:txBody>

--- a/apresentacao_tcc.pptx
+++ b/apresentacao_tcc.pptx
@@ -7912,7 +7912,7 @@
                 </a:solidFill>
                 <a:latin typeface="Calibri"/>
               </a:rPr>
-              <a:t>E ≥ 2,33× (M1)  |  E ≥ 2,25× (M2)  para anular OR = 0,674 / 0,691</a:t>
+              <a:t>E ≥ 2,331× (M1)  |  E ≥ 2,254× (M2)  para anular OR = 0,674 / 0,691</a:t>
             </a:r>
           </a:p>
         </p:txBody>
@@ -16335,7 +16335,7 @@
                 </a:solidFill>
                 <a:latin typeface="Calibri"/>
               </a:rPr>
-              <a:t>84% do gap é de ACESSO → P1 (Cotas CBO) lidera com CC=0,835 — 2,1× superior ao 2º colocado.  Pareto (λ=0,5): alocação ótima = P1+P5 (cotas + mentoria).  PL-1 (orçamento B=5): redução projetada de 25% do gap bruto.</a:t>
+              <a:t>84% do gap é de ACESSO → P1 (Cotas CBO) lidera com CC=0,835 — 2,1× superior ao 2º colocado.  Pareto (λ=0,5): alocação ótima = P1+P5 (cotas + mentoria).  PL-1 (orçamento B=5): redução projetada de 25,1% do gap bruto.</a:t>
             </a:r>
           </a:p>
         </p:txBody>

--- a/apresentacao_tcc.pptx
+++ b/apresentacao_tcc.pptx
@@ -30,6 +30,7 @@
     <p:sldId id="278" r:id="rId29"/>
     <p:sldId id="279" r:id="rId30"/>
     <p:sldId id="280" r:id="rId31"/>
+    <p:sldId id="281" r:id="rId32"/>
   </p:sldIdLst>
   <p:sldSz cx="12188952" cy="6858000" type="screen4x3"/>
   <p:notesSz cx="6858000" cy="9144000"/>
@@ -10316,7 +10317,7 @@
                 </a:solidFill>
                 <a:latin typeface="Calibri"/>
               </a:rPr>
-              <a:t>16. Análise de Redes Sociais — Capital Social e Mobilidade</a:t>
+              <a:t>16. Clustering Socioeconômico — K-Means (k=3) | N=7.694.198</a:t>
             </a:r>
           </a:p>
         </p:txBody>
@@ -10351,14 +10352,14 @@
                 </a:solidFill>
                 <a:latin typeface="Calibri"/>
               </a:rPr>
-              <a:t>Betweenness centrality nula para negros em todos os níveis educacionais</a:t>
+              <a:t>MiniBatchKMeans | 12 dimensões | k=3 adotado por interpretabilidade (k=2 trivialmente binário)</a:t>
             </a:r>
           </a:p>
         </p:txBody>
       </p:sp>
       <p:pic>
         <p:nvPicPr>
-          <p:cNvPr id="5" name="Picture 4" descr="sna_rede_demografica.png"/>
+          <p:cNvPr id="5" name="Picture 4" descr="kmeans_perfis_k3.png"/>
           <p:cNvPicPr>
             <a:picLocks noChangeAspect="1"/>
           </p:cNvPicPr>
@@ -10373,218 +10374,55 @@
         <p:spPr>
           <a:xfrm>
             <a:off x="274320" y="1097280"/>
-            <a:ext cx="5943600" cy="4445213"/>
+            <a:ext cx="5669280" cy="2021041"/>
           </a:xfrm>
           <a:prstGeom prst="rect">
             <a:avLst/>
           </a:prstGeom>
         </p:spPr>
       </p:pic>
-      <p:sp>
-        <p:nvSpPr>
-          <p:cNvPr id="6" name="TextBox 5"/>
-          <p:cNvSpPr txBox="1"/>
-          <p:nvPr/>
-        </p:nvSpPr>
-        <p:spPr>
-          <a:xfrm>
-            <a:off x="6583680" y="1097280"/>
-            <a:ext cx="5394960" cy="365760"/>
-          </a:xfrm>
-          <a:prstGeom prst="rect">
-            <a:avLst/>
-          </a:prstGeom>
-          <a:noFill/>
-        </p:spPr>
-        <p:txBody>
-          <a:bodyPr wrap="square">
-            <a:spAutoFit/>
-          </a:bodyPr>
-          <a:lstStyle/>
-          <a:p>
-            <a:pPr algn="l"/>
-            <a:r>
-              <a:rPr sz="1600" b="1" i="0">
-                <a:solidFill>
-                  <a:srgbClr val="1F3864"/>
-                </a:solidFill>
-                <a:latin typeface="Calibri"/>
-              </a:rPr>
-              <a:t>O que é betweenness centrality?</a:t>
-            </a:r>
-          </a:p>
-        </p:txBody>
-      </p:sp>
-      <p:sp>
-        <p:nvSpPr>
-          <p:cNvPr id="7" name="TextBox 6"/>
-          <p:cNvSpPr txBox="1"/>
-          <p:nvPr/>
-        </p:nvSpPr>
-        <p:spPr>
-          <a:xfrm>
-            <a:off x="6583680" y="1554480"/>
-            <a:ext cx="5394960" cy="3200400"/>
-          </a:xfrm>
-          <a:prstGeom prst="rect">
-            <a:avLst/>
-          </a:prstGeom>
-          <a:noFill/>
-        </p:spPr>
-        <p:txBody>
-          <a:bodyPr wrap="square">
-            <a:spAutoFit/>
-          </a:bodyPr>
-          <a:lstStyle/>
-          <a:p>
-            <a:pPr>
-              <a:spcAft>
-                <a:spcPts val="400"/>
-              </a:spcAft>
-            </a:pPr>
-            <a:r>
-              <a:rPr sz="1300" b="1">
-                <a:solidFill>
-                  <a:srgbClr val="1F3864"/>
-                </a:solidFill>
-                <a:latin typeface="Calibri"/>
-              </a:rPr>
-              <a:t>▸  </a:t>
-            </a:r>
-            <a:r>
-              <a:rPr sz="1300">
-                <a:solidFill>
-                  <a:srgbClr val="212121"/>
-                </a:solidFill>
-                <a:latin typeface="Calibri"/>
-              </a:rPr>
-              <a:t>Mede quem 'conecta' grupos distintos na rede</a:t>
-            </a:r>
-          </a:p>
-          <a:p>
-            <a:pPr>
-              <a:spcAft>
-                <a:spcPts val="400"/>
-              </a:spcAft>
-            </a:pPr>
-            <a:r>
-              <a:rPr sz="1300" b="1">
-                <a:solidFill>
-                  <a:srgbClr val="1F3864"/>
-                </a:solidFill>
-                <a:latin typeface="Calibri"/>
-              </a:rPr>
-              <a:t>▸  </a:t>
-            </a:r>
-            <a:r>
-              <a:rPr sz="1300">
-                <a:solidFill>
-                  <a:srgbClr val="212121"/>
-                </a:solidFill>
-                <a:latin typeface="Calibri"/>
-              </a:rPr>
-              <a:t>Alta betweenness = broker = acesso antecipado a vagas, mentoria, promoções (Burt, 2004)</a:t>
-            </a:r>
-          </a:p>
-          <a:p>
-            <a:pPr>
-              <a:spcAft>
-                <a:spcPts val="400"/>
-              </a:spcAft>
-            </a:pPr>
-            <a:r>
-              <a:rPr sz="1300" b="1">
-                <a:solidFill>
-                  <a:srgbClr val="1F3864"/>
-                </a:solidFill>
-                <a:latin typeface="Calibri"/>
-              </a:rPr>
-              <a:t>▸  </a:t>
-            </a:r>
-            <a:r>
-              <a:rPr sz="1300">
-                <a:solidFill>
-                  <a:srgbClr val="212121"/>
-                </a:solidFill>
-                <a:latin typeface="Calibri"/>
-              </a:rPr>
-              <a:t>BRANCOS: betweenness elevada em todos os níveis educacionais</a:t>
-            </a:r>
-          </a:p>
-          <a:p>
-            <a:pPr>
-              <a:spcAft>
-                <a:spcPts val="400"/>
-              </a:spcAft>
-            </a:pPr>
-            <a:r>
-              <a:rPr sz="1300" b="1">
-                <a:solidFill>
-                  <a:srgbClr val="1F3864"/>
-                </a:solidFill>
-                <a:latin typeface="Calibri"/>
-              </a:rPr>
-              <a:t>▸  </a:t>
-            </a:r>
-            <a:r>
-              <a:rPr sz="1300">
-                <a:solidFill>
-                  <a:srgbClr val="212121"/>
-                </a:solidFill>
-                <a:latin typeface="Calibri"/>
-              </a:rPr>
-              <a:t>NEGROS: betweenness = 0 mesmo com pós-graduação</a:t>
-            </a:r>
-          </a:p>
-          <a:p>
-            <a:pPr>
-              <a:spcAft>
-                <a:spcPts val="400"/>
-              </a:spcAft>
-            </a:pPr>
-            <a:r>
-              <a:rPr sz="1300" b="1">
-                <a:solidFill>
-                  <a:srgbClr val="1F3864"/>
-                </a:solidFill>
-                <a:latin typeface="Calibri"/>
-              </a:rPr>
-              <a:t>▸  </a:t>
-            </a:r>
-            <a:r>
-              <a:rPr sz="1300">
-                <a:solidFill>
-                  <a:srgbClr val="212121"/>
-                </a:solidFill>
-                <a:latin typeface="Calibri"/>
-              </a:rPr>
-              <a:t>Implicação: credenciais educacionais de negros valem menos porque falta acesso às redes de conversão</a:t>
-            </a:r>
-          </a:p>
-        </p:txBody>
-      </p:sp>
-      <p:sp>
-        <p:nvSpPr>
-          <p:cNvPr id="8" name="Rectangle 7"/>
+      <p:pic>
+        <p:nvPicPr>
+          <p:cNvPr id="6" name="Picture 5" descr="kmeans_gap_racial_k3.png"/>
+          <p:cNvPicPr>
+            <a:picLocks noChangeAspect="1"/>
+          </p:cNvPicPr>
+          <p:nvPr/>
+        </p:nvPicPr>
+        <p:blipFill>
+          <a:blip r:embed="rId3"/>
+          <a:stretch>
+            <a:fillRect/>
+          </a:stretch>
+        </p:blipFill>
+        <p:spPr>
+          <a:xfrm>
+            <a:off x="6080760" y="1097280"/>
+            <a:ext cx="5852160" cy="2882701"/>
+          </a:xfrm>
+          <a:prstGeom prst="rect">
+            <a:avLst/>
+          </a:prstGeom>
+        </p:spPr>
+      </p:pic>
+      <p:sp>
+        <p:nvSpPr>
+          <p:cNvPr id="7" name="Rectangle 6"/>
           <p:cNvSpPr/>
           <p:nvPr/>
         </p:nvSpPr>
         <p:spPr>
           <a:xfrm>
-            <a:off x="6583680" y="4983480"/>
-            <a:ext cx="5394960" cy="777240"/>
+            <a:off x="274320" y="4206240"/>
+            <a:ext cx="777240" cy="384048"/>
           </a:xfrm>
           <a:prstGeom prst="rect">
             <a:avLst/>
           </a:prstGeom>
           <a:solidFill>
-            <a:srgbClr val="E3F2FD"/>
+            <a:srgbClr val="1F3864"/>
           </a:solidFill>
-          <a:ln w="10160">
-            <a:solidFill>
-              <a:srgbClr val="1F3864"/>
-            </a:solidFill>
-          </a:ln>
+          <a:ln/>
         </p:spPr>
         <p:style>
           <a:lnRef idx="1">
@@ -10610,49 +10448,49 @@
       </p:sp>
       <p:sp>
         <p:nvSpPr>
-          <p:cNvPr id="9" name="TextBox 8"/>
-          <p:cNvSpPr txBox="1"/>
-          <p:nvPr/>
-        </p:nvSpPr>
-        <p:spPr>
-          <a:xfrm>
-            <a:off x="6720840" y="5029200"/>
-            <a:ext cx="5120640" cy="731520"/>
-          </a:xfrm>
-          <a:prstGeom prst="rect">
-            <a:avLst/>
-          </a:prstGeom>
-          <a:noFill/>
-        </p:spPr>
-        <p:txBody>
-          <a:bodyPr wrap="square">
-            <a:spAutoFit/>
-          </a:bodyPr>
-          <a:lstStyle/>
-          <a:p>
-            <a:pPr algn="l"/>
-            <a:r>
-              <a:rPr sz="1200" b="0" i="1">
-                <a:solidFill>
-                  <a:srgbClr val="1F3864"/>
-                </a:solidFill>
-                <a:latin typeface="Calibri"/>
-              </a:rPr>
-              <a:t>"Negros enfrentam um duplo obstáculo ao retorno educacional: o gap direto mensurado pelo HLM e a exclusão das redes que convertem diplomas em empregos."</a:t>
-            </a:r>
-          </a:p>
-        </p:txBody>
-      </p:sp>
-      <p:sp>
-        <p:nvSpPr>
-          <p:cNvPr id="10" name="Rectangle 9"/>
+          <p:cNvPr id="8" name="TextBox 7"/>
+          <p:cNvSpPr txBox="1"/>
+          <p:nvPr/>
+        </p:nvSpPr>
+        <p:spPr>
+          <a:xfrm>
+            <a:off x="310896" y="4242816"/>
+            <a:ext cx="704088" cy="310896"/>
+          </a:xfrm>
+          <a:prstGeom prst="rect">
+            <a:avLst/>
+          </a:prstGeom>
+          <a:noFill/>
+        </p:spPr>
+        <p:txBody>
+          <a:bodyPr wrap="square">
+            <a:spAutoFit/>
+          </a:bodyPr>
+          <a:lstStyle/>
+          <a:p>
+            <a:pPr algn="ctr"/>
+            <a:r>
+              <a:rPr sz="1000" b="1" i="0">
+                <a:solidFill>
+                  <a:srgbClr val="FFFFFF"/>
+                </a:solidFill>
+                <a:latin typeface="Calibri"/>
+              </a:rPr>
+              <a:t>Cluster</a:t>
+            </a:r>
+          </a:p>
+        </p:txBody>
+      </p:sp>
+      <p:sp>
+        <p:nvSpPr>
+          <p:cNvPr id="9" name="Rectangle 8"/>
           <p:cNvSpPr/>
           <p:nvPr/>
         </p:nvSpPr>
         <p:spPr>
           <a:xfrm>
-            <a:off x="0" y="6601968"/>
-            <a:ext cx="12188952" cy="256032"/>
+            <a:off x="1097280" y="4206240"/>
+            <a:ext cx="1051560" cy="384048"/>
           </a:xfrm>
           <a:prstGeom prst="rect">
             <a:avLst/>
@@ -10686,7 +10524,2223 @@
       </p:sp>
       <p:sp>
         <p:nvSpPr>
-          <p:cNvPr id="11" name="TextBox 10"/>
+          <p:cNvPr id="10" name="TextBox 9"/>
+          <p:cNvSpPr txBox="1"/>
+          <p:nvPr/>
+        </p:nvSpPr>
+        <p:spPr>
+          <a:xfrm>
+            <a:off x="1133856" y="4242816"/>
+            <a:ext cx="978408" cy="310896"/>
+          </a:xfrm>
+          <a:prstGeom prst="rect">
+            <a:avLst/>
+          </a:prstGeom>
+          <a:noFill/>
+        </p:spPr>
+        <p:txBody>
+          <a:bodyPr wrap="square">
+            <a:spAutoFit/>
+          </a:bodyPr>
+          <a:lstStyle/>
+          <a:p>
+            <a:pPr algn="ctr"/>
+            <a:r>
+              <a:rPr sz="1000" b="1" i="0">
+                <a:solidFill>
+                  <a:srgbClr val="FFFFFF"/>
+                </a:solidFill>
+                <a:latin typeface="Calibri"/>
+              </a:rPr>
+              <a:t>N</a:t>
+            </a:r>
+          </a:p>
+        </p:txBody>
+      </p:sp>
+      <p:sp>
+        <p:nvSpPr>
+          <p:cNvPr id="11" name="Rectangle 10"/>
+          <p:cNvSpPr/>
+          <p:nvPr/>
+        </p:nvSpPr>
+        <p:spPr>
+          <a:xfrm>
+            <a:off x="2240280" y="4206240"/>
+            <a:ext cx="822960" cy="384048"/>
+          </a:xfrm>
+          <a:prstGeom prst="rect">
+            <a:avLst/>
+          </a:prstGeom>
+          <a:solidFill>
+            <a:srgbClr val="1F3864"/>
+          </a:solidFill>
+          <a:ln/>
+        </p:spPr>
+        <p:style>
+          <a:lnRef idx="1">
+            <a:schemeClr val="accent1"/>
+          </a:lnRef>
+          <a:fillRef idx="3">
+            <a:schemeClr val="accent1"/>
+          </a:fillRef>
+          <a:effectRef idx="2">
+            <a:schemeClr val="accent1"/>
+          </a:effectRef>
+          <a:fontRef idx="minor">
+            <a:schemeClr val="lt1"/>
+          </a:fontRef>
+        </p:style>
+        <p:txBody>
+          <a:bodyPr rtlCol="0" anchor="ctr"/>
+          <a:lstStyle/>
+          <a:p>
+            <a:pPr algn="ctr"/>
+          </a:p>
+        </p:txBody>
+      </p:sp>
+      <p:sp>
+        <p:nvSpPr>
+          <p:cNvPr id="12" name="TextBox 11"/>
+          <p:cNvSpPr txBox="1"/>
+          <p:nvPr/>
+        </p:nvSpPr>
+        <p:spPr>
+          <a:xfrm>
+            <a:off x="2276856" y="4242816"/>
+            <a:ext cx="749808" cy="310896"/>
+          </a:xfrm>
+          <a:prstGeom prst="rect">
+            <a:avLst/>
+          </a:prstGeom>
+          <a:noFill/>
+        </p:spPr>
+        <p:txBody>
+          <a:bodyPr wrap="square">
+            <a:spAutoFit/>
+          </a:bodyPr>
+          <a:lstStyle/>
+          <a:p>
+            <a:pPr algn="ctr"/>
+            <a:r>
+              <a:rPr sz="1000" b="1" i="0">
+                <a:solidFill>
+                  <a:srgbClr val="FFFFFF"/>
+                </a:solidFill>
+                <a:latin typeface="Calibri"/>
+              </a:rPr>
+              <a:t>% total</a:t>
+            </a:r>
+          </a:p>
+        </p:txBody>
+      </p:sp>
+      <p:sp>
+        <p:nvSpPr>
+          <p:cNvPr id="13" name="Rectangle 12"/>
+          <p:cNvSpPr/>
+          <p:nvPr/>
+        </p:nvSpPr>
+        <p:spPr>
+          <a:xfrm>
+            <a:off x="3108960" y="4206240"/>
+            <a:ext cx="777240" cy="384048"/>
+          </a:xfrm>
+          <a:prstGeom prst="rect">
+            <a:avLst/>
+          </a:prstGeom>
+          <a:solidFill>
+            <a:srgbClr val="1F3864"/>
+          </a:solidFill>
+          <a:ln/>
+        </p:spPr>
+        <p:style>
+          <a:lnRef idx="1">
+            <a:schemeClr val="accent1"/>
+          </a:lnRef>
+          <a:fillRef idx="3">
+            <a:schemeClr val="accent1"/>
+          </a:fillRef>
+          <a:effectRef idx="2">
+            <a:schemeClr val="accent1"/>
+          </a:effectRef>
+          <a:fontRef idx="minor">
+            <a:schemeClr val="lt1"/>
+          </a:fontRef>
+        </p:style>
+        <p:txBody>
+          <a:bodyPr rtlCol="0" anchor="ctr"/>
+          <a:lstStyle/>
+          <a:p>
+            <a:pPr algn="ctr"/>
+          </a:p>
+        </p:txBody>
+      </p:sp>
+      <p:sp>
+        <p:nvSpPr>
+          <p:cNvPr id="14" name="TextBox 13"/>
+          <p:cNvSpPr txBox="1"/>
+          <p:nvPr/>
+        </p:nvSpPr>
+        <p:spPr>
+          <a:xfrm>
+            <a:off x="3145536" y="4242816"/>
+            <a:ext cx="704088" cy="310896"/>
+          </a:xfrm>
+          <a:prstGeom prst="rect">
+            <a:avLst/>
+          </a:prstGeom>
+          <a:noFill/>
+        </p:spPr>
+        <p:txBody>
+          <a:bodyPr wrap="square">
+            <a:spAutoFit/>
+          </a:bodyPr>
+          <a:lstStyle/>
+          <a:p>
+            <a:pPr algn="ctr"/>
+            <a:r>
+              <a:rPr sz="1000" b="1" i="0">
+                <a:solidFill>
+                  <a:srgbClr val="FFFFFF"/>
+                </a:solidFill>
+                <a:latin typeface="Calibri"/>
+              </a:rPr>
+              <a:t>% Negro</a:t>
+            </a:r>
+          </a:p>
+        </p:txBody>
+      </p:sp>
+      <p:sp>
+        <p:nvSpPr>
+          <p:cNvPr id="15" name="Rectangle 14"/>
+          <p:cNvSpPr/>
+          <p:nvPr/>
+        </p:nvSpPr>
+        <p:spPr>
+          <a:xfrm>
+            <a:off x="3977639" y="4206240"/>
+            <a:ext cx="777240" cy="384048"/>
+          </a:xfrm>
+          <a:prstGeom prst="rect">
+            <a:avLst/>
+          </a:prstGeom>
+          <a:solidFill>
+            <a:srgbClr val="1F3864"/>
+          </a:solidFill>
+          <a:ln/>
+        </p:spPr>
+        <p:style>
+          <a:lnRef idx="1">
+            <a:schemeClr val="accent1"/>
+          </a:lnRef>
+          <a:fillRef idx="3">
+            <a:schemeClr val="accent1"/>
+          </a:fillRef>
+          <a:effectRef idx="2">
+            <a:schemeClr val="accent1"/>
+          </a:effectRef>
+          <a:fontRef idx="minor">
+            <a:schemeClr val="lt1"/>
+          </a:fontRef>
+        </p:style>
+        <p:txBody>
+          <a:bodyPr rtlCol="0" anchor="ctr"/>
+          <a:lstStyle/>
+          <a:p>
+            <a:pPr algn="ctr"/>
+          </a:p>
+        </p:txBody>
+      </p:sp>
+      <p:sp>
+        <p:nvSpPr>
+          <p:cNvPr id="16" name="TextBox 15"/>
+          <p:cNvSpPr txBox="1"/>
+          <p:nvPr/>
+        </p:nvSpPr>
+        <p:spPr>
+          <a:xfrm>
+            <a:off x="4014215" y="4242816"/>
+            <a:ext cx="704088" cy="310896"/>
+          </a:xfrm>
+          <a:prstGeom prst="rect">
+            <a:avLst/>
+          </a:prstGeom>
+          <a:noFill/>
+        </p:spPr>
+        <p:txBody>
+          <a:bodyPr wrap="square">
+            <a:spAutoFit/>
+          </a:bodyPr>
+          <a:lstStyle/>
+          <a:p>
+            <a:pPr algn="ctr"/>
+            <a:r>
+              <a:rPr sz="1000" b="1" i="0">
+                <a:solidFill>
+                  <a:srgbClr val="FFFFFF"/>
+                </a:solidFill>
+                <a:latin typeface="Calibri"/>
+              </a:rPr>
+              <a:t>% Mulher</a:t>
+            </a:r>
+          </a:p>
+        </p:txBody>
+      </p:sp>
+      <p:sp>
+        <p:nvSpPr>
+          <p:cNvPr id="17" name="Rectangle 16"/>
+          <p:cNvSpPr/>
+          <p:nvPr/>
+        </p:nvSpPr>
+        <p:spPr>
+          <a:xfrm>
+            <a:off x="4892040" y="4206240"/>
+            <a:ext cx="822960" cy="384048"/>
+          </a:xfrm>
+          <a:prstGeom prst="rect">
+            <a:avLst/>
+          </a:prstGeom>
+          <a:solidFill>
+            <a:srgbClr val="1F3864"/>
+          </a:solidFill>
+          <a:ln/>
+        </p:spPr>
+        <p:style>
+          <a:lnRef idx="1">
+            <a:schemeClr val="accent1"/>
+          </a:lnRef>
+          <a:fillRef idx="3">
+            <a:schemeClr val="accent1"/>
+          </a:fillRef>
+          <a:effectRef idx="2">
+            <a:schemeClr val="accent1"/>
+          </a:effectRef>
+          <a:fontRef idx="minor">
+            <a:schemeClr val="lt1"/>
+          </a:fontRef>
+        </p:style>
+        <p:txBody>
+          <a:bodyPr rtlCol="0" anchor="ctr"/>
+          <a:lstStyle/>
+          <a:p>
+            <a:pPr algn="ctr"/>
+          </a:p>
+        </p:txBody>
+      </p:sp>
+      <p:sp>
+        <p:nvSpPr>
+          <p:cNvPr id="18" name="TextBox 17"/>
+          <p:cNvSpPr txBox="1"/>
+          <p:nvPr/>
+        </p:nvSpPr>
+        <p:spPr>
+          <a:xfrm>
+            <a:off x="4928616" y="4242816"/>
+            <a:ext cx="749808" cy="310896"/>
+          </a:xfrm>
+          <a:prstGeom prst="rect">
+            <a:avLst/>
+          </a:prstGeom>
+          <a:noFill/>
+        </p:spPr>
+        <p:txBody>
+          <a:bodyPr wrap="square">
+            <a:spAutoFit/>
+          </a:bodyPr>
+          <a:lstStyle/>
+          <a:p>
+            <a:pPr algn="ctr"/>
+            <a:r>
+              <a:rPr sz="1000" b="1" i="0">
+                <a:solidFill>
+                  <a:srgbClr val="FFFFFF"/>
+                </a:solidFill>
+                <a:latin typeface="Calibri"/>
+              </a:rPr>
+              <a:t>log_Renda</a:t>
+            </a:r>
+          </a:p>
+        </p:txBody>
+      </p:sp>
+      <p:sp>
+        <p:nvSpPr>
+          <p:cNvPr id="19" name="Rectangle 18"/>
+          <p:cNvSpPr/>
+          <p:nvPr/>
+        </p:nvSpPr>
+        <p:spPr>
+          <a:xfrm>
+            <a:off x="5806440" y="4206240"/>
+            <a:ext cx="6035040" cy="384048"/>
+          </a:xfrm>
+          <a:prstGeom prst="rect">
+            <a:avLst/>
+          </a:prstGeom>
+          <a:solidFill>
+            <a:srgbClr val="1F3864"/>
+          </a:solidFill>
+          <a:ln/>
+        </p:spPr>
+        <p:style>
+          <a:lnRef idx="1">
+            <a:schemeClr val="accent1"/>
+          </a:lnRef>
+          <a:fillRef idx="3">
+            <a:schemeClr val="accent1"/>
+          </a:fillRef>
+          <a:effectRef idx="2">
+            <a:schemeClr val="accent1"/>
+          </a:effectRef>
+          <a:fontRef idx="minor">
+            <a:schemeClr val="lt1"/>
+          </a:fontRef>
+        </p:style>
+        <p:txBody>
+          <a:bodyPr rtlCol="0" anchor="ctr"/>
+          <a:lstStyle/>
+          <a:p>
+            <a:pPr algn="ctr"/>
+          </a:p>
+        </p:txBody>
+      </p:sp>
+      <p:sp>
+        <p:nvSpPr>
+          <p:cNvPr id="20" name="TextBox 19"/>
+          <p:cNvSpPr txBox="1"/>
+          <p:nvPr/>
+        </p:nvSpPr>
+        <p:spPr>
+          <a:xfrm>
+            <a:off x="5843016" y="4242816"/>
+            <a:ext cx="5961888" cy="310896"/>
+          </a:xfrm>
+          <a:prstGeom prst="rect">
+            <a:avLst/>
+          </a:prstGeom>
+          <a:noFill/>
+        </p:spPr>
+        <p:txBody>
+          <a:bodyPr wrap="square">
+            <a:spAutoFit/>
+          </a:bodyPr>
+          <a:lstStyle/>
+          <a:p>
+            <a:pPr algn="ctr"/>
+            <a:r>
+              <a:rPr sz="1000" b="1" i="0">
+                <a:solidFill>
+                  <a:srgbClr val="FFFFFF"/>
+                </a:solidFill>
+                <a:latin typeface="Calibri"/>
+              </a:rPr>
+              <a:t>Perfil</a:t>
+            </a:r>
+          </a:p>
+        </p:txBody>
+      </p:sp>
+      <p:sp>
+        <p:nvSpPr>
+          <p:cNvPr id="21" name="Rectangle 20"/>
+          <p:cNvSpPr/>
+          <p:nvPr/>
+        </p:nvSpPr>
+        <p:spPr>
+          <a:xfrm>
+            <a:off x="274320" y="4590288"/>
+            <a:ext cx="777240" cy="384048"/>
+          </a:xfrm>
+          <a:prstGeom prst="rect">
+            <a:avLst/>
+          </a:prstGeom>
+          <a:solidFill>
+            <a:srgbClr val="FFF5F5"/>
+          </a:solidFill>
+          <a:ln w="3810">
+            <a:solidFill>
+              <a:srgbClr val="616161"/>
+            </a:solidFill>
+          </a:ln>
+        </p:spPr>
+        <p:style>
+          <a:lnRef idx="1">
+            <a:schemeClr val="accent1"/>
+          </a:lnRef>
+          <a:fillRef idx="3">
+            <a:schemeClr val="accent1"/>
+          </a:fillRef>
+          <a:effectRef idx="2">
+            <a:schemeClr val="accent1"/>
+          </a:effectRef>
+          <a:fontRef idx="minor">
+            <a:schemeClr val="lt1"/>
+          </a:fontRef>
+        </p:style>
+        <p:txBody>
+          <a:bodyPr rtlCol="0" anchor="ctr"/>
+          <a:lstStyle/>
+          <a:p>
+            <a:pPr algn="ctr"/>
+          </a:p>
+        </p:txBody>
+      </p:sp>
+      <p:sp>
+        <p:nvSpPr>
+          <p:cNvPr id="22" name="TextBox 21"/>
+          <p:cNvSpPr txBox="1"/>
+          <p:nvPr/>
+        </p:nvSpPr>
+        <p:spPr>
+          <a:xfrm>
+            <a:off x="310896" y="4626864"/>
+            <a:ext cx="704088" cy="329184"/>
+          </a:xfrm>
+          <a:prstGeom prst="rect">
+            <a:avLst/>
+          </a:prstGeom>
+          <a:noFill/>
+        </p:spPr>
+        <p:txBody>
+          <a:bodyPr wrap="square">
+            <a:spAutoFit/>
+          </a:bodyPr>
+          <a:lstStyle/>
+          <a:p>
+            <a:pPr algn="ctr"/>
+            <a:r>
+              <a:rPr sz="950" b="1" i="0">
+                <a:solidFill>
+                  <a:srgbClr val="B71C1C"/>
+                </a:solidFill>
+                <a:latin typeface="Calibri"/>
+              </a:rPr>
+              <a:t>C0</a:t>
+            </a:r>
+          </a:p>
+        </p:txBody>
+      </p:sp>
+      <p:sp>
+        <p:nvSpPr>
+          <p:cNvPr id="23" name="Rectangle 22"/>
+          <p:cNvSpPr/>
+          <p:nvPr/>
+        </p:nvSpPr>
+        <p:spPr>
+          <a:xfrm>
+            <a:off x="1097280" y="4590288"/>
+            <a:ext cx="1051560" cy="384048"/>
+          </a:xfrm>
+          <a:prstGeom prst="rect">
+            <a:avLst/>
+          </a:prstGeom>
+          <a:solidFill>
+            <a:srgbClr val="FFF5F5"/>
+          </a:solidFill>
+          <a:ln w="3810">
+            <a:solidFill>
+              <a:srgbClr val="616161"/>
+            </a:solidFill>
+          </a:ln>
+        </p:spPr>
+        <p:style>
+          <a:lnRef idx="1">
+            <a:schemeClr val="accent1"/>
+          </a:lnRef>
+          <a:fillRef idx="3">
+            <a:schemeClr val="accent1"/>
+          </a:fillRef>
+          <a:effectRef idx="2">
+            <a:schemeClr val="accent1"/>
+          </a:effectRef>
+          <a:fontRef idx="minor">
+            <a:schemeClr val="lt1"/>
+          </a:fontRef>
+        </p:style>
+        <p:txBody>
+          <a:bodyPr rtlCol="0" anchor="ctr"/>
+          <a:lstStyle/>
+          <a:p>
+            <a:pPr algn="ctr"/>
+          </a:p>
+        </p:txBody>
+      </p:sp>
+      <p:sp>
+        <p:nvSpPr>
+          <p:cNvPr id="24" name="TextBox 23"/>
+          <p:cNvSpPr txBox="1"/>
+          <p:nvPr/>
+        </p:nvSpPr>
+        <p:spPr>
+          <a:xfrm>
+            <a:off x="1133856" y="4626864"/>
+            <a:ext cx="978408" cy="329184"/>
+          </a:xfrm>
+          <a:prstGeom prst="rect">
+            <a:avLst/>
+          </a:prstGeom>
+          <a:noFill/>
+        </p:spPr>
+        <p:txBody>
+          <a:bodyPr wrap="square">
+            <a:spAutoFit/>
+          </a:bodyPr>
+          <a:lstStyle/>
+          <a:p>
+            <a:pPr algn="ctr"/>
+            <a:r>
+              <a:rPr sz="950" b="0" i="0">
+                <a:solidFill>
+                  <a:srgbClr val="212121"/>
+                </a:solidFill>
+                <a:latin typeface="Calibri"/>
+              </a:rPr>
+              <a:t>2.110.270</a:t>
+            </a:r>
+          </a:p>
+        </p:txBody>
+      </p:sp>
+      <p:sp>
+        <p:nvSpPr>
+          <p:cNvPr id="25" name="Rectangle 24"/>
+          <p:cNvSpPr/>
+          <p:nvPr/>
+        </p:nvSpPr>
+        <p:spPr>
+          <a:xfrm>
+            <a:off x="2240280" y="4590288"/>
+            <a:ext cx="822960" cy="384048"/>
+          </a:xfrm>
+          <a:prstGeom prst="rect">
+            <a:avLst/>
+          </a:prstGeom>
+          <a:solidFill>
+            <a:srgbClr val="FFF5F5"/>
+          </a:solidFill>
+          <a:ln w="3810">
+            <a:solidFill>
+              <a:srgbClr val="616161"/>
+            </a:solidFill>
+          </a:ln>
+        </p:spPr>
+        <p:style>
+          <a:lnRef idx="1">
+            <a:schemeClr val="accent1"/>
+          </a:lnRef>
+          <a:fillRef idx="3">
+            <a:schemeClr val="accent1"/>
+          </a:fillRef>
+          <a:effectRef idx="2">
+            <a:schemeClr val="accent1"/>
+          </a:effectRef>
+          <a:fontRef idx="minor">
+            <a:schemeClr val="lt1"/>
+          </a:fontRef>
+        </p:style>
+        <p:txBody>
+          <a:bodyPr rtlCol="0" anchor="ctr"/>
+          <a:lstStyle/>
+          <a:p>
+            <a:pPr algn="ctr"/>
+          </a:p>
+        </p:txBody>
+      </p:sp>
+      <p:sp>
+        <p:nvSpPr>
+          <p:cNvPr id="26" name="TextBox 25"/>
+          <p:cNvSpPr txBox="1"/>
+          <p:nvPr/>
+        </p:nvSpPr>
+        <p:spPr>
+          <a:xfrm>
+            <a:off x="2276856" y="4626864"/>
+            <a:ext cx="749808" cy="329184"/>
+          </a:xfrm>
+          <a:prstGeom prst="rect">
+            <a:avLst/>
+          </a:prstGeom>
+          <a:noFill/>
+        </p:spPr>
+        <p:txBody>
+          <a:bodyPr wrap="square">
+            <a:spAutoFit/>
+          </a:bodyPr>
+          <a:lstStyle/>
+          <a:p>
+            <a:pPr algn="ctr"/>
+            <a:r>
+              <a:rPr sz="950" b="0" i="0">
+                <a:solidFill>
+                  <a:srgbClr val="212121"/>
+                </a:solidFill>
+                <a:latin typeface="Calibri"/>
+              </a:rPr>
+              <a:t>27,4%</a:t>
+            </a:r>
+          </a:p>
+        </p:txBody>
+      </p:sp>
+      <p:sp>
+        <p:nvSpPr>
+          <p:cNvPr id="27" name="Rectangle 26"/>
+          <p:cNvSpPr/>
+          <p:nvPr/>
+        </p:nvSpPr>
+        <p:spPr>
+          <a:xfrm>
+            <a:off x="3108960" y="4590288"/>
+            <a:ext cx="777240" cy="384048"/>
+          </a:xfrm>
+          <a:prstGeom prst="rect">
+            <a:avLst/>
+          </a:prstGeom>
+          <a:solidFill>
+            <a:srgbClr val="FFF5F5"/>
+          </a:solidFill>
+          <a:ln w="3810">
+            <a:solidFill>
+              <a:srgbClr val="616161"/>
+            </a:solidFill>
+          </a:ln>
+        </p:spPr>
+        <p:style>
+          <a:lnRef idx="1">
+            <a:schemeClr val="accent1"/>
+          </a:lnRef>
+          <a:fillRef idx="3">
+            <a:schemeClr val="accent1"/>
+          </a:fillRef>
+          <a:effectRef idx="2">
+            <a:schemeClr val="accent1"/>
+          </a:effectRef>
+          <a:fontRef idx="minor">
+            <a:schemeClr val="lt1"/>
+          </a:fontRef>
+        </p:style>
+        <p:txBody>
+          <a:bodyPr rtlCol="0" anchor="ctr"/>
+          <a:lstStyle/>
+          <a:p>
+            <a:pPr algn="ctr"/>
+          </a:p>
+        </p:txBody>
+      </p:sp>
+      <p:sp>
+        <p:nvSpPr>
+          <p:cNvPr id="28" name="TextBox 27"/>
+          <p:cNvSpPr txBox="1"/>
+          <p:nvPr/>
+        </p:nvSpPr>
+        <p:spPr>
+          <a:xfrm>
+            <a:off x="3145536" y="4626864"/>
+            <a:ext cx="704088" cy="329184"/>
+          </a:xfrm>
+          <a:prstGeom prst="rect">
+            <a:avLst/>
+          </a:prstGeom>
+          <a:noFill/>
+        </p:spPr>
+        <p:txBody>
+          <a:bodyPr wrap="square">
+            <a:spAutoFit/>
+          </a:bodyPr>
+          <a:lstStyle/>
+          <a:p>
+            <a:pPr algn="ctr"/>
+            <a:r>
+              <a:rPr sz="950" b="0" i="0">
+                <a:solidFill>
+                  <a:srgbClr val="212121"/>
+                </a:solidFill>
+                <a:latin typeface="Calibri"/>
+              </a:rPr>
+              <a:t>76,2%</a:t>
+            </a:r>
+          </a:p>
+        </p:txBody>
+      </p:sp>
+      <p:sp>
+        <p:nvSpPr>
+          <p:cNvPr id="29" name="Rectangle 28"/>
+          <p:cNvSpPr/>
+          <p:nvPr/>
+        </p:nvSpPr>
+        <p:spPr>
+          <a:xfrm>
+            <a:off x="3977639" y="4590288"/>
+            <a:ext cx="777240" cy="384048"/>
+          </a:xfrm>
+          <a:prstGeom prst="rect">
+            <a:avLst/>
+          </a:prstGeom>
+          <a:solidFill>
+            <a:srgbClr val="FFF5F5"/>
+          </a:solidFill>
+          <a:ln w="3810">
+            <a:solidFill>
+              <a:srgbClr val="616161"/>
+            </a:solidFill>
+          </a:ln>
+        </p:spPr>
+        <p:style>
+          <a:lnRef idx="1">
+            <a:schemeClr val="accent1"/>
+          </a:lnRef>
+          <a:fillRef idx="3">
+            <a:schemeClr val="accent1"/>
+          </a:fillRef>
+          <a:effectRef idx="2">
+            <a:schemeClr val="accent1"/>
+          </a:effectRef>
+          <a:fontRef idx="minor">
+            <a:schemeClr val="lt1"/>
+          </a:fontRef>
+        </p:style>
+        <p:txBody>
+          <a:bodyPr rtlCol="0" anchor="ctr"/>
+          <a:lstStyle/>
+          <a:p>
+            <a:pPr algn="ctr"/>
+          </a:p>
+        </p:txBody>
+      </p:sp>
+      <p:sp>
+        <p:nvSpPr>
+          <p:cNvPr id="30" name="TextBox 29"/>
+          <p:cNvSpPr txBox="1"/>
+          <p:nvPr/>
+        </p:nvSpPr>
+        <p:spPr>
+          <a:xfrm>
+            <a:off x="4014215" y="4626864"/>
+            <a:ext cx="704088" cy="329184"/>
+          </a:xfrm>
+          <a:prstGeom prst="rect">
+            <a:avLst/>
+          </a:prstGeom>
+          <a:noFill/>
+        </p:spPr>
+        <p:txBody>
+          <a:bodyPr wrap="square">
+            <a:spAutoFit/>
+          </a:bodyPr>
+          <a:lstStyle/>
+          <a:p>
+            <a:pPr algn="ctr"/>
+            <a:r>
+              <a:rPr sz="950" b="0" i="0">
+                <a:solidFill>
+                  <a:srgbClr val="212121"/>
+                </a:solidFill>
+                <a:latin typeface="Calibri"/>
+              </a:rPr>
+              <a:t>100%</a:t>
+            </a:r>
+          </a:p>
+        </p:txBody>
+      </p:sp>
+      <p:sp>
+        <p:nvSpPr>
+          <p:cNvPr id="31" name="Rectangle 30"/>
+          <p:cNvSpPr/>
+          <p:nvPr/>
+        </p:nvSpPr>
+        <p:spPr>
+          <a:xfrm>
+            <a:off x="4892040" y="4590288"/>
+            <a:ext cx="822960" cy="384048"/>
+          </a:xfrm>
+          <a:prstGeom prst="rect">
+            <a:avLst/>
+          </a:prstGeom>
+          <a:solidFill>
+            <a:srgbClr val="FFF5F5"/>
+          </a:solidFill>
+          <a:ln w="3810">
+            <a:solidFill>
+              <a:srgbClr val="616161"/>
+            </a:solidFill>
+          </a:ln>
+        </p:spPr>
+        <p:style>
+          <a:lnRef idx="1">
+            <a:schemeClr val="accent1"/>
+          </a:lnRef>
+          <a:fillRef idx="3">
+            <a:schemeClr val="accent1"/>
+          </a:fillRef>
+          <a:effectRef idx="2">
+            <a:schemeClr val="accent1"/>
+          </a:effectRef>
+          <a:fontRef idx="minor">
+            <a:schemeClr val="lt1"/>
+          </a:fontRef>
+        </p:style>
+        <p:txBody>
+          <a:bodyPr rtlCol="0" anchor="ctr"/>
+          <a:lstStyle/>
+          <a:p>
+            <a:pPr algn="ctr"/>
+          </a:p>
+        </p:txBody>
+      </p:sp>
+      <p:sp>
+        <p:nvSpPr>
+          <p:cNvPr id="32" name="TextBox 31"/>
+          <p:cNvSpPr txBox="1"/>
+          <p:nvPr/>
+        </p:nvSpPr>
+        <p:spPr>
+          <a:xfrm>
+            <a:off x="4928616" y="4626864"/>
+            <a:ext cx="749808" cy="329184"/>
+          </a:xfrm>
+          <a:prstGeom prst="rect">
+            <a:avLst/>
+          </a:prstGeom>
+          <a:noFill/>
+        </p:spPr>
+        <p:txBody>
+          <a:bodyPr wrap="square">
+            <a:spAutoFit/>
+          </a:bodyPr>
+          <a:lstStyle/>
+          <a:p>
+            <a:pPr algn="ctr"/>
+            <a:r>
+              <a:rPr sz="950" b="0" i="0">
+                <a:solidFill>
+                  <a:srgbClr val="212121"/>
+                </a:solidFill>
+                <a:latin typeface="Calibri"/>
+              </a:rPr>
+              <a:t>6,961</a:t>
+            </a:r>
+          </a:p>
+        </p:txBody>
+      </p:sp>
+      <p:sp>
+        <p:nvSpPr>
+          <p:cNvPr id="33" name="Rectangle 32"/>
+          <p:cNvSpPr/>
+          <p:nvPr/>
+        </p:nvSpPr>
+        <p:spPr>
+          <a:xfrm>
+            <a:off x="5806440" y="4590288"/>
+            <a:ext cx="6035040" cy="384048"/>
+          </a:xfrm>
+          <a:prstGeom prst="rect">
+            <a:avLst/>
+          </a:prstGeom>
+          <a:solidFill>
+            <a:srgbClr val="FFF5F5"/>
+          </a:solidFill>
+          <a:ln w="3810">
+            <a:solidFill>
+              <a:srgbClr val="616161"/>
+            </a:solidFill>
+          </a:ln>
+        </p:spPr>
+        <p:style>
+          <a:lnRef idx="1">
+            <a:schemeClr val="accent1"/>
+          </a:lnRef>
+          <a:fillRef idx="3">
+            <a:schemeClr val="accent1"/>
+          </a:fillRef>
+          <a:effectRef idx="2">
+            <a:schemeClr val="accent1"/>
+          </a:effectRef>
+          <a:fontRef idx="minor">
+            <a:schemeClr val="lt1"/>
+          </a:fontRef>
+        </p:style>
+        <p:txBody>
+          <a:bodyPr rtlCol="0" anchor="ctr"/>
+          <a:lstStyle/>
+          <a:p>
+            <a:pPr algn="ctr"/>
+          </a:p>
+        </p:txBody>
+      </p:sp>
+      <p:sp>
+        <p:nvSpPr>
+          <p:cNvPr id="34" name="TextBox 33"/>
+          <p:cNvSpPr txBox="1"/>
+          <p:nvPr/>
+        </p:nvSpPr>
+        <p:spPr>
+          <a:xfrm>
+            <a:off x="5843016" y="4626864"/>
+            <a:ext cx="5961888" cy="329184"/>
+          </a:xfrm>
+          <a:prstGeom prst="rect">
+            <a:avLst/>
+          </a:prstGeom>
+          <a:noFill/>
+        </p:spPr>
+        <p:txBody>
+          <a:bodyPr wrap="square">
+            <a:spAutoFit/>
+          </a:bodyPr>
+          <a:lstStyle/>
+          <a:p>
+            <a:pPr algn="l"/>
+            <a:r>
+              <a:rPr sz="950" b="0" i="0">
+                <a:solidFill>
+                  <a:srgbClr val="212121"/>
+                </a:solidFill>
+                <a:latin typeface="Calibri"/>
+              </a:rPr>
+              <a:t>Mulheres negras — vulnerabilidade dupla</a:t>
+            </a:r>
+          </a:p>
+        </p:txBody>
+      </p:sp>
+      <p:sp>
+        <p:nvSpPr>
+          <p:cNvPr id="35" name="Rectangle 34"/>
+          <p:cNvSpPr/>
+          <p:nvPr/>
+        </p:nvSpPr>
+        <p:spPr>
+          <a:xfrm>
+            <a:off x="274320" y="4974336"/>
+            <a:ext cx="777240" cy="384048"/>
+          </a:xfrm>
+          <a:prstGeom prst="rect">
+            <a:avLst/>
+          </a:prstGeom>
+          <a:solidFill>
+            <a:srgbClr val="E3F2FD"/>
+          </a:solidFill>
+          <a:ln w="3810">
+            <a:solidFill>
+              <a:srgbClr val="616161"/>
+            </a:solidFill>
+          </a:ln>
+        </p:spPr>
+        <p:style>
+          <a:lnRef idx="1">
+            <a:schemeClr val="accent1"/>
+          </a:lnRef>
+          <a:fillRef idx="3">
+            <a:schemeClr val="accent1"/>
+          </a:fillRef>
+          <a:effectRef idx="2">
+            <a:schemeClr val="accent1"/>
+          </a:effectRef>
+          <a:fontRef idx="minor">
+            <a:schemeClr val="lt1"/>
+          </a:fontRef>
+        </p:style>
+        <p:txBody>
+          <a:bodyPr rtlCol="0" anchor="ctr"/>
+          <a:lstStyle/>
+          <a:p>
+            <a:pPr algn="ctr"/>
+          </a:p>
+        </p:txBody>
+      </p:sp>
+      <p:sp>
+        <p:nvSpPr>
+          <p:cNvPr id="36" name="TextBox 35"/>
+          <p:cNvSpPr txBox="1"/>
+          <p:nvPr/>
+        </p:nvSpPr>
+        <p:spPr>
+          <a:xfrm>
+            <a:off x="310896" y="5010912"/>
+            <a:ext cx="704088" cy="329184"/>
+          </a:xfrm>
+          <a:prstGeom prst="rect">
+            <a:avLst/>
+          </a:prstGeom>
+          <a:noFill/>
+        </p:spPr>
+        <p:txBody>
+          <a:bodyPr wrap="square">
+            <a:spAutoFit/>
+          </a:bodyPr>
+          <a:lstStyle/>
+          <a:p>
+            <a:pPr algn="ctr"/>
+            <a:r>
+              <a:rPr sz="950" b="1" i="0">
+                <a:solidFill>
+                  <a:srgbClr val="1565C0"/>
+                </a:solidFill>
+                <a:latin typeface="Calibri"/>
+              </a:rPr>
+              <a:t>C1</a:t>
+            </a:r>
+          </a:p>
+        </p:txBody>
+      </p:sp>
+      <p:sp>
+        <p:nvSpPr>
+          <p:cNvPr id="37" name="Rectangle 36"/>
+          <p:cNvSpPr/>
+          <p:nvPr/>
+        </p:nvSpPr>
+        <p:spPr>
+          <a:xfrm>
+            <a:off x="1097280" y="4974336"/>
+            <a:ext cx="1051560" cy="384048"/>
+          </a:xfrm>
+          <a:prstGeom prst="rect">
+            <a:avLst/>
+          </a:prstGeom>
+          <a:solidFill>
+            <a:srgbClr val="E3F2FD"/>
+          </a:solidFill>
+          <a:ln w="3810">
+            <a:solidFill>
+              <a:srgbClr val="616161"/>
+            </a:solidFill>
+          </a:ln>
+        </p:spPr>
+        <p:style>
+          <a:lnRef idx="1">
+            <a:schemeClr val="accent1"/>
+          </a:lnRef>
+          <a:fillRef idx="3">
+            <a:schemeClr val="accent1"/>
+          </a:fillRef>
+          <a:effectRef idx="2">
+            <a:schemeClr val="accent1"/>
+          </a:effectRef>
+          <a:fontRef idx="minor">
+            <a:schemeClr val="lt1"/>
+          </a:fontRef>
+        </p:style>
+        <p:txBody>
+          <a:bodyPr rtlCol="0" anchor="ctr"/>
+          <a:lstStyle/>
+          <a:p>
+            <a:pPr algn="ctr"/>
+          </a:p>
+        </p:txBody>
+      </p:sp>
+      <p:sp>
+        <p:nvSpPr>
+          <p:cNvPr id="38" name="TextBox 37"/>
+          <p:cNvSpPr txBox="1"/>
+          <p:nvPr/>
+        </p:nvSpPr>
+        <p:spPr>
+          <a:xfrm>
+            <a:off x="1133856" y="5010912"/>
+            <a:ext cx="978408" cy="329184"/>
+          </a:xfrm>
+          <a:prstGeom prst="rect">
+            <a:avLst/>
+          </a:prstGeom>
+          <a:noFill/>
+        </p:spPr>
+        <p:txBody>
+          <a:bodyPr wrap="square">
+            <a:spAutoFit/>
+          </a:bodyPr>
+          <a:lstStyle/>
+          <a:p>
+            <a:pPr algn="ctr"/>
+            <a:r>
+              <a:rPr sz="950" b="0" i="0">
+                <a:solidFill>
+                  <a:srgbClr val="212121"/>
+                </a:solidFill>
+                <a:latin typeface="Calibri"/>
+              </a:rPr>
+              <a:t>2.705.788</a:t>
+            </a:r>
+          </a:p>
+        </p:txBody>
+      </p:sp>
+      <p:sp>
+        <p:nvSpPr>
+          <p:cNvPr id="39" name="Rectangle 38"/>
+          <p:cNvSpPr/>
+          <p:nvPr/>
+        </p:nvSpPr>
+        <p:spPr>
+          <a:xfrm>
+            <a:off x="2240280" y="4974336"/>
+            <a:ext cx="822960" cy="384048"/>
+          </a:xfrm>
+          <a:prstGeom prst="rect">
+            <a:avLst/>
+          </a:prstGeom>
+          <a:solidFill>
+            <a:srgbClr val="E3F2FD"/>
+          </a:solidFill>
+          <a:ln w="3810">
+            <a:solidFill>
+              <a:srgbClr val="616161"/>
+            </a:solidFill>
+          </a:ln>
+        </p:spPr>
+        <p:style>
+          <a:lnRef idx="1">
+            <a:schemeClr val="accent1"/>
+          </a:lnRef>
+          <a:fillRef idx="3">
+            <a:schemeClr val="accent1"/>
+          </a:fillRef>
+          <a:effectRef idx="2">
+            <a:schemeClr val="accent1"/>
+          </a:effectRef>
+          <a:fontRef idx="minor">
+            <a:schemeClr val="lt1"/>
+          </a:fontRef>
+        </p:style>
+        <p:txBody>
+          <a:bodyPr rtlCol="0" anchor="ctr"/>
+          <a:lstStyle/>
+          <a:p>
+            <a:pPr algn="ctr"/>
+          </a:p>
+        </p:txBody>
+      </p:sp>
+      <p:sp>
+        <p:nvSpPr>
+          <p:cNvPr id="40" name="TextBox 39"/>
+          <p:cNvSpPr txBox="1"/>
+          <p:nvPr/>
+        </p:nvSpPr>
+        <p:spPr>
+          <a:xfrm>
+            <a:off x="2276856" y="5010912"/>
+            <a:ext cx="749808" cy="329184"/>
+          </a:xfrm>
+          <a:prstGeom prst="rect">
+            <a:avLst/>
+          </a:prstGeom>
+          <a:noFill/>
+        </p:spPr>
+        <p:txBody>
+          <a:bodyPr wrap="square">
+            <a:spAutoFit/>
+          </a:bodyPr>
+          <a:lstStyle/>
+          <a:p>
+            <a:pPr algn="ctr"/>
+            <a:r>
+              <a:rPr sz="950" b="0" i="0">
+                <a:solidFill>
+                  <a:srgbClr val="212121"/>
+                </a:solidFill>
+                <a:latin typeface="Calibri"/>
+              </a:rPr>
+              <a:t>35,2%</a:t>
+            </a:r>
+          </a:p>
+        </p:txBody>
+      </p:sp>
+      <p:sp>
+        <p:nvSpPr>
+          <p:cNvPr id="41" name="Rectangle 40"/>
+          <p:cNvSpPr/>
+          <p:nvPr/>
+        </p:nvSpPr>
+        <p:spPr>
+          <a:xfrm>
+            <a:off x="3108960" y="4974336"/>
+            <a:ext cx="777240" cy="384048"/>
+          </a:xfrm>
+          <a:prstGeom prst="rect">
+            <a:avLst/>
+          </a:prstGeom>
+          <a:solidFill>
+            <a:srgbClr val="E3F2FD"/>
+          </a:solidFill>
+          <a:ln w="3810">
+            <a:solidFill>
+              <a:srgbClr val="616161"/>
+            </a:solidFill>
+          </a:ln>
+        </p:spPr>
+        <p:style>
+          <a:lnRef idx="1">
+            <a:schemeClr val="accent1"/>
+          </a:lnRef>
+          <a:fillRef idx="3">
+            <a:schemeClr val="accent1"/>
+          </a:fillRef>
+          <a:effectRef idx="2">
+            <a:schemeClr val="accent1"/>
+          </a:effectRef>
+          <a:fontRef idx="minor">
+            <a:schemeClr val="lt1"/>
+          </a:fontRef>
+        </p:style>
+        <p:txBody>
+          <a:bodyPr rtlCol="0" anchor="ctr"/>
+          <a:lstStyle/>
+          <a:p>
+            <a:pPr algn="ctr"/>
+          </a:p>
+        </p:txBody>
+      </p:sp>
+      <p:sp>
+        <p:nvSpPr>
+          <p:cNvPr id="42" name="TextBox 41"/>
+          <p:cNvSpPr txBox="1"/>
+          <p:nvPr/>
+        </p:nvSpPr>
+        <p:spPr>
+          <a:xfrm>
+            <a:off x="3145536" y="5010912"/>
+            <a:ext cx="704088" cy="329184"/>
+          </a:xfrm>
+          <a:prstGeom prst="rect">
+            <a:avLst/>
+          </a:prstGeom>
+          <a:noFill/>
+        </p:spPr>
+        <p:txBody>
+          <a:bodyPr wrap="square">
+            <a:spAutoFit/>
+          </a:bodyPr>
+          <a:lstStyle/>
+          <a:p>
+            <a:pPr algn="ctr"/>
+            <a:r>
+              <a:rPr sz="950" b="0" i="0">
+                <a:solidFill>
+                  <a:srgbClr val="212121"/>
+                </a:solidFill>
+                <a:latin typeface="Calibri"/>
+              </a:rPr>
+              <a:t>18,0%</a:t>
+            </a:r>
+          </a:p>
+        </p:txBody>
+      </p:sp>
+      <p:sp>
+        <p:nvSpPr>
+          <p:cNvPr id="43" name="Rectangle 42"/>
+          <p:cNvSpPr/>
+          <p:nvPr/>
+        </p:nvSpPr>
+        <p:spPr>
+          <a:xfrm>
+            <a:off x="3977639" y="4974336"/>
+            <a:ext cx="777240" cy="384048"/>
+          </a:xfrm>
+          <a:prstGeom prst="rect">
+            <a:avLst/>
+          </a:prstGeom>
+          <a:solidFill>
+            <a:srgbClr val="E3F2FD"/>
+          </a:solidFill>
+          <a:ln w="3810">
+            <a:solidFill>
+              <a:srgbClr val="616161"/>
+            </a:solidFill>
+          </a:ln>
+        </p:spPr>
+        <p:style>
+          <a:lnRef idx="1">
+            <a:schemeClr val="accent1"/>
+          </a:lnRef>
+          <a:fillRef idx="3">
+            <a:schemeClr val="accent1"/>
+          </a:fillRef>
+          <a:effectRef idx="2">
+            <a:schemeClr val="accent1"/>
+          </a:effectRef>
+          <a:fontRef idx="minor">
+            <a:schemeClr val="lt1"/>
+          </a:fontRef>
+        </p:style>
+        <p:txBody>
+          <a:bodyPr rtlCol="0" anchor="ctr"/>
+          <a:lstStyle/>
+          <a:p>
+            <a:pPr algn="ctr"/>
+          </a:p>
+        </p:txBody>
+      </p:sp>
+      <p:sp>
+        <p:nvSpPr>
+          <p:cNvPr id="44" name="TextBox 43"/>
+          <p:cNvSpPr txBox="1"/>
+          <p:nvPr/>
+        </p:nvSpPr>
+        <p:spPr>
+          <a:xfrm>
+            <a:off x="4014215" y="5010912"/>
+            <a:ext cx="704088" cy="329184"/>
+          </a:xfrm>
+          <a:prstGeom prst="rect">
+            <a:avLst/>
+          </a:prstGeom>
+          <a:noFill/>
+        </p:spPr>
+        <p:txBody>
+          <a:bodyPr wrap="square">
+            <a:spAutoFit/>
+          </a:bodyPr>
+          <a:lstStyle/>
+          <a:p>
+            <a:pPr algn="ctr"/>
+            <a:r>
+              <a:rPr sz="950" b="0" i="0">
+                <a:solidFill>
+                  <a:srgbClr val="212121"/>
+                </a:solidFill>
+                <a:latin typeface="Calibri"/>
+              </a:rPr>
+              <a:t>40,1%</a:t>
+            </a:r>
+          </a:p>
+        </p:txBody>
+      </p:sp>
+      <p:sp>
+        <p:nvSpPr>
+          <p:cNvPr id="45" name="Rectangle 44"/>
+          <p:cNvSpPr/>
+          <p:nvPr/>
+        </p:nvSpPr>
+        <p:spPr>
+          <a:xfrm>
+            <a:off x="4892040" y="4974336"/>
+            <a:ext cx="822960" cy="384048"/>
+          </a:xfrm>
+          <a:prstGeom prst="rect">
+            <a:avLst/>
+          </a:prstGeom>
+          <a:solidFill>
+            <a:srgbClr val="E3F2FD"/>
+          </a:solidFill>
+          <a:ln w="3810">
+            <a:solidFill>
+              <a:srgbClr val="616161"/>
+            </a:solidFill>
+          </a:ln>
+        </p:spPr>
+        <p:style>
+          <a:lnRef idx="1">
+            <a:schemeClr val="accent1"/>
+          </a:lnRef>
+          <a:fillRef idx="3">
+            <a:schemeClr val="accent1"/>
+          </a:fillRef>
+          <a:effectRef idx="2">
+            <a:schemeClr val="accent1"/>
+          </a:effectRef>
+          <a:fontRef idx="minor">
+            <a:schemeClr val="lt1"/>
+          </a:fontRef>
+        </p:style>
+        <p:txBody>
+          <a:bodyPr rtlCol="0" anchor="ctr"/>
+          <a:lstStyle/>
+          <a:p>
+            <a:pPr algn="ctr"/>
+          </a:p>
+        </p:txBody>
+      </p:sp>
+      <p:sp>
+        <p:nvSpPr>
+          <p:cNvPr id="46" name="TextBox 45"/>
+          <p:cNvSpPr txBox="1"/>
+          <p:nvPr/>
+        </p:nvSpPr>
+        <p:spPr>
+          <a:xfrm>
+            <a:off x="4928616" y="5010912"/>
+            <a:ext cx="749808" cy="329184"/>
+          </a:xfrm>
+          <a:prstGeom prst="rect">
+            <a:avLst/>
+          </a:prstGeom>
+          <a:noFill/>
+        </p:spPr>
+        <p:txBody>
+          <a:bodyPr wrap="square">
+            <a:spAutoFit/>
+          </a:bodyPr>
+          <a:lstStyle/>
+          <a:p>
+            <a:pPr algn="ctr"/>
+            <a:r>
+              <a:rPr sz="950" b="0" i="0">
+                <a:solidFill>
+                  <a:srgbClr val="212121"/>
+                </a:solidFill>
+                <a:latin typeface="Calibri"/>
+              </a:rPr>
+              <a:t>7,895</a:t>
+            </a:r>
+          </a:p>
+        </p:txBody>
+      </p:sp>
+      <p:sp>
+        <p:nvSpPr>
+          <p:cNvPr id="47" name="Rectangle 46"/>
+          <p:cNvSpPr/>
+          <p:nvPr/>
+        </p:nvSpPr>
+        <p:spPr>
+          <a:xfrm>
+            <a:off x="5806440" y="4974336"/>
+            <a:ext cx="6035040" cy="384048"/>
+          </a:xfrm>
+          <a:prstGeom prst="rect">
+            <a:avLst/>
+          </a:prstGeom>
+          <a:solidFill>
+            <a:srgbClr val="E3F2FD"/>
+          </a:solidFill>
+          <a:ln w="3810">
+            <a:solidFill>
+              <a:srgbClr val="616161"/>
+            </a:solidFill>
+          </a:ln>
+        </p:spPr>
+        <p:style>
+          <a:lnRef idx="1">
+            <a:schemeClr val="accent1"/>
+          </a:lnRef>
+          <a:fillRef idx="3">
+            <a:schemeClr val="accent1"/>
+          </a:fillRef>
+          <a:effectRef idx="2">
+            <a:schemeClr val="accent1"/>
+          </a:effectRef>
+          <a:fontRef idx="minor">
+            <a:schemeClr val="lt1"/>
+          </a:fontRef>
+        </p:style>
+        <p:txBody>
+          <a:bodyPr rtlCol="0" anchor="ctr"/>
+          <a:lstStyle/>
+          <a:p>
+            <a:pPr algn="ctr"/>
+          </a:p>
+        </p:txBody>
+      </p:sp>
+      <p:sp>
+        <p:nvSpPr>
+          <p:cNvPr id="48" name="TextBox 47"/>
+          <p:cNvSpPr txBox="1"/>
+          <p:nvPr/>
+        </p:nvSpPr>
+        <p:spPr>
+          <a:xfrm>
+            <a:off x="5843016" y="5010912"/>
+            <a:ext cx="5961888" cy="329184"/>
+          </a:xfrm>
+          <a:prstGeom prst="rect">
+            <a:avLst/>
+          </a:prstGeom>
+          <a:noFill/>
+        </p:spPr>
+        <p:txBody>
+          <a:bodyPr wrap="square">
+            <a:spAutoFit/>
+          </a:bodyPr>
+          <a:lstStyle/>
+          <a:p>
+            <a:pPr algn="l"/>
+            <a:r>
+              <a:rPr sz="950" b="0" i="0">
+                <a:solidFill>
+                  <a:srgbClr val="212121"/>
+                </a:solidFill>
+                <a:latin typeface="Calibri"/>
+              </a:rPr>
+              <a:t>Brancos alta renda — menor escolaridade</a:t>
+            </a:r>
+          </a:p>
+        </p:txBody>
+      </p:sp>
+      <p:sp>
+        <p:nvSpPr>
+          <p:cNvPr id="49" name="Rectangle 48"/>
+          <p:cNvSpPr/>
+          <p:nvPr/>
+        </p:nvSpPr>
+        <p:spPr>
+          <a:xfrm>
+            <a:off x="274320" y="5358384"/>
+            <a:ext cx="777240" cy="384048"/>
+          </a:xfrm>
+          <a:prstGeom prst="rect">
+            <a:avLst/>
+          </a:prstGeom>
+          <a:solidFill>
+            <a:srgbClr val="F5F5F5"/>
+          </a:solidFill>
+          <a:ln w="3810">
+            <a:solidFill>
+              <a:srgbClr val="616161"/>
+            </a:solidFill>
+          </a:ln>
+        </p:spPr>
+        <p:style>
+          <a:lnRef idx="1">
+            <a:schemeClr val="accent1"/>
+          </a:lnRef>
+          <a:fillRef idx="3">
+            <a:schemeClr val="accent1"/>
+          </a:fillRef>
+          <a:effectRef idx="2">
+            <a:schemeClr val="accent1"/>
+          </a:effectRef>
+          <a:fontRef idx="minor">
+            <a:schemeClr val="lt1"/>
+          </a:fontRef>
+        </p:style>
+        <p:txBody>
+          <a:bodyPr rtlCol="0" anchor="ctr"/>
+          <a:lstStyle/>
+          <a:p>
+            <a:pPr algn="ctr"/>
+          </a:p>
+        </p:txBody>
+      </p:sp>
+      <p:sp>
+        <p:nvSpPr>
+          <p:cNvPr id="50" name="TextBox 49"/>
+          <p:cNvSpPr txBox="1"/>
+          <p:nvPr/>
+        </p:nvSpPr>
+        <p:spPr>
+          <a:xfrm>
+            <a:off x="310896" y="5394960"/>
+            <a:ext cx="704088" cy="329184"/>
+          </a:xfrm>
+          <a:prstGeom prst="rect">
+            <a:avLst/>
+          </a:prstGeom>
+          <a:noFill/>
+        </p:spPr>
+        <p:txBody>
+          <a:bodyPr wrap="square">
+            <a:spAutoFit/>
+          </a:bodyPr>
+          <a:lstStyle/>
+          <a:p>
+            <a:pPr algn="ctr"/>
+            <a:r>
+              <a:rPr sz="950" b="1" i="0">
+                <a:solidFill>
+                  <a:srgbClr val="1F3864"/>
+                </a:solidFill>
+                <a:latin typeface="Calibri"/>
+              </a:rPr>
+              <a:t>C2</a:t>
+            </a:r>
+          </a:p>
+        </p:txBody>
+      </p:sp>
+      <p:sp>
+        <p:nvSpPr>
+          <p:cNvPr id="51" name="Rectangle 50"/>
+          <p:cNvSpPr/>
+          <p:nvPr/>
+        </p:nvSpPr>
+        <p:spPr>
+          <a:xfrm>
+            <a:off x="1097280" y="5358384"/>
+            <a:ext cx="1051560" cy="384048"/>
+          </a:xfrm>
+          <a:prstGeom prst="rect">
+            <a:avLst/>
+          </a:prstGeom>
+          <a:solidFill>
+            <a:srgbClr val="F5F5F5"/>
+          </a:solidFill>
+          <a:ln w="3810">
+            <a:solidFill>
+              <a:srgbClr val="616161"/>
+            </a:solidFill>
+          </a:ln>
+        </p:spPr>
+        <p:style>
+          <a:lnRef idx="1">
+            <a:schemeClr val="accent1"/>
+          </a:lnRef>
+          <a:fillRef idx="3">
+            <a:schemeClr val="accent1"/>
+          </a:fillRef>
+          <a:effectRef idx="2">
+            <a:schemeClr val="accent1"/>
+          </a:effectRef>
+          <a:fontRef idx="minor">
+            <a:schemeClr val="lt1"/>
+          </a:fontRef>
+        </p:style>
+        <p:txBody>
+          <a:bodyPr rtlCol="0" anchor="ctr"/>
+          <a:lstStyle/>
+          <a:p>
+            <a:pPr algn="ctr"/>
+          </a:p>
+        </p:txBody>
+      </p:sp>
+      <p:sp>
+        <p:nvSpPr>
+          <p:cNvPr id="52" name="TextBox 51"/>
+          <p:cNvSpPr txBox="1"/>
+          <p:nvPr/>
+        </p:nvSpPr>
+        <p:spPr>
+          <a:xfrm>
+            <a:off x="1133856" y="5394960"/>
+            <a:ext cx="978408" cy="329184"/>
+          </a:xfrm>
+          <a:prstGeom prst="rect">
+            <a:avLst/>
+          </a:prstGeom>
+          <a:noFill/>
+        </p:spPr>
+        <p:txBody>
+          <a:bodyPr wrap="square">
+            <a:spAutoFit/>
+          </a:bodyPr>
+          <a:lstStyle/>
+          <a:p>
+            <a:pPr algn="ctr"/>
+            <a:r>
+              <a:rPr sz="950" b="0" i="0">
+                <a:solidFill>
+                  <a:srgbClr val="212121"/>
+                </a:solidFill>
+                <a:latin typeface="Calibri"/>
+              </a:rPr>
+              <a:t>2.878.140</a:t>
+            </a:r>
+          </a:p>
+        </p:txBody>
+      </p:sp>
+      <p:sp>
+        <p:nvSpPr>
+          <p:cNvPr id="53" name="Rectangle 52"/>
+          <p:cNvSpPr/>
+          <p:nvPr/>
+        </p:nvSpPr>
+        <p:spPr>
+          <a:xfrm>
+            <a:off x="2240280" y="5358384"/>
+            <a:ext cx="822960" cy="384048"/>
+          </a:xfrm>
+          <a:prstGeom prst="rect">
+            <a:avLst/>
+          </a:prstGeom>
+          <a:solidFill>
+            <a:srgbClr val="F5F5F5"/>
+          </a:solidFill>
+          <a:ln w="3810">
+            <a:solidFill>
+              <a:srgbClr val="616161"/>
+            </a:solidFill>
+          </a:ln>
+        </p:spPr>
+        <p:style>
+          <a:lnRef idx="1">
+            <a:schemeClr val="accent1"/>
+          </a:lnRef>
+          <a:fillRef idx="3">
+            <a:schemeClr val="accent1"/>
+          </a:fillRef>
+          <a:effectRef idx="2">
+            <a:schemeClr val="accent1"/>
+          </a:effectRef>
+          <a:fontRef idx="minor">
+            <a:schemeClr val="lt1"/>
+          </a:fontRef>
+        </p:style>
+        <p:txBody>
+          <a:bodyPr rtlCol="0" anchor="ctr"/>
+          <a:lstStyle/>
+          <a:p>
+            <a:pPr algn="ctr"/>
+          </a:p>
+        </p:txBody>
+      </p:sp>
+      <p:sp>
+        <p:nvSpPr>
+          <p:cNvPr id="54" name="TextBox 53"/>
+          <p:cNvSpPr txBox="1"/>
+          <p:nvPr/>
+        </p:nvSpPr>
+        <p:spPr>
+          <a:xfrm>
+            <a:off x="2276856" y="5394960"/>
+            <a:ext cx="749808" cy="329184"/>
+          </a:xfrm>
+          <a:prstGeom prst="rect">
+            <a:avLst/>
+          </a:prstGeom>
+          <a:noFill/>
+        </p:spPr>
+        <p:txBody>
+          <a:bodyPr wrap="square">
+            <a:spAutoFit/>
+          </a:bodyPr>
+          <a:lstStyle/>
+          <a:p>
+            <a:pPr algn="ctr"/>
+            <a:r>
+              <a:rPr sz="950" b="0" i="0">
+                <a:solidFill>
+                  <a:srgbClr val="212121"/>
+                </a:solidFill>
+                <a:latin typeface="Calibri"/>
+              </a:rPr>
+              <a:t>37,4%</a:t>
+            </a:r>
+          </a:p>
+        </p:txBody>
+      </p:sp>
+      <p:sp>
+        <p:nvSpPr>
+          <p:cNvPr id="55" name="Rectangle 54"/>
+          <p:cNvSpPr/>
+          <p:nvPr/>
+        </p:nvSpPr>
+        <p:spPr>
+          <a:xfrm>
+            <a:off x="3108960" y="5358384"/>
+            <a:ext cx="777240" cy="384048"/>
+          </a:xfrm>
+          <a:prstGeom prst="rect">
+            <a:avLst/>
+          </a:prstGeom>
+          <a:solidFill>
+            <a:srgbClr val="F5F5F5"/>
+          </a:solidFill>
+          <a:ln w="3810">
+            <a:solidFill>
+              <a:srgbClr val="616161"/>
+            </a:solidFill>
+          </a:ln>
+        </p:spPr>
+        <p:style>
+          <a:lnRef idx="1">
+            <a:schemeClr val="accent1"/>
+          </a:lnRef>
+          <a:fillRef idx="3">
+            <a:schemeClr val="accent1"/>
+          </a:fillRef>
+          <a:effectRef idx="2">
+            <a:schemeClr val="accent1"/>
+          </a:effectRef>
+          <a:fontRef idx="minor">
+            <a:schemeClr val="lt1"/>
+          </a:fontRef>
+        </p:style>
+        <p:txBody>
+          <a:bodyPr rtlCol="0" anchor="ctr"/>
+          <a:lstStyle/>
+          <a:p>
+            <a:pPr algn="ctr"/>
+          </a:p>
+        </p:txBody>
+      </p:sp>
+      <p:sp>
+        <p:nvSpPr>
+          <p:cNvPr id="56" name="TextBox 55"/>
+          <p:cNvSpPr txBox="1"/>
+          <p:nvPr/>
+        </p:nvSpPr>
+        <p:spPr>
+          <a:xfrm>
+            <a:off x="3145536" y="5394960"/>
+            <a:ext cx="704088" cy="329184"/>
+          </a:xfrm>
+          <a:prstGeom prst="rect">
+            <a:avLst/>
+          </a:prstGeom>
+          <a:noFill/>
+        </p:spPr>
+        <p:txBody>
+          <a:bodyPr wrap="square">
+            <a:spAutoFit/>
+          </a:bodyPr>
+          <a:lstStyle/>
+          <a:p>
+            <a:pPr algn="ctr"/>
+            <a:r>
+              <a:rPr sz="950" b="0" i="0">
+                <a:solidFill>
+                  <a:srgbClr val="212121"/>
+                </a:solidFill>
+                <a:latin typeface="Calibri"/>
+              </a:rPr>
+              <a:t>81,3%</a:t>
+            </a:r>
+          </a:p>
+        </p:txBody>
+      </p:sp>
+      <p:sp>
+        <p:nvSpPr>
+          <p:cNvPr id="57" name="Rectangle 56"/>
+          <p:cNvSpPr/>
+          <p:nvPr/>
+        </p:nvSpPr>
+        <p:spPr>
+          <a:xfrm>
+            <a:off x="3977639" y="5358384"/>
+            <a:ext cx="777240" cy="384048"/>
+          </a:xfrm>
+          <a:prstGeom prst="rect">
+            <a:avLst/>
+          </a:prstGeom>
+          <a:solidFill>
+            <a:srgbClr val="F5F5F5"/>
+          </a:solidFill>
+          <a:ln w="3810">
+            <a:solidFill>
+              <a:srgbClr val="616161"/>
+            </a:solidFill>
+          </a:ln>
+        </p:spPr>
+        <p:style>
+          <a:lnRef idx="1">
+            <a:schemeClr val="accent1"/>
+          </a:lnRef>
+          <a:fillRef idx="3">
+            <a:schemeClr val="accent1"/>
+          </a:fillRef>
+          <a:effectRef idx="2">
+            <a:schemeClr val="accent1"/>
+          </a:effectRef>
+          <a:fontRef idx="minor">
+            <a:schemeClr val="lt1"/>
+          </a:fontRef>
+        </p:style>
+        <p:txBody>
+          <a:bodyPr rtlCol="0" anchor="ctr"/>
+          <a:lstStyle/>
+          <a:p>
+            <a:pPr algn="ctr"/>
+          </a:p>
+        </p:txBody>
+      </p:sp>
+      <p:sp>
+        <p:nvSpPr>
+          <p:cNvPr id="58" name="TextBox 57"/>
+          <p:cNvSpPr txBox="1"/>
+          <p:nvPr/>
+        </p:nvSpPr>
+        <p:spPr>
+          <a:xfrm>
+            <a:off x="4014215" y="5394960"/>
+            <a:ext cx="704088" cy="329184"/>
+          </a:xfrm>
+          <a:prstGeom prst="rect">
+            <a:avLst/>
+          </a:prstGeom>
+          <a:noFill/>
+        </p:spPr>
+        <p:txBody>
+          <a:bodyPr wrap="square">
+            <a:spAutoFit/>
+          </a:bodyPr>
+          <a:lstStyle/>
+          <a:p>
+            <a:pPr algn="ctr"/>
+            <a:r>
+              <a:rPr sz="950" b="0" i="0">
+                <a:solidFill>
+                  <a:srgbClr val="212121"/>
+                </a:solidFill>
+                <a:latin typeface="Calibri"/>
+              </a:rPr>
+              <a:t>0,0%</a:t>
+            </a:r>
+          </a:p>
+        </p:txBody>
+      </p:sp>
+      <p:sp>
+        <p:nvSpPr>
+          <p:cNvPr id="59" name="Rectangle 58"/>
+          <p:cNvSpPr/>
+          <p:nvPr/>
+        </p:nvSpPr>
+        <p:spPr>
+          <a:xfrm>
+            <a:off x="4892040" y="5358384"/>
+            <a:ext cx="822960" cy="384048"/>
+          </a:xfrm>
+          <a:prstGeom prst="rect">
+            <a:avLst/>
+          </a:prstGeom>
+          <a:solidFill>
+            <a:srgbClr val="F5F5F5"/>
+          </a:solidFill>
+          <a:ln w="3810">
+            <a:solidFill>
+              <a:srgbClr val="616161"/>
+            </a:solidFill>
+          </a:ln>
+        </p:spPr>
+        <p:style>
+          <a:lnRef idx="1">
+            <a:schemeClr val="accent1"/>
+          </a:lnRef>
+          <a:fillRef idx="3">
+            <a:schemeClr val="accent1"/>
+          </a:fillRef>
+          <a:effectRef idx="2">
+            <a:schemeClr val="accent1"/>
+          </a:effectRef>
+          <a:fontRef idx="minor">
+            <a:schemeClr val="lt1"/>
+          </a:fontRef>
+        </p:style>
+        <p:txBody>
+          <a:bodyPr rtlCol="0" anchor="ctr"/>
+          <a:lstStyle/>
+          <a:p>
+            <a:pPr algn="ctr"/>
+          </a:p>
+        </p:txBody>
+      </p:sp>
+      <p:sp>
+        <p:nvSpPr>
+          <p:cNvPr id="60" name="TextBox 59"/>
+          <p:cNvSpPr txBox="1"/>
+          <p:nvPr/>
+        </p:nvSpPr>
+        <p:spPr>
+          <a:xfrm>
+            <a:off x="4928616" y="5394960"/>
+            <a:ext cx="749808" cy="329184"/>
+          </a:xfrm>
+          <a:prstGeom prst="rect">
+            <a:avLst/>
+          </a:prstGeom>
+          <a:noFill/>
+        </p:spPr>
+        <p:txBody>
+          <a:bodyPr wrap="square">
+            <a:spAutoFit/>
+          </a:bodyPr>
+          <a:lstStyle/>
+          <a:p>
+            <a:pPr algn="ctr"/>
+            <a:r>
+              <a:rPr sz="950" b="0" i="0">
+                <a:solidFill>
+                  <a:srgbClr val="212121"/>
+                </a:solidFill>
+                <a:latin typeface="Calibri"/>
+              </a:rPr>
+              <a:t>7,074</a:t>
+            </a:r>
+          </a:p>
+        </p:txBody>
+      </p:sp>
+      <p:sp>
+        <p:nvSpPr>
+          <p:cNvPr id="61" name="Rectangle 60"/>
+          <p:cNvSpPr/>
+          <p:nvPr/>
+        </p:nvSpPr>
+        <p:spPr>
+          <a:xfrm>
+            <a:off x="5806440" y="5358384"/>
+            <a:ext cx="6035040" cy="384048"/>
+          </a:xfrm>
+          <a:prstGeom prst="rect">
+            <a:avLst/>
+          </a:prstGeom>
+          <a:solidFill>
+            <a:srgbClr val="F5F5F5"/>
+          </a:solidFill>
+          <a:ln w="3810">
+            <a:solidFill>
+              <a:srgbClr val="616161"/>
+            </a:solidFill>
+          </a:ln>
+        </p:spPr>
+        <p:style>
+          <a:lnRef idx="1">
+            <a:schemeClr val="accent1"/>
+          </a:lnRef>
+          <a:fillRef idx="3">
+            <a:schemeClr val="accent1"/>
+          </a:fillRef>
+          <a:effectRef idx="2">
+            <a:schemeClr val="accent1"/>
+          </a:effectRef>
+          <a:fontRef idx="minor">
+            <a:schemeClr val="lt1"/>
+          </a:fontRef>
+        </p:style>
+        <p:txBody>
+          <a:bodyPr rtlCol="0" anchor="ctr"/>
+          <a:lstStyle/>
+          <a:p>
+            <a:pPr algn="ctr"/>
+          </a:p>
+        </p:txBody>
+      </p:sp>
+      <p:sp>
+        <p:nvSpPr>
+          <p:cNvPr id="62" name="TextBox 61"/>
+          <p:cNvSpPr txBox="1"/>
+          <p:nvPr/>
+        </p:nvSpPr>
+        <p:spPr>
+          <a:xfrm>
+            <a:off x="5843016" y="5394960"/>
+            <a:ext cx="5961888" cy="329184"/>
+          </a:xfrm>
+          <a:prstGeom prst="rect">
+            <a:avLst/>
+          </a:prstGeom>
+          <a:noFill/>
+        </p:spPr>
+        <p:txBody>
+          <a:bodyPr wrap="square">
+            <a:spAutoFit/>
+          </a:bodyPr>
+          <a:lstStyle/>
+          <a:p>
+            <a:pPr algn="l"/>
+            <a:r>
+              <a:rPr sz="950" b="0" i="0">
+                <a:solidFill>
+                  <a:srgbClr val="212121"/>
+                </a:solidFill>
+                <a:latin typeface="Calibri"/>
+              </a:rPr>
+              <a:t>Homens negros — 36,5% superior, renda 58% &lt; C1</a:t>
+            </a:r>
+          </a:p>
+        </p:txBody>
+      </p:sp>
+      <p:sp>
+        <p:nvSpPr>
+          <p:cNvPr id="63" name="Rectangle 62"/>
+          <p:cNvSpPr/>
+          <p:nvPr/>
+        </p:nvSpPr>
+        <p:spPr>
+          <a:xfrm>
+            <a:off x="274320" y="5687568"/>
+            <a:ext cx="11612880" cy="502920"/>
+          </a:xfrm>
+          <a:prstGeom prst="rect">
+            <a:avLst/>
+          </a:prstGeom>
+          <a:solidFill>
+            <a:srgbClr val="FFF9E7"/>
+          </a:solidFill>
+          <a:ln w="12700">
+            <a:solidFill>
+              <a:srgbClr val="FF8F00"/>
+            </a:solidFill>
+          </a:ln>
+        </p:spPr>
+        <p:style>
+          <a:lnRef idx="1">
+            <a:schemeClr val="accent1"/>
+          </a:lnRef>
+          <a:fillRef idx="3">
+            <a:schemeClr val="accent1"/>
+          </a:fillRef>
+          <a:effectRef idx="2">
+            <a:schemeClr val="accent1"/>
+          </a:effectRef>
+          <a:fontRef idx="minor">
+            <a:schemeClr val="lt1"/>
+          </a:fontRef>
+        </p:style>
+        <p:txBody>
+          <a:bodyPr rtlCol="0" anchor="ctr"/>
+          <a:lstStyle/>
+          <a:p>
+            <a:pPr algn="ctr"/>
+          </a:p>
+        </p:txBody>
+      </p:sp>
+      <p:sp>
+        <p:nvSpPr>
+          <p:cNvPr id="64" name="TextBox 63"/>
+          <p:cNvSpPr txBox="1"/>
+          <p:nvPr/>
+        </p:nvSpPr>
+        <p:spPr>
+          <a:xfrm>
+            <a:off x="457200" y="5733288"/>
+            <a:ext cx="11247120" cy="411480"/>
+          </a:xfrm>
+          <a:prstGeom prst="rect">
+            <a:avLst/>
+          </a:prstGeom>
+          <a:noFill/>
+        </p:spPr>
+        <p:txBody>
+          <a:bodyPr wrap="square">
+            <a:spAutoFit/>
+          </a:bodyPr>
+          <a:lstStyle/>
+          <a:p>
+            <a:pPr algn="l"/>
+            <a:r>
+              <a:rPr sz="1150" b="0" i="0">
+                <a:solidFill>
+                  <a:srgbClr val="1F3864"/>
+                </a:solidFill>
+                <a:latin typeface="Calibri"/>
+              </a:rPr>
+              <a:t>Paradoxo de Simpson: dentro de cada cluster negros ganham mais que brancos — pois brancos nos clusters negros são os piores-off de seu grupo.  H5 confirmado: C2 tem 36,5% de superior vs 13,7% em C1, mas renda 58% inferior.</a:t>
+            </a:r>
+          </a:p>
+        </p:txBody>
+      </p:sp>
+      <p:sp>
+        <p:nvSpPr>
+          <p:cNvPr id="65" name="Rectangle 64"/>
+          <p:cNvSpPr/>
+          <p:nvPr/>
+        </p:nvSpPr>
+        <p:spPr>
+          <a:xfrm>
+            <a:off x="0" y="6601968"/>
+            <a:ext cx="12188952" cy="256032"/>
+          </a:xfrm>
+          <a:prstGeom prst="rect">
+            <a:avLst/>
+          </a:prstGeom>
+          <a:solidFill>
+            <a:srgbClr val="1F3864"/>
+          </a:solidFill>
+          <a:ln/>
+        </p:spPr>
+        <p:style>
+          <a:lnRef idx="1">
+            <a:schemeClr val="accent1"/>
+          </a:lnRef>
+          <a:fillRef idx="3">
+            <a:schemeClr val="accent1"/>
+          </a:fillRef>
+          <a:effectRef idx="2">
+            <a:schemeClr val="accent1"/>
+          </a:effectRef>
+          <a:fontRef idx="minor">
+            <a:schemeClr val="lt1"/>
+          </a:fontRef>
+        </p:style>
+        <p:txBody>
+          <a:bodyPr rtlCol="0" anchor="ctr"/>
+          <a:lstStyle/>
+          <a:p>
+            <a:pPr algn="ctr"/>
+          </a:p>
+        </p:txBody>
+      </p:sp>
+      <p:sp>
+        <p:nvSpPr>
+          <p:cNvPr id="66" name="TextBox 65"/>
           <p:cNvSpPr txBox="1"/>
           <p:nvPr/>
         </p:nvSpPr>
@@ -10721,7 +12775,7 @@
       </p:sp>
       <p:sp>
         <p:nvSpPr>
-          <p:cNvPr id="12" name="TextBox 11"/>
+          <p:cNvPr id="67" name="TextBox 66"/>
           <p:cNvSpPr txBox="1"/>
           <p:nvPr/>
         </p:nvSpPr>
@@ -10843,7 +12897,7 @@
                 </a:solidFill>
                 <a:latin typeface="Calibri"/>
               </a:rPr>
-              <a:t>17. Estado e Desigualdade — H1 / H2 / H3</a:t>
+              <a:t>17. Análise de Redes Sociais — Capital Social e Mobilidade</a:t>
             </a:r>
           </a:p>
         </p:txBody>
@@ -10878,14 +12932,14 @@
                 </a:solidFill>
                 <a:latin typeface="Calibri"/>
               </a:rPr>
-              <a:t>Setor público reduz desigualdade geral mas gap racial persiste — e gap de gênero é MAIOR no público</a:t>
+              <a:t>Betweenness centrality nula para negros em todos os níveis educacionais</a:t>
             </a:r>
           </a:p>
         </p:txBody>
       </p:sp>
       <p:pic>
         <p:nvPicPr>
-          <p:cNvPr id="5" name="Picture 4" descr="estado_h1_gini.png"/>
+          <p:cNvPr id="5" name="Picture 4" descr="sna_rede_demografica.png"/>
           <p:cNvPicPr>
             <a:picLocks noChangeAspect="1"/>
           </p:cNvPicPr>
@@ -10900,647 +12954,206 @@
         <p:spPr>
           <a:xfrm>
             <a:off x="274320" y="1097280"/>
-            <a:ext cx="5760720" cy="2424626"/>
+            <a:ext cx="5943600" cy="4445213"/>
           </a:xfrm>
           <a:prstGeom prst="rect">
             <a:avLst/>
           </a:prstGeom>
         </p:spPr>
       </p:pic>
-      <p:pic>
-        <p:nvPicPr>
-          <p:cNvPr id="6" name="Picture 5" descr="estado_h2h3_gaps.png"/>
-          <p:cNvPicPr>
-            <a:picLocks noChangeAspect="1"/>
-          </p:cNvPicPr>
-          <p:nvPr/>
-        </p:nvPicPr>
-        <p:blipFill>
-          <a:blip r:embed="rId3"/>
-          <a:stretch>
-            <a:fillRect/>
-          </a:stretch>
-        </p:blipFill>
-        <p:spPr>
-          <a:xfrm>
-            <a:off x="6217920" y="1097280"/>
-            <a:ext cx="5669280" cy="2389071"/>
-          </a:xfrm>
-          <a:prstGeom prst="rect">
-            <a:avLst/>
-          </a:prstGeom>
-        </p:spPr>
-      </p:pic>
-      <p:sp>
-        <p:nvSpPr>
-          <p:cNvPr id="7" name="Rectangle 6"/>
+      <p:sp>
+        <p:nvSpPr>
+          <p:cNvPr id="6" name="TextBox 5"/>
+          <p:cNvSpPr txBox="1"/>
+          <p:nvPr/>
+        </p:nvSpPr>
+        <p:spPr>
+          <a:xfrm>
+            <a:off x="6583680" y="1097280"/>
+            <a:ext cx="5394960" cy="365760"/>
+          </a:xfrm>
+          <a:prstGeom prst="rect">
+            <a:avLst/>
+          </a:prstGeom>
+          <a:noFill/>
+        </p:spPr>
+        <p:txBody>
+          <a:bodyPr wrap="square">
+            <a:spAutoFit/>
+          </a:bodyPr>
+          <a:lstStyle/>
+          <a:p>
+            <a:pPr algn="l"/>
+            <a:r>
+              <a:rPr sz="1600" b="1" i="0">
+                <a:solidFill>
+                  <a:srgbClr val="1F3864"/>
+                </a:solidFill>
+                <a:latin typeface="Calibri"/>
+              </a:rPr>
+              <a:t>O que é betweenness centrality?</a:t>
+            </a:r>
+          </a:p>
+        </p:txBody>
+      </p:sp>
+      <p:sp>
+        <p:nvSpPr>
+          <p:cNvPr id="7" name="TextBox 6"/>
+          <p:cNvSpPr txBox="1"/>
+          <p:nvPr/>
+        </p:nvSpPr>
+        <p:spPr>
+          <a:xfrm>
+            <a:off x="6583680" y="1554480"/>
+            <a:ext cx="5394960" cy="3200400"/>
+          </a:xfrm>
+          <a:prstGeom prst="rect">
+            <a:avLst/>
+          </a:prstGeom>
+          <a:noFill/>
+        </p:spPr>
+        <p:txBody>
+          <a:bodyPr wrap="square">
+            <a:spAutoFit/>
+          </a:bodyPr>
+          <a:lstStyle/>
+          <a:p>
+            <a:pPr>
+              <a:spcAft>
+                <a:spcPts val="400"/>
+              </a:spcAft>
+            </a:pPr>
+            <a:r>
+              <a:rPr sz="1300" b="1">
+                <a:solidFill>
+                  <a:srgbClr val="1F3864"/>
+                </a:solidFill>
+                <a:latin typeface="Calibri"/>
+              </a:rPr>
+              <a:t>▸  </a:t>
+            </a:r>
+            <a:r>
+              <a:rPr sz="1300">
+                <a:solidFill>
+                  <a:srgbClr val="212121"/>
+                </a:solidFill>
+                <a:latin typeface="Calibri"/>
+              </a:rPr>
+              <a:t>Mede quem 'conecta' grupos distintos na rede</a:t>
+            </a:r>
+          </a:p>
+          <a:p>
+            <a:pPr>
+              <a:spcAft>
+                <a:spcPts val="400"/>
+              </a:spcAft>
+            </a:pPr>
+            <a:r>
+              <a:rPr sz="1300" b="1">
+                <a:solidFill>
+                  <a:srgbClr val="1F3864"/>
+                </a:solidFill>
+                <a:latin typeface="Calibri"/>
+              </a:rPr>
+              <a:t>▸  </a:t>
+            </a:r>
+            <a:r>
+              <a:rPr sz="1300">
+                <a:solidFill>
+                  <a:srgbClr val="212121"/>
+                </a:solidFill>
+                <a:latin typeface="Calibri"/>
+              </a:rPr>
+              <a:t>Alta betweenness = broker = acesso antecipado a vagas, mentoria, promoções (Burt, 2004)</a:t>
+            </a:r>
+          </a:p>
+          <a:p>
+            <a:pPr>
+              <a:spcAft>
+                <a:spcPts val="400"/>
+              </a:spcAft>
+            </a:pPr>
+            <a:r>
+              <a:rPr sz="1300" b="1">
+                <a:solidFill>
+                  <a:srgbClr val="1F3864"/>
+                </a:solidFill>
+                <a:latin typeface="Calibri"/>
+              </a:rPr>
+              <a:t>▸  </a:t>
+            </a:r>
+            <a:r>
+              <a:rPr sz="1300">
+                <a:solidFill>
+                  <a:srgbClr val="212121"/>
+                </a:solidFill>
+                <a:latin typeface="Calibri"/>
+              </a:rPr>
+              <a:t>BRANCOS: betweenness elevada em todos os níveis educacionais</a:t>
+            </a:r>
+          </a:p>
+          <a:p>
+            <a:pPr>
+              <a:spcAft>
+                <a:spcPts val="400"/>
+              </a:spcAft>
+            </a:pPr>
+            <a:r>
+              <a:rPr sz="1300" b="1">
+                <a:solidFill>
+                  <a:srgbClr val="1F3864"/>
+                </a:solidFill>
+                <a:latin typeface="Calibri"/>
+              </a:rPr>
+              <a:t>▸  </a:t>
+            </a:r>
+            <a:r>
+              <a:rPr sz="1300">
+                <a:solidFill>
+                  <a:srgbClr val="212121"/>
+                </a:solidFill>
+                <a:latin typeface="Calibri"/>
+              </a:rPr>
+              <a:t>NEGROS: betweenness = 0 mesmo com pós-graduação</a:t>
+            </a:r>
+          </a:p>
+          <a:p>
+            <a:pPr>
+              <a:spcAft>
+                <a:spcPts val="400"/>
+              </a:spcAft>
+            </a:pPr>
+            <a:r>
+              <a:rPr sz="1300" b="1">
+                <a:solidFill>
+                  <a:srgbClr val="1F3864"/>
+                </a:solidFill>
+                <a:latin typeface="Calibri"/>
+              </a:rPr>
+              <a:t>▸  </a:t>
+            </a:r>
+            <a:r>
+              <a:rPr sz="1300">
+                <a:solidFill>
+                  <a:srgbClr val="212121"/>
+                </a:solidFill>
+                <a:latin typeface="Calibri"/>
+              </a:rPr>
+              <a:t>Implicação: credenciais educacionais de negros valem menos porque falta acesso às redes de conversão</a:t>
+            </a:r>
+          </a:p>
+        </p:txBody>
+      </p:sp>
+      <p:sp>
+        <p:nvSpPr>
+          <p:cNvPr id="8" name="Rectangle 7"/>
           <p:cNvSpPr/>
           <p:nvPr/>
         </p:nvSpPr>
         <p:spPr>
           <a:xfrm>
-            <a:off x="274320" y="4206240"/>
-            <a:ext cx="2560320" cy="1188720"/>
-          </a:xfrm>
-          <a:prstGeom prst="rect">
-            <a:avLst/>
-          </a:prstGeom>
-          <a:solidFill>
-            <a:srgbClr val="F5F5F5"/>
-          </a:solidFill>
-          <a:ln w="12700">
-            <a:solidFill>
-              <a:srgbClr val="1F3864"/>
-            </a:solidFill>
-          </a:ln>
-        </p:spPr>
-        <p:style>
-          <a:lnRef idx="1">
-            <a:schemeClr val="accent1"/>
-          </a:lnRef>
-          <a:fillRef idx="3">
-            <a:schemeClr val="accent1"/>
-          </a:fillRef>
-          <a:effectRef idx="2">
-            <a:schemeClr val="accent1"/>
-          </a:effectRef>
-          <a:fontRef idx="minor">
-            <a:schemeClr val="lt1"/>
-          </a:fontRef>
-        </p:style>
-        <p:txBody>
-          <a:bodyPr rtlCol="0" anchor="ctr"/>
-          <a:lstStyle/>
-          <a:p>
-            <a:pPr algn="ctr"/>
-          </a:p>
-        </p:txBody>
-      </p:sp>
-      <p:sp>
-        <p:nvSpPr>
-          <p:cNvPr id="8" name="TextBox 7"/>
-          <p:cNvSpPr txBox="1"/>
-          <p:nvPr/>
-        </p:nvSpPr>
-        <p:spPr>
-          <a:xfrm>
-            <a:off x="365760" y="4251960"/>
-            <a:ext cx="2377440" cy="320040"/>
-          </a:xfrm>
-          <a:prstGeom prst="rect">
-            <a:avLst/>
-          </a:prstGeom>
-          <a:noFill/>
-        </p:spPr>
-        <p:txBody>
-          <a:bodyPr wrap="square">
-            <a:spAutoFit/>
-          </a:bodyPr>
-          <a:lstStyle/>
-          <a:p>
-            <a:pPr algn="l"/>
-            <a:r>
-              <a:rPr sz="1100" b="0" i="0">
-                <a:solidFill>
-                  <a:srgbClr val="616161"/>
-                </a:solidFill>
-                <a:latin typeface="Calibri"/>
-              </a:rPr>
-              <a:t>Gini setor público</a:t>
-            </a:r>
-          </a:p>
-        </p:txBody>
-      </p:sp>
-      <p:sp>
-        <p:nvSpPr>
-          <p:cNvPr id="9" name="TextBox 8"/>
-          <p:cNvSpPr txBox="1"/>
-          <p:nvPr/>
-        </p:nvSpPr>
-        <p:spPr>
-          <a:xfrm>
-            <a:off x="365760" y="4526280"/>
-            <a:ext cx="2377440" cy="548640"/>
-          </a:xfrm>
-          <a:prstGeom prst="rect">
-            <a:avLst/>
-          </a:prstGeom>
-          <a:noFill/>
-        </p:spPr>
-        <p:txBody>
-          <a:bodyPr wrap="square">
-            <a:spAutoFit/>
-          </a:bodyPr>
-          <a:lstStyle/>
-          <a:p>
-            <a:pPr algn="l"/>
-            <a:r>
-              <a:rPr sz="3000" b="1" i="0">
-                <a:solidFill>
-                  <a:srgbClr val="1565C0"/>
-                </a:solidFill>
-                <a:latin typeface="Calibri"/>
-              </a:rPr>
-              <a:t>0,466</a:t>
-            </a:r>
-          </a:p>
-        </p:txBody>
-      </p:sp>
-      <p:sp>
-        <p:nvSpPr>
-          <p:cNvPr id="10" name="TextBox 9"/>
-          <p:cNvSpPr txBox="1"/>
-          <p:nvPr/>
-        </p:nvSpPr>
-        <p:spPr>
-          <a:xfrm>
-            <a:off x="365760" y="5047488"/>
-            <a:ext cx="2377440" cy="320040"/>
-          </a:xfrm>
-          <a:prstGeom prst="rect">
-            <a:avLst/>
-          </a:prstGeom>
-          <a:noFill/>
-        </p:spPr>
-        <p:txBody>
-          <a:bodyPr wrap="square">
-            <a:spAutoFit/>
-          </a:bodyPr>
-          <a:lstStyle/>
-          <a:p>
-            <a:pPr algn="l"/>
-            <a:r>
-              <a:rPr sz="1000" b="0" i="1">
-                <a:solidFill>
-                  <a:srgbClr val="616161"/>
-                </a:solidFill>
-                <a:latin typeface="Calibri"/>
-              </a:rPr>
-              <a:t>vs privado 0,472 | total 0,488</a:t>
-            </a:r>
-          </a:p>
-        </p:txBody>
-      </p:sp>
-      <p:sp>
-        <p:nvSpPr>
-          <p:cNvPr id="11" name="Rectangle 10"/>
-          <p:cNvSpPr/>
-          <p:nvPr/>
-        </p:nvSpPr>
-        <p:spPr>
-          <a:xfrm>
-            <a:off x="3017520" y="4206240"/>
-            <a:ext cx="2834640" cy="1188720"/>
-          </a:xfrm>
-          <a:prstGeom prst="rect">
-            <a:avLst/>
-          </a:prstGeom>
-          <a:solidFill>
-            <a:srgbClr val="F5F5F5"/>
-          </a:solidFill>
-          <a:ln w="12700">
-            <a:solidFill>
-              <a:srgbClr val="1F3864"/>
-            </a:solidFill>
-          </a:ln>
-        </p:spPr>
-        <p:style>
-          <a:lnRef idx="1">
-            <a:schemeClr val="accent1"/>
-          </a:lnRef>
-          <a:fillRef idx="3">
-            <a:schemeClr val="accent1"/>
-          </a:fillRef>
-          <a:effectRef idx="2">
-            <a:schemeClr val="accent1"/>
-          </a:effectRef>
-          <a:fontRef idx="minor">
-            <a:schemeClr val="lt1"/>
-          </a:fontRef>
-        </p:style>
-        <p:txBody>
-          <a:bodyPr rtlCol="0" anchor="ctr"/>
-          <a:lstStyle/>
-          <a:p>
-            <a:pPr algn="ctr"/>
-          </a:p>
-        </p:txBody>
-      </p:sp>
-      <p:sp>
-        <p:nvSpPr>
-          <p:cNvPr id="12" name="TextBox 11"/>
-          <p:cNvSpPr txBox="1"/>
-          <p:nvPr/>
-        </p:nvSpPr>
-        <p:spPr>
-          <a:xfrm>
-            <a:off x="3108960" y="4251960"/>
-            <a:ext cx="2651760" cy="320040"/>
-          </a:xfrm>
-          <a:prstGeom prst="rect">
-            <a:avLst/>
-          </a:prstGeom>
-          <a:noFill/>
-        </p:spPr>
-        <p:txBody>
-          <a:bodyPr wrap="square">
-            <a:spAutoFit/>
-          </a:bodyPr>
-          <a:lstStyle/>
-          <a:p>
-            <a:pPr algn="l"/>
-            <a:r>
-              <a:rPr sz="1100" b="0" i="0">
-                <a:solidFill>
-                  <a:srgbClr val="616161"/>
-                </a:solidFill>
-                <a:latin typeface="Calibri"/>
-              </a:rPr>
-              <a:t>Gap racial público</a:t>
-            </a:r>
-          </a:p>
-        </p:txBody>
-      </p:sp>
-      <p:sp>
-        <p:nvSpPr>
-          <p:cNvPr id="13" name="TextBox 12"/>
-          <p:cNvSpPr txBox="1"/>
-          <p:nvPr/>
-        </p:nvSpPr>
-        <p:spPr>
-          <a:xfrm>
-            <a:off x="3108960" y="4526280"/>
-            <a:ext cx="2651760" cy="548640"/>
-          </a:xfrm>
-          <a:prstGeom prst="rect">
-            <a:avLst/>
-          </a:prstGeom>
-          <a:noFill/>
-        </p:spPr>
-        <p:txBody>
-          <a:bodyPr wrap="square">
-            <a:spAutoFit/>
-          </a:bodyPr>
-          <a:lstStyle/>
-          <a:p>
-            <a:pPr algn="l"/>
-            <a:r>
-              <a:rPr sz="3000" b="1" i="0">
-                <a:solidFill>
-                  <a:srgbClr val="B71C1C"/>
-                </a:solidFill>
-                <a:latin typeface="Calibri"/>
-              </a:rPr>
-              <a:t>−25,2%</a:t>
-            </a:r>
-          </a:p>
-        </p:txBody>
-      </p:sp>
-      <p:sp>
-        <p:nvSpPr>
-          <p:cNvPr id="14" name="TextBox 13"/>
-          <p:cNvSpPr txBox="1"/>
-          <p:nvPr/>
-        </p:nvSpPr>
-        <p:spPr>
-          <a:xfrm>
-            <a:off x="3108960" y="5047488"/>
-            <a:ext cx="2651760" cy="320040"/>
-          </a:xfrm>
-          <a:prstGeom prst="rect">
-            <a:avLst/>
-          </a:prstGeom>
-          <a:noFill/>
-        </p:spPr>
-        <p:txBody>
-          <a:bodyPr wrap="square">
-            <a:spAutoFit/>
-          </a:bodyPr>
-          <a:lstStyle/>
-          <a:p>
-            <a:pPr algn="l"/>
-            <a:r>
-              <a:rPr sz="1000" b="0" i="1">
-                <a:solidFill>
-                  <a:srgbClr val="616161"/>
-                </a:solidFill>
-                <a:latin typeface="Calibri"/>
-              </a:rPr>
-              <a:t>controlado | privado −29,2%</a:t>
-            </a:r>
-          </a:p>
-        </p:txBody>
-      </p:sp>
-      <p:sp>
-        <p:nvSpPr>
-          <p:cNvPr id="15" name="Rectangle 14"/>
-          <p:cNvSpPr/>
-          <p:nvPr/>
-        </p:nvSpPr>
-        <p:spPr>
-          <a:xfrm>
-            <a:off x="6035040" y="4206240"/>
-            <a:ext cx="3200400" cy="1188720"/>
-          </a:xfrm>
-          <a:prstGeom prst="rect">
-            <a:avLst/>
-          </a:prstGeom>
-          <a:solidFill>
-            <a:srgbClr val="F5F5F5"/>
-          </a:solidFill>
-          <a:ln w="12700">
-            <a:solidFill>
-              <a:srgbClr val="1F3864"/>
-            </a:solidFill>
-          </a:ln>
-        </p:spPr>
-        <p:style>
-          <a:lnRef idx="1">
-            <a:schemeClr val="accent1"/>
-          </a:lnRef>
-          <a:fillRef idx="3">
-            <a:schemeClr val="accent1"/>
-          </a:fillRef>
-          <a:effectRef idx="2">
-            <a:schemeClr val="accent1"/>
-          </a:effectRef>
-          <a:fontRef idx="minor">
-            <a:schemeClr val="lt1"/>
-          </a:fontRef>
-        </p:style>
-        <p:txBody>
-          <a:bodyPr rtlCol="0" anchor="ctr"/>
-          <a:lstStyle/>
-          <a:p>
-            <a:pPr algn="ctr"/>
-          </a:p>
-        </p:txBody>
-      </p:sp>
-      <p:sp>
-        <p:nvSpPr>
-          <p:cNvPr id="16" name="TextBox 15"/>
-          <p:cNvSpPr txBox="1"/>
-          <p:nvPr/>
-        </p:nvSpPr>
-        <p:spPr>
-          <a:xfrm>
-            <a:off x="6126480" y="4251960"/>
-            <a:ext cx="3017520" cy="320040"/>
-          </a:xfrm>
-          <a:prstGeom prst="rect">
-            <a:avLst/>
-          </a:prstGeom>
-          <a:noFill/>
-        </p:spPr>
-        <p:txBody>
-          <a:bodyPr wrap="square">
-            <a:spAutoFit/>
-          </a:bodyPr>
-          <a:lstStyle/>
-          <a:p>
-            <a:pPr algn="l"/>
-            <a:r>
-              <a:rPr sz="1100" b="0" i="0">
-                <a:solidFill>
-                  <a:srgbClr val="616161"/>
-                </a:solidFill>
-                <a:latin typeface="Calibri"/>
-              </a:rPr>
-              <a:t>Gap gênero público</a:t>
-            </a:r>
-          </a:p>
-        </p:txBody>
-      </p:sp>
-      <p:sp>
-        <p:nvSpPr>
-          <p:cNvPr id="17" name="TextBox 16"/>
-          <p:cNvSpPr txBox="1"/>
-          <p:nvPr/>
-        </p:nvSpPr>
-        <p:spPr>
-          <a:xfrm>
-            <a:off x="6126480" y="4526280"/>
-            <a:ext cx="3017520" cy="548640"/>
-          </a:xfrm>
-          <a:prstGeom prst="rect">
-            <a:avLst/>
-          </a:prstGeom>
-          <a:noFill/>
-        </p:spPr>
-        <p:txBody>
-          <a:bodyPr wrap="square">
-            <a:spAutoFit/>
-          </a:bodyPr>
-          <a:lstStyle/>
-          <a:p>
-            <a:pPr algn="l"/>
-            <a:r>
-              <a:rPr sz="3000" b="1" i="0">
-                <a:solidFill>
-                  <a:srgbClr val="FF8F00"/>
-                </a:solidFill>
-                <a:latin typeface="Calibri"/>
-              </a:rPr>
-              <a:t>−18,8%</a:t>
-            </a:r>
-          </a:p>
-        </p:txBody>
-      </p:sp>
-      <p:sp>
-        <p:nvSpPr>
-          <p:cNvPr id="18" name="TextBox 17"/>
-          <p:cNvSpPr txBox="1"/>
-          <p:nvPr/>
-        </p:nvSpPr>
-        <p:spPr>
-          <a:xfrm>
-            <a:off x="6126480" y="5047488"/>
-            <a:ext cx="3017520" cy="320040"/>
-          </a:xfrm>
-          <a:prstGeom prst="rect">
-            <a:avLst/>
-          </a:prstGeom>
-          <a:noFill/>
-        </p:spPr>
-        <p:txBody>
-          <a:bodyPr wrap="square">
-            <a:spAutoFit/>
-          </a:bodyPr>
-          <a:lstStyle/>
-          <a:p>
-            <a:pPr algn="l"/>
-            <a:r>
-              <a:rPr sz="1000" b="0" i="1">
-                <a:solidFill>
-                  <a:srgbClr val="616161"/>
-                </a:solidFill>
-                <a:latin typeface="Calibri"/>
-              </a:rPr>
-              <a:t>PIOR que privado −16,9% (paradoxo)</a:t>
-            </a:r>
-          </a:p>
-        </p:txBody>
-      </p:sp>
-      <p:sp>
-        <p:nvSpPr>
-          <p:cNvPr id="19" name="Rectangle 18"/>
-          <p:cNvSpPr/>
-          <p:nvPr/>
-        </p:nvSpPr>
-        <p:spPr>
-          <a:xfrm>
-            <a:off x="9418320" y="4206240"/>
-            <a:ext cx="2468880" cy="1188720"/>
-          </a:xfrm>
-          <a:prstGeom prst="rect">
-            <a:avLst/>
-          </a:prstGeom>
-          <a:solidFill>
-            <a:srgbClr val="F5F5F5"/>
-          </a:solidFill>
-          <a:ln w="12700">
-            <a:solidFill>
-              <a:srgbClr val="1F3864"/>
-            </a:solidFill>
-          </a:ln>
-        </p:spPr>
-        <p:style>
-          <a:lnRef idx="1">
-            <a:schemeClr val="accent1"/>
-          </a:lnRef>
-          <a:fillRef idx="3">
-            <a:schemeClr val="accent1"/>
-          </a:fillRef>
-          <a:effectRef idx="2">
-            <a:schemeClr val="accent1"/>
-          </a:effectRef>
-          <a:fontRef idx="minor">
-            <a:schemeClr val="lt1"/>
-          </a:fontRef>
-        </p:style>
-        <p:txBody>
-          <a:bodyPr rtlCol="0" anchor="ctr"/>
-          <a:lstStyle/>
-          <a:p>
-            <a:pPr algn="ctr"/>
-          </a:p>
-        </p:txBody>
-      </p:sp>
-      <p:sp>
-        <p:nvSpPr>
-          <p:cNvPr id="20" name="TextBox 19"/>
-          <p:cNvSpPr txBox="1"/>
-          <p:nvPr/>
-        </p:nvSpPr>
-        <p:spPr>
-          <a:xfrm>
-            <a:off x="9509760" y="4251960"/>
-            <a:ext cx="2286000" cy="320040"/>
-          </a:xfrm>
-          <a:prstGeom prst="rect">
-            <a:avLst/>
-          </a:prstGeom>
-          <a:noFill/>
-        </p:spPr>
-        <p:txBody>
-          <a:bodyPr wrap="square">
-            <a:spAutoFit/>
-          </a:bodyPr>
-          <a:lstStyle/>
-          <a:p>
-            <a:pPr algn="l"/>
-            <a:r>
-              <a:rPr sz="1100" b="0" i="0">
-                <a:solidFill>
-                  <a:srgbClr val="616161"/>
-                </a:solidFill>
-                <a:latin typeface="Calibri"/>
-              </a:rPr>
-              <a:t>Prêmio salarial pub.</a:t>
-            </a:r>
-          </a:p>
-        </p:txBody>
-      </p:sp>
-      <p:sp>
-        <p:nvSpPr>
-          <p:cNvPr id="21" name="TextBox 20"/>
-          <p:cNvSpPr txBox="1"/>
-          <p:nvPr/>
-        </p:nvSpPr>
-        <p:spPr>
-          <a:xfrm>
-            <a:off x="9509760" y="4526280"/>
-            <a:ext cx="2286000" cy="548640"/>
-          </a:xfrm>
-          <a:prstGeom prst="rect">
-            <a:avLst/>
-          </a:prstGeom>
-          <a:noFill/>
-        </p:spPr>
-        <p:txBody>
-          <a:bodyPr wrap="square">
-            <a:spAutoFit/>
-          </a:bodyPr>
-          <a:lstStyle/>
-          <a:p>
-            <a:pPr algn="l"/>
-            <a:r>
-              <a:rPr sz="3000" b="1" i="0">
-                <a:solidFill>
-                  <a:srgbClr val="2E7D32"/>
-                </a:solidFill>
-                <a:latin typeface="Calibri"/>
-              </a:rPr>
-              <a:t>+99,6%</a:t>
-            </a:r>
-          </a:p>
-        </p:txBody>
-      </p:sp>
-      <p:sp>
-        <p:nvSpPr>
-          <p:cNvPr id="22" name="TextBox 21"/>
-          <p:cNvSpPr txBox="1"/>
-          <p:nvPr/>
-        </p:nvSpPr>
-        <p:spPr>
-          <a:xfrm>
-            <a:off x="9509760" y="5047488"/>
-            <a:ext cx="2286000" cy="320040"/>
-          </a:xfrm>
-          <a:prstGeom prst="rect">
-            <a:avLst/>
-          </a:prstGeom>
-          <a:noFill/>
-        </p:spPr>
-        <p:txBody>
-          <a:bodyPr wrap="square">
-            <a:spAutoFit/>
-          </a:bodyPr>
-          <a:lstStyle/>
-          <a:p>
-            <a:pPr algn="l"/>
-            <a:r>
-              <a:rPr sz="1000" b="0" i="1">
-                <a:solidFill>
-                  <a:srgbClr val="616161"/>
-                </a:solidFill>
-                <a:latin typeface="Calibri"/>
-              </a:rPr>
-              <a:t>Theil entre setores: 7,8% do total</a:t>
-            </a:r>
-          </a:p>
-        </p:txBody>
-      </p:sp>
-      <p:sp>
-        <p:nvSpPr>
-          <p:cNvPr id="23" name="Rectangle 22"/>
-          <p:cNvSpPr/>
-          <p:nvPr/>
-        </p:nvSpPr>
-        <p:spPr>
-          <a:xfrm>
-            <a:off x="274320" y="5532120"/>
-            <a:ext cx="11612880" cy="457200"/>
+            <a:off x="6583680" y="4983480"/>
+            <a:ext cx="5394960" cy="777240"/>
           </a:xfrm>
           <a:prstGeom prst="rect">
             <a:avLst/>
@@ -11578,14 +13191,14 @@
       </p:sp>
       <p:sp>
         <p:nvSpPr>
-          <p:cNvPr id="24" name="TextBox 23"/>
-          <p:cNvSpPr txBox="1"/>
-          <p:nvPr/>
-        </p:nvSpPr>
-        <p:spPr>
-          <a:xfrm>
-            <a:off x="457200" y="5577840"/>
-            <a:ext cx="11247120" cy="411480"/>
+          <p:cNvPr id="9" name="TextBox 8"/>
+          <p:cNvSpPr txBox="1"/>
+          <p:nvPr/>
+        </p:nvSpPr>
+        <p:spPr>
+          <a:xfrm>
+            <a:off x="6720840" y="5029200"/>
+            <a:ext cx="5120640" cy="731520"/>
           </a:xfrm>
           <a:prstGeom prst="rect">
             <a:avLst/>
@@ -11600,20 +13213,20 @@
           <a:p>
             <a:pPr algn="l"/>
             <a:r>
-              <a:rPr sz="1150" b="0" i="0">
+              <a:rPr sz="1200" b="0" i="1">
                 <a:solidFill>
                   <a:srgbClr val="1F3864"/>
                 </a:solidFill>
                 <a:latin typeface="Calibri"/>
               </a:rPr>
-              <a:t>H1: Estado reduz levemente o Gini (0,466 vs 0,472) mas prêmio de +99,6% concentra renda entre servidores.  H2: Racismo persiste no público (−25,2%) — atenuado vs privado (−29,2%).  H3 (paradoxo): concurso iguala entrada, mas promoção/DAS favorece homens → gap de gênero maior no público.</a:t>
-            </a:r>
-          </a:p>
-        </p:txBody>
-      </p:sp>
-      <p:sp>
-        <p:nvSpPr>
-          <p:cNvPr id="25" name="Rectangle 24"/>
+              <a:t>"Negros enfrentam um duplo obstáculo ao retorno educacional: o gap direto mensurado pelo HLM e a exclusão das redes que convertem diplomas em empregos."</a:t>
+            </a:r>
+          </a:p>
+        </p:txBody>
+      </p:sp>
+      <p:sp>
+        <p:nvSpPr>
+          <p:cNvPr id="10" name="Rectangle 9"/>
           <p:cNvSpPr/>
           <p:nvPr/>
         </p:nvSpPr>
@@ -11654,7 +13267,7 @@
       </p:sp>
       <p:sp>
         <p:nvSpPr>
-          <p:cNvPr id="26" name="TextBox 25"/>
+          <p:cNvPr id="11" name="TextBox 10"/>
           <p:cNvSpPr txBox="1"/>
           <p:nvPr/>
         </p:nvSpPr>
@@ -11689,7 +13302,7 @@
       </p:sp>
       <p:sp>
         <p:nvSpPr>
-          <p:cNvPr id="27" name="TextBox 26"/>
+          <p:cNvPr id="12" name="TextBox 11"/>
           <p:cNvSpPr txBox="1"/>
           <p:nvPr/>
         </p:nvSpPr>
@@ -11811,7 +13424,7 @@
                 </a:solidFill>
                 <a:latin typeface="Calibri"/>
               </a:rPr>
-              <a:t>18. Renda Real, Armadilha e Inclusão — H4 / H5</a:t>
+              <a:t>18. Estado e Desigualdade — H1 / H2 / H3</a:t>
             </a:r>
           </a:p>
         </p:txBody>
@@ -11846,14 +13459,14 @@
                 </a:solidFill>
                 <a:latin typeface="Calibri"/>
               </a:rPr>
-              <a:t>Pleno emprego sem prosperidade + gap de qualificação quase inalterado em 10 anos</a:t>
+              <a:t>Setor público reduz desigualdade geral mas gap racial persiste — e gap de gênero é MAIOR no público</a:t>
             </a:r>
           </a:p>
         </p:txBody>
       </p:sp>
       <p:pic>
         <p:nvPicPr>
-          <p:cNvPr id="5" name="Picture 4" descr="estado_h4_tendencia.png"/>
+          <p:cNvPr id="5" name="Picture 4" descr="estado_h1_gini.png"/>
           <p:cNvPicPr>
             <a:picLocks noChangeAspect="1"/>
           </p:cNvPicPr>
@@ -11868,7 +13481,7 @@
         <p:spPr>
           <a:xfrm>
             <a:off x="274320" y="1097280"/>
-            <a:ext cx="5760720" cy="2425880"/>
+            <a:ext cx="5760720" cy="2424626"/>
           </a:xfrm>
           <a:prstGeom prst="rect">
             <a:avLst/>
@@ -11877,7 +13490,7 @@
       </p:pic>
       <p:pic>
         <p:nvPicPr>
-          <p:cNvPr id="6" name="Picture 5" descr="estado_h5_armadilha.png"/>
+          <p:cNvPr id="6" name="Picture 5" descr="estado_h2h3_gaps.png"/>
           <p:cNvPicPr>
             <a:picLocks noChangeAspect="1"/>
           </p:cNvPicPr>
@@ -11892,7 +13505,7 @@
         <p:spPr>
           <a:xfrm>
             <a:off x="6217920" y="1097280"/>
-            <a:ext cx="5669280" cy="2384744"/>
+            <a:ext cx="5669280" cy="2389071"/>
           </a:xfrm>
           <a:prstGeom prst="rect">
             <a:avLst/>
@@ -11908,7 +13521,7 @@
         <p:spPr>
           <a:xfrm>
             <a:off x="274320" y="4206240"/>
-            <a:ext cx="2743200" cy="1188720"/>
+            <a:ext cx="2560320" cy="1188720"/>
           </a:xfrm>
           <a:prstGeom prst="rect">
             <a:avLst/>
@@ -11953,7 +13566,7 @@
         <p:spPr>
           <a:xfrm>
             <a:off x="365760" y="4251960"/>
-            <a:ext cx="2560320" cy="320040"/>
+            <a:ext cx="2377440" cy="320040"/>
           </a:xfrm>
           <a:prstGeom prst="rect">
             <a:avLst/>
@@ -11974,7 +13587,7 @@
                 </a:solidFill>
                 <a:latin typeface="Calibri"/>
               </a:rPr>
-              <a:t>Renda real 2025</a:t>
+              <a:t>Gini setor público</a:t>
             </a:r>
           </a:p>
         </p:txBody>
@@ -11988,7 +13601,7 @@
         <p:spPr>
           <a:xfrm>
             <a:off x="365760" y="4526280"/>
-            <a:ext cx="2560320" cy="548640"/>
+            <a:ext cx="2377440" cy="548640"/>
           </a:xfrm>
           <a:prstGeom prst="rect">
             <a:avLst/>
@@ -12005,11 +13618,11 @@
             <a:r>
               <a:rPr sz="3000" b="1" i="0">
                 <a:solidFill>
-                  <a:srgbClr val="B71C1C"/>
-                </a:solidFill>
-                <a:latin typeface="Calibri"/>
-              </a:rPr>
-              <a:t>R$1.283</a:t>
+                  <a:srgbClr val="1565C0"/>
+                </a:solidFill>
+                <a:latin typeface="Calibri"/>
+              </a:rPr>
+              <a:t>0,466</a:t>
             </a:r>
           </a:p>
         </p:txBody>
@@ -12023,7 +13636,7 @@
         <p:spPr>
           <a:xfrm>
             <a:off x="365760" y="5047488"/>
-            <a:ext cx="2560320" cy="320040"/>
+            <a:ext cx="2377440" cy="320040"/>
           </a:xfrm>
           <a:prstGeom prst="rect">
             <a:avLst/>
@@ -12044,7 +13657,7 @@
                 </a:solidFill>
                 <a:latin typeface="Calibri"/>
               </a:rPr>
-              <a:t>vs pico R$1.345 em 2024</a:t>
+              <a:t>vs privado 0,472 | total 0,488</a:t>
             </a:r>
           </a:p>
         </p:txBody>
@@ -12057,8 +13670,8 @@
         </p:nvSpPr>
         <p:spPr>
           <a:xfrm>
-            <a:off x="3200400" y="4206240"/>
-            <a:ext cx="2651760" cy="1188720"/>
+            <a:off x="3017520" y="4206240"/>
+            <a:ext cx="2834640" cy="1188720"/>
           </a:xfrm>
           <a:prstGeom prst="rect">
             <a:avLst/>
@@ -12102,8 +13715,8 @@
         </p:nvSpPr>
         <p:spPr>
           <a:xfrm>
-            <a:off x="3291840" y="4251960"/>
-            <a:ext cx="2468880" cy="320040"/>
+            <a:off x="3108960" y="4251960"/>
+            <a:ext cx="2651760" cy="320040"/>
           </a:xfrm>
           <a:prstGeom prst="rect">
             <a:avLst/>
@@ -12124,7 +13737,7 @@
                 </a:solidFill>
                 <a:latin typeface="Calibri"/>
               </a:rPr>
-              <a:t>Emprego 2025</a:t>
+              <a:t>Gap racial público</a:t>
             </a:r>
           </a:p>
         </p:txBody>
@@ -12137,8 +13750,8 @@
         </p:nvSpPr>
         <p:spPr>
           <a:xfrm>
-            <a:off x="3291840" y="4526280"/>
-            <a:ext cx="2468880" cy="548640"/>
+            <a:off x="3108960" y="4526280"/>
+            <a:ext cx="2651760" cy="548640"/>
           </a:xfrm>
           <a:prstGeom prst="rect">
             <a:avLst/>
@@ -12155,11 +13768,11 @@
             <a:r>
               <a:rPr sz="3000" b="1" i="0">
                 <a:solidFill>
-                  <a:srgbClr val="2E7D32"/>
-                </a:solidFill>
-                <a:latin typeface="Calibri"/>
-              </a:rPr>
-              <a:t>94,4%</a:t>
+                  <a:srgbClr val="B71C1C"/>
+                </a:solidFill>
+                <a:latin typeface="Calibri"/>
+              </a:rPr>
+              <a:t>−25,2%</a:t>
             </a:r>
           </a:p>
         </p:txBody>
@@ -12172,8 +13785,8 @@
         </p:nvSpPr>
         <p:spPr>
           <a:xfrm>
-            <a:off x="3291840" y="5047488"/>
-            <a:ext cx="2468880" cy="320040"/>
+            <a:off x="3108960" y="5047488"/>
+            <a:ext cx="2651760" cy="320040"/>
           </a:xfrm>
           <a:prstGeom prst="rect">
             <a:avLst/>
@@ -12194,7 +13807,7 @@
                 </a:solidFill>
                 <a:latin typeface="Calibri"/>
               </a:rPr>
-              <a:t>máxima histórica da série (2016–2025)</a:t>
+              <a:t>controlado | privado −29,2%</a:t>
             </a:r>
           </a:p>
         </p:txBody>
@@ -12274,7 +13887,7 @@
                 </a:solidFill>
                 <a:latin typeface="Calibri"/>
               </a:rPr>
-              <a:t>Alta qualif. negros</a:t>
+              <a:t>Gap gênero público</a:t>
             </a:r>
           </a:p>
         </p:txBody>
@@ -12305,11 +13918,11 @@
             <a:r>
               <a:rPr sz="3000" b="1" i="0">
                 <a:solidFill>
-                  <a:srgbClr val="B71C1C"/>
-                </a:solidFill>
-                <a:latin typeface="Calibri"/>
-              </a:rPr>
-              <a:t>11,0%</a:t>
+                  <a:srgbClr val="FF8F00"/>
+                </a:solidFill>
+                <a:latin typeface="Calibri"/>
+              </a:rPr>
+              <a:t>−18,8%</a:t>
             </a:r>
           </a:p>
         </p:txBody>
@@ -12344,7 +13957,7 @@
                 </a:solidFill>
                 <a:latin typeface="Calibri"/>
               </a:rPr>
-              <a:t>brancos: 22,4% — gap estável +11pp</a:t>
+              <a:t>PIOR que privado −16,9% (paradoxo)</a:t>
             </a:r>
           </a:p>
         </p:txBody>
@@ -12424,7 +14037,7 @@
                 </a:solidFill>
                 <a:latin typeface="Calibri"/>
               </a:rPr>
-              <a:t>Ganho de inclusão</a:t>
+              <a:t>Prêmio salarial pub.</a:t>
             </a:r>
           </a:p>
         </p:txBody>
@@ -12459,7 +14072,7 @@
                 </a:solidFill>
                 <a:latin typeface="Calibri"/>
               </a:rPr>
-              <a:t>+127,3%</a:t>
+              <a:t>+99,6%</a:t>
             </a:r>
           </a:p>
         </p:txBody>
@@ -12494,7 +14107,7 @@
                 </a:solidFill>
                 <a:latin typeface="Calibri"/>
               </a:rPr>
-              <a:t>renda negra se CBO = branco</a:t>
+              <a:t>Theil entre setores: 7,8% do total</a:t>
             </a:r>
           </a:p>
         </p:txBody>
@@ -12514,11 +14127,11 @@
             <a:avLst/>
           </a:prstGeom>
           <a:solidFill>
-            <a:srgbClr val="FFF9E7"/>
+            <a:srgbClr val="E3F2FD"/>
           </a:solidFill>
-          <a:ln w="12700">
+          <a:ln w="10160">
             <a:solidFill>
-              <a:srgbClr val="FF8F00"/>
+              <a:srgbClr val="1F3864"/>
             </a:solidFill>
           </a:ln>
         </p:spPr>
@@ -12574,7 +14187,7 @@
                 </a:solidFill>
                 <a:latin typeface="Calibri"/>
               </a:rPr>
-              <a:t>H4: Contradição do mercado atual — emprego em máxima histórica (94,4%) mas renda real recua em 2025 (−4,6% vs 2024).  H5: Armadilha da renda média — gap de qualificação (11,0% vs 22,4%) praticamente inalterado após 10 anos. Inclusão produtiva plena = proxy +74,3 p.p. de PIB (Hsieh et al., 2019).</a:t>
+              <a:t>H1: Estado reduz levemente o Gini (0,466 vs 0,472) mas prêmio de +99,6% concentra renda entre servidores.  H2: Racismo persiste no público (−25,2%) — atenuado vs privado (−29,2%).  H3 (paradoxo): concurso iguala entrada, mas promoção/DAS favorece homens → gap de gênero maior no público.</a:t>
             </a:r>
           </a:p>
         </p:txBody>
@@ -13432,7 +15045,7 @@
                 </a:solidFill>
                 <a:latin typeface="Calibri"/>
               </a:rPr>
-              <a:t>19. Por Que Esses Modelos? — Justificação Estatística</a:t>
+              <a:t>19. Renda Real, Armadilha e Inclusão — H4 / H5</a:t>
             </a:r>
           </a:p>
         </p:txBody>
@@ -13467,14 +15080,14 @@
                 </a:solidFill>
                 <a:latin typeface="Calibri"/>
               </a:rPr>
-              <a:t>LRT χ²=191.625 confirma hierarquia | ICC=9,83% &gt; limiar 5% | HLM supera OLS+FE em AIC</a:t>
+              <a:t>Pleno emprego sem prosperidade + gap de qualificação quase inalterado em 10 anos</a:t>
             </a:r>
           </a:p>
         </p:txBody>
       </p:sp>
       <p:pic>
         <p:nvPicPr>
-          <p:cNvPr id="5" name="Picture 4" descr="modelos_loglik_aic.png"/>
+          <p:cNvPr id="5" name="Picture 4" descr="estado_h4_tendencia.png"/>
           <p:cNvPicPr>
             <a:picLocks noChangeAspect="1"/>
           </p:cNvPicPr>
@@ -13489,7 +15102,7 @@
         <p:spPr>
           <a:xfrm>
             <a:off x="274320" y="1097280"/>
-            <a:ext cx="5760720" cy="2458979"/>
+            <a:ext cx="5760720" cy="2425880"/>
           </a:xfrm>
           <a:prstGeom prst="rect">
             <a:avLst/>
@@ -13498,7 +15111,7 @@
       </p:pic>
       <p:pic>
         <p:nvPicPr>
-          <p:cNvPr id="6" name="Picture 5" descr="modelos_lrt_icc.png"/>
+          <p:cNvPr id="6" name="Picture 5" descr="estado_h5_armadilha.png"/>
           <p:cNvPicPr>
             <a:picLocks noChangeAspect="1"/>
           </p:cNvPicPr>
@@ -13513,7 +15126,7 @@
         <p:spPr>
           <a:xfrm>
             <a:off x="6217920" y="1097280"/>
-            <a:ext cx="5669280" cy="2180040"/>
+            <a:ext cx="5669280" cy="2384744"/>
           </a:xfrm>
           <a:prstGeom prst="rect">
             <a:avLst/>
@@ -13528,8 +15141,8 @@
         </p:nvSpPr>
         <p:spPr>
           <a:xfrm>
-            <a:off x="274320" y="4160520"/>
-            <a:ext cx="3566160" cy="1188720"/>
+            <a:off x="274320" y="4206240"/>
+            <a:ext cx="2743200" cy="1188720"/>
           </a:xfrm>
           <a:prstGeom prst="rect">
             <a:avLst/>
@@ -13573,8 +15186,8 @@
         </p:nvSpPr>
         <p:spPr>
           <a:xfrm>
-            <a:off x="365760" y="4206240"/>
-            <a:ext cx="3383280" cy="320040"/>
+            <a:off x="365760" y="4251960"/>
+            <a:ext cx="2560320" cy="320040"/>
           </a:xfrm>
           <a:prstGeom prst="rect">
             <a:avLst/>
@@ -13595,7 +15208,7 @@
                 </a:solidFill>
                 <a:latin typeface="Calibri"/>
               </a:rPr>
-              <a:t>LRT HLM vs OLS (nulo)</a:t>
+              <a:t>Renda real 2025</a:t>
             </a:r>
           </a:p>
         </p:txBody>
@@ -13608,8 +15221,8 @@
         </p:nvSpPr>
         <p:spPr>
           <a:xfrm>
-            <a:off x="365760" y="4480560"/>
-            <a:ext cx="3383280" cy="548640"/>
+            <a:off x="365760" y="4526280"/>
+            <a:ext cx="2560320" cy="548640"/>
           </a:xfrm>
           <a:prstGeom prst="rect">
             <a:avLst/>
@@ -13626,11 +15239,11 @@
             <a:r>
               <a:rPr sz="3000" b="1" i="0">
                 <a:solidFill>
-                  <a:srgbClr val="1F3864"/>
-                </a:solidFill>
-                <a:latin typeface="Calibri"/>
-              </a:rPr>
-              <a:t>191.625</a:t>
+                  <a:srgbClr val="B71C1C"/>
+                </a:solidFill>
+                <a:latin typeface="Calibri"/>
+              </a:rPr>
+              <a:t>R$1.283</a:t>
             </a:r>
           </a:p>
         </p:txBody>
@@ -13643,8 +15256,8 @@
         </p:nvSpPr>
         <p:spPr>
           <a:xfrm>
-            <a:off x="365760" y="5001768"/>
-            <a:ext cx="3383280" cy="320040"/>
+            <a:off x="365760" y="5047488"/>
+            <a:ext cx="2560320" cy="320040"/>
           </a:xfrm>
           <a:prstGeom prst="rect">
             <a:avLst/>
@@ -13665,7 +15278,7 @@
                 </a:solidFill>
                 <a:latin typeface="Calibri"/>
               </a:rPr>
-              <a:t>χ² Δk=1 — hierarquia confirmada</a:t>
+              <a:t>vs pico R$1.345 em 2024</a:t>
             </a:r>
           </a:p>
         </p:txBody>
@@ -13678,8 +15291,8 @@
         </p:nvSpPr>
         <p:spPr>
           <a:xfrm>
-            <a:off x="4023360" y="4160520"/>
-            <a:ext cx="3200400" cy="1188720"/>
+            <a:off x="3200400" y="4206240"/>
+            <a:ext cx="2651760" cy="1188720"/>
           </a:xfrm>
           <a:prstGeom prst="rect">
             <a:avLst/>
@@ -13723,8 +15336,8 @@
         </p:nvSpPr>
         <p:spPr>
           <a:xfrm>
-            <a:off x="4114800" y="4206240"/>
-            <a:ext cx="3017520" cy="320040"/>
+            <a:off x="3291840" y="4251960"/>
+            <a:ext cx="2468880" cy="320040"/>
           </a:xfrm>
           <a:prstGeom prst="rect">
             <a:avLst/>
@@ -13745,7 +15358,7 @@
                 </a:solidFill>
                 <a:latin typeface="Calibri"/>
               </a:rPr>
-              <a:t>ICC por UPA</a:t>
+              <a:t>Emprego 2025</a:t>
             </a:r>
           </a:p>
         </p:txBody>
@@ -13758,8 +15371,8 @@
         </p:nvSpPr>
         <p:spPr>
           <a:xfrm>
-            <a:off x="4114800" y="4480560"/>
-            <a:ext cx="3017520" cy="548640"/>
+            <a:off x="3291840" y="4526280"/>
+            <a:ext cx="2468880" cy="548640"/>
           </a:xfrm>
           <a:prstGeom prst="rect">
             <a:avLst/>
@@ -13776,11 +15389,11 @@
             <a:r>
               <a:rPr sz="3000" b="1" i="0">
                 <a:solidFill>
-                  <a:srgbClr val="1565C0"/>
-                </a:solidFill>
-                <a:latin typeface="Calibri"/>
-              </a:rPr>
-              <a:t>9,83%</a:t>
+                  <a:srgbClr val="2E7D32"/>
+                </a:solidFill>
+                <a:latin typeface="Calibri"/>
+              </a:rPr>
+              <a:t>94,4%</a:t>
             </a:r>
           </a:p>
         </p:txBody>
@@ -13793,8 +15406,8 @@
         </p:nvSpPr>
         <p:spPr>
           <a:xfrm>
-            <a:off x="4114800" y="5001768"/>
-            <a:ext cx="3017520" cy="320040"/>
+            <a:off x="3291840" y="5047488"/>
+            <a:ext cx="2468880" cy="320040"/>
           </a:xfrm>
           <a:prstGeom prst="rect">
             <a:avLst/>
@@ -13815,7 +15428,7 @@
                 </a:solidFill>
                 <a:latin typeface="Calibri"/>
               </a:rPr>
-              <a:t>&gt; 5% — Raudenbush &amp; Bryk (2002)</a:t>
+              <a:t>máxima histórica da série (2016–2025)</a:t>
             </a:r>
           </a:p>
         </p:txBody>
@@ -13828,8 +15441,8 @@
         </p:nvSpPr>
         <p:spPr>
           <a:xfrm>
-            <a:off x="7406640" y="4160520"/>
-            <a:ext cx="4572000" cy="1188720"/>
+            <a:off x="6035040" y="4206240"/>
+            <a:ext cx="3200400" cy="1188720"/>
           </a:xfrm>
           <a:prstGeom prst="rect">
             <a:avLst/>
@@ -13873,8 +15486,8 @@
         </p:nvSpPr>
         <p:spPr>
           <a:xfrm>
-            <a:off x="7498080" y="4206240"/>
-            <a:ext cx="4389120" cy="320040"/>
+            <a:off x="6126480" y="4251960"/>
+            <a:ext cx="3017520" cy="320040"/>
           </a:xfrm>
           <a:prstGeom prst="rect">
             <a:avLst/>
@@ -13895,7 +15508,7 @@
                 </a:solidFill>
                 <a:latin typeface="Calibri"/>
               </a:rPr>
-              <a:t>AIC HLM Contextual</a:t>
+              <a:t>Alta qualif. negros</a:t>
             </a:r>
           </a:p>
         </p:txBody>
@@ -13908,8 +15521,8 @@
         </p:nvSpPr>
         <p:spPr>
           <a:xfrm>
-            <a:off x="7498080" y="4480560"/>
-            <a:ext cx="4389120" cy="548640"/>
+            <a:off x="6126480" y="4526280"/>
+            <a:ext cx="3017520" cy="548640"/>
           </a:xfrm>
           <a:prstGeom prst="rect">
             <a:avLst/>
@@ -13926,11 +15539,11 @@
             <a:r>
               <a:rPr sz="3000" b="1" i="0">
                 <a:solidFill>
-                  <a:srgbClr val="2E7D32"/>
-                </a:solidFill>
-                <a:latin typeface="Calibri"/>
-              </a:rPr>
-              <a:t>3.588.684</a:t>
+                  <a:srgbClr val="B71C1C"/>
+                </a:solidFill>
+                <a:latin typeface="Calibri"/>
+              </a:rPr>
+              <a:t>11,0%</a:t>
             </a:r>
           </a:p>
         </p:txBody>
@@ -13943,8 +15556,8 @@
         </p:nvSpPr>
         <p:spPr>
           <a:xfrm>
-            <a:off x="7498080" y="5001768"/>
-            <a:ext cx="4389120" cy="320040"/>
+            <a:off x="6126480" y="5047488"/>
+            <a:ext cx="3017520" cy="320040"/>
           </a:xfrm>
           <a:prstGeom prst="rect">
             <a:avLst/>
@@ -13965,127 +15578,33 @@
                 </a:solidFill>
                 <a:latin typeface="Calibri"/>
               </a:rPr>
-              <a:t>OLS+FE(UF): 3.684.833 (+96k pior)</a:t>
-            </a:r>
-          </a:p>
-        </p:txBody>
-      </p:sp>
-      <p:sp>
-        <p:nvSpPr>
-          <p:cNvPr id="19" name="TextBox 18"/>
-          <p:cNvSpPr txBox="1"/>
-          <p:nvPr/>
-        </p:nvSpPr>
-        <p:spPr>
-          <a:xfrm>
-            <a:off x="274320" y="5440680"/>
-            <a:ext cx="11612880" cy="1051560"/>
-          </a:xfrm>
-          <a:prstGeom prst="rect">
-            <a:avLst/>
-          </a:prstGeom>
-          <a:noFill/>
-        </p:spPr>
-        <p:txBody>
-          <a:bodyPr wrap="square">
-            <a:spAutoFit/>
-          </a:bodyPr>
-          <a:lstStyle/>
-          <a:p>
-            <a:pPr>
-              <a:spcAft>
-                <a:spcPts val="400"/>
-              </a:spcAft>
-            </a:pPr>
-            <a:r>
-              <a:rPr sz="1300" b="1">
-                <a:solidFill>
-                  <a:srgbClr val="1F3864"/>
-                </a:solidFill>
-                <a:latin typeface="Calibri"/>
-              </a:rPr>
-              <a:t>▸  </a:t>
-            </a:r>
-            <a:r>
-              <a:rPr sz="1300">
-                <a:solidFill>
-                  <a:srgbClr val="212121"/>
-                </a:solidFill>
-                <a:latin typeface="Calibri"/>
-              </a:rPr>
-              <a:t>OLS ignora correlação intra-UPA → erros padrão subestimados → inferência inválida (θ OLS ≠ θ BLUP)</a:t>
-            </a:r>
-          </a:p>
-          <a:p>
-            <a:pPr>
-              <a:spcAft>
-                <a:spcPts val="400"/>
-              </a:spcAft>
-            </a:pPr>
-            <a:r>
-              <a:rPr sz="1300" b="1">
-                <a:solidFill>
-                  <a:srgbClr val="1F3864"/>
-                </a:solidFill>
-                <a:latin typeface="Calibri"/>
-              </a:rPr>
-              <a:t>▸  </a:t>
-            </a:r>
-            <a:r>
-              <a:rPr sz="1300">
-                <a:solidFill>
-                  <a:srgbClr val="212121"/>
-                </a:solidFill>
-                <a:latin typeface="Calibri"/>
-              </a:rPr>
-              <a:t>OLS+FE(UF) piora AIC vs OLS Individual: dummies de UF são grosseiras demais para capturar variação intra-estado</a:t>
-            </a:r>
-          </a:p>
-          <a:p>
-            <a:pPr>
-              <a:spcAft>
-                <a:spcPts val="400"/>
-              </a:spcAft>
-            </a:pPr>
-            <a:r>
-              <a:rPr sz="1300" b="1">
-                <a:solidFill>
-                  <a:srgbClr val="1F3864"/>
-                </a:solidFill>
-                <a:latin typeface="Calibri"/>
-              </a:rPr>
-              <a:t>▸  </a:t>
-            </a:r>
-            <a:r>
-              <a:rPr sz="1300">
-                <a:solidFill>
-                  <a:srgbClr val="212121"/>
-                </a:solidFill>
-                <a:latin typeface="Calibri"/>
-              </a:rPr>
-              <a:t>HLM 3 níveis (indivíduo &gt; UPA &gt; UF) é o único estimador com estrutura compatível com os dados e inferência válida</a:t>
-            </a:r>
-          </a:p>
-        </p:txBody>
-      </p:sp>
-      <p:sp>
-        <p:nvSpPr>
-          <p:cNvPr id="20" name="Rectangle 19"/>
+              <a:t>brancos: 22,4% — gap estável +11pp</a:t>
+            </a:r>
+          </a:p>
+        </p:txBody>
+      </p:sp>
+      <p:sp>
+        <p:nvSpPr>
+          <p:cNvPr id="19" name="Rectangle 18"/>
           <p:cNvSpPr/>
           <p:nvPr/>
         </p:nvSpPr>
         <p:spPr>
           <a:xfrm>
-            <a:off x="0" y="6601968"/>
-            <a:ext cx="12188952" cy="256032"/>
+            <a:off x="9418320" y="4206240"/>
+            <a:ext cx="2468880" cy="1188720"/>
           </a:xfrm>
           <a:prstGeom prst="rect">
             <a:avLst/>
           </a:prstGeom>
           <a:solidFill>
-            <a:srgbClr val="1F3864"/>
+            <a:srgbClr val="F5F5F5"/>
           </a:solidFill>
-          <a:ln/>
+          <a:ln w="12700">
+            <a:solidFill>
+              <a:srgbClr val="1F3864"/>
+            </a:solidFill>
+          </a:ln>
         </p:spPr>
         <p:style>
           <a:lnRef idx="1">
@@ -14111,7 +15630,233 @@
       </p:sp>
       <p:sp>
         <p:nvSpPr>
+          <p:cNvPr id="20" name="TextBox 19"/>
+          <p:cNvSpPr txBox="1"/>
+          <p:nvPr/>
+        </p:nvSpPr>
+        <p:spPr>
+          <a:xfrm>
+            <a:off x="9509760" y="4251960"/>
+            <a:ext cx="2286000" cy="320040"/>
+          </a:xfrm>
+          <a:prstGeom prst="rect">
+            <a:avLst/>
+          </a:prstGeom>
+          <a:noFill/>
+        </p:spPr>
+        <p:txBody>
+          <a:bodyPr wrap="square">
+            <a:spAutoFit/>
+          </a:bodyPr>
+          <a:lstStyle/>
+          <a:p>
+            <a:pPr algn="l"/>
+            <a:r>
+              <a:rPr sz="1100" b="0" i="0">
+                <a:solidFill>
+                  <a:srgbClr val="616161"/>
+                </a:solidFill>
+                <a:latin typeface="Calibri"/>
+              </a:rPr>
+              <a:t>Ganho de inclusão</a:t>
+            </a:r>
+          </a:p>
+        </p:txBody>
+      </p:sp>
+      <p:sp>
+        <p:nvSpPr>
           <p:cNvPr id="21" name="TextBox 20"/>
+          <p:cNvSpPr txBox="1"/>
+          <p:nvPr/>
+        </p:nvSpPr>
+        <p:spPr>
+          <a:xfrm>
+            <a:off x="9509760" y="4526280"/>
+            <a:ext cx="2286000" cy="548640"/>
+          </a:xfrm>
+          <a:prstGeom prst="rect">
+            <a:avLst/>
+          </a:prstGeom>
+          <a:noFill/>
+        </p:spPr>
+        <p:txBody>
+          <a:bodyPr wrap="square">
+            <a:spAutoFit/>
+          </a:bodyPr>
+          <a:lstStyle/>
+          <a:p>
+            <a:pPr algn="l"/>
+            <a:r>
+              <a:rPr sz="3000" b="1" i="0">
+                <a:solidFill>
+                  <a:srgbClr val="2E7D32"/>
+                </a:solidFill>
+                <a:latin typeface="Calibri"/>
+              </a:rPr>
+              <a:t>+127,3%</a:t>
+            </a:r>
+          </a:p>
+        </p:txBody>
+      </p:sp>
+      <p:sp>
+        <p:nvSpPr>
+          <p:cNvPr id="22" name="TextBox 21"/>
+          <p:cNvSpPr txBox="1"/>
+          <p:nvPr/>
+        </p:nvSpPr>
+        <p:spPr>
+          <a:xfrm>
+            <a:off x="9509760" y="5047488"/>
+            <a:ext cx="2286000" cy="320040"/>
+          </a:xfrm>
+          <a:prstGeom prst="rect">
+            <a:avLst/>
+          </a:prstGeom>
+          <a:noFill/>
+        </p:spPr>
+        <p:txBody>
+          <a:bodyPr wrap="square">
+            <a:spAutoFit/>
+          </a:bodyPr>
+          <a:lstStyle/>
+          <a:p>
+            <a:pPr algn="l"/>
+            <a:r>
+              <a:rPr sz="1000" b="0" i="1">
+                <a:solidFill>
+                  <a:srgbClr val="616161"/>
+                </a:solidFill>
+                <a:latin typeface="Calibri"/>
+              </a:rPr>
+              <a:t>renda negra se CBO = branco</a:t>
+            </a:r>
+          </a:p>
+        </p:txBody>
+      </p:sp>
+      <p:sp>
+        <p:nvSpPr>
+          <p:cNvPr id="23" name="Rectangle 22"/>
+          <p:cNvSpPr/>
+          <p:nvPr/>
+        </p:nvSpPr>
+        <p:spPr>
+          <a:xfrm>
+            <a:off x="274320" y="5532120"/>
+            <a:ext cx="11612880" cy="457200"/>
+          </a:xfrm>
+          <a:prstGeom prst="rect">
+            <a:avLst/>
+          </a:prstGeom>
+          <a:solidFill>
+            <a:srgbClr val="FFF9E7"/>
+          </a:solidFill>
+          <a:ln w="12700">
+            <a:solidFill>
+              <a:srgbClr val="FF8F00"/>
+            </a:solidFill>
+          </a:ln>
+        </p:spPr>
+        <p:style>
+          <a:lnRef idx="1">
+            <a:schemeClr val="accent1"/>
+          </a:lnRef>
+          <a:fillRef idx="3">
+            <a:schemeClr val="accent1"/>
+          </a:fillRef>
+          <a:effectRef idx="2">
+            <a:schemeClr val="accent1"/>
+          </a:effectRef>
+          <a:fontRef idx="minor">
+            <a:schemeClr val="lt1"/>
+          </a:fontRef>
+        </p:style>
+        <p:txBody>
+          <a:bodyPr rtlCol="0" anchor="ctr"/>
+          <a:lstStyle/>
+          <a:p>
+            <a:pPr algn="ctr"/>
+          </a:p>
+        </p:txBody>
+      </p:sp>
+      <p:sp>
+        <p:nvSpPr>
+          <p:cNvPr id="24" name="TextBox 23"/>
+          <p:cNvSpPr txBox="1"/>
+          <p:nvPr/>
+        </p:nvSpPr>
+        <p:spPr>
+          <a:xfrm>
+            <a:off x="457200" y="5577840"/>
+            <a:ext cx="11247120" cy="411480"/>
+          </a:xfrm>
+          <a:prstGeom prst="rect">
+            <a:avLst/>
+          </a:prstGeom>
+          <a:noFill/>
+        </p:spPr>
+        <p:txBody>
+          <a:bodyPr wrap="square">
+            <a:spAutoFit/>
+          </a:bodyPr>
+          <a:lstStyle/>
+          <a:p>
+            <a:pPr algn="l"/>
+            <a:r>
+              <a:rPr sz="1150" b="0" i="0">
+                <a:solidFill>
+                  <a:srgbClr val="1F3864"/>
+                </a:solidFill>
+                <a:latin typeface="Calibri"/>
+              </a:rPr>
+              <a:t>H4: Contradição do mercado atual — emprego em máxima histórica (94,4%) mas renda real recua em 2025 (−4,6% vs 2024).  H5: Armadilha da renda média — gap de qualificação (11,0% vs 22,4%) praticamente inalterado após 10 anos. Inclusão produtiva plena = proxy +74,3 p.p. de PIB (Hsieh et al., 2019).</a:t>
+            </a:r>
+          </a:p>
+        </p:txBody>
+      </p:sp>
+      <p:sp>
+        <p:nvSpPr>
+          <p:cNvPr id="25" name="Rectangle 24"/>
+          <p:cNvSpPr/>
+          <p:nvPr/>
+        </p:nvSpPr>
+        <p:spPr>
+          <a:xfrm>
+            <a:off x="0" y="6601968"/>
+            <a:ext cx="12188952" cy="256032"/>
+          </a:xfrm>
+          <a:prstGeom prst="rect">
+            <a:avLst/>
+          </a:prstGeom>
+          <a:solidFill>
+            <a:srgbClr val="1F3864"/>
+          </a:solidFill>
+          <a:ln/>
+        </p:spPr>
+        <p:style>
+          <a:lnRef idx="1">
+            <a:schemeClr val="accent1"/>
+          </a:lnRef>
+          <a:fillRef idx="3">
+            <a:schemeClr val="accent1"/>
+          </a:fillRef>
+          <a:effectRef idx="2">
+            <a:schemeClr val="accent1"/>
+          </a:effectRef>
+          <a:fontRef idx="minor">
+            <a:schemeClr val="lt1"/>
+          </a:fontRef>
+        </p:style>
+        <p:txBody>
+          <a:bodyPr rtlCol="0" anchor="ctr"/>
+          <a:lstStyle/>
+          <a:p>
+            <a:pPr algn="ctr"/>
+          </a:p>
+        </p:txBody>
+      </p:sp>
+      <p:sp>
+        <p:nvSpPr>
+          <p:cNvPr id="26" name="TextBox 25"/>
           <p:cNvSpPr txBox="1"/>
           <p:nvPr/>
         </p:nvSpPr>
@@ -14146,7 +15891,7 @@
       </p:sp>
       <p:sp>
         <p:nvSpPr>
-          <p:cNvPr id="22" name="TextBox 21"/>
+          <p:cNvPr id="27" name="TextBox 26"/>
           <p:cNvSpPr txBox="1"/>
           <p:nvPr/>
         </p:nvSpPr>
@@ -14268,7 +16013,7 @@
                 </a:solidFill>
                 <a:latin typeface="Calibri"/>
               </a:rPr>
-              <a:t>20. Síntese — Triângulo de Evidências</a:t>
+              <a:t>20. Por Que Esses Modelos? — Justificação Estatística</a:t>
             </a:r>
           </a:p>
         </p:txBody>
@@ -14303,21 +16048,69 @@
                 </a:solidFill>
                 <a:latin typeface="Calibri"/>
               </a:rPr>
-              <a:t>5 métodos independentes apontam para o mesmo diagnóstico</a:t>
-            </a:r>
-          </a:p>
-        </p:txBody>
-      </p:sp>
-      <p:sp>
-        <p:nvSpPr>
-          <p:cNvPr id="5" name="Rectangle 4"/>
+              <a:t>LRT χ²=191.625 confirma hierarquia | ICC=9,83% &gt; limiar 5% | HLM supera OLS+FE em AIC</a:t>
+            </a:r>
+          </a:p>
+        </p:txBody>
+      </p:sp>
+      <p:pic>
+        <p:nvPicPr>
+          <p:cNvPr id="5" name="Picture 4" descr="modelos_loglik_aic.png"/>
+          <p:cNvPicPr>
+            <a:picLocks noChangeAspect="1"/>
+          </p:cNvPicPr>
+          <p:nvPr/>
+        </p:nvPicPr>
+        <p:blipFill>
+          <a:blip r:embed="rId2"/>
+          <a:stretch>
+            <a:fillRect/>
+          </a:stretch>
+        </p:blipFill>
+        <p:spPr>
+          <a:xfrm>
+            <a:off x="274320" y="1097280"/>
+            <a:ext cx="5760720" cy="2458979"/>
+          </a:xfrm>
+          <a:prstGeom prst="rect">
+            <a:avLst/>
+          </a:prstGeom>
+        </p:spPr>
+      </p:pic>
+      <p:pic>
+        <p:nvPicPr>
+          <p:cNvPr id="6" name="Picture 5" descr="modelos_lrt_icc.png"/>
+          <p:cNvPicPr>
+            <a:picLocks noChangeAspect="1"/>
+          </p:cNvPicPr>
+          <p:nvPr/>
+        </p:nvPicPr>
+        <p:blipFill>
+          <a:blip r:embed="rId3"/>
+          <a:stretch>
+            <a:fillRect/>
+          </a:stretch>
+        </p:blipFill>
+        <p:spPr>
+          <a:xfrm>
+            <a:off x="6217920" y="1097280"/>
+            <a:ext cx="5669280" cy="2180040"/>
+          </a:xfrm>
+          <a:prstGeom prst="rect">
+            <a:avLst/>
+          </a:prstGeom>
+        </p:spPr>
+      </p:pic>
+      <p:sp>
+        <p:nvSpPr>
+          <p:cNvPr id="7" name="Rectangle 6"/>
           <p:cNvSpPr/>
           <p:nvPr/>
         </p:nvSpPr>
         <p:spPr>
           <a:xfrm>
-            <a:off x="274320" y="1188720"/>
-            <a:ext cx="5303520" cy="2377440"/>
+            <a:off x="274320" y="4160520"/>
+            <a:ext cx="3566160" cy="1188720"/>
           </a:xfrm>
           <a:prstGeom prst="rect">
             <a:avLst/>
@@ -14325,9 +16118,9 @@
           <a:solidFill>
             <a:srgbClr val="F5F5F5"/>
           </a:solidFill>
-          <a:ln w="19050">
+          <a:ln w="12700">
             <a:solidFill>
-              <a:srgbClr val="B71C1C"/>
+              <a:srgbClr val="1F3864"/>
             </a:solidFill>
           </a:ln>
         </p:spPr>
@@ -14355,22 +16148,131 @@
       </p:sp>
       <p:sp>
         <p:nvSpPr>
-          <p:cNvPr id="6" name="Rectangle 5"/>
+          <p:cNvPr id="8" name="TextBox 7"/>
+          <p:cNvSpPr txBox="1"/>
+          <p:nvPr/>
+        </p:nvSpPr>
+        <p:spPr>
+          <a:xfrm>
+            <a:off x="365760" y="4206240"/>
+            <a:ext cx="3383280" cy="320040"/>
+          </a:xfrm>
+          <a:prstGeom prst="rect">
+            <a:avLst/>
+          </a:prstGeom>
+          <a:noFill/>
+        </p:spPr>
+        <p:txBody>
+          <a:bodyPr wrap="square">
+            <a:spAutoFit/>
+          </a:bodyPr>
+          <a:lstStyle/>
+          <a:p>
+            <a:pPr algn="l"/>
+            <a:r>
+              <a:rPr sz="1100" b="0" i="0">
+                <a:solidFill>
+                  <a:srgbClr val="616161"/>
+                </a:solidFill>
+                <a:latin typeface="Calibri"/>
+              </a:rPr>
+              <a:t>LRT HLM vs OLS (nulo)</a:t>
+            </a:r>
+          </a:p>
+        </p:txBody>
+      </p:sp>
+      <p:sp>
+        <p:nvSpPr>
+          <p:cNvPr id="9" name="TextBox 8"/>
+          <p:cNvSpPr txBox="1"/>
+          <p:nvPr/>
+        </p:nvSpPr>
+        <p:spPr>
+          <a:xfrm>
+            <a:off x="365760" y="4480560"/>
+            <a:ext cx="3383280" cy="548640"/>
+          </a:xfrm>
+          <a:prstGeom prst="rect">
+            <a:avLst/>
+          </a:prstGeom>
+          <a:noFill/>
+        </p:spPr>
+        <p:txBody>
+          <a:bodyPr wrap="square">
+            <a:spAutoFit/>
+          </a:bodyPr>
+          <a:lstStyle/>
+          <a:p>
+            <a:pPr algn="l"/>
+            <a:r>
+              <a:rPr sz="3000" b="1" i="0">
+                <a:solidFill>
+                  <a:srgbClr val="1F3864"/>
+                </a:solidFill>
+                <a:latin typeface="Calibri"/>
+              </a:rPr>
+              <a:t>191.625</a:t>
+            </a:r>
+          </a:p>
+        </p:txBody>
+      </p:sp>
+      <p:sp>
+        <p:nvSpPr>
+          <p:cNvPr id="10" name="TextBox 9"/>
+          <p:cNvSpPr txBox="1"/>
+          <p:nvPr/>
+        </p:nvSpPr>
+        <p:spPr>
+          <a:xfrm>
+            <a:off x="365760" y="5001768"/>
+            <a:ext cx="3383280" cy="320040"/>
+          </a:xfrm>
+          <a:prstGeom prst="rect">
+            <a:avLst/>
+          </a:prstGeom>
+          <a:noFill/>
+        </p:spPr>
+        <p:txBody>
+          <a:bodyPr wrap="square">
+            <a:spAutoFit/>
+          </a:bodyPr>
+          <a:lstStyle/>
+          <a:p>
+            <a:pPr algn="l"/>
+            <a:r>
+              <a:rPr sz="1000" b="0" i="1">
+                <a:solidFill>
+                  <a:srgbClr val="616161"/>
+                </a:solidFill>
+                <a:latin typeface="Calibri"/>
+              </a:rPr>
+              <a:t>χ² Δk=1 — hierarquia confirmada</a:t>
+            </a:r>
+          </a:p>
+        </p:txBody>
+      </p:sp>
+      <p:sp>
+        <p:nvSpPr>
+          <p:cNvPr id="11" name="Rectangle 10"/>
           <p:cNvSpPr/>
           <p:nvPr/>
         </p:nvSpPr>
         <p:spPr>
           <a:xfrm>
-            <a:off x="274320" y="1188720"/>
-            <a:ext cx="5303520" cy="457200"/>
+            <a:off x="4023360" y="4160520"/>
+            <a:ext cx="3200400" cy="1188720"/>
           </a:xfrm>
           <a:prstGeom prst="rect">
             <a:avLst/>
           </a:prstGeom>
           <a:solidFill>
-            <a:srgbClr val="B71C1C"/>
+            <a:srgbClr val="F5F5F5"/>
           </a:solidFill>
-          <a:ln/>
+          <a:ln w="12700">
+            <a:solidFill>
+              <a:srgbClr val="1F3864"/>
+            </a:solidFill>
+          </a:ln>
         </p:spPr>
         <p:style>
           <a:lnRef idx="1">
@@ -14396,50 +16298,14 @@
       </p:sp>
       <p:sp>
         <p:nvSpPr>
-          <p:cNvPr id="7" name="TextBox 6"/>
-          <p:cNvSpPr txBox="1"/>
-          <p:nvPr/>
-        </p:nvSpPr>
-        <p:spPr>
-          <a:xfrm>
-            <a:off x="365760" y="1234440"/>
-            <a:ext cx="5120640" cy="411480"/>
-          </a:xfrm>
-          <a:prstGeom prst="rect">
-            <a:avLst/>
-          </a:prstGeom>
-          <a:noFill/>
-        </p:spPr>
-        <p:txBody>
-          <a:bodyPr wrap="square">
-            <a:spAutoFit/>
-          </a:bodyPr>
-          <a:lstStyle/>
-          <a:p>
-            <a:pPr algn="ctr"/>
-            <a:r>
-              <a:rPr sz="1300" b="1" i="0">
-                <a:solidFill>
-                  <a:srgbClr val="FFFFFF"/>
-                </a:solidFill>
-                <a:latin typeface="Calibri"/>
-              </a:rPr>
-              <a:t>DISCRIMINAÇÃO
-DE ACESSO</a:t>
-            </a:r>
-          </a:p>
-        </p:txBody>
-      </p:sp>
-      <p:sp>
-        <p:nvSpPr>
-          <p:cNvPr id="8" name="TextBox 7"/>
-          <p:cNvSpPr txBox="1"/>
-          <p:nvPr/>
-        </p:nvSpPr>
-        <p:spPr>
-          <a:xfrm>
-            <a:off x="457200" y="1737360"/>
-            <a:ext cx="4937760" cy="502920"/>
+          <p:cNvPr id="12" name="TextBox 11"/>
+          <p:cNvSpPr txBox="1"/>
+          <p:nvPr/>
+        </p:nvSpPr>
+        <p:spPr>
+          <a:xfrm>
+            <a:off x="4114800" y="4206240"/>
+            <a:ext cx="3017520" cy="320040"/>
           </a:xfrm>
           <a:prstGeom prst="rect">
             <a:avLst/>
@@ -14454,27 +16320,27 @@
           <a:p>
             <a:pPr algn="l"/>
             <a:r>
-              <a:rPr sz="1200" b="0" i="0">
-                <a:solidFill>
-                  <a:srgbClr val="212121"/>
-                </a:solidFill>
-                <a:latin typeface="Calibri"/>
-              </a:rPr>
-              <a:t>• GLMM: OR=0,691 para ocp. qualificada</a:t>
-            </a:r>
-          </a:p>
-        </p:txBody>
-      </p:sp>
-      <p:sp>
-        <p:nvSpPr>
-          <p:cNvPr id="9" name="TextBox 8"/>
-          <p:cNvSpPr txBox="1"/>
-          <p:nvPr/>
-        </p:nvSpPr>
-        <p:spPr>
-          <a:xfrm>
-            <a:off x="457200" y="2286000"/>
-            <a:ext cx="4937760" cy="502920"/>
+              <a:rPr sz="1100" b="0" i="0">
+                <a:solidFill>
+                  <a:srgbClr val="616161"/>
+                </a:solidFill>
+                <a:latin typeface="Calibri"/>
+              </a:rPr>
+              <a:t>ICC por UPA</a:t>
+            </a:r>
+          </a:p>
+        </p:txBody>
+      </p:sp>
+      <p:sp>
+        <p:nvSpPr>
+          <p:cNvPr id="13" name="TextBox 12"/>
+          <p:cNvSpPr txBox="1"/>
+          <p:nvPr/>
+        </p:nvSpPr>
+        <p:spPr>
+          <a:xfrm>
+            <a:off x="4114800" y="4480560"/>
+            <a:ext cx="3017520" cy="548640"/>
           </a:xfrm>
           <a:prstGeom prst="rect">
             <a:avLst/>
@@ -14489,27 +16355,27 @@
           <a:p>
             <a:pPr algn="l"/>
             <a:r>
-              <a:rPr sz="1200" b="0" i="0">
-                <a:solidFill>
-                  <a:srgbClr val="212121"/>
-                </a:solidFill>
-                <a:latin typeface="Calibri"/>
-              </a:rPr>
-              <a:t>• AME=−4,84 p.p. residual (M2)</a:t>
-            </a:r>
-          </a:p>
-        </p:txBody>
-      </p:sp>
-      <p:sp>
-        <p:nvSpPr>
-          <p:cNvPr id="10" name="TextBox 9"/>
-          <p:cNvSpPr txBox="1"/>
-          <p:nvPr/>
-        </p:nvSpPr>
-        <p:spPr>
-          <a:xfrm>
-            <a:off x="457200" y="2834640"/>
-            <a:ext cx="4937760" cy="502920"/>
+              <a:rPr sz="3000" b="1" i="0">
+                <a:solidFill>
+                  <a:srgbClr val="1565C0"/>
+                </a:solidFill>
+                <a:latin typeface="Calibri"/>
+              </a:rPr>
+              <a:t>9,83%</a:t>
+            </a:r>
+          </a:p>
+        </p:txBody>
+      </p:sp>
+      <p:sp>
+        <p:nvSpPr>
+          <p:cNvPr id="14" name="TextBox 13"/>
+          <p:cNvSpPr txBox="1"/>
+          <p:nvPr/>
+        </p:nvSpPr>
+        <p:spPr>
+          <a:xfrm>
+            <a:off x="4114800" y="5001768"/>
+            <a:ext cx="3017520" cy="320040"/>
           </a:xfrm>
           <a:prstGeom prst="rect">
             <a:avLst/>
@@ -14524,27 +16390,27 @@
           <a:p>
             <a:pPr algn="l"/>
             <a:r>
-              <a:rPr sz="1200" b="0" i="0">
-                <a:solidFill>
-                  <a:srgbClr val="212121"/>
-                </a:solidFill>
-                <a:latin typeface="Calibri"/>
-              </a:rPr>
-              <a:t>• Persiste após todos os controles observáveis</a:t>
-            </a:r>
-          </a:p>
-        </p:txBody>
-      </p:sp>
-      <p:sp>
-        <p:nvSpPr>
-          <p:cNvPr id="11" name="Rectangle 10"/>
+              <a:rPr sz="1000" b="0" i="1">
+                <a:solidFill>
+                  <a:srgbClr val="616161"/>
+                </a:solidFill>
+                <a:latin typeface="Calibri"/>
+              </a:rPr>
+              <a:t>&gt; 5% — Raudenbush &amp; Bryk (2002)</a:t>
+            </a:r>
+          </a:p>
+        </p:txBody>
+      </p:sp>
+      <p:sp>
+        <p:nvSpPr>
+          <p:cNvPr id="15" name="Rectangle 14"/>
           <p:cNvSpPr/>
           <p:nvPr/>
         </p:nvSpPr>
         <p:spPr>
           <a:xfrm>
-            <a:off x="6309360" y="1188720"/>
-            <a:ext cx="5303520" cy="2377440"/>
+            <a:off x="7406640" y="4160520"/>
+            <a:ext cx="4572000" cy="1188720"/>
           </a:xfrm>
           <a:prstGeom prst="rect">
             <a:avLst/>
@@ -14552,9 +16418,9 @@
           <a:solidFill>
             <a:srgbClr val="F5F5F5"/>
           </a:solidFill>
-          <a:ln w="19050">
+          <a:ln w="12700">
             <a:solidFill>
-              <a:srgbClr val="1565C0"/>
+              <a:srgbClr val="1F3864"/>
             </a:solidFill>
           </a:ln>
         </p:spPr>
@@ -14582,20 +16448,223 @@
       </p:sp>
       <p:sp>
         <p:nvSpPr>
-          <p:cNvPr id="12" name="Rectangle 11"/>
+          <p:cNvPr id="16" name="TextBox 15"/>
+          <p:cNvSpPr txBox="1"/>
+          <p:nvPr/>
+        </p:nvSpPr>
+        <p:spPr>
+          <a:xfrm>
+            <a:off x="7498080" y="4206240"/>
+            <a:ext cx="4389120" cy="320040"/>
+          </a:xfrm>
+          <a:prstGeom prst="rect">
+            <a:avLst/>
+          </a:prstGeom>
+          <a:noFill/>
+        </p:spPr>
+        <p:txBody>
+          <a:bodyPr wrap="square">
+            <a:spAutoFit/>
+          </a:bodyPr>
+          <a:lstStyle/>
+          <a:p>
+            <a:pPr algn="l"/>
+            <a:r>
+              <a:rPr sz="1100" b="0" i="0">
+                <a:solidFill>
+                  <a:srgbClr val="616161"/>
+                </a:solidFill>
+                <a:latin typeface="Calibri"/>
+              </a:rPr>
+              <a:t>AIC HLM Contextual</a:t>
+            </a:r>
+          </a:p>
+        </p:txBody>
+      </p:sp>
+      <p:sp>
+        <p:nvSpPr>
+          <p:cNvPr id="17" name="TextBox 16"/>
+          <p:cNvSpPr txBox="1"/>
+          <p:nvPr/>
+        </p:nvSpPr>
+        <p:spPr>
+          <a:xfrm>
+            <a:off x="7498080" y="4480560"/>
+            <a:ext cx="4389120" cy="548640"/>
+          </a:xfrm>
+          <a:prstGeom prst="rect">
+            <a:avLst/>
+          </a:prstGeom>
+          <a:noFill/>
+        </p:spPr>
+        <p:txBody>
+          <a:bodyPr wrap="square">
+            <a:spAutoFit/>
+          </a:bodyPr>
+          <a:lstStyle/>
+          <a:p>
+            <a:pPr algn="l"/>
+            <a:r>
+              <a:rPr sz="3000" b="1" i="0">
+                <a:solidFill>
+                  <a:srgbClr val="2E7D32"/>
+                </a:solidFill>
+                <a:latin typeface="Calibri"/>
+              </a:rPr>
+              <a:t>3.588.684</a:t>
+            </a:r>
+          </a:p>
+        </p:txBody>
+      </p:sp>
+      <p:sp>
+        <p:nvSpPr>
+          <p:cNvPr id="18" name="TextBox 17"/>
+          <p:cNvSpPr txBox="1"/>
+          <p:nvPr/>
+        </p:nvSpPr>
+        <p:spPr>
+          <a:xfrm>
+            <a:off x="7498080" y="5001768"/>
+            <a:ext cx="4389120" cy="320040"/>
+          </a:xfrm>
+          <a:prstGeom prst="rect">
+            <a:avLst/>
+          </a:prstGeom>
+          <a:noFill/>
+        </p:spPr>
+        <p:txBody>
+          <a:bodyPr wrap="square">
+            <a:spAutoFit/>
+          </a:bodyPr>
+          <a:lstStyle/>
+          <a:p>
+            <a:pPr algn="l"/>
+            <a:r>
+              <a:rPr sz="1000" b="0" i="1">
+                <a:solidFill>
+                  <a:srgbClr val="616161"/>
+                </a:solidFill>
+                <a:latin typeface="Calibri"/>
+              </a:rPr>
+              <a:t>OLS+FE(UF): 3.684.833 (+96k pior)</a:t>
+            </a:r>
+          </a:p>
+        </p:txBody>
+      </p:sp>
+      <p:sp>
+        <p:nvSpPr>
+          <p:cNvPr id="19" name="TextBox 18"/>
+          <p:cNvSpPr txBox="1"/>
+          <p:nvPr/>
+        </p:nvSpPr>
+        <p:spPr>
+          <a:xfrm>
+            <a:off x="274320" y="5440680"/>
+            <a:ext cx="11612880" cy="1051560"/>
+          </a:xfrm>
+          <a:prstGeom prst="rect">
+            <a:avLst/>
+          </a:prstGeom>
+          <a:noFill/>
+        </p:spPr>
+        <p:txBody>
+          <a:bodyPr wrap="square">
+            <a:spAutoFit/>
+          </a:bodyPr>
+          <a:lstStyle/>
+          <a:p>
+            <a:pPr>
+              <a:spcAft>
+                <a:spcPts val="400"/>
+              </a:spcAft>
+            </a:pPr>
+            <a:r>
+              <a:rPr sz="1300" b="1">
+                <a:solidFill>
+                  <a:srgbClr val="1F3864"/>
+                </a:solidFill>
+                <a:latin typeface="Calibri"/>
+              </a:rPr>
+              <a:t>▸  </a:t>
+            </a:r>
+            <a:r>
+              <a:rPr sz="1300">
+                <a:solidFill>
+                  <a:srgbClr val="212121"/>
+                </a:solidFill>
+                <a:latin typeface="Calibri"/>
+              </a:rPr>
+              <a:t>OLS ignora correlação intra-UPA → erros padrão subestimados → inferência inválida (θ OLS ≠ θ BLUP)</a:t>
+            </a:r>
+          </a:p>
+          <a:p>
+            <a:pPr>
+              <a:spcAft>
+                <a:spcPts val="400"/>
+              </a:spcAft>
+            </a:pPr>
+            <a:r>
+              <a:rPr sz="1300" b="1">
+                <a:solidFill>
+                  <a:srgbClr val="1F3864"/>
+                </a:solidFill>
+                <a:latin typeface="Calibri"/>
+              </a:rPr>
+              <a:t>▸  </a:t>
+            </a:r>
+            <a:r>
+              <a:rPr sz="1300">
+                <a:solidFill>
+                  <a:srgbClr val="212121"/>
+                </a:solidFill>
+                <a:latin typeface="Calibri"/>
+              </a:rPr>
+              <a:t>OLS+FE(UF) piora AIC vs OLS Individual: dummies de UF são grosseiras demais para capturar variação intra-estado</a:t>
+            </a:r>
+          </a:p>
+          <a:p>
+            <a:pPr>
+              <a:spcAft>
+                <a:spcPts val="400"/>
+              </a:spcAft>
+            </a:pPr>
+            <a:r>
+              <a:rPr sz="1300" b="1">
+                <a:solidFill>
+                  <a:srgbClr val="1F3864"/>
+                </a:solidFill>
+                <a:latin typeface="Calibri"/>
+              </a:rPr>
+              <a:t>▸  </a:t>
+            </a:r>
+            <a:r>
+              <a:rPr sz="1300">
+                <a:solidFill>
+                  <a:srgbClr val="212121"/>
+                </a:solidFill>
+                <a:latin typeface="Calibri"/>
+              </a:rPr>
+              <a:t>HLM 3 níveis (indivíduo &gt; UPA &gt; UF) é o único estimador com estrutura compatível com os dados e inferência válida</a:t>
+            </a:r>
+          </a:p>
+        </p:txBody>
+      </p:sp>
+      <p:sp>
+        <p:nvSpPr>
+          <p:cNvPr id="20" name="Rectangle 19"/>
           <p:cNvSpPr/>
           <p:nvPr/>
         </p:nvSpPr>
         <p:spPr>
           <a:xfrm>
-            <a:off x="6309360" y="1188720"/>
-            <a:ext cx="5303520" cy="457200"/>
+            <a:off x="0" y="6601968"/>
+            <a:ext cx="12188952" cy="256032"/>
           </a:xfrm>
           <a:prstGeom prst="rect">
             <a:avLst/>
           </a:prstGeom>
           <a:solidFill>
-            <a:srgbClr val="1565C0"/>
+            <a:srgbClr val="1F3864"/>
           </a:solidFill>
           <a:ln/>
         </p:spPr>
@@ -14623,492 +16692,7 @@
       </p:sp>
       <p:sp>
         <p:nvSpPr>
-          <p:cNvPr id="13" name="TextBox 12"/>
-          <p:cNvSpPr txBox="1"/>
-          <p:nvPr/>
-        </p:nvSpPr>
-        <p:spPr>
-          <a:xfrm>
-            <a:off x="6400800" y="1234440"/>
-            <a:ext cx="5120640" cy="411480"/>
-          </a:xfrm>
-          <a:prstGeom prst="rect">
-            <a:avLst/>
-          </a:prstGeom>
-          <a:noFill/>
-        </p:spPr>
-        <p:txBody>
-          <a:bodyPr wrap="square">
-            <a:spAutoFit/>
-          </a:bodyPr>
-          <a:lstStyle/>
-          <a:p>
-            <a:pPr algn="ctr"/>
-            <a:r>
-              <a:rPr sz="1300" b="1" i="0">
-                <a:solidFill>
-                  <a:srgbClr val="FFFFFF"/>
-                </a:solidFill>
-                <a:latin typeface="Calibri"/>
-              </a:rPr>
-              <a:t>DISCRIMINAÇÃO
-DE REMUNERAÇÃO</a:t>
-            </a:r>
-          </a:p>
-        </p:txBody>
-      </p:sp>
-      <p:sp>
-        <p:nvSpPr>
-          <p:cNvPr id="14" name="TextBox 13"/>
-          <p:cNvSpPr txBox="1"/>
-          <p:nvPr/>
-        </p:nvSpPr>
-        <p:spPr>
-          <a:xfrm>
-            <a:off x="6492240" y="1737360"/>
-            <a:ext cx="4937760" cy="502920"/>
-          </a:xfrm>
-          <a:prstGeom prst="rect">
-            <a:avLst/>
-          </a:prstGeom>
-          <a:noFill/>
-        </p:spPr>
-        <p:txBody>
-          <a:bodyPr wrap="square">
-            <a:spAutoFit/>
-          </a:bodyPr>
-          <a:lstStyle/>
-          <a:p>
-            <a:pPr algn="l"/>
-            <a:r>
-              <a:rPr sz="1200" b="0" i="0">
-                <a:solidFill>
-                  <a:srgbClr val="212121"/>
-                </a:solidFill>
-                <a:latin typeface="Calibri"/>
-              </a:rPr>
-              <a:t>• HLM M4: gap residual 6,2%</a:t>
-            </a:r>
-          </a:p>
-        </p:txBody>
-      </p:sp>
-      <p:sp>
-        <p:nvSpPr>
-          <p:cNvPr id="15" name="TextBox 14"/>
-          <p:cNvSpPr txBox="1"/>
-          <p:nvPr/>
-        </p:nvSpPr>
-        <p:spPr>
-          <a:xfrm>
-            <a:off x="6492240" y="2286000"/>
-            <a:ext cx="4937760" cy="502920"/>
-          </a:xfrm>
-          <a:prstGeom prst="rect">
-            <a:avLst/>
-          </a:prstGeom>
-          <a:noFill/>
-        </p:spPr>
-        <p:txBody>
-          <a:bodyPr wrap="square">
-            <a:spAutoFit/>
-          </a:bodyPr>
-          <a:lstStyle/>
-          <a:p>
-            <a:pPr algn="l"/>
-            <a:r>
-              <a:rPr sz="1200" b="0" i="0">
-                <a:solidFill>
-                  <a:srgbClr val="212121"/>
-                </a:solidFill>
-                <a:latin typeface="Calibri"/>
-              </a:rPr>
-              <a:t>• Quantile Reg.: cresce no topo (glass ceiling)</a:t>
-            </a:r>
-          </a:p>
-        </p:txBody>
-      </p:sp>
-      <p:sp>
-        <p:nvSpPr>
-          <p:cNvPr id="16" name="TextBox 15"/>
-          <p:cNvSpPr txBox="1"/>
-          <p:nvPr/>
-        </p:nvSpPr>
-        <p:spPr>
-          <a:xfrm>
-            <a:off x="6492240" y="2834640"/>
-            <a:ext cx="4937760" cy="502920"/>
-          </a:xfrm>
-          <a:prstGeom prst="rect">
-            <a:avLst/>
-          </a:prstGeom>
-          <a:noFill/>
-        </p:spPr>
-        <p:txBody>
-          <a:bodyPr wrap="square">
-            <a:spAutoFit/>
-          </a:bodyPr>
-          <a:lstStyle/>
-          <a:p>
-            <a:pPr algn="l"/>
-            <a:r>
-              <a:rPr sz="1200" b="0" i="0">
-                <a:solidFill>
-                  <a:srgbClr val="212121"/>
-                </a:solidFill>
-                <a:latin typeface="Calibri"/>
-              </a:rPr>
-              <a:t>• SHAP: −2,5% efeito racial residual</a:t>
-            </a:r>
-          </a:p>
-        </p:txBody>
-      </p:sp>
-      <p:sp>
-        <p:nvSpPr>
-          <p:cNvPr id="17" name="Rectangle 16"/>
-          <p:cNvSpPr/>
-          <p:nvPr/>
-        </p:nvSpPr>
-        <p:spPr>
-          <a:xfrm>
-            <a:off x="3291840" y="3931920"/>
-            <a:ext cx="5303520" cy="2377440"/>
-          </a:xfrm>
-          <a:prstGeom prst="rect">
-            <a:avLst/>
-          </a:prstGeom>
-          <a:solidFill>
-            <a:srgbClr val="F5F5F5"/>
-          </a:solidFill>
-          <a:ln w="19050">
-            <a:solidFill>
-              <a:srgbClr val="1F3864"/>
-            </a:solidFill>
-          </a:ln>
-        </p:spPr>
-        <p:style>
-          <a:lnRef idx="1">
-            <a:schemeClr val="accent1"/>
-          </a:lnRef>
-          <a:fillRef idx="3">
-            <a:schemeClr val="accent1"/>
-          </a:fillRef>
-          <a:effectRef idx="2">
-            <a:schemeClr val="accent1"/>
-          </a:effectRef>
-          <a:fontRef idx="minor">
-            <a:schemeClr val="lt1"/>
-          </a:fontRef>
-        </p:style>
-        <p:txBody>
-          <a:bodyPr rtlCol="0" anchor="ctr"/>
-          <a:lstStyle/>
-          <a:p>
-            <a:pPr algn="ctr"/>
-          </a:p>
-        </p:txBody>
-      </p:sp>
-      <p:sp>
-        <p:nvSpPr>
-          <p:cNvPr id="18" name="Rectangle 17"/>
-          <p:cNvSpPr/>
-          <p:nvPr/>
-        </p:nvSpPr>
-        <p:spPr>
-          <a:xfrm>
-            <a:off x="3291840" y="3931920"/>
-            <a:ext cx="5303520" cy="457200"/>
-          </a:xfrm>
-          <a:prstGeom prst="rect">
-            <a:avLst/>
-          </a:prstGeom>
-          <a:solidFill>
-            <a:srgbClr val="1F3864"/>
-          </a:solidFill>
-          <a:ln/>
-        </p:spPr>
-        <p:style>
-          <a:lnRef idx="1">
-            <a:schemeClr val="accent1"/>
-          </a:lnRef>
-          <a:fillRef idx="3">
-            <a:schemeClr val="accent1"/>
-          </a:fillRef>
-          <a:effectRef idx="2">
-            <a:schemeClr val="accent1"/>
-          </a:effectRef>
-          <a:fontRef idx="minor">
-            <a:schemeClr val="lt1"/>
-          </a:fontRef>
-        </p:style>
-        <p:txBody>
-          <a:bodyPr rtlCol="0" anchor="ctr"/>
-          <a:lstStyle/>
-          <a:p>
-            <a:pPr algn="ctr"/>
-          </a:p>
-        </p:txBody>
-      </p:sp>
-      <p:sp>
-        <p:nvSpPr>
-          <p:cNvPr id="19" name="TextBox 18"/>
-          <p:cNvSpPr txBox="1"/>
-          <p:nvPr/>
-        </p:nvSpPr>
-        <p:spPr>
-          <a:xfrm>
-            <a:off x="3383280" y="3977640"/>
-            <a:ext cx="5120640" cy="411480"/>
-          </a:xfrm>
-          <a:prstGeom prst="rect">
-            <a:avLst/>
-          </a:prstGeom>
-          <a:noFill/>
-        </p:spPr>
-        <p:txBody>
-          <a:bodyPr wrap="square">
-            <a:spAutoFit/>
-          </a:bodyPr>
-          <a:lstStyle/>
-          <a:p>
-            <a:pPr algn="ctr"/>
-            <a:r>
-              <a:rPr sz="1300" b="1" i="0">
-                <a:solidFill>
-                  <a:srgbClr val="FFFFFF"/>
-                </a:solidFill>
-                <a:latin typeface="Calibri"/>
-              </a:rPr>
-              <a:t>EXCLUSÃO
-DAS REDES</a:t>
-            </a:r>
-          </a:p>
-        </p:txBody>
-      </p:sp>
-      <p:sp>
-        <p:nvSpPr>
-          <p:cNvPr id="20" name="TextBox 19"/>
-          <p:cNvSpPr txBox="1"/>
-          <p:nvPr/>
-        </p:nvSpPr>
-        <p:spPr>
-          <a:xfrm>
-            <a:off x="3474720" y="4480560"/>
-            <a:ext cx="4937760" cy="502920"/>
-          </a:xfrm>
-          <a:prstGeom prst="rect">
-            <a:avLst/>
-          </a:prstGeom>
-          <a:noFill/>
-        </p:spPr>
-        <p:txBody>
-          <a:bodyPr wrap="square">
-            <a:spAutoFit/>
-          </a:bodyPr>
-          <a:lstStyle/>
-          <a:p>
-            <a:pPr algn="l"/>
-            <a:r>
-              <a:rPr sz="1200" b="0" i="0">
-                <a:solidFill>
-                  <a:srgbClr val="212121"/>
-                </a:solidFill>
-                <a:latin typeface="Calibri"/>
-              </a:rPr>
-              <a:t>• SNA: betweenness=0 para negros</a:t>
-            </a:r>
-          </a:p>
-        </p:txBody>
-      </p:sp>
-      <p:sp>
-        <p:nvSpPr>
           <p:cNvPr id="21" name="TextBox 20"/>
-          <p:cNvSpPr txBox="1"/>
-          <p:nvPr/>
-        </p:nvSpPr>
-        <p:spPr>
-          <a:xfrm>
-            <a:off x="3474720" y="5029200"/>
-            <a:ext cx="4937760" cy="502920"/>
-          </a:xfrm>
-          <a:prstGeom prst="rect">
-            <a:avLst/>
-          </a:prstGeom>
-          <a:noFill/>
-        </p:spPr>
-        <p:txBody>
-          <a:bodyPr wrap="square">
-            <a:spAutoFit/>
-          </a:bodyPr>
-          <a:lstStyle/>
-          <a:p>
-            <a:pPr algn="l"/>
-            <a:r>
-              <a:rPr sz="1200" b="0" i="0">
-                <a:solidFill>
-                  <a:srgbClr val="212121"/>
-                </a:solidFill>
-                <a:latin typeface="Calibri"/>
-              </a:rPr>
-              <a:t>• Diplomas valem menos sem acesso às redes</a:t>
-            </a:r>
-          </a:p>
-        </p:txBody>
-      </p:sp>
-      <p:sp>
-        <p:nvSpPr>
-          <p:cNvPr id="22" name="TextBox 21"/>
-          <p:cNvSpPr txBox="1"/>
-          <p:nvPr/>
-        </p:nvSpPr>
-        <p:spPr>
-          <a:xfrm>
-            <a:off x="3474720" y="5577840"/>
-            <a:ext cx="4937760" cy="502920"/>
-          </a:xfrm>
-          <a:prstGeom prst="rect">
-            <a:avLst/>
-          </a:prstGeom>
-          <a:noFill/>
-        </p:spPr>
-        <p:txBody>
-          <a:bodyPr wrap="square">
-            <a:spAutoFit/>
-          </a:bodyPr>
-          <a:lstStyle/>
-          <a:p>
-            <a:pPr algn="l"/>
-            <a:r>
-              <a:rPr sz="1200" b="0" i="0">
-                <a:solidFill>
-                  <a:srgbClr val="212121"/>
-                </a:solidFill>
-                <a:latin typeface="Calibri"/>
-              </a:rPr>
-              <a:t>• Cluster: dupla desvantagem mulher negra</a:t>
-            </a:r>
-          </a:p>
-        </p:txBody>
-      </p:sp>
-      <p:sp>
-        <p:nvSpPr>
-          <p:cNvPr id="23" name="Rectangle 22"/>
-          <p:cNvSpPr/>
-          <p:nvPr/>
-        </p:nvSpPr>
-        <p:spPr>
-          <a:xfrm>
-            <a:off x="274320" y="5852160"/>
-            <a:ext cx="11612880" cy="457200"/>
-          </a:xfrm>
-          <a:prstGeom prst="rect">
-            <a:avLst/>
-          </a:prstGeom>
-          <a:solidFill>
-            <a:srgbClr val="1F3864"/>
-          </a:solidFill>
-          <a:ln/>
-        </p:spPr>
-        <p:style>
-          <a:lnRef idx="1">
-            <a:schemeClr val="accent1"/>
-          </a:lnRef>
-          <a:fillRef idx="3">
-            <a:schemeClr val="accent1"/>
-          </a:fillRef>
-          <a:effectRef idx="2">
-            <a:schemeClr val="accent1"/>
-          </a:effectRef>
-          <a:fontRef idx="minor">
-            <a:schemeClr val="lt1"/>
-          </a:fontRef>
-        </p:style>
-        <p:txBody>
-          <a:bodyPr rtlCol="0" anchor="ctr"/>
-          <a:lstStyle/>
-          <a:p>
-            <a:pPr algn="ctr"/>
-          </a:p>
-        </p:txBody>
-      </p:sp>
-      <p:sp>
-        <p:nvSpPr>
-          <p:cNvPr id="24" name="TextBox 23"/>
-          <p:cNvSpPr txBox="1"/>
-          <p:nvPr/>
-        </p:nvSpPr>
-        <p:spPr>
-          <a:xfrm>
-            <a:off x="457200" y="5897880"/>
-            <a:ext cx="11247120" cy="411480"/>
-          </a:xfrm>
-          <a:prstGeom prst="rect">
-            <a:avLst/>
-          </a:prstGeom>
-          <a:noFill/>
-        </p:spPr>
-        <p:txBody>
-          <a:bodyPr wrap="square">
-            <a:spAutoFit/>
-          </a:bodyPr>
-          <a:lstStyle/>
-          <a:p>
-            <a:pPr algn="ctr"/>
-            <a:r>
-              <a:rPr sz="1200" b="1" i="0">
-                <a:solidFill>
-                  <a:srgbClr val="FFFFFF"/>
-                </a:solidFill>
-                <a:latin typeface="Calibri"/>
-              </a:rPr>
-              <a:t>Oaxaca-Blinder une os três vértices: 84% do gap é de ACESSO (dotações) | 16% de REMUNERAÇÃO (retornos) | SNA explica por que o acesso é estruturalmente negado  |  GLMM: OR=0,691</a:t>
-            </a:r>
-          </a:p>
-        </p:txBody>
-      </p:sp>
-      <p:sp>
-        <p:nvSpPr>
-          <p:cNvPr id="25" name="Rectangle 24"/>
-          <p:cNvSpPr/>
-          <p:nvPr/>
-        </p:nvSpPr>
-        <p:spPr>
-          <a:xfrm>
-            <a:off x="0" y="6601968"/>
-            <a:ext cx="12188952" cy="256032"/>
-          </a:xfrm>
-          <a:prstGeom prst="rect">
-            <a:avLst/>
-          </a:prstGeom>
-          <a:solidFill>
-            <a:srgbClr val="1F3864"/>
-          </a:solidFill>
-          <a:ln/>
-        </p:spPr>
-        <p:style>
-          <a:lnRef idx="1">
-            <a:schemeClr val="accent1"/>
-          </a:lnRef>
-          <a:fillRef idx="3">
-            <a:schemeClr val="accent1"/>
-          </a:fillRef>
-          <a:effectRef idx="2">
-            <a:schemeClr val="accent1"/>
-          </a:effectRef>
-          <a:fontRef idx="minor">
-            <a:schemeClr val="lt1"/>
-          </a:fontRef>
-        </p:style>
-        <p:txBody>
-          <a:bodyPr rtlCol="0" anchor="ctr"/>
-          <a:lstStyle/>
-          <a:p>
-            <a:pPr algn="ctr"/>
-          </a:p>
-        </p:txBody>
-      </p:sp>
-      <p:sp>
-        <p:nvSpPr>
-          <p:cNvPr id="26" name="TextBox 25"/>
           <p:cNvSpPr txBox="1"/>
           <p:nvPr/>
         </p:nvSpPr>
@@ -15143,7 +16727,7 @@
       </p:sp>
       <p:sp>
         <p:nvSpPr>
-          <p:cNvPr id="27" name="TextBox 26"/>
+          <p:cNvPr id="22" name="TextBox 21"/>
           <p:cNvSpPr txBox="1"/>
           <p:nvPr/>
         </p:nvSpPr>
@@ -15265,7 +16849,7 @@
                 </a:solidFill>
                 <a:latin typeface="Calibri"/>
               </a:rPr>
-              <a:t>21. Pesquisa Operacional — Priorização Multicritério Anti-Discriminação</a:t>
+              <a:t>21. Síntese — Triângulo de Evidências</a:t>
             </a:r>
           </a:p>
         </p:txBody>
@@ -15300,88 +16884,29 @@
                 </a:solidFill>
                 <a:latin typeface="Calibri"/>
               </a:rPr>
-              <a:t>TOPSIS + AHP (CR=0,004) + Programação Linear + Fronteira de Pareto | 6 políticas avaliadas</a:t>
-            </a:r>
-          </a:p>
-        </p:txBody>
-      </p:sp>
-      <p:pic>
-        <p:nvPicPr>
-          <p:cNvPr id="5" name="Picture 4" descr="po_politicas_topsis.png"/>
-          <p:cNvPicPr>
-            <a:picLocks noChangeAspect="1"/>
-          </p:cNvPicPr>
-          <p:nvPr/>
-        </p:nvPicPr>
-        <p:blipFill>
-          <a:blip r:embed="rId2"/>
-          <a:stretch>
-            <a:fillRect/>
-          </a:stretch>
-        </p:blipFill>
-        <p:spPr>
-          <a:xfrm>
-            <a:off x="274320" y="1097280"/>
-            <a:ext cx="6583680" cy="2156266"/>
-          </a:xfrm>
-          <a:prstGeom prst="rect">
-            <a:avLst/>
-          </a:prstGeom>
-        </p:spPr>
-      </p:pic>
-      <p:sp>
-        <p:nvSpPr>
-          <p:cNvPr id="6" name="TextBox 5"/>
-          <p:cNvSpPr txBox="1"/>
-          <p:nvPr/>
-        </p:nvSpPr>
-        <p:spPr>
-          <a:xfrm>
-            <a:off x="7315200" y="1097280"/>
-            <a:ext cx="4663440" cy="365760"/>
-          </a:xfrm>
-          <a:prstGeom prst="rect">
-            <a:avLst/>
-          </a:prstGeom>
-          <a:noFill/>
-        </p:spPr>
-        <p:txBody>
-          <a:bodyPr wrap="square">
-            <a:spAutoFit/>
-          </a:bodyPr>
-          <a:lstStyle/>
-          <a:p>
-            <a:pPr algn="l"/>
-            <a:r>
-              <a:rPr sz="1400" b="1" i="0">
-                <a:solidFill>
-                  <a:srgbClr val="1F3864"/>
-                </a:solidFill>
-                <a:latin typeface="Calibri"/>
-              </a:rPr>
-              <a:t>Ranking TOPSIS (6 intervenções)</a:t>
-            </a:r>
-          </a:p>
-        </p:txBody>
-      </p:sp>
-      <p:sp>
-        <p:nvSpPr>
-          <p:cNvPr id="7" name="Rectangle 6"/>
+              <a:t>5 métodos independentes apontam para o mesmo diagnóstico</a:t>
+            </a:r>
+          </a:p>
+        </p:txBody>
+      </p:sp>
+      <p:sp>
+        <p:nvSpPr>
+          <p:cNvPr id="5" name="Rectangle 4"/>
           <p:cNvSpPr/>
           <p:nvPr/>
         </p:nvSpPr>
         <p:spPr>
           <a:xfrm>
-            <a:off x="7315200" y="1572768"/>
-            <a:ext cx="4663440" cy="676656"/>
+            <a:off x="274320" y="1188720"/>
+            <a:ext cx="5303520" cy="2377440"/>
           </a:xfrm>
           <a:prstGeom prst="rect">
             <a:avLst/>
           </a:prstGeom>
           <a:solidFill>
-            <a:srgbClr val="FFEBEE"/>
+            <a:srgbClr val="F5F5F5"/>
           </a:solidFill>
-          <a:ln w="10160">
+          <a:ln w="19050">
             <a:solidFill>
               <a:srgbClr val="B71C1C"/>
             </a:solidFill>
@@ -15411,131 +16936,22 @@
       </p:sp>
       <p:sp>
         <p:nvSpPr>
-          <p:cNvPr id="8" name="TextBox 7"/>
-          <p:cNvSpPr txBox="1"/>
-          <p:nvPr/>
-        </p:nvSpPr>
-        <p:spPr>
-          <a:xfrm>
-            <a:off x="7406640" y="1618488"/>
-            <a:ext cx="365760" cy="548640"/>
-          </a:xfrm>
-          <a:prstGeom prst="rect">
-            <a:avLst/>
-          </a:prstGeom>
-          <a:noFill/>
-        </p:spPr>
-        <p:txBody>
-          <a:bodyPr wrap="square">
-            <a:spAutoFit/>
-          </a:bodyPr>
-          <a:lstStyle/>
-          <a:p>
-            <a:pPr algn="l"/>
-            <a:r>
-              <a:rPr sz="1300" b="1" i="0">
-                <a:solidFill>
-                  <a:srgbClr val="B71C1C"/>
-                </a:solidFill>
-                <a:latin typeface="Calibri"/>
-              </a:rPr>
-              <a:t>#1</a:t>
-            </a:r>
-          </a:p>
-        </p:txBody>
-      </p:sp>
-      <p:sp>
-        <p:nvSpPr>
-          <p:cNvPr id="9" name="TextBox 8"/>
-          <p:cNvSpPr txBox="1"/>
-          <p:nvPr/>
-        </p:nvSpPr>
-        <p:spPr>
-          <a:xfrm>
-            <a:off x="7818120" y="1618488"/>
-            <a:ext cx="2926080" cy="548640"/>
-          </a:xfrm>
-          <a:prstGeom prst="rect">
-            <a:avLst/>
-          </a:prstGeom>
-          <a:noFill/>
-        </p:spPr>
-        <p:txBody>
-          <a:bodyPr wrap="square">
-            <a:spAutoFit/>
-          </a:bodyPr>
-          <a:lstStyle/>
-          <a:p>
-            <a:pPr algn="l"/>
-            <a:r>
-              <a:rPr sz="1200" b="1" i="0">
-                <a:solidFill>
-                  <a:srgbClr val="212121"/>
-                </a:solidFill>
-                <a:latin typeface="Calibri"/>
-              </a:rPr>
-              <a:t>Cotas ocupacionais CBO 1–4</a:t>
-            </a:r>
-          </a:p>
-        </p:txBody>
-      </p:sp>
-      <p:sp>
-        <p:nvSpPr>
-          <p:cNvPr id="10" name="TextBox 9"/>
-          <p:cNvSpPr txBox="1"/>
-          <p:nvPr/>
-        </p:nvSpPr>
-        <p:spPr>
-          <a:xfrm>
-            <a:off x="10789920" y="1618488"/>
-            <a:ext cx="1143000" cy="548640"/>
-          </a:xfrm>
-          <a:prstGeom prst="rect">
-            <a:avLst/>
-          </a:prstGeom>
-          <a:noFill/>
-        </p:spPr>
-        <p:txBody>
-          <a:bodyPr wrap="square">
-            <a:spAutoFit/>
-          </a:bodyPr>
-          <a:lstStyle/>
-          <a:p>
-            <a:pPr algn="r"/>
-            <a:r>
-              <a:rPr sz="1200" b="1" i="0">
-                <a:solidFill>
-                  <a:srgbClr val="B71C1C"/>
-                </a:solidFill>
-                <a:latin typeface="Calibri"/>
-              </a:rPr>
-              <a:t>CC = 0,835</a:t>
-            </a:r>
-          </a:p>
-        </p:txBody>
-      </p:sp>
-      <p:sp>
-        <p:nvSpPr>
-          <p:cNvPr id="11" name="Rectangle 10"/>
+          <p:cNvPr id="6" name="Rectangle 5"/>
           <p:cNvSpPr/>
           <p:nvPr/>
         </p:nvSpPr>
         <p:spPr>
           <a:xfrm>
-            <a:off x="7315200" y="2304288"/>
-            <a:ext cx="4663440" cy="676656"/>
+            <a:off x="274320" y="1188720"/>
+            <a:ext cx="5303520" cy="457200"/>
           </a:xfrm>
           <a:prstGeom prst="rect">
             <a:avLst/>
           </a:prstGeom>
           <a:solidFill>
-            <a:srgbClr val="E3F2FD"/>
+            <a:srgbClr val="B71C1C"/>
           </a:solidFill>
-          <a:ln w="10160">
-            <a:solidFill>
-              <a:srgbClr val="1565C0"/>
-            </a:solidFill>
-          </a:ln>
+          <a:ln/>
         </p:spPr>
         <p:style>
           <a:lnRef idx="1">
@@ -15561,14 +16977,50 @@
       </p:sp>
       <p:sp>
         <p:nvSpPr>
-          <p:cNvPr id="12" name="TextBox 11"/>
-          <p:cNvSpPr txBox="1"/>
-          <p:nvPr/>
-        </p:nvSpPr>
-        <p:spPr>
-          <a:xfrm>
-            <a:off x="7406640" y="2350008"/>
-            <a:ext cx="365760" cy="548640"/>
+          <p:cNvPr id="7" name="TextBox 6"/>
+          <p:cNvSpPr txBox="1"/>
+          <p:nvPr/>
+        </p:nvSpPr>
+        <p:spPr>
+          <a:xfrm>
+            <a:off x="365760" y="1234440"/>
+            <a:ext cx="5120640" cy="411480"/>
+          </a:xfrm>
+          <a:prstGeom prst="rect">
+            <a:avLst/>
+          </a:prstGeom>
+          <a:noFill/>
+        </p:spPr>
+        <p:txBody>
+          <a:bodyPr wrap="square">
+            <a:spAutoFit/>
+          </a:bodyPr>
+          <a:lstStyle/>
+          <a:p>
+            <a:pPr algn="ctr"/>
+            <a:r>
+              <a:rPr sz="1300" b="1" i="0">
+                <a:solidFill>
+                  <a:srgbClr val="FFFFFF"/>
+                </a:solidFill>
+                <a:latin typeface="Calibri"/>
+              </a:rPr>
+              <a:t>DISCRIMINAÇÃO
+DE ACESSO</a:t>
+            </a:r>
+          </a:p>
+        </p:txBody>
+      </p:sp>
+      <p:sp>
+        <p:nvSpPr>
+          <p:cNvPr id="8" name="TextBox 7"/>
+          <p:cNvSpPr txBox="1"/>
+          <p:nvPr/>
+        </p:nvSpPr>
+        <p:spPr>
+          <a:xfrm>
+            <a:off x="457200" y="1737360"/>
+            <a:ext cx="4937760" cy="502920"/>
           </a:xfrm>
           <a:prstGeom prst="rect">
             <a:avLst/>
@@ -15583,27 +17035,27 @@
           <a:p>
             <a:pPr algn="l"/>
             <a:r>
-              <a:rPr sz="1300" b="1" i="0">
-                <a:solidFill>
-                  <a:srgbClr val="1565C0"/>
-                </a:solidFill>
-                <a:latin typeface="Calibri"/>
-              </a:rPr>
-              <a:t>#2</a:t>
-            </a:r>
-          </a:p>
-        </p:txBody>
-      </p:sp>
-      <p:sp>
-        <p:nvSpPr>
-          <p:cNvPr id="13" name="TextBox 12"/>
-          <p:cNvSpPr txBox="1"/>
-          <p:nvPr/>
-        </p:nvSpPr>
-        <p:spPr>
-          <a:xfrm>
-            <a:off x="7818120" y="2350008"/>
-            <a:ext cx="2926080" cy="548640"/>
+              <a:rPr sz="1200" b="0" i="0">
+                <a:solidFill>
+                  <a:srgbClr val="212121"/>
+                </a:solidFill>
+                <a:latin typeface="Calibri"/>
+              </a:rPr>
+              <a:t>• GLMM: OR=0,691 para ocp. qualificada</a:t>
+            </a:r>
+          </a:p>
+        </p:txBody>
+      </p:sp>
+      <p:sp>
+        <p:nvSpPr>
+          <p:cNvPr id="9" name="TextBox 8"/>
+          <p:cNvSpPr txBox="1"/>
+          <p:nvPr/>
+        </p:nvSpPr>
+        <p:spPr>
+          <a:xfrm>
+            <a:off x="457200" y="2286000"/>
+            <a:ext cx="4937760" cy="502920"/>
           </a:xfrm>
           <a:prstGeom prst="rect">
             <a:avLst/>
@@ -15618,62 +17070,62 @@
           <a:p>
             <a:pPr algn="l"/>
             <a:r>
-              <a:rPr sz="1200" b="1" i="0">
+              <a:rPr sz="1200" b="0" i="0">
                 <a:solidFill>
                   <a:srgbClr val="212121"/>
                 </a:solidFill>
                 <a:latin typeface="Calibri"/>
               </a:rPr>
-              <a:t>Equidade educacional</a:t>
-            </a:r>
-          </a:p>
-        </p:txBody>
-      </p:sp>
-      <p:sp>
-        <p:nvSpPr>
-          <p:cNvPr id="14" name="TextBox 13"/>
-          <p:cNvSpPr txBox="1"/>
-          <p:nvPr/>
-        </p:nvSpPr>
-        <p:spPr>
-          <a:xfrm>
-            <a:off x="10789920" y="2350008"/>
-            <a:ext cx="1143000" cy="548640"/>
-          </a:xfrm>
-          <a:prstGeom prst="rect">
-            <a:avLst/>
-          </a:prstGeom>
-          <a:noFill/>
-        </p:spPr>
-        <p:txBody>
-          <a:bodyPr wrap="square">
-            <a:spAutoFit/>
-          </a:bodyPr>
-          <a:lstStyle/>
-          <a:p>
-            <a:pPr algn="r"/>
-            <a:r>
-              <a:rPr sz="1200" b="1" i="0">
-                <a:solidFill>
-                  <a:srgbClr val="1565C0"/>
-                </a:solidFill>
-                <a:latin typeface="Calibri"/>
-              </a:rPr>
-              <a:t>CC = 0,588</a:t>
-            </a:r>
-          </a:p>
-        </p:txBody>
-      </p:sp>
-      <p:sp>
-        <p:nvSpPr>
-          <p:cNvPr id="15" name="Rectangle 14"/>
+              <a:t>• AME=−4,84 p.p. residual (M2)</a:t>
+            </a:r>
+          </a:p>
+        </p:txBody>
+      </p:sp>
+      <p:sp>
+        <p:nvSpPr>
+          <p:cNvPr id="10" name="TextBox 9"/>
+          <p:cNvSpPr txBox="1"/>
+          <p:nvPr/>
+        </p:nvSpPr>
+        <p:spPr>
+          <a:xfrm>
+            <a:off x="457200" y="2834640"/>
+            <a:ext cx="4937760" cy="502920"/>
+          </a:xfrm>
+          <a:prstGeom prst="rect">
+            <a:avLst/>
+          </a:prstGeom>
+          <a:noFill/>
+        </p:spPr>
+        <p:txBody>
+          <a:bodyPr wrap="square">
+            <a:spAutoFit/>
+          </a:bodyPr>
+          <a:lstStyle/>
+          <a:p>
+            <a:pPr algn="l"/>
+            <a:r>
+              <a:rPr sz="1200" b="0" i="0">
+                <a:solidFill>
+                  <a:srgbClr val="212121"/>
+                </a:solidFill>
+                <a:latin typeface="Calibri"/>
+              </a:rPr>
+              <a:t>• Persiste após todos os controles observáveis</a:t>
+            </a:r>
+          </a:p>
+        </p:txBody>
+      </p:sp>
+      <p:sp>
+        <p:nvSpPr>
+          <p:cNvPr id="11" name="Rectangle 10"/>
           <p:cNvSpPr/>
           <p:nvPr/>
         </p:nvSpPr>
         <p:spPr>
           <a:xfrm>
-            <a:off x="7315200" y="3035808"/>
-            <a:ext cx="4663440" cy="676656"/>
+            <a:off x="6309360" y="1188720"/>
+            <a:ext cx="5303520" cy="2377440"/>
           </a:xfrm>
           <a:prstGeom prst="rect">
             <a:avLst/>
@@ -15681,9 +17133,9 @@
           <a:solidFill>
             <a:srgbClr val="F5F5F5"/>
           </a:solidFill>
-          <a:ln w="10160">
+          <a:ln w="19050">
             <a:solidFill>
-              <a:srgbClr val="2E7D32"/>
+              <a:srgbClr val="1565C0"/>
             </a:solidFill>
           </a:ln>
         </p:spPr>
@@ -15711,131 +17163,22 @@
       </p:sp>
       <p:sp>
         <p:nvSpPr>
-          <p:cNvPr id="16" name="TextBox 15"/>
-          <p:cNvSpPr txBox="1"/>
-          <p:nvPr/>
-        </p:nvSpPr>
-        <p:spPr>
-          <a:xfrm>
-            <a:off x="7406640" y="3081528"/>
-            <a:ext cx="365760" cy="548640"/>
-          </a:xfrm>
-          <a:prstGeom prst="rect">
-            <a:avLst/>
-          </a:prstGeom>
-          <a:noFill/>
-        </p:spPr>
-        <p:txBody>
-          <a:bodyPr wrap="square">
-            <a:spAutoFit/>
-          </a:bodyPr>
-          <a:lstStyle/>
-          <a:p>
-            <a:pPr algn="l"/>
-            <a:r>
-              <a:rPr sz="1300" b="1" i="0">
-                <a:solidFill>
-                  <a:srgbClr val="2E7D32"/>
-                </a:solidFill>
-                <a:latin typeface="Calibri"/>
-              </a:rPr>
-              <a:t>#3</a:t>
-            </a:r>
-          </a:p>
-        </p:txBody>
-      </p:sp>
-      <p:sp>
-        <p:nvSpPr>
-          <p:cNvPr id="17" name="TextBox 16"/>
-          <p:cNvSpPr txBox="1"/>
-          <p:nvPr/>
-        </p:nvSpPr>
-        <p:spPr>
-          <a:xfrm>
-            <a:off x="7818120" y="3081528"/>
-            <a:ext cx="2926080" cy="548640"/>
-          </a:xfrm>
-          <a:prstGeom prst="rect">
-            <a:avLst/>
-          </a:prstGeom>
-          <a:noFill/>
-        </p:spPr>
-        <p:txBody>
-          <a:bodyPr wrap="square">
-            <a:spAutoFit/>
-          </a:bodyPr>
-          <a:lstStyle/>
-          <a:p>
-            <a:pPr algn="l"/>
-            <a:r>
-              <a:rPr sz="1200" b="1" i="0">
-                <a:solidFill>
-                  <a:srgbClr val="212121"/>
-                </a:solidFill>
-                <a:latin typeface="Calibri"/>
-              </a:rPr>
-              <a:t>Mentoria e redes profissionais</a:t>
-            </a:r>
-          </a:p>
-        </p:txBody>
-      </p:sp>
-      <p:sp>
-        <p:nvSpPr>
-          <p:cNvPr id="18" name="TextBox 17"/>
-          <p:cNvSpPr txBox="1"/>
-          <p:nvPr/>
-        </p:nvSpPr>
-        <p:spPr>
-          <a:xfrm>
-            <a:off x="10789920" y="3081528"/>
-            <a:ext cx="1143000" cy="548640"/>
-          </a:xfrm>
-          <a:prstGeom prst="rect">
-            <a:avLst/>
-          </a:prstGeom>
-          <a:noFill/>
-        </p:spPr>
-        <p:txBody>
-          <a:bodyPr wrap="square">
-            <a:spAutoFit/>
-          </a:bodyPr>
-          <a:lstStyle/>
-          <a:p>
-            <a:pPr algn="r"/>
-            <a:r>
-              <a:rPr sz="1200" b="1" i="0">
-                <a:solidFill>
-                  <a:srgbClr val="2E7D32"/>
-                </a:solidFill>
-                <a:latin typeface="Calibri"/>
-              </a:rPr>
-              <a:t>CC = 0,396</a:t>
-            </a:r>
-          </a:p>
-        </p:txBody>
-      </p:sp>
-      <p:sp>
-        <p:nvSpPr>
-          <p:cNvPr id="19" name="Rectangle 18"/>
+          <p:cNvPr id="12" name="Rectangle 11"/>
           <p:cNvSpPr/>
           <p:nvPr/>
         </p:nvSpPr>
         <p:spPr>
           <a:xfrm>
-            <a:off x="7315200" y="3767328"/>
-            <a:ext cx="4663440" cy="676656"/>
+            <a:off x="6309360" y="1188720"/>
+            <a:ext cx="5303520" cy="457200"/>
           </a:xfrm>
           <a:prstGeom prst="rect">
             <a:avLst/>
           </a:prstGeom>
           <a:solidFill>
-            <a:srgbClr val="F5F5F5"/>
+            <a:srgbClr val="1565C0"/>
           </a:solidFill>
-          <a:ln w="10160">
-            <a:solidFill>
-              <a:srgbClr val="FF8F00"/>
-            </a:solidFill>
-          </a:ln>
+          <a:ln/>
         </p:spPr>
         <p:style>
           <a:lnRef idx="1">
@@ -15861,14 +17204,50 @@
       </p:sp>
       <p:sp>
         <p:nvSpPr>
-          <p:cNvPr id="20" name="TextBox 19"/>
-          <p:cNvSpPr txBox="1"/>
-          <p:nvPr/>
-        </p:nvSpPr>
-        <p:spPr>
-          <a:xfrm>
-            <a:off x="7406640" y="3813048"/>
-            <a:ext cx="365760" cy="548640"/>
+          <p:cNvPr id="13" name="TextBox 12"/>
+          <p:cNvSpPr txBox="1"/>
+          <p:nvPr/>
+        </p:nvSpPr>
+        <p:spPr>
+          <a:xfrm>
+            <a:off x="6400800" y="1234440"/>
+            <a:ext cx="5120640" cy="411480"/>
+          </a:xfrm>
+          <a:prstGeom prst="rect">
+            <a:avLst/>
+          </a:prstGeom>
+          <a:noFill/>
+        </p:spPr>
+        <p:txBody>
+          <a:bodyPr wrap="square">
+            <a:spAutoFit/>
+          </a:bodyPr>
+          <a:lstStyle/>
+          <a:p>
+            <a:pPr algn="ctr"/>
+            <a:r>
+              <a:rPr sz="1300" b="1" i="0">
+                <a:solidFill>
+                  <a:srgbClr val="FFFFFF"/>
+                </a:solidFill>
+                <a:latin typeface="Calibri"/>
+              </a:rPr>
+              <a:t>DISCRIMINAÇÃO
+DE REMUNERAÇÃO</a:t>
+            </a:r>
+          </a:p>
+        </p:txBody>
+      </p:sp>
+      <p:sp>
+        <p:nvSpPr>
+          <p:cNvPr id="14" name="TextBox 13"/>
+          <p:cNvSpPr txBox="1"/>
+          <p:nvPr/>
+        </p:nvSpPr>
+        <p:spPr>
+          <a:xfrm>
+            <a:off x="6492240" y="1737360"/>
+            <a:ext cx="4937760" cy="502920"/>
           </a:xfrm>
           <a:prstGeom prst="rect">
             <a:avLst/>
@@ -15883,27 +17262,27 @@
           <a:p>
             <a:pPr algn="l"/>
             <a:r>
-              <a:rPr sz="1300" b="1" i="0">
-                <a:solidFill>
-                  <a:srgbClr val="FF8F00"/>
-                </a:solidFill>
-                <a:latin typeface="Calibri"/>
-              </a:rPr>
-              <a:t>#4</a:t>
-            </a:r>
-          </a:p>
-        </p:txBody>
-      </p:sp>
-      <p:sp>
-        <p:nvSpPr>
-          <p:cNvPr id="21" name="TextBox 20"/>
-          <p:cNvSpPr txBox="1"/>
-          <p:nvPr/>
-        </p:nvSpPr>
-        <p:spPr>
-          <a:xfrm>
-            <a:off x="7818120" y="3813048"/>
-            <a:ext cx="2926080" cy="548640"/>
+              <a:rPr sz="1200" b="0" i="0">
+                <a:solidFill>
+                  <a:srgbClr val="212121"/>
+                </a:solidFill>
+                <a:latin typeface="Calibri"/>
+              </a:rPr>
+              <a:t>• HLM M4: gap residual 6,2%</a:t>
+            </a:r>
+          </a:p>
+        </p:txBody>
+      </p:sp>
+      <p:sp>
+        <p:nvSpPr>
+          <p:cNvPr id="15" name="TextBox 14"/>
+          <p:cNvSpPr txBox="1"/>
+          <p:nvPr/>
+        </p:nvSpPr>
+        <p:spPr>
+          <a:xfrm>
+            <a:off x="6492240" y="2286000"/>
+            <a:ext cx="4937760" cy="502920"/>
           </a:xfrm>
           <a:prstGeom prst="rect">
             <a:avLst/>
@@ -15924,56 +17303,56 @@
                 </a:solidFill>
                 <a:latin typeface="Calibri"/>
               </a:rPr>
-              <a:t>Transparência salarial obrigatória</a:t>
-            </a:r>
-          </a:p>
-        </p:txBody>
-      </p:sp>
-      <p:sp>
-        <p:nvSpPr>
-          <p:cNvPr id="22" name="TextBox 21"/>
-          <p:cNvSpPr txBox="1"/>
-          <p:nvPr/>
-        </p:nvSpPr>
-        <p:spPr>
-          <a:xfrm>
-            <a:off x="10789920" y="3813048"/>
-            <a:ext cx="1143000" cy="548640"/>
-          </a:xfrm>
-          <a:prstGeom prst="rect">
-            <a:avLst/>
-          </a:prstGeom>
-          <a:noFill/>
-        </p:spPr>
-        <p:txBody>
-          <a:bodyPr wrap="square">
-            <a:spAutoFit/>
-          </a:bodyPr>
-          <a:lstStyle/>
-          <a:p>
-            <a:pPr algn="r"/>
-            <a:r>
-              <a:rPr sz="1200" b="1" i="0">
-                <a:solidFill>
-                  <a:srgbClr val="FF8F00"/>
-                </a:solidFill>
-                <a:latin typeface="Calibri"/>
-              </a:rPr>
-              <a:t>CC = 0,342</a:t>
-            </a:r>
-          </a:p>
-        </p:txBody>
-      </p:sp>
-      <p:sp>
-        <p:nvSpPr>
-          <p:cNvPr id="23" name="Rectangle 22"/>
+              <a:t>• Quantile Reg.: cresce no topo (glass ceiling)</a:t>
+            </a:r>
+          </a:p>
+        </p:txBody>
+      </p:sp>
+      <p:sp>
+        <p:nvSpPr>
+          <p:cNvPr id="16" name="TextBox 15"/>
+          <p:cNvSpPr txBox="1"/>
+          <p:nvPr/>
+        </p:nvSpPr>
+        <p:spPr>
+          <a:xfrm>
+            <a:off x="6492240" y="2834640"/>
+            <a:ext cx="4937760" cy="502920"/>
+          </a:xfrm>
+          <a:prstGeom prst="rect">
+            <a:avLst/>
+          </a:prstGeom>
+          <a:noFill/>
+        </p:spPr>
+        <p:txBody>
+          <a:bodyPr wrap="square">
+            <a:spAutoFit/>
+          </a:bodyPr>
+          <a:lstStyle/>
+          <a:p>
+            <a:pPr algn="l"/>
+            <a:r>
+              <a:rPr sz="1200" b="0" i="0">
+                <a:solidFill>
+                  <a:srgbClr val="212121"/>
+                </a:solidFill>
+                <a:latin typeface="Calibri"/>
+              </a:rPr>
+              <a:t>• SHAP: −2,5% efeito racial residual</a:t>
+            </a:r>
+          </a:p>
+        </p:txBody>
+      </p:sp>
+      <p:sp>
+        <p:nvSpPr>
+          <p:cNvPr id="17" name="Rectangle 16"/>
           <p:cNvSpPr/>
           <p:nvPr/>
         </p:nvSpPr>
         <p:spPr>
           <a:xfrm>
-            <a:off x="7315200" y="4498848"/>
-            <a:ext cx="4663440" cy="676656"/>
+            <a:off x="3291840" y="3931920"/>
+            <a:ext cx="5303520" cy="2377440"/>
           </a:xfrm>
           <a:prstGeom prst="rect">
             <a:avLst/>
@@ -15981,9 +17360,9 @@
           <a:solidFill>
             <a:srgbClr val="F5F5F5"/>
           </a:solidFill>
-          <a:ln w="10160">
+          <a:ln w="19050">
             <a:solidFill>
-              <a:srgbClr val="616161"/>
+              <a:srgbClr val="1F3864"/>
             </a:solidFill>
           </a:ln>
         </p:spPr>
@@ -16011,131 +17390,22 @@
       </p:sp>
       <p:sp>
         <p:nvSpPr>
-          <p:cNvPr id="24" name="TextBox 23"/>
-          <p:cNvSpPr txBox="1"/>
-          <p:nvPr/>
-        </p:nvSpPr>
-        <p:spPr>
-          <a:xfrm>
-            <a:off x="7406640" y="4544568"/>
-            <a:ext cx="365760" cy="548640"/>
-          </a:xfrm>
-          <a:prstGeom prst="rect">
-            <a:avLst/>
-          </a:prstGeom>
-          <a:noFill/>
-        </p:spPr>
-        <p:txBody>
-          <a:bodyPr wrap="square">
-            <a:spAutoFit/>
-          </a:bodyPr>
-          <a:lstStyle/>
-          <a:p>
-            <a:pPr algn="l"/>
-            <a:r>
-              <a:rPr sz="1300" b="1" i="0">
-                <a:solidFill>
-                  <a:srgbClr val="616161"/>
-                </a:solidFill>
-                <a:latin typeface="Calibri"/>
-              </a:rPr>
-              <a:t>#5</a:t>
-            </a:r>
-          </a:p>
-        </p:txBody>
-      </p:sp>
-      <p:sp>
-        <p:nvSpPr>
-          <p:cNvPr id="25" name="TextBox 24"/>
-          <p:cNvSpPr txBox="1"/>
-          <p:nvPr/>
-        </p:nvSpPr>
-        <p:spPr>
-          <a:xfrm>
-            <a:off x="7818120" y="4544568"/>
-            <a:ext cx="2926080" cy="548640"/>
-          </a:xfrm>
-          <a:prstGeom prst="rect">
-            <a:avLst/>
-          </a:prstGeom>
-          <a:noFill/>
-        </p:spPr>
-        <p:txBody>
-          <a:bodyPr wrap="square">
-            <a:spAutoFit/>
-          </a:bodyPr>
-          <a:lstStyle/>
-          <a:p>
-            <a:pPr algn="l"/>
-            <a:r>
-              <a:rPr sz="1200" b="0" i="0">
-                <a:solidFill>
-                  <a:srgbClr val="212121"/>
-                </a:solidFill>
-                <a:latin typeface="Calibri"/>
-              </a:rPr>
-              <a:t>Enforcement anti-discriminação</a:t>
-            </a:r>
-          </a:p>
-        </p:txBody>
-      </p:sp>
-      <p:sp>
-        <p:nvSpPr>
-          <p:cNvPr id="26" name="TextBox 25"/>
-          <p:cNvSpPr txBox="1"/>
-          <p:nvPr/>
-        </p:nvSpPr>
-        <p:spPr>
-          <a:xfrm>
-            <a:off x="10789920" y="4544568"/>
-            <a:ext cx="1143000" cy="548640"/>
-          </a:xfrm>
-          <a:prstGeom prst="rect">
-            <a:avLst/>
-          </a:prstGeom>
-          <a:noFill/>
-        </p:spPr>
-        <p:txBody>
-          <a:bodyPr wrap="square">
-            <a:spAutoFit/>
-          </a:bodyPr>
-          <a:lstStyle/>
-          <a:p>
-            <a:pPr algn="r"/>
-            <a:r>
-              <a:rPr sz="1200" b="1" i="0">
-                <a:solidFill>
-                  <a:srgbClr val="616161"/>
-                </a:solidFill>
-                <a:latin typeface="Calibri"/>
-              </a:rPr>
-              <a:t>CC = 0,270</a:t>
-            </a:r>
-          </a:p>
-        </p:txBody>
-      </p:sp>
-      <p:sp>
-        <p:nvSpPr>
-          <p:cNvPr id="27" name="Rectangle 26"/>
+          <p:cNvPr id="18" name="Rectangle 17"/>
           <p:cNvSpPr/>
           <p:nvPr/>
         </p:nvSpPr>
         <p:spPr>
           <a:xfrm>
-            <a:off x="7315200" y="5230368"/>
-            <a:ext cx="4663440" cy="676656"/>
+            <a:off x="3291840" y="3931920"/>
+            <a:ext cx="5303520" cy="457200"/>
           </a:xfrm>
           <a:prstGeom prst="rect">
             <a:avLst/>
           </a:prstGeom>
           <a:solidFill>
-            <a:srgbClr val="F5F5F5"/>
+            <a:srgbClr val="1F3864"/>
           </a:solidFill>
-          <a:ln w="10160">
-            <a:solidFill>
-              <a:srgbClr val="616161"/>
-            </a:solidFill>
-          </a:ln>
+          <a:ln/>
         </p:spPr>
         <p:style>
           <a:lnRef idx="1">
@@ -16161,14 +17431,50 @@
       </p:sp>
       <p:sp>
         <p:nvSpPr>
-          <p:cNvPr id="28" name="TextBox 27"/>
-          <p:cNvSpPr txBox="1"/>
-          <p:nvPr/>
-        </p:nvSpPr>
-        <p:spPr>
-          <a:xfrm>
-            <a:off x="7406640" y="5276088"/>
-            <a:ext cx="365760" cy="548640"/>
+          <p:cNvPr id="19" name="TextBox 18"/>
+          <p:cNvSpPr txBox="1"/>
+          <p:nvPr/>
+        </p:nvSpPr>
+        <p:spPr>
+          <a:xfrm>
+            <a:off x="3383280" y="3977640"/>
+            <a:ext cx="5120640" cy="411480"/>
+          </a:xfrm>
+          <a:prstGeom prst="rect">
+            <a:avLst/>
+          </a:prstGeom>
+          <a:noFill/>
+        </p:spPr>
+        <p:txBody>
+          <a:bodyPr wrap="square">
+            <a:spAutoFit/>
+          </a:bodyPr>
+          <a:lstStyle/>
+          <a:p>
+            <a:pPr algn="ctr"/>
+            <a:r>
+              <a:rPr sz="1300" b="1" i="0">
+                <a:solidFill>
+                  <a:srgbClr val="FFFFFF"/>
+                </a:solidFill>
+                <a:latin typeface="Calibri"/>
+              </a:rPr>
+              <a:t>EXCLUSÃO
+DAS REDES</a:t>
+            </a:r>
+          </a:p>
+        </p:txBody>
+      </p:sp>
+      <p:sp>
+        <p:nvSpPr>
+          <p:cNvPr id="20" name="TextBox 19"/>
+          <p:cNvSpPr txBox="1"/>
+          <p:nvPr/>
+        </p:nvSpPr>
+        <p:spPr>
+          <a:xfrm>
+            <a:off x="3474720" y="4480560"/>
+            <a:ext cx="4937760" cy="502920"/>
           </a:xfrm>
           <a:prstGeom prst="rect">
             <a:avLst/>
@@ -16183,27 +17489,27 @@
           <a:p>
             <a:pPr algn="l"/>
             <a:r>
-              <a:rPr sz="1300" b="1" i="0">
-                <a:solidFill>
-                  <a:srgbClr val="616161"/>
-                </a:solidFill>
-                <a:latin typeface="Calibri"/>
-              </a:rPr>
-              <a:t>#6</a:t>
-            </a:r>
-          </a:p>
-        </p:txBody>
-      </p:sp>
-      <p:sp>
-        <p:nvSpPr>
-          <p:cNvPr id="29" name="TextBox 28"/>
-          <p:cNvSpPr txBox="1"/>
-          <p:nvPr/>
-        </p:nvSpPr>
-        <p:spPr>
-          <a:xfrm>
-            <a:off x="7818120" y="5276088"/>
-            <a:ext cx="2926080" cy="548640"/>
+              <a:rPr sz="1200" b="0" i="0">
+                <a:solidFill>
+                  <a:srgbClr val="212121"/>
+                </a:solidFill>
+                <a:latin typeface="Calibri"/>
+              </a:rPr>
+              <a:t>• SNA: betweenness=0 para negros</a:t>
+            </a:r>
+          </a:p>
+        </p:txBody>
+      </p:sp>
+      <p:sp>
+        <p:nvSpPr>
+          <p:cNvPr id="21" name="TextBox 20"/>
+          <p:cNvSpPr txBox="1"/>
+          <p:nvPr/>
+        </p:nvSpPr>
+        <p:spPr>
+          <a:xfrm>
+            <a:off x="3474720" y="5029200"/>
+            <a:ext cx="4937760" cy="502920"/>
           </a:xfrm>
           <a:prstGeom prst="rect">
             <a:avLst/>
@@ -16224,56 +17530,56 @@
                 </a:solidFill>
                 <a:latin typeface="Calibri"/>
               </a:rPr>
-              <a:t>Desegregação residencial</a:t>
-            </a:r>
-          </a:p>
-        </p:txBody>
-      </p:sp>
-      <p:sp>
-        <p:nvSpPr>
-          <p:cNvPr id="30" name="TextBox 29"/>
-          <p:cNvSpPr txBox="1"/>
-          <p:nvPr/>
-        </p:nvSpPr>
-        <p:spPr>
-          <a:xfrm>
-            <a:off x="10789920" y="5276088"/>
-            <a:ext cx="1143000" cy="548640"/>
-          </a:xfrm>
-          <a:prstGeom prst="rect">
-            <a:avLst/>
-          </a:prstGeom>
-          <a:noFill/>
-        </p:spPr>
-        <p:txBody>
-          <a:bodyPr wrap="square">
-            <a:spAutoFit/>
-          </a:bodyPr>
-          <a:lstStyle/>
-          <a:p>
-            <a:pPr algn="r"/>
-            <a:r>
-              <a:rPr sz="1200" b="1" i="0">
-                <a:solidFill>
-                  <a:srgbClr val="616161"/>
-                </a:solidFill>
-                <a:latin typeface="Calibri"/>
-              </a:rPr>
-              <a:t>CC = 0,081</a:t>
-            </a:r>
-          </a:p>
-        </p:txBody>
-      </p:sp>
-      <p:sp>
-        <p:nvSpPr>
-          <p:cNvPr id="31" name="Rectangle 30"/>
+              <a:t>• Diplomas valem menos sem acesso às redes</a:t>
+            </a:r>
+          </a:p>
+        </p:txBody>
+      </p:sp>
+      <p:sp>
+        <p:nvSpPr>
+          <p:cNvPr id="22" name="TextBox 21"/>
+          <p:cNvSpPr txBox="1"/>
+          <p:nvPr/>
+        </p:nvSpPr>
+        <p:spPr>
+          <a:xfrm>
+            <a:off x="3474720" y="5577840"/>
+            <a:ext cx="4937760" cy="502920"/>
+          </a:xfrm>
+          <a:prstGeom prst="rect">
+            <a:avLst/>
+          </a:prstGeom>
+          <a:noFill/>
+        </p:spPr>
+        <p:txBody>
+          <a:bodyPr wrap="square">
+            <a:spAutoFit/>
+          </a:bodyPr>
+          <a:lstStyle/>
+          <a:p>
+            <a:pPr algn="l"/>
+            <a:r>
+              <a:rPr sz="1200" b="0" i="0">
+                <a:solidFill>
+                  <a:srgbClr val="212121"/>
+                </a:solidFill>
+                <a:latin typeface="Calibri"/>
+              </a:rPr>
+              <a:t>• K-Means: C2 homens negros — 36,5% superior mas 58% &lt; renda C1</a:t>
+            </a:r>
+          </a:p>
+        </p:txBody>
+      </p:sp>
+      <p:sp>
+        <p:nvSpPr>
+          <p:cNvPr id="23" name="Rectangle 22"/>
           <p:cNvSpPr/>
           <p:nvPr/>
         </p:nvSpPr>
         <p:spPr>
           <a:xfrm>
-            <a:off x="274320" y="6035040"/>
-            <a:ext cx="11612880" cy="594360"/>
+            <a:off x="274320" y="5852160"/>
+            <a:ext cx="11612880" cy="457200"/>
           </a:xfrm>
           <a:prstGeom prst="rect">
             <a:avLst/>
@@ -16307,14 +17613,14 @@
       </p:sp>
       <p:sp>
         <p:nvSpPr>
-          <p:cNvPr id="32" name="TextBox 31"/>
-          <p:cNvSpPr txBox="1"/>
-          <p:nvPr/>
-        </p:nvSpPr>
-        <p:spPr>
-          <a:xfrm>
-            <a:off x="457200" y="6080760"/>
-            <a:ext cx="11247120" cy="502920"/>
+          <p:cNvPr id="24" name="TextBox 23"/>
+          <p:cNvSpPr txBox="1"/>
+          <p:nvPr/>
+        </p:nvSpPr>
+        <p:spPr>
+          <a:xfrm>
+            <a:off x="457200" y="5897880"/>
+            <a:ext cx="11247120" cy="411480"/>
           </a:xfrm>
           <a:prstGeom prst="rect">
             <a:avLst/>
@@ -16335,14 +17641,14 @@
                 </a:solidFill>
                 <a:latin typeface="Calibri"/>
               </a:rPr>
-              <a:t>84% do gap é de ACESSO → P1 (Cotas CBO) lidera com CC=0,835 — 2,1× superior ao 2º colocado.  Pareto (λ=0,5): alocação ótima = P1+P5 (cotas + mentoria).  PL-1 (orçamento B=5): redução projetada de 25,1% do gap bruto.</a:t>
-            </a:r>
-          </a:p>
-        </p:txBody>
-      </p:sp>
-      <p:sp>
-        <p:nvSpPr>
-          <p:cNvPr id="33" name="Rectangle 32"/>
+              <a:t>Oaxaca-Blinder une os três vértices: 84% do gap é de ACESSO (dotações) | 16% de REMUNERAÇÃO (retornos) | SNA explica por que o acesso é estruturalmente negado  |  GLMM: OR=0,691</a:t>
+            </a:r>
+          </a:p>
+        </p:txBody>
+      </p:sp>
+      <p:sp>
+        <p:nvSpPr>
+          <p:cNvPr id="25" name="Rectangle 24"/>
           <p:cNvSpPr/>
           <p:nvPr/>
         </p:nvSpPr>
@@ -16383,7 +17689,7 @@
       </p:sp>
       <p:sp>
         <p:nvSpPr>
-          <p:cNvPr id="34" name="TextBox 33"/>
+          <p:cNvPr id="26" name="TextBox 25"/>
           <p:cNvSpPr txBox="1"/>
           <p:nvPr/>
         </p:nvSpPr>
@@ -16418,7 +17724,7 @@
       </p:sp>
       <p:sp>
         <p:nvSpPr>
-          <p:cNvPr id="35" name="TextBox 34"/>
+          <p:cNvPr id="27" name="TextBox 26"/>
           <p:cNvSpPr txBox="1"/>
           <p:nvPr/>
         </p:nvSpPr>
@@ -16540,7 +17846,7 @@
                 </a:solidFill>
                 <a:latin typeface="Calibri"/>
               </a:rPr>
-              <a:t>22. Implicações de Política</a:t>
+              <a:t>22. Pesquisa Operacional — Priorização Multicritério Anti-Discriminação</a:t>
             </a:r>
           </a:p>
         </p:txBody>
@@ -16575,29 +17881,88 @@
                 </a:solidFill>
                 <a:latin typeface="Calibri"/>
               </a:rPr>
-              <a:t>Três eixos simultâneos — ações isoladas são insuficientes para romper a armadilha estrutural</a:t>
-            </a:r>
-          </a:p>
-        </p:txBody>
-      </p:sp>
-      <p:sp>
-        <p:nvSpPr>
-          <p:cNvPr id="5" name="Rectangle 4"/>
+              <a:t>TOPSIS + AHP (CR=0,004) + Programação Linear + Fronteira de Pareto | 6 políticas avaliadas</a:t>
+            </a:r>
+          </a:p>
+        </p:txBody>
+      </p:sp>
+      <p:pic>
+        <p:nvPicPr>
+          <p:cNvPr id="5" name="Picture 4" descr="po_politicas_topsis.png"/>
+          <p:cNvPicPr>
+            <a:picLocks noChangeAspect="1"/>
+          </p:cNvPicPr>
+          <p:nvPr/>
+        </p:nvPicPr>
+        <p:blipFill>
+          <a:blip r:embed="rId2"/>
+          <a:stretch>
+            <a:fillRect/>
+          </a:stretch>
+        </p:blipFill>
+        <p:spPr>
+          <a:xfrm>
+            <a:off x="274320" y="1097280"/>
+            <a:ext cx="6583680" cy="2156266"/>
+          </a:xfrm>
+          <a:prstGeom prst="rect">
+            <a:avLst/>
+          </a:prstGeom>
+        </p:spPr>
+      </p:pic>
+      <p:sp>
+        <p:nvSpPr>
+          <p:cNvPr id="6" name="TextBox 5"/>
+          <p:cNvSpPr txBox="1"/>
+          <p:nvPr/>
+        </p:nvSpPr>
+        <p:spPr>
+          <a:xfrm>
+            <a:off x="7315200" y="1097280"/>
+            <a:ext cx="4663440" cy="365760"/>
+          </a:xfrm>
+          <a:prstGeom prst="rect">
+            <a:avLst/>
+          </a:prstGeom>
+          <a:noFill/>
+        </p:spPr>
+        <p:txBody>
+          <a:bodyPr wrap="square">
+            <a:spAutoFit/>
+          </a:bodyPr>
+          <a:lstStyle/>
+          <a:p>
+            <a:pPr algn="l"/>
+            <a:r>
+              <a:rPr sz="1400" b="1" i="0">
+                <a:solidFill>
+                  <a:srgbClr val="1F3864"/>
+                </a:solidFill>
+                <a:latin typeface="Calibri"/>
+              </a:rPr>
+              <a:t>Ranking TOPSIS (6 intervenções)</a:t>
+            </a:r>
+          </a:p>
+        </p:txBody>
+      </p:sp>
+      <p:sp>
+        <p:nvSpPr>
+          <p:cNvPr id="7" name="Rectangle 6"/>
           <p:cNvSpPr/>
           <p:nvPr/>
         </p:nvSpPr>
         <p:spPr>
           <a:xfrm>
-            <a:off x="274320" y="1097280"/>
-            <a:ext cx="3749039" cy="5029200"/>
+            <a:off x="7315200" y="1572768"/>
+            <a:ext cx="4663440" cy="676656"/>
           </a:xfrm>
           <a:prstGeom prst="rect">
             <a:avLst/>
           </a:prstGeom>
           <a:solidFill>
-            <a:srgbClr val="F5F5F5"/>
+            <a:srgbClr val="FFEBEE"/>
           </a:solidFill>
-          <a:ln w="19050">
+          <a:ln w="10160">
             <a:solidFill>
               <a:srgbClr val="B71C1C"/>
             </a:solidFill>
@@ -16627,22 +17992,131 @@
       </p:sp>
       <p:sp>
         <p:nvSpPr>
-          <p:cNvPr id="6" name="Rectangle 5"/>
+          <p:cNvPr id="8" name="TextBox 7"/>
+          <p:cNvSpPr txBox="1"/>
+          <p:nvPr/>
+        </p:nvSpPr>
+        <p:spPr>
+          <a:xfrm>
+            <a:off x="7406640" y="1618488"/>
+            <a:ext cx="365760" cy="548640"/>
+          </a:xfrm>
+          <a:prstGeom prst="rect">
+            <a:avLst/>
+          </a:prstGeom>
+          <a:noFill/>
+        </p:spPr>
+        <p:txBody>
+          <a:bodyPr wrap="square">
+            <a:spAutoFit/>
+          </a:bodyPr>
+          <a:lstStyle/>
+          <a:p>
+            <a:pPr algn="l"/>
+            <a:r>
+              <a:rPr sz="1300" b="1" i="0">
+                <a:solidFill>
+                  <a:srgbClr val="B71C1C"/>
+                </a:solidFill>
+                <a:latin typeface="Calibri"/>
+              </a:rPr>
+              <a:t>#1</a:t>
+            </a:r>
+          </a:p>
+        </p:txBody>
+      </p:sp>
+      <p:sp>
+        <p:nvSpPr>
+          <p:cNvPr id="9" name="TextBox 8"/>
+          <p:cNvSpPr txBox="1"/>
+          <p:nvPr/>
+        </p:nvSpPr>
+        <p:spPr>
+          <a:xfrm>
+            <a:off x="7818120" y="1618488"/>
+            <a:ext cx="2926080" cy="548640"/>
+          </a:xfrm>
+          <a:prstGeom prst="rect">
+            <a:avLst/>
+          </a:prstGeom>
+          <a:noFill/>
+        </p:spPr>
+        <p:txBody>
+          <a:bodyPr wrap="square">
+            <a:spAutoFit/>
+          </a:bodyPr>
+          <a:lstStyle/>
+          <a:p>
+            <a:pPr algn="l"/>
+            <a:r>
+              <a:rPr sz="1200" b="1" i="0">
+                <a:solidFill>
+                  <a:srgbClr val="212121"/>
+                </a:solidFill>
+                <a:latin typeface="Calibri"/>
+              </a:rPr>
+              <a:t>Cotas ocupacionais CBO 1–4</a:t>
+            </a:r>
+          </a:p>
+        </p:txBody>
+      </p:sp>
+      <p:sp>
+        <p:nvSpPr>
+          <p:cNvPr id="10" name="TextBox 9"/>
+          <p:cNvSpPr txBox="1"/>
+          <p:nvPr/>
+        </p:nvSpPr>
+        <p:spPr>
+          <a:xfrm>
+            <a:off x="10789920" y="1618488"/>
+            <a:ext cx="1143000" cy="548640"/>
+          </a:xfrm>
+          <a:prstGeom prst="rect">
+            <a:avLst/>
+          </a:prstGeom>
+          <a:noFill/>
+        </p:spPr>
+        <p:txBody>
+          <a:bodyPr wrap="square">
+            <a:spAutoFit/>
+          </a:bodyPr>
+          <a:lstStyle/>
+          <a:p>
+            <a:pPr algn="r"/>
+            <a:r>
+              <a:rPr sz="1200" b="1" i="0">
+                <a:solidFill>
+                  <a:srgbClr val="B71C1C"/>
+                </a:solidFill>
+                <a:latin typeface="Calibri"/>
+              </a:rPr>
+              <a:t>CC = 0,835</a:t>
+            </a:r>
+          </a:p>
+        </p:txBody>
+      </p:sp>
+      <p:sp>
+        <p:nvSpPr>
+          <p:cNvPr id="11" name="Rectangle 10"/>
           <p:cNvSpPr/>
           <p:nvPr/>
         </p:nvSpPr>
         <p:spPr>
           <a:xfrm>
-            <a:off x="274320" y="1097280"/>
-            <a:ext cx="3749039" cy="502920"/>
+            <a:off x="7315200" y="2304288"/>
+            <a:ext cx="4663440" cy="676656"/>
           </a:xfrm>
           <a:prstGeom prst="rect">
             <a:avLst/>
           </a:prstGeom>
           <a:solidFill>
-            <a:srgbClr val="B71C1C"/>
+            <a:srgbClr val="E3F2FD"/>
           </a:solidFill>
-          <a:ln/>
+          <a:ln w="10160">
+            <a:solidFill>
+              <a:srgbClr val="1565C0"/>
+            </a:solidFill>
+          </a:ln>
         </p:spPr>
         <p:style>
           <a:lnRef idx="1">
@@ -16668,14 +18142,14 @@
       </p:sp>
       <p:sp>
         <p:nvSpPr>
-          <p:cNvPr id="7" name="TextBox 6"/>
-          <p:cNvSpPr txBox="1"/>
-          <p:nvPr/>
-        </p:nvSpPr>
-        <p:spPr>
-          <a:xfrm>
-            <a:off x="365760" y="1143000"/>
-            <a:ext cx="3566160" cy="457200"/>
+          <p:cNvPr id="12" name="TextBox 11"/>
+          <p:cNvSpPr txBox="1"/>
+          <p:nvPr/>
+        </p:nvSpPr>
+        <p:spPr>
+          <a:xfrm>
+            <a:off x="7406640" y="2350008"/>
+            <a:ext cx="365760" cy="548640"/>
           </a:xfrm>
           <a:prstGeom prst="rect">
             <a:avLst/>
@@ -16692,25 +18166,25 @@
             <a:r>
               <a:rPr sz="1300" b="1" i="0">
                 <a:solidFill>
-                  <a:srgbClr val="FFFFFF"/>
-                </a:solidFill>
-                <a:latin typeface="Calibri"/>
-              </a:rPr>
-              <a:t>Eixo 1 — Acesso</a:t>
-            </a:r>
-          </a:p>
-        </p:txBody>
-      </p:sp>
-      <p:sp>
-        <p:nvSpPr>
-          <p:cNvPr id="8" name="TextBox 7"/>
-          <p:cNvSpPr txBox="1"/>
-          <p:nvPr/>
-        </p:nvSpPr>
-        <p:spPr>
-          <a:xfrm>
-            <a:off x="457200" y="1691640"/>
-            <a:ext cx="3383280" cy="731520"/>
+                  <a:srgbClr val="1565C0"/>
+                </a:solidFill>
+                <a:latin typeface="Calibri"/>
+              </a:rPr>
+              <a:t>#2</a:t>
+            </a:r>
+          </a:p>
+        </p:txBody>
+      </p:sp>
+      <p:sp>
+        <p:nvSpPr>
+          <p:cNvPr id="13" name="TextBox 12"/>
+          <p:cNvSpPr txBox="1"/>
+          <p:nvPr/>
+        </p:nvSpPr>
+        <p:spPr>
+          <a:xfrm>
+            <a:off x="7818120" y="2350008"/>
+            <a:ext cx="2926080" cy="548640"/>
           </a:xfrm>
           <a:prstGeom prst="rect">
             <a:avLst/>
@@ -16725,100 +18199,62 @@
           <a:p>
             <a:pPr algn="l"/>
             <a:r>
-              <a:rPr sz="1200" b="0" i="0">
+              <a:rPr sz="1200" b="1" i="0">
                 <a:solidFill>
                   <a:srgbClr val="212121"/>
                 </a:solidFill>
                 <a:latin typeface="Calibri"/>
               </a:rPr>
-              <a:t>▸  Cotas de acesso CBO Dirigente/Profissional:
-meta IR ≥ 0,80 até 2030</a:t>
-            </a:r>
-          </a:p>
-        </p:txBody>
-      </p:sp>
-      <p:sp>
-        <p:nvSpPr>
-          <p:cNvPr id="9" name="TextBox 8"/>
-          <p:cNvSpPr txBox="1"/>
-          <p:nvPr/>
-        </p:nvSpPr>
-        <p:spPr>
-          <a:xfrm>
-            <a:off x="457200" y="2468880"/>
-            <a:ext cx="3383280" cy="731520"/>
-          </a:xfrm>
-          <a:prstGeom prst="rect">
-            <a:avLst/>
-          </a:prstGeom>
-          <a:noFill/>
-        </p:spPr>
-        <p:txBody>
-          <a:bodyPr wrap="square">
-            <a:spAutoFit/>
-          </a:bodyPr>
-          <a:lstStyle/>
-          <a:p>
-            <a:pPr algn="l"/>
-            <a:r>
-              <a:rPr sz="1200" b="0" i="0">
-                <a:solidFill>
-                  <a:srgbClr val="212121"/>
-                </a:solidFill>
-                <a:latin typeface="Calibri"/>
-              </a:rPr>
-              <a:t>▸  PRONATEC c/ recorte racial e subsídio de
-transporte para trabalhadores de UPAs pobres</a:t>
-            </a:r>
-          </a:p>
-        </p:txBody>
-      </p:sp>
-      <p:sp>
-        <p:nvSpPr>
-          <p:cNvPr id="10" name="TextBox 9"/>
-          <p:cNvSpPr txBox="1"/>
-          <p:nvPr/>
-        </p:nvSpPr>
-        <p:spPr>
-          <a:xfrm>
-            <a:off x="457200" y="3246120"/>
-            <a:ext cx="3383280" cy="731520"/>
-          </a:xfrm>
-          <a:prstGeom prst="rect">
-            <a:avLst/>
-          </a:prstGeom>
-          <a:noFill/>
-        </p:spPr>
-        <p:txBody>
-          <a:bodyPr wrap="square">
-            <a:spAutoFit/>
-          </a:bodyPr>
-          <a:lstStyle/>
-          <a:p>
-            <a:pPr algn="l"/>
-            <a:r>
-              <a:rPr sz="1200" b="0" i="0">
-                <a:solidFill>
-                  <a:srgbClr val="212121"/>
-                </a:solidFill>
-                <a:latin typeface="Calibri"/>
-              </a:rPr>
-              <a:t>▸  Bolsas de residência profissional em empresas
-de alta remuneração para egressos negros</a:t>
-            </a:r>
-          </a:p>
-        </p:txBody>
-      </p:sp>
-      <p:sp>
-        <p:nvSpPr>
-          <p:cNvPr id="11" name="Rectangle 10"/>
+              <a:t>Equidade educacional</a:t>
+            </a:r>
+          </a:p>
+        </p:txBody>
+      </p:sp>
+      <p:sp>
+        <p:nvSpPr>
+          <p:cNvPr id="14" name="TextBox 13"/>
+          <p:cNvSpPr txBox="1"/>
+          <p:nvPr/>
+        </p:nvSpPr>
+        <p:spPr>
+          <a:xfrm>
+            <a:off x="10789920" y="2350008"/>
+            <a:ext cx="1143000" cy="548640"/>
+          </a:xfrm>
+          <a:prstGeom prst="rect">
+            <a:avLst/>
+          </a:prstGeom>
+          <a:noFill/>
+        </p:spPr>
+        <p:txBody>
+          <a:bodyPr wrap="square">
+            <a:spAutoFit/>
+          </a:bodyPr>
+          <a:lstStyle/>
+          <a:p>
+            <a:pPr algn="r"/>
+            <a:r>
+              <a:rPr sz="1200" b="1" i="0">
+                <a:solidFill>
+                  <a:srgbClr val="1565C0"/>
+                </a:solidFill>
+                <a:latin typeface="Calibri"/>
+              </a:rPr>
+              <a:t>CC = 0,588</a:t>
+            </a:r>
+          </a:p>
+        </p:txBody>
+      </p:sp>
+      <p:sp>
+        <p:nvSpPr>
+          <p:cNvPr id="15" name="Rectangle 14"/>
           <p:cNvSpPr/>
           <p:nvPr/>
         </p:nvSpPr>
         <p:spPr>
           <a:xfrm>
-            <a:off x="4251959" y="1097280"/>
-            <a:ext cx="3749039" cy="5029200"/>
+            <a:off x="7315200" y="3035808"/>
+            <a:ext cx="4663440" cy="676656"/>
           </a:xfrm>
           <a:prstGeom prst="rect">
             <a:avLst/>
@@ -16826,9 +18262,9 @@
           <a:solidFill>
             <a:srgbClr val="F5F5F5"/>
           </a:solidFill>
-          <a:ln w="19050">
+          <a:ln w="10160">
             <a:solidFill>
-              <a:srgbClr val="1565C0"/>
+              <a:srgbClr val="2E7D32"/>
             </a:solidFill>
           </a:ln>
         </p:spPr>
@@ -16856,22 +18292,131 @@
       </p:sp>
       <p:sp>
         <p:nvSpPr>
-          <p:cNvPr id="12" name="Rectangle 11"/>
+          <p:cNvPr id="16" name="TextBox 15"/>
+          <p:cNvSpPr txBox="1"/>
+          <p:nvPr/>
+        </p:nvSpPr>
+        <p:spPr>
+          <a:xfrm>
+            <a:off x="7406640" y="3081528"/>
+            <a:ext cx="365760" cy="548640"/>
+          </a:xfrm>
+          <a:prstGeom prst="rect">
+            <a:avLst/>
+          </a:prstGeom>
+          <a:noFill/>
+        </p:spPr>
+        <p:txBody>
+          <a:bodyPr wrap="square">
+            <a:spAutoFit/>
+          </a:bodyPr>
+          <a:lstStyle/>
+          <a:p>
+            <a:pPr algn="l"/>
+            <a:r>
+              <a:rPr sz="1300" b="1" i="0">
+                <a:solidFill>
+                  <a:srgbClr val="2E7D32"/>
+                </a:solidFill>
+                <a:latin typeface="Calibri"/>
+              </a:rPr>
+              <a:t>#3</a:t>
+            </a:r>
+          </a:p>
+        </p:txBody>
+      </p:sp>
+      <p:sp>
+        <p:nvSpPr>
+          <p:cNvPr id="17" name="TextBox 16"/>
+          <p:cNvSpPr txBox="1"/>
+          <p:nvPr/>
+        </p:nvSpPr>
+        <p:spPr>
+          <a:xfrm>
+            <a:off x="7818120" y="3081528"/>
+            <a:ext cx="2926080" cy="548640"/>
+          </a:xfrm>
+          <a:prstGeom prst="rect">
+            <a:avLst/>
+          </a:prstGeom>
+          <a:noFill/>
+        </p:spPr>
+        <p:txBody>
+          <a:bodyPr wrap="square">
+            <a:spAutoFit/>
+          </a:bodyPr>
+          <a:lstStyle/>
+          <a:p>
+            <a:pPr algn="l"/>
+            <a:r>
+              <a:rPr sz="1200" b="1" i="0">
+                <a:solidFill>
+                  <a:srgbClr val="212121"/>
+                </a:solidFill>
+                <a:latin typeface="Calibri"/>
+              </a:rPr>
+              <a:t>Mentoria e redes profissionais</a:t>
+            </a:r>
+          </a:p>
+        </p:txBody>
+      </p:sp>
+      <p:sp>
+        <p:nvSpPr>
+          <p:cNvPr id="18" name="TextBox 17"/>
+          <p:cNvSpPr txBox="1"/>
+          <p:nvPr/>
+        </p:nvSpPr>
+        <p:spPr>
+          <a:xfrm>
+            <a:off x="10789920" y="3081528"/>
+            <a:ext cx="1143000" cy="548640"/>
+          </a:xfrm>
+          <a:prstGeom prst="rect">
+            <a:avLst/>
+          </a:prstGeom>
+          <a:noFill/>
+        </p:spPr>
+        <p:txBody>
+          <a:bodyPr wrap="square">
+            <a:spAutoFit/>
+          </a:bodyPr>
+          <a:lstStyle/>
+          <a:p>
+            <a:pPr algn="r"/>
+            <a:r>
+              <a:rPr sz="1200" b="1" i="0">
+                <a:solidFill>
+                  <a:srgbClr val="2E7D32"/>
+                </a:solidFill>
+                <a:latin typeface="Calibri"/>
+              </a:rPr>
+              <a:t>CC = 0,396</a:t>
+            </a:r>
+          </a:p>
+        </p:txBody>
+      </p:sp>
+      <p:sp>
+        <p:nvSpPr>
+          <p:cNvPr id="19" name="Rectangle 18"/>
           <p:cNvSpPr/>
           <p:nvPr/>
         </p:nvSpPr>
         <p:spPr>
           <a:xfrm>
-            <a:off x="4251959" y="1097280"/>
-            <a:ext cx="3749039" cy="502920"/>
+            <a:off x="7315200" y="3767328"/>
+            <a:ext cx="4663440" cy="676656"/>
           </a:xfrm>
           <a:prstGeom prst="rect">
             <a:avLst/>
           </a:prstGeom>
           <a:solidFill>
-            <a:srgbClr val="1565C0"/>
+            <a:srgbClr val="F5F5F5"/>
           </a:solidFill>
-          <a:ln/>
+          <a:ln w="10160">
+            <a:solidFill>
+              <a:srgbClr val="FF8F00"/>
+            </a:solidFill>
+          </a:ln>
         </p:spPr>
         <p:style>
           <a:lnRef idx="1">
@@ -16897,14 +18442,14 @@
       </p:sp>
       <p:sp>
         <p:nvSpPr>
-          <p:cNvPr id="13" name="TextBox 12"/>
-          <p:cNvSpPr txBox="1"/>
-          <p:nvPr/>
-        </p:nvSpPr>
-        <p:spPr>
-          <a:xfrm>
-            <a:off x="4343399" y="1143000"/>
-            <a:ext cx="3566160" cy="457200"/>
+          <p:cNvPr id="20" name="TextBox 19"/>
+          <p:cNvSpPr txBox="1"/>
+          <p:nvPr/>
+        </p:nvSpPr>
+        <p:spPr>
+          <a:xfrm>
+            <a:off x="7406640" y="3813048"/>
+            <a:ext cx="365760" cy="548640"/>
           </a:xfrm>
           <a:prstGeom prst="rect">
             <a:avLst/>
@@ -16921,25 +18466,25 @@
             <a:r>
               <a:rPr sz="1300" b="1" i="0">
                 <a:solidFill>
-                  <a:srgbClr val="FFFFFF"/>
-                </a:solidFill>
-                <a:latin typeface="Calibri"/>
-              </a:rPr>
-              <a:t>Eixo 2 — Remuneração</a:t>
-            </a:r>
-          </a:p>
-        </p:txBody>
-      </p:sp>
-      <p:sp>
-        <p:nvSpPr>
-          <p:cNvPr id="14" name="TextBox 13"/>
-          <p:cNvSpPr txBox="1"/>
-          <p:nvPr/>
-        </p:nvSpPr>
-        <p:spPr>
-          <a:xfrm>
-            <a:off x="4434839" y="1691640"/>
-            <a:ext cx="3383280" cy="731520"/>
+                  <a:srgbClr val="FF8F00"/>
+                </a:solidFill>
+                <a:latin typeface="Calibri"/>
+              </a:rPr>
+              <a:t>#4</a:t>
+            </a:r>
+          </a:p>
+        </p:txBody>
+      </p:sp>
+      <p:sp>
+        <p:nvSpPr>
+          <p:cNvPr id="21" name="TextBox 20"/>
+          <p:cNvSpPr txBox="1"/>
+          <p:nvPr/>
+        </p:nvSpPr>
+        <p:spPr>
+          <a:xfrm>
+            <a:off x="7818120" y="3813048"/>
+            <a:ext cx="2926080" cy="548640"/>
           </a:xfrm>
           <a:prstGeom prst="rect">
             <a:avLst/>
@@ -16960,94 +18505,56 @@
                 </a:solidFill>
                 <a:latin typeface="Calibri"/>
               </a:rPr>
-              <a:t>▸  Transparência salarial por raça/gênero
-obrigatória (empresas &gt; 100 funcionários)</a:t>
-            </a:r>
-          </a:p>
-        </p:txBody>
-      </p:sp>
-      <p:sp>
-        <p:nvSpPr>
-          <p:cNvPr id="15" name="TextBox 14"/>
-          <p:cNvSpPr txBox="1"/>
-          <p:nvPr/>
-        </p:nvSpPr>
-        <p:spPr>
-          <a:xfrm>
-            <a:off x="4434839" y="2468880"/>
-            <a:ext cx="3383280" cy="731520"/>
-          </a:xfrm>
-          <a:prstGeom prst="rect">
-            <a:avLst/>
-          </a:prstGeom>
-          <a:noFill/>
-        </p:spPr>
-        <p:txBody>
-          <a:bodyPr wrap="square">
-            <a:spAutoFit/>
-          </a:bodyPr>
-          <a:lstStyle/>
-          <a:p>
-            <a:pPr algn="l"/>
-            <a:r>
-              <a:rPr sz="1200" b="0" i="0">
-                <a:solidFill>
-                  <a:srgbClr val="212121"/>
-                </a:solidFill>
-                <a:latin typeface="Calibri"/>
-              </a:rPr>
-              <a:t>▸  Auditoria de igual pagamento por trabalho igual
-com penalidades progressivas (gap HLM M4)</a:t>
-            </a:r>
-          </a:p>
-        </p:txBody>
-      </p:sp>
-      <p:sp>
-        <p:nvSpPr>
-          <p:cNvPr id="16" name="TextBox 15"/>
-          <p:cNvSpPr txBox="1"/>
-          <p:nvPr/>
-        </p:nvSpPr>
-        <p:spPr>
-          <a:xfrm>
-            <a:off x="4434839" y="3246120"/>
-            <a:ext cx="3383280" cy="731520"/>
-          </a:xfrm>
-          <a:prstGeom prst="rect">
-            <a:avLst/>
-          </a:prstGeom>
-          <a:noFill/>
-        </p:spPr>
-        <p:txBody>
-          <a:bodyPr wrap="square">
-            <a:spAutoFit/>
-          </a:bodyPr>
-          <a:lstStyle/>
-          <a:p>
-            <a:pPr algn="l"/>
-            <a:r>
-              <a:rPr sz="1200" b="0" i="0">
-                <a:solidFill>
-                  <a:srgbClr val="212121"/>
-                </a:solidFill>
-                <a:latin typeface="Calibri"/>
-              </a:rPr>
-              <a:t>▸  Piso salarial indexado nas categorias com
-maior gap racial residual (6,2% HLM M4)</a:t>
-            </a:r>
-          </a:p>
-        </p:txBody>
-      </p:sp>
-      <p:sp>
-        <p:nvSpPr>
-          <p:cNvPr id="17" name="Rectangle 16"/>
+              <a:t>Transparência salarial obrigatória</a:t>
+            </a:r>
+          </a:p>
+        </p:txBody>
+      </p:sp>
+      <p:sp>
+        <p:nvSpPr>
+          <p:cNvPr id="22" name="TextBox 21"/>
+          <p:cNvSpPr txBox="1"/>
+          <p:nvPr/>
+        </p:nvSpPr>
+        <p:spPr>
+          <a:xfrm>
+            <a:off x="10789920" y="3813048"/>
+            <a:ext cx="1143000" cy="548640"/>
+          </a:xfrm>
+          <a:prstGeom prst="rect">
+            <a:avLst/>
+          </a:prstGeom>
+          <a:noFill/>
+        </p:spPr>
+        <p:txBody>
+          <a:bodyPr wrap="square">
+            <a:spAutoFit/>
+          </a:bodyPr>
+          <a:lstStyle/>
+          <a:p>
+            <a:pPr algn="r"/>
+            <a:r>
+              <a:rPr sz="1200" b="1" i="0">
+                <a:solidFill>
+                  <a:srgbClr val="FF8F00"/>
+                </a:solidFill>
+                <a:latin typeface="Calibri"/>
+              </a:rPr>
+              <a:t>CC = 0,342</a:t>
+            </a:r>
+          </a:p>
+        </p:txBody>
+      </p:sp>
+      <p:sp>
+        <p:nvSpPr>
+          <p:cNvPr id="23" name="Rectangle 22"/>
           <p:cNvSpPr/>
           <p:nvPr/>
         </p:nvSpPr>
         <p:spPr>
           <a:xfrm>
-            <a:off x="8229598" y="1097280"/>
-            <a:ext cx="3749039" cy="5029200"/>
+            <a:off x="7315200" y="4498848"/>
+            <a:ext cx="4663440" cy="676656"/>
           </a:xfrm>
           <a:prstGeom prst="rect">
             <a:avLst/>
@@ -17055,9 +18562,9 @@
           <a:solidFill>
             <a:srgbClr val="F5F5F5"/>
           </a:solidFill>
-          <a:ln w="19050">
+          <a:ln w="10160">
             <a:solidFill>
-              <a:srgbClr val="2E7D32"/>
+              <a:srgbClr val="616161"/>
             </a:solidFill>
           </a:ln>
         </p:spPr>
@@ -17085,22 +18592,131 @@
       </p:sp>
       <p:sp>
         <p:nvSpPr>
-          <p:cNvPr id="18" name="Rectangle 17"/>
+          <p:cNvPr id="24" name="TextBox 23"/>
+          <p:cNvSpPr txBox="1"/>
+          <p:nvPr/>
+        </p:nvSpPr>
+        <p:spPr>
+          <a:xfrm>
+            <a:off x="7406640" y="4544568"/>
+            <a:ext cx="365760" cy="548640"/>
+          </a:xfrm>
+          <a:prstGeom prst="rect">
+            <a:avLst/>
+          </a:prstGeom>
+          <a:noFill/>
+        </p:spPr>
+        <p:txBody>
+          <a:bodyPr wrap="square">
+            <a:spAutoFit/>
+          </a:bodyPr>
+          <a:lstStyle/>
+          <a:p>
+            <a:pPr algn="l"/>
+            <a:r>
+              <a:rPr sz="1300" b="1" i="0">
+                <a:solidFill>
+                  <a:srgbClr val="616161"/>
+                </a:solidFill>
+                <a:latin typeface="Calibri"/>
+              </a:rPr>
+              <a:t>#5</a:t>
+            </a:r>
+          </a:p>
+        </p:txBody>
+      </p:sp>
+      <p:sp>
+        <p:nvSpPr>
+          <p:cNvPr id="25" name="TextBox 24"/>
+          <p:cNvSpPr txBox="1"/>
+          <p:nvPr/>
+        </p:nvSpPr>
+        <p:spPr>
+          <a:xfrm>
+            <a:off x="7818120" y="4544568"/>
+            <a:ext cx="2926080" cy="548640"/>
+          </a:xfrm>
+          <a:prstGeom prst="rect">
+            <a:avLst/>
+          </a:prstGeom>
+          <a:noFill/>
+        </p:spPr>
+        <p:txBody>
+          <a:bodyPr wrap="square">
+            <a:spAutoFit/>
+          </a:bodyPr>
+          <a:lstStyle/>
+          <a:p>
+            <a:pPr algn="l"/>
+            <a:r>
+              <a:rPr sz="1200" b="0" i="0">
+                <a:solidFill>
+                  <a:srgbClr val="212121"/>
+                </a:solidFill>
+                <a:latin typeface="Calibri"/>
+              </a:rPr>
+              <a:t>Enforcement anti-discriminação</a:t>
+            </a:r>
+          </a:p>
+        </p:txBody>
+      </p:sp>
+      <p:sp>
+        <p:nvSpPr>
+          <p:cNvPr id="26" name="TextBox 25"/>
+          <p:cNvSpPr txBox="1"/>
+          <p:nvPr/>
+        </p:nvSpPr>
+        <p:spPr>
+          <a:xfrm>
+            <a:off x="10789920" y="4544568"/>
+            <a:ext cx="1143000" cy="548640"/>
+          </a:xfrm>
+          <a:prstGeom prst="rect">
+            <a:avLst/>
+          </a:prstGeom>
+          <a:noFill/>
+        </p:spPr>
+        <p:txBody>
+          <a:bodyPr wrap="square">
+            <a:spAutoFit/>
+          </a:bodyPr>
+          <a:lstStyle/>
+          <a:p>
+            <a:pPr algn="r"/>
+            <a:r>
+              <a:rPr sz="1200" b="1" i="0">
+                <a:solidFill>
+                  <a:srgbClr val="616161"/>
+                </a:solidFill>
+                <a:latin typeface="Calibri"/>
+              </a:rPr>
+              <a:t>CC = 0,270</a:t>
+            </a:r>
+          </a:p>
+        </p:txBody>
+      </p:sp>
+      <p:sp>
+        <p:nvSpPr>
+          <p:cNvPr id="27" name="Rectangle 26"/>
           <p:cNvSpPr/>
           <p:nvPr/>
         </p:nvSpPr>
         <p:spPr>
           <a:xfrm>
-            <a:off x="8229598" y="1097280"/>
-            <a:ext cx="3749039" cy="502920"/>
+            <a:off x="7315200" y="5230368"/>
+            <a:ext cx="4663440" cy="676656"/>
           </a:xfrm>
           <a:prstGeom prst="rect">
             <a:avLst/>
           </a:prstGeom>
           <a:solidFill>
-            <a:srgbClr val="2E7D32"/>
+            <a:srgbClr val="F5F5F5"/>
           </a:solidFill>
-          <a:ln/>
+          <a:ln w="10160">
+            <a:solidFill>
+              <a:srgbClr val="616161"/>
+            </a:solidFill>
+          </a:ln>
         </p:spPr>
         <p:style>
           <a:lnRef idx="1">
@@ -17126,14 +18742,14 @@
       </p:sp>
       <p:sp>
         <p:nvSpPr>
-          <p:cNvPr id="19" name="TextBox 18"/>
-          <p:cNvSpPr txBox="1"/>
-          <p:nvPr/>
-        </p:nvSpPr>
-        <p:spPr>
-          <a:xfrm>
-            <a:off x="8321038" y="1143000"/>
-            <a:ext cx="3566160" cy="457200"/>
+          <p:cNvPr id="28" name="TextBox 27"/>
+          <p:cNvSpPr txBox="1"/>
+          <p:nvPr/>
+        </p:nvSpPr>
+        <p:spPr>
+          <a:xfrm>
+            <a:off x="7406640" y="5276088"/>
+            <a:ext cx="365760" cy="548640"/>
           </a:xfrm>
           <a:prstGeom prst="rect">
             <a:avLst/>
@@ -17150,25 +18766,25 @@
             <a:r>
               <a:rPr sz="1300" b="1" i="0">
                 <a:solidFill>
-                  <a:srgbClr val="FFFFFF"/>
-                </a:solidFill>
-                <a:latin typeface="Calibri"/>
-              </a:rPr>
-              <a:t>Eixo 3 — Inclusão Produtiva</a:t>
-            </a:r>
-          </a:p>
-        </p:txBody>
-      </p:sp>
-      <p:sp>
-        <p:nvSpPr>
-          <p:cNvPr id="20" name="TextBox 19"/>
-          <p:cNvSpPr txBox="1"/>
-          <p:nvPr/>
-        </p:nvSpPr>
-        <p:spPr>
-          <a:xfrm>
-            <a:off x="8412478" y="1691640"/>
-            <a:ext cx="3383280" cy="731520"/>
+                  <a:srgbClr val="616161"/>
+                </a:solidFill>
+                <a:latin typeface="Calibri"/>
+              </a:rPr>
+              <a:t>#6</a:t>
+            </a:r>
+          </a:p>
+        </p:txBody>
+      </p:sp>
+      <p:sp>
+        <p:nvSpPr>
+          <p:cNvPr id="29" name="TextBox 28"/>
+          <p:cNvSpPr txBox="1"/>
+          <p:nvPr/>
+        </p:nvSpPr>
+        <p:spPr>
+          <a:xfrm>
+            <a:off x="7818120" y="5276088"/>
+            <a:ext cx="2926080" cy="548640"/>
           </a:xfrm>
           <a:prstGeom prst="rect">
             <a:avLst/>
@@ -17189,129 +18805,56 @@
                 </a:solidFill>
                 <a:latin typeface="Calibri"/>
               </a:rPr>
-              <a:t>▸  Mentoria estruturada para elevar betweenness
-de negros nas redes profissionais (SNA: =0)</a:t>
-            </a:r>
-          </a:p>
-        </p:txBody>
-      </p:sp>
-      <p:sp>
-        <p:nvSpPr>
-          <p:cNvPr id="21" name="TextBox 20"/>
-          <p:cNvSpPr txBox="1"/>
-          <p:nvPr/>
-        </p:nvSpPr>
-        <p:spPr>
-          <a:xfrm>
-            <a:off x="8412478" y="2468880"/>
-            <a:ext cx="3383280" cy="731520"/>
-          </a:xfrm>
-          <a:prstGeom prst="rect">
-            <a:avLst/>
-          </a:prstGeom>
-          <a:noFill/>
-        </p:spPr>
-        <p:txBody>
-          <a:bodyPr wrap="square">
-            <a:spAutoFit/>
-          </a:bodyPr>
-          <a:lstStyle/>
-          <a:p>
-            <a:pPr algn="l"/>
-            <a:r>
-              <a:rPr sz="1200" b="0" i="0">
-                <a:solidFill>
-                  <a:srgbClr val="212121"/>
-                </a:solidFill>
-                <a:latin typeface="Calibri"/>
-              </a:rPr>
-              <a:t>▸  30% dos cargos DAS e liderança corporativa
-para negros até 2030 (inclusão nas redes)</a:t>
-            </a:r>
-          </a:p>
-        </p:txBody>
-      </p:sp>
-      <p:sp>
-        <p:nvSpPr>
-          <p:cNvPr id="22" name="TextBox 21"/>
-          <p:cNvSpPr txBox="1"/>
-          <p:nvPr/>
-        </p:nvSpPr>
-        <p:spPr>
-          <a:xfrm>
-            <a:off x="8412478" y="3246120"/>
-            <a:ext cx="3383280" cy="731520"/>
-          </a:xfrm>
-          <a:prstGeom prst="rect">
-            <a:avLst/>
-          </a:prstGeom>
-          <a:noFill/>
-        </p:spPr>
-        <p:txBody>
-          <a:bodyPr wrap="square">
-            <a:spAutoFit/>
-          </a:bodyPr>
-          <a:lstStyle/>
-          <a:p>
-            <a:pPr algn="l"/>
-            <a:r>
-              <a:rPr sz="1200" b="0" i="0">
-                <a:solidFill>
-                  <a:srgbClr val="212121"/>
-                </a:solidFill>
-                <a:latin typeface="Calibri"/>
-              </a:rPr>
-              <a:t>▸  Equalizar CBO = +127,3% renda negra |
-proxy PIB +74,3 p.p. (Hsieh et al., 2019)</a:t>
-            </a:r>
-          </a:p>
-        </p:txBody>
-      </p:sp>
-      <p:sp>
-        <p:nvSpPr>
-          <p:cNvPr id="23" name="TextBox 22"/>
-          <p:cNvSpPr txBox="1"/>
-          <p:nvPr/>
-        </p:nvSpPr>
-        <p:spPr>
-          <a:xfrm>
-            <a:off x="274320" y="6217920"/>
-            <a:ext cx="11612880" cy="411480"/>
-          </a:xfrm>
-          <a:prstGeom prst="rect">
-            <a:avLst/>
-          </a:prstGeom>
-          <a:noFill/>
-        </p:spPr>
-        <p:txBody>
-          <a:bodyPr wrap="square">
-            <a:spAutoFit/>
-          </a:bodyPr>
-          <a:lstStyle/>
-          <a:p>
-            <a:pPr algn="ctr"/>
-            <a:r>
-              <a:rPr sz="1300" b="1" i="0">
-                <a:solidFill>
-                  <a:srgbClr val="B71C1C"/>
-                </a:solidFill>
-                <a:latin typeface="Calibri"/>
-              </a:rPr>
-              <a:t>⚠  Ao ritmo atual de convergência (~0,02 log-pontos/ano), eliminar o gap levaria mais de 100 anos.</a:t>
-            </a:r>
-          </a:p>
-        </p:txBody>
-      </p:sp>
-      <p:sp>
-        <p:nvSpPr>
-          <p:cNvPr id="24" name="Rectangle 23"/>
+              <a:t>Desegregação residencial</a:t>
+            </a:r>
+          </a:p>
+        </p:txBody>
+      </p:sp>
+      <p:sp>
+        <p:nvSpPr>
+          <p:cNvPr id="30" name="TextBox 29"/>
+          <p:cNvSpPr txBox="1"/>
+          <p:nvPr/>
+        </p:nvSpPr>
+        <p:spPr>
+          <a:xfrm>
+            <a:off x="10789920" y="5276088"/>
+            <a:ext cx="1143000" cy="548640"/>
+          </a:xfrm>
+          <a:prstGeom prst="rect">
+            <a:avLst/>
+          </a:prstGeom>
+          <a:noFill/>
+        </p:spPr>
+        <p:txBody>
+          <a:bodyPr wrap="square">
+            <a:spAutoFit/>
+          </a:bodyPr>
+          <a:lstStyle/>
+          <a:p>
+            <a:pPr algn="r"/>
+            <a:r>
+              <a:rPr sz="1200" b="1" i="0">
+                <a:solidFill>
+                  <a:srgbClr val="616161"/>
+                </a:solidFill>
+                <a:latin typeface="Calibri"/>
+              </a:rPr>
+              <a:t>CC = 0,081</a:t>
+            </a:r>
+          </a:p>
+        </p:txBody>
+      </p:sp>
+      <p:sp>
+        <p:nvSpPr>
+          <p:cNvPr id="31" name="Rectangle 30"/>
           <p:cNvSpPr/>
           <p:nvPr/>
         </p:nvSpPr>
         <p:spPr>
           <a:xfrm>
-            <a:off x="0" y="6601968"/>
-            <a:ext cx="12188952" cy="256032"/>
+            <a:off x="274320" y="6035040"/>
+            <a:ext cx="11612880" cy="594360"/>
           </a:xfrm>
           <a:prstGeom prst="rect">
             <a:avLst/>
@@ -17345,7 +18888,83 @@
       </p:sp>
       <p:sp>
         <p:nvSpPr>
-          <p:cNvPr id="25" name="TextBox 24"/>
+          <p:cNvPr id="32" name="TextBox 31"/>
+          <p:cNvSpPr txBox="1"/>
+          <p:nvPr/>
+        </p:nvSpPr>
+        <p:spPr>
+          <a:xfrm>
+            <a:off x="457200" y="6080760"/>
+            <a:ext cx="11247120" cy="502920"/>
+          </a:xfrm>
+          <a:prstGeom prst="rect">
+            <a:avLst/>
+          </a:prstGeom>
+          <a:noFill/>
+        </p:spPr>
+        <p:txBody>
+          <a:bodyPr wrap="square">
+            <a:spAutoFit/>
+          </a:bodyPr>
+          <a:lstStyle/>
+          <a:p>
+            <a:pPr algn="ctr"/>
+            <a:r>
+              <a:rPr sz="1200" b="1" i="0">
+                <a:solidFill>
+                  <a:srgbClr val="FFFFFF"/>
+                </a:solidFill>
+                <a:latin typeface="Calibri"/>
+              </a:rPr>
+              <a:t>84% do gap é de ACESSO → P1 (Cotas CBO) lidera com CC=0,835 — 2,1× superior ao 2º colocado.  Pareto (λ=0,5): alocação ótima = P1+P5 (cotas + mentoria).  PL-1 (orçamento B=5): redução projetada de 25,1% do gap bruto.</a:t>
+            </a:r>
+          </a:p>
+        </p:txBody>
+      </p:sp>
+      <p:sp>
+        <p:nvSpPr>
+          <p:cNvPr id="33" name="Rectangle 32"/>
+          <p:cNvSpPr/>
+          <p:nvPr/>
+        </p:nvSpPr>
+        <p:spPr>
+          <a:xfrm>
+            <a:off x="0" y="6601968"/>
+            <a:ext cx="12188952" cy="256032"/>
+          </a:xfrm>
+          <a:prstGeom prst="rect">
+            <a:avLst/>
+          </a:prstGeom>
+          <a:solidFill>
+            <a:srgbClr val="1F3864"/>
+          </a:solidFill>
+          <a:ln/>
+        </p:spPr>
+        <p:style>
+          <a:lnRef idx="1">
+            <a:schemeClr val="accent1"/>
+          </a:lnRef>
+          <a:fillRef idx="3">
+            <a:schemeClr val="accent1"/>
+          </a:fillRef>
+          <a:effectRef idx="2">
+            <a:schemeClr val="accent1"/>
+          </a:effectRef>
+          <a:fontRef idx="minor">
+            <a:schemeClr val="lt1"/>
+          </a:fontRef>
+        </p:style>
+        <p:txBody>
+          <a:bodyPr rtlCol="0" anchor="ctr"/>
+          <a:lstStyle/>
+          <a:p>
+            <a:pPr algn="ctr"/>
+          </a:p>
+        </p:txBody>
+      </p:sp>
+      <p:sp>
+        <p:nvSpPr>
+          <p:cNvPr id="34" name="TextBox 33"/>
           <p:cNvSpPr txBox="1"/>
           <p:nvPr/>
         </p:nvSpPr>
@@ -17380,7 +18999,7 @@
       </p:sp>
       <p:sp>
         <p:nvSpPr>
-          <p:cNvPr id="26" name="TextBox 25"/>
+          <p:cNvPr id="35" name="TextBox 34"/>
           <p:cNvSpPr txBox="1"/>
           <p:nvPr/>
         </p:nvSpPr>
@@ -17502,7 +19121,7 @@
                 </a:solidFill>
                 <a:latin typeface="Calibri"/>
               </a:rPr>
-              <a:t>23. Limitações e Agenda Futura</a:t>
+              <a:t>23. Implicações de Política</a:t>
             </a:r>
           </a:p>
         </p:txBody>
@@ -17537,370 +19156,33 @@
                 </a:solidFill>
                 <a:latin typeface="Calibri"/>
               </a:rPr>
-              <a:t>Honestidade acadêmica: o que este trabalho não faz e por quê</a:t>
-            </a:r>
-          </a:p>
-        </p:txBody>
-      </p:sp>
-      <p:sp>
-        <p:nvSpPr>
-          <p:cNvPr id="5" name="TextBox 4"/>
-          <p:cNvSpPr txBox="1"/>
-          <p:nvPr/>
-        </p:nvSpPr>
-        <p:spPr>
-          <a:xfrm>
-            <a:off x="365760" y="1143000"/>
-            <a:ext cx="5486400" cy="365760"/>
-          </a:xfrm>
-          <a:prstGeom prst="rect">
-            <a:avLst/>
-          </a:prstGeom>
-          <a:noFill/>
-        </p:spPr>
-        <p:txBody>
-          <a:bodyPr wrap="square">
-            <a:spAutoFit/>
-          </a:bodyPr>
-          <a:lstStyle/>
-          <a:p>
-            <a:pPr algn="l"/>
-            <a:r>
-              <a:rPr sz="1600" b="1" i="0">
-                <a:solidFill>
-                  <a:srgbClr val="B71C1C"/>
-                </a:solidFill>
-                <a:latin typeface="Calibri"/>
-              </a:rPr>
-              <a:t>Limitações</a:t>
-            </a:r>
-          </a:p>
-        </p:txBody>
-      </p:sp>
-      <p:sp>
-        <p:nvSpPr>
-          <p:cNvPr id="6" name="TextBox 5"/>
-          <p:cNvSpPr txBox="1"/>
-          <p:nvPr/>
-        </p:nvSpPr>
-        <p:spPr>
-          <a:xfrm>
-            <a:off x="365760" y="1600200"/>
-            <a:ext cx="5669280" cy="3474720"/>
-          </a:xfrm>
-          <a:prstGeom prst="rect">
-            <a:avLst/>
-          </a:prstGeom>
-          <a:noFill/>
-        </p:spPr>
-        <p:txBody>
-          <a:bodyPr wrap="square">
-            <a:spAutoFit/>
-          </a:bodyPr>
-          <a:lstStyle/>
-          <a:p>
-            <a:pPr>
-              <a:spcAft>
-                <a:spcPts val="400"/>
-              </a:spcAft>
-            </a:pPr>
-            <a:r>
-              <a:rPr sz="1300" b="1">
-                <a:solidFill>
-                  <a:srgbClr val="B71C1C"/>
-                </a:solidFill>
-                <a:latin typeface="Calibri"/>
-              </a:rPr>
-              <a:t>▸  </a:t>
-            </a:r>
-            <a:r>
-              <a:rPr sz="1300">
-                <a:solidFill>
-                  <a:srgbClr val="212121"/>
-                </a:solidFill>
-                <a:latin typeface="Calibri"/>
-              </a:rPr>
-              <a:t>PNAD não permite experimentos causais — coeficientes são associações condicionais, não efeitos causais no sentido de Rubin/Pearl</a:t>
-            </a:r>
-          </a:p>
-          <a:p>
-            <a:pPr>
-              <a:spcAft>
-                <a:spcPts val="400"/>
-              </a:spcAft>
-            </a:pPr>
-            <a:r>
-              <a:rPr sz="1300" b="1">
-                <a:solidFill>
-                  <a:srgbClr val="B71C1C"/>
-                </a:solidFill>
-                <a:latin typeface="Calibri"/>
-              </a:rPr>
-              <a:t>▸  </a:t>
-            </a:r>
-            <a:r>
-              <a:rPr sz="1300">
-                <a:solidFill>
-                  <a:srgbClr val="212121"/>
-                </a:solidFill>
-                <a:latin typeface="Calibri"/>
-              </a:rPr>
-              <a:t>UPA como proxy de bairro: unidade de amostragem ≠ bairro administrativo</a:t>
-            </a:r>
-          </a:p>
-          <a:p>
-            <a:pPr>
-              <a:spcAft>
-                <a:spcPts val="400"/>
-              </a:spcAft>
-            </a:pPr>
-            <a:r>
-              <a:rPr sz="1300" b="1">
-                <a:solidFill>
-                  <a:srgbClr val="B71C1C"/>
-                </a:solidFill>
-                <a:latin typeface="Calibri"/>
-              </a:rPr>
-              <a:t>▸  </a:t>
-            </a:r>
-            <a:r>
-              <a:rPr sz="1300">
-                <a:solidFill>
-                  <a:srgbClr val="212121"/>
-                </a:solidFill>
-                <a:latin typeface="Calibri"/>
-              </a:rPr>
-              <a:t>GLMM estimado na PEA completa via lme4::glmer (nAGQ=0, bobyqa, n=7,7M, 40,9k UPAs) — M3 com inclinação aleatória de negro não estimado por custo computacional</a:t>
-            </a:r>
-          </a:p>
-          <a:p>
-            <a:pPr>
-              <a:spcAft>
-                <a:spcPts val="400"/>
-              </a:spcAft>
-            </a:pPr>
-            <a:r>
-              <a:rPr sz="1300" b="1">
-                <a:solidFill>
-                  <a:srgbClr val="B71C1C"/>
-                </a:solidFill>
-                <a:latin typeface="Calibri"/>
-              </a:rPr>
-              <a:t>▸  </a:t>
-            </a:r>
-            <a:r>
-              <a:rPr sz="1300">
-                <a:solidFill>
-                  <a:srgbClr val="212121"/>
-                </a:solidFill>
-                <a:latin typeface="Calibri"/>
-              </a:rPr>
-              <a:t>CBO auto-declarado pode ter viés de classificação por raça (deflation de ocupação)</a:t>
-            </a:r>
-          </a:p>
-        </p:txBody>
-      </p:sp>
-      <p:sp>
-        <p:nvSpPr>
-          <p:cNvPr id="7" name="TextBox 6"/>
-          <p:cNvSpPr txBox="1"/>
-          <p:nvPr/>
-        </p:nvSpPr>
-        <p:spPr>
-          <a:xfrm>
-            <a:off x="6400800" y="1143000"/>
-            <a:ext cx="5486400" cy="365760"/>
-          </a:xfrm>
-          <a:prstGeom prst="rect">
-            <a:avLst/>
-          </a:prstGeom>
-          <a:noFill/>
-        </p:spPr>
-        <p:txBody>
-          <a:bodyPr wrap="square">
-            <a:spAutoFit/>
-          </a:bodyPr>
-          <a:lstStyle/>
-          <a:p>
-            <a:pPr algn="l"/>
-            <a:r>
-              <a:rPr sz="1600" b="1" i="0">
-                <a:solidFill>
-                  <a:srgbClr val="1565C0"/>
-                </a:solidFill>
-                <a:latin typeface="Calibri"/>
-              </a:rPr>
-              <a:t>Agenda Futura</a:t>
-            </a:r>
-          </a:p>
-        </p:txBody>
-      </p:sp>
-      <p:sp>
-        <p:nvSpPr>
-          <p:cNvPr id="8" name="TextBox 7"/>
-          <p:cNvSpPr txBox="1"/>
-          <p:nvPr/>
-        </p:nvSpPr>
-        <p:spPr>
-          <a:xfrm>
-            <a:off x="6400800" y="1600200"/>
-            <a:ext cx="5669280" cy="3474720"/>
-          </a:xfrm>
-          <a:prstGeom prst="rect">
-            <a:avLst/>
-          </a:prstGeom>
-          <a:noFill/>
-        </p:spPr>
-        <p:txBody>
-          <a:bodyPr wrap="square">
-            <a:spAutoFit/>
-          </a:bodyPr>
-          <a:lstStyle/>
-          <a:p>
-            <a:pPr>
-              <a:spcAft>
-                <a:spcPts val="400"/>
-              </a:spcAft>
-            </a:pPr>
-            <a:r>
-              <a:rPr sz="1300" b="1">
-                <a:solidFill>
-                  <a:srgbClr val="1565C0"/>
-                </a:solidFill>
-                <a:latin typeface="Calibri"/>
-              </a:rPr>
-              <a:t>▸  </a:t>
-            </a:r>
-            <a:r>
-              <a:rPr sz="1300">
-                <a:solidFill>
-                  <a:srgbClr val="212121"/>
-                </a:solidFill>
-                <a:latin typeface="Calibri"/>
-              </a:rPr>
-              <a:t>Análise de variáveis instrumentais (IV) para identificação causal — distância à escola técnica como instrumento</a:t>
-            </a:r>
-          </a:p>
-          <a:p>
-            <a:pPr>
-              <a:spcAft>
-                <a:spcPts val="400"/>
-              </a:spcAft>
-            </a:pPr>
-            <a:r>
-              <a:rPr sz="1300" b="1">
-                <a:solidFill>
-                  <a:srgbClr val="1565C0"/>
-                </a:solidFill>
-                <a:latin typeface="Calibri"/>
-              </a:rPr>
-              <a:t>▸  </a:t>
-            </a:r>
-            <a:r>
-              <a:rPr sz="1300">
-                <a:solidFill>
-                  <a:srgbClr val="212121"/>
-                </a:solidFill>
-                <a:latin typeface="Calibri"/>
-              </a:rPr>
-              <a:t>RAIS linkada à PNAD para rastrear trajetórias de mobilidade intraempresa</a:t>
-            </a:r>
-          </a:p>
-          <a:p>
-            <a:pPr>
-              <a:spcAft>
-                <a:spcPts val="400"/>
-              </a:spcAft>
-            </a:pPr>
-            <a:r>
-              <a:rPr sz="1300" b="1">
-                <a:solidFill>
-                  <a:srgbClr val="1565C0"/>
-                </a:solidFill>
-                <a:latin typeface="Calibri"/>
-              </a:rPr>
-              <a:t>▸  </a:t>
-            </a:r>
-            <a:r>
-              <a:rPr sz="1300">
-                <a:solidFill>
-                  <a:srgbClr val="212121"/>
-                </a:solidFill>
-                <a:latin typeface="Calibri"/>
-              </a:rPr>
-              <a:t>Análise de mediação formal (path analysis) raça → ocupação → renda</a:t>
-            </a:r>
-          </a:p>
-          <a:p>
-            <a:pPr>
-              <a:spcAft>
-                <a:spcPts val="400"/>
-              </a:spcAft>
-            </a:pPr>
-            <a:r>
-              <a:rPr sz="1300" b="1">
-                <a:solidFill>
-                  <a:srgbClr val="1565C0"/>
-                </a:solidFill>
-                <a:latin typeface="Calibri"/>
-              </a:rPr>
-              <a:t>▸  </a:t>
-            </a:r>
-            <a:r>
-              <a:rPr sz="1300">
-                <a:solidFill>
-                  <a:srgbClr val="212121"/>
-                </a:solidFill>
-                <a:latin typeface="Calibri"/>
-              </a:rPr>
-              <a:t>Extensão ao setor público por UF — heterogeneidade do glass ceiling entre estados</a:t>
-            </a:r>
-          </a:p>
-          <a:p>
-            <a:pPr>
-              <a:spcAft>
-                <a:spcPts val="400"/>
-              </a:spcAft>
-            </a:pPr>
-            <a:r>
-              <a:rPr sz="1300" b="1">
-                <a:solidFill>
-                  <a:srgbClr val="1565C0"/>
-                </a:solidFill>
-                <a:latin typeface="Calibri"/>
-              </a:rPr>
-              <a:t>▸  </a:t>
-            </a:r>
-            <a:r>
-              <a:rPr sz="1300">
-                <a:solidFill>
-                  <a:srgbClr val="212121"/>
-                </a:solidFill>
-                <a:latin typeface="Calibri"/>
-              </a:rPr>
-              <a:t>Modelo longitudinal com painéis rotativos da PNAD (2T seguidos) para efeitos fixos de indivíduo</a:t>
-            </a:r>
-          </a:p>
-        </p:txBody>
-      </p:sp>
-      <p:sp>
-        <p:nvSpPr>
-          <p:cNvPr id="9" name="Rectangle 8"/>
+              <a:t>Três eixos simultâneos — ações isoladas são insuficientes para romper a armadilha estrutural</a:t>
+            </a:r>
+          </a:p>
+        </p:txBody>
+      </p:sp>
+      <p:sp>
+        <p:nvSpPr>
+          <p:cNvPr id="5" name="Rectangle 4"/>
           <p:cNvSpPr/>
           <p:nvPr/>
         </p:nvSpPr>
         <p:spPr>
           <a:xfrm>
-            <a:off x="0" y="6601968"/>
-            <a:ext cx="12188952" cy="256032"/>
+            <a:off x="274320" y="1097280"/>
+            <a:ext cx="3749039" cy="5029200"/>
           </a:xfrm>
           <a:prstGeom prst="rect">
             <a:avLst/>
           </a:prstGeom>
           <a:solidFill>
-            <a:srgbClr val="1F3864"/>
+            <a:srgbClr val="F5F5F5"/>
           </a:solidFill>
-          <a:ln/>
+          <a:ln w="19050">
+            <a:solidFill>
+              <a:srgbClr val="B71C1C"/>
+            </a:solidFill>
+          </a:ln>
         </p:spPr>
         <p:style>
           <a:lnRef idx="1">
@@ -17926,7 +19208,725 @@
       </p:sp>
       <p:sp>
         <p:nvSpPr>
+          <p:cNvPr id="6" name="Rectangle 5"/>
+          <p:cNvSpPr/>
+          <p:nvPr/>
+        </p:nvSpPr>
+        <p:spPr>
+          <a:xfrm>
+            <a:off x="274320" y="1097280"/>
+            <a:ext cx="3749039" cy="502920"/>
+          </a:xfrm>
+          <a:prstGeom prst="rect">
+            <a:avLst/>
+          </a:prstGeom>
+          <a:solidFill>
+            <a:srgbClr val="B71C1C"/>
+          </a:solidFill>
+          <a:ln/>
+        </p:spPr>
+        <p:style>
+          <a:lnRef idx="1">
+            <a:schemeClr val="accent1"/>
+          </a:lnRef>
+          <a:fillRef idx="3">
+            <a:schemeClr val="accent1"/>
+          </a:fillRef>
+          <a:effectRef idx="2">
+            <a:schemeClr val="accent1"/>
+          </a:effectRef>
+          <a:fontRef idx="minor">
+            <a:schemeClr val="lt1"/>
+          </a:fontRef>
+        </p:style>
+        <p:txBody>
+          <a:bodyPr rtlCol="0" anchor="ctr"/>
+          <a:lstStyle/>
+          <a:p>
+            <a:pPr algn="ctr"/>
+          </a:p>
+        </p:txBody>
+      </p:sp>
+      <p:sp>
+        <p:nvSpPr>
+          <p:cNvPr id="7" name="TextBox 6"/>
+          <p:cNvSpPr txBox="1"/>
+          <p:nvPr/>
+        </p:nvSpPr>
+        <p:spPr>
+          <a:xfrm>
+            <a:off x="365760" y="1143000"/>
+            <a:ext cx="3566160" cy="457200"/>
+          </a:xfrm>
+          <a:prstGeom prst="rect">
+            <a:avLst/>
+          </a:prstGeom>
+          <a:noFill/>
+        </p:spPr>
+        <p:txBody>
+          <a:bodyPr wrap="square">
+            <a:spAutoFit/>
+          </a:bodyPr>
+          <a:lstStyle/>
+          <a:p>
+            <a:pPr algn="l"/>
+            <a:r>
+              <a:rPr sz="1300" b="1" i="0">
+                <a:solidFill>
+                  <a:srgbClr val="FFFFFF"/>
+                </a:solidFill>
+                <a:latin typeface="Calibri"/>
+              </a:rPr>
+              <a:t>Eixo 1 — Acesso</a:t>
+            </a:r>
+          </a:p>
+        </p:txBody>
+      </p:sp>
+      <p:sp>
+        <p:nvSpPr>
+          <p:cNvPr id="8" name="TextBox 7"/>
+          <p:cNvSpPr txBox="1"/>
+          <p:nvPr/>
+        </p:nvSpPr>
+        <p:spPr>
+          <a:xfrm>
+            <a:off x="457200" y="1691640"/>
+            <a:ext cx="3383280" cy="731520"/>
+          </a:xfrm>
+          <a:prstGeom prst="rect">
+            <a:avLst/>
+          </a:prstGeom>
+          <a:noFill/>
+        </p:spPr>
+        <p:txBody>
+          <a:bodyPr wrap="square">
+            <a:spAutoFit/>
+          </a:bodyPr>
+          <a:lstStyle/>
+          <a:p>
+            <a:pPr algn="l"/>
+            <a:r>
+              <a:rPr sz="1200" b="0" i="0">
+                <a:solidFill>
+                  <a:srgbClr val="212121"/>
+                </a:solidFill>
+                <a:latin typeface="Calibri"/>
+              </a:rPr>
+              <a:t>▸  Cotas de acesso CBO Dirigente/Profissional:
+meta IR ≥ 0,80 até 2030</a:t>
+            </a:r>
+          </a:p>
+        </p:txBody>
+      </p:sp>
+      <p:sp>
+        <p:nvSpPr>
+          <p:cNvPr id="9" name="TextBox 8"/>
+          <p:cNvSpPr txBox="1"/>
+          <p:nvPr/>
+        </p:nvSpPr>
+        <p:spPr>
+          <a:xfrm>
+            <a:off x="457200" y="2468880"/>
+            <a:ext cx="3383280" cy="731520"/>
+          </a:xfrm>
+          <a:prstGeom prst="rect">
+            <a:avLst/>
+          </a:prstGeom>
+          <a:noFill/>
+        </p:spPr>
+        <p:txBody>
+          <a:bodyPr wrap="square">
+            <a:spAutoFit/>
+          </a:bodyPr>
+          <a:lstStyle/>
+          <a:p>
+            <a:pPr algn="l"/>
+            <a:r>
+              <a:rPr sz="1200" b="0" i="0">
+                <a:solidFill>
+                  <a:srgbClr val="212121"/>
+                </a:solidFill>
+                <a:latin typeface="Calibri"/>
+              </a:rPr>
+              <a:t>▸  PRONATEC c/ recorte racial e subsídio de
+transporte para trabalhadores de UPAs pobres</a:t>
+            </a:r>
+          </a:p>
+        </p:txBody>
+      </p:sp>
+      <p:sp>
+        <p:nvSpPr>
           <p:cNvPr id="10" name="TextBox 9"/>
+          <p:cNvSpPr txBox="1"/>
+          <p:nvPr/>
+        </p:nvSpPr>
+        <p:spPr>
+          <a:xfrm>
+            <a:off x="457200" y="3246120"/>
+            <a:ext cx="3383280" cy="731520"/>
+          </a:xfrm>
+          <a:prstGeom prst="rect">
+            <a:avLst/>
+          </a:prstGeom>
+          <a:noFill/>
+        </p:spPr>
+        <p:txBody>
+          <a:bodyPr wrap="square">
+            <a:spAutoFit/>
+          </a:bodyPr>
+          <a:lstStyle/>
+          <a:p>
+            <a:pPr algn="l"/>
+            <a:r>
+              <a:rPr sz="1200" b="0" i="0">
+                <a:solidFill>
+                  <a:srgbClr val="212121"/>
+                </a:solidFill>
+                <a:latin typeface="Calibri"/>
+              </a:rPr>
+              <a:t>▸  Bolsas de residência profissional em empresas
+de alta remuneração para egressos negros</a:t>
+            </a:r>
+          </a:p>
+        </p:txBody>
+      </p:sp>
+      <p:sp>
+        <p:nvSpPr>
+          <p:cNvPr id="11" name="Rectangle 10"/>
+          <p:cNvSpPr/>
+          <p:nvPr/>
+        </p:nvSpPr>
+        <p:spPr>
+          <a:xfrm>
+            <a:off x="4251959" y="1097280"/>
+            <a:ext cx="3749039" cy="5029200"/>
+          </a:xfrm>
+          <a:prstGeom prst="rect">
+            <a:avLst/>
+          </a:prstGeom>
+          <a:solidFill>
+            <a:srgbClr val="F5F5F5"/>
+          </a:solidFill>
+          <a:ln w="19050">
+            <a:solidFill>
+              <a:srgbClr val="1565C0"/>
+            </a:solidFill>
+          </a:ln>
+        </p:spPr>
+        <p:style>
+          <a:lnRef idx="1">
+            <a:schemeClr val="accent1"/>
+          </a:lnRef>
+          <a:fillRef idx="3">
+            <a:schemeClr val="accent1"/>
+          </a:fillRef>
+          <a:effectRef idx="2">
+            <a:schemeClr val="accent1"/>
+          </a:effectRef>
+          <a:fontRef idx="minor">
+            <a:schemeClr val="lt1"/>
+          </a:fontRef>
+        </p:style>
+        <p:txBody>
+          <a:bodyPr rtlCol="0" anchor="ctr"/>
+          <a:lstStyle/>
+          <a:p>
+            <a:pPr algn="ctr"/>
+          </a:p>
+        </p:txBody>
+      </p:sp>
+      <p:sp>
+        <p:nvSpPr>
+          <p:cNvPr id="12" name="Rectangle 11"/>
+          <p:cNvSpPr/>
+          <p:nvPr/>
+        </p:nvSpPr>
+        <p:spPr>
+          <a:xfrm>
+            <a:off x="4251959" y="1097280"/>
+            <a:ext cx="3749039" cy="502920"/>
+          </a:xfrm>
+          <a:prstGeom prst="rect">
+            <a:avLst/>
+          </a:prstGeom>
+          <a:solidFill>
+            <a:srgbClr val="1565C0"/>
+          </a:solidFill>
+          <a:ln/>
+        </p:spPr>
+        <p:style>
+          <a:lnRef idx="1">
+            <a:schemeClr val="accent1"/>
+          </a:lnRef>
+          <a:fillRef idx="3">
+            <a:schemeClr val="accent1"/>
+          </a:fillRef>
+          <a:effectRef idx="2">
+            <a:schemeClr val="accent1"/>
+          </a:effectRef>
+          <a:fontRef idx="minor">
+            <a:schemeClr val="lt1"/>
+          </a:fontRef>
+        </p:style>
+        <p:txBody>
+          <a:bodyPr rtlCol="0" anchor="ctr"/>
+          <a:lstStyle/>
+          <a:p>
+            <a:pPr algn="ctr"/>
+          </a:p>
+        </p:txBody>
+      </p:sp>
+      <p:sp>
+        <p:nvSpPr>
+          <p:cNvPr id="13" name="TextBox 12"/>
+          <p:cNvSpPr txBox="1"/>
+          <p:nvPr/>
+        </p:nvSpPr>
+        <p:spPr>
+          <a:xfrm>
+            <a:off x="4343399" y="1143000"/>
+            <a:ext cx="3566160" cy="457200"/>
+          </a:xfrm>
+          <a:prstGeom prst="rect">
+            <a:avLst/>
+          </a:prstGeom>
+          <a:noFill/>
+        </p:spPr>
+        <p:txBody>
+          <a:bodyPr wrap="square">
+            <a:spAutoFit/>
+          </a:bodyPr>
+          <a:lstStyle/>
+          <a:p>
+            <a:pPr algn="l"/>
+            <a:r>
+              <a:rPr sz="1300" b="1" i="0">
+                <a:solidFill>
+                  <a:srgbClr val="FFFFFF"/>
+                </a:solidFill>
+                <a:latin typeface="Calibri"/>
+              </a:rPr>
+              <a:t>Eixo 2 — Remuneração</a:t>
+            </a:r>
+          </a:p>
+        </p:txBody>
+      </p:sp>
+      <p:sp>
+        <p:nvSpPr>
+          <p:cNvPr id="14" name="TextBox 13"/>
+          <p:cNvSpPr txBox="1"/>
+          <p:nvPr/>
+        </p:nvSpPr>
+        <p:spPr>
+          <a:xfrm>
+            <a:off x="4434839" y="1691640"/>
+            <a:ext cx="3383280" cy="731520"/>
+          </a:xfrm>
+          <a:prstGeom prst="rect">
+            <a:avLst/>
+          </a:prstGeom>
+          <a:noFill/>
+        </p:spPr>
+        <p:txBody>
+          <a:bodyPr wrap="square">
+            <a:spAutoFit/>
+          </a:bodyPr>
+          <a:lstStyle/>
+          <a:p>
+            <a:pPr algn="l"/>
+            <a:r>
+              <a:rPr sz="1200" b="0" i="0">
+                <a:solidFill>
+                  <a:srgbClr val="212121"/>
+                </a:solidFill>
+                <a:latin typeface="Calibri"/>
+              </a:rPr>
+              <a:t>▸  Transparência salarial por raça/gênero
+obrigatória (empresas &gt; 100 funcionários)</a:t>
+            </a:r>
+          </a:p>
+        </p:txBody>
+      </p:sp>
+      <p:sp>
+        <p:nvSpPr>
+          <p:cNvPr id="15" name="TextBox 14"/>
+          <p:cNvSpPr txBox="1"/>
+          <p:nvPr/>
+        </p:nvSpPr>
+        <p:spPr>
+          <a:xfrm>
+            <a:off x="4434839" y="2468880"/>
+            <a:ext cx="3383280" cy="731520"/>
+          </a:xfrm>
+          <a:prstGeom prst="rect">
+            <a:avLst/>
+          </a:prstGeom>
+          <a:noFill/>
+        </p:spPr>
+        <p:txBody>
+          <a:bodyPr wrap="square">
+            <a:spAutoFit/>
+          </a:bodyPr>
+          <a:lstStyle/>
+          <a:p>
+            <a:pPr algn="l"/>
+            <a:r>
+              <a:rPr sz="1200" b="0" i="0">
+                <a:solidFill>
+                  <a:srgbClr val="212121"/>
+                </a:solidFill>
+                <a:latin typeface="Calibri"/>
+              </a:rPr>
+              <a:t>▸  Auditoria de igual pagamento por trabalho igual
+com penalidades progressivas (gap HLM M4)</a:t>
+            </a:r>
+          </a:p>
+        </p:txBody>
+      </p:sp>
+      <p:sp>
+        <p:nvSpPr>
+          <p:cNvPr id="16" name="TextBox 15"/>
+          <p:cNvSpPr txBox="1"/>
+          <p:nvPr/>
+        </p:nvSpPr>
+        <p:spPr>
+          <a:xfrm>
+            <a:off x="4434839" y="3246120"/>
+            <a:ext cx="3383280" cy="731520"/>
+          </a:xfrm>
+          <a:prstGeom prst="rect">
+            <a:avLst/>
+          </a:prstGeom>
+          <a:noFill/>
+        </p:spPr>
+        <p:txBody>
+          <a:bodyPr wrap="square">
+            <a:spAutoFit/>
+          </a:bodyPr>
+          <a:lstStyle/>
+          <a:p>
+            <a:pPr algn="l"/>
+            <a:r>
+              <a:rPr sz="1200" b="0" i="0">
+                <a:solidFill>
+                  <a:srgbClr val="212121"/>
+                </a:solidFill>
+                <a:latin typeface="Calibri"/>
+              </a:rPr>
+              <a:t>▸  Piso salarial indexado nas categorias com
+maior gap racial residual (6,2% HLM M4)</a:t>
+            </a:r>
+          </a:p>
+        </p:txBody>
+      </p:sp>
+      <p:sp>
+        <p:nvSpPr>
+          <p:cNvPr id="17" name="Rectangle 16"/>
+          <p:cNvSpPr/>
+          <p:nvPr/>
+        </p:nvSpPr>
+        <p:spPr>
+          <a:xfrm>
+            <a:off x="8229598" y="1097280"/>
+            <a:ext cx="3749039" cy="5029200"/>
+          </a:xfrm>
+          <a:prstGeom prst="rect">
+            <a:avLst/>
+          </a:prstGeom>
+          <a:solidFill>
+            <a:srgbClr val="F5F5F5"/>
+          </a:solidFill>
+          <a:ln w="19050">
+            <a:solidFill>
+              <a:srgbClr val="2E7D32"/>
+            </a:solidFill>
+          </a:ln>
+        </p:spPr>
+        <p:style>
+          <a:lnRef idx="1">
+            <a:schemeClr val="accent1"/>
+          </a:lnRef>
+          <a:fillRef idx="3">
+            <a:schemeClr val="accent1"/>
+          </a:fillRef>
+          <a:effectRef idx="2">
+            <a:schemeClr val="accent1"/>
+          </a:effectRef>
+          <a:fontRef idx="minor">
+            <a:schemeClr val="lt1"/>
+          </a:fontRef>
+        </p:style>
+        <p:txBody>
+          <a:bodyPr rtlCol="0" anchor="ctr"/>
+          <a:lstStyle/>
+          <a:p>
+            <a:pPr algn="ctr"/>
+          </a:p>
+        </p:txBody>
+      </p:sp>
+      <p:sp>
+        <p:nvSpPr>
+          <p:cNvPr id="18" name="Rectangle 17"/>
+          <p:cNvSpPr/>
+          <p:nvPr/>
+        </p:nvSpPr>
+        <p:spPr>
+          <a:xfrm>
+            <a:off x="8229598" y="1097280"/>
+            <a:ext cx="3749039" cy="502920"/>
+          </a:xfrm>
+          <a:prstGeom prst="rect">
+            <a:avLst/>
+          </a:prstGeom>
+          <a:solidFill>
+            <a:srgbClr val="2E7D32"/>
+          </a:solidFill>
+          <a:ln/>
+        </p:spPr>
+        <p:style>
+          <a:lnRef idx="1">
+            <a:schemeClr val="accent1"/>
+          </a:lnRef>
+          <a:fillRef idx="3">
+            <a:schemeClr val="accent1"/>
+          </a:fillRef>
+          <a:effectRef idx="2">
+            <a:schemeClr val="accent1"/>
+          </a:effectRef>
+          <a:fontRef idx="minor">
+            <a:schemeClr val="lt1"/>
+          </a:fontRef>
+        </p:style>
+        <p:txBody>
+          <a:bodyPr rtlCol="0" anchor="ctr"/>
+          <a:lstStyle/>
+          <a:p>
+            <a:pPr algn="ctr"/>
+          </a:p>
+        </p:txBody>
+      </p:sp>
+      <p:sp>
+        <p:nvSpPr>
+          <p:cNvPr id="19" name="TextBox 18"/>
+          <p:cNvSpPr txBox="1"/>
+          <p:nvPr/>
+        </p:nvSpPr>
+        <p:spPr>
+          <a:xfrm>
+            <a:off x="8321038" y="1143000"/>
+            <a:ext cx="3566160" cy="457200"/>
+          </a:xfrm>
+          <a:prstGeom prst="rect">
+            <a:avLst/>
+          </a:prstGeom>
+          <a:noFill/>
+        </p:spPr>
+        <p:txBody>
+          <a:bodyPr wrap="square">
+            <a:spAutoFit/>
+          </a:bodyPr>
+          <a:lstStyle/>
+          <a:p>
+            <a:pPr algn="l"/>
+            <a:r>
+              <a:rPr sz="1300" b="1" i="0">
+                <a:solidFill>
+                  <a:srgbClr val="FFFFFF"/>
+                </a:solidFill>
+                <a:latin typeface="Calibri"/>
+              </a:rPr>
+              <a:t>Eixo 3 — Inclusão Produtiva</a:t>
+            </a:r>
+          </a:p>
+        </p:txBody>
+      </p:sp>
+      <p:sp>
+        <p:nvSpPr>
+          <p:cNvPr id="20" name="TextBox 19"/>
+          <p:cNvSpPr txBox="1"/>
+          <p:nvPr/>
+        </p:nvSpPr>
+        <p:spPr>
+          <a:xfrm>
+            <a:off x="8412478" y="1691640"/>
+            <a:ext cx="3383280" cy="731520"/>
+          </a:xfrm>
+          <a:prstGeom prst="rect">
+            <a:avLst/>
+          </a:prstGeom>
+          <a:noFill/>
+        </p:spPr>
+        <p:txBody>
+          <a:bodyPr wrap="square">
+            <a:spAutoFit/>
+          </a:bodyPr>
+          <a:lstStyle/>
+          <a:p>
+            <a:pPr algn="l"/>
+            <a:r>
+              <a:rPr sz="1200" b="0" i="0">
+                <a:solidFill>
+                  <a:srgbClr val="212121"/>
+                </a:solidFill>
+                <a:latin typeface="Calibri"/>
+              </a:rPr>
+              <a:t>▸  Mentoria estruturada para elevar betweenness
+de negros nas redes profissionais (SNA: =0)</a:t>
+            </a:r>
+          </a:p>
+        </p:txBody>
+      </p:sp>
+      <p:sp>
+        <p:nvSpPr>
+          <p:cNvPr id="21" name="TextBox 20"/>
+          <p:cNvSpPr txBox="1"/>
+          <p:nvPr/>
+        </p:nvSpPr>
+        <p:spPr>
+          <a:xfrm>
+            <a:off x="8412478" y="2468880"/>
+            <a:ext cx="3383280" cy="731520"/>
+          </a:xfrm>
+          <a:prstGeom prst="rect">
+            <a:avLst/>
+          </a:prstGeom>
+          <a:noFill/>
+        </p:spPr>
+        <p:txBody>
+          <a:bodyPr wrap="square">
+            <a:spAutoFit/>
+          </a:bodyPr>
+          <a:lstStyle/>
+          <a:p>
+            <a:pPr algn="l"/>
+            <a:r>
+              <a:rPr sz="1200" b="0" i="0">
+                <a:solidFill>
+                  <a:srgbClr val="212121"/>
+                </a:solidFill>
+                <a:latin typeface="Calibri"/>
+              </a:rPr>
+              <a:t>▸  30% dos cargos DAS e liderança corporativa
+para negros até 2030 (inclusão nas redes)</a:t>
+            </a:r>
+          </a:p>
+        </p:txBody>
+      </p:sp>
+      <p:sp>
+        <p:nvSpPr>
+          <p:cNvPr id="22" name="TextBox 21"/>
+          <p:cNvSpPr txBox="1"/>
+          <p:nvPr/>
+        </p:nvSpPr>
+        <p:spPr>
+          <a:xfrm>
+            <a:off x="8412478" y="3246120"/>
+            <a:ext cx="3383280" cy="731520"/>
+          </a:xfrm>
+          <a:prstGeom prst="rect">
+            <a:avLst/>
+          </a:prstGeom>
+          <a:noFill/>
+        </p:spPr>
+        <p:txBody>
+          <a:bodyPr wrap="square">
+            <a:spAutoFit/>
+          </a:bodyPr>
+          <a:lstStyle/>
+          <a:p>
+            <a:pPr algn="l"/>
+            <a:r>
+              <a:rPr sz="1200" b="0" i="0">
+                <a:solidFill>
+                  <a:srgbClr val="212121"/>
+                </a:solidFill>
+                <a:latin typeface="Calibri"/>
+              </a:rPr>
+              <a:t>▸  Equalizar CBO = +127,3% renda negra |
+proxy PIB +74,3 p.p. (Hsieh et al., 2019)</a:t>
+            </a:r>
+          </a:p>
+        </p:txBody>
+      </p:sp>
+      <p:sp>
+        <p:nvSpPr>
+          <p:cNvPr id="23" name="TextBox 22"/>
+          <p:cNvSpPr txBox="1"/>
+          <p:nvPr/>
+        </p:nvSpPr>
+        <p:spPr>
+          <a:xfrm>
+            <a:off x="274320" y="6217920"/>
+            <a:ext cx="11612880" cy="411480"/>
+          </a:xfrm>
+          <a:prstGeom prst="rect">
+            <a:avLst/>
+          </a:prstGeom>
+          <a:noFill/>
+        </p:spPr>
+        <p:txBody>
+          <a:bodyPr wrap="square">
+            <a:spAutoFit/>
+          </a:bodyPr>
+          <a:lstStyle/>
+          <a:p>
+            <a:pPr algn="ctr"/>
+            <a:r>
+              <a:rPr sz="1300" b="1" i="0">
+                <a:solidFill>
+                  <a:srgbClr val="B71C1C"/>
+                </a:solidFill>
+                <a:latin typeface="Calibri"/>
+              </a:rPr>
+              <a:t>⚠  Ao ritmo atual de convergência (~0,02 log-pontos/ano), eliminar o gap levaria mais de 100 anos.</a:t>
+            </a:r>
+          </a:p>
+        </p:txBody>
+      </p:sp>
+      <p:sp>
+        <p:nvSpPr>
+          <p:cNvPr id="24" name="Rectangle 23"/>
+          <p:cNvSpPr/>
+          <p:nvPr/>
+        </p:nvSpPr>
+        <p:spPr>
+          <a:xfrm>
+            <a:off x="0" y="6601968"/>
+            <a:ext cx="12188952" cy="256032"/>
+          </a:xfrm>
+          <a:prstGeom prst="rect">
+            <a:avLst/>
+          </a:prstGeom>
+          <a:solidFill>
+            <a:srgbClr val="1F3864"/>
+          </a:solidFill>
+          <a:ln/>
+        </p:spPr>
+        <p:style>
+          <a:lnRef idx="1">
+            <a:schemeClr val="accent1"/>
+          </a:lnRef>
+          <a:fillRef idx="3">
+            <a:schemeClr val="accent1"/>
+          </a:fillRef>
+          <a:effectRef idx="2">
+            <a:schemeClr val="accent1"/>
+          </a:effectRef>
+          <a:fontRef idx="minor">
+            <a:schemeClr val="lt1"/>
+          </a:fontRef>
+        </p:style>
+        <p:txBody>
+          <a:bodyPr rtlCol="0" anchor="ctr"/>
+          <a:lstStyle/>
+          <a:p>
+            <a:pPr algn="ctr"/>
+          </a:p>
+        </p:txBody>
+      </p:sp>
+      <p:sp>
+        <p:nvSpPr>
+          <p:cNvPr id="25" name="TextBox 24"/>
           <p:cNvSpPr txBox="1"/>
           <p:nvPr/>
         </p:nvSpPr>
@@ -17961,7 +19961,7 @@
       </p:sp>
       <p:sp>
         <p:nvSpPr>
-          <p:cNvPr id="11" name="TextBox 10"/>
+          <p:cNvPr id="26" name="TextBox 25"/>
           <p:cNvSpPr txBox="1"/>
           <p:nvPr/>
         </p:nvSpPr>
@@ -18021,7 +20021,7 @@
         <p:spPr>
           <a:xfrm>
             <a:off x="0" y="0"/>
-            <a:ext cx="12188952" cy="6858000"/>
+            <a:ext cx="12188952" cy="1005840"/>
           </a:xfrm>
           <a:prstGeom prst="rect">
             <a:avLst/>
@@ -18055,20 +20055,431 @@
       </p:sp>
       <p:sp>
         <p:nvSpPr>
-          <p:cNvPr id="3" name="Rectangle 2"/>
+          <p:cNvPr id="3" name="TextBox 2"/>
+          <p:cNvSpPr txBox="1"/>
+          <p:nvPr/>
+        </p:nvSpPr>
+        <p:spPr>
+          <a:xfrm>
+            <a:off x="274320" y="73152"/>
+            <a:ext cx="10972800" cy="502920"/>
+          </a:xfrm>
+          <a:prstGeom prst="rect">
+            <a:avLst/>
+          </a:prstGeom>
+          <a:noFill/>
+        </p:spPr>
+        <p:txBody>
+          <a:bodyPr wrap="square">
+            <a:spAutoFit/>
+          </a:bodyPr>
+          <a:lstStyle/>
+          <a:p>
+            <a:pPr algn="l"/>
+            <a:r>
+              <a:rPr sz="2600" b="1" i="0">
+                <a:solidFill>
+                  <a:srgbClr val="FFFFFF"/>
+                </a:solidFill>
+                <a:latin typeface="Calibri"/>
+              </a:rPr>
+              <a:t>24. Limitações e Agenda Futura</a:t>
+            </a:r>
+          </a:p>
+        </p:txBody>
+      </p:sp>
+      <p:sp>
+        <p:nvSpPr>
+          <p:cNvPr id="4" name="TextBox 3"/>
+          <p:cNvSpPr txBox="1"/>
+          <p:nvPr/>
+        </p:nvSpPr>
+        <p:spPr>
+          <a:xfrm>
+            <a:off x="274320" y="594360"/>
+            <a:ext cx="10972800" cy="347472"/>
+          </a:xfrm>
+          <a:prstGeom prst="rect">
+            <a:avLst/>
+          </a:prstGeom>
+          <a:noFill/>
+        </p:spPr>
+        <p:txBody>
+          <a:bodyPr wrap="square">
+            <a:spAutoFit/>
+          </a:bodyPr>
+          <a:lstStyle/>
+          <a:p>
+            <a:pPr algn="l"/>
+            <a:r>
+              <a:rPr sz="1400" b="0" i="0">
+                <a:solidFill>
+                  <a:srgbClr val="BBDEFB"/>
+                </a:solidFill>
+                <a:latin typeface="Calibri"/>
+              </a:rPr>
+              <a:t>Honestidade acadêmica: o que este trabalho não faz e por quê</a:t>
+            </a:r>
+          </a:p>
+        </p:txBody>
+      </p:sp>
+      <p:sp>
+        <p:nvSpPr>
+          <p:cNvPr id="5" name="TextBox 4"/>
+          <p:cNvSpPr txBox="1"/>
+          <p:nvPr/>
+        </p:nvSpPr>
+        <p:spPr>
+          <a:xfrm>
+            <a:off x="365760" y="1143000"/>
+            <a:ext cx="5486400" cy="365760"/>
+          </a:xfrm>
+          <a:prstGeom prst="rect">
+            <a:avLst/>
+          </a:prstGeom>
+          <a:noFill/>
+        </p:spPr>
+        <p:txBody>
+          <a:bodyPr wrap="square">
+            <a:spAutoFit/>
+          </a:bodyPr>
+          <a:lstStyle/>
+          <a:p>
+            <a:pPr algn="l"/>
+            <a:r>
+              <a:rPr sz="1600" b="1" i="0">
+                <a:solidFill>
+                  <a:srgbClr val="B71C1C"/>
+                </a:solidFill>
+                <a:latin typeface="Calibri"/>
+              </a:rPr>
+              <a:t>Limitações</a:t>
+            </a:r>
+          </a:p>
+        </p:txBody>
+      </p:sp>
+      <p:sp>
+        <p:nvSpPr>
+          <p:cNvPr id="6" name="TextBox 5"/>
+          <p:cNvSpPr txBox="1"/>
+          <p:nvPr/>
+        </p:nvSpPr>
+        <p:spPr>
+          <a:xfrm>
+            <a:off x="365760" y="1600200"/>
+            <a:ext cx="5669280" cy="3474720"/>
+          </a:xfrm>
+          <a:prstGeom prst="rect">
+            <a:avLst/>
+          </a:prstGeom>
+          <a:noFill/>
+        </p:spPr>
+        <p:txBody>
+          <a:bodyPr wrap="square">
+            <a:spAutoFit/>
+          </a:bodyPr>
+          <a:lstStyle/>
+          <a:p>
+            <a:pPr>
+              <a:spcAft>
+                <a:spcPts val="400"/>
+              </a:spcAft>
+            </a:pPr>
+            <a:r>
+              <a:rPr sz="1300" b="1">
+                <a:solidFill>
+                  <a:srgbClr val="B71C1C"/>
+                </a:solidFill>
+                <a:latin typeface="Calibri"/>
+              </a:rPr>
+              <a:t>▸  </a:t>
+            </a:r>
+            <a:r>
+              <a:rPr sz="1300">
+                <a:solidFill>
+                  <a:srgbClr val="212121"/>
+                </a:solidFill>
+                <a:latin typeface="Calibri"/>
+              </a:rPr>
+              <a:t>PNAD não permite experimentos causais — coeficientes são associações condicionais, não efeitos causais no sentido de Rubin/Pearl</a:t>
+            </a:r>
+          </a:p>
+          <a:p>
+            <a:pPr>
+              <a:spcAft>
+                <a:spcPts val="400"/>
+              </a:spcAft>
+            </a:pPr>
+            <a:r>
+              <a:rPr sz="1300" b="1">
+                <a:solidFill>
+                  <a:srgbClr val="B71C1C"/>
+                </a:solidFill>
+                <a:latin typeface="Calibri"/>
+              </a:rPr>
+              <a:t>▸  </a:t>
+            </a:r>
+            <a:r>
+              <a:rPr sz="1300">
+                <a:solidFill>
+                  <a:srgbClr val="212121"/>
+                </a:solidFill>
+                <a:latin typeface="Calibri"/>
+              </a:rPr>
+              <a:t>UPA como proxy de bairro: unidade de amostragem ≠ bairro administrativo</a:t>
+            </a:r>
+          </a:p>
+          <a:p>
+            <a:pPr>
+              <a:spcAft>
+                <a:spcPts val="400"/>
+              </a:spcAft>
+            </a:pPr>
+            <a:r>
+              <a:rPr sz="1300" b="1">
+                <a:solidFill>
+                  <a:srgbClr val="B71C1C"/>
+                </a:solidFill>
+                <a:latin typeface="Calibri"/>
+              </a:rPr>
+              <a:t>▸  </a:t>
+            </a:r>
+            <a:r>
+              <a:rPr sz="1300">
+                <a:solidFill>
+                  <a:srgbClr val="212121"/>
+                </a:solidFill>
+                <a:latin typeface="Calibri"/>
+              </a:rPr>
+              <a:t>GLMM estimado na PEA completa via lme4::glmer (nAGQ=0, bobyqa, n=7,7M, 40,9k UPAs) — M3 com inclinação aleatória de negro não estimado por custo computacional</a:t>
+            </a:r>
+          </a:p>
+          <a:p>
+            <a:pPr>
+              <a:spcAft>
+                <a:spcPts val="400"/>
+              </a:spcAft>
+            </a:pPr>
+            <a:r>
+              <a:rPr sz="1300" b="1">
+                <a:solidFill>
+                  <a:srgbClr val="B71C1C"/>
+                </a:solidFill>
+                <a:latin typeface="Calibri"/>
+              </a:rPr>
+              <a:t>▸  </a:t>
+            </a:r>
+            <a:r>
+              <a:rPr sz="1300">
+                <a:solidFill>
+                  <a:srgbClr val="212121"/>
+                </a:solidFill>
+                <a:latin typeface="Calibri"/>
+              </a:rPr>
+              <a:t>CBO auto-declarado pode ter viés de classificação por raça (deflation de ocupação)</a:t>
+            </a:r>
+          </a:p>
+        </p:txBody>
+      </p:sp>
+      <p:sp>
+        <p:nvSpPr>
+          <p:cNvPr id="7" name="TextBox 6"/>
+          <p:cNvSpPr txBox="1"/>
+          <p:nvPr/>
+        </p:nvSpPr>
+        <p:spPr>
+          <a:xfrm>
+            <a:off x="6400800" y="1143000"/>
+            <a:ext cx="5486400" cy="365760"/>
+          </a:xfrm>
+          <a:prstGeom prst="rect">
+            <a:avLst/>
+          </a:prstGeom>
+          <a:noFill/>
+        </p:spPr>
+        <p:txBody>
+          <a:bodyPr wrap="square">
+            <a:spAutoFit/>
+          </a:bodyPr>
+          <a:lstStyle/>
+          <a:p>
+            <a:pPr algn="l"/>
+            <a:r>
+              <a:rPr sz="1600" b="1" i="0">
+                <a:solidFill>
+                  <a:srgbClr val="1565C0"/>
+                </a:solidFill>
+                <a:latin typeface="Calibri"/>
+              </a:rPr>
+              <a:t>Agenda Futura</a:t>
+            </a:r>
+          </a:p>
+        </p:txBody>
+      </p:sp>
+      <p:sp>
+        <p:nvSpPr>
+          <p:cNvPr id="8" name="TextBox 7"/>
+          <p:cNvSpPr txBox="1"/>
+          <p:nvPr/>
+        </p:nvSpPr>
+        <p:spPr>
+          <a:xfrm>
+            <a:off x="6400800" y="1600200"/>
+            <a:ext cx="5669280" cy="3474720"/>
+          </a:xfrm>
+          <a:prstGeom prst="rect">
+            <a:avLst/>
+          </a:prstGeom>
+          <a:noFill/>
+        </p:spPr>
+        <p:txBody>
+          <a:bodyPr wrap="square">
+            <a:spAutoFit/>
+          </a:bodyPr>
+          <a:lstStyle/>
+          <a:p>
+            <a:pPr>
+              <a:spcAft>
+                <a:spcPts val="400"/>
+              </a:spcAft>
+            </a:pPr>
+            <a:r>
+              <a:rPr sz="1300" b="1">
+                <a:solidFill>
+                  <a:srgbClr val="1565C0"/>
+                </a:solidFill>
+                <a:latin typeface="Calibri"/>
+              </a:rPr>
+              <a:t>▸  </a:t>
+            </a:r>
+            <a:r>
+              <a:rPr sz="1300">
+                <a:solidFill>
+                  <a:srgbClr val="212121"/>
+                </a:solidFill>
+                <a:latin typeface="Calibri"/>
+              </a:rPr>
+              <a:t>Análise de variáveis instrumentais (IV) para identificação causal — distância à escola técnica como instrumento</a:t>
+            </a:r>
+          </a:p>
+          <a:p>
+            <a:pPr>
+              <a:spcAft>
+                <a:spcPts val="400"/>
+              </a:spcAft>
+            </a:pPr>
+            <a:r>
+              <a:rPr sz="1300" b="1">
+                <a:solidFill>
+                  <a:srgbClr val="1565C0"/>
+                </a:solidFill>
+                <a:latin typeface="Calibri"/>
+              </a:rPr>
+              <a:t>▸  </a:t>
+            </a:r>
+            <a:r>
+              <a:rPr sz="1300">
+                <a:solidFill>
+                  <a:srgbClr val="212121"/>
+                </a:solidFill>
+                <a:latin typeface="Calibri"/>
+              </a:rPr>
+              <a:t>RAIS linkada à PNAD para rastrear trajetórias de mobilidade intraempresa</a:t>
+            </a:r>
+          </a:p>
+          <a:p>
+            <a:pPr>
+              <a:spcAft>
+                <a:spcPts val="400"/>
+              </a:spcAft>
+            </a:pPr>
+            <a:r>
+              <a:rPr sz="1300" b="1">
+                <a:solidFill>
+                  <a:srgbClr val="1565C0"/>
+                </a:solidFill>
+                <a:latin typeface="Calibri"/>
+              </a:rPr>
+              <a:t>▸  </a:t>
+            </a:r>
+            <a:r>
+              <a:rPr sz="1300">
+                <a:solidFill>
+                  <a:srgbClr val="212121"/>
+                </a:solidFill>
+                <a:latin typeface="Calibri"/>
+              </a:rPr>
+              <a:t>Análise de mediação formal (path analysis) raça → ocupação → renda</a:t>
+            </a:r>
+          </a:p>
+          <a:p>
+            <a:pPr>
+              <a:spcAft>
+                <a:spcPts val="400"/>
+              </a:spcAft>
+            </a:pPr>
+            <a:r>
+              <a:rPr sz="1300" b="1">
+                <a:solidFill>
+                  <a:srgbClr val="1565C0"/>
+                </a:solidFill>
+                <a:latin typeface="Calibri"/>
+              </a:rPr>
+              <a:t>▸  </a:t>
+            </a:r>
+            <a:r>
+              <a:rPr sz="1300">
+                <a:solidFill>
+                  <a:srgbClr val="212121"/>
+                </a:solidFill>
+                <a:latin typeface="Calibri"/>
+              </a:rPr>
+              <a:t>Extensão ao setor público por UF — heterogeneidade do glass ceiling entre estados</a:t>
+            </a:r>
+          </a:p>
+          <a:p>
+            <a:pPr>
+              <a:spcAft>
+                <a:spcPts val="400"/>
+              </a:spcAft>
+            </a:pPr>
+            <a:r>
+              <a:rPr sz="1300" b="1">
+                <a:solidFill>
+                  <a:srgbClr val="1565C0"/>
+                </a:solidFill>
+                <a:latin typeface="Calibri"/>
+              </a:rPr>
+              <a:t>▸  </a:t>
+            </a:r>
+            <a:r>
+              <a:rPr sz="1300">
+                <a:solidFill>
+                  <a:srgbClr val="212121"/>
+                </a:solidFill>
+                <a:latin typeface="Calibri"/>
+              </a:rPr>
+              <a:t>Modelo longitudinal com painéis rotativos da PNAD (2T seguidos) para efeitos fixos de indivíduo</a:t>
+            </a:r>
+          </a:p>
+        </p:txBody>
+      </p:sp>
+      <p:sp>
+        <p:nvSpPr>
+          <p:cNvPr id="9" name="Rectangle 8"/>
           <p:cNvSpPr/>
           <p:nvPr/>
         </p:nvSpPr>
         <p:spPr>
           <a:xfrm>
-            <a:off x="0" y="0"/>
-            <a:ext cx="12188952" cy="731520"/>
+            <a:off x="0" y="6601968"/>
+            <a:ext cx="12188952" cy="256032"/>
           </a:xfrm>
           <a:prstGeom prst="rect">
             <a:avLst/>
           </a:prstGeom>
           <a:solidFill>
-            <a:srgbClr val="0D1F3C"/>
+            <a:srgbClr val="1F3864"/>
           </a:solidFill>
           <a:ln/>
         </p:spPr>
@@ -18096,6 +20507,176 @@
       </p:sp>
       <p:sp>
         <p:nvSpPr>
+          <p:cNvPr id="10" name="TextBox 9"/>
+          <p:cNvSpPr txBox="1"/>
+          <p:nvPr/>
+        </p:nvSpPr>
+        <p:spPr>
+          <a:xfrm>
+            <a:off x="137160" y="6629400"/>
+            <a:ext cx="10058400" cy="228600"/>
+          </a:xfrm>
+          <a:prstGeom prst="rect">
+            <a:avLst/>
+          </a:prstGeom>
+          <a:noFill/>
+        </p:spPr>
+        <p:txBody>
+          <a:bodyPr wrap="square">
+            <a:spAutoFit/>
+          </a:bodyPr>
+          <a:lstStyle/>
+          <a:p>
+            <a:pPr algn="l"/>
+            <a:r>
+              <a:rPr sz="850" b="0" i="0">
+                <a:solidFill>
+                  <a:srgbClr val="BBDEFB"/>
+                </a:solidFill>
+                <a:latin typeface="Calibri"/>
+              </a:rPr>
+              <a:t>Ricardo Calheiros  |  MBA USP/ESALQ  |  Racismo Estrutural e Mercado de Trabalho</a:t>
+            </a:r>
+          </a:p>
+        </p:txBody>
+      </p:sp>
+      <p:sp>
+        <p:nvSpPr>
+          <p:cNvPr id="11" name="TextBox 10"/>
+          <p:cNvSpPr txBox="1"/>
+          <p:nvPr/>
+        </p:nvSpPr>
+        <p:spPr>
+          <a:xfrm>
+            <a:off x="11704320" y="6629400"/>
+            <a:ext cx="457200" cy="228600"/>
+          </a:xfrm>
+          <a:prstGeom prst="rect">
+            <a:avLst/>
+          </a:prstGeom>
+          <a:noFill/>
+        </p:spPr>
+        <p:txBody>
+          <a:bodyPr wrap="square">
+            <a:spAutoFit/>
+          </a:bodyPr>
+          <a:lstStyle/>
+          <a:p>
+            <a:pPr algn="r"/>
+            <a:r>
+              <a:rPr sz="850" b="0" i="0">
+                <a:solidFill>
+                  <a:srgbClr val="FFFFFF"/>
+                </a:solidFill>
+                <a:latin typeface="Calibri"/>
+              </a:rPr>
+              <a:t>25/25</a:t>
+            </a:r>
+          </a:p>
+        </p:txBody>
+      </p:sp>
+    </p:spTree>
+  </p:cSld>
+  <p:clrMapOvr>
+    <a:masterClrMapping/>
+  </p:clrMapOvr>
+</p:sld>
+</file>
+
+<file path=ppt/slides/slide26.xml><?xml version="1.0" encoding="utf-8"?>
+<p:sld xmlns:a="http://schemas.openxmlformats.org/drawingml/2006/main" xmlns:p="http://schemas.openxmlformats.org/presentationml/2006/main" xmlns:r="http://schemas.openxmlformats.org/officeDocument/2006/relationships">
+  <p:cSld>
+    <p:spTree>
+      <p:nvGrpSpPr>
+        <p:cNvPr id="1" name=""/>
+        <p:cNvGrpSpPr/>
+        <p:nvPr/>
+      </p:nvGrpSpPr>
+      <p:grpSpPr/>
+      <p:sp>
+        <p:nvSpPr>
+          <p:cNvPr id="2" name="Rectangle 1"/>
+          <p:cNvSpPr/>
+          <p:nvPr/>
+        </p:nvSpPr>
+        <p:spPr>
+          <a:xfrm>
+            <a:off x="0" y="0"/>
+            <a:ext cx="12188952" cy="6858000"/>
+          </a:xfrm>
+          <a:prstGeom prst="rect">
+            <a:avLst/>
+          </a:prstGeom>
+          <a:solidFill>
+            <a:srgbClr val="1F3864"/>
+          </a:solidFill>
+          <a:ln/>
+        </p:spPr>
+        <p:style>
+          <a:lnRef idx="1">
+            <a:schemeClr val="accent1"/>
+          </a:lnRef>
+          <a:fillRef idx="3">
+            <a:schemeClr val="accent1"/>
+          </a:fillRef>
+          <a:effectRef idx="2">
+            <a:schemeClr val="accent1"/>
+          </a:effectRef>
+          <a:fontRef idx="minor">
+            <a:schemeClr val="lt1"/>
+          </a:fontRef>
+        </p:style>
+        <p:txBody>
+          <a:bodyPr rtlCol="0" anchor="ctr"/>
+          <a:lstStyle/>
+          <a:p>
+            <a:pPr algn="ctr"/>
+          </a:p>
+        </p:txBody>
+      </p:sp>
+      <p:sp>
+        <p:nvSpPr>
+          <p:cNvPr id="3" name="Rectangle 2"/>
+          <p:cNvSpPr/>
+          <p:nvPr/>
+        </p:nvSpPr>
+        <p:spPr>
+          <a:xfrm>
+            <a:off x="0" y="0"/>
+            <a:ext cx="12188952" cy="731520"/>
+          </a:xfrm>
+          <a:prstGeom prst="rect">
+            <a:avLst/>
+          </a:prstGeom>
+          <a:solidFill>
+            <a:srgbClr val="0D1F3C"/>
+          </a:solidFill>
+          <a:ln/>
+        </p:spPr>
+        <p:style>
+          <a:lnRef idx="1">
+            <a:schemeClr val="accent1"/>
+          </a:lnRef>
+          <a:fillRef idx="3">
+            <a:schemeClr val="accent1"/>
+          </a:fillRef>
+          <a:effectRef idx="2">
+            <a:schemeClr val="accent1"/>
+          </a:effectRef>
+          <a:fontRef idx="minor">
+            <a:schemeClr val="lt1"/>
+          </a:fontRef>
+        </p:style>
+        <p:txBody>
+          <a:bodyPr rtlCol="0" anchor="ctr"/>
+          <a:lstStyle/>
+          <a:p>
+            <a:pPr algn="ctr"/>
+          </a:p>
+        </p:txBody>
+      </p:sp>
+      <p:sp>
+        <p:nvSpPr>
           <p:cNvPr id="4" name="TextBox 3"/>
           <p:cNvSpPr txBox="1"/>
           <p:nvPr/>
@@ -18124,7 +20705,7 @@
                 </a:solidFill>
                 <a:latin typeface="Calibri"/>
               </a:rPr>
-              <a:t>18. Conclusão</a:t>
+              <a:t>25. Conclusão</a:t>
             </a:r>
           </a:p>
         </p:txBody>

--- a/apresentacao_tcc.pptx
+++ b/apresentacao_tcc.pptx
@@ -18090,7 +18090,7 @@
                 </a:solidFill>
                 <a:latin typeface="Calibri"/>
               </a:rPr>
-              <a:t>CC = 0,835</a:t>
+              <a:t>CC = 0,834</a:t>
             </a:r>
           </a:p>
         </p:txBody>
@@ -18690,7 +18690,7 @@
                 </a:solidFill>
                 <a:latin typeface="Calibri"/>
               </a:rPr>
-              <a:t>CC = 0,270</a:t>
+              <a:t>CC = 0,275</a:t>
             </a:r>
           </a:p>
         </p:txBody>
@@ -18916,7 +18916,7 @@
                 </a:solidFill>
                 <a:latin typeface="Calibri"/>
               </a:rPr>
-              <a:t>84% do gap é de ACESSO → P1 (Cotas CBO) lidera com CC=0,835 — 2,1× superior ao 2º colocado.  Pareto (λ=0,5): alocação ótima = P1+P5 (cotas + mentoria).  PL-1 (orçamento B=5): redução projetada de 25,1% do gap bruto.</a:t>
+              <a:t>84% do gap é de ACESSO → P1 (Cotas CBO) lidera com CC=0,834 — 2,1× superior ao 2º colocado.  Pareto (λ=0,5): alocação ótima = P1+P5 (cotas + mentoria).  PL-1 (orçamento B=5): redução projetada de 25,1% do gap bruto.</a:t>
             </a:r>
           </a:p>
         </p:txBody>

--- a/apresentacao_tcc.pptx
+++ b/apresentacao_tcc.pptx
@@ -12452,7 +12452,7 @@
                 </a:solidFill>
                 <a:latin typeface="Calibri"/>
               </a:rPr>
-              <a:t>0,0%</a:t>
+              <a:t>0%</a:t>
             </a:r>
           </a:p>
         </p:txBody>

--- a/apresentacao_tcc.pptx
+++ b/apresentacao_tcc.pptx
@@ -15808,7 +15808,7 @@
                 </a:solidFill>
                 <a:latin typeface="Calibri"/>
               </a:rPr>
-              <a:t>H4: Contradição do mercado atual — emprego em máxima histórica (94,4%) mas renda real recua em 2025 (−4,6% vs 2024).  H5: Armadilha da renda média — gap de qualificação (11,0% vs 22,4%) praticamente inalterado após 10 anos. Inclusão produtiva plena = proxy +74,3 p.p. de PIB (Hsieh et al., 2019).</a:t>
+              <a:t>H4: Contradição do mercado atual — emprego em máxima histórica (94,4%) mas renda real recua em 2025 (−4,6% vs 2024).  H5: Armadilha da renda média — gap de qualificação (11,0% vs 22,4%) praticamente inalterado após 10 anos. Inclusão produtiva plena = simulação CBO: +127,3% renda negra; proxy agregado +74,3 p.p. (127,3% × participação ~58% — conservador, ver nota metodológica).</a:t>
             </a:r>
           </a:p>
         </p:txBody>
@@ -19842,8 +19842,8 @@
                 </a:solidFill>
                 <a:latin typeface="Calibri"/>
               </a:rPr>
-              <a:t>▸  Equalizar CBO = +127,3% renda negra |
-proxy PIB +74,3 p.p. (Hsieh et al., 2019)</a:t>
+              <a:t>▸  Equalizar CBO = +127,3% renda negra
+(proxy agregado: ~74 p.p.; ver nota metodológica)</a:t>
             </a:r>
           </a:p>
         </p:txBody>

--- a/apresentacao_tcc.pptx
+++ b/apresentacao_tcc.pptx
@@ -31,6 +31,7 @@
     <p:sldId id="279" r:id="rId30"/>
     <p:sldId id="280" r:id="rId31"/>
     <p:sldId id="281" r:id="rId32"/>
+    <p:sldId id="282" r:id="rId33"/>
   </p:sldIdLst>
   <p:sldSz cx="12188952" cy="6858000" type="screen4x3"/>
   <p:notesSz cx="6858000" cy="9144000"/>
@@ -4714,7 +4715,7 @@
                 </a:solidFill>
                 <a:latin typeface="Calibri"/>
               </a:rPr>
-              <a:t>10/25</a:t>
+              <a:t>10/26</a:t>
             </a:r>
           </a:p>
         </p:txBody>
@@ -5276,7 +5277,7 @@
                 </a:solidFill>
                 <a:latin typeface="Calibri"/>
               </a:rPr>
-              <a:t>11/25</a:t>
+              <a:t>11/26</a:t>
             </a:r>
           </a:p>
         </p:txBody>
@@ -6457,7 +6458,7 @@
                 </a:solidFill>
                 <a:latin typeface="Calibri"/>
               </a:rPr>
-              <a:t>12/25</a:t>
+              <a:t>12/26</a:t>
             </a:r>
           </a:p>
         </p:txBody>
@@ -7310,7 +7311,7 @@
                 </a:solidFill>
                 <a:latin typeface="Calibri"/>
               </a:rPr>
-              <a:t>13/25</a:t>
+              <a:t>13/26</a:t>
             </a:r>
           </a:p>
         </p:txBody>
@@ -8209,7 +8210,7 @@
                 </a:solidFill>
                 <a:latin typeface="Calibri"/>
               </a:rPr>
-              <a:t>14/25</a:t>
+              <a:t>14/26</a:t>
             </a:r>
           </a:p>
         </p:txBody>
@@ -8999,7 +9000,7 @@
                 </a:solidFill>
                 <a:latin typeface="Calibri"/>
               </a:rPr>
-              <a:t>15/25</a:t>
+              <a:t>15/26</a:t>
             </a:r>
           </a:p>
         </p:txBody>
@@ -10223,7 +10224,7 @@
                 </a:solidFill>
                 <a:latin typeface="Calibri"/>
               </a:rPr>
-              <a:t>16/25</a:t>
+              <a:t>16/26</a:t>
             </a:r>
           </a:p>
         </p:txBody>
@@ -12803,7 +12804,7 @@
                 </a:solidFill>
                 <a:latin typeface="Calibri"/>
               </a:rPr>
-              <a:t>17/25</a:t>
+              <a:t>17/26</a:t>
             </a:r>
           </a:p>
         </p:txBody>
@@ -13330,7 +13331,7 @@
                 </a:solidFill>
                 <a:latin typeface="Calibri"/>
               </a:rPr>
-              <a:t>18/25</a:t>
+              <a:t>18/26</a:t>
             </a:r>
           </a:p>
         </p:txBody>
@@ -14298,7 +14299,7 @@
                 </a:solidFill>
                 <a:latin typeface="Calibri"/>
               </a:rPr>
-              <a:t>19/25</a:t>
+              <a:t>19/26</a:t>
             </a:r>
           </a:p>
         </p:txBody>
@@ -14951,7 +14952,7 @@
                 </a:solidFill>
                 <a:latin typeface="Calibri"/>
               </a:rPr>
-              <a:t>2/25</a:t>
+              <a:t>2/26</a:t>
             </a:r>
           </a:p>
         </p:txBody>
@@ -15919,7 +15920,7 @@
                 </a:solidFill>
                 <a:latin typeface="Calibri"/>
               </a:rPr>
-              <a:t>20/25</a:t>
+              <a:t>20/26</a:t>
             </a:r>
           </a:p>
         </p:txBody>
@@ -16755,7 +16756,7 @@
                 </a:solidFill>
                 <a:latin typeface="Calibri"/>
               </a:rPr>
-              <a:t>21/25</a:t>
+              <a:t>21/26</a:t>
             </a:r>
           </a:p>
         </p:txBody>
@@ -17752,7 +17753,7 @@
                 </a:solidFill>
                 <a:latin typeface="Calibri"/>
               </a:rPr>
-              <a:t>22/25</a:t>
+              <a:t>22/26</a:t>
             </a:r>
           </a:p>
         </p:txBody>
@@ -19027,7 +19028,7 @@
                 </a:solidFill>
                 <a:latin typeface="Calibri"/>
               </a:rPr>
-              <a:t>23/25</a:t>
+              <a:t>23/26</a:t>
             </a:r>
           </a:p>
         </p:txBody>
@@ -19121,7 +19122,7 @@
                 </a:solidFill>
                 <a:latin typeface="Calibri"/>
               </a:rPr>
-              <a:t>23. Implicações de Política</a:t>
+              <a:t>23. Pesquisa Operacional Regionalizada — Focalização Territorial</a:t>
             </a:r>
           </a:p>
         </p:txBody>
@@ -19156,21 +19157,80 @@
                 </a:solidFill>
                 <a:latin typeface="Calibri"/>
               </a:rPr>
-              <a:t>Três eixos simultâneos — ações isoladas são insuficientes para romper a armadilha estrutural</a:t>
-            </a:r>
-          </a:p>
-        </p:txBody>
-      </p:sp>
-      <p:sp>
-        <p:nvSpPr>
-          <p:cNvPr id="5" name="Rectangle 4"/>
+              <a:t>BLUP do random slope por UF → alocação ótima do orçamento | ganho da focalização sobre a alocação uniforme</a:t>
+            </a:r>
+          </a:p>
+        </p:txBody>
+      </p:sp>
+      <p:pic>
+        <p:nvPicPr>
+          <p:cNvPr id="5" name="Picture 4" descr="mapa_po_regional.png"/>
+          <p:cNvPicPr>
+            <a:picLocks noChangeAspect="1"/>
+          </p:cNvPicPr>
+          <p:nvPr/>
+        </p:nvPicPr>
+        <p:blipFill>
+          <a:blip r:embed="rId2"/>
+          <a:stretch>
+            <a:fillRect/>
+          </a:stretch>
+        </p:blipFill>
+        <p:spPr>
+          <a:xfrm>
+            <a:off x="1280160" y="1143000"/>
+            <a:ext cx="4663440" cy="5216026"/>
+          </a:xfrm>
+          <a:prstGeom prst="rect">
+            <a:avLst/>
+          </a:prstGeom>
+        </p:spPr>
+      </p:pic>
+      <p:sp>
+        <p:nvSpPr>
+          <p:cNvPr id="6" name="TextBox 5"/>
+          <p:cNvSpPr txBox="1"/>
+          <p:nvPr/>
+        </p:nvSpPr>
+        <p:spPr>
+          <a:xfrm>
+            <a:off x="7315200" y="1097280"/>
+            <a:ext cx="4663440" cy="365760"/>
+          </a:xfrm>
+          <a:prstGeom prst="rect">
+            <a:avLst/>
+          </a:prstGeom>
+          <a:noFill/>
+        </p:spPr>
+        <p:txBody>
+          <a:bodyPr wrap="square">
+            <a:spAutoFit/>
+          </a:bodyPr>
+          <a:lstStyle/>
+          <a:p>
+            <a:pPr algn="l"/>
+            <a:r>
+              <a:rPr sz="1400" b="1" i="0">
+                <a:solidFill>
+                  <a:srgbClr val="1F3864"/>
+                </a:solidFill>
+                <a:latin typeface="Calibri"/>
+              </a:rPr>
+              <a:t>Focalização territorial (base BLUP)</a:t>
+            </a:r>
+          </a:p>
+        </p:txBody>
+      </p:sp>
+      <p:sp>
+        <p:nvSpPr>
+          <p:cNvPr id="7" name="Rectangle 6"/>
           <p:cNvSpPr/>
           <p:nvPr/>
         </p:nvSpPr>
         <p:spPr>
           <a:xfrm>
-            <a:off x="274320" y="1097280"/>
-            <a:ext cx="3749039" cy="5029200"/>
+            <a:off x="7315200" y="1600200"/>
+            <a:ext cx="4663440" cy="960120"/>
           </a:xfrm>
           <a:prstGeom prst="rect">
             <a:avLst/>
@@ -19178,7 +19238,7 @@
           <a:solidFill>
             <a:srgbClr val="F5F5F5"/>
           </a:solidFill>
-          <a:ln w="19050">
+          <a:ln w="15240">
             <a:solidFill>
               <a:srgbClr val="B71C1C"/>
             </a:solidFill>
@@ -19208,14 +19268,14 @@
       </p:sp>
       <p:sp>
         <p:nvSpPr>
-          <p:cNvPr id="6" name="Rectangle 5"/>
+          <p:cNvPr id="8" name="Rectangle 7"/>
           <p:cNvSpPr/>
           <p:nvPr/>
         </p:nvSpPr>
         <p:spPr>
           <a:xfrm>
-            <a:off x="274320" y="1097280"/>
-            <a:ext cx="3749039" cy="502920"/>
+            <a:off x="7315200" y="1600200"/>
+            <a:ext cx="109728" cy="960120"/>
           </a:xfrm>
           <a:prstGeom prst="rect">
             <a:avLst/>
@@ -19249,14 +19309,14 @@
       </p:sp>
       <p:sp>
         <p:nvSpPr>
-          <p:cNvPr id="7" name="TextBox 6"/>
-          <p:cNvSpPr txBox="1"/>
-          <p:nvPr/>
-        </p:nvSpPr>
-        <p:spPr>
-          <a:xfrm>
-            <a:off x="365760" y="1143000"/>
-            <a:ext cx="3566160" cy="457200"/>
+          <p:cNvPr id="9" name="TextBox 8"/>
+          <p:cNvSpPr txBox="1"/>
+          <p:nvPr/>
+        </p:nvSpPr>
+        <p:spPr>
+          <a:xfrm>
+            <a:off x="7543800" y="1673352"/>
+            <a:ext cx="4343400" cy="548640"/>
           </a:xfrm>
           <a:prstGeom prst="rect">
             <a:avLst/>
@@ -19271,27 +19331,27 @@
           <a:p>
             <a:pPr algn="l"/>
             <a:r>
-              <a:rPr sz="1300" b="1" i="0">
-                <a:solidFill>
-                  <a:srgbClr val="FFFFFF"/>
-                </a:solidFill>
-                <a:latin typeface="Calibri"/>
-              </a:rPr>
-              <a:t>Eixo 1 — Acesso</a:t>
-            </a:r>
-          </a:p>
-        </p:txBody>
-      </p:sp>
-      <p:sp>
-        <p:nvSpPr>
-          <p:cNvPr id="8" name="TextBox 7"/>
-          <p:cNvSpPr txBox="1"/>
-          <p:nvPr/>
-        </p:nvSpPr>
-        <p:spPr>
-          <a:xfrm>
-            <a:off x="457200" y="1691640"/>
-            <a:ext cx="3383280" cy="731520"/>
+              <a:rPr sz="1250" b="1" i="0">
+                <a:solidFill>
+                  <a:srgbClr val="212121"/>
+                </a:solidFill>
+                <a:latin typeface="Calibri"/>
+              </a:rPr>
+              <a:t>Ganho da focalização: B=9 → +68,2%  |  B=3 → +125,5%</a:t>
+            </a:r>
+          </a:p>
+        </p:txBody>
+      </p:sp>
+      <p:sp>
+        <p:nvSpPr>
+          <p:cNvPr id="10" name="TextBox 9"/>
+          <p:cNvSpPr txBox="1"/>
+          <p:nvPr/>
+        </p:nvSpPr>
+        <p:spPr>
+          <a:xfrm>
+            <a:off x="7543800" y="2167128"/>
+            <a:ext cx="4343400" cy="347472"/>
           </a:xfrm>
           <a:prstGeom prst="rect">
             <a:avLst/>
@@ -19306,86 +19366,13 @@
           <a:p>
             <a:pPr algn="l"/>
             <a:r>
-              <a:rPr sz="1200" b="0" i="0">
-                <a:solidFill>
-                  <a:srgbClr val="212121"/>
-                </a:solidFill>
-                <a:latin typeface="Calibri"/>
-              </a:rPr>
-              <a:t>▸  Cotas de acesso CBO Dirigente/Profissional:
-meta IR ≥ 0,80 até 2030</a:t>
-            </a:r>
-          </a:p>
-        </p:txBody>
-      </p:sp>
-      <p:sp>
-        <p:nvSpPr>
-          <p:cNvPr id="9" name="TextBox 8"/>
-          <p:cNvSpPr txBox="1"/>
-          <p:nvPr/>
-        </p:nvSpPr>
-        <p:spPr>
-          <a:xfrm>
-            <a:off x="457200" y="2468880"/>
-            <a:ext cx="3383280" cy="731520"/>
-          </a:xfrm>
-          <a:prstGeom prst="rect">
-            <a:avLst/>
-          </a:prstGeom>
-          <a:noFill/>
-        </p:spPr>
-        <p:txBody>
-          <a:bodyPr wrap="square">
-            <a:spAutoFit/>
-          </a:bodyPr>
-          <a:lstStyle/>
-          <a:p>
-            <a:pPr algn="l"/>
-            <a:r>
-              <a:rPr sz="1200" b="0" i="0">
-                <a:solidFill>
-                  <a:srgbClr val="212121"/>
-                </a:solidFill>
-                <a:latin typeface="Calibri"/>
-              </a:rPr>
-              <a:t>▸  PRONATEC c/ recorte racial e subsídio de
-transporte para trabalhadores de UPAs pobres</a:t>
-            </a:r>
-          </a:p>
-        </p:txBody>
-      </p:sp>
-      <p:sp>
-        <p:nvSpPr>
-          <p:cNvPr id="10" name="TextBox 9"/>
-          <p:cNvSpPr txBox="1"/>
-          <p:nvPr/>
-        </p:nvSpPr>
-        <p:spPr>
-          <a:xfrm>
-            <a:off x="457200" y="3246120"/>
-            <a:ext cx="3383280" cy="731520"/>
-          </a:xfrm>
-          <a:prstGeom prst="rect">
-            <a:avLst/>
-          </a:prstGeom>
-          <a:noFill/>
-        </p:spPr>
-        <p:txBody>
-          <a:bodyPr wrap="square">
-            <a:spAutoFit/>
-          </a:bodyPr>
-          <a:lstStyle/>
-          <a:p>
-            <a:pPr algn="l"/>
-            <a:r>
-              <a:rPr sz="1200" b="0" i="0">
-                <a:solidFill>
-                  <a:srgbClr val="212121"/>
-                </a:solidFill>
-                <a:latin typeface="Calibri"/>
-              </a:rPr>
-              <a:t>▸  Bolsas de residência profissional em empresas
-de alta remuneração para egressos negros</a:t>
+              <a:rPr sz="1050" b="0" i="0">
+                <a:solidFill>
+                  <a:srgbClr val="1F3864"/>
+                </a:solidFill>
+                <a:latin typeface="Calibri"/>
+              </a:rPr>
+              <a:t>vs. alocação uniforme entre as 27 UFs</a:t>
             </a:r>
           </a:p>
         </p:txBody>
@@ -19398,8 +19385,8 @@
         </p:nvSpPr>
         <p:spPr>
           <a:xfrm>
-            <a:off x="4251959" y="1097280"/>
-            <a:ext cx="3749039" cy="5029200"/>
+            <a:off x="7315200" y="2679192"/>
+            <a:ext cx="4663440" cy="960120"/>
           </a:xfrm>
           <a:prstGeom prst="rect">
             <a:avLst/>
@@ -19407,7 +19394,7 @@
           <a:solidFill>
             <a:srgbClr val="F5F5F5"/>
           </a:solidFill>
-          <a:ln w="19050">
+          <a:ln w="15240">
             <a:solidFill>
               <a:srgbClr val="1565C0"/>
             </a:solidFill>
@@ -19443,8 +19430,8 @@
         </p:nvSpPr>
         <p:spPr>
           <a:xfrm>
-            <a:off x="4251959" y="1097280"/>
-            <a:ext cx="3749039" cy="502920"/>
+            <a:off x="7315200" y="2679192"/>
+            <a:ext cx="109728" cy="960120"/>
           </a:xfrm>
           <a:prstGeom prst="rect">
             <a:avLst/>
@@ -19484,8 +19471,8 @@
         </p:nvSpPr>
         <p:spPr>
           <a:xfrm>
-            <a:off x="4343399" y="1143000"/>
-            <a:ext cx="3566160" cy="457200"/>
+            <a:off x="7543800" y="2752344"/>
+            <a:ext cx="4343400" cy="548640"/>
           </a:xfrm>
           <a:prstGeom prst="rect">
             <a:avLst/>
@@ -19500,13 +19487,13 @@
           <a:p>
             <a:pPr algn="l"/>
             <a:r>
-              <a:rPr sz="1300" b="1" i="0">
-                <a:solidFill>
-                  <a:srgbClr val="FFFFFF"/>
-                </a:solidFill>
-                <a:latin typeface="Calibri"/>
-              </a:rPr>
-              <a:t>Eixo 2 — Remuneração</a:t>
+              <a:rPr sz="1250" b="1" i="0">
+                <a:solidFill>
+                  <a:srgbClr val="212121"/>
+                </a:solidFill>
+                <a:latin typeface="Calibri"/>
+              </a:rPr>
+              <a:t>UFs prioritárias: DF, AM, TO, PA, AC</a:t>
             </a:r>
           </a:p>
         </p:txBody>
@@ -19519,8 +19506,8 @@
         </p:nvSpPr>
         <p:spPr>
           <a:xfrm>
-            <a:off x="4434839" y="1691640"/>
-            <a:ext cx="3383280" cy="731520"/>
+            <a:off x="7543800" y="3246120"/>
+            <a:ext cx="4343400" cy="347472"/>
           </a:xfrm>
           <a:prstGeom prst="rect">
             <a:avLst/>
@@ -19535,100 +19522,27 @@
           <a:p>
             <a:pPr algn="l"/>
             <a:r>
-              <a:rPr sz="1200" b="0" i="0">
-                <a:solidFill>
-                  <a:srgbClr val="212121"/>
-                </a:solidFill>
-                <a:latin typeface="Calibri"/>
-              </a:rPr>
-              <a:t>▸  Transparência salarial por raça/gênero
-obrigatória (empresas &gt; 100 funcionários)</a:t>
-            </a:r>
-          </a:p>
-        </p:txBody>
-      </p:sp>
-      <p:sp>
-        <p:nvSpPr>
-          <p:cNvPr id="15" name="TextBox 14"/>
-          <p:cNvSpPr txBox="1"/>
-          <p:nvPr/>
-        </p:nvSpPr>
-        <p:spPr>
-          <a:xfrm>
-            <a:off x="4434839" y="2468880"/>
-            <a:ext cx="3383280" cy="731520"/>
-          </a:xfrm>
-          <a:prstGeom prst="rect">
-            <a:avLst/>
-          </a:prstGeom>
-          <a:noFill/>
-        </p:spPr>
-        <p:txBody>
-          <a:bodyPr wrap="square">
-            <a:spAutoFit/>
-          </a:bodyPr>
-          <a:lstStyle/>
-          <a:p>
-            <a:pPr algn="l"/>
-            <a:r>
-              <a:rPr sz="1200" b="0" i="0">
-                <a:solidFill>
-                  <a:srgbClr val="212121"/>
-                </a:solidFill>
-                <a:latin typeface="Calibri"/>
-              </a:rPr>
-              <a:t>▸  Auditoria de igual pagamento por trabalho igual
-com penalidades progressivas (gap HLM M4)</a:t>
-            </a:r>
-          </a:p>
-        </p:txBody>
-      </p:sp>
-      <p:sp>
-        <p:nvSpPr>
-          <p:cNvPr id="16" name="TextBox 15"/>
-          <p:cNvSpPr txBox="1"/>
-          <p:nvPr/>
-        </p:nvSpPr>
-        <p:spPr>
-          <a:xfrm>
-            <a:off x="4434839" y="3246120"/>
-            <a:ext cx="3383280" cy="731520"/>
-          </a:xfrm>
-          <a:prstGeom prst="rect">
-            <a:avLst/>
-          </a:prstGeom>
-          <a:noFill/>
-        </p:spPr>
-        <p:txBody>
-          <a:bodyPr wrap="square">
-            <a:spAutoFit/>
-          </a:bodyPr>
-          <a:lstStyle/>
-          <a:p>
-            <a:pPr algn="l"/>
-            <a:r>
-              <a:rPr sz="1200" b="0" i="0">
-                <a:solidFill>
-                  <a:srgbClr val="212121"/>
-                </a:solidFill>
-                <a:latin typeface="Calibri"/>
-              </a:rPr>
-              <a:t>▸  Piso salarial indexado nas categorias com
-maior gap racial residual (6,2% HLM M4)</a:t>
-            </a:r>
-          </a:p>
-        </p:txBody>
-      </p:sp>
-      <p:sp>
-        <p:nvSpPr>
-          <p:cNvPr id="17" name="Rectangle 16"/>
+              <a:rPr sz="1050" b="0" i="0">
+                <a:solidFill>
+                  <a:srgbClr val="1F3864"/>
+                </a:solidFill>
+                <a:latin typeface="Calibri"/>
+              </a:rPr>
+              <a:t>maior penalidade × maior população negra afetada</a:t>
+            </a:r>
+          </a:p>
+        </p:txBody>
+      </p:sp>
+      <p:sp>
+        <p:nvSpPr>
+          <p:cNvPr id="15" name="Rectangle 14"/>
           <p:cNvSpPr/>
           <p:nvPr/>
         </p:nvSpPr>
         <p:spPr>
           <a:xfrm>
-            <a:off x="8229598" y="1097280"/>
-            <a:ext cx="3749039" cy="5029200"/>
+            <a:off x="7315200" y="3758184"/>
+            <a:ext cx="4663440" cy="960120"/>
           </a:xfrm>
           <a:prstGeom prst="rect">
             <a:avLst/>
@@ -19636,7 +19550,7 @@
           <a:solidFill>
             <a:srgbClr val="F5F5F5"/>
           </a:solidFill>
-          <a:ln w="19050">
+          <a:ln w="15240">
             <a:solidFill>
               <a:srgbClr val="2E7D32"/>
             </a:solidFill>
@@ -19666,14 +19580,14 @@
       </p:sp>
       <p:sp>
         <p:nvSpPr>
-          <p:cNvPr id="18" name="Rectangle 17"/>
+          <p:cNvPr id="16" name="Rectangle 15"/>
           <p:cNvSpPr/>
           <p:nvPr/>
         </p:nvSpPr>
         <p:spPr>
           <a:xfrm>
-            <a:off x="8229598" y="1097280"/>
-            <a:ext cx="3749039" cy="502920"/>
+            <a:off x="7315200" y="3758184"/>
+            <a:ext cx="109728" cy="960120"/>
           </a:xfrm>
           <a:prstGeom prst="rect">
             <a:avLst/>
@@ -19707,14 +19621,14 @@
       </p:sp>
       <p:sp>
         <p:nvSpPr>
-          <p:cNvPr id="19" name="TextBox 18"/>
-          <p:cNvSpPr txBox="1"/>
-          <p:nvPr/>
-        </p:nvSpPr>
-        <p:spPr>
-          <a:xfrm>
-            <a:off x="8321038" y="1143000"/>
-            <a:ext cx="3566160" cy="457200"/>
+          <p:cNvPr id="17" name="TextBox 16"/>
+          <p:cNvSpPr txBox="1"/>
+          <p:nvPr/>
+        </p:nvSpPr>
+        <p:spPr>
+          <a:xfrm>
+            <a:off x="7543800" y="3831336"/>
+            <a:ext cx="4343400" cy="548640"/>
           </a:xfrm>
           <a:prstGeom prst="rect">
             <a:avLst/>
@@ -19729,27 +19643,27 @@
           <a:p>
             <a:pPr algn="l"/>
             <a:r>
-              <a:rPr sz="1300" b="1" i="0">
-                <a:solidFill>
-                  <a:srgbClr val="FFFFFF"/>
-                </a:solidFill>
-                <a:latin typeface="Calibri"/>
-              </a:rPr>
-              <a:t>Eixo 3 — Inclusão Produtiva</a:t>
-            </a:r>
-          </a:p>
-        </p:txBody>
-      </p:sp>
-      <p:sp>
-        <p:nvSpPr>
-          <p:cNvPr id="20" name="TextBox 19"/>
-          <p:cNvSpPr txBox="1"/>
-          <p:nvPr/>
-        </p:nvSpPr>
-        <p:spPr>
-          <a:xfrm>
-            <a:off x="8412478" y="1691640"/>
-            <a:ext cx="3383280" cy="731520"/>
+              <a:rPr sz="1250" b="1" i="0">
+                <a:solidFill>
+                  <a:srgbClr val="212121"/>
+                </a:solidFill>
+                <a:latin typeface="Calibri"/>
+              </a:rPr>
+              <a:t>Amplitude: DF −20,9%  →  MG −1,4%</a:t>
+            </a:r>
+          </a:p>
+        </p:txBody>
+      </p:sp>
+      <p:sp>
+        <p:nvSpPr>
+          <p:cNvPr id="18" name="TextBox 17"/>
+          <p:cNvSpPr txBox="1"/>
+          <p:nvPr/>
+        </p:nvSpPr>
+        <p:spPr>
+          <a:xfrm>
+            <a:off x="7543800" y="4325112"/>
+            <a:ext cx="4343400" cy="347472"/>
           </a:xfrm>
           <a:prstGeom prst="rect">
             <a:avLst/>
@@ -19764,143 +19678,39 @@
           <a:p>
             <a:pPr algn="l"/>
             <a:r>
-              <a:rPr sz="1200" b="0" i="0">
-                <a:solidFill>
-                  <a:srgbClr val="212121"/>
-                </a:solidFill>
-                <a:latin typeface="Calibri"/>
-              </a:rPr>
-              <a:t>▸  Mentoria estruturada para elevar betweenness
-de negros nas redes profissionais (SNA: =0)</a:t>
-            </a:r>
-          </a:p>
-        </p:txBody>
-      </p:sp>
-      <p:sp>
-        <p:nvSpPr>
-          <p:cNvPr id="21" name="TextBox 20"/>
-          <p:cNvSpPr txBox="1"/>
-          <p:nvPr/>
-        </p:nvSpPr>
-        <p:spPr>
-          <a:xfrm>
-            <a:off x="8412478" y="2468880"/>
-            <a:ext cx="3383280" cy="731520"/>
-          </a:xfrm>
-          <a:prstGeom prst="rect">
-            <a:avLst/>
-          </a:prstGeom>
-          <a:noFill/>
-        </p:spPr>
-        <p:txBody>
-          <a:bodyPr wrap="square">
-            <a:spAutoFit/>
-          </a:bodyPr>
-          <a:lstStyle/>
-          <a:p>
-            <a:pPr algn="l"/>
-            <a:r>
-              <a:rPr sz="1200" b="0" i="0">
-                <a:solidFill>
-                  <a:srgbClr val="212121"/>
-                </a:solidFill>
-                <a:latin typeface="Calibri"/>
-              </a:rPr>
-              <a:t>▸  30% dos cargos DAS e liderança corporativa
-para negros até 2030 (inclusão nas redes)</a:t>
-            </a:r>
-          </a:p>
-        </p:txBody>
-      </p:sp>
-      <p:sp>
-        <p:nvSpPr>
-          <p:cNvPr id="22" name="TextBox 21"/>
-          <p:cNvSpPr txBox="1"/>
-          <p:nvPr/>
-        </p:nvSpPr>
-        <p:spPr>
-          <a:xfrm>
-            <a:off x="8412478" y="3246120"/>
-            <a:ext cx="3383280" cy="731520"/>
-          </a:xfrm>
-          <a:prstGeom prst="rect">
-            <a:avLst/>
-          </a:prstGeom>
-          <a:noFill/>
-        </p:spPr>
-        <p:txBody>
-          <a:bodyPr wrap="square">
-            <a:spAutoFit/>
-          </a:bodyPr>
-          <a:lstStyle/>
-          <a:p>
-            <a:pPr algn="l"/>
-            <a:r>
-              <a:rPr sz="1200" b="0" i="0">
-                <a:solidFill>
-                  <a:srgbClr val="212121"/>
-                </a:solidFill>
-                <a:latin typeface="Calibri"/>
-              </a:rPr>
-              <a:t>▸  Equalizar CBO = +127,3% renda negra
-(proxy agregado: ~74 p.p.; ver nota metodológica)</a:t>
-            </a:r>
-          </a:p>
-        </p:txBody>
-      </p:sp>
-      <p:sp>
-        <p:nvSpPr>
-          <p:cNvPr id="23" name="TextBox 22"/>
-          <p:cNvSpPr txBox="1"/>
-          <p:nvPr/>
-        </p:nvSpPr>
-        <p:spPr>
-          <a:xfrm>
-            <a:off x="274320" y="6217920"/>
-            <a:ext cx="11612880" cy="411480"/>
-          </a:xfrm>
-          <a:prstGeom prst="rect">
-            <a:avLst/>
-          </a:prstGeom>
-          <a:noFill/>
-        </p:spPr>
-        <p:txBody>
-          <a:bodyPr wrap="square">
-            <a:spAutoFit/>
-          </a:bodyPr>
-          <a:lstStyle/>
-          <a:p>
-            <a:pPr algn="ctr"/>
-            <a:r>
-              <a:rPr sz="1300" b="1" i="0">
-                <a:solidFill>
-                  <a:srgbClr val="B71C1C"/>
-                </a:solidFill>
-                <a:latin typeface="Calibri"/>
-              </a:rPr>
-              <a:t>⚠  Ao ritmo atual de convergência (~0,02 log-pontos/ano), eliminar o gap levaria mais de 100 anos.</a:t>
-            </a:r>
-          </a:p>
-        </p:txBody>
-      </p:sp>
-      <p:sp>
-        <p:nvSpPr>
-          <p:cNvPr id="24" name="Rectangle 23"/>
+              <a:rPr sz="1050" b="0" i="0">
+                <a:solidFill>
+                  <a:srgbClr val="1F3864"/>
+                </a:solidFill>
+                <a:latin typeface="Calibri"/>
+              </a:rPr>
+              <a:t>penalidade racial por UF (BLUP do MixedLM)</a:t>
+            </a:r>
+          </a:p>
+        </p:txBody>
+      </p:sp>
+      <p:sp>
+        <p:nvSpPr>
+          <p:cNvPr id="19" name="Rectangle 18"/>
           <p:cNvSpPr/>
           <p:nvPr/>
         </p:nvSpPr>
         <p:spPr>
           <a:xfrm>
-            <a:off x="0" y="6601968"/>
-            <a:ext cx="12188952" cy="256032"/>
+            <a:off x="7315200" y="4837176"/>
+            <a:ext cx="4663440" cy="960120"/>
           </a:xfrm>
           <a:prstGeom prst="rect">
             <a:avLst/>
           </a:prstGeom>
           <a:solidFill>
-            <a:srgbClr val="1F3864"/>
+            <a:srgbClr val="F5F5F5"/>
           </a:solidFill>
-          <a:ln/>
+          <a:ln w="15240">
+            <a:solidFill>
+              <a:srgbClr val="FF8F00"/>
+            </a:solidFill>
+          </a:ln>
         </p:spPr>
         <p:style>
           <a:lnRef idx="1">
@@ -19926,7 +19736,235 @@
       </p:sp>
       <p:sp>
         <p:nvSpPr>
-          <p:cNvPr id="25" name="TextBox 24"/>
+          <p:cNvPr id="20" name="Rectangle 19"/>
+          <p:cNvSpPr/>
+          <p:nvPr/>
+        </p:nvSpPr>
+        <p:spPr>
+          <a:xfrm>
+            <a:off x="7315200" y="4837176"/>
+            <a:ext cx="109728" cy="960120"/>
+          </a:xfrm>
+          <a:prstGeom prst="rect">
+            <a:avLst/>
+          </a:prstGeom>
+          <a:solidFill>
+            <a:srgbClr val="FF8F00"/>
+          </a:solidFill>
+          <a:ln/>
+        </p:spPr>
+        <p:style>
+          <a:lnRef idx="1">
+            <a:schemeClr val="accent1"/>
+          </a:lnRef>
+          <a:fillRef idx="3">
+            <a:schemeClr val="accent1"/>
+          </a:fillRef>
+          <a:effectRef idx="2">
+            <a:schemeClr val="accent1"/>
+          </a:effectRef>
+          <a:fontRef idx="minor">
+            <a:schemeClr val="lt1"/>
+          </a:fontRef>
+        </p:style>
+        <p:txBody>
+          <a:bodyPr rtlCol="0" anchor="ctr"/>
+          <a:lstStyle/>
+          <a:p>
+            <a:pPr algn="ctr"/>
+          </a:p>
+        </p:txBody>
+      </p:sp>
+      <p:sp>
+        <p:nvSpPr>
+          <p:cNvPr id="21" name="TextBox 20"/>
+          <p:cNvSpPr txBox="1"/>
+          <p:nvPr/>
+        </p:nvSpPr>
+        <p:spPr>
+          <a:xfrm>
+            <a:off x="7543800" y="4910328"/>
+            <a:ext cx="4343400" cy="548640"/>
+          </a:xfrm>
+          <a:prstGeom prst="rect">
+            <a:avLst/>
+          </a:prstGeom>
+          <a:noFill/>
+        </p:spPr>
+        <p:txBody>
+          <a:bodyPr wrap="square">
+            <a:spAutoFit/>
+          </a:bodyPr>
+          <a:lstStyle/>
+          <a:p>
+            <a:pPr algn="l"/>
+            <a:r>
+              <a:rPr sz="1250" b="1" i="0">
+                <a:solidFill>
+                  <a:srgbClr val="212121"/>
+                </a:solidFill>
+                <a:latin typeface="Calibri"/>
+              </a:rPr>
+              <a:t>Base oficial: BLUP ≠ OLS+EB (Spearman ρ=0,42)</a:t>
+            </a:r>
+          </a:p>
+        </p:txBody>
+      </p:sp>
+      <p:sp>
+        <p:nvSpPr>
+          <p:cNvPr id="22" name="TextBox 21"/>
+          <p:cNvSpPr txBox="1"/>
+          <p:nvPr/>
+        </p:nvSpPr>
+        <p:spPr>
+          <a:xfrm>
+            <a:off x="7543800" y="5404104"/>
+            <a:ext cx="4343400" cy="347472"/>
+          </a:xfrm>
+          <a:prstGeom prst="rect">
+            <a:avLst/>
+          </a:prstGeom>
+          <a:noFill/>
+        </p:spPr>
+        <p:txBody>
+          <a:bodyPr wrap="square">
+            <a:spAutoFit/>
+          </a:bodyPr>
+          <a:lstStyle/>
+          <a:p>
+            <a:pPr algn="l"/>
+            <a:r>
+              <a:rPr sz="1050" b="0" i="0">
+                <a:solidFill>
+                  <a:srgbClr val="1F3864"/>
+                </a:solidFill>
+                <a:latin typeface="Calibri"/>
+              </a:rPr>
+              <a:t>modelo misto completo, não a aproximação rápida</a:t>
+            </a:r>
+          </a:p>
+        </p:txBody>
+      </p:sp>
+      <p:sp>
+        <p:nvSpPr>
+          <p:cNvPr id="23" name="Rectangle 22"/>
+          <p:cNvSpPr/>
+          <p:nvPr/>
+        </p:nvSpPr>
+        <p:spPr>
+          <a:xfrm>
+            <a:off x="274320" y="6035040"/>
+            <a:ext cx="11612880" cy="594360"/>
+          </a:xfrm>
+          <a:prstGeom prst="rect">
+            <a:avLst/>
+          </a:prstGeom>
+          <a:solidFill>
+            <a:srgbClr val="1F3864"/>
+          </a:solidFill>
+          <a:ln/>
+        </p:spPr>
+        <p:style>
+          <a:lnRef idx="1">
+            <a:schemeClr val="accent1"/>
+          </a:lnRef>
+          <a:fillRef idx="3">
+            <a:schemeClr val="accent1"/>
+          </a:fillRef>
+          <a:effectRef idx="2">
+            <a:schemeClr val="accent1"/>
+          </a:effectRef>
+          <a:fontRef idx="minor">
+            <a:schemeClr val="lt1"/>
+          </a:fontRef>
+        </p:style>
+        <p:txBody>
+          <a:bodyPr rtlCol="0" anchor="ctr"/>
+          <a:lstStyle/>
+          <a:p>
+            <a:pPr algn="ctr"/>
+          </a:p>
+        </p:txBody>
+      </p:sp>
+      <p:sp>
+        <p:nvSpPr>
+          <p:cNvPr id="24" name="TextBox 23"/>
+          <p:cNvSpPr txBox="1"/>
+          <p:nvPr/>
+        </p:nvSpPr>
+        <p:spPr>
+          <a:xfrm>
+            <a:off x="457200" y="6080760"/>
+            <a:ext cx="11247120" cy="502920"/>
+          </a:xfrm>
+          <a:prstGeom prst="rect">
+            <a:avLst/>
+          </a:prstGeom>
+          <a:noFill/>
+        </p:spPr>
+        <p:txBody>
+          <a:bodyPr wrap="square">
+            <a:spAutoFit/>
+          </a:bodyPr>
+          <a:lstStyle/>
+          <a:p>
+            <a:pPr algn="ctr"/>
+            <a:r>
+              <a:rPr sz="1200" b="1" i="0">
+                <a:solidFill>
+                  <a:srgbClr val="FFFFFF"/>
+                </a:solidFill>
+                <a:latin typeface="Calibri"/>
+              </a:rPr>
+              <a:t>O random slope (LRT p&lt;0,001) prova que a penalidade racial é geograficamente heterogênea → política federativa diferenciada supera a uniforme em até +125,5% com orçamento escasso.</a:t>
+            </a:r>
+          </a:p>
+        </p:txBody>
+      </p:sp>
+      <p:sp>
+        <p:nvSpPr>
+          <p:cNvPr id="25" name="Rectangle 24"/>
+          <p:cNvSpPr/>
+          <p:nvPr/>
+        </p:nvSpPr>
+        <p:spPr>
+          <a:xfrm>
+            <a:off x="0" y="6601968"/>
+            <a:ext cx="12188952" cy="256032"/>
+          </a:xfrm>
+          <a:prstGeom prst="rect">
+            <a:avLst/>
+          </a:prstGeom>
+          <a:solidFill>
+            <a:srgbClr val="1F3864"/>
+          </a:solidFill>
+          <a:ln/>
+        </p:spPr>
+        <p:style>
+          <a:lnRef idx="1">
+            <a:schemeClr val="accent1"/>
+          </a:lnRef>
+          <a:fillRef idx="3">
+            <a:schemeClr val="accent1"/>
+          </a:fillRef>
+          <a:effectRef idx="2">
+            <a:schemeClr val="accent1"/>
+          </a:effectRef>
+          <a:fontRef idx="minor">
+            <a:schemeClr val="lt1"/>
+          </a:fontRef>
+        </p:style>
+        <p:txBody>
+          <a:bodyPr rtlCol="0" anchor="ctr"/>
+          <a:lstStyle/>
+          <a:p>
+            <a:pPr algn="ctr"/>
+          </a:p>
+        </p:txBody>
+      </p:sp>
+      <p:sp>
+        <p:nvSpPr>
+          <p:cNvPr id="26" name="TextBox 25"/>
           <p:cNvSpPr txBox="1"/>
           <p:nvPr/>
         </p:nvSpPr>
@@ -19961,7 +19999,7 @@
       </p:sp>
       <p:sp>
         <p:nvSpPr>
-          <p:cNvPr id="26" name="TextBox 25"/>
+          <p:cNvPr id="27" name="TextBox 26"/>
           <p:cNvSpPr txBox="1"/>
           <p:nvPr/>
         </p:nvSpPr>
@@ -19989,7 +20027,7 @@
                 </a:solidFill>
                 <a:latin typeface="Calibri"/>
               </a:rPr>
-              <a:t>24/25</a:t>
+              <a:t>24/26</a:t>
             </a:r>
           </a:p>
         </p:txBody>
@@ -20083,7 +20121,7 @@
                 </a:solidFill>
                 <a:latin typeface="Calibri"/>
               </a:rPr>
-              <a:t>24. Limitações e Agenda Futura</a:t>
+              <a:t>24. Implicações de Política</a:t>
             </a:r>
           </a:p>
         </p:txBody>
@@ -20118,370 +20156,33 @@
                 </a:solidFill>
                 <a:latin typeface="Calibri"/>
               </a:rPr>
-              <a:t>Honestidade acadêmica: o que este trabalho não faz e por quê</a:t>
-            </a:r>
-          </a:p>
-        </p:txBody>
-      </p:sp>
-      <p:sp>
-        <p:nvSpPr>
-          <p:cNvPr id="5" name="TextBox 4"/>
-          <p:cNvSpPr txBox="1"/>
-          <p:nvPr/>
-        </p:nvSpPr>
-        <p:spPr>
-          <a:xfrm>
-            <a:off x="365760" y="1143000"/>
-            <a:ext cx="5486400" cy="365760"/>
-          </a:xfrm>
-          <a:prstGeom prst="rect">
-            <a:avLst/>
-          </a:prstGeom>
-          <a:noFill/>
-        </p:spPr>
-        <p:txBody>
-          <a:bodyPr wrap="square">
-            <a:spAutoFit/>
-          </a:bodyPr>
-          <a:lstStyle/>
-          <a:p>
-            <a:pPr algn="l"/>
-            <a:r>
-              <a:rPr sz="1600" b="1" i="0">
-                <a:solidFill>
-                  <a:srgbClr val="B71C1C"/>
-                </a:solidFill>
-                <a:latin typeface="Calibri"/>
-              </a:rPr>
-              <a:t>Limitações</a:t>
-            </a:r>
-          </a:p>
-        </p:txBody>
-      </p:sp>
-      <p:sp>
-        <p:nvSpPr>
-          <p:cNvPr id="6" name="TextBox 5"/>
-          <p:cNvSpPr txBox="1"/>
-          <p:nvPr/>
-        </p:nvSpPr>
-        <p:spPr>
-          <a:xfrm>
-            <a:off x="365760" y="1600200"/>
-            <a:ext cx="5669280" cy="3474720"/>
-          </a:xfrm>
-          <a:prstGeom prst="rect">
-            <a:avLst/>
-          </a:prstGeom>
-          <a:noFill/>
-        </p:spPr>
-        <p:txBody>
-          <a:bodyPr wrap="square">
-            <a:spAutoFit/>
-          </a:bodyPr>
-          <a:lstStyle/>
-          <a:p>
-            <a:pPr>
-              <a:spcAft>
-                <a:spcPts val="400"/>
-              </a:spcAft>
-            </a:pPr>
-            <a:r>
-              <a:rPr sz="1300" b="1">
-                <a:solidFill>
-                  <a:srgbClr val="B71C1C"/>
-                </a:solidFill>
-                <a:latin typeface="Calibri"/>
-              </a:rPr>
-              <a:t>▸  </a:t>
-            </a:r>
-            <a:r>
-              <a:rPr sz="1300">
-                <a:solidFill>
-                  <a:srgbClr val="212121"/>
-                </a:solidFill>
-                <a:latin typeface="Calibri"/>
-              </a:rPr>
-              <a:t>PNAD não permite experimentos causais — coeficientes são associações condicionais, não efeitos causais no sentido de Rubin/Pearl</a:t>
-            </a:r>
-          </a:p>
-          <a:p>
-            <a:pPr>
-              <a:spcAft>
-                <a:spcPts val="400"/>
-              </a:spcAft>
-            </a:pPr>
-            <a:r>
-              <a:rPr sz="1300" b="1">
-                <a:solidFill>
-                  <a:srgbClr val="B71C1C"/>
-                </a:solidFill>
-                <a:latin typeface="Calibri"/>
-              </a:rPr>
-              <a:t>▸  </a:t>
-            </a:r>
-            <a:r>
-              <a:rPr sz="1300">
-                <a:solidFill>
-                  <a:srgbClr val="212121"/>
-                </a:solidFill>
-                <a:latin typeface="Calibri"/>
-              </a:rPr>
-              <a:t>UPA como proxy de bairro: unidade de amostragem ≠ bairro administrativo</a:t>
-            </a:r>
-          </a:p>
-          <a:p>
-            <a:pPr>
-              <a:spcAft>
-                <a:spcPts val="400"/>
-              </a:spcAft>
-            </a:pPr>
-            <a:r>
-              <a:rPr sz="1300" b="1">
-                <a:solidFill>
-                  <a:srgbClr val="B71C1C"/>
-                </a:solidFill>
-                <a:latin typeface="Calibri"/>
-              </a:rPr>
-              <a:t>▸  </a:t>
-            </a:r>
-            <a:r>
-              <a:rPr sz="1300">
-                <a:solidFill>
-                  <a:srgbClr val="212121"/>
-                </a:solidFill>
-                <a:latin typeface="Calibri"/>
-              </a:rPr>
-              <a:t>GLMM estimado na PEA completa via lme4::glmer (nAGQ=0, bobyqa, n=7,7M, 40,9k UPAs) — M3 com inclinação aleatória de negro não estimado por custo computacional</a:t>
-            </a:r>
-          </a:p>
-          <a:p>
-            <a:pPr>
-              <a:spcAft>
-                <a:spcPts val="400"/>
-              </a:spcAft>
-            </a:pPr>
-            <a:r>
-              <a:rPr sz="1300" b="1">
-                <a:solidFill>
-                  <a:srgbClr val="B71C1C"/>
-                </a:solidFill>
-                <a:latin typeface="Calibri"/>
-              </a:rPr>
-              <a:t>▸  </a:t>
-            </a:r>
-            <a:r>
-              <a:rPr sz="1300">
-                <a:solidFill>
-                  <a:srgbClr val="212121"/>
-                </a:solidFill>
-                <a:latin typeface="Calibri"/>
-              </a:rPr>
-              <a:t>CBO auto-declarado pode ter viés de classificação por raça (deflation de ocupação)</a:t>
-            </a:r>
-          </a:p>
-        </p:txBody>
-      </p:sp>
-      <p:sp>
-        <p:nvSpPr>
-          <p:cNvPr id="7" name="TextBox 6"/>
-          <p:cNvSpPr txBox="1"/>
-          <p:nvPr/>
-        </p:nvSpPr>
-        <p:spPr>
-          <a:xfrm>
-            <a:off x="6400800" y="1143000"/>
-            <a:ext cx="5486400" cy="365760"/>
-          </a:xfrm>
-          <a:prstGeom prst="rect">
-            <a:avLst/>
-          </a:prstGeom>
-          <a:noFill/>
-        </p:spPr>
-        <p:txBody>
-          <a:bodyPr wrap="square">
-            <a:spAutoFit/>
-          </a:bodyPr>
-          <a:lstStyle/>
-          <a:p>
-            <a:pPr algn="l"/>
-            <a:r>
-              <a:rPr sz="1600" b="1" i="0">
-                <a:solidFill>
-                  <a:srgbClr val="1565C0"/>
-                </a:solidFill>
-                <a:latin typeface="Calibri"/>
-              </a:rPr>
-              <a:t>Agenda Futura</a:t>
-            </a:r>
-          </a:p>
-        </p:txBody>
-      </p:sp>
-      <p:sp>
-        <p:nvSpPr>
-          <p:cNvPr id="8" name="TextBox 7"/>
-          <p:cNvSpPr txBox="1"/>
-          <p:nvPr/>
-        </p:nvSpPr>
-        <p:spPr>
-          <a:xfrm>
-            <a:off x="6400800" y="1600200"/>
-            <a:ext cx="5669280" cy="3474720"/>
-          </a:xfrm>
-          <a:prstGeom prst="rect">
-            <a:avLst/>
-          </a:prstGeom>
-          <a:noFill/>
-        </p:spPr>
-        <p:txBody>
-          <a:bodyPr wrap="square">
-            <a:spAutoFit/>
-          </a:bodyPr>
-          <a:lstStyle/>
-          <a:p>
-            <a:pPr>
-              <a:spcAft>
-                <a:spcPts val="400"/>
-              </a:spcAft>
-            </a:pPr>
-            <a:r>
-              <a:rPr sz="1300" b="1">
-                <a:solidFill>
-                  <a:srgbClr val="1565C0"/>
-                </a:solidFill>
-                <a:latin typeface="Calibri"/>
-              </a:rPr>
-              <a:t>▸  </a:t>
-            </a:r>
-            <a:r>
-              <a:rPr sz="1300">
-                <a:solidFill>
-                  <a:srgbClr val="212121"/>
-                </a:solidFill>
-                <a:latin typeface="Calibri"/>
-              </a:rPr>
-              <a:t>Análise de variáveis instrumentais (IV) para identificação causal — distância à escola técnica como instrumento</a:t>
-            </a:r>
-          </a:p>
-          <a:p>
-            <a:pPr>
-              <a:spcAft>
-                <a:spcPts val="400"/>
-              </a:spcAft>
-            </a:pPr>
-            <a:r>
-              <a:rPr sz="1300" b="1">
-                <a:solidFill>
-                  <a:srgbClr val="1565C0"/>
-                </a:solidFill>
-                <a:latin typeface="Calibri"/>
-              </a:rPr>
-              <a:t>▸  </a:t>
-            </a:r>
-            <a:r>
-              <a:rPr sz="1300">
-                <a:solidFill>
-                  <a:srgbClr val="212121"/>
-                </a:solidFill>
-                <a:latin typeface="Calibri"/>
-              </a:rPr>
-              <a:t>RAIS linkada à PNAD para rastrear trajetórias de mobilidade intraempresa</a:t>
-            </a:r>
-          </a:p>
-          <a:p>
-            <a:pPr>
-              <a:spcAft>
-                <a:spcPts val="400"/>
-              </a:spcAft>
-            </a:pPr>
-            <a:r>
-              <a:rPr sz="1300" b="1">
-                <a:solidFill>
-                  <a:srgbClr val="1565C0"/>
-                </a:solidFill>
-                <a:latin typeface="Calibri"/>
-              </a:rPr>
-              <a:t>▸  </a:t>
-            </a:r>
-            <a:r>
-              <a:rPr sz="1300">
-                <a:solidFill>
-                  <a:srgbClr val="212121"/>
-                </a:solidFill>
-                <a:latin typeface="Calibri"/>
-              </a:rPr>
-              <a:t>Análise de mediação formal (path analysis) raça → ocupação → renda</a:t>
-            </a:r>
-          </a:p>
-          <a:p>
-            <a:pPr>
-              <a:spcAft>
-                <a:spcPts val="400"/>
-              </a:spcAft>
-            </a:pPr>
-            <a:r>
-              <a:rPr sz="1300" b="1">
-                <a:solidFill>
-                  <a:srgbClr val="1565C0"/>
-                </a:solidFill>
-                <a:latin typeface="Calibri"/>
-              </a:rPr>
-              <a:t>▸  </a:t>
-            </a:r>
-            <a:r>
-              <a:rPr sz="1300">
-                <a:solidFill>
-                  <a:srgbClr val="212121"/>
-                </a:solidFill>
-                <a:latin typeface="Calibri"/>
-              </a:rPr>
-              <a:t>Extensão ao setor público por UF — heterogeneidade do glass ceiling entre estados</a:t>
-            </a:r>
-          </a:p>
-          <a:p>
-            <a:pPr>
-              <a:spcAft>
-                <a:spcPts val="400"/>
-              </a:spcAft>
-            </a:pPr>
-            <a:r>
-              <a:rPr sz="1300" b="1">
-                <a:solidFill>
-                  <a:srgbClr val="1565C0"/>
-                </a:solidFill>
-                <a:latin typeface="Calibri"/>
-              </a:rPr>
-              <a:t>▸  </a:t>
-            </a:r>
-            <a:r>
-              <a:rPr sz="1300">
-                <a:solidFill>
-                  <a:srgbClr val="212121"/>
-                </a:solidFill>
-                <a:latin typeface="Calibri"/>
-              </a:rPr>
-              <a:t>Modelo longitudinal com painéis rotativos da PNAD (2T seguidos) para efeitos fixos de indivíduo</a:t>
-            </a:r>
-          </a:p>
-        </p:txBody>
-      </p:sp>
-      <p:sp>
-        <p:nvSpPr>
-          <p:cNvPr id="9" name="Rectangle 8"/>
+              <a:t>Três eixos simultâneos — ações isoladas são insuficientes para romper a armadilha estrutural</a:t>
+            </a:r>
+          </a:p>
+        </p:txBody>
+      </p:sp>
+      <p:sp>
+        <p:nvSpPr>
+          <p:cNvPr id="5" name="Rectangle 4"/>
           <p:cNvSpPr/>
           <p:nvPr/>
         </p:nvSpPr>
         <p:spPr>
           <a:xfrm>
-            <a:off x="0" y="6601968"/>
-            <a:ext cx="12188952" cy="256032"/>
+            <a:off x="274320" y="1097280"/>
+            <a:ext cx="3749039" cy="5029200"/>
           </a:xfrm>
           <a:prstGeom prst="rect">
             <a:avLst/>
           </a:prstGeom>
           <a:solidFill>
-            <a:srgbClr val="1F3864"/>
+            <a:srgbClr val="F5F5F5"/>
           </a:solidFill>
-          <a:ln/>
+          <a:ln w="19050">
+            <a:solidFill>
+              <a:srgbClr val="B71C1C"/>
+            </a:solidFill>
+          </a:ln>
         </p:spPr>
         <p:style>
           <a:lnRef idx="1">
@@ -20507,7 +20208,725 @@
       </p:sp>
       <p:sp>
         <p:nvSpPr>
+          <p:cNvPr id="6" name="Rectangle 5"/>
+          <p:cNvSpPr/>
+          <p:nvPr/>
+        </p:nvSpPr>
+        <p:spPr>
+          <a:xfrm>
+            <a:off x="274320" y="1097280"/>
+            <a:ext cx="3749039" cy="502920"/>
+          </a:xfrm>
+          <a:prstGeom prst="rect">
+            <a:avLst/>
+          </a:prstGeom>
+          <a:solidFill>
+            <a:srgbClr val="B71C1C"/>
+          </a:solidFill>
+          <a:ln/>
+        </p:spPr>
+        <p:style>
+          <a:lnRef idx="1">
+            <a:schemeClr val="accent1"/>
+          </a:lnRef>
+          <a:fillRef idx="3">
+            <a:schemeClr val="accent1"/>
+          </a:fillRef>
+          <a:effectRef idx="2">
+            <a:schemeClr val="accent1"/>
+          </a:effectRef>
+          <a:fontRef idx="minor">
+            <a:schemeClr val="lt1"/>
+          </a:fontRef>
+        </p:style>
+        <p:txBody>
+          <a:bodyPr rtlCol="0" anchor="ctr"/>
+          <a:lstStyle/>
+          <a:p>
+            <a:pPr algn="ctr"/>
+          </a:p>
+        </p:txBody>
+      </p:sp>
+      <p:sp>
+        <p:nvSpPr>
+          <p:cNvPr id="7" name="TextBox 6"/>
+          <p:cNvSpPr txBox="1"/>
+          <p:nvPr/>
+        </p:nvSpPr>
+        <p:spPr>
+          <a:xfrm>
+            <a:off x="365760" y="1143000"/>
+            <a:ext cx="3566160" cy="457200"/>
+          </a:xfrm>
+          <a:prstGeom prst="rect">
+            <a:avLst/>
+          </a:prstGeom>
+          <a:noFill/>
+        </p:spPr>
+        <p:txBody>
+          <a:bodyPr wrap="square">
+            <a:spAutoFit/>
+          </a:bodyPr>
+          <a:lstStyle/>
+          <a:p>
+            <a:pPr algn="l"/>
+            <a:r>
+              <a:rPr sz="1300" b="1" i="0">
+                <a:solidFill>
+                  <a:srgbClr val="FFFFFF"/>
+                </a:solidFill>
+                <a:latin typeface="Calibri"/>
+              </a:rPr>
+              <a:t>Eixo 1 — Acesso</a:t>
+            </a:r>
+          </a:p>
+        </p:txBody>
+      </p:sp>
+      <p:sp>
+        <p:nvSpPr>
+          <p:cNvPr id="8" name="TextBox 7"/>
+          <p:cNvSpPr txBox="1"/>
+          <p:nvPr/>
+        </p:nvSpPr>
+        <p:spPr>
+          <a:xfrm>
+            <a:off x="457200" y="1691640"/>
+            <a:ext cx="3383280" cy="731520"/>
+          </a:xfrm>
+          <a:prstGeom prst="rect">
+            <a:avLst/>
+          </a:prstGeom>
+          <a:noFill/>
+        </p:spPr>
+        <p:txBody>
+          <a:bodyPr wrap="square">
+            <a:spAutoFit/>
+          </a:bodyPr>
+          <a:lstStyle/>
+          <a:p>
+            <a:pPr algn="l"/>
+            <a:r>
+              <a:rPr sz="1200" b="0" i="0">
+                <a:solidFill>
+                  <a:srgbClr val="212121"/>
+                </a:solidFill>
+                <a:latin typeface="Calibri"/>
+              </a:rPr>
+              <a:t>▸  Cotas de acesso CBO Dirigente/Profissional:
+meta IR ≥ 0,80 até 2030</a:t>
+            </a:r>
+          </a:p>
+        </p:txBody>
+      </p:sp>
+      <p:sp>
+        <p:nvSpPr>
+          <p:cNvPr id="9" name="TextBox 8"/>
+          <p:cNvSpPr txBox="1"/>
+          <p:nvPr/>
+        </p:nvSpPr>
+        <p:spPr>
+          <a:xfrm>
+            <a:off x="457200" y="2468880"/>
+            <a:ext cx="3383280" cy="731520"/>
+          </a:xfrm>
+          <a:prstGeom prst="rect">
+            <a:avLst/>
+          </a:prstGeom>
+          <a:noFill/>
+        </p:spPr>
+        <p:txBody>
+          <a:bodyPr wrap="square">
+            <a:spAutoFit/>
+          </a:bodyPr>
+          <a:lstStyle/>
+          <a:p>
+            <a:pPr algn="l"/>
+            <a:r>
+              <a:rPr sz="1200" b="0" i="0">
+                <a:solidFill>
+                  <a:srgbClr val="212121"/>
+                </a:solidFill>
+                <a:latin typeface="Calibri"/>
+              </a:rPr>
+              <a:t>▸  PRONATEC c/ recorte racial e subsídio de
+transporte para trabalhadores de UPAs pobres</a:t>
+            </a:r>
+          </a:p>
+        </p:txBody>
+      </p:sp>
+      <p:sp>
+        <p:nvSpPr>
           <p:cNvPr id="10" name="TextBox 9"/>
+          <p:cNvSpPr txBox="1"/>
+          <p:nvPr/>
+        </p:nvSpPr>
+        <p:spPr>
+          <a:xfrm>
+            <a:off x="457200" y="3246120"/>
+            <a:ext cx="3383280" cy="731520"/>
+          </a:xfrm>
+          <a:prstGeom prst="rect">
+            <a:avLst/>
+          </a:prstGeom>
+          <a:noFill/>
+        </p:spPr>
+        <p:txBody>
+          <a:bodyPr wrap="square">
+            <a:spAutoFit/>
+          </a:bodyPr>
+          <a:lstStyle/>
+          <a:p>
+            <a:pPr algn="l"/>
+            <a:r>
+              <a:rPr sz="1200" b="0" i="0">
+                <a:solidFill>
+                  <a:srgbClr val="212121"/>
+                </a:solidFill>
+                <a:latin typeface="Calibri"/>
+              </a:rPr>
+              <a:t>▸  Bolsas de residência profissional em empresas
+de alta remuneração para egressos negros</a:t>
+            </a:r>
+          </a:p>
+        </p:txBody>
+      </p:sp>
+      <p:sp>
+        <p:nvSpPr>
+          <p:cNvPr id="11" name="Rectangle 10"/>
+          <p:cNvSpPr/>
+          <p:nvPr/>
+        </p:nvSpPr>
+        <p:spPr>
+          <a:xfrm>
+            <a:off x="4251959" y="1097280"/>
+            <a:ext cx="3749039" cy="5029200"/>
+          </a:xfrm>
+          <a:prstGeom prst="rect">
+            <a:avLst/>
+          </a:prstGeom>
+          <a:solidFill>
+            <a:srgbClr val="F5F5F5"/>
+          </a:solidFill>
+          <a:ln w="19050">
+            <a:solidFill>
+              <a:srgbClr val="1565C0"/>
+            </a:solidFill>
+          </a:ln>
+        </p:spPr>
+        <p:style>
+          <a:lnRef idx="1">
+            <a:schemeClr val="accent1"/>
+          </a:lnRef>
+          <a:fillRef idx="3">
+            <a:schemeClr val="accent1"/>
+          </a:fillRef>
+          <a:effectRef idx="2">
+            <a:schemeClr val="accent1"/>
+          </a:effectRef>
+          <a:fontRef idx="minor">
+            <a:schemeClr val="lt1"/>
+          </a:fontRef>
+        </p:style>
+        <p:txBody>
+          <a:bodyPr rtlCol="0" anchor="ctr"/>
+          <a:lstStyle/>
+          <a:p>
+            <a:pPr algn="ctr"/>
+          </a:p>
+        </p:txBody>
+      </p:sp>
+      <p:sp>
+        <p:nvSpPr>
+          <p:cNvPr id="12" name="Rectangle 11"/>
+          <p:cNvSpPr/>
+          <p:nvPr/>
+        </p:nvSpPr>
+        <p:spPr>
+          <a:xfrm>
+            <a:off x="4251959" y="1097280"/>
+            <a:ext cx="3749039" cy="502920"/>
+          </a:xfrm>
+          <a:prstGeom prst="rect">
+            <a:avLst/>
+          </a:prstGeom>
+          <a:solidFill>
+            <a:srgbClr val="1565C0"/>
+          </a:solidFill>
+          <a:ln/>
+        </p:spPr>
+        <p:style>
+          <a:lnRef idx="1">
+            <a:schemeClr val="accent1"/>
+          </a:lnRef>
+          <a:fillRef idx="3">
+            <a:schemeClr val="accent1"/>
+          </a:fillRef>
+          <a:effectRef idx="2">
+            <a:schemeClr val="accent1"/>
+          </a:effectRef>
+          <a:fontRef idx="minor">
+            <a:schemeClr val="lt1"/>
+          </a:fontRef>
+        </p:style>
+        <p:txBody>
+          <a:bodyPr rtlCol="0" anchor="ctr"/>
+          <a:lstStyle/>
+          <a:p>
+            <a:pPr algn="ctr"/>
+          </a:p>
+        </p:txBody>
+      </p:sp>
+      <p:sp>
+        <p:nvSpPr>
+          <p:cNvPr id="13" name="TextBox 12"/>
+          <p:cNvSpPr txBox="1"/>
+          <p:nvPr/>
+        </p:nvSpPr>
+        <p:spPr>
+          <a:xfrm>
+            <a:off x="4343399" y="1143000"/>
+            <a:ext cx="3566160" cy="457200"/>
+          </a:xfrm>
+          <a:prstGeom prst="rect">
+            <a:avLst/>
+          </a:prstGeom>
+          <a:noFill/>
+        </p:spPr>
+        <p:txBody>
+          <a:bodyPr wrap="square">
+            <a:spAutoFit/>
+          </a:bodyPr>
+          <a:lstStyle/>
+          <a:p>
+            <a:pPr algn="l"/>
+            <a:r>
+              <a:rPr sz="1300" b="1" i="0">
+                <a:solidFill>
+                  <a:srgbClr val="FFFFFF"/>
+                </a:solidFill>
+                <a:latin typeface="Calibri"/>
+              </a:rPr>
+              <a:t>Eixo 2 — Remuneração</a:t>
+            </a:r>
+          </a:p>
+        </p:txBody>
+      </p:sp>
+      <p:sp>
+        <p:nvSpPr>
+          <p:cNvPr id="14" name="TextBox 13"/>
+          <p:cNvSpPr txBox="1"/>
+          <p:nvPr/>
+        </p:nvSpPr>
+        <p:spPr>
+          <a:xfrm>
+            <a:off x="4434839" y="1691640"/>
+            <a:ext cx="3383280" cy="731520"/>
+          </a:xfrm>
+          <a:prstGeom prst="rect">
+            <a:avLst/>
+          </a:prstGeom>
+          <a:noFill/>
+        </p:spPr>
+        <p:txBody>
+          <a:bodyPr wrap="square">
+            <a:spAutoFit/>
+          </a:bodyPr>
+          <a:lstStyle/>
+          <a:p>
+            <a:pPr algn="l"/>
+            <a:r>
+              <a:rPr sz="1200" b="0" i="0">
+                <a:solidFill>
+                  <a:srgbClr val="212121"/>
+                </a:solidFill>
+                <a:latin typeface="Calibri"/>
+              </a:rPr>
+              <a:t>▸  Transparência salarial por raça/gênero
+obrigatória (empresas &gt; 100 funcionários)</a:t>
+            </a:r>
+          </a:p>
+        </p:txBody>
+      </p:sp>
+      <p:sp>
+        <p:nvSpPr>
+          <p:cNvPr id="15" name="TextBox 14"/>
+          <p:cNvSpPr txBox="1"/>
+          <p:nvPr/>
+        </p:nvSpPr>
+        <p:spPr>
+          <a:xfrm>
+            <a:off x="4434839" y="2468880"/>
+            <a:ext cx="3383280" cy="731520"/>
+          </a:xfrm>
+          <a:prstGeom prst="rect">
+            <a:avLst/>
+          </a:prstGeom>
+          <a:noFill/>
+        </p:spPr>
+        <p:txBody>
+          <a:bodyPr wrap="square">
+            <a:spAutoFit/>
+          </a:bodyPr>
+          <a:lstStyle/>
+          <a:p>
+            <a:pPr algn="l"/>
+            <a:r>
+              <a:rPr sz="1200" b="0" i="0">
+                <a:solidFill>
+                  <a:srgbClr val="212121"/>
+                </a:solidFill>
+                <a:latin typeface="Calibri"/>
+              </a:rPr>
+              <a:t>▸  Auditoria de igual pagamento por trabalho igual
+com penalidades progressivas (gap HLM M4)</a:t>
+            </a:r>
+          </a:p>
+        </p:txBody>
+      </p:sp>
+      <p:sp>
+        <p:nvSpPr>
+          <p:cNvPr id="16" name="TextBox 15"/>
+          <p:cNvSpPr txBox="1"/>
+          <p:nvPr/>
+        </p:nvSpPr>
+        <p:spPr>
+          <a:xfrm>
+            <a:off x="4434839" y="3246120"/>
+            <a:ext cx="3383280" cy="731520"/>
+          </a:xfrm>
+          <a:prstGeom prst="rect">
+            <a:avLst/>
+          </a:prstGeom>
+          <a:noFill/>
+        </p:spPr>
+        <p:txBody>
+          <a:bodyPr wrap="square">
+            <a:spAutoFit/>
+          </a:bodyPr>
+          <a:lstStyle/>
+          <a:p>
+            <a:pPr algn="l"/>
+            <a:r>
+              <a:rPr sz="1200" b="0" i="0">
+                <a:solidFill>
+                  <a:srgbClr val="212121"/>
+                </a:solidFill>
+                <a:latin typeface="Calibri"/>
+              </a:rPr>
+              <a:t>▸  Piso salarial indexado nas categorias com
+maior gap racial residual (6,2% HLM M4)</a:t>
+            </a:r>
+          </a:p>
+        </p:txBody>
+      </p:sp>
+      <p:sp>
+        <p:nvSpPr>
+          <p:cNvPr id="17" name="Rectangle 16"/>
+          <p:cNvSpPr/>
+          <p:nvPr/>
+        </p:nvSpPr>
+        <p:spPr>
+          <a:xfrm>
+            <a:off x="8229598" y="1097280"/>
+            <a:ext cx="3749039" cy="5029200"/>
+          </a:xfrm>
+          <a:prstGeom prst="rect">
+            <a:avLst/>
+          </a:prstGeom>
+          <a:solidFill>
+            <a:srgbClr val="F5F5F5"/>
+          </a:solidFill>
+          <a:ln w="19050">
+            <a:solidFill>
+              <a:srgbClr val="2E7D32"/>
+            </a:solidFill>
+          </a:ln>
+        </p:spPr>
+        <p:style>
+          <a:lnRef idx="1">
+            <a:schemeClr val="accent1"/>
+          </a:lnRef>
+          <a:fillRef idx="3">
+            <a:schemeClr val="accent1"/>
+          </a:fillRef>
+          <a:effectRef idx="2">
+            <a:schemeClr val="accent1"/>
+          </a:effectRef>
+          <a:fontRef idx="minor">
+            <a:schemeClr val="lt1"/>
+          </a:fontRef>
+        </p:style>
+        <p:txBody>
+          <a:bodyPr rtlCol="0" anchor="ctr"/>
+          <a:lstStyle/>
+          <a:p>
+            <a:pPr algn="ctr"/>
+          </a:p>
+        </p:txBody>
+      </p:sp>
+      <p:sp>
+        <p:nvSpPr>
+          <p:cNvPr id="18" name="Rectangle 17"/>
+          <p:cNvSpPr/>
+          <p:nvPr/>
+        </p:nvSpPr>
+        <p:spPr>
+          <a:xfrm>
+            <a:off x="8229598" y="1097280"/>
+            <a:ext cx="3749039" cy="502920"/>
+          </a:xfrm>
+          <a:prstGeom prst="rect">
+            <a:avLst/>
+          </a:prstGeom>
+          <a:solidFill>
+            <a:srgbClr val="2E7D32"/>
+          </a:solidFill>
+          <a:ln/>
+        </p:spPr>
+        <p:style>
+          <a:lnRef idx="1">
+            <a:schemeClr val="accent1"/>
+          </a:lnRef>
+          <a:fillRef idx="3">
+            <a:schemeClr val="accent1"/>
+          </a:fillRef>
+          <a:effectRef idx="2">
+            <a:schemeClr val="accent1"/>
+          </a:effectRef>
+          <a:fontRef idx="minor">
+            <a:schemeClr val="lt1"/>
+          </a:fontRef>
+        </p:style>
+        <p:txBody>
+          <a:bodyPr rtlCol="0" anchor="ctr"/>
+          <a:lstStyle/>
+          <a:p>
+            <a:pPr algn="ctr"/>
+          </a:p>
+        </p:txBody>
+      </p:sp>
+      <p:sp>
+        <p:nvSpPr>
+          <p:cNvPr id="19" name="TextBox 18"/>
+          <p:cNvSpPr txBox="1"/>
+          <p:nvPr/>
+        </p:nvSpPr>
+        <p:spPr>
+          <a:xfrm>
+            <a:off x="8321038" y="1143000"/>
+            <a:ext cx="3566160" cy="457200"/>
+          </a:xfrm>
+          <a:prstGeom prst="rect">
+            <a:avLst/>
+          </a:prstGeom>
+          <a:noFill/>
+        </p:spPr>
+        <p:txBody>
+          <a:bodyPr wrap="square">
+            <a:spAutoFit/>
+          </a:bodyPr>
+          <a:lstStyle/>
+          <a:p>
+            <a:pPr algn="l"/>
+            <a:r>
+              <a:rPr sz="1300" b="1" i="0">
+                <a:solidFill>
+                  <a:srgbClr val="FFFFFF"/>
+                </a:solidFill>
+                <a:latin typeface="Calibri"/>
+              </a:rPr>
+              <a:t>Eixo 3 — Inclusão Produtiva</a:t>
+            </a:r>
+          </a:p>
+        </p:txBody>
+      </p:sp>
+      <p:sp>
+        <p:nvSpPr>
+          <p:cNvPr id="20" name="TextBox 19"/>
+          <p:cNvSpPr txBox="1"/>
+          <p:nvPr/>
+        </p:nvSpPr>
+        <p:spPr>
+          <a:xfrm>
+            <a:off x="8412478" y="1691640"/>
+            <a:ext cx="3383280" cy="731520"/>
+          </a:xfrm>
+          <a:prstGeom prst="rect">
+            <a:avLst/>
+          </a:prstGeom>
+          <a:noFill/>
+        </p:spPr>
+        <p:txBody>
+          <a:bodyPr wrap="square">
+            <a:spAutoFit/>
+          </a:bodyPr>
+          <a:lstStyle/>
+          <a:p>
+            <a:pPr algn="l"/>
+            <a:r>
+              <a:rPr sz="1200" b="0" i="0">
+                <a:solidFill>
+                  <a:srgbClr val="212121"/>
+                </a:solidFill>
+                <a:latin typeface="Calibri"/>
+              </a:rPr>
+              <a:t>▸  Mentoria estruturada para elevar betweenness
+de negros nas redes profissionais (SNA: =0)</a:t>
+            </a:r>
+          </a:p>
+        </p:txBody>
+      </p:sp>
+      <p:sp>
+        <p:nvSpPr>
+          <p:cNvPr id="21" name="TextBox 20"/>
+          <p:cNvSpPr txBox="1"/>
+          <p:nvPr/>
+        </p:nvSpPr>
+        <p:spPr>
+          <a:xfrm>
+            <a:off x="8412478" y="2468880"/>
+            <a:ext cx="3383280" cy="731520"/>
+          </a:xfrm>
+          <a:prstGeom prst="rect">
+            <a:avLst/>
+          </a:prstGeom>
+          <a:noFill/>
+        </p:spPr>
+        <p:txBody>
+          <a:bodyPr wrap="square">
+            <a:spAutoFit/>
+          </a:bodyPr>
+          <a:lstStyle/>
+          <a:p>
+            <a:pPr algn="l"/>
+            <a:r>
+              <a:rPr sz="1200" b="0" i="0">
+                <a:solidFill>
+                  <a:srgbClr val="212121"/>
+                </a:solidFill>
+                <a:latin typeface="Calibri"/>
+              </a:rPr>
+              <a:t>▸  30% dos cargos DAS e liderança corporativa
+para negros até 2030 (inclusão nas redes)</a:t>
+            </a:r>
+          </a:p>
+        </p:txBody>
+      </p:sp>
+      <p:sp>
+        <p:nvSpPr>
+          <p:cNvPr id="22" name="TextBox 21"/>
+          <p:cNvSpPr txBox="1"/>
+          <p:nvPr/>
+        </p:nvSpPr>
+        <p:spPr>
+          <a:xfrm>
+            <a:off x="8412478" y="3246120"/>
+            <a:ext cx="3383280" cy="731520"/>
+          </a:xfrm>
+          <a:prstGeom prst="rect">
+            <a:avLst/>
+          </a:prstGeom>
+          <a:noFill/>
+        </p:spPr>
+        <p:txBody>
+          <a:bodyPr wrap="square">
+            <a:spAutoFit/>
+          </a:bodyPr>
+          <a:lstStyle/>
+          <a:p>
+            <a:pPr algn="l"/>
+            <a:r>
+              <a:rPr sz="1200" b="0" i="0">
+                <a:solidFill>
+                  <a:srgbClr val="212121"/>
+                </a:solidFill>
+                <a:latin typeface="Calibri"/>
+              </a:rPr>
+              <a:t>▸  Equalizar CBO = +127,3% renda negra
+(proxy agregado: ~74 p.p.; ver nota metodológica)</a:t>
+            </a:r>
+          </a:p>
+        </p:txBody>
+      </p:sp>
+      <p:sp>
+        <p:nvSpPr>
+          <p:cNvPr id="23" name="TextBox 22"/>
+          <p:cNvSpPr txBox="1"/>
+          <p:nvPr/>
+        </p:nvSpPr>
+        <p:spPr>
+          <a:xfrm>
+            <a:off x="274320" y="6217920"/>
+            <a:ext cx="11612880" cy="411480"/>
+          </a:xfrm>
+          <a:prstGeom prst="rect">
+            <a:avLst/>
+          </a:prstGeom>
+          <a:noFill/>
+        </p:spPr>
+        <p:txBody>
+          <a:bodyPr wrap="square">
+            <a:spAutoFit/>
+          </a:bodyPr>
+          <a:lstStyle/>
+          <a:p>
+            <a:pPr algn="ctr"/>
+            <a:r>
+              <a:rPr sz="1300" b="1" i="0">
+                <a:solidFill>
+                  <a:srgbClr val="B71C1C"/>
+                </a:solidFill>
+                <a:latin typeface="Calibri"/>
+              </a:rPr>
+              <a:t>⚠  Ao ritmo atual de convergência (~0,02 log-pontos/ano), eliminar o gap levaria mais de 100 anos.</a:t>
+            </a:r>
+          </a:p>
+        </p:txBody>
+      </p:sp>
+      <p:sp>
+        <p:nvSpPr>
+          <p:cNvPr id="24" name="Rectangle 23"/>
+          <p:cNvSpPr/>
+          <p:nvPr/>
+        </p:nvSpPr>
+        <p:spPr>
+          <a:xfrm>
+            <a:off x="0" y="6601968"/>
+            <a:ext cx="12188952" cy="256032"/>
+          </a:xfrm>
+          <a:prstGeom prst="rect">
+            <a:avLst/>
+          </a:prstGeom>
+          <a:solidFill>
+            <a:srgbClr val="1F3864"/>
+          </a:solidFill>
+          <a:ln/>
+        </p:spPr>
+        <p:style>
+          <a:lnRef idx="1">
+            <a:schemeClr val="accent1"/>
+          </a:lnRef>
+          <a:fillRef idx="3">
+            <a:schemeClr val="accent1"/>
+          </a:fillRef>
+          <a:effectRef idx="2">
+            <a:schemeClr val="accent1"/>
+          </a:effectRef>
+          <a:fontRef idx="minor">
+            <a:schemeClr val="lt1"/>
+          </a:fontRef>
+        </p:style>
+        <p:txBody>
+          <a:bodyPr rtlCol="0" anchor="ctr"/>
+          <a:lstStyle/>
+          <a:p>
+            <a:pPr algn="ctr"/>
+          </a:p>
+        </p:txBody>
+      </p:sp>
+      <p:sp>
+        <p:nvSpPr>
+          <p:cNvPr id="25" name="TextBox 24"/>
           <p:cNvSpPr txBox="1"/>
           <p:nvPr/>
         </p:nvSpPr>
@@ -20542,7 +20961,7 @@
       </p:sp>
       <p:sp>
         <p:nvSpPr>
-          <p:cNvPr id="11" name="TextBox 10"/>
+          <p:cNvPr id="26" name="TextBox 25"/>
           <p:cNvSpPr txBox="1"/>
           <p:nvPr/>
         </p:nvSpPr>
@@ -20570,7 +20989,7 @@
                 </a:solidFill>
                 <a:latin typeface="Calibri"/>
               </a:rPr>
-              <a:t>25/25</a:t>
+              <a:t>25/26</a:t>
             </a:r>
           </a:p>
         </p:txBody>
@@ -20602,7 +21021,7 @@
         <p:spPr>
           <a:xfrm>
             <a:off x="0" y="0"/>
-            <a:ext cx="12188952" cy="6858000"/>
+            <a:ext cx="12188952" cy="1005840"/>
           </a:xfrm>
           <a:prstGeom prst="rect">
             <a:avLst/>
@@ -20636,20 +21055,431 @@
       </p:sp>
       <p:sp>
         <p:nvSpPr>
-          <p:cNvPr id="3" name="Rectangle 2"/>
+          <p:cNvPr id="3" name="TextBox 2"/>
+          <p:cNvSpPr txBox="1"/>
+          <p:nvPr/>
+        </p:nvSpPr>
+        <p:spPr>
+          <a:xfrm>
+            <a:off x="274320" y="73152"/>
+            <a:ext cx="10972800" cy="502920"/>
+          </a:xfrm>
+          <a:prstGeom prst="rect">
+            <a:avLst/>
+          </a:prstGeom>
+          <a:noFill/>
+        </p:spPr>
+        <p:txBody>
+          <a:bodyPr wrap="square">
+            <a:spAutoFit/>
+          </a:bodyPr>
+          <a:lstStyle/>
+          <a:p>
+            <a:pPr algn="l"/>
+            <a:r>
+              <a:rPr sz="2600" b="1" i="0">
+                <a:solidFill>
+                  <a:srgbClr val="FFFFFF"/>
+                </a:solidFill>
+                <a:latin typeface="Calibri"/>
+              </a:rPr>
+              <a:t>25. Limitações e Agenda Futura</a:t>
+            </a:r>
+          </a:p>
+        </p:txBody>
+      </p:sp>
+      <p:sp>
+        <p:nvSpPr>
+          <p:cNvPr id="4" name="TextBox 3"/>
+          <p:cNvSpPr txBox="1"/>
+          <p:nvPr/>
+        </p:nvSpPr>
+        <p:spPr>
+          <a:xfrm>
+            <a:off x="274320" y="594360"/>
+            <a:ext cx="10972800" cy="347472"/>
+          </a:xfrm>
+          <a:prstGeom prst="rect">
+            <a:avLst/>
+          </a:prstGeom>
+          <a:noFill/>
+        </p:spPr>
+        <p:txBody>
+          <a:bodyPr wrap="square">
+            <a:spAutoFit/>
+          </a:bodyPr>
+          <a:lstStyle/>
+          <a:p>
+            <a:pPr algn="l"/>
+            <a:r>
+              <a:rPr sz="1400" b="0" i="0">
+                <a:solidFill>
+                  <a:srgbClr val="BBDEFB"/>
+                </a:solidFill>
+                <a:latin typeface="Calibri"/>
+              </a:rPr>
+              <a:t>Honestidade acadêmica: o que este trabalho não faz e por quê</a:t>
+            </a:r>
+          </a:p>
+        </p:txBody>
+      </p:sp>
+      <p:sp>
+        <p:nvSpPr>
+          <p:cNvPr id="5" name="TextBox 4"/>
+          <p:cNvSpPr txBox="1"/>
+          <p:nvPr/>
+        </p:nvSpPr>
+        <p:spPr>
+          <a:xfrm>
+            <a:off x="365760" y="1143000"/>
+            <a:ext cx="5486400" cy="365760"/>
+          </a:xfrm>
+          <a:prstGeom prst="rect">
+            <a:avLst/>
+          </a:prstGeom>
+          <a:noFill/>
+        </p:spPr>
+        <p:txBody>
+          <a:bodyPr wrap="square">
+            <a:spAutoFit/>
+          </a:bodyPr>
+          <a:lstStyle/>
+          <a:p>
+            <a:pPr algn="l"/>
+            <a:r>
+              <a:rPr sz="1600" b="1" i="0">
+                <a:solidFill>
+                  <a:srgbClr val="B71C1C"/>
+                </a:solidFill>
+                <a:latin typeface="Calibri"/>
+              </a:rPr>
+              <a:t>Limitações</a:t>
+            </a:r>
+          </a:p>
+        </p:txBody>
+      </p:sp>
+      <p:sp>
+        <p:nvSpPr>
+          <p:cNvPr id="6" name="TextBox 5"/>
+          <p:cNvSpPr txBox="1"/>
+          <p:nvPr/>
+        </p:nvSpPr>
+        <p:spPr>
+          <a:xfrm>
+            <a:off x="365760" y="1600200"/>
+            <a:ext cx="5669280" cy="3474720"/>
+          </a:xfrm>
+          <a:prstGeom prst="rect">
+            <a:avLst/>
+          </a:prstGeom>
+          <a:noFill/>
+        </p:spPr>
+        <p:txBody>
+          <a:bodyPr wrap="square">
+            <a:spAutoFit/>
+          </a:bodyPr>
+          <a:lstStyle/>
+          <a:p>
+            <a:pPr>
+              <a:spcAft>
+                <a:spcPts val="400"/>
+              </a:spcAft>
+            </a:pPr>
+            <a:r>
+              <a:rPr sz="1300" b="1">
+                <a:solidFill>
+                  <a:srgbClr val="B71C1C"/>
+                </a:solidFill>
+                <a:latin typeface="Calibri"/>
+              </a:rPr>
+              <a:t>▸  </a:t>
+            </a:r>
+            <a:r>
+              <a:rPr sz="1300">
+                <a:solidFill>
+                  <a:srgbClr val="212121"/>
+                </a:solidFill>
+                <a:latin typeface="Calibri"/>
+              </a:rPr>
+              <a:t>PNAD não permite experimentos causais — coeficientes são associações condicionais, não efeitos causais no sentido de Rubin/Pearl</a:t>
+            </a:r>
+          </a:p>
+          <a:p>
+            <a:pPr>
+              <a:spcAft>
+                <a:spcPts val="400"/>
+              </a:spcAft>
+            </a:pPr>
+            <a:r>
+              <a:rPr sz="1300" b="1">
+                <a:solidFill>
+                  <a:srgbClr val="B71C1C"/>
+                </a:solidFill>
+                <a:latin typeface="Calibri"/>
+              </a:rPr>
+              <a:t>▸  </a:t>
+            </a:r>
+            <a:r>
+              <a:rPr sz="1300">
+                <a:solidFill>
+                  <a:srgbClr val="212121"/>
+                </a:solidFill>
+                <a:latin typeface="Calibri"/>
+              </a:rPr>
+              <a:t>UPA como proxy de bairro: unidade de amostragem ≠ bairro administrativo</a:t>
+            </a:r>
+          </a:p>
+          <a:p>
+            <a:pPr>
+              <a:spcAft>
+                <a:spcPts val="400"/>
+              </a:spcAft>
+            </a:pPr>
+            <a:r>
+              <a:rPr sz="1300" b="1">
+                <a:solidFill>
+                  <a:srgbClr val="B71C1C"/>
+                </a:solidFill>
+                <a:latin typeface="Calibri"/>
+              </a:rPr>
+              <a:t>▸  </a:t>
+            </a:r>
+            <a:r>
+              <a:rPr sz="1300">
+                <a:solidFill>
+                  <a:srgbClr val="212121"/>
+                </a:solidFill>
+                <a:latin typeface="Calibri"/>
+              </a:rPr>
+              <a:t>GLMM logístico estimado na PEA completa via lme4::glmer (nAGQ=0, bobyqa, n=7,7M, 40,9k UPAs); random slope de negro no GLMM não estimado por custo — porém o random slope foi estimado no HLM de salário (base da PO regionalizada por UF)</a:t>
+            </a:r>
+          </a:p>
+          <a:p>
+            <a:pPr>
+              <a:spcAft>
+                <a:spcPts val="400"/>
+              </a:spcAft>
+            </a:pPr>
+            <a:r>
+              <a:rPr sz="1300" b="1">
+                <a:solidFill>
+                  <a:srgbClr val="B71C1C"/>
+                </a:solidFill>
+                <a:latin typeface="Calibri"/>
+              </a:rPr>
+              <a:t>▸  </a:t>
+            </a:r>
+            <a:r>
+              <a:rPr sz="1300">
+                <a:solidFill>
+                  <a:srgbClr val="212121"/>
+                </a:solidFill>
+                <a:latin typeface="Calibri"/>
+              </a:rPr>
+              <a:t>CBO auto-declarado pode ter viés de classificação por raça (deflation de ocupação)</a:t>
+            </a:r>
+          </a:p>
+        </p:txBody>
+      </p:sp>
+      <p:sp>
+        <p:nvSpPr>
+          <p:cNvPr id="7" name="TextBox 6"/>
+          <p:cNvSpPr txBox="1"/>
+          <p:nvPr/>
+        </p:nvSpPr>
+        <p:spPr>
+          <a:xfrm>
+            <a:off x="6400800" y="1143000"/>
+            <a:ext cx="5486400" cy="365760"/>
+          </a:xfrm>
+          <a:prstGeom prst="rect">
+            <a:avLst/>
+          </a:prstGeom>
+          <a:noFill/>
+        </p:spPr>
+        <p:txBody>
+          <a:bodyPr wrap="square">
+            <a:spAutoFit/>
+          </a:bodyPr>
+          <a:lstStyle/>
+          <a:p>
+            <a:pPr algn="l"/>
+            <a:r>
+              <a:rPr sz="1600" b="1" i="0">
+                <a:solidFill>
+                  <a:srgbClr val="1565C0"/>
+                </a:solidFill>
+                <a:latin typeface="Calibri"/>
+              </a:rPr>
+              <a:t>Agenda Futura</a:t>
+            </a:r>
+          </a:p>
+        </p:txBody>
+      </p:sp>
+      <p:sp>
+        <p:nvSpPr>
+          <p:cNvPr id="8" name="TextBox 7"/>
+          <p:cNvSpPr txBox="1"/>
+          <p:nvPr/>
+        </p:nvSpPr>
+        <p:spPr>
+          <a:xfrm>
+            <a:off x="6400800" y="1600200"/>
+            <a:ext cx="5669280" cy="3474720"/>
+          </a:xfrm>
+          <a:prstGeom prst="rect">
+            <a:avLst/>
+          </a:prstGeom>
+          <a:noFill/>
+        </p:spPr>
+        <p:txBody>
+          <a:bodyPr wrap="square">
+            <a:spAutoFit/>
+          </a:bodyPr>
+          <a:lstStyle/>
+          <a:p>
+            <a:pPr>
+              <a:spcAft>
+                <a:spcPts val="400"/>
+              </a:spcAft>
+            </a:pPr>
+            <a:r>
+              <a:rPr sz="1300" b="1">
+                <a:solidFill>
+                  <a:srgbClr val="1565C0"/>
+                </a:solidFill>
+                <a:latin typeface="Calibri"/>
+              </a:rPr>
+              <a:t>▸  </a:t>
+            </a:r>
+            <a:r>
+              <a:rPr sz="1300">
+                <a:solidFill>
+                  <a:srgbClr val="212121"/>
+                </a:solidFill>
+                <a:latin typeface="Calibri"/>
+              </a:rPr>
+              <a:t>Análise de variáveis instrumentais (IV) para identificação causal — distância à escola técnica como instrumento</a:t>
+            </a:r>
+          </a:p>
+          <a:p>
+            <a:pPr>
+              <a:spcAft>
+                <a:spcPts val="400"/>
+              </a:spcAft>
+            </a:pPr>
+            <a:r>
+              <a:rPr sz="1300" b="1">
+                <a:solidFill>
+                  <a:srgbClr val="1565C0"/>
+                </a:solidFill>
+                <a:latin typeface="Calibri"/>
+              </a:rPr>
+              <a:t>▸  </a:t>
+            </a:r>
+            <a:r>
+              <a:rPr sz="1300">
+                <a:solidFill>
+                  <a:srgbClr val="212121"/>
+                </a:solidFill>
+                <a:latin typeface="Calibri"/>
+              </a:rPr>
+              <a:t>RAIS linkada à PNAD para rastrear trajetórias de mobilidade intraempresa</a:t>
+            </a:r>
+          </a:p>
+          <a:p>
+            <a:pPr>
+              <a:spcAft>
+                <a:spcPts val="400"/>
+              </a:spcAft>
+            </a:pPr>
+            <a:r>
+              <a:rPr sz="1300" b="1">
+                <a:solidFill>
+                  <a:srgbClr val="1565C0"/>
+                </a:solidFill>
+                <a:latin typeface="Calibri"/>
+              </a:rPr>
+              <a:t>▸  </a:t>
+            </a:r>
+            <a:r>
+              <a:rPr sz="1300">
+                <a:solidFill>
+                  <a:srgbClr val="212121"/>
+                </a:solidFill>
+                <a:latin typeface="Calibri"/>
+              </a:rPr>
+              <a:t>Análise de mediação formal (path analysis) raça → ocupação → renda</a:t>
+            </a:r>
+          </a:p>
+          <a:p>
+            <a:pPr>
+              <a:spcAft>
+                <a:spcPts val="400"/>
+              </a:spcAft>
+            </a:pPr>
+            <a:r>
+              <a:rPr sz="1300" b="1">
+                <a:solidFill>
+                  <a:srgbClr val="1565C0"/>
+                </a:solidFill>
+                <a:latin typeface="Calibri"/>
+              </a:rPr>
+              <a:t>▸  </a:t>
+            </a:r>
+            <a:r>
+              <a:rPr sz="1300">
+                <a:solidFill>
+                  <a:srgbClr val="212121"/>
+                </a:solidFill>
+                <a:latin typeface="Calibri"/>
+              </a:rPr>
+              <a:t>Extensão ao setor público por UF — heterogeneidade do glass ceiling entre estados</a:t>
+            </a:r>
+          </a:p>
+          <a:p>
+            <a:pPr>
+              <a:spcAft>
+                <a:spcPts val="400"/>
+              </a:spcAft>
+            </a:pPr>
+            <a:r>
+              <a:rPr sz="1300" b="1">
+                <a:solidFill>
+                  <a:srgbClr val="1565C0"/>
+                </a:solidFill>
+                <a:latin typeface="Calibri"/>
+              </a:rPr>
+              <a:t>▸  </a:t>
+            </a:r>
+            <a:r>
+              <a:rPr sz="1300">
+                <a:solidFill>
+                  <a:srgbClr val="212121"/>
+                </a:solidFill>
+                <a:latin typeface="Calibri"/>
+              </a:rPr>
+              <a:t>Modelo longitudinal com painéis rotativos da PNAD (2T seguidos) para efeitos fixos de indivíduo</a:t>
+            </a:r>
+          </a:p>
+        </p:txBody>
+      </p:sp>
+      <p:sp>
+        <p:nvSpPr>
+          <p:cNvPr id="9" name="Rectangle 8"/>
           <p:cNvSpPr/>
           <p:nvPr/>
         </p:nvSpPr>
         <p:spPr>
           <a:xfrm>
-            <a:off x="0" y="0"/>
-            <a:ext cx="12188952" cy="731520"/>
+            <a:off x="0" y="6601968"/>
+            <a:ext cx="12188952" cy="256032"/>
           </a:xfrm>
           <a:prstGeom prst="rect">
             <a:avLst/>
           </a:prstGeom>
           <a:solidFill>
-            <a:srgbClr val="0D1F3C"/>
+            <a:srgbClr val="1F3864"/>
           </a:solidFill>
           <a:ln/>
         </p:spPr>
@@ -20677,6 +21507,176 @@
       </p:sp>
       <p:sp>
         <p:nvSpPr>
+          <p:cNvPr id="10" name="TextBox 9"/>
+          <p:cNvSpPr txBox="1"/>
+          <p:nvPr/>
+        </p:nvSpPr>
+        <p:spPr>
+          <a:xfrm>
+            <a:off x="137160" y="6629400"/>
+            <a:ext cx="10058400" cy="228600"/>
+          </a:xfrm>
+          <a:prstGeom prst="rect">
+            <a:avLst/>
+          </a:prstGeom>
+          <a:noFill/>
+        </p:spPr>
+        <p:txBody>
+          <a:bodyPr wrap="square">
+            <a:spAutoFit/>
+          </a:bodyPr>
+          <a:lstStyle/>
+          <a:p>
+            <a:pPr algn="l"/>
+            <a:r>
+              <a:rPr sz="850" b="0" i="0">
+                <a:solidFill>
+                  <a:srgbClr val="BBDEFB"/>
+                </a:solidFill>
+                <a:latin typeface="Calibri"/>
+              </a:rPr>
+              <a:t>Ricardo Calheiros  |  MBA USP/ESALQ  |  Racismo Estrutural e Mercado de Trabalho</a:t>
+            </a:r>
+          </a:p>
+        </p:txBody>
+      </p:sp>
+      <p:sp>
+        <p:nvSpPr>
+          <p:cNvPr id="11" name="TextBox 10"/>
+          <p:cNvSpPr txBox="1"/>
+          <p:nvPr/>
+        </p:nvSpPr>
+        <p:spPr>
+          <a:xfrm>
+            <a:off x="11704320" y="6629400"/>
+            <a:ext cx="457200" cy="228600"/>
+          </a:xfrm>
+          <a:prstGeom prst="rect">
+            <a:avLst/>
+          </a:prstGeom>
+          <a:noFill/>
+        </p:spPr>
+        <p:txBody>
+          <a:bodyPr wrap="square">
+            <a:spAutoFit/>
+          </a:bodyPr>
+          <a:lstStyle/>
+          <a:p>
+            <a:pPr algn="r"/>
+            <a:r>
+              <a:rPr sz="850" b="0" i="0">
+                <a:solidFill>
+                  <a:srgbClr val="FFFFFF"/>
+                </a:solidFill>
+                <a:latin typeface="Calibri"/>
+              </a:rPr>
+              <a:t>26/26</a:t>
+            </a:r>
+          </a:p>
+        </p:txBody>
+      </p:sp>
+    </p:spTree>
+  </p:cSld>
+  <p:clrMapOvr>
+    <a:masterClrMapping/>
+  </p:clrMapOvr>
+</p:sld>
+</file>
+
+<file path=ppt/slides/slide27.xml><?xml version="1.0" encoding="utf-8"?>
+<p:sld xmlns:a="http://schemas.openxmlformats.org/drawingml/2006/main" xmlns:p="http://schemas.openxmlformats.org/presentationml/2006/main" xmlns:r="http://schemas.openxmlformats.org/officeDocument/2006/relationships">
+  <p:cSld>
+    <p:spTree>
+      <p:nvGrpSpPr>
+        <p:cNvPr id="1" name=""/>
+        <p:cNvGrpSpPr/>
+        <p:nvPr/>
+      </p:nvGrpSpPr>
+      <p:grpSpPr/>
+      <p:sp>
+        <p:nvSpPr>
+          <p:cNvPr id="2" name="Rectangle 1"/>
+          <p:cNvSpPr/>
+          <p:nvPr/>
+        </p:nvSpPr>
+        <p:spPr>
+          <a:xfrm>
+            <a:off x="0" y="0"/>
+            <a:ext cx="12188952" cy="6858000"/>
+          </a:xfrm>
+          <a:prstGeom prst="rect">
+            <a:avLst/>
+          </a:prstGeom>
+          <a:solidFill>
+            <a:srgbClr val="1F3864"/>
+          </a:solidFill>
+          <a:ln/>
+        </p:spPr>
+        <p:style>
+          <a:lnRef idx="1">
+            <a:schemeClr val="accent1"/>
+          </a:lnRef>
+          <a:fillRef idx="3">
+            <a:schemeClr val="accent1"/>
+          </a:fillRef>
+          <a:effectRef idx="2">
+            <a:schemeClr val="accent1"/>
+          </a:effectRef>
+          <a:fontRef idx="minor">
+            <a:schemeClr val="lt1"/>
+          </a:fontRef>
+        </p:style>
+        <p:txBody>
+          <a:bodyPr rtlCol="0" anchor="ctr"/>
+          <a:lstStyle/>
+          <a:p>
+            <a:pPr algn="ctr"/>
+          </a:p>
+        </p:txBody>
+      </p:sp>
+      <p:sp>
+        <p:nvSpPr>
+          <p:cNvPr id="3" name="Rectangle 2"/>
+          <p:cNvSpPr/>
+          <p:nvPr/>
+        </p:nvSpPr>
+        <p:spPr>
+          <a:xfrm>
+            <a:off x="0" y="0"/>
+            <a:ext cx="12188952" cy="731520"/>
+          </a:xfrm>
+          <a:prstGeom prst="rect">
+            <a:avLst/>
+          </a:prstGeom>
+          <a:solidFill>
+            <a:srgbClr val="0D1F3C"/>
+          </a:solidFill>
+          <a:ln/>
+        </p:spPr>
+        <p:style>
+          <a:lnRef idx="1">
+            <a:schemeClr val="accent1"/>
+          </a:lnRef>
+          <a:fillRef idx="3">
+            <a:schemeClr val="accent1"/>
+          </a:fillRef>
+          <a:effectRef idx="2">
+            <a:schemeClr val="accent1"/>
+          </a:effectRef>
+          <a:fontRef idx="minor">
+            <a:schemeClr val="lt1"/>
+          </a:fontRef>
+        </p:style>
+        <p:txBody>
+          <a:bodyPr rtlCol="0" anchor="ctr"/>
+          <a:lstStyle/>
+          <a:p>
+            <a:pPr algn="ctr"/>
+          </a:p>
+        </p:txBody>
+      </p:sp>
+      <p:sp>
+        <p:nvSpPr>
           <p:cNvPr id="4" name="TextBox 3"/>
           <p:cNvSpPr txBox="1"/>
           <p:nvPr/>
@@ -20705,7 +21705,7 @@
                 </a:solidFill>
                 <a:latin typeface="Calibri"/>
               </a:rPr>
-              <a:t>25. Conclusão</a:t>
+              <a:t>26. Conclusão</a:t>
             </a:r>
           </a:p>
         </p:txBody>
@@ -22824,7 +23824,7 @@
                 </a:solidFill>
                 <a:latin typeface="Calibri"/>
               </a:rPr>
-              <a:t>3/25</a:t>
+              <a:t>3/26</a:t>
             </a:r>
           </a:p>
         </p:txBody>
@@ -23954,7 +24954,7 @@
                 </a:solidFill>
                 <a:latin typeface="Calibri"/>
               </a:rPr>
-              <a:t>4/25</a:t>
+              <a:t>4/26</a:t>
             </a:r>
           </a:p>
         </p:txBody>
@@ -25479,7 +26479,7 @@
                 </a:solidFill>
                 <a:latin typeface="Calibri"/>
               </a:rPr>
-              <a:t>5/25</a:t>
+              <a:t>5/26</a:t>
             </a:r>
           </a:p>
         </p:txBody>
@@ -26539,7 +27539,7 @@
                 </a:solidFill>
                 <a:latin typeface="Calibri"/>
               </a:rPr>
-              <a:t>6/25</a:t>
+              <a:t>6/26</a:t>
             </a:r>
           </a:p>
         </p:txBody>
@@ -26907,7 +27907,7 @@
                 </a:solidFill>
                 <a:latin typeface="Calibri"/>
               </a:rPr>
-              <a:t>7/25</a:t>
+              <a:t>7/26</a:t>
             </a:r>
           </a:p>
         </p:txBody>
@@ -27421,7 +28421,7 @@
                 </a:solidFill>
                 <a:latin typeface="Calibri"/>
               </a:rPr>
-              <a:t>8/25</a:t>
+              <a:t>8/26</a:t>
             </a:r>
           </a:p>
         </p:txBody>
@@ -28375,7 +29375,7 @@
                 </a:solidFill>
                 <a:latin typeface="Calibri"/>
               </a:rPr>
-              <a:t>9/25</a:t>
+              <a:t>9/26</a:t>
             </a:r>
           </a:p>
         </p:txBody>

--- a/apresentacao_tcc.pptx
+++ b/apresentacao_tcc.pptx
@@ -32,6 +32,7 @@
     <p:sldId id="280" r:id="rId31"/>
     <p:sldId id="281" r:id="rId32"/>
     <p:sldId id="282" r:id="rId33"/>
+    <p:sldId id="283" r:id="rId34"/>
   </p:sldIdLst>
   <p:sldSz cx="12188952" cy="6858000" type="screen4x3"/>
   <p:notesSz cx="6858000" cy="9144000"/>
@@ -4715,7 +4716,7 @@
                 </a:solidFill>
                 <a:latin typeface="Calibri"/>
               </a:rPr>
-              <a:t>10/26</a:t>
+              <a:t>10/27</a:t>
             </a:r>
           </a:p>
         </p:txBody>
@@ -5277,7 +5278,7 @@
                 </a:solidFill>
                 <a:latin typeface="Calibri"/>
               </a:rPr>
-              <a:t>11/26</a:t>
+              <a:t>11/27</a:t>
             </a:r>
           </a:p>
         </p:txBody>
@@ -6458,7 +6459,7 @@
                 </a:solidFill>
                 <a:latin typeface="Calibri"/>
               </a:rPr>
-              <a:t>12/26</a:t>
+              <a:t>12/27</a:t>
             </a:r>
           </a:p>
         </p:txBody>
@@ -7311,7 +7312,7 @@
                 </a:solidFill>
                 <a:latin typeface="Calibri"/>
               </a:rPr>
-              <a:t>13/26</a:t>
+              <a:t>13/27</a:t>
             </a:r>
           </a:p>
         </p:txBody>
@@ -8210,7 +8211,7 @@
                 </a:solidFill>
                 <a:latin typeface="Calibri"/>
               </a:rPr>
-              <a:t>14/26</a:t>
+              <a:t>14/27</a:t>
             </a:r>
           </a:p>
         </p:txBody>
@@ -9000,7 +9001,7 @@
                 </a:solidFill>
                 <a:latin typeface="Calibri"/>
               </a:rPr>
-              <a:t>15/26</a:t>
+              <a:t>15/27</a:t>
             </a:r>
           </a:p>
         </p:txBody>
@@ -10224,7 +10225,7 @@
                 </a:solidFill>
                 <a:latin typeface="Calibri"/>
               </a:rPr>
-              <a:t>16/26</a:t>
+              <a:t>16/27</a:t>
             </a:r>
           </a:p>
         </p:txBody>
@@ -12804,7 +12805,7 @@
                 </a:solidFill>
                 <a:latin typeface="Calibri"/>
               </a:rPr>
-              <a:t>17/26</a:t>
+              <a:t>17/27</a:t>
             </a:r>
           </a:p>
         </p:txBody>
@@ -13331,7 +13332,7 @@
                 </a:solidFill>
                 <a:latin typeface="Calibri"/>
               </a:rPr>
-              <a:t>18/26</a:t>
+              <a:t>18/27</a:t>
             </a:r>
           </a:p>
         </p:txBody>
@@ -14299,7 +14300,7 @@
                 </a:solidFill>
                 <a:latin typeface="Calibri"/>
               </a:rPr>
-              <a:t>19/26</a:t>
+              <a:t>19/27</a:t>
             </a:r>
           </a:p>
         </p:txBody>
@@ -14952,7 +14953,7 @@
                 </a:solidFill>
                 <a:latin typeface="Calibri"/>
               </a:rPr>
-              <a:t>2/26</a:t>
+              <a:t>2/27</a:t>
             </a:r>
           </a:p>
         </p:txBody>
@@ -15920,7 +15921,7 @@
                 </a:solidFill>
                 <a:latin typeface="Calibri"/>
               </a:rPr>
-              <a:t>20/26</a:t>
+              <a:t>20/27</a:t>
             </a:r>
           </a:p>
         </p:txBody>
@@ -16756,7 +16757,7 @@
                 </a:solidFill>
                 <a:latin typeface="Calibri"/>
               </a:rPr>
-              <a:t>21/26</a:t>
+              <a:t>21/27</a:t>
             </a:r>
           </a:p>
         </p:txBody>
@@ -17753,7 +17754,7 @@
                 </a:solidFill>
                 <a:latin typeface="Calibri"/>
               </a:rPr>
-              <a:t>22/26</a:t>
+              <a:t>22/27</a:t>
             </a:r>
           </a:p>
         </p:txBody>
@@ -19028,7 +19029,7 @@
                 </a:solidFill>
                 <a:latin typeface="Calibri"/>
               </a:rPr>
-              <a:t>23/26</a:t>
+              <a:t>23/27</a:t>
             </a:r>
           </a:p>
         </p:txBody>
@@ -20027,7 +20028,7 @@
                 </a:solidFill>
                 <a:latin typeface="Calibri"/>
               </a:rPr>
-              <a:t>24/26</a:t>
+              <a:t>24/27</a:t>
             </a:r>
           </a:p>
         </p:txBody>
@@ -20121,7 +20122,7 @@
                 </a:solidFill>
                 <a:latin typeface="Calibri"/>
               </a:rPr>
-              <a:t>24. Implicações de Política</a:t>
+              <a:t>24. Random Slope no GLMM — A Barreira de Acesso Também é Geográfica</a:t>
             </a:r>
           </a:p>
         </p:txBody>
@@ -20156,33 +20157,53 @@
                 </a:solidFill>
                 <a:latin typeface="Calibri"/>
               </a:rPr>
-              <a:t>Três eixos simultâneos — ações isoladas são insuficientes para romper a armadilha estrutural</a:t>
-            </a:r>
-          </a:p>
-        </p:txBody>
-      </p:sp>
-      <p:sp>
-        <p:nvSpPr>
-          <p:cNvPr id="5" name="Rectangle 4"/>
+              <a:t>lme4::glmer, população completa | random slope de negro por UF em 3 desfechos + público × privado</a:t>
+            </a:r>
+          </a:p>
+        </p:txBody>
+      </p:sp>
+      <p:pic>
+        <p:nvPicPr>
+          <p:cNvPr id="5" name="Picture 4" descr="glmm_rs_real.png"/>
+          <p:cNvPicPr>
+            <a:picLocks noChangeAspect="1"/>
+          </p:cNvPicPr>
+          <p:nvPr/>
+        </p:nvPicPr>
+        <p:blipFill>
+          <a:blip r:embed="rId2"/>
+          <a:stretch>
+            <a:fillRect/>
+          </a:stretch>
+        </p:blipFill>
+        <p:spPr>
+          <a:xfrm>
+            <a:off x="274320" y="1143000"/>
+            <a:ext cx="11612880" cy="4258056"/>
+          </a:xfrm>
+          <a:prstGeom prst="rect">
+            <a:avLst/>
+          </a:prstGeom>
+        </p:spPr>
+      </p:pic>
+      <p:sp>
+        <p:nvSpPr>
+          <p:cNvPr id="6" name="Rectangle 5"/>
           <p:cNvSpPr/>
           <p:nvPr/>
         </p:nvSpPr>
         <p:spPr>
           <a:xfrm>
-            <a:off x="274320" y="1097280"/>
-            <a:ext cx="3749039" cy="5029200"/>
+            <a:off x="274320" y="5943600"/>
+            <a:ext cx="11612880" cy="658368"/>
           </a:xfrm>
           <a:prstGeom prst="rect">
             <a:avLst/>
           </a:prstGeom>
           <a:solidFill>
-            <a:srgbClr val="F5F5F5"/>
+            <a:srgbClr val="1F3864"/>
           </a:solidFill>
-          <a:ln w="19050">
-            <a:solidFill>
-              <a:srgbClr val="B71C1C"/>
-            </a:solidFill>
-          </a:ln>
+          <a:ln/>
         </p:spPr>
         <p:style>
           <a:lnRef idx="1">
@@ -20208,20 +20229,55 @@
       </p:sp>
       <p:sp>
         <p:nvSpPr>
-          <p:cNvPr id="6" name="Rectangle 5"/>
+          <p:cNvPr id="7" name="TextBox 6"/>
+          <p:cNvSpPr txBox="1"/>
+          <p:nvPr/>
+        </p:nvSpPr>
+        <p:spPr>
+          <a:xfrm>
+            <a:off x="457200" y="5998464"/>
+            <a:ext cx="11247120" cy="566928"/>
+          </a:xfrm>
+          <a:prstGeom prst="rect">
+            <a:avLst/>
+          </a:prstGeom>
+          <a:noFill/>
+        </p:spPr>
+        <p:txBody>
+          <a:bodyPr wrap="square">
+            <a:spAutoFit/>
+          </a:bodyPr>
+          <a:lstStyle/>
+          <a:p>
+            <a:pPr algn="ctr"/>
+            <a:r>
+              <a:rPr sz="1100" b="1" i="0">
+                <a:solidFill>
+                  <a:srgbClr val="FFFFFF"/>
+                </a:solidFill>
+                <a:latin typeface="Calibri"/>
+              </a:rPr>
+              <a:t>LRT rejeita τ²=0 em TODOS os desfechos (p&lt;0,001): o acesso varia entre estados, como o salário.  Contraste: gap salarial maior nos estados ricos (ρ=−0,37) vs acesso mais fácil neles (ρ=0,64).  Setor público NÃO dissolve a barreira (OR púb=0,705 ≈ priv=0,695).</a:t>
+            </a:r>
+          </a:p>
+        </p:txBody>
+      </p:sp>
+      <p:sp>
+        <p:nvSpPr>
+          <p:cNvPr id="8" name="Rectangle 7"/>
           <p:cNvSpPr/>
           <p:nvPr/>
         </p:nvSpPr>
         <p:spPr>
           <a:xfrm>
-            <a:off x="274320" y="1097280"/>
-            <a:ext cx="3749039" cy="502920"/>
+            <a:off x="0" y="6601968"/>
+            <a:ext cx="12188952" cy="256032"/>
           </a:xfrm>
           <a:prstGeom prst="rect">
             <a:avLst/>
           </a:prstGeom>
           <a:solidFill>
-            <a:srgbClr val="B71C1C"/>
+            <a:srgbClr val="1F3864"/>
           </a:solidFill>
           <a:ln/>
         </p:spPr>
@@ -20249,684 +20305,7 @@
       </p:sp>
       <p:sp>
         <p:nvSpPr>
-          <p:cNvPr id="7" name="TextBox 6"/>
-          <p:cNvSpPr txBox="1"/>
-          <p:nvPr/>
-        </p:nvSpPr>
-        <p:spPr>
-          <a:xfrm>
-            <a:off x="365760" y="1143000"/>
-            <a:ext cx="3566160" cy="457200"/>
-          </a:xfrm>
-          <a:prstGeom prst="rect">
-            <a:avLst/>
-          </a:prstGeom>
-          <a:noFill/>
-        </p:spPr>
-        <p:txBody>
-          <a:bodyPr wrap="square">
-            <a:spAutoFit/>
-          </a:bodyPr>
-          <a:lstStyle/>
-          <a:p>
-            <a:pPr algn="l"/>
-            <a:r>
-              <a:rPr sz="1300" b="1" i="0">
-                <a:solidFill>
-                  <a:srgbClr val="FFFFFF"/>
-                </a:solidFill>
-                <a:latin typeface="Calibri"/>
-              </a:rPr>
-              <a:t>Eixo 1 — Acesso</a:t>
-            </a:r>
-          </a:p>
-        </p:txBody>
-      </p:sp>
-      <p:sp>
-        <p:nvSpPr>
-          <p:cNvPr id="8" name="TextBox 7"/>
-          <p:cNvSpPr txBox="1"/>
-          <p:nvPr/>
-        </p:nvSpPr>
-        <p:spPr>
-          <a:xfrm>
-            <a:off x="457200" y="1691640"/>
-            <a:ext cx="3383280" cy="731520"/>
-          </a:xfrm>
-          <a:prstGeom prst="rect">
-            <a:avLst/>
-          </a:prstGeom>
-          <a:noFill/>
-        </p:spPr>
-        <p:txBody>
-          <a:bodyPr wrap="square">
-            <a:spAutoFit/>
-          </a:bodyPr>
-          <a:lstStyle/>
-          <a:p>
-            <a:pPr algn="l"/>
-            <a:r>
-              <a:rPr sz="1200" b="0" i="0">
-                <a:solidFill>
-                  <a:srgbClr val="212121"/>
-                </a:solidFill>
-                <a:latin typeface="Calibri"/>
-              </a:rPr>
-              <a:t>▸  Cotas de acesso CBO Dirigente/Profissional:
-meta IR ≥ 0,80 até 2030</a:t>
-            </a:r>
-          </a:p>
-        </p:txBody>
-      </p:sp>
-      <p:sp>
-        <p:nvSpPr>
           <p:cNvPr id="9" name="TextBox 8"/>
-          <p:cNvSpPr txBox="1"/>
-          <p:nvPr/>
-        </p:nvSpPr>
-        <p:spPr>
-          <a:xfrm>
-            <a:off x="457200" y="2468880"/>
-            <a:ext cx="3383280" cy="731520"/>
-          </a:xfrm>
-          <a:prstGeom prst="rect">
-            <a:avLst/>
-          </a:prstGeom>
-          <a:noFill/>
-        </p:spPr>
-        <p:txBody>
-          <a:bodyPr wrap="square">
-            <a:spAutoFit/>
-          </a:bodyPr>
-          <a:lstStyle/>
-          <a:p>
-            <a:pPr algn="l"/>
-            <a:r>
-              <a:rPr sz="1200" b="0" i="0">
-                <a:solidFill>
-                  <a:srgbClr val="212121"/>
-                </a:solidFill>
-                <a:latin typeface="Calibri"/>
-              </a:rPr>
-              <a:t>▸  PRONATEC c/ recorte racial e subsídio de
-transporte para trabalhadores de UPAs pobres</a:t>
-            </a:r>
-          </a:p>
-        </p:txBody>
-      </p:sp>
-      <p:sp>
-        <p:nvSpPr>
-          <p:cNvPr id="10" name="TextBox 9"/>
-          <p:cNvSpPr txBox="1"/>
-          <p:nvPr/>
-        </p:nvSpPr>
-        <p:spPr>
-          <a:xfrm>
-            <a:off x="457200" y="3246120"/>
-            <a:ext cx="3383280" cy="731520"/>
-          </a:xfrm>
-          <a:prstGeom prst="rect">
-            <a:avLst/>
-          </a:prstGeom>
-          <a:noFill/>
-        </p:spPr>
-        <p:txBody>
-          <a:bodyPr wrap="square">
-            <a:spAutoFit/>
-          </a:bodyPr>
-          <a:lstStyle/>
-          <a:p>
-            <a:pPr algn="l"/>
-            <a:r>
-              <a:rPr sz="1200" b="0" i="0">
-                <a:solidFill>
-                  <a:srgbClr val="212121"/>
-                </a:solidFill>
-                <a:latin typeface="Calibri"/>
-              </a:rPr>
-              <a:t>▸  Bolsas de residência profissional em empresas
-de alta remuneração para egressos negros</a:t>
-            </a:r>
-          </a:p>
-        </p:txBody>
-      </p:sp>
-      <p:sp>
-        <p:nvSpPr>
-          <p:cNvPr id="11" name="Rectangle 10"/>
-          <p:cNvSpPr/>
-          <p:nvPr/>
-        </p:nvSpPr>
-        <p:spPr>
-          <a:xfrm>
-            <a:off x="4251959" y="1097280"/>
-            <a:ext cx="3749039" cy="5029200"/>
-          </a:xfrm>
-          <a:prstGeom prst="rect">
-            <a:avLst/>
-          </a:prstGeom>
-          <a:solidFill>
-            <a:srgbClr val="F5F5F5"/>
-          </a:solidFill>
-          <a:ln w="19050">
-            <a:solidFill>
-              <a:srgbClr val="1565C0"/>
-            </a:solidFill>
-          </a:ln>
-        </p:spPr>
-        <p:style>
-          <a:lnRef idx="1">
-            <a:schemeClr val="accent1"/>
-          </a:lnRef>
-          <a:fillRef idx="3">
-            <a:schemeClr val="accent1"/>
-          </a:fillRef>
-          <a:effectRef idx="2">
-            <a:schemeClr val="accent1"/>
-          </a:effectRef>
-          <a:fontRef idx="minor">
-            <a:schemeClr val="lt1"/>
-          </a:fontRef>
-        </p:style>
-        <p:txBody>
-          <a:bodyPr rtlCol="0" anchor="ctr"/>
-          <a:lstStyle/>
-          <a:p>
-            <a:pPr algn="ctr"/>
-          </a:p>
-        </p:txBody>
-      </p:sp>
-      <p:sp>
-        <p:nvSpPr>
-          <p:cNvPr id="12" name="Rectangle 11"/>
-          <p:cNvSpPr/>
-          <p:nvPr/>
-        </p:nvSpPr>
-        <p:spPr>
-          <a:xfrm>
-            <a:off x="4251959" y="1097280"/>
-            <a:ext cx="3749039" cy="502920"/>
-          </a:xfrm>
-          <a:prstGeom prst="rect">
-            <a:avLst/>
-          </a:prstGeom>
-          <a:solidFill>
-            <a:srgbClr val="1565C0"/>
-          </a:solidFill>
-          <a:ln/>
-        </p:spPr>
-        <p:style>
-          <a:lnRef idx="1">
-            <a:schemeClr val="accent1"/>
-          </a:lnRef>
-          <a:fillRef idx="3">
-            <a:schemeClr val="accent1"/>
-          </a:fillRef>
-          <a:effectRef idx="2">
-            <a:schemeClr val="accent1"/>
-          </a:effectRef>
-          <a:fontRef idx="minor">
-            <a:schemeClr val="lt1"/>
-          </a:fontRef>
-        </p:style>
-        <p:txBody>
-          <a:bodyPr rtlCol="0" anchor="ctr"/>
-          <a:lstStyle/>
-          <a:p>
-            <a:pPr algn="ctr"/>
-          </a:p>
-        </p:txBody>
-      </p:sp>
-      <p:sp>
-        <p:nvSpPr>
-          <p:cNvPr id="13" name="TextBox 12"/>
-          <p:cNvSpPr txBox="1"/>
-          <p:nvPr/>
-        </p:nvSpPr>
-        <p:spPr>
-          <a:xfrm>
-            <a:off x="4343399" y="1143000"/>
-            <a:ext cx="3566160" cy="457200"/>
-          </a:xfrm>
-          <a:prstGeom prst="rect">
-            <a:avLst/>
-          </a:prstGeom>
-          <a:noFill/>
-        </p:spPr>
-        <p:txBody>
-          <a:bodyPr wrap="square">
-            <a:spAutoFit/>
-          </a:bodyPr>
-          <a:lstStyle/>
-          <a:p>
-            <a:pPr algn="l"/>
-            <a:r>
-              <a:rPr sz="1300" b="1" i="0">
-                <a:solidFill>
-                  <a:srgbClr val="FFFFFF"/>
-                </a:solidFill>
-                <a:latin typeface="Calibri"/>
-              </a:rPr>
-              <a:t>Eixo 2 — Remuneração</a:t>
-            </a:r>
-          </a:p>
-        </p:txBody>
-      </p:sp>
-      <p:sp>
-        <p:nvSpPr>
-          <p:cNvPr id="14" name="TextBox 13"/>
-          <p:cNvSpPr txBox="1"/>
-          <p:nvPr/>
-        </p:nvSpPr>
-        <p:spPr>
-          <a:xfrm>
-            <a:off x="4434839" y="1691640"/>
-            <a:ext cx="3383280" cy="731520"/>
-          </a:xfrm>
-          <a:prstGeom prst="rect">
-            <a:avLst/>
-          </a:prstGeom>
-          <a:noFill/>
-        </p:spPr>
-        <p:txBody>
-          <a:bodyPr wrap="square">
-            <a:spAutoFit/>
-          </a:bodyPr>
-          <a:lstStyle/>
-          <a:p>
-            <a:pPr algn="l"/>
-            <a:r>
-              <a:rPr sz="1200" b="0" i="0">
-                <a:solidFill>
-                  <a:srgbClr val="212121"/>
-                </a:solidFill>
-                <a:latin typeface="Calibri"/>
-              </a:rPr>
-              <a:t>▸  Transparência salarial por raça/gênero
-obrigatória (empresas &gt; 100 funcionários)</a:t>
-            </a:r>
-          </a:p>
-        </p:txBody>
-      </p:sp>
-      <p:sp>
-        <p:nvSpPr>
-          <p:cNvPr id="15" name="TextBox 14"/>
-          <p:cNvSpPr txBox="1"/>
-          <p:nvPr/>
-        </p:nvSpPr>
-        <p:spPr>
-          <a:xfrm>
-            <a:off x="4434839" y="2468880"/>
-            <a:ext cx="3383280" cy="731520"/>
-          </a:xfrm>
-          <a:prstGeom prst="rect">
-            <a:avLst/>
-          </a:prstGeom>
-          <a:noFill/>
-        </p:spPr>
-        <p:txBody>
-          <a:bodyPr wrap="square">
-            <a:spAutoFit/>
-          </a:bodyPr>
-          <a:lstStyle/>
-          <a:p>
-            <a:pPr algn="l"/>
-            <a:r>
-              <a:rPr sz="1200" b="0" i="0">
-                <a:solidFill>
-                  <a:srgbClr val="212121"/>
-                </a:solidFill>
-                <a:latin typeface="Calibri"/>
-              </a:rPr>
-              <a:t>▸  Auditoria de igual pagamento por trabalho igual
-com penalidades progressivas (gap HLM M4)</a:t>
-            </a:r>
-          </a:p>
-        </p:txBody>
-      </p:sp>
-      <p:sp>
-        <p:nvSpPr>
-          <p:cNvPr id="16" name="TextBox 15"/>
-          <p:cNvSpPr txBox="1"/>
-          <p:nvPr/>
-        </p:nvSpPr>
-        <p:spPr>
-          <a:xfrm>
-            <a:off x="4434839" y="3246120"/>
-            <a:ext cx="3383280" cy="731520"/>
-          </a:xfrm>
-          <a:prstGeom prst="rect">
-            <a:avLst/>
-          </a:prstGeom>
-          <a:noFill/>
-        </p:spPr>
-        <p:txBody>
-          <a:bodyPr wrap="square">
-            <a:spAutoFit/>
-          </a:bodyPr>
-          <a:lstStyle/>
-          <a:p>
-            <a:pPr algn="l"/>
-            <a:r>
-              <a:rPr sz="1200" b="0" i="0">
-                <a:solidFill>
-                  <a:srgbClr val="212121"/>
-                </a:solidFill>
-                <a:latin typeface="Calibri"/>
-              </a:rPr>
-              <a:t>▸  Piso salarial indexado nas categorias com
-maior gap racial residual (6,2% HLM M4)</a:t>
-            </a:r>
-          </a:p>
-        </p:txBody>
-      </p:sp>
-      <p:sp>
-        <p:nvSpPr>
-          <p:cNvPr id="17" name="Rectangle 16"/>
-          <p:cNvSpPr/>
-          <p:nvPr/>
-        </p:nvSpPr>
-        <p:spPr>
-          <a:xfrm>
-            <a:off x="8229598" y="1097280"/>
-            <a:ext cx="3749039" cy="5029200"/>
-          </a:xfrm>
-          <a:prstGeom prst="rect">
-            <a:avLst/>
-          </a:prstGeom>
-          <a:solidFill>
-            <a:srgbClr val="F5F5F5"/>
-          </a:solidFill>
-          <a:ln w="19050">
-            <a:solidFill>
-              <a:srgbClr val="2E7D32"/>
-            </a:solidFill>
-          </a:ln>
-        </p:spPr>
-        <p:style>
-          <a:lnRef idx="1">
-            <a:schemeClr val="accent1"/>
-          </a:lnRef>
-          <a:fillRef idx="3">
-            <a:schemeClr val="accent1"/>
-          </a:fillRef>
-          <a:effectRef idx="2">
-            <a:schemeClr val="accent1"/>
-          </a:effectRef>
-          <a:fontRef idx="minor">
-            <a:schemeClr val="lt1"/>
-          </a:fontRef>
-        </p:style>
-        <p:txBody>
-          <a:bodyPr rtlCol="0" anchor="ctr"/>
-          <a:lstStyle/>
-          <a:p>
-            <a:pPr algn="ctr"/>
-          </a:p>
-        </p:txBody>
-      </p:sp>
-      <p:sp>
-        <p:nvSpPr>
-          <p:cNvPr id="18" name="Rectangle 17"/>
-          <p:cNvSpPr/>
-          <p:nvPr/>
-        </p:nvSpPr>
-        <p:spPr>
-          <a:xfrm>
-            <a:off x="8229598" y="1097280"/>
-            <a:ext cx="3749039" cy="502920"/>
-          </a:xfrm>
-          <a:prstGeom prst="rect">
-            <a:avLst/>
-          </a:prstGeom>
-          <a:solidFill>
-            <a:srgbClr val="2E7D32"/>
-          </a:solidFill>
-          <a:ln/>
-        </p:spPr>
-        <p:style>
-          <a:lnRef idx="1">
-            <a:schemeClr val="accent1"/>
-          </a:lnRef>
-          <a:fillRef idx="3">
-            <a:schemeClr val="accent1"/>
-          </a:fillRef>
-          <a:effectRef idx="2">
-            <a:schemeClr val="accent1"/>
-          </a:effectRef>
-          <a:fontRef idx="minor">
-            <a:schemeClr val="lt1"/>
-          </a:fontRef>
-        </p:style>
-        <p:txBody>
-          <a:bodyPr rtlCol="0" anchor="ctr"/>
-          <a:lstStyle/>
-          <a:p>
-            <a:pPr algn="ctr"/>
-          </a:p>
-        </p:txBody>
-      </p:sp>
-      <p:sp>
-        <p:nvSpPr>
-          <p:cNvPr id="19" name="TextBox 18"/>
-          <p:cNvSpPr txBox="1"/>
-          <p:nvPr/>
-        </p:nvSpPr>
-        <p:spPr>
-          <a:xfrm>
-            <a:off x="8321038" y="1143000"/>
-            <a:ext cx="3566160" cy="457200"/>
-          </a:xfrm>
-          <a:prstGeom prst="rect">
-            <a:avLst/>
-          </a:prstGeom>
-          <a:noFill/>
-        </p:spPr>
-        <p:txBody>
-          <a:bodyPr wrap="square">
-            <a:spAutoFit/>
-          </a:bodyPr>
-          <a:lstStyle/>
-          <a:p>
-            <a:pPr algn="l"/>
-            <a:r>
-              <a:rPr sz="1300" b="1" i="0">
-                <a:solidFill>
-                  <a:srgbClr val="FFFFFF"/>
-                </a:solidFill>
-                <a:latin typeface="Calibri"/>
-              </a:rPr>
-              <a:t>Eixo 3 — Inclusão Produtiva</a:t>
-            </a:r>
-          </a:p>
-        </p:txBody>
-      </p:sp>
-      <p:sp>
-        <p:nvSpPr>
-          <p:cNvPr id="20" name="TextBox 19"/>
-          <p:cNvSpPr txBox="1"/>
-          <p:nvPr/>
-        </p:nvSpPr>
-        <p:spPr>
-          <a:xfrm>
-            <a:off x="8412478" y="1691640"/>
-            <a:ext cx="3383280" cy="731520"/>
-          </a:xfrm>
-          <a:prstGeom prst="rect">
-            <a:avLst/>
-          </a:prstGeom>
-          <a:noFill/>
-        </p:spPr>
-        <p:txBody>
-          <a:bodyPr wrap="square">
-            <a:spAutoFit/>
-          </a:bodyPr>
-          <a:lstStyle/>
-          <a:p>
-            <a:pPr algn="l"/>
-            <a:r>
-              <a:rPr sz="1200" b="0" i="0">
-                <a:solidFill>
-                  <a:srgbClr val="212121"/>
-                </a:solidFill>
-                <a:latin typeface="Calibri"/>
-              </a:rPr>
-              <a:t>▸  Mentoria estruturada para elevar betweenness
-de negros nas redes profissionais (SNA: =0)</a:t>
-            </a:r>
-          </a:p>
-        </p:txBody>
-      </p:sp>
-      <p:sp>
-        <p:nvSpPr>
-          <p:cNvPr id="21" name="TextBox 20"/>
-          <p:cNvSpPr txBox="1"/>
-          <p:nvPr/>
-        </p:nvSpPr>
-        <p:spPr>
-          <a:xfrm>
-            <a:off x="8412478" y="2468880"/>
-            <a:ext cx="3383280" cy="731520"/>
-          </a:xfrm>
-          <a:prstGeom prst="rect">
-            <a:avLst/>
-          </a:prstGeom>
-          <a:noFill/>
-        </p:spPr>
-        <p:txBody>
-          <a:bodyPr wrap="square">
-            <a:spAutoFit/>
-          </a:bodyPr>
-          <a:lstStyle/>
-          <a:p>
-            <a:pPr algn="l"/>
-            <a:r>
-              <a:rPr sz="1200" b="0" i="0">
-                <a:solidFill>
-                  <a:srgbClr val="212121"/>
-                </a:solidFill>
-                <a:latin typeface="Calibri"/>
-              </a:rPr>
-              <a:t>▸  30% dos cargos DAS e liderança corporativa
-para negros até 2030 (inclusão nas redes)</a:t>
-            </a:r>
-          </a:p>
-        </p:txBody>
-      </p:sp>
-      <p:sp>
-        <p:nvSpPr>
-          <p:cNvPr id="22" name="TextBox 21"/>
-          <p:cNvSpPr txBox="1"/>
-          <p:nvPr/>
-        </p:nvSpPr>
-        <p:spPr>
-          <a:xfrm>
-            <a:off x="8412478" y="3246120"/>
-            <a:ext cx="3383280" cy="731520"/>
-          </a:xfrm>
-          <a:prstGeom prst="rect">
-            <a:avLst/>
-          </a:prstGeom>
-          <a:noFill/>
-        </p:spPr>
-        <p:txBody>
-          <a:bodyPr wrap="square">
-            <a:spAutoFit/>
-          </a:bodyPr>
-          <a:lstStyle/>
-          <a:p>
-            <a:pPr algn="l"/>
-            <a:r>
-              <a:rPr sz="1200" b="0" i="0">
-                <a:solidFill>
-                  <a:srgbClr val="212121"/>
-                </a:solidFill>
-                <a:latin typeface="Calibri"/>
-              </a:rPr>
-              <a:t>▸  Equalizar CBO = +127,3% renda negra
-(proxy agregado: ~74 p.p.; ver nota metodológica)</a:t>
-            </a:r>
-          </a:p>
-        </p:txBody>
-      </p:sp>
-      <p:sp>
-        <p:nvSpPr>
-          <p:cNvPr id="23" name="TextBox 22"/>
-          <p:cNvSpPr txBox="1"/>
-          <p:nvPr/>
-        </p:nvSpPr>
-        <p:spPr>
-          <a:xfrm>
-            <a:off x="274320" y="6217920"/>
-            <a:ext cx="11612880" cy="411480"/>
-          </a:xfrm>
-          <a:prstGeom prst="rect">
-            <a:avLst/>
-          </a:prstGeom>
-          <a:noFill/>
-        </p:spPr>
-        <p:txBody>
-          <a:bodyPr wrap="square">
-            <a:spAutoFit/>
-          </a:bodyPr>
-          <a:lstStyle/>
-          <a:p>
-            <a:pPr algn="ctr"/>
-            <a:r>
-              <a:rPr sz="1300" b="1" i="0">
-                <a:solidFill>
-                  <a:srgbClr val="B71C1C"/>
-                </a:solidFill>
-                <a:latin typeface="Calibri"/>
-              </a:rPr>
-              <a:t>⚠  Ao ritmo atual de convergência (~0,02 log-pontos/ano), eliminar o gap levaria mais de 100 anos.</a:t>
-            </a:r>
-          </a:p>
-        </p:txBody>
-      </p:sp>
-      <p:sp>
-        <p:nvSpPr>
-          <p:cNvPr id="24" name="Rectangle 23"/>
-          <p:cNvSpPr/>
-          <p:nvPr/>
-        </p:nvSpPr>
-        <p:spPr>
-          <a:xfrm>
-            <a:off x="0" y="6601968"/>
-            <a:ext cx="12188952" cy="256032"/>
-          </a:xfrm>
-          <a:prstGeom prst="rect">
-            <a:avLst/>
-          </a:prstGeom>
-          <a:solidFill>
-            <a:srgbClr val="1F3864"/>
-          </a:solidFill>
-          <a:ln/>
-        </p:spPr>
-        <p:style>
-          <a:lnRef idx="1">
-            <a:schemeClr val="accent1"/>
-          </a:lnRef>
-          <a:fillRef idx="3">
-            <a:schemeClr val="accent1"/>
-          </a:fillRef>
-          <a:effectRef idx="2">
-            <a:schemeClr val="accent1"/>
-          </a:effectRef>
-          <a:fontRef idx="minor">
-            <a:schemeClr val="lt1"/>
-          </a:fontRef>
-        </p:style>
-        <p:txBody>
-          <a:bodyPr rtlCol="0" anchor="ctr"/>
-          <a:lstStyle/>
-          <a:p>
-            <a:pPr algn="ctr"/>
-          </a:p>
-        </p:txBody>
-      </p:sp>
-      <p:sp>
-        <p:nvSpPr>
-          <p:cNvPr id="25" name="TextBox 24"/>
           <p:cNvSpPr txBox="1"/>
           <p:nvPr/>
         </p:nvSpPr>
@@ -20961,7 +20340,7 @@
       </p:sp>
       <p:sp>
         <p:nvSpPr>
-          <p:cNvPr id="26" name="TextBox 25"/>
+          <p:cNvPr id="10" name="TextBox 9"/>
           <p:cNvSpPr txBox="1"/>
           <p:nvPr/>
         </p:nvSpPr>
@@ -20989,7 +20368,7 @@
                 </a:solidFill>
                 <a:latin typeface="Calibri"/>
               </a:rPr>
-              <a:t>25/26</a:t>
+              <a:t>25/27</a:t>
             </a:r>
           </a:p>
         </p:txBody>
@@ -21083,7 +20462,7 @@
                 </a:solidFill>
                 <a:latin typeface="Calibri"/>
               </a:rPr>
-              <a:t>25. Limitações e Agenda Futura</a:t>
+              <a:t>25. Implicações de Política</a:t>
             </a:r>
           </a:p>
         </p:txBody>
@@ -21118,370 +20497,33 @@
                 </a:solidFill>
                 <a:latin typeface="Calibri"/>
               </a:rPr>
-              <a:t>Honestidade acadêmica: o que este trabalho não faz e por quê</a:t>
-            </a:r>
-          </a:p>
-        </p:txBody>
-      </p:sp>
-      <p:sp>
-        <p:nvSpPr>
-          <p:cNvPr id="5" name="TextBox 4"/>
-          <p:cNvSpPr txBox="1"/>
-          <p:nvPr/>
-        </p:nvSpPr>
-        <p:spPr>
-          <a:xfrm>
-            <a:off x="365760" y="1143000"/>
-            <a:ext cx="5486400" cy="365760"/>
-          </a:xfrm>
-          <a:prstGeom prst="rect">
-            <a:avLst/>
-          </a:prstGeom>
-          <a:noFill/>
-        </p:spPr>
-        <p:txBody>
-          <a:bodyPr wrap="square">
-            <a:spAutoFit/>
-          </a:bodyPr>
-          <a:lstStyle/>
-          <a:p>
-            <a:pPr algn="l"/>
-            <a:r>
-              <a:rPr sz="1600" b="1" i="0">
-                <a:solidFill>
-                  <a:srgbClr val="B71C1C"/>
-                </a:solidFill>
-                <a:latin typeface="Calibri"/>
-              </a:rPr>
-              <a:t>Limitações</a:t>
-            </a:r>
-          </a:p>
-        </p:txBody>
-      </p:sp>
-      <p:sp>
-        <p:nvSpPr>
-          <p:cNvPr id="6" name="TextBox 5"/>
-          <p:cNvSpPr txBox="1"/>
-          <p:nvPr/>
-        </p:nvSpPr>
-        <p:spPr>
-          <a:xfrm>
-            <a:off x="365760" y="1600200"/>
-            <a:ext cx="5669280" cy="3474720"/>
-          </a:xfrm>
-          <a:prstGeom prst="rect">
-            <a:avLst/>
-          </a:prstGeom>
-          <a:noFill/>
-        </p:spPr>
-        <p:txBody>
-          <a:bodyPr wrap="square">
-            <a:spAutoFit/>
-          </a:bodyPr>
-          <a:lstStyle/>
-          <a:p>
-            <a:pPr>
-              <a:spcAft>
-                <a:spcPts val="400"/>
-              </a:spcAft>
-            </a:pPr>
-            <a:r>
-              <a:rPr sz="1300" b="1">
-                <a:solidFill>
-                  <a:srgbClr val="B71C1C"/>
-                </a:solidFill>
-                <a:latin typeface="Calibri"/>
-              </a:rPr>
-              <a:t>▸  </a:t>
-            </a:r>
-            <a:r>
-              <a:rPr sz="1300">
-                <a:solidFill>
-                  <a:srgbClr val="212121"/>
-                </a:solidFill>
-                <a:latin typeface="Calibri"/>
-              </a:rPr>
-              <a:t>PNAD não permite experimentos causais — coeficientes são associações condicionais, não efeitos causais no sentido de Rubin/Pearl</a:t>
-            </a:r>
-          </a:p>
-          <a:p>
-            <a:pPr>
-              <a:spcAft>
-                <a:spcPts val="400"/>
-              </a:spcAft>
-            </a:pPr>
-            <a:r>
-              <a:rPr sz="1300" b="1">
-                <a:solidFill>
-                  <a:srgbClr val="B71C1C"/>
-                </a:solidFill>
-                <a:latin typeface="Calibri"/>
-              </a:rPr>
-              <a:t>▸  </a:t>
-            </a:r>
-            <a:r>
-              <a:rPr sz="1300">
-                <a:solidFill>
-                  <a:srgbClr val="212121"/>
-                </a:solidFill>
-                <a:latin typeface="Calibri"/>
-              </a:rPr>
-              <a:t>UPA como proxy de bairro: unidade de amostragem ≠ bairro administrativo</a:t>
-            </a:r>
-          </a:p>
-          <a:p>
-            <a:pPr>
-              <a:spcAft>
-                <a:spcPts val="400"/>
-              </a:spcAft>
-            </a:pPr>
-            <a:r>
-              <a:rPr sz="1300" b="1">
-                <a:solidFill>
-                  <a:srgbClr val="B71C1C"/>
-                </a:solidFill>
-                <a:latin typeface="Calibri"/>
-              </a:rPr>
-              <a:t>▸  </a:t>
-            </a:r>
-            <a:r>
-              <a:rPr sz="1300">
-                <a:solidFill>
-                  <a:srgbClr val="212121"/>
-                </a:solidFill>
-                <a:latin typeface="Calibri"/>
-              </a:rPr>
-              <a:t>GLMM logístico estimado na PEA completa via lme4::glmer (nAGQ=0, bobyqa, n=7,7M, 40,9k UPAs); random slope de negro no GLMM não estimado por custo — porém o random slope foi estimado no HLM de salário (base da PO regionalizada por UF)</a:t>
-            </a:r>
-          </a:p>
-          <a:p>
-            <a:pPr>
-              <a:spcAft>
-                <a:spcPts val="400"/>
-              </a:spcAft>
-            </a:pPr>
-            <a:r>
-              <a:rPr sz="1300" b="1">
-                <a:solidFill>
-                  <a:srgbClr val="B71C1C"/>
-                </a:solidFill>
-                <a:latin typeface="Calibri"/>
-              </a:rPr>
-              <a:t>▸  </a:t>
-            </a:r>
-            <a:r>
-              <a:rPr sz="1300">
-                <a:solidFill>
-                  <a:srgbClr val="212121"/>
-                </a:solidFill>
-                <a:latin typeface="Calibri"/>
-              </a:rPr>
-              <a:t>CBO auto-declarado pode ter viés de classificação por raça (deflation de ocupação)</a:t>
-            </a:r>
-          </a:p>
-        </p:txBody>
-      </p:sp>
-      <p:sp>
-        <p:nvSpPr>
-          <p:cNvPr id="7" name="TextBox 6"/>
-          <p:cNvSpPr txBox="1"/>
-          <p:nvPr/>
-        </p:nvSpPr>
-        <p:spPr>
-          <a:xfrm>
-            <a:off x="6400800" y="1143000"/>
-            <a:ext cx="5486400" cy="365760"/>
-          </a:xfrm>
-          <a:prstGeom prst="rect">
-            <a:avLst/>
-          </a:prstGeom>
-          <a:noFill/>
-        </p:spPr>
-        <p:txBody>
-          <a:bodyPr wrap="square">
-            <a:spAutoFit/>
-          </a:bodyPr>
-          <a:lstStyle/>
-          <a:p>
-            <a:pPr algn="l"/>
-            <a:r>
-              <a:rPr sz="1600" b="1" i="0">
-                <a:solidFill>
-                  <a:srgbClr val="1565C0"/>
-                </a:solidFill>
-                <a:latin typeface="Calibri"/>
-              </a:rPr>
-              <a:t>Agenda Futura</a:t>
-            </a:r>
-          </a:p>
-        </p:txBody>
-      </p:sp>
-      <p:sp>
-        <p:nvSpPr>
-          <p:cNvPr id="8" name="TextBox 7"/>
-          <p:cNvSpPr txBox="1"/>
-          <p:nvPr/>
-        </p:nvSpPr>
-        <p:spPr>
-          <a:xfrm>
-            <a:off x="6400800" y="1600200"/>
-            <a:ext cx="5669280" cy="3474720"/>
-          </a:xfrm>
-          <a:prstGeom prst="rect">
-            <a:avLst/>
-          </a:prstGeom>
-          <a:noFill/>
-        </p:spPr>
-        <p:txBody>
-          <a:bodyPr wrap="square">
-            <a:spAutoFit/>
-          </a:bodyPr>
-          <a:lstStyle/>
-          <a:p>
-            <a:pPr>
-              <a:spcAft>
-                <a:spcPts val="400"/>
-              </a:spcAft>
-            </a:pPr>
-            <a:r>
-              <a:rPr sz="1300" b="1">
-                <a:solidFill>
-                  <a:srgbClr val="1565C0"/>
-                </a:solidFill>
-                <a:latin typeface="Calibri"/>
-              </a:rPr>
-              <a:t>▸  </a:t>
-            </a:r>
-            <a:r>
-              <a:rPr sz="1300">
-                <a:solidFill>
-                  <a:srgbClr val="212121"/>
-                </a:solidFill>
-                <a:latin typeface="Calibri"/>
-              </a:rPr>
-              <a:t>Análise de variáveis instrumentais (IV) para identificação causal — distância à escola técnica como instrumento</a:t>
-            </a:r>
-          </a:p>
-          <a:p>
-            <a:pPr>
-              <a:spcAft>
-                <a:spcPts val="400"/>
-              </a:spcAft>
-            </a:pPr>
-            <a:r>
-              <a:rPr sz="1300" b="1">
-                <a:solidFill>
-                  <a:srgbClr val="1565C0"/>
-                </a:solidFill>
-                <a:latin typeface="Calibri"/>
-              </a:rPr>
-              <a:t>▸  </a:t>
-            </a:r>
-            <a:r>
-              <a:rPr sz="1300">
-                <a:solidFill>
-                  <a:srgbClr val="212121"/>
-                </a:solidFill>
-                <a:latin typeface="Calibri"/>
-              </a:rPr>
-              <a:t>RAIS linkada à PNAD para rastrear trajetórias de mobilidade intraempresa</a:t>
-            </a:r>
-          </a:p>
-          <a:p>
-            <a:pPr>
-              <a:spcAft>
-                <a:spcPts val="400"/>
-              </a:spcAft>
-            </a:pPr>
-            <a:r>
-              <a:rPr sz="1300" b="1">
-                <a:solidFill>
-                  <a:srgbClr val="1565C0"/>
-                </a:solidFill>
-                <a:latin typeface="Calibri"/>
-              </a:rPr>
-              <a:t>▸  </a:t>
-            </a:r>
-            <a:r>
-              <a:rPr sz="1300">
-                <a:solidFill>
-                  <a:srgbClr val="212121"/>
-                </a:solidFill>
-                <a:latin typeface="Calibri"/>
-              </a:rPr>
-              <a:t>Análise de mediação formal (path analysis) raça → ocupação → renda</a:t>
-            </a:r>
-          </a:p>
-          <a:p>
-            <a:pPr>
-              <a:spcAft>
-                <a:spcPts val="400"/>
-              </a:spcAft>
-            </a:pPr>
-            <a:r>
-              <a:rPr sz="1300" b="1">
-                <a:solidFill>
-                  <a:srgbClr val="1565C0"/>
-                </a:solidFill>
-                <a:latin typeface="Calibri"/>
-              </a:rPr>
-              <a:t>▸  </a:t>
-            </a:r>
-            <a:r>
-              <a:rPr sz="1300">
-                <a:solidFill>
-                  <a:srgbClr val="212121"/>
-                </a:solidFill>
-                <a:latin typeface="Calibri"/>
-              </a:rPr>
-              <a:t>Extensão ao setor público por UF — heterogeneidade do glass ceiling entre estados</a:t>
-            </a:r>
-          </a:p>
-          <a:p>
-            <a:pPr>
-              <a:spcAft>
-                <a:spcPts val="400"/>
-              </a:spcAft>
-            </a:pPr>
-            <a:r>
-              <a:rPr sz="1300" b="1">
-                <a:solidFill>
-                  <a:srgbClr val="1565C0"/>
-                </a:solidFill>
-                <a:latin typeface="Calibri"/>
-              </a:rPr>
-              <a:t>▸  </a:t>
-            </a:r>
-            <a:r>
-              <a:rPr sz="1300">
-                <a:solidFill>
-                  <a:srgbClr val="212121"/>
-                </a:solidFill>
-                <a:latin typeface="Calibri"/>
-              </a:rPr>
-              <a:t>Modelo longitudinal com painéis rotativos da PNAD (2T seguidos) para efeitos fixos de indivíduo</a:t>
-            </a:r>
-          </a:p>
-        </p:txBody>
-      </p:sp>
-      <p:sp>
-        <p:nvSpPr>
-          <p:cNvPr id="9" name="Rectangle 8"/>
+              <a:t>Três eixos simultâneos — ações isoladas são insuficientes para romper a armadilha estrutural</a:t>
+            </a:r>
+          </a:p>
+        </p:txBody>
+      </p:sp>
+      <p:sp>
+        <p:nvSpPr>
+          <p:cNvPr id="5" name="Rectangle 4"/>
           <p:cNvSpPr/>
           <p:nvPr/>
         </p:nvSpPr>
         <p:spPr>
           <a:xfrm>
-            <a:off x="0" y="6601968"/>
-            <a:ext cx="12188952" cy="256032"/>
+            <a:off x="274320" y="1097280"/>
+            <a:ext cx="3749039" cy="5029200"/>
           </a:xfrm>
           <a:prstGeom prst="rect">
             <a:avLst/>
           </a:prstGeom>
           <a:solidFill>
-            <a:srgbClr val="1F3864"/>
+            <a:srgbClr val="F5F5F5"/>
           </a:solidFill>
-          <a:ln/>
+          <a:ln w="19050">
+            <a:solidFill>
+              <a:srgbClr val="B71C1C"/>
+            </a:solidFill>
+          </a:ln>
         </p:spPr>
         <p:style>
           <a:lnRef idx="1">
@@ -21507,7 +20549,725 @@
       </p:sp>
       <p:sp>
         <p:nvSpPr>
+          <p:cNvPr id="6" name="Rectangle 5"/>
+          <p:cNvSpPr/>
+          <p:nvPr/>
+        </p:nvSpPr>
+        <p:spPr>
+          <a:xfrm>
+            <a:off x="274320" y="1097280"/>
+            <a:ext cx="3749039" cy="502920"/>
+          </a:xfrm>
+          <a:prstGeom prst="rect">
+            <a:avLst/>
+          </a:prstGeom>
+          <a:solidFill>
+            <a:srgbClr val="B71C1C"/>
+          </a:solidFill>
+          <a:ln/>
+        </p:spPr>
+        <p:style>
+          <a:lnRef idx="1">
+            <a:schemeClr val="accent1"/>
+          </a:lnRef>
+          <a:fillRef idx="3">
+            <a:schemeClr val="accent1"/>
+          </a:fillRef>
+          <a:effectRef idx="2">
+            <a:schemeClr val="accent1"/>
+          </a:effectRef>
+          <a:fontRef idx="minor">
+            <a:schemeClr val="lt1"/>
+          </a:fontRef>
+        </p:style>
+        <p:txBody>
+          <a:bodyPr rtlCol="0" anchor="ctr"/>
+          <a:lstStyle/>
+          <a:p>
+            <a:pPr algn="ctr"/>
+          </a:p>
+        </p:txBody>
+      </p:sp>
+      <p:sp>
+        <p:nvSpPr>
+          <p:cNvPr id="7" name="TextBox 6"/>
+          <p:cNvSpPr txBox="1"/>
+          <p:nvPr/>
+        </p:nvSpPr>
+        <p:spPr>
+          <a:xfrm>
+            <a:off x="365760" y="1143000"/>
+            <a:ext cx="3566160" cy="457200"/>
+          </a:xfrm>
+          <a:prstGeom prst="rect">
+            <a:avLst/>
+          </a:prstGeom>
+          <a:noFill/>
+        </p:spPr>
+        <p:txBody>
+          <a:bodyPr wrap="square">
+            <a:spAutoFit/>
+          </a:bodyPr>
+          <a:lstStyle/>
+          <a:p>
+            <a:pPr algn="l"/>
+            <a:r>
+              <a:rPr sz="1300" b="1" i="0">
+                <a:solidFill>
+                  <a:srgbClr val="FFFFFF"/>
+                </a:solidFill>
+                <a:latin typeface="Calibri"/>
+              </a:rPr>
+              <a:t>Eixo 1 — Acesso</a:t>
+            </a:r>
+          </a:p>
+        </p:txBody>
+      </p:sp>
+      <p:sp>
+        <p:nvSpPr>
+          <p:cNvPr id="8" name="TextBox 7"/>
+          <p:cNvSpPr txBox="1"/>
+          <p:nvPr/>
+        </p:nvSpPr>
+        <p:spPr>
+          <a:xfrm>
+            <a:off x="457200" y="1691640"/>
+            <a:ext cx="3383280" cy="731520"/>
+          </a:xfrm>
+          <a:prstGeom prst="rect">
+            <a:avLst/>
+          </a:prstGeom>
+          <a:noFill/>
+        </p:spPr>
+        <p:txBody>
+          <a:bodyPr wrap="square">
+            <a:spAutoFit/>
+          </a:bodyPr>
+          <a:lstStyle/>
+          <a:p>
+            <a:pPr algn="l"/>
+            <a:r>
+              <a:rPr sz="1200" b="0" i="0">
+                <a:solidFill>
+                  <a:srgbClr val="212121"/>
+                </a:solidFill>
+                <a:latin typeface="Calibri"/>
+              </a:rPr>
+              <a:t>▸  Cotas de acesso CBO Dirigente/Profissional:
+meta IR ≥ 0,80 até 2030</a:t>
+            </a:r>
+          </a:p>
+        </p:txBody>
+      </p:sp>
+      <p:sp>
+        <p:nvSpPr>
+          <p:cNvPr id="9" name="TextBox 8"/>
+          <p:cNvSpPr txBox="1"/>
+          <p:nvPr/>
+        </p:nvSpPr>
+        <p:spPr>
+          <a:xfrm>
+            <a:off x="457200" y="2468880"/>
+            <a:ext cx="3383280" cy="731520"/>
+          </a:xfrm>
+          <a:prstGeom prst="rect">
+            <a:avLst/>
+          </a:prstGeom>
+          <a:noFill/>
+        </p:spPr>
+        <p:txBody>
+          <a:bodyPr wrap="square">
+            <a:spAutoFit/>
+          </a:bodyPr>
+          <a:lstStyle/>
+          <a:p>
+            <a:pPr algn="l"/>
+            <a:r>
+              <a:rPr sz="1200" b="0" i="0">
+                <a:solidFill>
+                  <a:srgbClr val="212121"/>
+                </a:solidFill>
+                <a:latin typeface="Calibri"/>
+              </a:rPr>
+              <a:t>▸  PRONATEC c/ recorte racial e subsídio de
+transporte para trabalhadores de UPAs pobres</a:t>
+            </a:r>
+          </a:p>
+        </p:txBody>
+      </p:sp>
+      <p:sp>
+        <p:nvSpPr>
           <p:cNvPr id="10" name="TextBox 9"/>
+          <p:cNvSpPr txBox="1"/>
+          <p:nvPr/>
+        </p:nvSpPr>
+        <p:spPr>
+          <a:xfrm>
+            <a:off x="457200" y="3246120"/>
+            <a:ext cx="3383280" cy="731520"/>
+          </a:xfrm>
+          <a:prstGeom prst="rect">
+            <a:avLst/>
+          </a:prstGeom>
+          <a:noFill/>
+        </p:spPr>
+        <p:txBody>
+          <a:bodyPr wrap="square">
+            <a:spAutoFit/>
+          </a:bodyPr>
+          <a:lstStyle/>
+          <a:p>
+            <a:pPr algn="l"/>
+            <a:r>
+              <a:rPr sz="1200" b="0" i="0">
+                <a:solidFill>
+                  <a:srgbClr val="212121"/>
+                </a:solidFill>
+                <a:latin typeface="Calibri"/>
+              </a:rPr>
+              <a:t>▸  Bolsas de residência profissional em empresas
+de alta remuneração para egressos negros</a:t>
+            </a:r>
+          </a:p>
+        </p:txBody>
+      </p:sp>
+      <p:sp>
+        <p:nvSpPr>
+          <p:cNvPr id="11" name="Rectangle 10"/>
+          <p:cNvSpPr/>
+          <p:nvPr/>
+        </p:nvSpPr>
+        <p:spPr>
+          <a:xfrm>
+            <a:off x="4251959" y="1097280"/>
+            <a:ext cx="3749039" cy="5029200"/>
+          </a:xfrm>
+          <a:prstGeom prst="rect">
+            <a:avLst/>
+          </a:prstGeom>
+          <a:solidFill>
+            <a:srgbClr val="F5F5F5"/>
+          </a:solidFill>
+          <a:ln w="19050">
+            <a:solidFill>
+              <a:srgbClr val="1565C0"/>
+            </a:solidFill>
+          </a:ln>
+        </p:spPr>
+        <p:style>
+          <a:lnRef idx="1">
+            <a:schemeClr val="accent1"/>
+          </a:lnRef>
+          <a:fillRef idx="3">
+            <a:schemeClr val="accent1"/>
+          </a:fillRef>
+          <a:effectRef idx="2">
+            <a:schemeClr val="accent1"/>
+          </a:effectRef>
+          <a:fontRef idx="minor">
+            <a:schemeClr val="lt1"/>
+          </a:fontRef>
+        </p:style>
+        <p:txBody>
+          <a:bodyPr rtlCol="0" anchor="ctr"/>
+          <a:lstStyle/>
+          <a:p>
+            <a:pPr algn="ctr"/>
+          </a:p>
+        </p:txBody>
+      </p:sp>
+      <p:sp>
+        <p:nvSpPr>
+          <p:cNvPr id="12" name="Rectangle 11"/>
+          <p:cNvSpPr/>
+          <p:nvPr/>
+        </p:nvSpPr>
+        <p:spPr>
+          <a:xfrm>
+            <a:off x="4251959" y="1097280"/>
+            <a:ext cx="3749039" cy="502920"/>
+          </a:xfrm>
+          <a:prstGeom prst="rect">
+            <a:avLst/>
+          </a:prstGeom>
+          <a:solidFill>
+            <a:srgbClr val="1565C0"/>
+          </a:solidFill>
+          <a:ln/>
+        </p:spPr>
+        <p:style>
+          <a:lnRef idx="1">
+            <a:schemeClr val="accent1"/>
+          </a:lnRef>
+          <a:fillRef idx="3">
+            <a:schemeClr val="accent1"/>
+          </a:fillRef>
+          <a:effectRef idx="2">
+            <a:schemeClr val="accent1"/>
+          </a:effectRef>
+          <a:fontRef idx="minor">
+            <a:schemeClr val="lt1"/>
+          </a:fontRef>
+        </p:style>
+        <p:txBody>
+          <a:bodyPr rtlCol="0" anchor="ctr"/>
+          <a:lstStyle/>
+          <a:p>
+            <a:pPr algn="ctr"/>
+          </a:p>
+        </p:txBody>
+      </p:sp>
+      <p:sp>
+        <p:nvSpPr>
+          <p:cNvPr id="13" name="TextBox 12"/>
+          <p:cNvSpPr txBox="1"/>
+          <p:nvPr/>
+        </p:nvSpPr>
+        <p:spPr>
+          <a:xfrm>
+            <a:off x="4343399" y="1143000"/>
+            <a:ext cx="3566160" cy="457200"/>
+          </a:xfrm>
+          <a:prstGeom prst="rect">
+            <a:avLst/>
+          </a:prstGeom>
+          <a:noFill/>
+        </p:spPr>
+        <p:txBody>
+          <a:bodyPr wrap="square">
+            <a:spAutoFit/>
+          </a:bodyPr>
+          <a:lstStyle/>
+          <a:p>
+            <a:pPr algn="l"/>
+            <a:r>
+              <a:rPr sz="1300" b="1" i="0">
+                <a:solidFill>
+                  <a:srgbClr val="FFFFFF"/>
+                </a:solidFill>
+                <a:latin typeface="Calibri"/>
+              </a:rPr>
+              <a:t>Eixo 2 — Remuneração</a:t>
+            </a:r>
+          </a:p>
+        </p:txBody>
+      </p:sp>
+      <p:sp>
+        <p:nvSpPr>
+          <p:cNvPr id="14" name="TextBox 13"/>
+          <p:cNvSpPr txBox="1"/>
+          <p:nvPr/>
+        </p:nvSpPr>
+        <p:spPr>
+          <a:xfrm>
+            <a:off x="4434839" y="1691640"/>
+            <a:ext cx="3383280" cy="731520"/>
+          </a:xfrm>
+          <a:prstGeom prst="rect">
+            <a:avLst/>
+          </a:prstGeom>
+          <a:noFill/>
+        </p:spPr>
+        <p:txBody>
+          <a:bodyPr wrap="square">
+            <a:spAutoFit/>
+          </a:bodyPr>
+          <a:lstStyle/>
+          <a:p>
+            <a:pPr algn="l"/>
+            <a:r>
+              <a:rPr sz="1200" b="0" i="0">
+                <a:solidFill>
+                  <a:srgbClr val="212121"/>
+                </a:solidFill>
+                <a:latin typeface="Calibri"/>
+              </a:rPr>
+              <a:t>▸  Transparência salarial por raça/gênero
+obrigatória (empresas &gt; 100 funcionários)</a:t>
+            </a:r>
+          </a:p>
+        </p:txBody>
+      </p:sp>
+      <p:sp>
+        <p:nvSpPr>
+          <p:cNvPr id="15" name="TextBox 14"/>
+          <p:cNvSpPr txBox="1"/>
+          <p:nvPr/>
+        </p:nvSpPr>
+        <p:spPr>
+          <a:xfrm>
+            <a:off x="4434839" y="2468880"/>
+            <a:ext cx="3383280" cy="731520"/>
+          </a:xfrm>
+          <a:prstGeom prst="rect">
+            <a:avLst/>
+          </a:prstGeom>
+          <a:noFill/>
+        </p:spPr>
+        <p:txBody>
+          <a:bodyPr wrap="square">
+            <a:spAutoFit/>
+          </a:bodyPr>
+          <a:lstStyle/>
+          <a:p>
+            <a:pPr algn="l"/>
+            <a:r>
+              <a:rPr sz="1200" b="0" i="0">
+                <a:solidFill>
+                  <a:srgbClr val="212121"/>
+                </a:solidFill>
+                <a:latin typeface="Calibri"/>
+              </a:rPr>
+              <a:t>▸  Auditoria de igual pagamento por trabalho igual
+com penalidades progressivas (gap HLM M4)</a:t>
+            </a:r>
+          </a:p>
+        </p:txBody>
+      </p:sp>
+      <p:sp>
+        <p:nvSpPr>
+          <p:cNvPr id="16" name="TextBox 15"/>
+          <p:cNvSpPr txBox="1"/>
+          <p:nvPr/>
+        </p:nvSpPr>
+        <p:spPr>
+          <a:xfrm>
+            <a:off x="4434839" y="3246120"/>
+            <a:ext cx="3383280" cy="731520"/>
+          </a:xfrm>
+          <a:prstGeom prst="rect">
+            <a:avLst/>
+          </a:prstGeom>
+          <a:noFill/>
+        </p:spPr>
+        <p:txBody>
+          <a:bodyPr wrap="square">
+            <a:spAutoFit/>
+          </a:bodyPr>
+          <a:lstStyle/>
+          <a:p>
+            <a:pPr algn="l"/>
+            <a:r>
+              <a:rPr sz="1200" b="0" i="0">
+                <a:solidFill>
+                  <a:srgbClr val="212121"/>
+                </a:solidFill>
+                <a:latin typeface="Calibri"/>
+              </a:rPr>
+              <a:t>▸  Piso salarial indexado nas categorias com
+maior gap racial residual (6,2% HLM M4)</a:t>
+            </a:r>
+          </a:p>
+        </p:txBody>
+      </p:sp>
+      <p:sp>
+        <p:nvSpPr>
+          <p:cNvPr id="17" name="Rectangle 16"/>
+          <p:cNvSpPr/>
+          <p:nvPr/>
+        </p:nvSpPr>
+        <p:spPr>
+          <a:xfrm>
+            <a:off x="8229598" y="1097280"/>
+            <a:ext cx="3749039" cy="5029200"/>
+          </a:xfrm>
+          <a:prstGeom prst="rect">
+            <a:avLst/>
+          </a:prstGeom>
+          <a:solidFill>
+            <a:srgbClr val="F5F5F5"/>
+          </a:solidFill>
+          <a:ln w="19050">
+            <a:solidFill>
+              <a:srgbClr val="2E7D32"/>
+            </a:solidFill>
+          </a:ln>
+        </p:spPr>
+        <p:style>
+          <a:lnRef idx="1">
+            <a:schemeClr val="accent1"/>
+          </a:lnRef>
+          <a:fillRef idx="3">
+            <a:schemeClr val="accent1"/>
+          </a:fillRef>
+          <a:effectRef idx="2">
+            <a:schemeClr val="accent1"/>
+          </a:effectRef>
+          <a:fontRef idx="minor">
+            <a:schemeClr val="lt1"/>
+          </a:fontRef>
+        </p:style>
+        <p:txBody>
+          <a:bodyPr rtlCol="0" anchor="ctr"/>
+          <a:lstStyle/>
+          <a:p>
+            <a:pPr algn="ctr"/>
+          </a:p>
+        </p:txBody>
+      </p:sp>
+      <p:sp>
+        <p:nvSpPr>
+          <p:cNvPr id="18" name="Rectangle 17"/>
+          <p:cNvSpPr/>
+          <p:nvPr/>
+        </p:nvSpPr>
+        <p:spPr>
+          <a:xfrm>
+            <a:off x="8229598" y="1097280"/>
+            <a:ext cx="3749039" cy="502920"/>
+          </a:xfrm>
+          <a:prstGeom prst="rect">
+            <a:avLst/>
+          </a:prstGeom>
+          <a:solidFill>
+            <a:srgbClr val="2E7D32"/>
+          </a:solidFill>
+          <a:ln/>
+        </p:spPr>
+        <p:style>
+          <a:lnRef idx="1">
+            <a:schemeClr val="accent1"/>
+          </a:lnRef>
+          <a:fillRef idx="3">
+            <a:schemeClr val="accent1"/>
+          </a:fillRef>
+          <a:effectRef idx="2">
+            <a:schemeClr val="accent1"/>
+          </a:effectRef>
+          <a:fontRef idx="minor">
+            <a:schemeClr val="lt1"/>
+          </a:fontRef>
+        </p:style>
+        <p:txBody>
+          <a:bodyPr rtlCol="0" anchor="ctr"/>
+          <a:lstStyle/>
+          <a:p>
+            <a:pPr algn="ctr"/>
+          </a:p>
+        </p:txBody>
+      </p:sp>
+      <p:sp>
+        <p:nvSpPr>
+          <p:cNvPr id="19" name="TextBox 18"/>
+          <p:cNvSpPr txBox="1"/>
+          <p:nvPr/>
+        </p:nvSpPr>
+        <p:spPr>
+          <a:xfrm>
+            <a:off x="8321038" y="1143000"/>
+            <a:ext cx="3566160" cy="457200"/>
+          </a:xfrm>
+          <a:prstGeom prst="rect">
+            <a:avLst/>
+          </a:prstGeom>
+          <a:noFill/>
+        </p:spPr>
+        <p:txBody>
+          <a:bodyPr wrap="square">
+            <a:spAutoFit/>
+          </a:bodyPr>
+          <a:lstStyle/>
+          <a:p>
+            <a:pPr algn="l"/>
+            <a:r>
+              <a:rPr sz="1300" b="1" i="0">
+                <a:solidFill>
+                  <a:srgbClr val="FFFFFF"/>
+                </a:solidFill>
+                <a:latin typeface="Calibri"/>
+              </a:rPr>
+              <a:t>Eixo 3 — Inclusão Produtiva</a:t>
+            </a:r>
+          </a:p>
+        </p:txBody>
+      </p:sp>
+      <p:sp>
+        <p:nvSpPr>
+          <p:cNvPr id="20" name="TextBox 19"/>
+          <p:cNvSpPr txBox="1"/>
+          <p:nvPr/>
+        </p:nvSpPr>
+        <p:spPr>
+          <a:xfrm>
+            <a:off x="8412478" y="1691640"/>
+            <a:ext cx="3383280" cy="731520"/>
+          </a:xfrm>
+          <a:prstGeom prst="rect">
+            <a:avLst/>
+          </a:prstGeom>
+          <a:noFill/>
+        </p:spPr>
+        <p:txBody>
+          <a:bodyPr wrap="square">
+            <a:spAutoFit/>
+          </a:bodyPr>
+          <a:lstStyle/>
+          <a:p>
+            <a:pPr algn="l"/>
+            <a:r>
+              <a:rPr sz="1200" b="0" i="0">
+                <a:solidFill>
+                  <a:srgbClr val="212121"/>
+                </a:solidFill>
+                <a:latin typeface="Calibri"/>
+              </a:rPr>
+              <a:t>▸  Mentoria estruturada para elevar betweenness
+de negros nas redes profissionais (SNA: =0)</a:t>
+            </a:r>
+          </a:p>
+        </p:txBody>
+      </p:sp>
+      <p:sp>
+        <p:nvSpPr>
+          <p:cNvPr id="21" name="TextBox 20"/>
+          <p:cNvSpPr txBox="1"/>
+          <p:nvPr/>
+        </p:nvSpPr>
+        <p:spPr>
+          <a:xfrm>
+            <a:off x="8412478" y="2468880"/>
+            <a:ext cx="3383280" cy="731520"/>
+          </a:xfrm>
+          <a:prstGeom prst="rect">
+            <a:avLst/>
+          </a:prstGeom>
+          <a:noFill/>
+        </p:spPr>
+        <p:txBody>
+          <a:bodyPr wrap="square">
+            <a:spAutoFit/>
+          </a:bodyPr>
+          <a:lstStyle/>
+          <a:p>
+            <a:pPr algn="l"/>
+            <a:r>
+              <a:rPr sz="1200" b="0" i="0">
+                <a:solidFill>
+                  <a:srgbClr val="212121"/>
+                </a:solidFill>
+                <a:latin typeface="Calibri"/>
+              </a:rPr>
+              <a:t>▸  30% dos cargos DAS e liderança corporativa
+para negros até 2030 (inclusão nas redes)</a:t>
+            </a:r>
+          </a:p>
+        </p:txBody>
+      </p:sp>
+      <p:sp>
+        <p:nvSpPr>
+          <p:cNvPr id="22" name="TextBox 21"/>
+          <p:cNvSpPr txBox="1"/>
+          <p:nvPr/>
+        </p:nvSpPr>
+        <p:spPr>
+          <a:xfrm>
+            <a:off x="8412478" y="3246120"/>
+            <a:ext cx="3383280" cy="731520"/>
+          </a:xfrm>
+          <a:prstGeom prst="rect">
+            <a:avLst/>
+          </a:prstGeom>
+          <a:noFill/>
+        </p:spPr>
+        <p:txBody>
+          <a:bodyPr wrap="square">
+            <a:spAutoFit/>
+          </a:bodyPr>
+          <a:lstStyle/>
+          <a:p>
+            <a:pPr algn="l"/>
+            <a:r>
+              <a:rPr sz="1200" b="0" i="0">
+                <a:solidFill>
+                  <a:srgbClr val="212121"/>
+                </a:solidFill>
+                <a:latin typeface="Calibri"/>
+              </a:rPr>
+              <a:t>▸  Equalizar CBO = +127,3% renda negra
+(proxy agregado: ~74 p.p.; ver nota metodológica)</a:t>
+            </a:r>
+          </a:p>
+        </p:txBody>
+      </p:sp>
+      <p:sp>
+        <p:nvSpPr>
+          <p:cNvPr id="23" name="TextBox 22"/>
+          <p:cNvSpPr txBox="1"/>
+          <p:nvPr/>
+        </p:nvSpPr>
+        <p:spPr>
+          <a:xfrm>
+            <a:off x="274320" y="6217920"/>
+            <a:ext cx="11612880" cy="411480"/>
+          </a:xfrm>
+          <a:prstGeom prst="rect">
+            <a:avLst/>
+          </a:prstGeom>
+          <a:noFill/>
+        </p:spPr>
+        <p:txBody>
+          <a:bodyPr wrap="square">
+            <a:spAutoFit/>
+          </a:bodyPr>
+          <a:lstStyle/>
+          <a:p>
+            <a:pPr algn="ctr"/>
+            <a:r>
+              <a:rPr sz="1300" b="1" i="0">
+                <a:solidFill>
+                  <a:srgbClr val="B71C1C"/>
+                </a:solidFill>
+                <a:latin typeface="Calibri"/>
+              </a:rPr>
+              <a:t>⚠  Ao ritmo atual de convergência (~0,02 log-pontos/ano), eliminar o gap levaria mais de 100 anos.</a:t>
+            </a:r>
+          </a:p>
+        </p:txBody>
+      </p:sp>
+      <p:sp>
+        <p:nvSpPr>
+          <p:cNvPr id="24" name="Rectangle 23"/>
+          <p:cNvSpPr/>
+          <p:nvPr/>
+        </p:nvSpPr>
+        <p:spPr>
+          <a:xfrm>
+            <a:off x="0" y="6601968"/>
+            <a:ext cx="12188952" cy="256032"/>
+          </a:xfrm>
+          <a:prstGeom prst="rect">
+            <a:avLst/>
+          </a:prstGeom>
+          <a:solidFill>
+            <a:srgbClr val="1F3864"/>
+          </a:solidFill>
+          <a:ln/>
+        </p:spPr>
+        <p:style>
+          <a:lnRef idx="1">
+            <a:schemeClr val="accent1"/>
+          </a:lnRef>
+          <a:fillRef idx="3">
+            <a:schemeClr val="accent1"/>
+          </a:fillRef>
+          <a:effectRef idx="2">
+            <a:schemeClr val="accent1"/>
+          </a:effectRef>
+          <a:fontRef idx="minor">
+            <a:schemeClr val="lt1"/>
+          </a:fontRef>
+        </p:style>
+        <p:txBody>
+          <a:bodyPr rtlCol="0" anchor="ctr"/>
+          <a:lstStyle/>
+          <a:p>
+            <a:pPr algn="ctr"/>
+          </a:p>
+        </p:txBody>
+      </p:sp>
+      <p:sp>
+        <p:nvSpPr>
+          <p:cNvPr id="25" name="TextBox 24"/>
           <p:cNvSpPr txBox="1"/>
           <p:nvPr/>
         </p:nvSpPr>
@@ -21542,7 +21302,7 @@
       </p:sp>
       <p:sp>
         <p:nvSpPr>
-          <p:cNvPr id="11" name="TextBox 10"/>
+          <p:cNvPr id="26" name="TextBox 25"/>
           <p:cNvSpPr txBox="1"/>
           <p:nvPr/>
         </p:nvSpPr>
@@ -21570,7 +21330,7 @@
                 </a:solidFill>
                 <a:latin typeface="Calibri"/>
               </a:rPr>
-              <a:t>26/26</a:t>
+              <a:t>26/27</a:t>
             </a:r>
           </a:p>
         </p:txBody>
@@ -21602,7 +21362,7 @@
         <p:spPr>
           <a:xfrm>
             <a:off x="0" y="0"/>
-            <a:ext cx="12188952" cy="6858000"/>
+            <a:ext cx="12188952" cy="1005840"/>
           </a:xfrm>
           <a:prstGeom prst="rect">
             <a:avLst/>
@@ -21636,20 +21396,431 @@
       </p:sp>
       <p:sp>
         <p:nvSpPr>
-          <p:cNvPr id="3" name="Rectangle 2"/>
+          <p:cNvPr id="3" name="TextBox 2"/>
+          <p:cNvSpPr txBox="1"/>
+          <p:nvPr/>
+        </p:nvSpPr>
+        <p:spPr>
+          <a:xfrm>
+            <a:off x="274320" y="73152"/>
+            <a:ext cx="10972800" cy="502920"/>
+          </a:xfrm>
+          <a:prstGeom prst="rect">
+            <a:avLst/>
+          </a:prstGeom>
+          <a:noFill/>
+        </p:spPr>
+        <p:txBody>
+          <a:bodyPr wrap="square">
+            <a:spAutoFit/>
+          </a:bodyPr>
+          <a:lstStyle/>
+          <a:p>
+            <a:pPr algn="l"/>
+            <a:r>
+              <a:rPr sz="2600" b="1" i="0">
+                <a:solidFill>
+                  <a:srgbClr val="FFFFFF"/>
+                </a:solidFill>
+                <a:latin typeface="Calibri"/>
+              </a:rPr>
+              <a:t>26. Limitações e Agenda Futura</a:t>
+            </a:r>
+          </a:p>
+        </p:txBody>
+      </p:sp>
+      <p:sp>
+        <p:nvSpPr>
+          <p:cNvPr id="4" name="TextBox 3"/>
+          <p:cNvSpPr txBox="1"/>
+          <p:nvPr/>
+        </p:nvSpPr>
+        <p:spPr>
+          <a:xfrm>
+            <a:off x="274320" y="594360"/>
+            <a:ext cx="10972800" cy="347472"/>
+          </a:xfrm>
+          <a:prstGeom prst="rect">
+            <a:avLst/>
+          </a:prstGeom>
+          <a:noFill/>
+        </p:spPr>
+        <p:txBody>
+          <a:bodyPr wrap="square">
+            <a:spAutoFit/>
+          </a:bodyPr>
+          <a:lstStyle/>
+          <a:p>
+            <a:pPr algn="l"/>
+            <a:r>
+              <a:rPr sz="1400" b="0" i="0">
+                <a:solidFill>
+                  <a:srgbClr val="BBDEFB"/>
+                </a:solidFill>
+                <a:latin typeface="Calibri"/>
+              </a:rPr>
+              <a:t>Honestidade acadêmica: o que este trabalho não faz e por quê</a:t>
+            </a:r>
+          </a:p>
+        </p:txBody>
+      </p:sp>
+      <p:sp>
+        <p:nvSpPr>
+          <p:cNvPr id="5" name="TextBox 4"/>
+          <p:cNvSpPr txBox="1"/>
+          <p:nvPr/>
+        </p:nvSpPr>
+        <p:spPr>
+          <a:xfrm>
+            <a:off x="365760" y="1143000"/>
+            <a:ext cx="5486400" cy="365760"/>
+          </a:xfrm>
+          <a:prstGeom prst="rect">
+            <a:avLst/>
+          </a:prstGeom>
+          <a:noFill/>
+        </p:spPr>
+        <p:txBody>
+          <a:bodyPr wrap="square">
+            <a:spAutoFit/>
+          </a:bodyPr>
+          <a:lstStyle/>
+          <a:p>
+            <a:pPr algn="l"/>
+            <a:r>
+              <a:rPr sz="1600" b="1" i="0">
+                <a:solidFill>
+                  <a:srgbClr val="B71C1C"/>
+                </a:solidFill>
+                <a:latin typeface="Calibri"/>
+              </a:rPr>
+              <a:t>Limitações</a:t>
+            </a:r>
+          </a:p>
+        </p:txBody>
+      </p:sp>
+      <p:sp>
+        <p:nvSpPr>
+          <p:cNvPr id="6" name="TextBox 5"/>
+          <p:cNvSpPr txBox="1"/>
+          <p:nvPr/>
+        </p:nvSpPr>
+        <p:spPr>
+          <a:xfrm>
+            <a:off x="365760" y="1600200"/>
+            <a:ext cx="5669280" cy="3474720"/>
+          </a:xfrm>
+          <a:prstGeom prst="rect">
+            <a:avLst/>
+          </a:prstGeom>
+          <a:noFill/>
+        </p:spPr>
+        <p:txBody>
+          <a:bodyPr wrap="square">
+            <a:spAutoFit/>
+          </a:bodyPr>
+          <a:lstStyle/>
+          <a:p>
+            <a:pPr>
+              <a:spcAft>
+                <a:spcPts val="400"/>
+              </a:spcAft>
+            </a:pPr>
+            <a:r>
+              <a:rPr sz="1300" b="1">
+                <a:solidFill>
+                  <a:srgbClr val="B71C1C"/>
+                </a:solidFill>
+                <a:latin typeface="Calibri"/>
+              </a:rPr>
+              <a:t>▸  </a:t>
+            </a:r>
+            <a:r>
+              <a:rPr sz="1300">
+                <a:solidFill>
+                  <a:srgbClr val="212121"/>
+                </a:solidFill>
+                <a:latin typeface="Calibri"/>
+              </a:rPr>
+              <a:t>PNAD não permite experimentos causais — coeficientes são associações condicionais, não efeitos causais no sentido de Rubin/Pearl</a:t>
+            </a:r>
+          </a:p>
+          <a:p>
+            <a:pPr>
+              <a:spcAft>
+                <a:spcPts val="400"/>
+              </a:spcAft>
+            </a:pPr>
+            <a:r>
+              <a:rPr sz="1300" b="1">
+                <a:solidFill>
+                  <a:srgbClr val="B71C1C"/>
+                </a:solidFill>
+                <a:latin typeface="Calibri"/>
+              </a:rPr>
+              <a:t>▸  </a:t>
+            </a:r>
+            <a:r>
+              <a:rPr sz="1300">
+                <a:solidFill>
+                  <a:srgbClr val="212121"/>
+                </a:solidFill>
+                <a:latin typeface="Calibri"/>
+              </a:rPr>
+              <a:t>UPA como proxy de bairro: unidade de amostragem ≠ bairro administrativo</a:t>
+            </a:r>
+          </a:p>
+          <a:p>
+            <a:pPr>
+              <a:spcAft>
+                <a:spcPts val="400"/>
+              </a:spcAft>
+            </a:pPr>
+            <a:r>
+              <a:rPr sz="1300" b="1">
+                <a:solidFill>
+                  <a:srgbClr val="B71C1C"/>
+                </a:solidFill>
+                <a:latin typeface="Calibri"/>
+              </a:rPr>
+              <a:t>▸  </a:t>
+            </a:r>
+            <a:r>
+              <a:rPr sz="1300">
+                <a:solidFill>
+                  <a:srgbClr val="212121"/>
+                </a:solidFill>
+                <a:latin typeface="Calibri"/>
+              </a:rPr>
+              <a:t>GLMM logístico estimado na PEA completa via lme4::glmer (nAGQ=0, bobyqa, n=7,7M, 40,9k UPAs); random slope de negro no GLMM não estimado por custo — porém o random slope foi estimado no HLM de salário (base da PO regionalizada por UF)</a:t>
+            </a:r>
+          </a:p>
+          <a:p>
+            <a:pPr>
+              <a:spcAft>
+                <a:spcPts val="400"/>
+              </a:spcAft>
+            </a:pPr>
+            <a:r>
+              <a:rPr sz="1300" b="1">
+                <a:solidFill>
+                  <a:srgbClr val="B71C1C"/>
+                </a:solidFill>
+                <a:latin typeface="Calibri"/>
+              </a:rPr>
+              <a:t>▸  </a:t>
+            </a:r>
+            <a:r>
+              <a:rPr sz="1300">
+                <a:solidFill>
+                  <a:srgbClr val="212121"/>
+                </a:solidFill>
+                <a:latin typeface="Calibri"/>
+              </a:rPr>
+              <a:t>CBO auto-declarado pode ter viés de classificação por raça (deflation de ocupação)</a:t>
+            </a:r>
+          </a:p>
+        </p:txBody>
+      </p:sp>
+      <p:sp>
+        <p:nvSpPr>
+          <p:cNvPr id="7" name="TextBox 6"/>
+          <p:cNvSpPr txBox="1"/>
+          <p:nvPr/>
+        </p:nvSpPr>
+        <p:spPr>
+          <a:xfrm>
+            <a:off x="6400800" y="1143000"/>
+            <a:ext cx="5486400" cy="365760"/>
+          </a:xfrm>
+          <a:prstGeom prst="rect">
+            <a:avLst/>
+          </a:prstGeom>
+          <a:noFill/>
+        </p:spPr>
+        <p:txBody>
+          <a:bodyPr wrap="square">
+            <a:spAutoFit/>
+          </a:bodyPr>
+          <a:lstStyle/>
+          <a:p>
+            <a:pPr algn="l"/>
+            <a:r>
+              <a:rPr sz="1600" b="1" i="0">
+                <a:solidFill>
+                  <a:srgbClr val="1565C0"/>
+                </a:solidFill>
+                <a:latin typeface="Calibri"/>
+              </a:rPr>
+              <a:t>Agenda Futura</a:t>
+            </a:r>
+          </a:p>
+        </p:txBody>
+      </p:sp>
+      <p:sp>
+        <p:nvSpPr>
+          <p:cNvPr id="8" name="TextBox 7"/>
+          <p:cNvSpPr txBox="1"/>
+          <p:nvPr/>
+        </p:nvSpPr>
+        <p:spPr>
+          <a:xfrm>
+            <a:off x="6400800" y="1600200"/>
+            <a:ext cx="5669280" cy="3474720"/>
+          </a:xfrm>
+          <a:prstGeom prst="rect">
+            <a:avLst/>
+          </a:prstGeom>
+          <a:noFill/>
+        </p:spPr>
+        <p:txBody>
+          <a:bodyPr wrap="square">
+            <a:spAutoFit/>
+          </a:bodyPr>
+          <a:lstStyle/>
+          <a:p>
+            <a:pPr>
+              <a:spcAft>
+                <a:spcPts val="400"/>
+              </a:spcAft>
+            </a:pPr>
+            <a:r>
+              <a:rPr sz="1300" b="1">
+                <a:solidFill>
+                  <a:srgbClr val="1565C0"/>
+                </a:solidFill>
+                <a:latin typeface="Calibri"/>
+              </a:rPr>
+              <a:t>▸  </a:t>
+            </a:r>
+            <a:r>
+              <a:rPr sz="1300">
+                <a:solidFill>
+                  <a:srgbClr val="212121"/>
+                </a:solidFill>
+                <a:latin typeface="Calibri"/>
+              </a:rPr>
+              <a:t>Análise de variáveis instrumentais (IV) para identificação causal — distância à escola técnica como instrumento</a:t>
+            </a:r>
+          </a:p>
+          <a:p>
+            <a:pPr>
+              <a:spcAft>
+                <a:spcPts val="400"/>
+              </a:spcAft>
+            </a:pPr>
+            <a:r>
+              <a:rPr sz="1300" b="1">
+                <a:solidFill>
+                  <a:srgbClr val="1565C0"/>
+                </a:solidFill>
+                <a:latin typeface="Calibri"/>
+              </a:rPr>
+              <a:t>▸  </a:t>
+            </a:r>
+            <a:r>
+              <a:rPr sz="1300">
+                <a:solidFill>
+                  <a:srgbClr val="212121"/>
+                </a:solidFill>
+                <a:latin typeface="Calibri"/>
+              </a:rPr>
+              <a:t>RAIS linkada à PNAD para rastrear trajetórias de mobilidade intraempresa</a:t>
+            </a:r>
+          </a:p>
+          <a:p>
+            <a:pPr>
+              <a:spcAft>
+                <a:spcPts val="400"/>
+              </a:spcAft>
+            </a:pPr>
+            <a:r>
+              <a:rPr sz="1300" b="1">
+                <a:solidFill>
+                  <a:srgbClr val="1565C0"/>
+                </a:solidFill>
+                <a:latin typeface="Calibri"/>
+              </a:rPr>
+              <a:t>▸  </a:t>
+            </a:r>
+            <a:r>
+              <a:rPr sz="1300">
+                <a:solidFill>
+                  <a:srgbClr val="212121"/>
+                </a:solidFill>
+                <a:latin typeface="Calibri"/>
+              </a:rPr>
+              <a:t>Análise de mediação formal (path analysis) raça → ocupação → renda</a:t>
+            </a:r>
+          </a:p>
+          <a:p>
+            <a:pPr>
+              <a:spcAft>
+                <a:spcPts val="400"/>
+              </a:spcAft>
+            </a:pPr>
+            <a:r>
+              <a:rPr sz="1300" b="1">
+                <a:solidFill>
+                  <a:srgbClr val="1565C0"/>
+                </a:solidFill>
+                <a:latin typeface="Calibri"/>
+              </a:rPr>
+              <a:t>▸  </a:t>
+            </a:r>
+            <a:r>
+              <a:rPr sz="1300">
+                <a:solidFill>
+                  <a:srgbClr val="212121"/>
+                </a:solidFill>
+                <a:latin typeface="Calibri"/>
+              </a:rPr>
+              <a:t>Extensão ao setor público por UF — heterogeneidade do glass ceiling entre estados</a:t>
+            </a:r>
+          </a:p>
+          <a:p>
+            <a:pPr>
+              <a:spcAft>
+                <a:spcPts val="400"/>
+              </a:spcAft>
+            </a:pPr>
+            <a:r>
+              <a:rPr sz="1300" b="1">
+                <a:solidFill>
+                  <a:srgbClr val="1565C0"/>
+                </a:solidFill>
+                <a:latin typeface="Calibri"/>
+              </a:rPr>
+              <a:t>▸  </a:t>
+            </a:r>
+            <a:r>
+              <a:rPr sz="1300">
+                <a:solidFill>
+                  <a:srgbClr val="212121"/>
+                </a:solidFill>
+                <a:latin typeface="Calibri"/>
+              </a:rPr>
+              <a:t>Modelo longitudinal com painéis rotativos da PNAD (2T seguidos) para efeitos fixos de indivíduo</a:t>
+            </a:r>
+          </a:p>
+        </p:txBody>
+      </p:sp>
+      <p:sp>
+        <p:nvSpPr>
+          <p:cNvPr id="9" name="Rectangle 8"/>
           <p:cNvSpPr/>
           <p:nvPr/>
         </p:nvSpPr>
         <p:spPr>
           <a:xfrm>
-            <a:off x="0" y="0"/>
-            <a:ext cx="12188952" cy="731520"/>
+            <a:off x="0" y="6601968"/>
+            <a:ext cx="12188952" cy="256032"/>
           </a:xfrm>
           <a:prstGeom prst="rect">
             <a:avLst/>
           </a:prstGeom>
           <a:solidFill>
-            <a:srgbClr val="0D1F3C"/>
+            <a:srgbClr val="1F3864"/>
           </a:solidFill>
           <a:ln/>
         </p:spPr>
@@ -21677,6 +21848,176 @@
       </p:sp>
       <p:sp>
         <p:nvSpPr>
+          <p:cNvPr id="10" name="TextBox 9"/>
+          <p:cNvSpPr txBox="1"/>
+          <p:nvPr/>
+        </p:nvSpPr>
+        <p:spPr>
+          <a:xfrm>
+            <a:off x="137160" y="6629400"/>
+            <a:ext cx="10058400" cy="228600"/>
+          </a:xfrm>
+          <a:prstGeom prst="rect">
+            <a:avLst/>
+          </a:prstGeom>
+          <a:noFill/>
+        </p:spPr>
+        <p:txBody>
+          <a:bodyPr wrap="square">
+            <a:spAutoFit/>
+          </a:bodyPr>
+          <a:lstStyle/>
+          <a:p>
+            <a:pPr algn="l"/>
+            <a:r>
+              <a:rPr sz="850" b="0" i="0">
+                <a:solidFill>
+                  <a:srgbClr val="BBDEFB"/>
+                </a:solidFill>
+                <a:latin typeface="Calibri"/>
+              </a:rPr>
+              <a:t>Ricardo Calheiros  |  MBA USP/ESALQ  |  Racismo Estrutural e Mercado de Trabalho</a:t>
+            </a:r>
+          </a:p>
+        </p:txBody>
+      </p:sp>
+      <p:sp>
+        <p:nvSpPr>
+          <p:cNvPr id="11" name="TextBox 10"/>
+          <p:cNvSpPr txBox="1"/>
+          <p:nvPr/>
+        </p:nvSpPr>
+        <p:spPr>
+          <a:xfrm>
+            <a:off x="11704320" y="6629400"/>
+            <a:ext cx="457200" cy="228600"/>
+          </a:xfrm>
+          <a:prstGeom prst="rect">
+            <a:avLst/>
+          </a:prstGeom>
+          <a:noFill/>
+        </p:spPr>
+        <p:txBody>
+          <a:bodyPr wrap="square">
+            <a:spAutoFit/>
+          </a:bodyPr>
+          <a:lstStyle/>
+          <a:p>
+            <a:pPr algn="r"/>
+            <a:r>
+              <a:rPr sz="850" b="0" i="0">
+                <a:solidFill>
+                  <a:srgbClr val="FFFFFF"/>
+                </a:solidFill>
+                <a:latin typeface="Calibri"/>
+              </a:rPr>
+              <a:t>27/27</a:t>
+            </a:r>
+          </a:p>
+        </p:txBody>
+      </p:sp>
+    </p:spTree>
+  </p:cSld>
+  <p:clrMapOvr>
+    <a:masterClrMapping/>
+  </p:clrMapOvr>
+</p:sld>
+</file>
+
+<file path=ppt/slides/slide28.xml><?xml version="1.0" encoding="utf-8"?>
+<p:sld xmlns:a="http://schemas.openxmlformats.org/drawingml/2006/main" xmlns:p="http://schemas.openxmlformats.org/presentationml/2006/main" xmlns:r="http://schemas.openxmlformats.org/officeDocument/2006/relationships">
+  <p:cSld>
+    <p:spTree>
+      <p:nvGrpSpPr>
+        <p:cNvPr id="1" name=""/>
+        <p:cNvGrpSpPr/>
+        <p:nvPr/>
+      </p:nvGrpSpPr>
+      <p:grpSpPr/>
+      <p:sp>
+        <p:nvSpPr>
+          <p:cNvPr id="2" name="Rectangle 1"/>
+          <p:cNvSpPr/>
+          <p:nvPr/>
+        </p:nvSpPr>
+        <p:spPr>
+          <a:xfrm>
+            <a:off x="0" y="0"/>
+            <a:ext cx="12188952" cy="6858000"/>
+          </a:xfrm>
+          <a:prstGeom prst="rect">
+            <a:avLst/>
+          </a:prstGeom>
+          <a:solidFill>
+            <a:srgbClr val="1F3864"/>
+          </a:solidFill>
+          <a:ln/>
+        </p:spPr>
+        <p:style>
+          <a:lnRef idx="1">
+            <a:schemeClr val="accent1"/>
+          </a:lnRef>
+          <a:fillRef idx="3">
+            <a:schemeClr val="accent1"/>
+          </a:fillRef>
+          <a:effectRef idx="2">
+            <a:schemeClr val="accent1"/>
+          </a:effectRef>
+          <a:fontRef idx="minor">
+            <a:schemeClr val="lt1"/>
+          </a:fontRef>
+        </p:style>
+        <p:txBody>
+          <a:bodyPr rtlCol="0" anchor="ctr"/>
+          <a:lstStyle/>
+          <a:p>
+            <a:pPr algn="ctr"/>
+          </a:p>
+        </p:txBody>
+      </p:sp>
+      <p:sp>
+        <p:nvSpPr>
+          <p:cNvPr id="3" name="Rectangle 2"/>
+          <p:cNvSpPr/>
+          <p:nvPr/>
+        </p:nvSpPr>
+        <p:spPr>
+          <a:xfrm>
+            <a:off x="0" y="0"/>
+            <a:ext cx="12188952" cy="731520"/>
+          </a:xfrm>
+          <a:prstGeom prst="rect">
+            <a:avLst/>
+          </a:prstGeom>
+          <a:solidFill>
+            <a:srgbClr val="0D1F3C"/>
+          </a:solidFill>
+          <a:ln/>
+        </p:spPr>
+        <p:style>
+          <a:lnRef idx="1">
+            <a:schemeClr val="accent1"/>
+          </a:lnRef>
+          <a:fillRef idx="3">
+            <a:schemeClr val="accent1"/>
+          </a:fillRef>
+          <a:effectRef idx="2">
+            <a:schemeClr val="accent1"/>
+          </a:effectRef>
+          <a:fontRef idx="minor">
+            <a:schemeClr val="lt1"/>
+          </a:fontRef>
+        </p:style>
+        <p:txBody>
+          <a:bodyPr rtlCol="0" anchor="ctr"/>
+          <a:lstStyle/>
+          <a:p>
+            <a:pPr algn="ctr"/>
+          </a:p>
+        </p:txBody>
+      </p:sp>
+      <p:sp>
+        <p:nvSpPr>
           <p:cNvPr id="4" name="TextBox 3"/>
           <p:cNvSpPr txBox="1"/>
           <p:nvPr/>
@@ -21705,7 +22046,7 @@
                 </a:solidFill>
                 <a:latin typeface="Calibri"/>
               </a:rPr>
-              <a:t>26. Conclusão</a:t>
+              <a:t>27. Conclusão</a:t>
             </a:r>
           </a:p>
         </p:txBody>
@@ -23824,7 +24165,7 @@
                 </a:solidFill>
                 <a:latin typeface="Calibri"/>
               </a:rPr>
-              <a:t>3/26</a:t>
+              <a:t>3/27</a:t>
             </a:r>
           </a:p>
         </p:txBody>
@@ -24954,7 +25295,7 @@
                 </a:solidFill>
                 <a:latin typeface="Calibri"/>
               </a:rPr>
-              <a:t>4/26</a:t>
+              <a:t>4/27</a:t>
             </a:r>
           </a:p>
         </p:txBody>
@@ -26479,7 +26820,7 @@
                 </a:solidFill>
                 <a:latin typeface="Calibri"/>
               </a:rPr>
-              <a:t>5/26</a:t>
+              <a:t>5/27</a:t>
             </a:r>
           </a:p>
         </p:txBody>
@@ -27539,7 +27880,7 @@
                 </a:solidFill>
                 <a:latin typeface="Calibri"/>
               </a:rPr>
-              <a:t>6/26</a:t>
+              <a:t>6/27</a:t>
             </a:r>
           </a:p>
         </p:txBody>
@@ -27907,7 +28248,7 @@
                 </a:solidFill>
                 <a:latin typeface="Calibri"/>
               </a:rPr>
-              <a:t>7/26</a:t>
+              <a:t>7/27</a:t>
             </a:r>
           </a:p>
         </p:txBody>
@@ -28421,7 +28762,7 @@
                 </a:solidFill>
                 <a:latin typeface="Calibri"/>
               </a:rPr>
-              <a:t>8/26</a:t>
+              <a:t>8/27</a:t>
             </a:r>
           </a:p>
         </p:txBody>
@@ -29375,7 +29716,7 @@
                 </a:solidFill>
                 <a:latin typeface="Calibri"/>
               </a:rPr>
-              <a:t>9/26</a:t>
+              <a:t>9/27</a:t>
             </a:r>
           </a:p>
         </p:txBody>

--- a/apresentacao_tcc.pptx
+++ b/apresentacao_tcc.pptx
@@ -33,6 +33,7 @@
     <p:sldId id="281" r:id="rId32"/>
     <p:sldId id="282" r:id="rId33"/>
     <p:sldId id="283" r:id="rId34"/>
+    <p:sldId id="284" r:id="rId35"/>
   </p:sldIdLst>
   <p:sldSz cx="12188952" cy="6858000" type="screen4x3"/>
   <p:notesSz cx="6858000" cy="9144000"/>
@@ -4716,7 +4717,7 @@
                 </a:solidFill>
                 <a:latin typeface="Calibri"/>
               </a:rPr>
-              <a:t>10/27</a:t>
+              <a:t>10/28</a:t>
             </a:r>
           </a:p>
         </p:txBody>
@@ -5278,7 +5279,7 @@
                 </a:solidFill>
                 <a:latin typeface="Calibri"/>
               </a:rPr>
-              <a:t>11/27</a:t>
+              <a:t>11/28</a:t>
             </a:r>
           </a:p>
         </p:txBody>
@@ -6459,7 +6460,7 @@
                 </a:solidFill>
                 <a:latin typeface="Calibri"/>
               </a:rPr>
-              <a:t>12/27</a:t>
+              <a:t>12/28</a:t>
             </a:r>
           </a:p>
         </p:txBody>
@@ -7312,7 +7313,7 @@
                 </a:solidFill>
                 <a:latin typeface="Calibri"/>
               </a:rPr>
-              <a:t>13/27</a:t>
+              <a:t>13/28</a:t>
             </a:r>
           </a:p>
         </p:txBody>
@@ -8211,7 +8212,7 @@
                 </a:solidFill>
                 <a:latin typeface="Calibri"/>
               </a:rPr>
-              <a:t>14/27</a:t>
+              <a:t>14/28</a:t>
             </a:r>
           </a:p>
         </p:txBody>
@@ -9001,7 +9002,7 @@
                 </a:solidFill>
                 <a:latin typeface="Calibri"/>
               </a:rPr>
-              <a:t>15/27</a:t>
+              <a:t>15/28</a:t>
             </a:r>
           </a:p>
         </p:txBody>
@@ -10225,7 +10226,7 @@
                 </a:solidFill>
                 <a:latin typeface="Calibri"/>
               </a:rPr>
-              <a:t>16/27</a:t>
+              <a:t>16/28</a:t>
             </a:r>
           </a:p>
         </p:txBody>
@@ -12805,7 +12806,7 @@
                 </a:solidFill>
                 <a:latin typeface="Calibri"/>
               </a:rPr>
-              <a:t>17/27</a:t>
+              <a:t>17/28</a:t>
             </a:r>
           </a:p>
         </p:txBody>
@@ -13332,7 +13333,7 @@
                 </a:solidFill>
                 <a:latin typeface="Calibri"/>
               </a:rPr>
-              <a:t>18/27</a:t>
+              <a:t>18/28</a:t>
             </a:r>
           </a:p>
         </p:txBody>
@@ -14300,7 +14301,7 @@
                 </a:solidFill>
                 <a:latin typeface="Calibri"/>
               </a:rPr>
-              <a:t>19/27</a:t>
+              <a:t>19/28</a:t>
             </a:r>
           </a:p>
         </p:txBody>
@@ -14953,7 +14954,7 @@
                 </a:solidFill>
                 <a:latin typeface="Calibri"/>
               </a:rPr>
-              <a:t>2/27</a:t>
+              <a:t>2/28</a:t>
             </a:r>
           </a:p>
         </p:txBody>
@@ -15921,7 +15922,7 @@
                 </a:solidFill>
                 <a:latin typeface="Calibri"/>
               </a:rPr>
-              <a:t>20/27</a:t>
+              <a:t>20/28</a:t>
             </a:r>
           </a:p>
         </p:txBody>
@@ -16757,7 +16758,7 @@
                 </a:solidFill>
                 <a:latin typeface="Calibri"/>
               </a:rPr>
-              <a:t>21/27</a:t>
+              <a:t>21/28</a:t>
             </a:r>
           </a:p>
         </p:txBody>
@@ -17754,7 +17755,7 @@
                 </a:solidFill>
                 <a:latin typeface="Calibri"/>
               </a:rPr>
-              <a:t>22/27</a:t>
+              <a:t>22/28</a:t>
             </a:r>
           </a:p>
         </p:txBody>
@@ -19029,7 +19030,7 @@
                 </a:solidFill>
                 <a:latin typeface="Calibri"/>
               </a:rPr>
-              <a:t>23/27</a:t>
+              <a:t>23/28</a:t>
             </a:r>
           </a:p>
         </p:txBody>
@@ -20028,7 +20029,7 @@
                 </a:solidFill>
                 <a:latin typeface="Calibri"/>
               </a:rPr>
-              <a:t>24/27</a:t>
+              <a:t>24/28</a:t>
             </a:r>
           </a:p>
         </p:txBody>
@@ -20368,7 +20369,7 @@
                 </a:solidFill>
                 <a:latin typeface="Calibri"/>
               </a:rPr>
-              <a:t>25/27</a:t>
+              <a:t>25/28</a:t>
             </a:r>
           </a:p>
         </p:txBody>
@@ -20462,7 +20463,7 @@
                 </a:solidFill>
                 <a:latin typeface="Calibri"/>
               </a:rPr>
-              <a:t>25. Implicações de Política</a:t>
+              <a:t>25. Random Slope GLMM de Gênero — Teto de Remuneração, não de Categoria</a:t>
             </a:r>
           </a:p>
         </p:txBody>
@@ -20497,33 +20498,53 @@
                 </a:solidFill>
                 <a:latin typeface="Calibri"/>
               </a:rPr>
-              <a:t>Três eixos simultâneos — ações isoladas são insuficientes para romper a armadilha estrutural</a:t>
-            </a:r>
-          </a:p>
-        </p:txBody>
-      </p:sp>
-      <p:sp>
-        <p:nvSpPr>
-          <p:cNvPr id="5" name="Rectangle 4"/>
+              <a:t>lme4, população completa | inclinação aleatória de sexo_fem por UF nos 3 desfechos</a:t>
+            </a:r>
+          </a:p>
+        </p:txBody>
+      </p:sp>
+      <p:pic>
+        <p:nvPicPr>
+          <p:cNvPr id="5" name="Picture 4" descr="glmm_genero_real.png"/>
+          <p:cNvPicPr>
+            <a:picLocks noChangeAspect="1"/>
+          </p:cNvPicPr>
+          <p:nvPr/>
+        </p:nvPicPr>
+        <p:blipFill>
+          <a:blip r:embed="rId2"/>
+          <a:stretch>
+            <a:fillRect/>
+          </a:stretch>
+        </p:blipFill>
+        <p:spPr>
+          <a:xfrm>
+            <a:off x="274320" y="1143000"/>
+            <a:ext cx="11612880" cy="3870960"/>
+          </a:xfrm>
+          <a:prstGeom prst="rect">
+            <a:avLst/>
+          </a:prstGeom>
+        </p:spPr>
+      </p:pic>
+      <p:sp>
+        <p:nvSpPr>
+          <p:cNvPr id="6" name="Rectangle 5"/>
           <p:cNvSpPr/>
           <p:nvPr/>
         </p:nvSpPr>
         <p:spPr>
           <a:xfrm>
-            <a:off x="274320" y="1097280"/>
-            <a:ext cx="3749039" cy="5029200"/>
+            <a:off x="274320" y="5943600"/>
+            <a:ext cx="11612880" cy="658368"/>
           </a:xfrm>
           <a:prstGeom prst="rect">
             <a:avLst/>
           </a:prstGeom>
           <a:solidFill>
-            <a:srgbClr val="F5F5F5"/>
+            <a:srgbClr val="7B3294"/>
           </a:solidFill>
-          <a:ln w="19050">
-            <a:solidFill>
-              <a:srgbClr val="B71C1C"/>
-            </a:solidFill>
-          </a:ln>
+          <a:ln/>
         </p:spPr>
         <p:style>
           <a:lnRef idx="1">
@@ -20549,20 +20570,55 @@
       </p:sp>
       <p:sp>
         <p:nvSpPr>
-          <p:cNvPr id="6" name="Rectangle 5"/>
+          <p:cNvPr id="7" name="TextBox 6"/>
+          <p:cNvSpPr txBox="1"/>
+          <p:nvPr/>
+        </p:nvSpPr>
+        <p:spPr>
+          <a:xfrm>
+            <a:off x="457200" y="5998464"/>
+            <a:ext cx="11247120" cy="566928"/>
+          </a:xfrm>
+          <a:prstGeom prst="rect">
+            <a:avLst/>
+          </a:prstGeom>
+          <a:noFill/>
+        </p:spPr>
+        <p:txBody>
+          <a:bodyPr wrap="square">
+            <a:spAutoFit/>
+          </a:bodyPr>
+          <a:lstStyle/>
+          <a:p>
+            <a:pPr algn="ctr"/>
+            <a:r>
+              <a:rPr sz="1100" b="1" i="0">
+                <a:solidFill>
+                  <a:srgbClr val="FFFFFF"/>
+                </a:solidFill>
+                <a:latin typeface="Calibri"/>
+              </a:rPr>
+              <a:t>Mulheres: MAIS acesso a ocupações qualificadas (OR=2,01&gt;1, profissões feminizadas) mas MUITO MENOS ao topo de renda (OR top10=0,522). Teto de vidro de gênero = REMUNERAÇÃO, não categoria — e varia mais entre estados que o racial (~10x no topo).</a:t>
+            </a:r>
+          </a:p>
+        </p:txBody>
+      </p:sp>
+      <p:sp>
+        <p:nvSpPr>
+          <p:cNvPr id="8" name="Rectangle 7"/>
           <p:cNvSpPr/>
           <p:nvPr/>
         </p:nvSpPr>
         <p:spPr>
           <a:xfrm>
-            <a:off x="274320" y="1097280"/>
-            <a:ext cx="3749039" cy="502920"/>
+            <a:off x="0" y="6601968"/>
+            <a:ext cx="12188952" cy="256032"/>
           </a:xfrm>
           <a:prstGeom prst="rect">
             <a:avLst/>
           </a:prstGeom>
           <a:solidFill>
-            <a:srgbClr val="B71C1C"/>
+            <a:srgbClr val="1F3864"/>
           </a:solidFill>
           <a:ln/>
         </p:spPr>
@@ -20590,684 +20646,7 @@
       </p:sp>
       <p:sp>
         <p:nvSpPr>
-          <p:cNvPr id="7" name="TextBox 6"/>
-          <p:cNvSpPr txBox="1"/>
-          <p:nvPr/>
-        </p:nvSpPr>
-        <p:spPr>
-          <a:xfrm>
-            <a:off x="365760" y="1143000"/>
-            <a:ext cx="3566160" cy="457200"/>
-          </a:xfrm>
-          <a:prstGeom prst="rect">
-            <a:avLst/>
-          </a:prstGeom>
-          <a:noFill/>
-        </p:spPr>
-        <p:txBody>
-          <a:bodyPr wrap="square">
-            <a:spAutoFit/>
-          </a:bodyPr>
-          <a:lstStyle/>
-          <a:p>
-            <a:pPr algn="l"/>
-            <a:r>
-              <a:rPr sz="1300" b="1" i="0">
-                <a:solidFill>
-                  <a:srgbClr val="FFFFFF"/>
-                </a:solidFill>
-                <a:latin typeface="Calibri"/>
-              </a:rPr>
-              <a:t>Eixo 1 — Acesso</a:t>
-            </a:r>
-          </a:p>
-        </p:txBody>
-      </p:sp>
-      <p:sp>
-        <p:nvSpPr>
-          <p:cNvPr id="8" name="TextBox 7"/>
-          <p:cNvSpPr txBox="1"/>
-          <p:nvPr/>
-        </p:nvSpPr>
-        <p:spPr>
-          <a:xfrm>
-            <a:off x="457200" y="1691640"/>
-            <a:ext cx="3383280" cy="731520"/>
-          </a:xfrm>
-          <a:prstGeom prst="rect">
-            <a:avLst/>
-          </a:prstGeom>
-          <a:noFill/>
-        </p:spPr>
-        <p:txBody>
-          <a:bodyPr wrap="square">
-            <a:spAutoFit/>
-          </a:bodyPr>
-          <a:lstStyle/>
-          <a:p>
-            <a:pPr algn="l"/>
-            <a:r>
-              <a:rPr sz="1200" b="0" i="0">
-                <a:solidFill>
-                  <a:srgbClr val="212121"/>
-                </a:solidFill>
-                <a:latin typeface="Calibri"/>
-              </a:rPr>
-              <a:t>▸  Cotas de acesso CBO Dirigente/Profissional:
-meta IR ≥ 0,80 até 2030</a:t>
-            </a:r>
-          </a:p>
-        </p:txBody>
-      </p:sp>
-      <p:sp>
-        <p:nvSpPr>
           <p:cNvPr id="9" name="TextBox 8"/>
-          <p:cNvSpPr txBox="1"/>
-          <p:nvPr/>
-        </p:nvSpPr>
-        <p:spPr>
-          <a:xfrm>
-            <a:off x="457200" y="2468880"/>
-            <a:ext cx="3383280" cy="731520"/>
-          </a:xfrm>
-          <a:prstGeom prst="rect">
-            <a:avLst/>
-          </a:prstGeom>
-          <a:noFill/>
-        </p:spPr>
-        <p:txBody>
-          <a:bodyPr wrap="square">
-            <a:spAutoFit/>
-          </a:bodyPr>
-          <a:lstStyle/>
-          <a:p>
-            <a:pPr algn="l"/>
-            <a:r>
-              <a:rPr sz="1200" b="0" i="0">
-                <a:solidFill>
-                  <a:srgbClr val="212121"/>
-                </a:solidFill>
-                <a:latin typeface="Calibri"/>
-              </a:rPr>
-              <a:t>▸  PRONATEC c/ recorte racial e subsídio de
-transporte para trabalhadores de UPAs pobres</a:t>
-            </a:r>
-          </a:p>
-        </p:txBody>
-      </p:sp>
-      <p:sp>
-        <p:nvSpPr>
-          <p:cNvPr id="10" name="TextBox 9"/>
-          <p:cNvSpPr txBox="1"/>
-          <p:nvPr/>
-        </p:nvSpPr>
-        <p:spPr>
-          <a:xfrm>
-            <a:off x="457200" y="3246120"/>
-            <a:ext cx="3383280" cy="731520"/>
-          </a:xfrm>
-          <a:prstGeom prst="rect">
-            <a:avLst/>
-          </a:prstGeom>
-          <a:noFill/>
-        </p:spPr>
-        <p:txBody>
-          <a:bodyPr wrap="square">
-            <a:spAutoFit/>
-          </a:bodyPr>
-          <a:lstStyle/>
-          <a:p>
-            <a:pPr algn="l"/>
-            <a:r>
-              <a:rPr sz="1200" b="0" i="0">
-                <a:solidFill>
-                  <a:srgbClr val="212121"/>
-                </a:solidFill>
-                <a:latin typeface="Calibri"/>
-              </a:rPr>
-              <a:t>▸  Bolsas de residência profissional em empresas
-de alta remuneração para egressos negros</a:t>
-            </a:r>
-          </a:p>
-        </p:txBody>
-      </p:sp>
-      <p:sp>
-        <p:nvSpPr>
-          <p:cNvPr id="11" name="Rectangle 10"/>
-          <p:cNvSpPr/>
-          <p:nvPr/>
-        </p:nvSpPr>
-        <p:spPr>
-          <a:xfrm>
-            <a:off x="4251959" y="1097280"/>
-            <a:ext cx="3749039" cy="5029200"/>
-          </a:xfrm>
-          <a:prstGeom prst="rect">
-            <a:avLst/>
-          </a:prstGeom>
-          <a:solidFill>
-            <a:srgbClr val="F5F5F5"/>
-          </a:solidFill>
-          <a:ln w="19050">
-            <a:solidFill>
-              <a:srgbClr val="1565C0"/>
-            </a:solidFill>
-          </a:ln>
-        </p:spPr>
-        <p:style>
-          <a:lnRef idx="1">
-            <a:schemeClr val="accent1"/>
-          </a:lnRef>
-          <a:fillRef idx="3">
-            <a:schemeClr val="accent1"/>
-          </a:fillRef>
-          <a:effectRef idx="2">
-            <a:schemeClr val="accent1"/>
-          </a:effectRef>
-          <a:fontRef idx="minor">
-            <a:schemeClr val="lt1"/>
-          </a:fontRef>
-        </p:style>
-        <p:txBody>
-          <a:bodyPr rtlCol="0" anchor="ctr"/>
-          <a:lstStyle/>
-          <a:p>
-            <a:pPr algn="ctr"/>
-          </a:p>
-        </p:txBody>
-      </p:sp>
-      <p:sp>
-        <p:nvSpPr>
-          <p:cNvPr id="12" name="Rectangle 11"/>
-          <p:cNvSpPr/>
-          <p:nvPr/>
-        </p:nvSpPr>
-        <p:spPr>
-          <a:xfrm>
-            <a:off x="4251959" y="1097280"/>
-            <a:ext cx="3749039" cy="502920"/>
-          </a:xfrm>
-          <a:prstGeom prst="rect">
-            <a:avLst/>
-          </a:prstGeom>
-          <a:solidFill>
-            <a:srgbClr val="1565C0"/>
-          </a:solidFill>
-          <a:ln/>
-        </p:spPr>
-        <p:style>
-          <a:lnRef idx="1">
-            <a:schemeClr val="accent1"/>
-          </a:lnRef>
-          <a:fillRef idx="3">
-            <a:schemeClr val="accent1"/>
-          </a:fillRef>
-          <a:effectRef idx="2">
-            <a:schemeClr val="accent1"/>
-          </a:effectRef>
-          <a:fontRef idx="minor">
-            <a:schemeClr val="lt1"/>
-          </a:fontRef>
-        </p:style>
-        <p:txBody>
-          <a:bodyPr rtlCol="0" anchor="ctr"/>
-          <a:lstStyle/>
-          <a:p>
-            <a:pPr algn="ctr"/>
-          </a:p>
-        </p:txBody>
-      </p:sp>
-      <p:sp>
-        <p:nvSpPr>
-          <p:cNvPr id="13" name="TextBox 12"/>
-          <p:cNvSpPr txBox="1"/>
-          <p:nvPr/>
-        </p:nvSpPr>
-        <p:spPr>
-          <a:xfrm>
-            <a:off x="4343399" y="1143000"/>
-            <a:ext cx="3566160" cy="457200"/>
-          </a:xfrm>
-          <a:prstGeom prst="rect">
-            <a:avLst/>
-          </a:prstGeom>
-          <a:noFill/>
-        </p:spPr>
-        <p:txBody>
-          <a:bodyPr wrap="square">
-            <a:spAutoFit/>
-          </a:bodyPr>
-          <a:lstStyle/>
-          <a:p>
-            <a:pPr algn="l"/>
-            <a:r>
-              <a:rPr sz="1300" b="1" i="0">
-                <a:solidFill>
-                  <a:srgbClr val="FFFFFF"/>
-                </a:solidFill>
-                <a:latin typeface="Calibri"/>
-              </a:rPr>
-              <a:t>Eixo 2 — Remuneração</a:t>
-            </a:r>
-          </a:p>
-        </p:txBody>
-      </p:sp>
-      <p:sp>
-        <p:nvSpPr>
-          <p:cNvPr id="14" name="TextBox 13"/>
-          <p:cNvSpPr txBox="1"/>
-          <p:nvPr/>
-        </p:nvSpPr>
-        <p:spPr>
-          <a:xfrm>
-            <a:off x="4434839" y="1691640"/>
-            <a:ext cx="3383280" cy="731520"/>
-          </a:xfrm>
-          <a:prstGeom prst="rect">
-            <a:avLst/>
-          </a:prstGeom>
-          <a:noFill/>
-        </p:spPr>
-        <p:txBody>
-          <a:bodyPr wrap="square">
-            <a:spAutoFit/>
-          </a:bodyPr>
-          <a:lstStyle/>
-          <a:p>
-            <a:pPr algn="l"/>
-            <a:r>
-              <a:rPr sz="1200" b="0" i="0">
-                <a:solidFill>
-                  <a:srgbClr val="212121"/>
-                </a:solidFill>
-                <a:latin typeface="Calibri"/>
-              </a:rPr>
-              <a:t>▸  Transparência salarial por raça/gênero
-obrigatória (empresas &gt; 100 funcionários)</a:t>
-            </a:r>
-          </a:p>
-        </p:txBody>
-      </p:sp>
-      <p:sp>
-        <p:nvSpPr>
-          <p:cNvPr id="15" name="TextBox 14"/>
-          <p:cNvSpPr txBox="1"/>
-          <p:nvPr/>
-        </p:nvSpPr>
-        <p:spPr>
-          <a:xfrm>
-            <a:off x="4434839" y="2468880"/>
-            <a:ext cx="3383280" cy="731520"/>
-          </a:xfrm>
-          <a:prstGeom prst="rect">
-            <a:avLst/>
-          </a:prstGeom>
-          <a:noFill/>
-        </p:spPr>
-        <p:txBody>
-          <a:bodyPr wrap="square">
-            <a:spAutoFit/>
-          </a:bodyPr>
-          <a:lstStyle/>
-          <a:p>
-            <a:pPr algn="l"/>
-            <a:r>
-              <a:rPr sz="1200" b="0" i="0">
-                <a:solidFill>
-                  <a:srgbClr val="212121"/>
-                </a:solidFill>
-                <a:latin typeface="Calibri"/>
-              </a:rPr>
-              <a:t>▸  Auditoria de igual pagamento por trabalho igual
-com penalidades progressivas (gap HLM M4)</a:t>
-            </a:r>
-          </a:p>
-        </p:txBody>
-      </p:sp>
-      <p:sp>
-        <p:nvSpPr>
-          <p:cNvPr id="16" name="TextBox 15"/>
-          <p:cNvSpPr txBox="1"/>
-          <p:nvPr/>
-        </p:nvSpPr>
-        <p:spPr>
-          <a:xfrm>
-            <a:off x="4434839" y="3246120"/>
-            <a:ext cx="3383280" cy="731520"/>
-          </a:xfrm>
-          <a:prstGeom prst="rect">
-            <a:avLst/>
-          </a:prstGeom>
-          <a:noFill/>
-        </p:spPr>
-        <p:txBody>
-          <a:bodyPr wrap="square">
-            <a:spAutoFit/>
-          </a:bodyPr>
-          <a:lstStyle/>
-          <a:p>
-            <a:pPr algn="l"/>
-            <a:r>
-              <a:rPr sz="1200" b="0" i="0">
-                <a:solidFill>
-                  <a:srgbClr val="212121"/>
-                </a:solidFill>
-                <a:latin typeface="Calibri"/>
-              </a:rPr>
-              <a:t>▸  Piso salarial indexado nas categorias com
-maior gap racial residual (6,2% HLM M4)</a:t>
-            </a:r>
-          </a:p>
-        </p:txBody>
-      </p:sp>
-      <p:sp>
-        <p:nvSpPr>
-          <p:cNvPr id="17" name="Rectangle 16"/>
-          <p:cNvSpPr/>
-          <p:nvPr/>
-        </p:nvSpPr>
-        <p:spPr>
-          <a:xfrm>
-            <a:off x="8229598" y="1097280"/>
-            <a:ext cx="3749039" cy="5029200"/>
-          </a:xfrm>
-          <a:prstGeom prst="rect">
-            <a:avLst/>
-          </a:prstGeom>
-          <a:solidFill>
-            <a:srgbClr val="F5F5F5"/>
-          </a:solidFill>
-          <a:ln w="19050">
-            <a:solidFill>
-              <a:srgbClr val="2E7D32"/>
-            </a:solidFill>
-          </a:ln>
-        </p:spPr>
-        <p:style>
-          <a:lnRef idx="1">
-            <a:schemeClr val="accent1"/>
-          </a:lnRef>
-          <a:fillRef idx="3">
-            <a:schemeClr val="accent1"/>
-          </a:fillRef>
-          <a:effectRef idx="2">
-            <a:schemeClr val="accent1"/>
-          </a:effectRef>
-          <a:fontRef idx="minor">
-            <a:schemeClr val="lt1"/>
-          </a:fontRef>
-        </p:style>
-        <p:txBody>
-          <a:bodyPr rtlCol="0" anchor="ctr"/>
-          <a:lstStyle/>
-          <a:p>
-            <a:pPr algn="ctr"/>
-          </a:p>
-        </p:txBody>
-      </p:sp>
-      <p:sp>
-        <p:nvSpPr>
-          <p:cNvPr id="18" name="Rectangle 17"/>
-          <p:cNvSpPr/>
-          <p:nvPr/>
-        </p:nvSpPr>
-        <p:spPr>
-          <a:xfrm>
-            <a:off x="8229598" y="1097280"/>
-            <a:ext cx="3749039" cy="502920"/>
-          </a:xfrm>
-          <a:prstGeom prst="rect">
-            <a:avLst/>
-          </a:prstGeom>
-          <a:solidFill>
-            <a:srgbClr val="2E7D32"/>
-          </a:solidFill>
-          <a:ln/>
-        </p:spPr>
-        <p:style>
-          <a:lnRef idx="1">
-            <a:schemeClr val="accent1"/>
-          </a:lnRef>
-          <a:fillRef idx="3">
-            <a:schemeClr val="accent1"/>
-          </a:fillRef>
-          <a:effectRef idx="2">
-            <a:schemeClr val="accent1"/>
-          </a:effectRef>
-          <a:fontRef idx="minor">
-            <a:schemeClr val="lt1"/>
-          </a:fontRef>
-        </p:style>
-        <p:txBody>
-          <a:bodyPr rtlCol="0" anchor="ctr"/>
-          <a:lstStyle/>
-          <a:p>
-            <a:pPr algn="ctr"/>
-          </a:p>
-        </p:txBody>
-      </p:sp>
-      <p:sp>
-        <p:nvSpPr>
-          <p:cNvPr id="19" name="TextBox 18"/>
-          <p:cNvSpPr txBox="1"/>
-          <p:nvPr/>
-        </p:nvSpPr>
-        <p:spPr>
-          <a:xfrm>
-            <a:off x="8321038" y="1143000"/>
-            <a:ext cx="3566160" cy="457200"/>
-          </a:xfrm>
-          <a:prstGeom prst="rect">
-            <a:avLst/>
-          </a:prstGeom>
-          <a:noFill/>
-        </p:spPr>
-        <p:txBody>
-          <a:bodyPr wrap="square">
-            <a:spAutoFit/>
-          </a:bodyPr>
-          <a:lstStyle/>
-          <a:p>
-            <a:pPr algn="l"/>
-            <a:r>
-              <a:rPr sz="1300" b="1" i="0">
-                <a:solidFill>
-                  <a:srgbClr val="FFFFFF"/>
-                </a:solidFill>
-                <a:latin typeface="Calibri"/>
-              </a:rPr>
-              <a:t>Eixo 3 — Inclusão Produtiva</a:t>
-            </a:r>
-          </a:p>
-        </p:txBody>
-      </p:sp>
-      <p:sp>
-        <p:nvSpPr>
-          <p:cNvPr id="20" name="TextBox 19"/>
-          <p:cNvSpPr txBox="1"/>
-          <p:nvPr/>
-        </p:nvSpPr>
-        <p:spPr>
-          <a:xfrm>
-            <a:off x="8412478" y="1691640"/>
-            <a:ext cx="3383280" cy="731520"/>
-          </a:xfrm>
-          <a:prstGeom prst="rect">
-            <a:avLst/>
-          </a:prstGeom>
-          <a:noFill/>
-        </p:spPr>
-        <p:txBody>
-          <a:bodyPr wrap="square">
-            <a:spAutoFit/>
-          </a:bodyPr>
-          <a:lstStyle/>
-          <a:p>
-            <a:pPr algn="l"/>
-            <a:r>
-              <a:rPr sz="1200" b="0" i="0">
-                <a:solidFill>
-                  <a:srgbClr val="212121"/>
-                </a:solidFill>
-                <a:latin typeface="Calibri"/>
-              </a:rPr>
-              <a:t>▸  Mentoria estruturada para elevar betweenness
-de negros nas redes profissionais (SNA: =0)</a:t>
-            </a:r>
-          </a:p>
-        </p:txBody>
-      </p:sp>
-      <p:sp>
-        <p:nvSpPr>
-          <p:cNvPr id="21" name="TextBox 20"/>
-          <p:cNvSpPr txBox="1"/>
-          <p:nvPr/>
-        </p:nvSpPr>
-        <p:spPr>
-          <a:xfrm>
-            <a:off x="8412478" y="2468880"/>
-            <a:ext cx="3383280" cy="731520"/>
-          </a:xfrm>
-          <a:prstGeom prst="rect">
-            <a:avLst/>
-          </a:prstGeom>
-          <a:noFill/>
-        </p:spPr>
-        <p:txBody>
-          <a:bodyPr wrap="square">
-            <a:spAutoFit/>
-          </a:bodyPr>
-          <a:lstStyle/>
-          <a:p>
-            <a:pPr algn="l"/>
-            <a:r>
-              <a:rPr sz="1200" b="0" i="0">
-                <a:solidFill>
-                  <a:srgbClr val="212121"/>
-                </a:solidFill>
-                <a:latin typeface="Calibri"/>
-              </a:rPr>
-              <a:t>▸  30% dos cargos DAS e liderança corporativa
-para negros até 2030 (inclusão nas redes)</a:t>
-            </a:r>
-          </a:p>
-        </p:txBody>
-      </p:sp>
-      <p:sp>
-        <p:nvSpPr>
-          <p:cNvPr id="22" name="TextBox 21"/>
-          <p:cNvSpPr txBox="1"/>
-          <p:nvPr/>
-        </p:nvSpPr>
-        <p:spPr>
-          <a:xfrm>
-            <a:off x="8412478" y="3246120"/>
-            <a:ext cx="3383280" cy="731520"/>
-          </a:xfrm>
-          <a:prstGeom prst="rect">
-            <a:avLst/>
-          </a:prstGeom>
-          <a:noFill/>
-        </p:spPr>
-        <p:txBody>
-          <a:bodyPr wrap="square">
-            <a:spAutoFit/>
-          </a:bodyPr>
-          <a:lstStyle/>
-          <a:p>
-            <a:pPr algn="l"/>
-            <a:r>
-              <a:rPr sz="1200" b="0" i="0">
-                <a:solidFill>
-                  <a:srgbClr val="212121"/>
-                </a:solidFill>
-                <a:latin typeface="Calibri"/>
-              </a:rPr>
-              <a:t>▸  Equalizar CBO = +127,3% renda negra
-(proxy agregado: ~74 p.p.; ver nota metodológica)</a:t>
-            </a:r>
-          </a:p>
-        </p:txBody>
-      </p:sp>
-      <p:sp>
-        <p:nvSpPr>
-          <p:cNvPr id="23" name="TextBox 22"/>
-          <p:cNvSpPr txBox="1"/>
-          <p:nvPr/>
-        </p:nvSpPr>
-        <p:spPr>
-          <a:xfrm>
-            <a:off x="274320" y="6217920"/>
-            <a:ext cx="11612880" cy="411480"/>
-          </a:xfrm>
-          <a:prstGeom prst="rect">
-            <a:avLst/>
-          </a:prstGeom>
-          <a:noFill/>
-        </p:spPr>
-        <p:txBody>
-          <a:bodyPr wrap="square">
-            <a:spAutoFit/>
-          </a:bodyPr>
-          <a:lstStyle/>
-          <a:p>
-            <a:pPr algn="ctr"/>
-            <a:r>
-              <a:rPr sz="1300" b="1" i="0">
-                <a:solidFill>
-                  <a:srgbClr val="B71C1C"/>
-                </a:solidFill>
-                <a:latin typeface="Calibri"/>
-              </a:rPr>
-              <a:t>⚠  Ao ritmo atual de convergência (~0,02 log-pontos/ano), eliminar o gap levaria mais de 100 anos.</a:t>
-            </a:r>
-          </a:p>
-        </p:txBody>
-      </p:sp>
-      <p:sp>
-        <p:nvSpPr>
-          <p:cNvPr id="24" name="Rectangle 23"/>
-          <p:cNvSpPr/>
-          <p:nvPr/>
-        </p:nvSpPr>
-        <p:spPr>
-          <a:xfrm>
-            <a:off x="0" y="6601968"/>
-            <a:ext cx="12188952" cy="256032"/>
-          </a:xfrm>
-          <a:prstGeom prst="rect">
-            <a:avLst/>
-          </a:prstGeom>
-          <a:solidFill>
-            <a:srgbClr val="1F3864"/>
-          </a:solidFill>
-          <a:ln/>
-        </p:spPr>
-        <p:style>
-          <a:lnRef idx="1">
-            <a:schemeClr val="accent1"/>
-          </a:lnRef>
-          <a:fillRef idx="3">
-            <a:schemeClr val="accent1"/>
-          </a:fillRef>
-          <a:effectRef idx="2">
-            <a:schemeClr val="accent1"/>
-          </a:effectRef>
-          <a:fontRef idx="minor">
-            <a:schemeClr val="lt1"/>
-          </a:fontRef>
-        </p:style>
-        <p:txBody>
-          <a:bodyPr rtlCol="0" anchor="ctr"/>
-          <a:lstStyle/>
-          <a:p>
-            <a:pPr algn="ctr"/>
-          </a:p>
-        </p:txBody>
-      </p:sp>
-      <p:sp>
-        <p:nvSpPr>
-          <p:cNvPr id="25" name="TextBox 24"/>
           <p:cNvSpPr txBox="1"/>
           <p:nvPr/>
         </p:nvSpPr>
@@ -21302,7 +20681,7 @@
       </p:sp>
       <p:sp>
         <p:nvSpPr>
-          <p:cNvPr id="26" name="TextBox 25"/>
+          <p:cNvPr id="10" name="TextBox 9"/>
           <p:cNvSpPr txBox="1"/>
           <p:nvPr/>
         </p:nvSpPr>
@@ -21330,7 +20709,7 @@
                 </a:solidFill>
                 <a:latin typeface="Calibri"/>
               </a:rPr>
-              <a:t>26/27</a:t>
+              <a:t>26/28</a:t>
             </a:r>
           </a:p>
         </p:txBody>
@@ -21424,7 +20803,7 @@
                 </a:solidFill>
                 <a:latin typeface="Calibri"/>
               </a:rPr>
-              <a:t>26. Limitações e Agenda Futura</a:t>
+              <a:t>26. Implicações de Política</a:t>
             </a:r>
           </a:p>
         </p:txBody>
@@ -21459,370 +20838,33 @@
                 </a:solidFill>
                 <a:latin typeface="Calibri"/>
               </a:rPr>
-              <a:t>Honestidade acadêmica: o que este trabalho não faz e por quê</a:t>
-            </a:r>
-          </a:p>
-        </p:txBody>
-      </p:sp>
-      <p:sp>
-        <p:nvSpPr>
-          <p:cNvPr id="5" name="TextBox 4"/>
-          <p:cNvSpPr txBox="1"/>
-          <p:nvPr/>
-        </p:nvSpPr>
-        <p:spPr>
-          <a:xfrm>
-            <a:off x="365760" y="1143000"/>
-            <a:ext cx="5486400" cy="365760"/>
-          </a:xfrm>
-          <a:prstGeom prst="rect">
-            <a:avLst/>
-          </a:prstGeom>
-          <a:noFill/>
-        </p:spPr>
-        <p:txBody>
-          <a:bodyPr wrap="square">
-            <a:spAutoFit/>
-          </a:bodyPr>
-          <a:lstStyle/>
-          <a:p>
-            <a:pPr algn="l"/>
-            <a:r>
-              <a:rPr sz="1600" b="1" i="0">
-                <a:solidFill>
-                  <a:srgbClr val="B71C1C"/>
-                </a:solidFill>
-                <a:latin typeface="Calibri"/>
-              </a:rPr>
-              <a:t>Limitações</a:t>
-            </a:r>
-          </a:p>
-        </p:txBody>
-      </p:sp>
-      <p:sp>
-        <p:nvSpPr>
-          <p:cNvPr id="6" name="TextBox 5"/>
-          <p:cNvSpPr txBox="1"/>
-          <p:nvPr/>
-        </p:nvSpPr>
-        <p:spPr>
-          <a:xfrm>
-            <a:off x="365760" y="1600200"/>
-            <a:ext cx="5669280" cy="3474720"/>
-          </a:xfrm>
-          <a:prstGeom prst="rect">
-            <a:avLst/>
-          </a:prstGeom>
-          <a:noFill/>
-        </p:spPr>
-        <p:txBody>
-          <a:bodyPr wrap="square">
-            <a:spAutoFit/>
-          </a:bodyPr>
-          <a:lstStyle/>
-          <a:p>
-            <a:pPr>
-              <a:spcAft>
-                <a:spcPts val="400"/>
-              </a:spcAft>
-            </a:pPr>
-            <a:r>
-              <a:rPr sz="1300" b="1">
-                <a:solidFill>
-                  <a:srgbClr val="B71C1C"/>
-                </a:solidFill>
-                <a:latin typeface="Calibri"/>
-              </a:rPr>
-              <a:t>▸  </a:t>
-            </a:r>
-            <a:r>
-              <a:rPr sz="1300">
-                <a:solidFill>
-                  <a:srgbClr val="212121"/>
-                </a:solidFill>
-                <a:latin typeface="Calibri"/>
-              </a:rPr>
-              <a:t>PNAD não permite experimentos causais — coeficientes são associações condicionais, não efeitos causais no sentido de Rubin/Pearl</a:t>
-            </a:r>
-          </a:p>
-          <a:p>
-            <a:pPr>
-              <a:spcAft>
-                <a:spcPts val="400"/>
-              </a:spcAft>
-            </a:pPr>
-            <a:r>
-              <a:rPr sz="1300" b="1">
-                <a:solidFill>
-                  <a:srgbClr val="B71C1C"/>
-                </a:solidFill>
-                <a:latin typeface="Calibri"/>
-              </a:rPr>
-              <a:t>▸  </a:t>
-            </a:r>
-            <a:r>
-              <a:rPr sz="1300">
-                <a:solidFill>
-                  <a:srgbClr val="212121"/>
-                </a:solidFill>
-                <a:latin typeface="Calibri"/>
-              </a:rPr>
-              <a:t>UPA como proxy de bairro: unidade de amostragem ≠ bairro administrativo</a:t>
-            </a:r>
-          </a:p>
-          <a:p>
-            <a:pPr>
-              <a:spcAft>
-                <a:spcPts val="400"/>
-              </a:spcAft>
-            </a:pPr>
-            <a:r>
-              <a:rPr sz="1300" b="1">
-                <a:solidFill>
-                  <a:srgbClr val="B71C1C"/>
-                </a:solidFill>
-                <a:latin typeface="Calibri"/>
-              </a:rPr>
-              <a:t>▸  </a:t>
-            </a:r>
-            <a:r>
-              <a:rPr sz="1300">
-                <a:solidFill>
-                  <a:srgbClr val="212121"/>
-                </a:solidFill>
-                <a:latin typeface="Calibri"/>
-              </a:rPr>
-              <a:t>GLMM logístico estimado na PEA completa via lme4::glmer (nAGQ=0, bobyqa, n=7,7M, 40,9k UPAs); random slope de negro no GLMM não estimado por custo — porém o random slope foi estimado no HLM de salário (base da PO regionalizada por UF)</a:t>
-            </a:r>
-          </a:p>
-          <a:p>
-            <a:pPr>
-              <a:spcAft>
-                <a:spcPts val="400"/>
-              </a:spcAft>
-            </a:pPr>
-            <a:r>
-              <a:rPr sz="1300" b="1">
-                <a:solidFill>
-                  <a:srgbClr val="B71C1C"/>
-                </a:solidFill>
-                <a:latin typeface="Calibri"/>
-              </a:rPr>
-              <a:t>▸  </a:t>
-            </a:r>
-            <a:r>
-              <a:rPr sz="1300">
-                <a:solidFill>
-                  <a:srgbClr val="212121"/>
-                </a:solidFill>
-                <a:latin typeface="Calibri"/>
-              </a:rPr>
-              <a:t>CBO auto-declarado pode ter viés de classificação por raça (deflation de ocupação)</a:t>
-            </a:r>
-          </a:p>
-        </p:txBody>
-      </p:sp>
-      <p:sp>
-        <p:nvSpPr>
-          <p:cNvPr id="7" name="TextBox 6"/>
-          <p:cNvSpPr txBox="1"/>
-          <p:nvPr/>
-        </p:nvSpPr>
-        <p:spPr>
-          <a:xfrm>
-            <a:off x="6400800" y="1143000"/>
-            <a:ext cx="5486400" cy="365760"/>
-          </a:xfrm>
-          <a:prstGeom prst="rect">
-            <a:avLst/>
-          </a:prstGeom>
-          <a:noFill/>
-        </p:spPr>
-        <p:txBody>
-          <a:bodyPr wrap="square">
-            <a:spAutoFit/>
-          </a:bodyPr>
-          <a:lstStyle/>
-          <a:p>
-            <a:pPr algn="l"/>
-            <a:r>
-              <a:rPr sz="1600" b="1" i="0">
-                <a:solidFill>
-                  <a:srgbClr val="1565C0"/>
-                </a:solidFill>
-                <a:latin typeface="Calibri"/>
-              </a:rPr>
-              <a:t>Agenda Futura</a:t>
-            </a:r>
-          </a:p>
-        </p:txBody>
-      </p:sp>
-      <p:sp>
-        <p:nvSpPr>
-          <p:cNvPr id="8" name="TextBox 7"/>
-          <p:cNvSpPr txBox="1"/>
-          <p:nvPr/>
-        </p:nvSpPr>
-        <p:spPr>
-          <a:xfrm>
-            <a:off x="6400800" y="1600200"/>
-            <a:ext cx="5669280" cy="3474720"/>
-          </a:xfrm>
-          <a:prstGeom prst="rect">
-            <a:avLst/>
-          </a:prstGeom>
-          <a:noFill/>
-        </p:spPr>
-        <p:txBody>
-          <a:bodyPr wrap="square">
-            <a:spAutoFit/>
-          </a:bodyPr>
-          <a:lstStyle/>
-          <a:p>
-            <a:pPr>
-              <a:spcAft>
-                <a:spcPts val="400"/>
-              </a:spcAft>
-            </a:pPr>
-            <a:r>
-              <a:rPr sz="1300" b="1">
-                <a:solidFill>
-                  <a:srgbClr val="1565C0"/>
-                </a:solidFill>
-                <a:latin typeface="Calibri"/>
-              </a:rPr>
-              <a:t>▸  </a:t>
-            </a:r>
-            <a:r>
-              <a:rPr sz="1300">
-                <a:solidFill>
-                  <a:srgbClr val="212121"/>
-                </a:solidFill>
-                <a:latin typeface="Calibri"/>
-              </a:rPr>
-              <a:t>Análise de variáveis instrumentais (IV) para identificação causal — distância à escola técnica como instrumento</a:t>
-            </a:r>
-          </a:p>
-          <a:p>
-            <a:pPr>
-              <a:spcAft>
-                <a:spcPts val="400"/>
-              </a:spcAft>
-            </a:pPr>
-            <a:r>
-              <a:rPr sz="1300" b="1">
-                <a:solidFill>
-                  <a:srgbClr val="1565C0"/>
-                </a:solidFill>
-                <a:latin typeface="Calibri"/>
-              </a:rPr>
-              <a:t>▸  </a:t>
-            </a:r>
-            <a:r>
-              <a:rPr sz="1300">
-                <a:solidFill>
-                  <a:srgbClr val="212121"/>
-                </a:solidFill>
-                <a:latin typeface="Calibri"/>
-              </a:rPr>
-              <a:t>RAIS linkada à PNAD para rastrear trajetórias de mobilidade intraempresa</a:t>
-            </a:r>
-          </a:p>
-          <a:p>
-            <a:pPr>
-              <a:spcAft>
-                <a:spcPts val="400"/>
-              </a:spcAft>
-            </a:pPr>
-            <a:r>
-              <a:rPr sz="1300" b="1">
-                <a:solidFill>
-                  <a:srgbClr val="1565C0"/>
-                </a:solidFill>
-                <a:latin typeface="Calibri"/>
-              </a:rPr>
-              <a:t>▸  </a:t>
-            </a:r>
-            <a:r>
-              <a:rPr sz="1300">
-                <a:solidFill>
-                  <a:srgbClr val="212121"/>
-                </a:solidFill>
-                <a:latin typeface="Calibri"/>
-              </a:rPr>
-              <a:t>Análise de mediação formal (path analysis) raça → ocupação → renda</a:t>
-            </a:r>
-          </a:p>
-          <a:p>
-            <a:pPr>
-              <a:spcAft>
-                <a:spcPts val="400"/>
-              </a:spcAft>
-            </a:pPr>
-            <a:r>
-              <a:rPr sz="1300" b="1">
-                <a:solidFill>
-                  <a:srgbClr val="1565C0"/>
-                </a:solidFill>
-                <a:latin typeface="Calibri"/>
-              </a:rPr>
-              <a:t>▸  </a:t>
-            </a:r>
-            <a:r>
-              <a:rPr sz="1300">
-                <a:solidFill>
-                  <a:srgbClr val="212121"/>
-                </a:solidFill>
-                <a:latin typeface="Calibri"/>
-              </a:rPr>
-              <a:t>Extensão ao setor público por UF — heterogeneidade do glass ceiling entre estados</a:t>
-            </a:r>
-          </a:p>
-          <a:p>
-            <a:pPr>
-              <a:spcAft>
-                <a:spcPts val="400"/>
-              </a:spcAft>
-            </a:pPr>
-            <a:r>
-              <a:rPr sz="1300" b="1">
-                <a:solidFill>
-                  <a:srgbClr val="1565C0"/>
-                </a:solidFill>
-                <a:latin typeface="Calibri"/>
-              </a:rPr>
-              <a:t>▸  </a:t>
-            </a:r>
-            <a:r>
-              <a:rPr sz="1300">
-                <a:solidFill>
-                  <a:srgbClr val="212121"/>
-                </a:solidFill>
-                <a:latin typeface="Calibri"/>
-              </a:rPr>
-              <a:t>Modelo longitudinal com painéis rotativos da PNAD (2T seguidos) para efeitos fixos de indivíduo</a:t>
-            </a:r>
-          </a:p>
-        </p:txBody>
-      </p:sp>
-      <p:sp>
-        <p:nvSpPr>
-          <p:cNvPr id="9" name="Rectangle 8"/>
+              <a:t>Três eixos simultâneos — ações isoladas são insuficientes para romper a armadilha estrutural</a:t>
+            </a:r>
+          </a:p>
+        </p:txBody>
+      </p:sp>
+      <p:sp>
+        <p:nvSpPr>
+          <p:cNvPr id="5" name="Rectangle 4"/>
           <p:cNvSpPr/>
           <p:nvPr/>
         </p:nvSpPr>
         <p:spPr>
           <a:xfrm>
-            <a:off x="0" y="6601968"/>
-            <a:ext cx="12188952" cy="256032"/>
+            <a:off x="274320" y="1097280"/>
+            <a:ext cx="3749039" cy="5029200"/>
           </a:xfrm>
           <a:prstGeom prst="rect">
             <a:avLst/>
           </a:prstGeom>
           <a:solidFill>
-            <a:srgbClr val="1F3864"/>
+            <a:srgbClr val="F5F5F5"/>
           </a:solidFill>
-          <a:ln/>
+          <a:ln w="19050">
+            <a:solidFill>
+              <a:srgbClr val="B71C1C"/>
+            </a:solidFill>
+          </a:ln>
         </p:spPr>
         <p:style>
           <a:lnRef idx="1">
@@ -21848,7 +20890,725 @@
       </p:sp>
       <p:sp>
         <p:nvSpPr>
+          <p:cNvPr id="6" name="Rectangle 5"/>
+          <p:cNvSpPr/>
+          <p:nvPr/>
+        </p:nvSpPr>
+        <p:spPr>
+          <a:xfrm>
+            <a:off x="274320" y="1097280"/>
+            <a:ext cx="3749039" cy="502920"/>
+          </a:xfrm>
+          <a:prstGeom prst="rect">
+            <a:avLst/>
+          </a:prstGeom>
+          <a:solidFill>
+            <a:srgbClr val="B71C1C"/>
+          </a:solidFill>
+          <a:ln/>
+        </p:spPr>
+        <p:style>
+          <a:lnRef idx="1">
+            <a:schemeClr val="accent1"/>
+          </a:lnRef>
+          <a:fillRef idx="3">
+            <a:schemeClr val="accent1"/>
+          </a:fillRef>
+          <a:effectRef idx="2">
+            <a:schemeClr val="accent1"/>
+          </a:effectRef>
+          <a:fontRef idx="minor">
+            <a:schemeClr val="lt1"/>
+          </a:fontRef>
+        </p:style>
+        <p:txBody>
+          <a:bodyPr rtlCol="0" anchor="ctr"/>
+          <a:lstStyle/>
+          <a:p>
+            <a:pPr algn="ctr"/>
+          </a:p>
+        </p:txBody>
+      </p:sp>
+      <p:sp>
+        <p:nvSpPr>
+          <p:cNvPr id="7" name="TextBox 6"/>
+          <p:cNvSpPr txBox="1"/>
+          <p:nvPr/>
+        </p:nvSpPr>
+        <p:spPr>
+          <a:xfrm>
+            <a:off x="365760" y="1143000"/>
+            <a:ext cx="3566160" cy="457200"/>
+          </a:xfrm>
+          <a:prstGeom prst="rect">
+            <a:avLst/>
+          </a:prstGeom>
+          <a:noFill/>
+        </p:spPr>
+        <p:txBody>
+          <a:bodyPr wrap="square">
+            <a:spAutoFit/>
+          </a:bodyPr>
+          <a:lstStyle/>
+          <a:p>
+            <a:pPr algn="l"/>
+            <a:r>
+              <a:rPr sz="1300" b="1" i="0">
+                <a:solidFill>
+                  <a:srgbClr val="FFFFFF"/>
+                </a:solidFill>
+                <a:latin typeface="Calibri"/>
+              </a:rPr>
+              <a:t>Eixo 1 — Acesso</a:t>
+            </a:r>
+          </a:p>
+        </p:txBody>
+      </p:sp>
+      <p:sp>
+        <p:nvSpPr>
+          <p:cNvPr id="8" name="TextBox 7"/>
+          <p:cNvSpPr txBox="1"/>
+          <p:nvPr/>
+        </p:nvSpPr>
+        <p:spPr>
+          <a:xfrm>
+            <a:off x="457200" y="1691640"/>
+            <a:ext cx="3383280" cy="731520"/>
+          </a:xfrm>
+          <a:prstGeom prst="rect">
+            <a:avLst/>
+          </a:prstGeom>
+          <a:noFill/>
+        </p:spPr>
+        <p:txBody>
+          <a:bodyPr wrap="square">
+            <a:spAutoFit/>
+          </a:bodyPr>
+          <a:lstStyle/>
+          <a:p>
+            <a:pPr algn="l"/>
+            <a:r>
+              <a:rPr sz="1200" b="0" i="0">
+                <a:solidFill>
+                  <a:srgbClr val="212121"/>
+                </a:solidFill>
+                <a:latin typeface="Calibri"/>
+              </a:rPr>
+              <a:t>▸  Cotas de acesso CBO Dirigente/Profissional:
+meta IR ≥ 0,80 até 2030</a:t>
+            </a:r>
+          </a:p>
+        </p:txBody>
+      </p:sp>
+      <p:sp>
+        <p:nvSpPr>
+          <p:cNvPr id="9" name="TextBox 8"/>
+          <p:cNvSpPr txBox="1"/>
+          <p:nvPr/>
+        </p:nvSpPr>
+        <p:spPr>
+          <a:xfrm>
+            <a:off x="457200" y="2468880"/>
+            <a:ext cx="3383280" cy="731520"/>
+          </a:xfrm>
+          <a:prstGeom prst="rect">
+            <a:avLst/>
+          </a:prstGeom>
+          <a:noFill/>
+        </p:spPr>
+        <p:txBody>
+          <a:bodyPr wrap="square">
+            <a:spAutoFit/>
+          </a:bodyPr>
+          <a:lstStyle/>
+          <a:p>
+            <a:pPr algn="l"/>
+            <a:r>
+              <a:rPr sz="1200" b="0" i="0">
+                <a:solidFill>
+                  <a:srgbClr val="212121"/>
+                </a:solidFill>
+                <a:latin typeface="Calibri"/>
+              </a:rPr>
+              <a:t>▸  PRONATEC c/ recorte racial e subsídio de
+transporte para trabalhadores de UPAs pobres</a:t>
+            </a:r>
+          </a:p>
+        </p:txBody>
+      </p:sp>
+      <p:sp>
+        <p:nvSpPr>
           <p:cNvPr id="10" name="TextBox 9"/>
+          <p:cNvSpPr txBox="1"/>
+          <p:nvPr/>
+        </p:nvSpPr>
+        <p:spPr>
+          <a:xfrm>
+            <a:off x="457200" y="3246120"/>
+            <a:ext cx="3383280" cy="731520"/>
+          </a:xfrm>
+          <a:prstGeom prst="rect">
+            <a:avLst/>
+          </a:prstGeom>
+          <a:noFill/>
+        </p:spPr>
+        <p:txBody>
+          <a:bodyPr wrap="square">
+            <a:spAutoFit/>
+          </a:bodyPr>
+          <a:lstStyle/>
+          <a:p>
+            <a:pPr algn="l"/>
+            <a:r>
+              <a:rPr sz="1200" b="0" i="0">
+                <a:solidFill>
+                  <a:srgbClr val="212121"/>
+                </a:solidFill>
+                <a:latin typeface="Calibri"/>
+              </a:rPr>
+              <a:t>▸  Bolsas de residência profissional em empresas
+de alta remuneração para egressos negros</a:t>
+            </a:r>
+          </a:p>
+        </p:txBody>
+      </p:sp>
+      <p:sp>
+        <p:nvSpPr>
+          <p:cNvPr id="11" name="Rectangle 10"/>
+          <p:cNvSpPr/>
+          <p:nvPr/>
+        </p:nvSpPr>
+        <p:spPr>
+          <a:xfrm>
+            <a:off x="4251959" y="1097280"/>
+            <a:ext cx="3749039" cy="5029200"/>
+          </a:xfrm>
+          <a:prstGeom prst="rect">
+            <a:avLst/>
+          </a:prstGeom>
+          <a:solidFill>
+            <a:srgbClr val="F5F5F5"/>
+          </a:solidFill>
+          <a:ln w="19050">
+            <a:solidFill>
+              <a:srgbClr val="1565C0"/>
+            </a:solidFill>
+          </a:ln>
+        </p:spPr>
+        <p:style>
+          <a:lnRef idx="1">
+            <a:schemeClr val="accent1"/>
+          </a:lnRef>
+          <a:fillRef idx="3">
+            <a:schemeClr val="accent1"/>
+          </a:fillRef>
+          <a:effectRef idx="2">
+            <a:schemeClr val="accent1"/>
+          </a:effectRef>
+          <a:fontRef idx="minor">
+            <a:schemeClr val="lt1"/>
+          </a:fontRef>
+        </p:style>
+        <p:txBody>
+          <a:bodyPr rtlCol="0" anchor="ctr"/>
+          <a:lstStyle/>
+          <a:p>
+            <a:pPr algn="ctr"/>
+          </a:p>
+        </p:txBody>
+      </p:sp>
+      <p:sp>
+        <p:nvSpPr>
+          <p:cNvPr id="12" name="Rectangle 11"/>
+          <p:cNvSpPr/>
+          <p:nvPr/>
+        </p:nvSpPr>
+        <p:spPr>
+          <a:xfrm>
+            <a:off x="4251959" y="1097280"/>
+            <a:ext cx="3749039" cy="502920"/>
+          </a:xfrm>
+          <a:prstGeom prst="rect">
+            <a:avLst/>
+          </a:prstGeom>
+          <a:solidFill>
+            <a:srgbClr val="1565C0"/>
+          </a:solidFill>
+          <a:ln/>
+        </p:spPr>
+        <p:style>
+          <a:lnRef idx="1">
+            <a:schemeClr val="accent1"/>
+          </a:lnRef>
+          <a:fillRef idx="3">
+            <a:schemeClr val="accent1"/>
+          </a:fillRef>
+          <a:effectRef idx="2">
+            <a:schemeClr val="accent1"/>
+          </a:effectRef>
+          <a:fontRef idx="minor">
+            <a:schemeClr val="lt1"/>
+          </a:fontRef>
+        </p:style>
+        <p:txBody>
+          <a:bodyPr rtlCol="0" anchor="ctr"/>
+          <a:lstStyle/>
+          <a:p>
+            <a:pPr algn="ctr"/>
+          </a:p>
+        </p:txBody>
+      </p:sp>
+      <p:sp>
+        <p:nvSpPr>
+          <p:cNvPr id="13" name="TextBox 12"/>
+          <p:cNvSpPr txBox="1"/>
+          <p:nvPr/>
+        </p:nvSpPr>
+        <p:spPr>
+          <a:xfrm>
+            <a:off x="4343399" y="1143000"/>
+            <a:ext cx="3566160" cy="457200"/>
+          </a:xfrm>
+          <a:prstGeom prst="rect">
+            <a:avLst/>
+          </a:prstGeom>
+          <a:noFill/>
+        </p:spPr>
+        <p:txBody>
+          <a:bodyPr wrap="square">
+            <a:spAutoFit/>
+          </a:bodyPr>
+          <a:lstStyle/>
+          <a:p>
+            <a:pPr algn="l"/>
+            <a:r>
+              <a:rPr sz="1300" b="1" i="0">
+                <a:solidFill>
+                  <a:srgbClr val="FFFFFF"/>
+                </a:solidFill>
+                <a:latin typeface="Calibri"/>
+              </a:rPr>
+              <a:t>Eixo 2 — Remuneração</a:t>
+            </a:r>
+          </a:p>
+        </p:txBody>
+      </p:sp>
+      <p:sp>
+        <p:nvSpPr>
+          <p:cNvPr id="14" name="TextBox 13"/>
+          <p:cNvSpPr txBox="1"/>
+          <p:nvPr/>
+        </p:nvSpPr>
+        <p:spPr>
+          <a:xfrm>
+            <a:off x="4434839" y="1691640"/>
+            <a:ext cx="3383280" cy="731520"/>
+          </a:xfrm>
+          <a:prstGeom prst="rect">
+            <a:avLst/>
+          </a:prstGeom>
+          <a:noFill/>
+        </p:spPr>
+        <p:txBody>
+          <a:bodyPr wrap="square">
+            <a:spAutoFit/>
+          </a:bodyPr>
+          <a:lstStyle/>
+          <a:p>
+            <a:pPr algn="l"/>
+            <a:r>
+              <a:rPr sz="1200" b="0" i="0">
+                <a:solidFill>
+                  <a:srgbClr val="212121"/>
+                </a:solidFill>
+                <a:latin typeface="Calibri"/>
+              </a:rPr>
+              <a:t>▸  Transparência salarial por raça/gênero
+obrigatória (empresas &gt; 100 funcionários)</a:t>
+            </a:r>
+          </a:p>
+        </p:txBody>
+      </p:sp>
+      <p:sp>
+        <p:nvSpPr>
+          <p:cNvPr id="15" name="TextBox 14"/>
+          <p:cNvSpPr txBox="1"/>
+          <p:nvPr/>
+        </p:nvSpPr>
+        <p:spPr>
+          <a:xfrm>
+            <a:off x="4434839" y="2468880"/>
+            <a:ext cx="3383280" cy="731520"/>
+          </a:xfrm>
+          <a:prstGeom prst="rect">
+            <a:avLst/>
+          </a:prstGeom>
+          <a:noFill/>
+        </p:spPr>
+        <p:txBody>
+          <a:bodyPr wrap="square">
+            <a:spAutoFit/>
+          </a:bodyPr>
+          <a:lstStyle/>
+          <a:p>
+            <a:pPr algn="l"/>
+            <a:r>
+              <a:rPr sz="1200" b="0" i="0">
+                <a:solidFill>
+                  <a:srgbClr val="212121"/>
+                </a:solidFill>
+                <a:latin typeface="Calibri"/>
+              </a:rPr>
+              <a:t>▸  Auditoria de igual pagamento por trabalho igual
+com penalidades progressivas (gap HLM M4)</a:t>
+            </a:r>
+          </a:p>
+        </p:txBody>
+      </p:sp>
+      <p:sp>
+        <p:nvSpPr>
+          <p:cNvPr id="16" name="TextBox 15"/>
+          <p:cNvSpPr txBox="1"/>
+          <p:nvPr/>
+        </p:nvSpPr>
+        <p:spPr>
+          <a:xfrm>
+            <a:off x="4434839" y="3246120"/>
+            <a:ext cx="3383280" cy="731520"/>
+          </a:xfrm>
+          <a:prstGeom prst="rect">
+            <a:avLst/>
+          </a:prstGeom>
+          <a:noFill/>
+        </p:spPr>
+        <p:txBody>
+          <a:bodyPr wrap="square">
+            <a:spAutoFit/>
+          </a:bodyPr>
+          <a:lstStyle/>
+          <a:p>
+            <a:pPr algn="l"/>
+            <a:r>
+              <a:rPr sz="1200" b="0" i="0">
+                <a:solidFill>
+                  <a:srgbClr val="212121"/>
+                </a:solidFill>
+                <a:latin typeface="Calibri"/>
+              </a:rPr>
+              <a:t>▸  Piso salarial indexado nas categorias com
+maior gap racial residual (6,2% HLM M4)</a:t>
+            </a:r>
+          </a:p>
+        </p:txBody>
+      </p:sp>
+      <p:sp>
+        <p:nvSpPr>
+          <p:cNvPr id="17" name="Rectangle 16"/>
+          <p:cNvSpPr/>
+          <p:nvPr/>
+        </p:nvSpPr>
+        <p:spPr>
+          <a:xfrm>
+            <a:off x="8229598" y="1097280"/>
+            <a:ext cx="3749039" cy="5029200"/>
+          </a:xfrm>
+          <a:prstGeom prst="rect">
+            <a:avLst/>
+          </a:prstGeom>
+          <a:solidFill>
+            <a:srgbClr val="F5F5F5"/>
+          </a:solidFill>
+          <a:ln w="19050">
+            <a:solidFill>
+              <a:srgbClr val="2E7D32"/>
+            </a:solidFill>
+          </a:ln>
+        </p:spPr>
+        <p:style>
+          <a:lnRef idx="1">
+            <a:schemeClr val="accent1"/>
+          </a:lnRef>
+          <a:fillRef idx="3">
+            <a:schemeClr val="accent1"/>
+          </a:fillRef>
+          <a:effectRef idx="2">
+            <a:schemeClr val="accent1"/>
+          </a:effectRef>
+          <a:fontRef idx="minor">
+            <a:schemeClr val="lt1"/>
+          </a:fontRef>
+        </p:style>
+        <p:txBody>
+          <a:bodyPr rtlCol="0" anchor="ctr"/>
+          <a:lstStyle/>
+          <a:p>
+            <a:pPr algn="ctr"/>
+          </a:p>
+        </p:txBody>
+      </p:sp>
+      <p:sp>
+        <p:nvSpPr>
+          <p:cNvPr id="18" name="Rectangle 17"/>
+          <p:cNvSpPr/>
+          <p:nvPr/>
+        </p:nvSpPr>
+        <p:spPr>
+          <a:xfrm>
+            <a:off x="8229598" y="1097280"/>
+            <a:ext cx="3749039" cy="502920"/>
+          </a:xfrm>
+          <a:prstGeom prst="rect">
+            <a:avLst/>
+          </a:prstGeom>
+          <a:solidFill>
+            <a:srgbClr val="2E7D32"/>
+          </a:solidFill>
+          <a:ln/>
+        </p:spPr>
+        <p:style>
+          <a:lnRef idx="1">
+            <a:schemeClr val="accent1"/>
+          </a:lnRef>
+          <a:fillRef idx="3">
+            <a:schemeClr val="accent1"/>
+          </a:fillRef>
+          <a:effectRef idx="2">
+            <a:schemeClr val="accent1"/>
+          </a:effectRef>
+          <a:fontRef idx="minor">
+            <a:schemeClr val="lt1"/>
+          </a:fontRef>
+        </p:style>
+        <p:txBody>
+          <a:bodyPr rtlCol="0" anchor="ctr"/>
+          <a:lstStyle/>
+          <a:p>
+            <a:pPr algn="ctr"/>
+          </a:p>
+        </p:txBody>
+      </p:sp>
+      <p:sp>
+        <p:nvSpPr>
+          <p:cNvPr id="19" name="TextBox 18"/>
+          <p:cNvSpPr txBox="1"/>
+          <p:nvPr/>
+        </p:nvSpPr>
+        <p:spPr>
+          <a:xfrm>
+            <a:off x="8321038" y="1143000"/>
+            <a:ext cx="3566160" cy="457200"/>
+          </a:xfrm>
+          <a:prstGeom prst="rect">
+            <a:avLst/>
+          </a:prstGeom>
+          <a:noFill/>
+        </p:spPr>
+        <p:txBody>
+          <a:bodyPr wrap="square">
+            <a:spAutoFit/>
+          </a:bodyPr>
+          <a:lstStyle/>
+          <a:p>
+            <a:pPr algn="l"/>
+            <a:r>
+              <a:rPr sz="1300" b="1" i="0">
+                <a:solidFill>
+                  <a:srgbClr val="FFFFFF"/>
+                </a:solidFill>
+                <a:latin typeface="Calibri"/>
+              </a:rPr>
+              <a:t>Eixo 3 — Inclusão Produtiva</a:t>
+            </a:r>
+          </a:p>
+        </p:txBody>
+      </p:sp>
+      <p:sp>
+        <p:nvSpPr>
+          <p:cNvPr id="20" name="TextBox 19"/>
+          <p:cNvSpPr txBox="1"/>
+          <p:nvPr/>
+        </p:nvSpPr>
+        <p:spPr>
+          <a:xfrm>
+            <a:off x="8412478" y="1691640"/>
+            <a:ext cx="3383280" cy="731520"/>
+          </a:xfrm>
+          <a:prstGeom prst="rect">
+            <a:avLst/>
+          </a:prstGeom>
+          <a:noFill/>
+        </p:spPr>
+        <p:txBody>
+          <a:bodyPr wrap="square">
+            <a:spAutoFit/>
+          </a:bodyPr>
+          <a:lstStyle/>
+          <a:p>
+            <a:pPr algn="l"/>
+            <a:r>
+              <a:rPr sz="1200" b="0" i="0">
+                <a:solidFill>
+                  <a:srgbClr val="212121"/>
+                </a:solidFill>
+                <a:latin typeface="Calibri"/>
+              </a:rPr>
+              <a:t>▸  Mentoria estruturada para elevar betweenness
+de negros nas redes profissionais (SNA: =0)</a:t>
+            </a:r>
+          </a:p>
+        </p:txBody>
+      </p:sp>
+      <p:sp>
+        <p:nvSpPr>
+          <p:cNvPr id="21" name="TextBox 20"/>
+          <p:cNvSpPr txBox="1"/>
+          <p:nvPr/>
+        </p:nvSpPr>
+        <p:spPr>
+          <a:xfrm>
+            <a:off x="8412478" y="2468880"/>
+            <a:ext cx="3383280" cy="731520"/>
+          </a:xfrm>
+          <a:prstGeom prst="rect">
+            <a:avLst/>
+          </a:prstGeom>
+          <a:noFill/>
+        </p:spPr>
+        <p:txBody>
+          <a:bodyPr wrap="square">
+            <a:spAutoFit/>
+          </a:bodyPr>
+          <a:lstStyle/>
+          <a:p>
+            <a:pPr algn="l"/>
+            <a:r>
+              <a:rPr sz="1200" b="0" i="0">
+                <a:solidFill>
+                  <a:srgbClr val="212121"/>
+                </a:solidFill>
+                <a:latin typeface="Calibri"/>
+              </a:rPr>
+              <a:t>▸  30% dos cargos DAS e liderança corporativa
+para negros até 2030 (inclusão nas redes)</a:t>
+            </a:r>
+          </a:p>
+        </p:txBody>
+      </p:sp>
+      <p:sp>
+        <p:nvSpPr>
+          <p:cNvPr id="22" name="TextBox 21"/>
+          <p:cNvSpPr txBox="1"/>
+          <p:nvPr/>
+        </p:nvSpPr>
+        <p:spPr>
+          <a:xfrm>
+            <a:off x="8412478" y="3246120"/>
+            <a:ext cx="3383280" cy="731520"/>
+          </a:xfrm>
+          <a:prstGeom prst="rect">
+            <a:avLst/>
+          </a:prstGeom>
+          <a:noFill/>
+        </p:spPr>
+        <p:txBody>
+          <a:bodyPr wrap="square">
+            <a:spAutoFit/>
+          </a:bodyPr>
+          <a:lstStyle/>
+          <a:p>
+            <a:pPr algn="l"/>
+            <a:r>
+              <a:rPr sz="1200" b="0" i="0">
+                <a:solidFill>
+                  <a:srgbClr val="212121"/>
+                </a:solidFill>
+                <a:latin typeface="Calibri"/>
+              </a:rPr>
+              <a:t>▸  Equalizar CBO = +127,3% renda negra
+(proxy agregado: ~74 p.p.; ver nota metodológica)</a:t>
+            </a:r>
+          </a:p>
+        </p:txBody>
+      </p:sp>
+      <p:sp>
+        <p:nvSpPr>
+          <p:cNvPr id="23" name="TextBox 22"/>
+          <p:cNvSpPr txBox="1"/>
+          <p:nvPr/>
+        </p:nvSpPr>
+        <p:spPr>
+          <a:xfrm>
+            <a:off x="274320" y="6217920"/>
+            <a:ext cx="11612880" cy="411480"/>
+          </a:xfrm>
+          <a:prstGeom prst="rect">
+            <a:avLst/>
+          </a:prstGeom>
+          <a:noFill/>
+        </p:spPr>
+        <p:txBody>
+          <a:bodyPr wrap="square">
+            <a:spAutoFit/>
+          </a:bodyPr>
+          <a:lstStyle/>
+          <a:p>
+            <a:pPr algn="ctr"/>
+            <a:r>
+              <a:rPr sz="1300" b="1" i="0">
+                <a:solidFill>
+                  <a:srgbClr val="B71C1C"/>
+                </a:solidFill>
+                <a:latin typeface="Calibri"/>
+              </a:rPr>
+              <a:t>⚠  Ao ritmo atual de convergência (~0,02 log-pontos/ano), eliminar o gap levaria mais de 100 anos.</a:t>
+            </a:r>
+          </a:p>
+        </p:txBody>
+      </p:sp>
+      <p:sp>
+        <p:nvSpPr>
+          <p:cNvPr id="24" name="Rectangle 23"/>
+          <p:cNvSpPr/>
+          <p:nvPr/>
+        </p:nvSpPr>
+        <p:spPr>
+          <a:xfrm>
+            <a:off x="0" y="6601968"/>
+            <a:ext cx="12188952" cy="256032"/>
+          </a:xfrm>
+          <a:prstGeom prst="rect">
+            <a:avLst/>
+          </a:prstGeom>
+          <a:solidFill>
+            <a:srgbClr val="1F3864"/>
+          </a:solidFill>
+          <a:ln/>
+        </p:spPr>
+        <p:style>
+          <a:lnRef idx="1">
+            <a:schemeClr val="accent1"/>
+          </a:lnRef>
+          <a:fillRef idx="3">
+            <a:schemeClr val="accent1"/>
+          </a:fillRef>
+          <a:effectRef idx="2">
+            <a:schemeClr val="accent1"/>
+          </a:effectRef>
+          <a:fontRef idx="minor">
+            <a:schemeClr val="lt1"/>
+          </a:fontRef>
+        </p:style>
+        <p:txBody>
+          <a:bodyPr rtlCol="0" anchor="ctr"/>
+          <a:lstStyle/>
+          <a:p>
+            <a:pPr algn="ctr"/>
+          </a:p>
+        </p:txBody>
+      </p:sp>
+      <p:sp>
+        <p:nvSpPr>
+          <p:cNvPr id="25" name="TextBox 24"/>
           <p:cNvSpPr txBox="1"/>
           <p:nvPr/>
         </p:nvSpPr>
@@ -21883,7 +21643,7 @@
       </p:sp>
       <p:sp>
         <p:nvSpPr>
-          <p:cNvPr id="11" name="TextBox 10"/>
+          <p:cNvPr id="26" name="TextBox 25"/>
           <p:cNvSpPr txBox="1"/>
           <p:nvPr/>
         </p:nvSpPr>
@@ -21911,7 +21671,7 @@
                 </a:solidFill>
                 <a:latin typeface="Calibri"/>
               </a:rPr>
-              <a:t>27/27</a:t>
+              <a:t>27/28</a:t>
             </a:r>
           </a:p>
         </p:txBody>
@@ -21943,7 +21703,7 @@
         <p:spPr>
           <a:xfrm>
             <a:off x="0" y="0"/>
-            <a:ext cx="12188952" cy="6858000"/>
+            <a:ext cx="12188952" cy="1005840"/>
           </a:xfrm>
           <a:prstGeom prst="rect">
             <a:avLst/>
@@ -21977,20 +21737,431 @@
       </p:sp>
       <p:sp>
         <p:nvSpPr>
-          <p:cNvPr id="3" name="Rectangle 2"/>
+          <p:cNvPr id="3" name="TextBox 2"/>
+          <p:cNvSpPr txBox="1"/>
+          <p:nvPr/>
+        </p:nvSpPr>
+        <p:spPr>
+          <a:xfrm>
+            <a:off x="274320" y="73152"/>
+            <a:ext cx="10972800" cy="502920"/>
+          </a:xfrm>
+          <a:prstGeom prst="rect">
+            <a:avLst/>
+          </a:prstGeom>
+          <a:noFill/>
+        </p:spPr>
+        <p:txBody>
+          <a:bodyPr wrap="square">
+            <a:spAutoFit/>
+          </a:bodyPr>
+          <a:lstStyle/>
+          <a:p>
+            <a:pPr algn="l"/>
+            <a:r>
+              <a:rPr sz="2600" b="1" i="0">
+                <a:solidFill>
+                  <a:srgbClr val="FFFFFF"/>
+                </a:solidFill>
+                <a:latin typeface="Calibri"/>
+              </a:rPr>
+              <a:t>27. Limitações e Agenda Futura</a:t>
+            </a:r>
+          </a:p>
+        </p:txBody>
+      </p:sp>
+      <p:sp>
+        <p:nvSpPr>
+          <p:cNvPr id="4" name="TextBox 3"/>
+          <p:cNvSpPr txBox="1"/>
+          <p:nvPr/>
+        </p:nvSpPr>
+        <p:spPr>
+          <a:xfrm>
+            <a:off x="274320" y="594360"/>
+            <a:ext cx="10972800" cy="347472"/>
+          </a:xfrm>
+          <a:prstGeom prst="rect">
+            <a:avLst/>
+          </a:prstGeom>
+          <a:noFill/>
+        </p:spPr>
+        <p:txBody>
+          <a:bodyPr wrap="square">
+            <a:spAutoFit/>
+          </a:bodyPr>
+          <a:lstStyle/>
+          <a:p>
+            <a:pPr algn="l"/>
+            <a:r>
+              <a:rPr sz="1400" b="0" i="0">
+                <a:solidFill>
+                  <a:srgbClr val="BBDEFB"/>
+                </a:solidFill>
+                <a:latin typeface="Calibri"/>
+              </a:rPr>
+              <a:t>Honestidade acadêmica: o que este trabalho não faz e por quê</a:t>
+            </a:r>
+          </a:p>
+        </p:txBody>
+      </p:sp>
+      <p:sp>
+        <p:nvSpPr>
+          <p:cNvPr id="5" name="TextBox 4"/>
+          <p:cNvSpPr txBox="1"/>
+          <p:nvPr/>
+        </p:nvSpPr>
+        <p:spPr>
+          <a:xfrm>
+            <a:off x="365760" y="1143000"/>
+            <a:ext cx="5486400" cy="365760"/>
+          </a:xfrm>
+          <a:prstGeom prst="rect">
+            <a:avLst/>
+          </a:prstGeom>
+          <a:noFill/>
+        </p:spPr>
+        <p:txBody>
+          <a:bodyPr wrap="square">
+            <a:spAutoFit/>
+          </a:bodyPr>
+          <a:lstStyle/>
+          <a:p>
+            <a:pPr algn="l"/>
+            <a:r>
+              <a:rPr sz="1600" b="1" i="0">
+                <a:solidFill>
+                  <a:srgbClr val="B71C1C"/>
+                </a:solidFill>
+                <a:latin typeface="Calibri"/>
+              </a:rPr>
+              <a:t>Limitações</a:t>
+            </a:r>
+          </a:p>
+        </p:txBody>
+      </p:sp>
+      <p:sp>
+        <p:nvSpPr>
+          <p:cNvPr id="6" name="TextBox 5"/>
+          <p:cNvSpPr txBox="1"/>
+          <p:nvPr/>
+        </p:nvSpPr>
+        <p:spPr>
+          <a:xfrm>
+            <a:off x="365760" y="1600200"/>
+            <a:ext cx="5669280" cy="3474720"/>
+          </a:xfrm>
+          <a:prstGeom prst="rect">
+            <a:avLst/>
+          </a:prstGeom>
+          <a:noFill/>
+        </p:spPr>
+        <p:txBody>
+          <a:bodyPr wrap="square">
+            <a:spAutoFit/>
+          </a:bodyPr>
+          <a:lstStyle/>
+          <a:p>
+            <a:pPr>
+              <a:spcAft>
+                <a:spcPts val="400"/>
+              </a:spcAft>
+            </a:pPr>
+            <a:r>
+              <a:rPr sz="1300" b="1">
+                <a:solidFill>
+                  <a:srgbClr val="B71C1C"/>
+                </a:solidFill>
+                <a:latin typeface="Calibri"/>
+              </a:rPr>
+              <a:t>▸  </a:t>
+            </a:r>
+            <a:r>
+              <a:rPr sz="1300">
+                <a:solidFill>
+                  <a:srgbClr val="212121"/>
+                </a:solidFill>
+                <a:latin typeface="Calibri"/>
+              </a:rPr>
+              <a:t>PNAD não permite experimentos causais — coeficientes são associações condicionais, não efeitos causais no sentido de Rubin/Pearl</a:t>
+            </a:r>
+          </a:p>
+          <a:p>
+            <a:pPr>
+              <a:spcAft>
+                <a:spcPts val="400"/>
+              </a:spcAft>
+            </a:pPr>
+            <a:r>
+              <a:rPr sz="1300" b="1">
+                <a:solidFill>
+                  <a:srgbClr val="B71C1C"/>
+                </a:solidFill>
+                <a:latin typeface="Calibri"/>
+              </a:rPr>
+              <a:t>▸  </a:t>
+            </a:r>
+            <a:r>
+              <a:rPr sz="1300">
+                <a:solidFill>
+                  <a:srgbClr val="212121"/>
+                </a:solidFill>
+                <a:latin typeface="Calibri"/>
+              </a:rPr>
+              <a:t>UPA como proxy de bairro: unidade de amostragem ≠ bairro administrativo</a:t>
+            </a:r>
+          </a:p>
+          <a:p>
+            <a:pPr>
+              <a:spcAft>
+                <a:spcPts val="400"/>
+              </a:spcAft>
+            </a:pPr>
+            <a:r>
+              <a:rPr sz="1300" b="1">
+                <a:solidFill>
+                  <a:srgbClr val="B71C1C"/>
+                </a:solidFill>
+                <a:latin typeface="Calibri"/>
+              </a:rPr>
+              <a:t>▸  </a:t>
+            </a:r>
+            <a:r>
+              <a:rPr sz="1300">
+                <a:solidFill>
+                  <a:srgbClr val="212121"/>
+                </a:solidFill>
+                <a:latin typeface="Calibri"/>
+              </a:rPr>
+              <a:t>GLMM logístico estimado na PEA completa via lme4::glmer (nAGQ=0, bobyqa, n=7,7M, 40,9k UPAs); random slope de negro no GLMM não estimado por custo — porém o random slope foi estimado no HLM de salário (base da PO regionalizada por UF)</a:t>
+            </a:r>
+          </a:p>
+          <a:p>
+            <a:pPr>
+              <a:spcAft>
+                <a:spcPts val="400"/>
+              </a:spcAft>
+            </a:pPr>
+            <a:r>
+              <a:rPr sz="1300" b="1">
+                <a:solidFill>
+                  <a:srgbClr val="B71C1C"/>
+                </a:solidFill>
+                <a:latin typeface="Calibri"/>
+              </a:rPr>
+              <a:t>▸  </a:t>
+            </a:r>
+            <a:r>
+              <a:rPr sz="1300">
+                <a:solidFill>
+                  <a:srgbClr val="212121"/>
+                </a:solidFill>
+                <a:latin typeface="Calibri"/>
+              </a:rPr>
+              <a:t>CBO auto-declarado pode ter viés de classificação por raça (deflation de ocupação)</a:t>
+            </a:r>
+          </a:p>
+        </p:txBody>
+      </p:sp>
+      <p:sp>
+        <p:nvSpPr>
+          <p:cNvPr id="7" name="TextBox 6"/>
+          <p:cNvSpPr txBox="1"/>
+          <p:nvPr/>
+        </p:nvSpPr>
+        <p:spPr>
+          <a:xfrm>
+            <a:off x="6400800" y="1143000"/>
+            <a:ext cx="5486400" cy="365760"/>
+          </a:xfrm>
+          <a:prstGeom prst="rect">
+            <a:avLst/>
+          </a:prstGeom>
+          <a:noFill/>
+        </p:spPr>
+        <p:txBody>
+          <a:bodyPr wrap="square">
+            <a:spAutoFit/>
+          </a:bodyPr>
+          <a:lstStyle/>
+          <a:p>
+            <a:pPr algn="l"/>
+            <a:r>
+              <a:rPr sz="1600" b="1" i="0">
+                <a:solidFill>
+                  <a:srgbClr val="1565C0"/>
+                </a:solidFill>
+                <a:latin typeface="Calibri"/>
+              </a:rPr>
+              <a:t>Agenda Futura</a:t>
+            </a:r>
+          </a:p>
+        </p:txBody>
+      </p:sp>
+      <p:sp>
+        <p:nvSpPr>
+          <p:cNvPr id="8" name="TextBox 7"/>
+          <p:cNvSpPr txBox="1"/>
+          <p:nvPr/>
+        </p:nvSpPr>
+        <p:spPr>
+          <a:xfrm>
+            <a:off x="6400800" y="1600200"/>
+            <a:ext cx="5669280" cy="3474720"/>
+          </a:xfrm>
+          <a:prstGeom prst="rect">
+            <a:avLst/>
+          </a:prstGeom>
+          <a:noFill/>
+        </p:spPr>
+        <p:txBody>
+          <a:bodyPr wrap="square">
+            <a:spAutoFit/>
+          </a:bodyPr>
+          <a:lstStyle/>
+          <a:p>
+            <a:pPr>
+              <a:spcAft>
+                <a:spcPts val="400"/>
+              </a:spcAft>
+            </a:pPr>
+            <a:r>
+              <a:rPr sz="1300" b="1">
+                <a:solidFill>
+                  <a:srgbClr val="1565C0"/>
+                </a:solidFill>
+                <a:latin typeface="Calibri"/>
+              </a:rPr>
+              <a:t>▸  </a:t>
+            </a:r>
+            <a:r>
+              <a:rPr sz="1300">
+                <a:solidFill>
+                  <a:srgbClr val="212121"/>
+                </a:solidFill>
+                <a:latin typeface="Calibri"/>
+              </a:rPr>
+              <a:t>Análise de variáveis instrumentais (IV) para identificação causal — distância à escola técnica como instrumento</a:t>
+            </a:r>
+          </a:p>
+          <a:p>
+            <a:pPr>
+              <a:spcAft>
+                <a:spcPts val="400"/>
+              </a:spcAft>
+            </a:pPr>
+            <a:r>
+              <a:rPr sz="1300" b="1">
+                <a:solidFill>
+                  <a:srgbClr val="1565C0"/>
+                </a:solidFill>
+                <a:latin typeface="Calibri"/>
+              </a:rPr>
+              <a:t>▸  </a:t>
+            </a:r>
+            <a:r>
+              <a:rPr sz="1300">
+                <a:solidFill>
+                  <a:srgbClr val="212121"/>
+                </a:solidFill>
+                <a:latin typeface="Calibri"/>
+              </a:rPr>
+              <a:t>RAIS linkada à PNAD para rastrear trajetórias de mobilidade intraempresa</a:t>
+            </a:r>
+          </a:p>
+          <a:p>
+            <a:pPr>
+              <a:spcAft>
+                <a:spcPts val="400"/>
+              </a:spcAft>
+            </a:pPr>
+            <a:r>
+              <a:rPr sz="1300" b="1">
+                <a:solidFill>
+                  <a:srgbClr val="1565C0"/>
+                </a:solidFill>
+                <a:latin typeface="Calibri"/>
+              </a:rPr>
+              <a:t>▸  </a:t>
+            </a:r>
+            <a:r>
+              <a:rPr sz="1300">
+                <a:solidFill>
+                  <a:srgbClr val="212121"/>
+                </a:solidFill>
+                <a:latin typeface="Calibri"/>
+              </a:rPr>
+              <a:t>Análise de mediação formal (path analysis) raça → ocupação → renda</a:t>
+            </a:r>
+          </a:p>
+          <a:p>
+            <a:pPr>
+              <a:spcAft>
+                <a:spcPts val="400"/>
+              </a:spcAft>
+            </a:pPr>
+            <a:r>
+              <a:rPr sz="1300" b="1">
+                <a:solidFill>
+                  <a:srgbClr val="1565C0"/>
+                </a:solidFill>
+                <a:latin typeface="Calibri"/>
+              </a:rPr>
+              <a:t>▸  </a:t>
+            </a:r>
+            <a:r>
+              <a:rPr sz="1300">
+                <a:solidFill>
+                  <a:srgbClr val="212121"/>
+                </a:solidFill>
+                <a:latin typeface="Calibri"/>
+              </a:rPr>
+              <a:t>Extensão ao setor público por UF — heterogeneidade do glass ceiling entre estados</a:t>
+            </a:r>
+          </a:p>
+          <a:p>
+            <a:pPr>
+              <a:spcAft>
+                <a:spcPts val="400"/>
+              </a:spcAft>
+            </a:pPr>
+            <a:r>
+              <a:rPr sz="1300" b="1">
+                <a:solidFill>
+                  <a:srgbClr val="1565C0"/>
+                </a:solidFill>
+                <a:latin typeface="Calibri"/>
+              </a:rPr>
+              <a:t>▸  </a:t>
+            </a:r>
+            <a:r>
+              <a:rPr sz="1300">
+                <a:solidFill>
+                  <a:srgbClr val="212121"/>
+                </a:solidFill>
+                <a:latin typeface="Calibri"/>
+              </a:rPr>
+              <a:t>Modelo longitudinal com painéis rotativos da PNAD (2T seguidos) para efeitos fixos de indivíduo</a:t>
+            </a:r>
+          </a:p>
+        </p:txBody>
+      </p:sp>
+      <p:sp>
+        <p:nvSpPr>
+          <p:cNvPr id="9" name="Rectangle 8"/>
           <p:cNvSpPr/>
           <p:nvPr/>
         </p:nvSpPr>
         <p:spPr>
           <a:xfrm>
-            <a:off x="0" y="0"/>
-            <a:ext cx="12188952" cy="731520"/>
+            <a:off x="0" y="6601968"/>
+            <a:ext cx="12188952" cy="256032"/>
           </a:xfrm>
           <a:prstGeom prst="rect">
             <a:avLst/>
           </a:prstGeom>
           <a:solidFill>
-            <a:srgbClr val="0D1F3C"/>
+            <a:srgbClr val="1F3864"/>
           </a:solidFill>
           <a:ln/>
         </p:spPr>
@@ -22018,6 +22189,176 @@
       </p:sp>
       <p:sp>
         <p:nvSpPr>
+          <p:cNvPr id="10" name="TextBox 9"/>
+          <p:cNvSpPr txBox="1"/>
+          <p:nvPr/>
+        </p:nvSpPr>
+        <p:spPr>
+          <a:xfrm>
+            <a:off x="137160" y="6629400"/>
+            <a:ext cx="10058400" cy="228600"/>
+          </a:xfrm>
+          <a:prstGeom prst="rect">
+            <a:avLst/>
+          </a:prstGeom>
+          <a:noFill/>
+        </p:spPr>
+        <p:txBody>
+          <a:bodyPr wrap="square">
+            <a:spAutoFit/>
+          </a:bodyPr>
+          <a:lstStyle/>
+          <a:p>
+            <a:pPr algn="l"/>
+            <a:r>
+              <a:rPr sz="850" b="0" i="0">
+                <a:solidFill>
+                  <a:srgbClr val="BBDEFB"/>
+                </a:solidFill>
+                <a:latin typeface="Calibri"/>
+              </a:rPr>
+              <a:t>Ricardo Calheiros  |  MBA USP/ESALQ  |  Racismo Estrutural e Mercado de Trabalho</a:t>
+            </a:r>
+          </a:p>
+        </p:txBody>
+      </p:sp>
+      <p:sp>
+        <p:nvSpPr>
+          <p:cNvPr id="11" name="TextBox 10"/>
+          <p:cNvSpPr txBox="1"/>
+          <p:nvPr/>
+        </p:nvSpPr>
+        <p:spPr>
+          <a:xfrm>
+            <a:off x="11704320" y="6629400"/>
+            <a:ext cx="457200" cy="228600"/>
+          </a:xfrm>
+          <a:prstGeom prst="rect">
+            <a:avLst/>
+          </a:prstGeom>
+          <a:noFill/>
+        </p:spPr>
+        <p:txBody>
+          <a:bodyPr wrap="square">
+            <a:spAutoFit/>
+          </a:bodyPr>
+          <a:lstStyle/>
+          <a:p>
+            <a:pPr algn="r"/>
+            <a:r>
+              <a:rPr sz="850" b="0" i="0">
+                <a:solidFill>
+                  <a:srgbClr val="FFFFFF"/>
+                </a:solidFill>
+                <a:latin typeface="Calibri"/>
+              </a:rPr>
+              <a:t>28/28</a:t>
+            </a:r>
+          </a:p>
+        </p:txBody>
+      </p:sp>
+    </p:spTree>
+  </p:cSld>
+  <p:clrMapOvr>
+    <a:masterClrMapping/>
+  </p:clrMapOvr>
+</p:sld>
+</file>
+
+<file path=ppt/slides/slide29.xml><?xml version="1.0" encoding="utf-8"?>
+<p:sld xmlns:a="http://schemas.openxmlformats.org/drawingml/2006/main" xmlns:p="http://schemas.openxmlformats.org/presentationml/2006/main" xmlns:r="http://schemas.openxmlformats.org/officeDocument/2006/relationships">
+  <p:cSld>
+    <p:spTree>
+      <p:nvGrpSpPr>
+        <p:cNvPr id="1" name=""/>
+        <p:cNvGrpSpPr/>
+        <p:nvPr/>
+      </p:nvGrpSpPr>
+      <p:grpSpPr/>
+      <p:sp>
+        <p:nvSpPr>
+          <p:cNvPr id="2" name="Rectangle 1"/>
+          <p:cNvSpPr/>
+          <p:nvPr/>
+        </p:nvSpPr>
+        <p:spPr>
+          <a:xfrm>
+            <a:off x="0" y="0"/>
+            <a:ext cx="12188952" cy="6858000"/>
+          </a:xfrm>
+          <a:prstGeom prst="rect">
+            <a:avLst/>
+          </a:prstGeom>
+          <a:solidFill>
+            <a:srgbClr val="1F3864"/>
+          </a:solidFill>
+          <a:ln/>
+        </p:spPr>
+        <p:style>
+          <a:lnRef idx="1">
+            <a:schemeClr val="accent1"/>
+          </a:lnRef>
+          <a:fillRef idx="3">
+            <a:schemeClr val="accent1"/>
+          </a:fillRef>
+          <a:effectRef idx="2">
+            <a:schemeClr val="accent1"/>
+          </a:effectRef>
+          <a:fontRef idx="minor">
+            <a:schemeClr val="lt1"/>
+          </a:fontRef>
+        </p:style>
+        <p:txBody>
+          <a:bodyPr rtlCol="0" anchor="ctr"/>
+          <a:lstStyle/>
+          <a:p>
+            <a:pPr algn="ctr"/>
+          </a:p>
+        </p:txBody>
+      </p:sp>
+      <p:sp>
+        <p:nvSpPr>
+          <p:cNvPr id="3" name="Rectangle 2"/>
+          <p:cNvSpPr/>
+          <p:nvPr/>
+        </p:nvSpPr>
+        <p:spPr>
+          <a:xfrm>
+            <a:off x="0" y="0"/>
+            <a:ext cx="12188952" cy="731520"/>
+          </a:xfrm>
+          <a:prstGeom prst="rect">
+            <a:avLst/>
+          </a:prstGeom>
+          <a:solidFill>
+            <a:srgbClr val="0D1F3C"/>
+          </a:solidFill>
+          <a:ln/>
+        </p:spPr>
+        <p:style>
+          <a:lnRef idx="1">
+            <a:schemeClr val="accent1"/>
+          </a:lnRef>
+          <a:fillRef idx="3">
+            <a:schemeClr val="accent1"/>
+          </a:fillRef>
+          <a:effectRef idx="2">
+            <a:schemeClr val="accent1"/>
+          </a:effectRef>
+          <a:fontRef idx="minor">
+            <a:schemeClr val="lt1"/>
+          </a:fontRef>
+        </p:style>
+        <p:txBody>
+          <a:bodyPr rtlCol="0" anchor="ctr"/>
+          <a:lstStyle/>
+          <a:p>
+            <a:pPr algn="ctr"/>
+          </a:p>
+        </p:txBody>
+      </p:sp>
+      <p:sp>
+        <p:nvSpPr>
           <p:cNvPr id="4" name="TextBox 3"/>
           <p:cNvSpPr txBox="1"/>
           <p:nvPr/>
@@ -22046,7 +22387,7 @@
                 </a:solidFill>
                 <a:latin typeface="Calibri"/>
               </a:rPr>
-              <a:t>27. Conclusão</a:t>
+              <a:t>28. Conclusão</a:t>
             </a:r>
           </a:p>
         </p:txBody>
@@ -24165,7 +24506,7 @@
                 </a:solidFill>
                 <a:latin typeface="Calibri"/>
               </a:rPr>
-              <a:t>3/27</a:t>
+              <a:t>3/28</a:t>
             </a:r>
           </a:p>
         </p:txBody>
@@ -25295,7 +25636,7 @@
                 </a:solidFill>
                 <a:latin typeface="Calibri"/>
               </a:rPr>
-              <a:t>4/27</a:t>
+              <a:t>4/28</a:t>
             </a:r>
           </a:p>
         </p:txBody>
@@ -26820,7 +27161,7 @@
                 </a:solidFill>
                 <a:latin typeface="Calibri"/>
               </a:rPr>
-              <a:t>5/27</a:t>
+              <a:t>5/28</a:t>
             </a:r>
           </a:p>
         </p:txBody>
@@ -27880,7 +28221,7 @@
                 </a:solidFill>
                 <a:latin typeface="Calibri"/>
               </a:rPr>
-              <a:t>6/27</a:t>
+              <a:t>6/28</a:t>
             </a:r>
           </a:p>
         </p:txBody>
@@ -28248,7 +28589,7 @@
                 </a:solidFill>
                 <a:latin typeface="Calibri"/>
               </a:rPr>
-              <a:t>7/27</a:t>
+              <a:t>7/28</a:t>
             </a:r>
           </a:p>
         </p:txBody>
@@ -28762,7 +29103,7 @@
                 </a:solidFill>
                 <a:latin typeface="Calibri"/>
               </a:rPr>
-              <a:t>8/27</a:t>
+              <a:t>8/28</a:t>
             </a:r>
           </a:p>
         </p:txBody>
@@ -29716,7 +30057,7 @@
                 </a:solidFill>
                 <a:latin typeface="Calibri"/>
               </a:rPr>
-              <a:t>9/27</a:t>
+              <a:t>9/28</a:t>
             </a:r>
           </a:p>
         </p:txBody>

--- a/apresentacao_tcc.pptx
+++ b/apresentacao_tcc.pptx
@@ -19181,7 +19181,7 @@
         <p:spPr>
           <a:xfrm>
             <a:off x="1280160" y="1143000"/>
-            <a:ext cx="4663440" cy="5216026"/>
+            <a:ext cx="4663440" cy="4518221"/>
           </a:xfrm>
           <a:prstGeom prst="rect">
             <a:avLst/>

--- a/apresentacao_tcc.pptx
+++ b/apresentacao_tcc.pptx
@@ -13775,7 +13775,7 @@
                 </a:solidFill>
                 <a:latin typeface="Calibri"/>
               </a:rPr>
-              <a:t>−25,2%</a:t>
+              <a:t>−28,3%</a:t>
             </a:r>
           </a:p>
         </p:txBody>
@@ -13810,7 +13810,7 @@
                 </a:solidFill>
                 <a:latin typeface="Calibri"/>
               </a:rPr>
-              <a:t>controlado | privado −29,2%</a:t>
+              <a:t>controlado | privado −34,5%</a:t>
             </a:r>
           </a:p>
         </p:txBody>
@@ -13925,7 +13925,7 @@
                 </a:solidFill>
                 <a:latin typeface="Calibri"/>
               </a:rPr>
-              <a:t>−18,8%</a:t>
+              <a:t>−20,9%</a:t>
             </a:r>
           </a:p>
         </p:txBody>
@@ -13960,7 +13960,7 @@
                 </a:solidFill>
                 <a:latin typeface="Calibri"/>
               </a:rPr>
-              <a:t>PIOR que privado −16,9% (paradoxo)</a:t>
+              <a:t>PIOR que privado −18,6% (paradoxo)</a:t>
             </a:r>
           </a:p>
         </p:txBody>
@@ -14190,7 +14190,7 @@
                 </a:solidFill>
                 <a:latin typeface="Calibri"/>
               </a:rPr>
-              <a:t>H1: Estado reduz levemente o Gini (0,466 vs 0,472) mas prêmio de +99,6% concentra renda entre servidores.  H2: Racismo persiste no público (−25,2%) — atenuado vs privado (−29,2%).  H3 (paradoxo): concurso iguala entrada, mas promoção/DAS favorece homens → gap de gênero maior no público.</a:t>
+              <a:t>H1: Estado reduz levemente o Gini (0,466 vs 0,472) mas prêmio de +99,6% concentra renda entre servidores.  H2: Racismo persiste no público (−28,3%) — atenuado vs privado (−34,5%).  H3 (paradoxo): concurso iguala entrada, mas promoção/DAS favorece homens → gap de gênero maior no público.</a:t>
             </a:r>
           </a:p>
         </p:txBody>

--- a/apresentacao_tcc.pptx
+++ b/apresentacao_tcc.pptx
@@ -3874,7 +3874,7 @@
                 </a:solidFill>
                 <a:latin typeface="Calibri"/>
               </a:rPr>
-              <a:t>Orientador(a): _______________</a:t>
+              <a:t>Orientador: Edilson José Rodrigues</a:t>
             </a:r>
           </a:p>
         </p:txBody>

--- a/apresentacao_tcc.pptx
+++ b/apresentacao_tcc.pptx
@@ -4142,7 +4142,7 @@
                 </a:solidFill>
                 <a:latin typeface="Calibri"/>
               </a:rPr>
-              <a:t>OR = 0,674</a:t>
+              <a:t>OR = 0,676</a:t>
             </a:r>
           </a:p>
         </p:txBody>
@@ -4258,7 +4258,7 @@
                 </a:solidFill>
                 <a:latin typeface="Calibri"/>
               </a:rPr>
-              <a:t>OR = 0,691</a:t>
+              <a:t>OR = 0,693</a:t>
             </a:r>
           </a:p>
         </p:txBody>
@@ -4374,7 +4374,7 @@
                 </a:solidFill>
                 <a:latin typeface="Calibri"/>
               </a:rPr>
-              <a:t>AME = −5,16 p.p.</a:t>
+              <a:t>AME = −5,07 p.p.</a:t>
             </a:r>
           </a:p>
         </p:txBody>
@@ -4490,7 +4490,7 @@
                 </a:solidFill>
                 <a:latin typeface="Calibri"/>
               </a:rPr>
-              <a:t>AME = −4,84 p.p.</a:t>
+              <a:t>AME = −4,75 p.p.</a:t>
             </a:r>
           </a:p>
         </p:txBody>
@@ -4606,7 +4606,7 @@
                 </a:solidFill>
                 <a:latin typeface="Calibri"/>
               </a:rPr>
-              <a:t>Mesmo com educação, sexo, idade e local de moradia IDÊNTICOS, negros têm 30,9% menor odds de estar em ocupação qualificada (OR=0,691 GLMM M2).</a:t>
+              <a:t>Mesmo com educação, sexo, idade e local de moradia IDÊNTICOS, negros têm 30,7% menor odds de estar em ocupação qualificada (OR=0,693 GLMM M2).</a:t>
             </a:r>
           </a:p>
         </p:txBody>
@@ -4868,7 +4868,7 @@
         <p:spPr>
           <a:xfrm>
             <a:off x="274320" y="1097280"/>
-            <a:ext cx="6583680" cy="3509682"/>
+            <a:ext cx="6583680" cy="3505648"/>
           </a:xfrm>
           <a:prstGeom prst="rect">
             <a:avLst/>
@@ -7916,7 +7916,7 @@
                 </a:solidFill>
                 <a:latin typeface="Calibri"/>
               </a:rPr>
-              <a:t>E ≥ 2,331× (M1)  |  E ≥ 2,254× (M2)  para anular OR = 0,674 / 0,691</a:t>
+              <a:t>E ≥ 2,319× (M1)  |  E ≥ 2,243× (M2)  para anular OR = 0,676 / 0,693</a:t>
             </a:r>
           </a:p>
         </p:txBody>
@@ -16051,7 +16051,7 @@
                 </a:solidFill>
                 <a:latin typeface="Calibri"/>
               </a:rPr>
-              <a:t>LRT χ²=191.625 confirma hierarquia | ICC=9,83% &gt; limiar 5% | HLM supera OLS+FE em AIC</a:t>
+              <a:t>LRT χ²=191.625 confirma hierarquia | ICC=9,80% &gt; limiar 5% | HLM supera OLS+FE em AIC</a:t>
             </a:r>
           </a:p>
         </p:txBody>
@@ -16364,7 +16364,7 @@
                 </a:solidFill>
                 <a:latin typeface="Calibri"/>
               </a:rPr>
-              <a:t>9,83%</a:t>
+              <a:t>9,80%</a:t>
             </a:r>
           </a:p>
         </p:txBody>
@@ -17044,7 +17044,7 @@
                 </a:solidFill>
                 <a:latin typeface="Calibri"/>
               </a:rPr>
-              <a:t>• GLMM: OR=0,691 para ocp. qualificada</a:t>
+              <a:t>• GLMM: OR=0,693 para ocp. qualificada</a:t>
             </a:r>
           </a:p>
         </p:txBody>
@@ -17079,7 +17079,7 @@
                 </a:solidFill>
                 <a:latin typeface="Calibri"/>
               </a:rPr>
-              <a:t>• AME=−4,84 p.p. residual (M2)</a:t>
+              <a:t>• AME=−4,75 p.p. residual (M2)</a:t>
             </a:r>
           </a:p>
         </p:txBody>
@@ -17644,7 +17644,7 @@
                 </a:solidFill>
                 <a:latin typeface="Calibri"/>
               </a:rPr>
-              <a:t>Oaxaca-Blinder une os três vértices: 84% do gap é de ACESSO (dotações) | 16% de REMUNERAÇÃO (retornos) | SNA explica por que o acesso é estruturalmente negado  |  GLMM: OR=0,691</a:t>
+              <a:t>Oaxaca-Blinder une os três vértices: 84% do gap é de ACESSO (dotações) | 16% de REMUNERAÇÃO (retornos) | SNA explica por que o acesso é estruturalmente negado  |  GLMM: OR=0,693</a:t>
             </a:r>
           </a:p>
         </p:txBody>
@@ -19807,7 +19807,7 @@
                 </a:solidFill>
                 <a:latin typeface="Calibri"/>
               </a:rPr>
-              <a:t>Base oficial: BLUP ≠ OLS+EB (Spearman ρ=0,42)</a:t>
+              <a:t>Base oficial: BLUP ≠ OLS+EB (Spearman ρ=0,45)</a:t>
             </a:r>
           </a:p>
         </p:txBody>
@@ -20258,7 +20258,7 @@
                 </a:solidFill>
                 <a:latin typeface="Calibri"/>
               </a:rPr>
-              <a:t>LRT rejeita τ²=0 em TODOS os desfechos (p&lt;0,001): o acesso varia entre estados, como o salário.  Contraste: gap salarial maior nos estados ricos (ρ=−0,37) vs acesso mais fácil neles (ρ=0,64).  Setor público NÃO dissolve a barreira (OR púb=0,705 ≈ priv=0,695).</a:t>
+              <a:t>LRT rejeita τ²=0 em TODOS os desfechos (p&lt;0,001): o acesso varia entre estados, como o salário.  Contraste: gap salarial maior nos estados ricos (ρ=−0,37) vs acesso mais fácil neles (ρ=0,65).  Setor público NÃO dissolve a barreira (OR púb=0,705 ≈ priv=0,698).</a:t>
             </a:r>
           </a:p>
         </p:txBody>
@@ -20598,7 +20598,7 @@
                 </a:solidFill>
                 <a:latin typeface="Calibri"/>
               </a:rPr>
-              <a:t>Mulheres: MAIS acesso a ocupações qualificadas (OR=2,01&gt;1, profissões feminizadas) mas MUITO MENOS ao topo de renda (OR top10=0,522). Teto de vidro de gênero = REMUNERAÇÃO, não categoria — e varia mais entre estados que o racial (~10x no topo).</a:t>
+              <a:t>Mulheres: MAIS acesso a ocupações qualificadas (OR=1,99&gt;1, profissões feminizadas) mas MUITO MENOS ao topo de renda (OR top10=0,518). Teto de vidro de gênero = REMUNERAÇÃO, não categoria — e varia mais entre estados que o racial (~10x no topo).</a:t>
             </a:r>
           </a:p>
         </p:txBody>
@@ -22699,7 +22699,7 @@
                 </a:solidFill>
                 <a:latin typeface="Calibri"/>
               </a:rPr>
-              <a:t>OR=0,691</a:t>
+              <a:t>OR=0,693</a:t>
             </a:r>
           </a:p>
         </p:txBody>
@@ -23011,7 +23011,7 @@
                 </a:solidFill>
                 <a:latin typeface="Calibri"/>
               </a:rPr>
-              <a:t>2. A discriminação opera em dois estágios independentes: barreiras de ACESSO a ocupações qualificadas (GLMM: OR=0,691, AME=−4,84 p.p.) e discriminação de REMUNERAÇÃO dentro das mesmas funções (HLM M4: 6,2%).</a:t>
+              <a:t>2. A discriminação opera em dois estágios independentes: barreiras de ACESSO a ocupações qualificadas (GLMM: OR=0,693, AME=−4,75 p.p.) e discriminação de REMUNERAÇÃO dentro das mesmas funções (HLM M4: 6,2%).</a:t>
             </a:r>
           </a:p>
         </p:txBody>

--- a/apresentacao_tcc.pptx
+++ b/apresentacao_tcc.pptx
@@ -13775,7 +13775,7 @@
                 </a:solidFill>
                 <a:latin typeface="Calibri"/>
               </a:rPr>
-              <a:t>−28,3%</a:t>
+              <a:t>−28,1%</a:t>
             </a:r>
           </a:p>
         </p:txBody>
@@ -13810,7 +13810,7 @@
                 </a:solidFill>
                 <a:latin typeface="Calibri"/>
               </a:rPr>
-              <a:t>controlado | privado −34,5%</a:t>
+              <a:t>controlado | privado −34,3%</a:t>
             </a:r>
           </a:p>
         </p:txBody>
@@ -13925,7 +13925,7 @@
                 </a:solidFill>
                 <a:latin typeface="Calibri"/>
               </a:rPr>
-              <a:t>−20,9%</a:t>
+              <a:t>−21,2%</a:t>
             </a:r>
           </a:p>
         </p:txBody>
@@ -13960,7 +13960,7 @@
                 </a:solidFill>
                 <a:latin typeface="Calibri"/>
               </a:rPr>
-              <a:t>PIOR que privado −18,6% (paradoxo)</a:t>
+              <a:t>PIOR que privado −18,9% (paradoxo)</a:t>
             </a:r>
           </a:p>
         </p:txBody>
@@ -14190,7 +14190,7 @@
                 </a:solidFill>
                 <a:latin typeface="Calibri"/>
               </a:rPr>
-              <a:t>H1: Estado reduz levemente o Gini (0,466 vs 0,472) mas prêmio de +99,6% concentra renda entre servidores.  H2: Racismo persiste no público (−28,3%) — atenuado vs privado (−34,5%).  H3 (paradoxo): concurso iguala entrada, mas promoção/DAS favorece homens → gap de gênero maior no público.</a:t>
+              <a:t>H1: Estado reduz levemente o Gini (0,466 vs 0,472) mas prêmio de +99,6% concentra renda entre servidores.  H2: Racismo persiste no público (−28,1%) — atenuado vs privado (−34,3%).  H3 (paradoxo): concurso iguala entrada, mas promoção/DAS favorece homens → gap de gênero maior no público.</a:t>
             </a:r>
           </a:p>
         </p:txBody>
@@ -19651,7 +19651,7 @@
                 </a:solidFill>
                 <a:latin typeface="Calibri"/>
               </a:rPr>
-              <a:t>Amplitude: DF −20,9%  →  MG −1,4%</a:t>
+              <a:t>Amplitude: DF −20,8%  →  MG −1,5%</a:t>
             </a:r>
           </a:p>
         </p:txBody>

--- a/apresentacao_tcc.pptx
+++ b/apresentacao_tcc.pptx
@@ -4374,7 +4374,7 @@
                 </a:solidFill>
                 <a:latin typeface="Calibri"/>
               </a:rPr>
-              <a:t>AME = −5,07 p.p.</a:t>
+              <a:t>AME = −5,04 p.p.</a:t>
             </a:r>
           </a:p>
         </p:txBody>
@@ -4490,7 +4490,7 @@
                 </a:solidFill>
                 <a:latin typeface="Calibri"/>
               </a:rPr>
-              <a:t>AME = −4,75 p.p.</a:t>
+              <a:t>AME = −4,73 p.p.</a:t>
             </a:r>
           </a:p>
         </p:txBody>
@@ -17079,7 +17079,7 @@
                 </a:solidFill>
                 <a:latin typeface="Calibri"/>
               </a:rPr>
-              <a:t>• AME=−4,75 p.p. residual (M2)</a:t>
+              <a:t>• AME=−4,73 p.p. residual (M2)</a:t>
             </a:r>
           </a:p>
         </p:txBody>
@@ -23011,7 +23011,7 @@
                 </a:solidFill>
                 <a:latin typeface="Calibri"/>
               </a:rPr>
-              <a:t>2. A discriminação opera em dois estágios independentes: barreiras de ACESSO a ocupações qualificadas (GLMM: OR=0,693, AME=−4,75 p.p.) e discriminação de REMUNERAÇÃO dentro das mesmas funções (HLM M4: 6,2%).</a:t>
+              <a:t>2. A discriminação opera em dois estágios independentes: barreiras de ACESSO a ocupações qualificadas (GLMM: OR=0,693, AME=−4,73 p.p.) e discriminação de REMUNERAÇÃO dentro das mesmas funções (HLM M4: 6,2%).</a:t>
             </a:r>
           </a:p>
         </p:txBody>

--- a/apresentacao_tcc.pptx
+++ b/apresentacao_tcc.pptx
@@ -34,6 +34,7 @@
     <p:sldId id="282" r:id="rId33"/>
     <p:sldId id="283" r:id="rId34"/>
     <p:sldId id="284" r:id="rId35"/>
+    <p:sldId id="285" r:id="rId36"/>
   </p:sldIdLst>
   <p:sldSz cx="12188952" cy="6858000" type="screen4x3"/>
   <p:notesSz cx="6858000" cy="9144000"/>
@@ -4717,7 +4718,7 @@
                 </a:solidFill>
                 <a:latin typeface="Calibri"/>
               </a:rPr>
-              <a:t>10/28</a:t>
+              <a:t>10/29</a:t>
             </a:r>
           </a:p>
         </p:txBody>
@@ -5279,7 +5280,7 @@
                 </a:solidFill>
                 <a:latin typeface="Calibri"/>
               </a:rPr>
-              <a:t>11/28</a:t>
+              <a:t>11/29</a:t>
             </a:r>
           </a:p>
         </p:txBody>
@@ -6460,7 +6461,7 @@
                 </a:solidFill>
                 <a:latin typeface="Calibri"/>
               </a:rPr>
-              <a:t>12/28</a:t>
+              <a:t>12/29</a:t>
             </a:r>
           </a:p>
         </p:txBody>
@@ -7313,7 +7314,7 @@
                 </a:solidFill>
                 <a:latin typeface="Calibri"/>
               </a:rPr>
-              <a:t>13/28</a:t>
+              <a:t>13/29</a:t>
             </a:r>
           </a:p>
         </p:txBody>
@@ -8212,7 +8213,7 @@
                 </a:solidFill>
                 <a:latin typeface="Calibri"/>
               </a:rPr>
-              <a:t>14/28</a:t>
+              <a:t>14/29</a:t>
             </a:r>
           </a:p>
         </p:txBody>
@@ -9002,7 +9003,7 @@
                 </a:solidFill>
                 <a:latin typeface="Calibri"/>
               </a:rPr>
-              <a:t>15/28</a:t>
+              <a:t>15/29</a:t>
             </a:r>
           </a:p>
         </p:txBody>
@@ -10226,7 +10227,7 @@
                 </a:solidFill>
                 <a:latin typeface="Calibri"/>
               </a:rPr>
-              <a:t>16/28</a:t>
+              <a:t>16/29</a:t>
             </a:r>
           </a:p>
         </p:txBody>
@@ -12806,7 +12807,7 @@
                 </a:solidFill>
                 <a:latin typeface="Calibri"/>
               </a:rPr>
-              <a:t>17/28</a:t>
+              <a:t>17/29</a:t>
             </a:r>
           </a:p>
         </p:txBody>
@@ -13333,7 +13334,7 @@
                 </a:solidFill>
                 <a:latin typeface="Calibri"/>
               </a:rPr>
-              <a:t>18/28</a:t>
+              <a:t>18/29</a:t>
             </a:r>
           </a:p>
         </p:txBody>
@@ -14197,7 +14198,42 @@
       </p:sp>
       <p:sp>
         <p:nvSpPr>
-          <p:cNvPr id="25" name="Rectangle 24"/>
+          <p:cNvPr id="25" name="TextBox 24"/>
+          <p:cNvSpPr txBox="1"/>
+          <p:nvPr/>
+        </p:nvSpPr>
+        <p:spPr>
+          <a:xfrm>
+            <a:off x="457200" y="6053328"/>
+            <a:ext cx="11247120" cy="411480"/>
+          </a:xfrm>
+          <a:prstGeom prst="rect">
+            <a:avLst/>
+          </a:prstGeom>
+          <a:noFill/>
+        </p:spPr>
+        <p:txBody>
+          <a:bodyPr wrap="square">
+            <a:spAutoFit/>
+          </a:bodyPr>
+          <a:lstStyle/>
+          <a:p>
+            <a:pPr algn="l"/>
+            <a:r>
+              <a:rPr sz="1000" b="0" i="0">
+                <a:solidFill>
+                  <a:srgbClr val="555555"/>
+                </a:solidFill>
+                <a:latin typeface="Calibri"/>
+              </a:rPr>
+              <a:t>Contexto IBGE (2025): o Gini domiciliar per capita do país subiu a 0,491 (conceito distinto do Gini do trabalho aqui, ~0,48); a POF mostra qualidade de vida em alta, mas o gap racial persiste (0,183 vs 0,122).</a:t>
+            </a:r>
+          </a:p>
+        </p:txBody>
+      </p:sp>
+      <p:sp>
+        <p:nvSpPr>
+          <p:cNvPr id="26" name="Rectangle 25"/>
           <p:cNvSpPr/>
           <p:nvPr/>
         </p:nvSpPr>
@@ -14238,7 +14274,7 @@
       </p:sp>
       <p:sp>
         <p:nvSpPr>
-          <p:cNvPr id="26" name="TextBox 25"/>
+          <p:cNvPr id="27" name="TextBox 26"/>
           <p:cNvSpPr txBox="1"/>
           <p:nvPr/>
         </p:nvSpPr>
@@ -14273,7 +14309,7 @@
       </p:sp>
       <p:sp>
         <p:nvSpPr>
-          <p:cNvPr id="27" name="TextBox 26"/>
+          <p:cNvPr id="28" name="TextBox 27"/>
           <p:cNvSpPr txBox="1"/>
           <p:nvPr/>
         </p:nvSpPr>
@@ -14301,7 +14337,7 @@
                 </a:solidFill>
                 <a:latin typeface="Calibri"/>
               </a:rPr>
-              <a:t>19/28</a:t>
+              <a:t>19/29</a:t>
             </a:r>
           </a:p>
         </p:txBody>
@@ -14954,7 +14990,7 @@
                 </a:solidFill>
                 <a:latin typeface="Calibri"/>
               </a:rPr>
-              <a:t>2/28</a:t>
+              <a:t>2/29</a:t>
             </a:r>
           </a:p>
         </p:txBody>
@@ -15922,7 +15958,7 @@
                 </a:solidFill>
                 <a:latin typeface="Calibri"/>
               </a:rPr>
-              <a:t>20/28</a:t>
+              <a:t>20/29</a:t>
             </a:r>
           </a:p>
         </p:txBody>
@@ -16758,7 +16794,7 @@
                 </a:solidFill>
                 <a:latin typeface="Calibri"/>
               </a:rPr>
-              <a:t>21/28</a:t>
+              <a:t>21/29</a:t>
             </a:r>
           </a:p>
         </p:txBody>
@@ -17755,7 +17791,7 @@
                 </a:solidFill>
                 <a:latin typeface="Calibri"/>
               </a:rPr>
-              <a:t>22/28</a:t>
+              <a:t>22/29</a:t>
             </a:r>
           </a:p>
         </p:txBody>
@@ -19030,7 +19066,7 @@
                 </a:solidFill>
                 <a:latin typeface="Calibri"/>
               </a:rPr>
-              <a:t>23/28</a:t>
+              <a:t>23/29</a:t>
             </a:r>
           </a:p>
         </p:txBody>
@@ -20029,7 +20065,7 @@
                 </a:solidFill>
                 <a:latin typeface="Calibri"/>
               </a:rPr>
-              <a:t>24/28</a:t>
+              <a:t>24/29</a:t>
             </a:r>
           </a:p>
         </p:txBody>
@@ -20369,7 +20405,7 @@
                 </a:solidFill>
                 <a:latin typeface="Calibri"/>
               </a:rPr>
-              <a:t>25/28</a:t>
+              <a:t>25/29</a:t>
             </a:r>
           </a:p>
         </p:txBody>
@@ -20709,7 +20745,7 @@
                 </a:solidFill>
                 <a:latin typeface="Calibri"/>
               </a:rPr>
-              <a:t>26/28</a:t>
+              <a:t>26/29</a:t>
             </a:r>
           </a:p>
         </p:txBody>
@@ -20803,7 +20839,7 @@
                 </a:solidFill>
                 <a:latin typeface="Calibri"/>
               </a:rPr>
-              <a:t>26. Implicações de Política</a:t>
+              <a:t>26. Interseccionalidade GLMM — O Teto de Vidro Recai sobre a Mulher Negra</a:t>
             </a:r>
           </a:p>
         </p:txBody>
@@ -20838,21 +20874,238 @@
                 </a:solidFill>
                 <a:latin typeface="Calibri"/>
               </a:rPr>
-              <a:t>Três eixos simultâneos — ações isoladas são insuficientes para romper a armadilha estrutural</a:t>
-            </a:r>
-          </a:p>
-        </p:txBody>
-      </p:sp>
-      <p:sp>
-        <p:nvSpPr>
-          <p:cNvPr id="5" name="Rectangle 4"/>
+              <a:t>grupo_rg (4 grupos, ref. homem branco) × 3 desfechos | alçada no acesso, a mais excluída no topo</a:t>
+            </a:r>
+          </a:p>
+        </p:txBody>
+      </p:sp>
+      <p:pic>
+        <p:nvPicPr>
+          <p:cNvPr id="5" name="Picture 4" descr="grupo_rg_interseccional.png"/>
+          <p:cNvPicPr>
+            <a:picLocks noChangeAspect="1"/>
+          </p:cNvPicPr>
+          <p:nvPr/>
+        </p:nvPicPr>
+        <p:blipFill>
+          <a:blip r:embed="rId2"/>
+          <a:stretch>
+            <a:fillRect/>
+          </a:stretch>
+        </p:blipFill>
+        <p:spPr>
+          <a:xfrm>
+            <a:off x="274320" y="1097280"/>
+            <a:ext cx="6766560" cy="4474430"/>
+          </a:xfrm>
+          <a:prstGeom prst="rect">
+            <a:avLst/>
+          </a:prstGeom>
+        </p:spPr>
+      </p:pic>
+      <p:sp>
+        <p:nvSpPr>
+          <p:cNvPr id="6" name="TextBox 5"/>
+          <p:cNvSpPr txBox="1"/>
+          <p:nvPr/>
+        </p:nvSpPr>
+        <p:spPr>
+          <a:xfrm>
+            <a:off x="7315200" y="1097280"/>
+            <a:ext cx="4572000" cy="365760"/>
+          </a:xfrm>
+          <a:prstGeom prst="rect">
+            <a:avLst/>
+          </a:prstGeom>
+          <a:noFill/>
+        </p:spPr>
+        <p:txBody>
+          <a:bodyPr wrap="square">
+            <a:spAutoFit/>
+          </a:bodyPr>
+          <a:lstStyle/>
+          <a:p>
+            <a:pPr algn="l"/>
+            <a:r>
+              <a:rPr sz="1500" b="1" i="0">
+                <a:solidFill>
+                  <a:srgbClr val="1F3864"/>
+                </a:solidFill>
+                <a:latin typeface="Calibri"/>
+              </a:rPr>
+              <a:t>A inversão acesso → topo</a:t>
+            </a:r>
+          </a:p>
+        </p:txBody>
+      </p:sp>
+      <p:sp>
+        <p:nvSpPr>
+          <p:cNvPr id="7" name="Rectangle 6"/>
           <p:cNvSpPr/>
           <p:nvPr/>
         </p:nvSpPr>
         <p:spPr>
           <a:xfrm>
-            <a:off x="274320" y="1097280"/>
-            <a:ext cx="3749039" cy="5029200"/>
+            <a:off x="7315200" y="1572768"/>
+            <a:ext cx="4572000" cy="1335024"/>
+          </a:xfrm>
+          <a:prstGeom prst="rect">
+            <a:avLst/>
+          </a:prstGeom>
+          <a:solidFill>
+            <a:srgbClr val="F5F5F5"/>
+          </a:solidFill>
+          <a:ln w="19050">
+            <a:solidFill>
+              <a:srgbClr val="1565C0"/>
+            </a:solidFill>
+          </a:ln>
+        </p:spPr>
+        <p:style>
+          <a:lnRef idx="1">
+            <a:schemeClr val="accent1"/>
+          </a:lnRef>
+          <a:fillRef idx="3">
+            <a:schemeClr val="accent1"/>
+          </a:fillRef>
+          <a:effectRef idx="2">
+            <a:schemeClr val="accent1"/>
+          </a:effectRef>
+          <a:fontRef idx="minor">
+            <a:schemeClr val="lt1"/>
+          </a:fontRef>
+        </p:style>
+        <p:txBody>
+          <a:bodyPr rtlCol="0" anchor="ctr"/>
+          <a:lstStyle/>
+          <a:p>
+            <a:pPr algn="ctr"/>
+          </a:p>
+        </p:txBody>
+      </p:sp>
+      <p:sp>
+        <p:nvSpPr>
+          <p:cNvPr id="8" name="Rectangle 7"/>
+          <p:cNvSpPr/>
+          <p:nvPr/>
+        </p:nvSpPr>
+        <p:spPr>
+          <a:xfrm>
+            <a:off x="7315200" y="1572768"/>
+            <a:ext cx="4572000" cy="402336"/>
+          </a:xfrm>
+          <a:prstGeom prst="rect">
+            <a:avLst/>
+          </a:prstGeom>
+          <a:solidFill>
+            <a:srgbClr val="1565C0"/>
+          </a:solidFill>
+          <a:ln/>
+        </p:spPr>
+        <p:style>
+          <a:lnRef idx="1">
+            <a:schemeClr val="accent1"/>
+          </a:lnRef>
+          <a:fillRef idx="3">
+            <a:schemeClr val="accent1"/>
+          </a:fillRef>
+          <a:effectRef idx="2">
+            <a:schemeClr val="accent1"/>
+          </a:effectRef>
+          <a:fontRef idx="minor">
+            <a:schemeClr val="lt1"/>
+          </a:fontRef>
+        </p:style>
+        <p:txBody>
+          <a:bodyPr rtlCol="0" anchor="ctr"/>
+          <a:lstStyle/>
+          <a:p>
+            <a:pPr algn="ctr"/>
+          </a:p>
+        </p:txBody>
+      </p:sp>
+      <p:sp>
+        <p:nvSpPr>
+          <p:cNvPr id="9" name="TextBox 8"/>
+          <p:cNvSpPr txBox="1"/>
+          <p:nvPr/>
+        </p:nvSpPr>
+        <p:spPr>
+          <a:xfrm>
+            <a:off x="7424927" y="1600200"/>
+            <a:ext cx="4343400" cy="384048"/>
+          </a:xfrm>
+          <a:prstGeom prst="rect">
+            <a:avLst/>
+          </a:prstGeom>
+          <a:noFill/>
+        </p:spPr>
+        <p:txBody>
+          <a:bodyPr wrap="square">
+            <a:spAutoFit/>
+          </a:bodyPr>
+          <a:lstStyle/>
+          <a:p>
+            <a:pPr algn="l"/>
+            <a:r>
+              <a:rPr sz="1300" b="1" i="0">
+                <a:solidFill>
+                  <a:srgbClr val="FFFFFF"/>
+                </a:solidFill>
+                <a:latin typeface="Calibri"/>
+              </a:rPr>
+              <a:t>Acesso (CBO 1-4)</a:t>
+            </a:r>
+          </a:p>
+        </p:txBody>
+      </p:sp>
+      <p:sp>
+        <p:nvSpPr>
+          <p:cNvPr id="10" name="TextBox 9"/>
+          <p:cNvSpPr txBox="1"/>
+          <p:nvPr/>
+        </p:nvSpPr>
+        <p:spPr>
+          <a:xfrm>
+            <a:off x="7424927" y="2029968"/>
+            <a:ext cx="4343400" cy="841248"/>
+          </a:xfrm>
+          <a:prstGeom prst="rect">
+            <a:avLst/>
+          </a:prstGeom>
+          <a:noFill/>
+        </p:spPr>
+        <p:txBody>
+          <a:bodyPr wrap="square">
+            <a:spAutoFit/>
+          </a:bodyPr>
+          <a:lstStyle/>
+          <a:p>
+            <a:pPr algn="l"/>
+            <a:r>
+              <a:rPr sz="1100" b="0" i="0">
+                <a:solidFill>
+                  <a:srgbClr val="212121"/>
+                </a:solidFill>
+                <a:latin typeface="Calibri"/>
+              </a:rPr>
+              <a:t>Mulher negra OR=1,33 (acima do homem branco)
+Mais penalizado: homem negro (OR=0,65)
+Gênero positivo: profissões feminizadas</a:t>
+            </a:r>
+          </a:p>
+        </p:txBody>
+      </p:sp>
+      <p:sp>
+        <p:nvSpPr>
+          <p:cNvPr id="11" name="Rectangle 10"/>
+          <p:cNvSpPr/>
+          <p:nvPr/>
+        </p:nvSpPr>
+        <p:spPr>
+          <a:xfrm>
+            <a:off x="7315200" y="3054096"/>
+            <a:ext cx="4572000" cy="1335024"/>
           </a:xfrm>
           <a:prstGeom prst="rect">
             <a:avLst/>
@@ -20890,14 +21143,14 @@
       </p:sp>
       <p:sp>
         <p:nvSpPr>
-          <p:cNvPr id="6" name="Rectangle 5"/>
+          <p:cNvPr id="12" name="Rectangle 11"/>
           <p:cNvSpPr/>
           <p:nvPr/>
         </p:nvSpPr>
         <p:spPr>
           <a:xfrm>
-            <a:off x="274320" y="1097280"/>
-            <a:ext cx="3749039" cy="502920"/>
+            <a:off x="7315200" y="3054096"/>
+            <a:ext cx="4572000" cy="402336"/>
           </a:xfrm>
           <a:prstGeom prst="rect">
             <a:avLst/>
@@ -20931,14 +21184,14 @@
       </p:sp>
       <p:sp>
         <p:nvSpPr>
-          <p:cNvPr id="7" name="TextBox 6"/>
-          <p:cNvSpPr txBox="1"/>
-          <p:nvPr/>
-        </p:nvSpPr>
-        <p:spPr>
-          <a:xfrm>
-            <a:off x="365760" y="1143000"/>
-            <a:ext cx="3566160" cy="457200"/>
+          <p:cNvPr id="13" name="TextBox 12"/>
+          <p:cNvSpPr txBox="1"/>
+          <p:nvPr/>
+        </p:nvSpPr>
+        <p:spPr>
+          <a:xfrm>
+            <a:off x="7424927" y="3081528"/>
+            <a:ext cx="4343400" cy="384048"/>
           </a:xfrm>
           <a:prstGeom prst="rect">
             <a:avLst/>
@@ -20959,21 +21212,21 @@
                 </a:solidFill>
                 <a:latin typeface="Calibri"/>
               </a:rPr>
-              <a:t>Eixo 1 — Acesso</a:t>
-            </a:r>
-          </a:p>
-        </p:txBody>
-      </p:sp>
-      <p:sp>
-        <p:nvSpPr>
-          <p:cNvPr id="8" name="TextBox 7"/>
-          <p:cNvSpPr txBox="1"/>
-          <p:nvPr/>
-        </p:nvSpPr>
-        <p:spPr>
-          <a:xfrm>
-            <a:off x="457200" y="1691640"/>
-            <a:ext cx="3383280" cy="731520"/>
+              <a:t>Topo da renda (top 10%)</a:t>
+            </a:r>
+          </a:p>
+        </p:txBody>
+      </p:sp>
+      <p:sp>
+        <p:nvSpPr>
+          <p:cNvPr id="14" name="TextBox 13"/>
+          <p:cNvSpPr txBox="1"/>
+          <p:nvPr/>
+        </p:nvSpPr>
+        <p:spPr>
+          <a:xfrm>
+            <a:off x="7424927" y="3511296"/>
+            <a:ext cx="4343400" cy="841248"/>
           </a:xfrm>
           <a:prstGeom prst="rect">
             <a:avLst/>
@@ -20988,100 +21241,28 @@
           <a:p>
             <a:pPr algn="l"/>
             <a:r>
-              <a:rPr sz="1200" b="0" i="0">
+              <a:rPr sz="1100" b="0" i="0">
                 <a:solidFill>
                   <a:srgbClr val="212121"/>
                 </a:solidFill>
                 <a:latin typeface="Calibri"/>
               </a:rPr>
-              <a:t>▸  Cotas de acesso CBO Dirigente/Profissional:
-meta IR ≥ 0,80 até 2030</a:t>
-            </a:r>
-          </a:p>
-        </p:txBody>
-      </p:sp>
-      <p:sp>
-        <p:nvSpPr>
-          <p:cNvPr id="9" name="TextBox 8"/>
-          <p:cNvSpPr txBox="1"/>
-          <p:nvPr/>
-        </p:nvSpPr>
-        <p:spPr>
-          <a:xfrm>
-            <a:off x="457200" y="2468880"/>
-            <a:ext cx="3383280" cy="731520"/>
-          </a:xfrm>
-          <a:prstGeom prst="rect">
-            <a:avLst/>
-          </a:prstGeom>
-          <a:noFill/>
-        </p:spPr>
-        <p:txBody>
-          <a:bodyPr wrap="square">
-            <a:spAutoFit/>
-          </a:bodyPr>
-          <a:lstStyle/>
-          <a:p>
-            <a:pPr algn="l"/>
-            <a:r>
-              <a:rPr sz="1200" b="0" i="0">
-                <a:solidFill>
-                  <a:srgbClr val="212121"/>
-                </a:solidFill>
-                <a:latin typeface="Calibri"/>
-              </a:rPr>
-              <a:t>▸  PRONATEC c/ recorte racial e subsídio de
-transporte para trabalhadores de UPAs pobres</a:t>
-            </a:r>
-          </a:p>
-        </p:txBody>
-      </p:sp>
-      <p:sp>
-        <p:nvSpPr>
-          <p:cNvPr id="10" name="TextBox 9"/>
-          <p:cNvSpPr txBox="1"/>
-          <p:nvPr/>
-        </p:nvSpPr>
-        <p:spPr>
-          <a:xfrm>
-            <a:off x="457200" y="3246120"/>
-            <a:ext cx="3383280" cy="731520"/>
-          </a:xfrm>
-          <a:prstGeom prst="rect">
-            <a:avLst/>
-          </a:prstGeom>
-          <a:noFill/>
-        </p:spPr>
-        <p:txBody>
-          <a:bodyPr wrap="square">
-            <a:spAutoFit/>
-          </a:bodyPr>
-          <a:lstStyle/>
-          <a:p>
-            <a:pPr algn="l"/>
-            <a:r>
-              <a:rPr sz="1200" b="0" i="0">
-                <a:solidFill>
-                  <a:srgbClr val="212121"/>
-                </a:solidFill>
-                <a:latin typeface="Calibri"/>
-              </a:rPr>
-              <a:t>▸  Bolsas de residência profissional em empresas
-de alta remuneração para egressos negros</a:t>
-            </a:r>
-          </a:p>
-        </p:txBody>
-      </p:sp>
-      <p:sp>
-        <p:nvSpPr>
-          <p:cNvPr id="11" name="Rectangle 10"/>
+              <a:t>Mulher negra é a MAIS excluída: OR=0,34
+Abaixo da mulher branca (0,49) e do homem negro (0,65)</a:t>
+            </a:r>
+          </a:p>
+        </p:txBody>
+      </p:sp>
+      <p:sp>
+        <p:nvSpPr>
+          <p:cNvPr id="15" name="Rectangle 14"/>
           <p:cNvSpPr/>
           <p:nvPr/>
         </p:nvSpPr>
         <p:spPr>
           <a:xfrm>
-            <a:off x="4251959" y="1097280"/>
-            <a:ext cx="3749039" cy="5029200"/>
+            <a:off x="7315200" y="4535424"/>
+            <a:ext cx="4572000" cy="1335024"/>
           </a:xfrm>
           <a:prstGeom prst="rect">
             <a:avLst/>
@@ -21091,7 +21272,7 @@
           </a:solidFill>
           <a:ln w="19050">
             <a:solidFill>
-              <a:srgbClr val="1565C0"/>
+              <a:srgbClr val="6A008A"/>
             </a:solidFill>
           </a:ln>
         </p:spPr>
@@ -21119,20 +21300,20 @@
       </p:sp>
       <p:sp>
         <p:nvSpPr>
-          <p:cNvPr id="12" name="Rectangle 11"/>
+          <p:cNvPr id="16" name="Rectangle 15"/>
           <p:cNvSpPr/>
           <p:nvPr/>
         </p:nvSpPr>
         <p:spPr>
           <a:xfrm>
-            <a:off x="4251959" y="1097280"/>
-            <a:ext cx="3749039" cy="502920"/>
+            <a:off x="7315200" y="4535424"/>
+            <a:ext cx="4572000" cy="402336"/>
           </a:xfrm>
           <a:prstGeom prst="rect">
             <a:avLst/>
           </a:prstGeom>
           <a:solidFill>
-            <a:srgbClr val="1565C0"/>
+            <a:srgbClr val="6A008A"/>
           </a:solidFill>
           <a:ln/>
         </p:spPr>
@@ -21160,14 +21341,14 @@
       </p:sp>
       <p:sp>
         <p:nvSpPr>
-          <p:cNvPr id="13" name="TextBox 12"/>
-          <p:cNvSpPr txBox="1"/>
-          <p:nvPr/>
-        </p:nvSpPr>
-        <p:spPr>
-          <a:xfrm>
-            <a:off x="4343399" y="1143000"/>
-            <a:ext cx="3566160" cy="457200"/>
+          <p:cNvPr id="17" name="TextBox 16"/>
+          <p:cNvSpPr txBox="1"/>
+          <p:nvPr/>
+        </p:nvSpPr>
+        <p:spPr>
+          <a:xfrm>
+            <a:off x="7424927" y="4562856"/>
+            <a:ext cx="4343400" cy="384048"/>
           </a:xfrm>
           <a:prstGeom prst="rect">
             <a:avLst/>
@@ -21188,21 +21369,21 @@
                 </a:solidFill>
                 <a:latin typeface="Calibri"/>
               </a:rPr>
-              <a:t>Eixo 2 — Remuneração</a:t>
-            </a:r>
-          </a:p>
-        </p:txBody>
-      </p:sp>
-      <p:sp>
-        <p:nvSpPr>
-          <p:cNvPr id="14" name="TextBox 13"/>
-          <p:cNvSpPr txBox="1"/>
-          <p:nvPr/>
-        </p:nvSpPr>
-        <p:spPr>
-          <a:xfrm>
-            <a:off x="4434839" y="1691640"/>
-            <a:ext cx="3383280" cy="731520"/>
+              <a:t>Interação sub-aditiva</a:t>
+            </a:r>
+          </a:p>
+        </p:txBody>
+      </p:sp>
+      <p:sp>
+        <p:nvSpPr>
+          <p:cNvPr id="18" name="TextBox 17"/>
+          <p:cNvSpPr txBox="1"/>
+          <p:nvPr/>
+        </p:nvSpPr>
+        <p:spPr>
+          <a:xfrm>
+            <a:off x="7424927" y="4992624"/>
+            <a:ext cx="4343400" cy="841248"/>
           </a:xfrm>
           <a:prstGeom prst="rect">
             <a:avLst/>
@@ -21217,110 +21398,37 @@
           <a:p>
             <a:pPr algn="l"/>
             <a:r>
-              <a:rPr sz="1200" b="0" i="0">
+              <a:rPr sz="1100" b="0" i="0">
                 <a:solidFill>
                   <a:srgbClr val="212121"/>
                 </a:solidFill>
                 <a:latin typeface="Calibri"/>
               </a:rPr>
-              <a:t>▸  Transparência salarial por raça/gênero
-obrigatória (empresas &gt; 100 funcionários)</a:t>
-            </a:r>
-          </a:p>
-        </p:txBody>
-      </p:sp>
-      <p:sp>
-        <p:nvSpPr>
-          <p:cNvPr id="15" name="TextBox 14"/>
-          <p:cNvSpPr txBox="1"/>
-          <p:nvPr/>
-        </p:nvSpPr>
-        <p:spPr>
-          <a:xfrm>
-            <a:off x="4434839" y="2468880"/>
-            <a:ext cx="3383280" cy="731520"/>
-          </a:xfrm>
-          <a:prstGeom prst="rect">
-            <a:avLst/>
-          </a:prstGeom>
-          <a:noFill/>
-        </p:spPr>
-        <p:txBody>
-          <a:bodyPr wrap="square">
-            <a:spAutoFit/>
-          </a:bodyPr>
-          <a:lstStyle/>
-          <a:p>
-            <a:pPr algn="l"/>
-            <a:r>
-              <a:rPr sz="1200" b="0" i="0">
-                <a:solidFill>
-                  <a:srgbClr val="212121"/>
-                </a:solidFill>
-                <a:latin typeface="Calibri"/>
-              </a:rPr>
-              <a:t>▸  Auditoria de igual pagamento por trabalho igual
-com penalidades progressivas (gap HLM M4)</a:t>
-            </a:r>
-          </a:p>
-        </p:txBody>
-      </p:sp>
-      <p:sp>
-        <p:nvSpPr>
-          <p:cNvPr id="16" name="TextBox 15"/>
-          <p:cNvSpPr txBox="1"/>
-          <p:nvPr/>
-        </p:nvSpPr>
-        <p:spPr>
-          <a:xfrm>
-            <a:off x="4434839" y="3246120"/>
-            <a:ext cx="3383280" cy="731520"/>
-          </a:xfrm>
-          <a:prstGeom prst="rect">
-            <a:avLst/>
-          </a:prstGeom>
-          <a:noFill/>
-        </p:spPr>
-        <p:txBody>
-          <a:bodyPr wrap="square">
-            <a:spAutoFit/>
-          </a:bodyPr>
-          <a:lstStyle/>
-          <a:p>
-            <a:pPr algn="l"/>
-            <a:r>
-              <a:rPr sz="1200" b="0" i="0">
-                <a:solidFill>
-                  <a:srgbClr val="212121"/>
-                </a:solidFill>
-                <a:latin typeface="Calibri"/>
-              </a:rPr>
-              <a:t>▸  Piso salarial indexado nas categorias com
-maior gap racial residual (6,2% HLM M4)</a:t>
-            </a:r>
-          </a:p>
-        </p:txBody>
-      </p:sp>
-      <p:sp>
-        <p:nvSpPr>
-          <p:cNvPr id="17" name="Rectangle 16"/>
+              <a:t>OR=1,14 no acesso: penalidade racial um pouco menor entre mulheres — mas a negra acumula raça + teto de gênero no topo</a:t>
+            </a:r>
+          </a:p>
+        </p:txBody>
+      </p:sp>
+      <p:sp>
+        <p:nvSpPr>
+          <p:cNvPr id="19" name="Rectangle 18"/>
           <p:cNvSpPr/>
           <p:nvPr/>
         </p:nvSpPr>
         <p:spPr>
           <a:xfrm>
-            <a:off x="8229598" y="1097280"/>
-            <a:ext cx="3749039" cy="5029200"/>
+            <a:off x="274320" y="6199632"/>
+            <a:ext cx="11612880" cy="512064"/>
           </a:xfrm>
           <a:prstGeom prst="rect">
             <a:avLst/>
           </a:prstGeom>
           <a:solidFill>
-            <a:srgbClr val="F5F5F5"/>
+            <a:srgbClr val="E3F2FD"/>
           </a:solidFill>
-          <a:ln w="19050">
+          <a:ln w="10160">
             <a:solidFill>
-              <a:srgbClr val="2E7D32"/>
+              <a:srgbClr val="1F3864"/>
             </a:solidFill>
           </a:ln>
         </p:spPr>
@@ -21348,20 +21456,55 @@
       </p:sp>
       <p:sp>
         <p:nvSpPr>
-          <p:cNvPr id="18" name="Rectangle 17"/>
+          <p:cNvPr id="20" name="TextBox 19"/>
+          <p:cNvSpPr txBox="1"/>
+          <p:nvPr/>
+        </p:nvSpPr>
+        <p:spPr>
+          <a:xfrm>
+            <a:off x="457200" y="6245352"/>
+            <a:ext cx="11247120" cy="411480"/>
+          </a:xfrm>
+          <a:prstGeom prst="rect">
+            <a:avLst/>
+          </a:prstGeom>
+          <a:noFill/>
+        </p:spPr>
+        <p:txBody>
+          <a:bodyPr wrap="square">
+            <a:spAutoFit/>
+          </a:bodyPr>
+          <a:lstStyle/>
+          <a:p>
+            <a:pPr algn="l"/>
+            <a:r>
+              <a:rPr sz="1200" b="0" i="0">
+                <a:solidFill>
+                  <a:srgbClr val="1F3864"/>
+                </a:solidFill>
+                <a:latin typeface="Calibri"/>
+              </a:rPr>
+              <a:t>O teto de vidro não é racial nem sexualmente neutro: a mulher negra pode ENTRAR em ocupações qualificadas, mas é barrada de CHEGAR AO TOPO da remuneração.</a:t>
+            </a:r>
+          </a:p>
+        </p:txBody>
+      </p:sp>
+      <p:sp>
+        <p:nvSpPr>
+          <p:cNvPr id="21" name="Rectangle 20"/>
           <p:cNvSpPr/>
           <p:nvPr/>
         </p:nvSpPr>
         <p:spPr>
           <a:xfrm>
-            <a:off x="8229598" y="1097280"/>
-            <a:ext cx="3749039" cy="502920"/>
+            <a:off x="0" y="6601968"/>
+            <a:ext cx="12188952" cy="256032"/>
           </a:xfrm>
           <a:prstGeom prst="rect">
             <a:avLst/>
           </a:prstGeom>
           <a:solidFill>
-            <a:srgbClr val="2E7D32"/>
+            <a:srgbClr val="1F3864"/>
           </a:solidFill>
           <a:ln/>
         </p:spPr>
@@ -21389,226 +21532,7 @@
       </p:sp>
       <p:sp>
         <p:nvSpPr>
-          <p:cNvPr id="19" name="TextBox 18"/>
-          <p:cNvSpPr txBox="1"/>
-          <p:nvPr/>
-        </p:nvSpPr>
-        <p:spPr>
-          <a:xfrm>
-            <a:off x="8321038" y="1143000"/>
-            <a:ext cx="3566160" cy="457200"/>
-          </a:xfrm>
-          <a:prstGeom prst="rect">
-            <a:avLst/>
-          </a:prstGeom>
-          <a:noFill/>
-        </p:spPr>
-        <p:txBody>
-          <a:bodyPr wrap="square">
-            <a:spAutoFit/>
-          </a:bodyPr>
-          <a:lstStyle/>
-          <a:p>
-            <a:pPr algn="l"/>
-            <a:r>
-              <a:rPr sz="1300" b="1" i="0">
-                <a:solidFill>
-                  <a:srgbClr val="FFFFFF"/>
-                </a:solidFill>
-                <a:latin typeface="Calibri"/>
-              </a:rPr>
-              <a:t>Eixo 3 — Inclusão Produtiva</a:t>
-            </a:r>
-          </a:p>
-        </p:txBody>
-      </p:sp>
-      <p:sp>
-        <p:nvSpPr>
-          <p:cNvPr id="20" name="TextBox 19"/>
-          <p:cNvSpPr txBox="1"/>
-          <p:nvPr/>
-        </p:nvSpPr>
-        <p:spPr>
-          <a:xfrm>
-            <a:off x="8412478" y="1691640"/>
-            <a:ext cx="3383280" cy="731520"/>
-          </a:xfrm>
-          <a:prstGeom prst="rect">
-            <a:avLst/>
-          </a:prstGeom>
-          <a:noFill/>
-        </p:spPr>
-        <p:txBody>
-          <a:bodyPr wrap="square">
-            <a:spAutoFit/>
-          </a:bodyPr>
-          <a:lstStyle/>
-          <a:p>
-            <a:pPr algn="l"/>
-            <a:r>
-              <a:rPr sz="1200" b="0" i="0">
-                <a:solidFill>
-                  <a:srgbClr val="212121"/>
-                </a:solidFill>
-                <a:latin typeface="Calibri"/>
-              </a:rPr>
-              <a:t>▸  Mentoria estruturada para elevar betweenness
-de negros nas redes profissionais (SNA: =0)</a:t>
-            </a:r>
-          </a:p>
-        </p:txBody>
-      </p:sp>
-      <p:sp>
-        <p:nvSpPr>
-          <p:cNvPr id="21" name="TextBox 20"/>
-          <p:cNvSpPr txBox="1"/>
-          <p:nvPr/>
-        </p:nvSpPr>
-        <p:spPr>
-          <a:xfrm>
-            <a:off x="8412478" y="2468880"/>
-            <a:ext cx="3383280" cy="731520"/>
-          </a:xfrm>
-          <a:prstGeom prst="rect">
-            <a:avLst/>
-          </a:prstGeom>
-          <a:noFill/>
-        </p:spPr>
-        <p:txBody>
-          <a:bodyPr wrap="square">
-            <a:spAutoFit/>
-          </a:bodyPr>
-          <a:lstStyle/>
-          <a:p>
-            <a:pPr algn="l"/>
-            <a:r>
-              <a:rPr sz="1200" b="0" i="0">
-                <a:solidFill>
-                  <a:srgbClr val="212121"/>
-                </a:solidFill>
-                <a:latin typeface="Calibri"/>
-              </a:rPr>
-              <a:t>▸  30% dos cargos DAS e liderança corporativa
-para negros até 2030 (inclusão nas redes)</a:t>
-            </a:r>
-          </a:p>
-        </p:txBody>
-      </p:sp>
-      <p:sp>
-        <p:nvSpPr>
           <p:cNvPr id="22" name="TextBox 21"/>
-          <p:cNvSpPr txBox="1"/>
-          <p:nvPr/>
-        </p:nvSpPr>
-        <p:spPr>
-          <a:xfrm>
-            <a:off x="8412478" y="3246120"/>
-            <a:ext cx="3383280" cy="731520"/>
-          </a:xfrm>
-          <a:prstGeom prst="rect">
-            <a:avLst/>
-          </a:prstGeom>
-          <a:noFill/>
-        </p:spPr>
-        <p:txBody>
-          <a:bodyPr wrap="square">
-            <a:spAutoFit/>
-          </a:bodyPr>
-          <a:lstStyle/>
-          <a:p>
-            <a:pPr algn="l"/>
-            <a:r>
-              <a:rPr sz="1200" b="0" i="0">
-                <a:solidFill>
-                  <a:srgbClr val="212121"/>
-                </a:solidFill>
-                <a:latin typeface="Calibri"/>
-              </a:rPr>
-              <a:t>▸  Equalizar CBO = +127,3% renda negra
-(proxy agregado: ~74 p.p.; ver nota metodológica)</a:t>
-            </a:r>
-          </a:p>
-        </p:txBody>
-      </p:sp>
-      <p:sp>
-        <p:nvSpPr>
-          <p:cNvPr id="23" name="TextBox 22"/>
-          <p:cNvSpPr txBox="1"/>
-          <p:nvPr/>
-        </p:nvSpPr>
-        <p:spPr>
-          <a:xfrm>
-            <a:off x="274320" y="6217920"/>
-            <a:ext cx="11612880" cy="411480"/>
-          </a:xfrm>
-          <a:prstGeom prst="rect">
-            <a:avLst/>
-          </a:prstGeom>
-          <a:noFill/>
-        </p:spPr>
-        <p:txBody>
-          <a:bodyPr wrap="square">
-            <a:spAutoFit/>
-          </a:bodyPr>
-          <a:lstStyle/>
-          <a:p>
-            <a:pPr algn="ctr"/>
-            <a:r>
-              <a:rPr sz="1300" b="1" i="0">
-                <a:solidFill>
-                  <a:srgbClr val="B71C1C"/>
-                </a:solidFill>
-                <a:latin typeface="Calibri"/>
-              </a:rPr>
-              <a:t>⚠  Ao ritmo atual de convergência (~0,02 log-pontos/ano), eliminar o gap levaria mais de 100 anos.</a:t>
-            </a:r>
-          </a:p>
-        </p:txBody>
-      </p:sp>
-      <p:sp>
-        <p:nvSpPr>
-          <p:cNvPr id="24" name="Rectangle 23"/>
-          <p:cNvSpPr/>
-          <p:nvPr/>
-        </p:nvSpPr>
-        <p:spPr>
-          <a:xfrm>
-            <a:off x="0" y="6601968"/>
-            <a:ext cx="12188952" cy="256032"/>
-          </a:xfrm>
-          <a:prstGeom prst="rect">
-            <a:avLst/>
-          </a:prstGeom>
-          <a:solidFill>
-            <a:srgbClr val="1F3864"/>
-          </a:solidFill>
-          <a:ln/>
-        </p:spPr>
-        <p:style>
-          <a:lnRef idx="1">
-            <a:schemeClr val="accent1"/>
-          </a:lnRef>
-          <a:fillRef idx="3">
-            <a:schemeClr val="accent1"/>
-          </a:fillRef>
-          <a:effectRef idx="2">
-            <a:schemeClr val="accent1"/>
-          </a:effectRef>
-          <a:fontRef idx="minor">
-            <a:schemeClr val="lt1"/>
-          </a:fontRef>
-        </p:style>
-        <p:txBody>
-          <a:bodyPr rtlCol="0" anchor="ctr"/>
-          <a:lstStyle/>
-          <a:p>
-            <a:pPr algn="ctr"/>
-          </a:p>
-        </p:txBody>
-      </p:sp>
-      <p:sp>
-        <p:nvSpPr>
-          <p:cNvPr id="25" name="TextBox 24"/>
           <p:cNvSpPr txBox="1"/>
           <p:nvPr/>
         </p:nvSpPr>
@@ -21643,7 +21567,7 @@
       </p:sp>
       <p:sp>
         <p:nvSpPr>
-          <p:cNvPr id="26" name="TextBox 25"/>
+          <p:cNvPr id="23" name="TextBox 22"/>
           <p:cNvSpPr txBox="1"/>
           <p:nvPr/>
         </p:nvSpPr>
@@ -21671,7 +21595,7 @@
                 </a:solidFill>
                 <a:latin typeface="Calibri"/>
               </a:rPr>
-              <a:t>27/28</a:t>
+              <a:t>27/29</a:t>
             </a:r>
           </a:p>
         </p:txBody>
@@ -21765,7 +21689,7 @@
                 </a:solidFill>
                 <a:latin typeface="Calibri"/>
               </a:rPr>
-              <a:t>27. Limitações e Agenda Futura</a:t>
+              <a:t>27. Implicações de Política</a:t>
             </a:r>
           </a:p>
         </p:txBody>
@@ -21800,370 +21724,33 @@
                 </a:solidFill>
                 <a:latin typeface="Calibri"/>
               </a:rPr>
-              <a:t>Honestidade acadêmica: o que este trabalho não faz e por quê</a:t>
-            </a:r>
-          </a:p>
-        </p:txBody>
-      </p:sp>
-      <p:sp>
-        <p:nvSpPr>
-          <p:cNvPr id="5" name="TextBox 4"/>
-          <p:cNvSpPr txBox="1"/>
-          <p:nvPr/>
-        </p:nvSpPr>
-        <p:spPr>
-          <a:xfrm>
-            <a:off x="365760" y="1143000"/>
-            <a:ext cx="5486400" cy="365760"/>
-          </a:xfrm>
-          <a:prstGeom prst="rect">
-            <a:avLst/>
-          </a:prstGeom>
-          <a:noFill/>
-        </p:spPr>
-        <p:txBody>
-          <a:bodyPr wrap="square">
-            <a:spAutoFit/>
-          </a:bodyPr>
-          <a:lstStyle/>
-          <a:p>
-            <a:pPr algn="l"/>
-            <a:r>
-              <a:rPr sz="1600" b="1" i="0">
-                <a:solidFill>
-                  <a:srgbClr val="B71C1C"/>
-                </a:solidFill>
-                <a:latin typeface="Calibri"/>
-              </a:rPr>
-              <a:t>Limitações</a:t>
-            </a:r>
-          </a:p>
-        </p:txBody>
-      </p:sp>
-      <p:sp>
-        <p:nvSpPr>
-          <p:cNvPr id="6" name="TextBox 5"/>
-          <p:cNvSpPr txBox="1"/>
-          <p:nvPr/>
-        </p:nvSpPr>
-        <p:spPr>
-          <a:xfrm>
-            <a:off x="365760" y="1600200"/>
-            <a:ext cx="5669280" cy="3474720"/>
-          </a:xfrm>
-          <a:prstGeom prst="rect">
-            <a:avLst/>
-          </a:prstGeom>
-          <a:noFill/>
-        </p:spPr>
-        <p:txBody>
-          <a:bodyPr wrap="square">
-            <a:spAutoFit/>
-          </a:bodyPr>
-          <a:lstStyle/>
-          <a:p>
-            <a:pPr>
-              <a:spcAft>
-                <a:spcPts val="400"/>
-              </a:spcAft>
-            </a:pPr>
-            <a:r>
-              <a:rPr sz="1300" b="1">
-                <a:solidFill>
-                  <a:srgbClr val="B71C1C"/>
-                </a:solidFill>
-                <a:latin typeface="Calibri"/>
-              </a:rPr>
-              <a:t>▸  </a:t>
-            </a:r>
-            <a:r>
-              <a:rPr sz="1300">
-                <a:solidFill>
-                  <a:srgbClr val="212121"/>
-                </a:solidFill>
-                <a:latin typeface="Calibri"/>
-              </a:rPr>
-              <a:t>PNAD não permite experimentos causais — coeficientes são associações condicionais, não efeitos causais no sentido de Rubin/Pearl</a:t>
-            </a:r>
-          </a:p>
-          <a:p>
-            <a:pPr>
-              <a:spcAft>
-                <a:spcPts val="400"/>
-              </a:spcAft>
-            </a:pPr>
-            <a:r>
-              <a:rPr sz="1300" b="1">
-                <a:solidFill>
-                  <a:srgbClr val="B71C1C"/>
-                </a:solidFill>
-                <a:latin typeface="Calibri"/>
-              </a:rPr>
-              <a:t>▸  </a:t>
-            </a:r>
-            <a:r>
-              <a:rPr sz="1300">
-                <a:solidFill>
-                  <a:srgbClr val="212121"/>
-                </a:solidFill>
-                <a:latin typeface="Calibri"/>
-              </a:rPr>
-              <a:t>UPA como proxy de bairro: unidade de amostragem ≠ bairro administrativo</a:t>
-            </a:r>
-          </a:p>
-          <a:p>
-            <a:pPr>
-              <a:spcAft>
-                <a:spcPts val="400"/>
-              </a:spcAft>
-            </a:pPr>
-            <a:r>
-              <a:rPr sz="1300" b="1">
-                <a:solidFill>
-                  <a:srgbClr val="B71C1C"/>
-                </a:solidFill>
-                <a:latin typeface="Calibri"/>
-              </a:rPr>
-              <a:t>▸  </a:t>
-            </a:r>
-            <a:r>
-              <a:rPr sz="1300">
-                <a:solidFill>
-                  <a:srgbClr val="212121"/>
-                </a:solidFill>
-                <a:latin typeface="Calibri"/>
-              </a:rPr>
-              <a:t>GLMM logístico estimado na PEA completa via lme4::glmer (nAGQ=0, bobyqa, n=7,7M, 40,9k UPAs); random slope de negro no GLMM não estimado por custo — porém o random slope foi estimado no HLM de salário (base da PO regionalizada por UF)</a:t>
-            </a:r>
-          </a:p>
-          <a:p>
-            <a:pPr>
-              <a:spcAft>
-                <a:spcPts val="400"/>
-              </a:spcAft>
-            </a:pPr>
-            <a:r>
-              <a:rPr sz="1300" b="1">
-                <a:solidFill>
-                  <a:srgbClr val="B71C1C"/>
-                </a:solidFill>
-                <a:latin typeface="Calibri"/>
-              </a:rPr>
-              <a:t>▸  </a:t>
-            </a:r>
-            <a:r>
-              <a:rPr sz="1300">
-                <a:solidFill>
-                  <a:srgbClr val="212121"/>
-                </a:solidFill>
-                <a:latin typeface="Calibri"/>
-              </a:rPr>
-              <a:t>CBO auto-declarado pode ter viés de classificação por raça (deflation de ocupação)</a:t>
-            </a:r>
-          </a:p>
-        </p:txBody>
-      </p:sp>
-      <p:sp>
-        <p:nvSpPr>
-          <p:cNvPr id="7" name="TextBox 6"/>
-          <p:cNvSpPr txBox="1"/>
-          <p:nvPr/>
-        </p:nvSpPr>
-        <p:spPr>
-          <a:xfrm>
-            <a:off x="6400800" y="1143000"/>
-            <a:ext cx="5486400" cy="365760"/>
-          </a:xfrm>
-          <a:prstGeom prst="rect">
-            <a:avLst/>
-          </a:prstGeom>
-          <a:noFill/>
-        </p:spPr>
-        <p:txBody>
-          <a:bodyPr wrap="square">
-            <a:spAutoFit/>
-          </a:bodyPr>
-          <a:lstStyle/>
-          <a:p>
-            <a:pPr algn="l"/>
-            <a:r>
-              <a:rPr sz="1600" b="1" i="0">
-                <a:solidFill>
-                  <a:srgbClr val="1565C0"/>
-                </a:solidFill>
-                <a:latin typeface="Calibri"/>
-              </a:rPr>
-              <a:t>Agenda Futura</a:t>
-            </a:r>
-          </a:p>
-        </p:txBody>
-      </p:sp>
-      <p:sp>
-        <p:nvSpPr>
-          <p:cNvPr id="8" name="TextBox 7"/>
-          <p:cNvSpPr txBox="1"/>
-          <p:nvPr/>
-        </p:nvSpPr>
-        <p:spPr>
-          <a:xfrm>
-            <a:off x="6400800" y="1600200"/>
-            <a:ext cx="5669280" cy="3474720"/>
-          </a:xfrm>
-          <a:prstGeom prst="rect">
-            <a:avLst/>
-          </a:prstGeom>
-          <a:noFill/>
-        </p:spPr>
-        <p:txBody>
-          <a:bodyPr wrap="square">
-            <a:spAutoFit/>
-          </a:bodyPr>
-          <a:lstStyle/>
-          <a:p>
-            <a:pPr>
-              <a:spcAft>
-                <a:spcPts val="400"/>
-              </a:spcAft>
-            </a:pPr>
-            <a:r>
-              <a:rPr sz="1300" b="1">
-                <a:solidFill>
-                  <a:srgbClr val="1565C0"/>
-                </a:solidFill>
-                <a:latin typeface="Calibri"/>
-              </a:rPr>
-              <a:t>▸  </a:t>
-            </a:r>
-            <a:r>
-              <a:rPr sz="1300">
-                <a:solidFill>
-                  <a:srgbClr val="212121"/>
-                </a:solidFill>
-                <a:latin typeface="Calibri"/>
-              </a:rPr>
-              <a:t>Análise de variáveis instrumentais (IV) para identificação causal — distância à escola técnica como instrumento</a:t>
-            </a:r>
-          </a:p>
-          <a:p>
-            <a:pPr>
-              <a:spcAft>
-                <a:spcPts val="400"/>
-              </a:spcAft>
-            </a:pPr>
-            <a:r>
-              <a:rPr sz="1300" b="1">
-                <a:solidFill>
-                  <a:srgbClr val="1565C0"/>
-                </a:solidFill>
-                <a:latin typeface="Calibri"/>
-              </a:rPr>
-              <a:t>▸  </a:t>
-            </a:r>
-            <a:r>
-              <a:rPr sz="1300">
-                <a:solidFill>
-                  <a:srgbClr val="212121"/>
-                </a:solidFill>
-                <a:latin typeface="Calibri"/>
-              </a:rPr>
-              <a:t>RAIS linkada à PNAD para rastrear trajetórias de mobilidade intraempresa</a:t>
-            </a:r>
-          </a:p>
-          <a:p>
-            <a:pPr>
-              <a:spcAft>
-                <a:spcPts val="400"/>
-              </a:spcAft>
-            </a:pPr>
-            <a:r>
-              <a:rPr sz="1300" b="1">
-                <a:solidFill>
-                  <a:srgbClr val="1565C0"/>
-                </a:solidFill>
-                <a:latin typeface="Calibri"/>
-              </a:rPr>
-              <a:t>▸  </a:t>
-            </a:r>
-            <a:r>
-              <a:rPr sz="1300">
-                <a:solidFill>
-                  <a:srgbClr val="212121"/>
-                </a:solidFill>
-                <a:latin typeface="Calibri"/>
-              </a:rPr>
-              <a:t>Análise de mediação formal (path analysis) raça → ocupação → renda</a:t>
-            </a:r>
-          </a:p>
-          <a:p>
-            <a:pPr>
-              <a:spcAft>
-                <a:spcPts val="400"/>
-              </a:spcAft>
-            </a:pPr>
-            <a:r>
-              <a:rPr sz="1300" b="1">
-                <a:solidFill>
-                  <a:srgbClr val="1565C0"/>
-                </a:solidFill>
-                <a:latin typeface="Calibri"/>
-              </a:rPr>
-              <a:t>▸  </a:t>
-            </a:r>
-            <a:r>
-              <a:rPr sz="1300">
-                <a:solidFill>
-                  <a:srgbClr val="212121"/>
-                </a:solidFill>
-                <a:latin typeface="Calibri"/>
-              </a:rPr>
-              <a:t>Extensão ao setor público por UF — heterogeneidade do glass ceiling entre estados</a:t>
-            </a:r>
-          </a:p>
-          <a:p>
-            <a:pPr>
-              <a:spcAft>
-                <a:spcPts val="400"/>
-              </a:spcAft>
-            </a:pPr>
-            <a:r>
-              <a:rPr sz="1300" b="1">
-                <a:solidFill>
-                  <a:srgbClr val="1565C0"/>
-                </a:solidFill>
-                <a:latin typeface="Calibri"/>
-              </a:rPr>
-              <a:t>▸  </a:t>
-            </a:r>
-            <a:r>
-              <a:rPr sz="1300">
-                <a:solidFill>
-                  <a:srgbClr val="212121"/>
-                </a:solidFill>
-                <a:latin typeface="Calibri"/>
-              </a:rPr>
-              <a:t>Modelo longitudinal com painéis rotativos da PNAD (2T seguidos) para efeitos fixos de indivíduo</a:t>
-            </a:r>
-          </a:p>
-        </p:txBody>
-      </p:sp>
-      <p:sp>
-        <p:nvSpPr>
-          <p:cNvPr id="9" name="Rectangle 8"/>
+              <a:t>Três eixos simultâneos — ações isoladas são insuficientes para romper a armadilha estrutural</a:t>
+            </a:r>
+          </a:p>
+        </p:txBody>
+      </p:sp>
+      <p:sp>
+        <p:nvSpPr>
+          <p:cNvPr id="5" name="Rectangle 4"/>
           <p:cNvSpPr/>
           <p:nvPr/>
         </p:nvSpPr>
         <p:spPr>
           <a:xfrm>
-            <a:off x="0" y="6601968"/>
-            <a:ext cx="12188952" cy="256032"/>
+            <a:off x="274320" y="1097280"/>
+            <a:ext cx="3749039" cy="5029200"/>
           </a:xfrm>
           <a:prstGeom prst="rect">
             <a:avLst/>
           </a:prstGeom>
           <a:solidFill>
-            <a:srgbClr val="1F3864"/>
+            <a:srgbClr val="F5F5F5"/>
           </a:solidFill>
-          <a:ln/>
+          <a:ln w="19050">
+            <a:solidFill>
+              <a:srgbClr val="B71C1C"/>
+            </a:solidFill>
+          </a:ln>
         </p:spPr>
         <p:style>
           <a:lnRef idx="1">
@@ -22189,7 +21776,725 @@
       </p:sp>
       <p:sp>
         <p:nvSpPr>
+          <p:cNvPr id="6" name="Rectangle 5"/>
+          <p:cNvSpPr/>
+          <p:nvPr/>
+        </p:nvSpPr>
+        <p:spPr>
+          <a:xfrm>
+            <a:off x="274320" y="1097280"/>
+            <a:ext cx="3749039" cy="502920"/>
+          </a:xfrm>
+          <a:prstGeom prst="rect">
+            <a:avLst/>
+          </a:prstGeom>
+          <a:solidFill>
+            <a:srgbClr val="B71C1C"/>
+          </a:solidFill>
+          <a:ln/>
+        </p:spPr>
+        <p:style>
+          <a:lnRef idx="1">
+            <a:schemeClr val="accent1"/>
+          </a:lnRef>
+          <a:fillRef idx="3">
+            <a:schemeClr val="accent1"/>
+          </a:fillRef>
+          <a:effectRef idx="2">
+            <a:schemeClr val="accent1"/>
+          </a:effectRef>
+          <a:fontRef idx="minor">
+            <a:schemeClr val="lt1"/>
+          </a:fontRef>
+        </p:style>
+        <p:txBody>
+          <a:bodyPr rtlCol="0" anchor="ctr"/>
+          <a:lstStyle/>
+          <a:p>
+            <a:pPr algn="ctr"/>
+          </a:p>
+        </p:txBody>
+      </p:sp>
+      <p:sp>
+        <p:nvSpPr>
+          <p:cNvPr id="7" name="TextBox 6"/>
+          <p:cNvSpPr txBox="1"/>
+          <p:nvPr/>
+        </p:nvSpPr>
+        <p:spPr>
+          <a:xfrm>
+            <a:off x="365760" y="1143000"/>
+            <a:ext cx="3566160" cy="457200"/>
+          </a:xfrm>
+          <a:prstGeom prst="rect">
+            <a:avLst/>
+          </a:prstGeom>
+          <a:noFill/>
+        </p:spPr>
+        <p:txBody>
+          <a:bodyPr wrap="square">
+            <a:spAutoFit/>
+          </a:bodyPr>
+          <a:lstStyle/>
+          <a:p>
+            <a:pPr algn="l"/>
+            <a:r>
+              <a:rPr sz="1300" b="1" i="0">
+                <a:solidFill>
+                  <a:srgbClr val="FFFFFF"/>
+                </a:solidFill>
+                <a:latin typeface="Calibri"/>
+              </a:rPr>
+              <a:t>Eixo 1 — Acesso</a:t>
+            </a:r>
+          </a:p>
+        </p:txBody>
+      </p:sp>
+      <p:sp>
+        <p:nvSpPr>
+          <p:cNvPr id="8" name="TextBox 7"/>
+          <p:cNvSpPr txBox="1"/>
+          <p:nvPr/>
+        </p:nvSpPr>
+        <p:spPr>
+          <a:xfrm>
+            <a:off x="457200" y="1691640"/>
+            <a:ext cx="3383280" cy="731520"/>
+          </a:xfrm>
+          <a:prstGeom prst="rect">
+            <a:avLst/>
+          </a:prstGeom>
+          <a:noFill/>
+        </p:spPr>
+        <p:txBody>
+          <a:bodyPr wrap="square">
+            <a:spAutoFit/>
+          </a:bodyPr>
+          <a:lstStyle/>
+          <a:p>
+            <a:pPr algn="l"/>
+            <a:r>
+              <a:rPr sz="1200" b="0" i="0">
+                <a:solidFill>
+                  <a:srgbClr val="212121"/>
+                </a:solidFill>
+                <a:latin typeface="Calibri"/>
+              </a:rPr>
+              <a:t>▸  Cotas de acesso CBO Dirigente/Profissional:
+meta IR ≥ 0,80 até 2030</a:t>
+            </a:r>
+          </a:p>
+        </p:txBody>
+      </p:sp>
+      <p:sp>
+        <p:nvSpPr>
+          <p:cNvPr id="9" name="TextBox 8"/>
+          <p:cNvSpPr txBox="1"/>
+          <p:nvPr/>
+        </p:nvSpPr>
+        <p:spPr>
+          <a:xfrm>
+            <a:off x="457200" y="2468880"/>
+            <a:ext cx="3383280" cy="731520"/>
+          </a:xfrm>
+          <a:prstGeom prst="rect">
+            <a:avLst/>
+          </a:prstGeom>
+          <a:noFill/>
+        </p:spPr>
+        <p:txBody>
+          <a:bodyPr wrap="square">
+            <a:spAutoFit/>
+          </a:bodyPr>
+          <a:lstStyle/>
+          <a:p>
+            <a:pPr algn="l"/>
+            <a:r>
+              <a:rPr sz="1200" b="0" i="0">
+                <a:solidFill>
+                  <a:srgbClr val="212121"/>
+                </a:solidFill>
+                <a:latin typeface="Calibri"/>
+              </a:rPr>
+              <a:t>▸  PRONATEC c/ recorte racial e subsídio de
+transporte para trabalhadores de UPAs pobres</a:t>
+            </a:r>
+          </a:p>
+        </p:txBody>
+      </p:sp>
+      <p:sp>
+        <p:nvSpPr>
           <p:cNvPr id="10" name="TextBox 9"/>
+          <p:cNvSpPr txBox="1"/>
+          <p:nvPr/>
+        </p:nvSpPr>
+        <p:spPr>
+          <a:xfrm>
+            <a:off x="457200" y="3246120"/>
+            <a:ext cx="3383280" cy="731520"/>
+          </a:xfrm>
+          <a:prstGeom prst="rect">
+            <a:avLst/>
+          </a:prstGeom>
+          <a:noFill/>
+        </p:spPr>
+        <p:txBody>
+          <a:bodyPr wrap="square">
+            <a:spAutoFit/>
+          </a:bodyPr>
+          <a:lstStyle/>
+          <a:p>
+            <a:pPr algn="l"/>
+            <a:r>
+              <a:rPr sz="1200" b="0" i="0">
+                <a:solidFill>
+                  <a:srgbClr val="212121"/>
+                </a:solidFill>
+                <a:latin typeface="Calibri"/>
+              </a:rPr>
+              <a:t>▸  Bolsas de residência profissional em empresas
+de alta remuneração para egressos negros</a:t>
+            </a:r>
+          </a:p>
+        </p:txBody>
+      </p:sp>
+      <p:sp>
+        <p:nvSpPr>
+          <p:cNvPr id="11" name="Rectangle 10"/>
+          <p:cNvSpPr/>
+          <p:nvPr/>
+        </p:nvSpPr>
+        <p:spPr>
+          <a:xfrm>
+            <a:off x="4251959" y="1097280"/>
+            <a:ext cx="3749039" cy="5029200"/>
+          </a:xfrm>
+          <a:prstGeom prst="rect">
+            <a:avLst/>
+          </a:prstGeom>
+          <a:solidFill>
+            <a:srgbClr val="F5F5F5"/>
+          </a:solidFill>
+          <a:ln w="19050">
+            <a:solidFill>
+              <a:srgbClr val="1565C0"/>
+            </a:solidFill>
+          </a:ln>
+        </p:spPr>
+        <p:style>
+          <a:lnRef idx="1">
+            <a:schemeClr val="accent1"/>
+          </a:lnRef>
+          <a:fillRef idx="3">
+            <a:schemeClr val="accent1"/>
+          </a:fillRef>
+          <a:effectRef idx="2">
+            <a:schemeClr val="accent1"/>
+          </a:effectRef>
+          <a:fontRef idx="minor">
+            <a:schemeClr val="lt1"/>
+          </a:fontRef>
+        </p:style>
+        <p:txBody>
+          <a:bodyPr rtlCol="0" anchor="ctr"/>
+          <a:lstStyle/>
+          <a:p>
+            <a:pPr algn="ctr"/>
+          </a:p>
+        </p:txBody>
+      </p:sp>
+      <p:sp>
+        <p:nvSpPr>
+          <p:cNvPr id="12" name="Rectangle 11"/>
+          <p:cNvSpPr/>
+          <p:nvPr/>
+        </p:nvSpPr>
+        <p:spPr>
+          <a:xfrm>
+            <a:off x="4251959" y="1097280"/>
+            <a:ext cx="3749039" cy="502920"/>
+          </a:xfrm>
+          <a:prstGeom prst="rect">
+            <a:avLst/>
+          </a:prstGeom>
+          <a:solidFill>
+            <a:srgbClr val="1565C0"/>
+          </a:solidFill>
+          <a:ln/>
+        </p:spPr>
+        <p:style>
+          <a:lnRef idx="1">
+            <a:schemeClr val="accent1"/>
+          </a:lnRef>
+          <a:fillRef idx="3">
+            <a:schemeClr val="accent1"/>
+          </a:fillRef>
+          <a:effectRef idx="2">
+            <a:schemeClr val="accent1"/>
+          </a:effectRef>
+          <a:fontRef idx="minor">
+            <a:schemeClr val="lt1"/>
+          </a:fontRef>
+        </p:style>
+        <p:txBody>
+          <a:bodyPr rtlCol="0" anchor="ctr"/>
+          <a:lstStyle/>
+          <a:p>
+            <a:pPr algn="ctr"/>
+          </a:p>
+        </p:txBody>
+      </p:sp>
+      <p:sp>
+        <p:nvSpPr>
+          <p:cNvPr id="13" name="TextBox 12"/>
+          <p:cNvSpPr txBox="1"/>
+          <p:nvPr/>
+        </p:nvSpPr>
+        <p:spPr>
+          <a:xfrm>
+            <a:off x="4343399" y="1143000"/>
+            <a:ext cx="3566160" cy="457200"/>
+          </a:xfrm>
+          <a:prstGeom prst="rect">
+            <a:avLst/>
+          </a:prstGeom>
+          <a:noFill/>
+        </p:spPr>
+        <p:txBody>
+          <a:bodyPr wrap="square">
+            <a:spAutoFit/>
+          </a:bodyPr>
+          <a:lstStyle/>
+          <a:p>
+            <a:pPr algn="l"/>
+            <a:r>
+              <a:rPr sz="1300" b="1" i="0">
+                <a:solidFill>
+                  <a:srgbClr val="FFFFFF"/>
+                </a:solidFill>
+                <a:latin typeface="Calibri"/>
+              </a:rPr>
+              <a:t>Eixo 2 — Remuneração</a:t>
+            </a:r>
+          </a:p>
+        </p:txBody>
+      </p:sp>
+      <p:sp>
+        <p:nvSpPr>
+          <p:cNvPr id="14" name="TextBox 13"/>
+          <p:cNvSpPr txBox="1"/>
+          <p:nvPr/>
+        </p:nvSpPr>
+        <p:spPr>
+          <a:xfrm>
+            <a:off x="4434839" y="1691640"/>
+            <a:ext cx="3383280" cy="731520"/>
+          </a:xfrm>
+          <a:prstGeom prst="rect">
+            <a:avLst/>
+          </a:prstGeom>
+          <a:noFill/>
+        </p:spPr>
+        <p:txBody>
+          <a:bodyPr wrap="square">
+            <a:spAutoFit/>
+          </a:bodyPr>
+          <a:lstStyle/>
+          <a:p>
+            <a:pPr algn="l"/>
+            <a:r>
+              <a:rPr sz="1200" b="0" i="0">
+                <a:solidFill>
+                  <a:srgbClr val="212121"/>
+                </a:solidFill>
+                <a:latin typeface="Calibri"/>
+              </a:rPr>
+              <a:t>▸  Transparência salarial por raça/gênero
+obrigatória (empresas &gt; 100 funcionários)</a:t>
+            </a:r>
+          </a:p>
+        </p:txBody>
+      </p:sp>
+      <p:sp>
+        <p:nvSpPr>
+          <p:cNvPr id="15" name="TextBox 14"/>
+          <p:cNvSpPr txBox="1"/>
+          <p:nvPr/>
+        </p:nvSpPr>
+        <p:spPr>
+          <a:xfrm>
+            <a:off x="4434839" y="2468880"/>
+            <a:ext cx="3383280" cy="731520"/>
+          </a:xfrm>
+          <a:prstGeom prst="rect">
+            <a:avLst/>
+          </a:prstGeom>
+          <a:noFill/>
+        </p:spPr>
+        <p:txBody>
+          <a:bodyPr wrap="square">
+            <a:spAutoFit/>
+          </a:bodyPr>
+          <a:lstStyle/>
+          <a:p>
+            <a:pPr algn="l"/>
+            <a:r>
+              <a:rPr sz="1200" b="0" i="0">
+                <a:solidFill>
+                  <a:srgbClr val="212121"/>
+                </a:solidFill>
+                <a:latin typeface="Calibri"/>
+              </a:rPr>
+              <a:t>▸  Auditoria de igual pagamento por trabalho igual
+com penalidades progressivas (gap HLM M4)</a:t>
+            </a:r>
+          </a:p>
+        </p:txBody>
+      </p:sp>
+      <p:sp>
+        <p:nvSpPr>
+          <p:cNvPr id="16" name="TextBox 15"/>
+          <p:cNvSpPr txBox="1"/>
+          <p:nvPr/>
+        </p:nvSpPr>
+        <p:spPr>
+          <a:xfrm>
+            <a:off x="4434839" y="3246120"/>
+            <a:ext cx="3383280" cy="731520"/>
+          </a:xfrm>
+          <a:prstGeom prst="rect">
+            <a:avLst/>
+          </a:prstGeom>
+          <a:noFill/>
+        </p:spPr>
+        <p:txBody>
+          <a:bodyPr wrap="square">
+            <a:spAutoFit/>
+          </a:bodyPr>
+          <a:lstStyle/>
+          <a:p>
+            <a:pPr algn="l"/>
+            <a:r>
+              <a:rPr sz="1200" b="0" i="0">
+                <a:solidFill>
+                  <a:srgbClr val="212121"/>
+                </a:solidFill>
+                <a:latin typeface="Calibri"/>
+              </a:rPr>
+              <a:t>▸  Piso salarial indexado nas categorias com
+maior gap racial residual (6,2% HLM M4)</a:t>
+            </a:r>
+          </a:p>
+        </p:txBody>
+      </p:sp>
+      <p:sp>
+        <p:nvSpPr>
+          <p:cNvPr id="17" name="Rectangle 16"/>
+          <p:cNvSpPr/>
+          <p:nvPr/>
+        </p:nvSpPr>
+        <p:spPr>
+          <a:xfrm>
+            <a:off x="8229598" y="1097280"/>
+            <a:ext cx="3749039" cy="5029200"/>
+          </a:xfrm>
+          <a:prstGeom prst="rect">
+            <a:avLst/>
+          </a:prstGeom>
+          <a:solidFill>
+            <a:srgbClr val="F5F5F5"/>
+          </a:solidFill>
+          <a:ln w="19050">
+            <a:solidFill>
+              <a:srgbClr val="2E7D32"/>
+            </a:solidFill>
+          </a:ln>
+        </p:spPr>
+        <p:style>
+          <a:lnRef idx="1">
+            <a:schemeClr val="accent1"/>
+          </a:lnRef>
+          <a:fillRef idx="3">
+            <a:schemeClr val="accent1"/>
+          </a:fillRef>
+          <a:effectRef idx="2">
+            <a:schemeClr val="accent1"/>
+          </a:effectRef>
+          <a:fontRef idx="minor">
+            <a:schemeClr val="lt1"/>
+          </a:fontRef>
+        </p:style>
+        <p:txBody>
+          <a:bodyPr rtlCol="0" anchor="ctr"/>
+          <a:lstStyle/>
+          <a:p>
+            <a:pPr algn="ctr"/>
+          </a:p>
+        </p:txBody>
+      </p:sp>
+      <p:sp>
+        <p:nvSpPr>
+          <p:cNvPr id="18" name="Rectangle 17"/>
+          <p:cNvSpPr/>
+          <p:nvPr/>
+        </p:nvSpPr>
+        <p:spPr>
+          <a:xfrm>
+            <a:off x="8229598" y="1097280"/>
+            <a:ext cx="3749039" cy="502920"/>
+          </a:xfrm>
+          <a:prstGeom prst="rect">
+            <a:avLst/>
+          </a:prstGeom>
+          <a:solidFill>
+            <a:srgbClr val="2E7D32"/>
+          </a:solidFill>
+          <a:ln/>
+        </p:spPr>
+        <p:style>
+          <a:lnRef idx="1">
+            <a:schemeClr val="accent1"/>
+          </a:lnRef>
+          <a:fillRef idx="3">
+            <a:schemeClr val="accent1"/>
+          </a:fillRef>
+          <a:effectRef idx="2">
+            <a:schemeClr val="accent1"/>
+          </a:effectRef>
+          <a:fontRef idx="minor">
+            <a:schemeClr val="lt1"/>
+          </a:fontRef>
+        </p:style>
+        <p:txBody>
+          <a:bodyPr rtlCol="0" anchor="ctr"/>
+          <a:lstStyle/>
+          <a:p>
+            <a:pPr algn="ctr"/>
+          </a:p>
+        </p:txBody>
+      </p:sp>
+      <p:sp>
+        <p:nvSpPr>
+          <p:cNvPr id="19" name="TextBox 18"/>
+          <p:cNvSpPr txBox="1"/>
+          <p:nvPr/>
+        </p:nvSpPr>
+        <p:spPr>
+          <a:xfrm>
+            <a:off x="8321038" y="1143000"/>
+            <a:ext cx="3566160" cy="457200"/>
+          </a:xfrm>
+          <a:prstGeom prst="rect">
+            <a:avLst/>
+          </a:prstGeom>
+          <a:noFill/>
+        </p:spPr>
+        <p:txBody>
+          <a:bodyPr wrap="square">
+            <a:spAutoFit/>
+          </a:bodyPr>
+          <a:lstStyle/>
+          <a:p>
+            <a:pPr algn="l"/>
+            <a:r>
+              <a:rPr sz="1300" b="1" i="0">
+                <a:solidFill>
+                  <a:srgbClr val="FFFFFF"/>
+                </a:solidFill>
+                <a:latin typeface="Calibri"/>
+              </a:rPr>
+              <a:t>Eixo 3 — Inclusão Produtiva</a:t>
+            </a:r>
+          </a:p>
+        </p:txBody>
+      </p:sp>
+      <p:sp>
+        <p:nvSpPr>
+          <p:cNvPr id="20" name="TextBox 19"/>
+          <p:cNvSpPr txBox="1"/>
+          <p:nvPr/>
+        </p:nvSpPr>
+        <p:spPr>
+          <a:xfrm>
+            <a:off x="8412478" y="1691640"/>
+            <a:ext cx="3383280" cy="731520"/>
+          </a:xfrm>
+          <a:prstGeom prst="rect">
+            <a:avLst/>
+          </a:prstGeom>
+          <a:noFill/>
+        </p:spPr>
+        <p:txBody>
+          <a:bodyPr wrap="square">
+            <a:spAutoFit/>
+          </a:bodyPr>
+          <a:lstStyle/>
+          <a:p>
+            <a:pPr algn="l"/>
+            <a:r>
+              <a:rPr sz="1200" b="0" i="0">
+                <a:solidFill>
+                  <a:srgbClr val="212121"/>
+                </a:solidFill>
+                <a:latin typeface="Calibri"/>
+              </a:rPr>
+              <a:t>▸  Mentoria estruturada para elevar betweenness
+de negros nas redes profissionais (SNA: =0)</a:t>
+            </a:r>
+          </a:p>
+        </p:txBody>
+      </p:sp>
+      <p:sp>
+        <p:nvSpPr>
+          <p:cNvPr id="21" name="TextBox 20"/>
+          <p:cNvSpPr txBox="1"/>
+          <p:nvPr/>
+        </p:nvSpPr>
+        <p:spPr>
+          <a:xfrm>
+            <a:off x="8412478" y="2468880"/>
+            <a:ext cx="3383280" cy="731520"/>
+          </a:xfrm>
+          <a:prstGeom prst="rect">
+            <a:avLst/>
+          </a:prstGeom>
+          <a:noFill/>
+        </p:spPr>
+        <p:txBody>
+          <a:bodyPr wrap="square">
+            <a:spAutoFit/>
+          </a:bodyPr>
+          <a:lstStyle/>
+          <a:p>
+            <a:pPr algn="l"/>
+            <a:r>
+              <a:rPr sz="1200" b="0" i="0">
+                <a:solidFill>
+                  <a:srgbClr val="212121"/>
+                </a:solidFill>
+                <a:latin typeface="Calibri"/>
+              </a:rPr>
+              <a:t>▸  30% dos cargos DAS e liderança corporativa
+para negros até 2030 (inclusão nas redes)</a:t>
+            </a:r>
+          </a:p>
+        </p:txBody>
+      </p:sp>
+      <p:sp>
+        <p:nvSpPr>
+          <p:cNvPr id="22" name="TextBox 21"/>
+          <p:cNvSpPr txBox="1"/>
+          <p:nvPr/>
+        </p:nvSpPr>
+        <p:spPr>
+          <a:xfrm>
+            <a:off x="8412478" y="3246120"/>
+            <a:ext cx="3383280" cy="731520"/>
+          </a:xfrm>
+          <a:prstGeom prst="rect">
+            <a:avLst/>
+          </a:prstGeom>
+          <a:noFill/>
+        </p:spPr>
+        <p:txBody>
+          <a:bodyPr wrap="square">
+            <a:spAutoFit/>
+          </a:bodyPr>
+          <a:lstStyle/>
+          <a:p>
+            <a:pPr algn="l"/>
+            <a:r>
+              <a:rPr sz="1200" b="0" i="0">
+                <a:solidFill>
+                  <a:srgbClr val="212121"/>
+                </a:solidFill>
+                <a:latin typeface="Calibri"/>
+              </a:rPr>
+              <a:t>▸  Equalizar CBO = +127,3% renda negra
+(proxy agregado: ~74 p.p.; ver nota metodológica)</a:t>
+            </a:r>
+          </a:p>
+        </p:txBody>
+      </p:sp>
+      <p:sp>
+        <p:nvSpPr>
+          <p:cNvPr id="23" name="TextBox 22"/>
+          <p:cNvSpPr txBox="1"/>
+          <p:nvPr/>
+        </p:nvSpPr>
+        <p:spPr>
+          <a:xfrm>
+            <a:off x="274320" y="6217920"/>
+            <a:ext cx="11612880" cy="411480"/>
+          </a:xfrm>
+          <a:prstGeom prst="rect">
+            <a:avLst/>
+          </a:prstGeom>
+          <a:noFill/>
+        </p:spPr>
+        <p:txBody>
+          <a:bodyPr wrap="square">
+            <a:spAutoFit/>
+          </a:bodyPr>
+          <a:lstStyle/>
+          <a:p>
+            <a:pPr algn="ctr"/>
+            <a:r>
+              <a:rPr sz="1300" b="1" i="0">
+                <a:solidFill>
+                  <a:srgbClr val="B71C1C"/>
+                </a:solidFill>
+                <a:latin typeface="Calibri"/>
+              </a:rPr>
+              <a:t>⚠  Ao ritmo atual de convergência (~0,02 log-pontos/ano), eliminar o gap levaria mais de 100 anos.</a:t>
+            </a:r>
+          </a:p>
+        </p:txBody>
+      </p:sp>
+      <p:sp>
+        <p:nvSpPr>
+          <p:cNvPr id="24" name="Rectangle 23"/>
+          <p:cNvSpPr/>
+          <p:nvPr/>
+        </p:nvSpPr>
+        <p:spPr>
+          <a:xfrm>
+            <a:off x="0" y="6601968"/>
+            <a:ext cx="12188952" cy="256032"/>
+          </a:xfrm>
+          <a:prstGeom prst="rect">
+            <a:avLst/>
+          </a:prstGeom>
+          <a:solidFill>
+            <a:srgbClr val="1F3864"/>
+          </a:solidFill>
+          <a:ln/>
+        </p:spPr>
+        <p:style>
+          <a:lnRef idx="1">
+            <a:schemeClr val="accent1"/>
+          </a:lnRef>
+          <a:fillRef idx="3">
+            <a:schemeClr val="accent1"/>
+          </a:fillRef>
+          <a:effectRef idx="2">
+            <a:schemeClr val="accent1"/>
+          </a:effectRef>
+          <a:fontRef idx="minor">
+            <a:schemeClr val="lt1"/>
+          </a:fontRef>
+        </p:style>
+        <p:txBody>
+          <a:bodyPr rtlCol="0" anchor="ctr"/>
+          <a:lstStyle/>
+          <a:p>
+            <a:pPr algn="ctr"/>
+          </a:p>
+        </p:txBody>
+      </p:sp>
+      <p:sp>
+        <p:nvSpPr>
+          <p:cNvPr id="25" name="TextBox 24"/>
           <p:cNvSpPr txBox="1"/>
           <p:nvPr/>
         </p:nvSpPr>
@@ -22224,7 +22529,7 @@
       </p:sp>
       <p:sp>
         <p:nvSpPr>
-          <p:cNvPr id="11" name="TextBox 10"/>
+          <p:cNvPr id="26" name="TextBox 25"/>
           <p:cNvSpPr txBox="1"/>
           <p:nvPr/>
         </p:nvSpPr>
@@ -22252,7 +22557,7 @@
                 </a:solidFill>
                 <a:latin typeface="Calibri"/>
               </a:rPr>
-              <a:t>28/28</a:t>
+              <a:t>28/29</a:t>
             </a:r>
           </a:p>
         </p:txBody>
@@ -22284,7 +22589,7 @@
         <p:spPr>
           <a:xfrm>
             <a:off x="0" y="0"/>
-            <a:ext cx="12188952" cy="6858000"/>
+            <a:ext cx="12188952" cy="1005840"/>
           </a:xfrm>
           <a:prstGeom prst="rect">
             <a:avLst/>
@@ -22318,20 +22623,431 @@
       </p:sp>
       <p:sp>
         <p:nvSpPr>
-          <p:cNvPr id="3" name="Rectangle 2"/>
+          <p:cNvPr id="3" name="TextBox 2"/>
+          <p:cNvSpPr txBox="1"/>
+          <p:nvPr/>
+        </p:nvSpPr>
+        <p:spPr>
+          <a:xfrm>
+            <a:off x="274320" y="73152"/>
+            <a:ext cx="10972800" cy="502920"/>
+          </a:xfrm>
+          <a:prstGeom prst="rect">
+            <a:avLst/>
+          </a:prstGeom>
+          <a:noFill/>
+        </p:spPr>
+        <p:txBody>
+          <a:bodyPr wrap="square">
+            <a:spAutoFit/>
+          </a:bodyPr>
+          <a:lstStyle/>
+          <a:p>
+            <a:pPr algn="l"/>
+            <a:r>
+              <a:rPr sz="2600" b="1" i="0">
+                <a:solidFill>
+                  <a:srgbClr val="FFFFFF"/>
+                </a:solidFill>
+                <a:latin typeface="Calibri"/>
+              </a:rPr>
+              <a:t>28. Limitações e Agenda Futura</a:t>
+            </a:r>
+          </a:p>
+        </p:txBody>
+      </p:sp>
+      <p:sp>
+        <p:nvSpPr>
+          <p:cNvPr id="4" name="TextBox 3"/>
+          <p:cNvSpPr txBox="1"/>
+          <p:nvPr/>
+        </p:nvSpPr>
+        <p:spPr>
+          <a:xfrm>
+            <a:off x="274320" y="594360"/>
+            <a:ext cx="10972800" cy="347472"/>
+          </a:xfrm>
+          <a:prstGeom prst="rect">
+            <a:avLst/>
+          </a:prstGeom>
+          <a:noFill/>
+        </p:spPr>
+        <p:txBody>
+          <a:bodyPr wrap="square">
+            <a:spAutoFit/>
+          </a:bodyPr>
+          <a:lstStyle/>
+          <a:p>
+            <a:pPr algn="l"/>
+            <a:r>
+              <a:rPr sz="1400" b="0" i="0">
+                <a:solidFill>
+                  <a:srgbClr val="BBDEFB"/>
+                </a:solidFill>
+                <a:latin typeface="Calibri"/>
+              </a:rPr>
+              <a:t>Honestidade acadêmica: o que este trabalho não faz e por quê</a:t>
+            </a:r>
+          </a:p>
+        </p:txBody>
+      </p:sp>
+      <p:sp>
+        <p:nvSpPr>
+          <p:cNvPr id="5" name="TextBox 4"/>
+          <p:cNvSpPr txBox="1"/>
+          <p:nvPr/>
+        </p:nvSpPr>
+        <p:spPr>
+          <a:xfrm>
+            <a:off x="365760" y="1143000"/>
+            <a:ext cx="5486400" cy="365760"/>
+          </a:xfrm>
+          <a:prstGeom prst="rect">
+            <a:avLst/>
+          </a:prstGeom>
+          <a:noFill/>
+        </p:spPr>
+        <p:txBody>
+          <a:bodyPr wrap="square">
+            <a:spAutoFit/>
+          </a:bodyPr>
+          <a:lstStyle/>
+          <a:p>
+            <a:pPr algn="l"/>
+            <a:r>
+              <a:rPr sz="1600" b="1" i="0">
+                <a:solidFill>
+                  <a:srgbClr val="B71C1C"/>
+                </a:solidFill>
+                <a:latin typeface="Calibri"/>
+              </a:rPr>
+              <a:t>Limitações</a:t>
+            </a:r>
+          </a:p>
+        </p:txBody>
+      </p:sp>
+      <p:sp>
+        <p:nvSpPr>
+          <p:cNvPr id="6" name="TextBox 5"/>
+          <p:cNvSpPr txBox="1"/>
+          <p:nvPr/>
+        </p:nvSpPr>
+        <p:spPr>
+          <a:xfrm>
+            <a:off x="365760" y="1600200"/>
+            <a:ext cx="5669280" cy="3474720"/>
+          </a:xfrm>
+          <a:prstGeom prst="rect">
+            <a:avLst/>
+          </a:prstGeom>
+          <a:noFill/>
+        </p:spPr>
+        <p:txBody>
+          <a:bodyPr wrap="square">
+            <a:spAutoFit/>
+          </a:bodyPr>
+          <a:lstStyle/>
+          <a:p>
+            <a:pPr>
+              <a:spcAft>
+                <a:spcPts val="400"/>
+              </a:spcAft>
+            </a:pPr>
+            <a:r>
+              <a:rPr sz="1300" b="1">
+                <a:solidFill>
+                  <a:srgbClr val="B71C1C"/>
+                </a:solidFill>
+                <a:latin typeface="Calibri"/>
+              </a:rPr>
+              <a:t>▸  </a:t>
+            </a:r>
+            <a:r>
+              <a:rPr sz="1300">
+                <a:solidFill>
+                  <a:srgbClr val="212121"/>
+                </a:solidFill>
+                <a:latin typeface="Calibri"/>
+              </a:rPr>
+              <a:t>PNAD não permite experimentos causais — coeficientes são associações condicionais, não efeitos causais no sentido de Rubin/Pearl</a:t>
+            </a:r>
+          </a:p>
+          <a:p>
+            <a:pPr>
+              <a:spcAft>
+                <a:spcPts val="400"/>
+              </a:spcAft>
+            </a:pPr>
+            <a:r>
+              <a:rPr sz="1300" b="1">
+                <a:solidFill>
+                  <a:srgbClr val="B71C1C"/>
+                </a:solidFill>
+                <a:latin typeface="Calibri"/>
+              </a:rPr>
+              <a:t>▸  </a:t>
+            </a:r>
+            <a:r>
+              <a:rPr sz="1300">
+                <a:solidFill>
+                  <a:srgbClr val="212121"/>
+                </a:solidFill>
+                <a:latin typeface="Calibri"/>
+              </a:rPr>
+              <a:t>UPA como proxy de bairro: unidade de amostragem ≠ bairro administrativo</a:t>
+            </a:r>
+          </a:p>
+          <a:p>
+            <a:pPr>
+              <a:spcAft>
+                <a:spcPts val="400"/>
+              </a:spcAft>
+            </a:pPr>
+            <a:r>
+              <a:rPr sz="1300" b="1">
+                <a:solidFill>
+                  <a:srgbClr val="B71C1C"/>
+                </a:solidFill>
+                <a:latin typeface="Calibri"/>
+              </a:rPr>
+              <a:t>▸  </a:t>
+            </a:r>
+            <a:r>
+              <a:rPr sz="1300">
+                <a:solidFill>
+                  <a:srgbClr val="212121"/>
+                </a:solidFill>
+                <a:latin typeface="Calibri"/>
+              </a:rPr>
+              <a:t>GLMM logístico estimado na PEA completa via lme4::glmer (nAGQ=0, bobyqa, n=7,7M, 40,9k UPAs); random slope de negro estimado tanto no HLM (salário) quanto no GLMM (acesso, 1+negro|UF) — heterogeneidade geográfica confirmada (LRT p&lt;0,001)</a:t>
+            </a:r>
+          </a:p>
+          <a:p>
+            <a:pPr>
+              <a:spcAft>
+                <a:spcPts val="400"/>
+              </a:spcAft>
+            </a:pPr>
+            <a:r>
+              <a:rPr sz="1300" b="1">
+                <a:solidFill>
+                  <a:srgbClr val="B71C1C"/>
+                </a:solidFill>
+                <a:latin typeface="Calibri"/>
+              </a:rPr>
+              <a:t>▸  </a:t>
+            </a:r>
+            <a:r>
+              <a:rPr sz="1300">
+                <a:solidFill>
+                  <a:srgbClr val="212121"/>
+                </a:solidFill>
+                <a:latin typeface="Calibri"/>
+              </a:rPr>
+              <a:t>CBO auto-declarado pode ter viés de classificação por raça (deflation de ocupação)</a:t>
+            </a:r>
+          </a:p>
+        </p:txBody>
+      </p:sp>
+      <p:sp>
+        <p:nvSpPr>
+          <p:cNvPr id="7" name="TextBox 6"/>
+          <p:cNvSpPr txBox="1"/>
+          <p:nvPr/>
+        </p:nvSpPr>
+        <p:spPr>
+          <a:xfrm>
+            <a:off x="6400800" y="1143000"/>
+            <a:ext cx="5486400" cy="365760"/>
+          </a:xfrm>
+          <a:prstGeom prst="rect">
+            <a:avLst/>
+          </a:prstGeom>
+          <a:noFill/>
+        </p:spPr>
+        <p:txBody>
+          <a:bodyPr wrap="square">
+            <a:spAutoFit/>
+          </a:bodyPr>
+          <a:lstStyle/>
+          <a:p>
+            <a:pPr algn="l"/>
+            <a:r>
+              <a:rPr sz="1600" b="1" i="0">
+                <a:solidFill>
+                  <a:srgbClr val="1565C0"/>
+                </a:solidFill>
+                <a:latin typeface="Calibri"/>
+              </a:rPr>
+              <a:t>Agenda Futura</a:t>
+            </a:r>
+          </a:p>
+        </p:txBody>
+      </p:sp>
+      <p:sp>
+        <p:nvSpPr>
+          <p:cNvPr id="8" name="TextBox 7"/>
+          <p:cNvSpPr txBox="1"/>
+          <p:nvPr/>
+        </p:nvSpPr>
+        <p:spPr>
+          <a:xfrm>
+            <a:off x="6400800" y="1600200"/>
+            <a:ext cx="5669280" cy="3474720"/>
+          </a:xfrm>
+          <a:prstGeom prst="rect">
+            <a:avLst/>
+          </a:prstGeom>
+          <a:noFill/>
+        </p:spPr>
+        <p:txBody>
+          <a:bodyPr wrap="square">
+            <a:spAutoFit/>
+          </a:bodyPr>
+          <a:lstStyle/>
+          <a:p>
+            <a:pPr>
+              <a:spcAft>
+                <a:spcPts val="400"/>
+              </a:spcAft>
+            </a:pPr>
+            <a:r>
+              <a:rPr sz="1300" b="1">
+                <a:solidFill>
+                  <a:srgbClr val="1565C0"/>
+                </a:solidFill>
+                <a:latin typeface="Calibri"/>
+              </a:rPr>
+              <a:t>▸  </a:t>
+            </a:r>
+            <a:r>
+              <a:rPr sz="1300">
+                <a:solidFill>
+                  <a:srgbClr val="212121"/>
+                </a:solidFill>
+                <a:latin typeface="Calibri"/>
+              </a:rPr>
+              <a:t>Análise de variáveis instrumentais (IV) para identificação causal — distância à escola técnica como instrumento</a:t>
+            </a:r>
+          </a:p>
+          <a:p>
+            <a:pPr>
+              <a:spcAft>
+                <a:spcPts val="400"/>
+              </a:spcAft>
+            </a:pPr>
+            <a:r>
+              <a:rPr sz="1300" b="1">
+                <a:solidFill>
+                  <a:srgbClr val="1565C0"/>
+                </a:solidFill>
+                <a:latin typeface="Calibri"/>
+              </a:rPr>
+              <a:t>▸  </a:t>
+            </a:r>
+            <a:r>
+              <a:rPr sz="1300">
+                <a:solidFill>
+                  <a:srgbClr val="212121"/>
+                </a:solidFill>
+                <a:latin typeface="Calibri"/>
+              </a:rPr>
+              <a:t>RAIS linkada à PNAD para rastrear trajetórias de mobilidade intraempresa</a:t>
+            </a:r>
+          </a:p>
+          <a:p>
+            <a:pPr>
+              <a:spcAft>
+                <a:spcPts val="400"/>
+              </a:spcAft>
+            </a:pPr>
+            <a:r>
+              <a:rPr sz="1300" b="1">
+                <a:solidFill>
+                  <a:srgbClr val="1565C0"/>
+                </a:solidFill>
+                <a:latin typeface="Calibri"/>
+              </a:rPr>
+              <a:t>▸  </a:t>
+            </a:r>
+            <a:r>
+              <a:rPr sz="1300">
+                <a:solidFill>
+                  <a:srgbClr val="212121"/>
+                </a:solidFill>
+                <a:latin typeface="Calibri"/>
+              </a:rPr>
+              <a:t>Análise de mediação formal (path analysis) raça → ocupação → renda</a:t>
+            </a:r>
+          </a:p>
+          <a:p>
+            <a:pPr>
+              <a:spcAft>
+                <a:spcPts val="400"/>
+              </a:spcAft>
+            </a:pPr>
+            <a:r>
+              <a:rPr sz="1300" b="1">
+                <a:solidFill>
+                  <a:srgbClr val="1565C0"/>
+                </a:solidFill>
+                <a:latin typeface="Calibri"/>
+              </a:rPr>
+              <a:t>▸  </a:t>
+            </a:r>
+            <a:r>
+              <a:rPr sz="1300">
+                <a:solidFill>
+                  <a:srgbClr val="212121"/>
+                </a:solidFill>
+                <a:latin typeface="Calibri"/>
+              </a:rPr>
+              <a:t>Extensão ao setor público por UF — heterogeneidade do glass ceiling entre estados</a:t>
+            </a:r>
+          </a:p>
+          <a:p>
+            <a:pPr>
+              <a:spcAft>
+                <a:spcPts val="400"/>
+              </a:spcAft>
+            </a:pPr>
+            <a:r>
+              <a:rPr sz="1300" b="1">
+                <a:solidFill>
+                  <a:srgbClr val="1565C0"/>
+                </a:solidFill>
+                <a:latin typeface="Calibri"/>
+              </a:rPr>
+              <a:t>▸  </a:t>
+            </a:r>
+            <a:r>
+              <a:rPr sz="1300">
+                <a:solidFill>
+                  <a:srgbClr val="212121"/>
+                </a:solidFill>
+                <a:latin typeface="Calibri"/>
+              </a:rPr>
+              <a:t>Modelo longitudinal com painéis rotativos da PNAD (2T seguidos) para efeitos fixos de indivíduo</a:t>
+            </a:r>
+          </a:p>
+        </p:txBody>
+      </p:sp>
+      <p:sp>
+        <p:nvSpPr>
+          <p:cNvPr id="9" name="Rectangle 8"/>
           <p:cNvSpPr/>
           <p:nvPr/>
         </p:nvSpPr>
         <p:spPr>
           <a:xfrm>
-            <a:off x="0" y="0"/>
-            <a:ext cx="12188952" cy="731520"/>
+            <a:off x="0" y="6601968"/>
+            <a:ext cx="12188952" cy="256032"/>
           </a:xfrm>
           <a:prstGeom prst="rect">
             <a:avLst/>
           </a:prstGeom>
           <a:solidFill>
-            <a:srgbClr val="0D1F3C"/>
+            <a:srgbClr val="1F3864"/>
           </a:solidFill>
           <a:ln/>
         </p:spPr>
@@ -22359,14 +23075,14 @@
       </p:sp>
       <p:sp>
         <p:nvSpPr>
-          <p:cNvPr id="4" name="TextBox 3"/>
-          <p:cNvSpPr txBox="1"/>
-          <p:nvPr/>
-        </p:nvSpPr>
-        <p:spPr>
-          <a:xfrm>
-            <a:off x="365760" y="91440"/>
-            <a:ext cx="10972800" cy="594360"/>
+          <p:cNvPr id="10" name="TextBox 9"/>
+          <p:cNvSpPr txBox="1"/>
+          <p:nvPr/>
+        </p:nvSpPr>
+        <p:spPr>
+          <a:xfrm>
+            <a:off x="137160" y="6629400"/>
+            <a:ext cx="10058400" cy="228600"/>
           </a:xfrm>
           <a:prstGeom prst="rect">
             <a:avLst/>
@@ -22381,873 +23097,48 @@
           <a:p>
             <a:pPr algn="l"/>
             <a:r>
-              <a:rPr sz="2600" b="1" i="0">
+              <a:rPr sz="850" b="0" i="0">
+                <a:solidFill>
+                  <a:srgbClr val="BBDEFB"/>
+                </a:solidFill>
+                <a:latin typeface="Calibri"/>
+              </a:rPr>
+              <a:t>Ricardo Calheiros  |  MBA USP/ESALQ  |  Racismo Estrutural e Mercado de Trabalho</a:t>
+            </a:r>
+          </a:p>
+        </p:txBody>
+      </p:sp>
+      <p:sp>
+        <p:nvSpPr>
+          <p:cNvPr id="11" name="TextBox 10"/>
+          <p:cNvSpPr txBox="1"/>
+          <p:nvPr/>
+        </p:nvSpPr>
+        <p:spPr>
+          <a:xfrm>
+            <a:off x="11704320" y="6629400"/>
+            <a:ext cx="457200" cy="228600"/>
+          </a:xfrm>
+          <a:prstGeom prst="rect">
+            <a:avLst/>
+          </a:prstGeom>
+          <a:noFill/>
+        </p:spPr>
+        <p:txBody>
+          <a:bodyPr wrap="square">
+            <a:spAutoFit/>
+          </a:bodyPr>
+          <a:lstStyle/>
+          <a:p>
+            <a:pPr algn="r"/>
+            <a:r>
+              <a:rPr sz="850" b="0" i="0">
                 <a:solidFill>
                   <a:srgbClr val="FFFFFF"/>
                 </a:solidFill>
                 <a:latin typeface="Calibri"/>
               </a:rPr>
-              <a:t>28. Conclusão</a:t>
-            </a:r>
-          </a:p>
-        </p:txBody>
-      </p:sp>
-      <p:sp>
-        <p:nvSpPr>
-          <p:cNvPr id="5" name="Rectangle 4"/>
-          <p:cNvSpPr/>
-          <p:nvPr/>
-        </p:nvSpPr>
-        <p:spPr>
-          <a:xfrm>
-            <a:off x="365760" y="868680"/>
-            <a:ext cx="2743200" cy="1371600"/>
-          </a:xfrm>
-          <a:prstGeom prst="rect">
-            <a:avLst/>
-          </a:prstGeom>
-          <a:solidFill>
-            <a:srgbClr val="1A305C"/>
-          </a:solidFill>
-          <a:ln w="12700">
-            <a:solidFill>
-              <a:srgbClr val="FF8F00"/>
-            </a:solidFill>
-          </a:ln>
-        </p:spPr>
-        <p:style>
-          <a:lnRef idx="1">
-            <a:schemeClr val="accent1"/>
-          </a:lnRef>
-          <a:fillRef idx="3">
-            <a:schemeClr val="accent1"/>
-          </a:fillRef>
-          <a:effectRef idx="2">
-            <a:schemeClr val="accent1"/>
-          </a:effectRef>
-          <a:fontRef idx="minor">
-            <a:schemeClr val="lt1"/>
-          </a:fontRef>
-        </p:style>
-        <p:txBody>
-          <a:bodyPr rtlCol="0" anchor="ctr"/>
-          <a:lstStyle/>
-          <a:p>
-            <a:pPr algn="ctr"/>
-          </a:p>
-        </p:txBody>
-      </p:sp>
-      <p:sp>
-        <p:nvSpPr>
-          <p:cNvPr id="6" name="TextBox 5"/>
-          <p:cNvSpPr txBox="1"/>
-          <p:nvPr/>
-        </p:nvSpPr>
-        <p:spPr>
-          <a:xfrm>
-            <a:off x="457200" y="914400"/>
-            <a:ext cx="2560320" cy="685800"/>
-          </a:xfrm>
-          <a:prstGeom prst="rect">
-            <a:avLst/>
-          </a:prstGeom>
-          <a:noFill/>
-        </p:spPr>
-        <p:txBody>
-          <a:bodyPr wrap="square">
-            <a:spAutoFit/>
-          </a:bodyPr>
-          <a:lstStyle/>
-          <a:p>
-            <a:pPr algn="ctr"/>
-            <a:r>
-              <a:rPr sz="3000" b="1" i="0">
-                <a:solidFill>
-                  <a:srgbClr val="FF8F00"/>
-                </a:solidFill>
-                <a:latin typeface="Calibri"/>
-              </a:rPr>
-              <a:t>19,3%</a:t>
-            </a:r>
-          </a:p>
-        </p:txBody>
-      </p:sp>
-      <p:sp>
-        <p:nvSpPr>
-          <p:cNvPr id="7" name="TextBox 6"/>
-          <p:cNvSpPr txBox="1"/>
-          <p:nvPr/>
-        </p:nvSpPr>
-        <p:spPr>
-          <a:xfrm>
-            <a:off x="457200" y="1600200"/>
-            <a:ext cx="2560320" cy="548640"/>
-          </a:xfrm>
-          <a:prstGeom prst="rect">
-            <a:avLst/>
-          </a:prstGeom>
-          <a:noFill/>
-        </p:spPr>
-        <p:txBody>
-          <a:bodyPr wrap="square">
-            <a:spAutoFit/>
-          </a:bodyPr>
-          <a:lstStyle/>
-          <a:p>
-            <a:pPr algn="ctr"/>
-            <a:r>
-              <a:rPr sz="1100" b="0" i="0">
-                <a:solidFill>
-                  <a:srgbClr val="FFFFFF"/>
-                </a:solidFill>
-                <a:latin typeface="Calibri"/>
-              </a:rPr>
-              <a:t>Gap racial bruto
-(M1 HLM)</a:t>
-            </a:r>
-          </a:p>
-        </p:txBody>
-      </p:sp>
-      <p:sp>
-        <p:nvSpPr>
-          <p:cNvPr id="8" name="Rectangle 7"/>
-          <p:cNvSpPr/>
-          <p:nvPr/>
-        </p:nvSpPr>
-        <p:spPr>
-          <a:xfrm>
-            <a:off x="3291840" y="868680"/>
-            <a:ext cx="2743200" cy="1371600"/>
-          </a:xfrm>
-          <a:prstGeom prst="rect">
-            <a:avLst/>
-          </a:prstGeom>
-          <a:solidFill>
-            <a:srgbClr val="1A305C"/>
-          </a:solidFill>
-          <a:ln w="12700">
-            <a:solidFill>
-              <a:srgbClr val="FF8F00"/>
-            </a:solidFill>
-          </a:ln>
-        </p:spPr>
-        <p:style>
-          <a:lnRef idx="1">
-            <a:schemeClr val="accent1"/>
-          </a:lnRef>
-          <a:fillRef idx="3">
-            <a:schemeClr val="accent1"/>
-          </a:fillRef>
-          <a:effectRef idx="2">
-            <a:schemeClr val="accent1"/>
-          </a:effectRef>
-          <a:fontRef idx="minor">
-            <a:schemeClr val="lt1"/>
-          </a:fontRef>
-        </p:style>
-        <p:txBody>
-          <a:bodyPr rtlCol="0" anchor="ctr"/>
-          <a:lstStyle/>
-          <a:p>
-            <a:pPr algn="ctr"/>
-          </a:p>
-        </p:txBody>
-      </p:sp>
-      <p:sp>
-        <p:nvSpPr>
-          <p:cNvPr id="9" name="TextBox 8"/>
-          <p:cNvSpPr txBox="1"/>
-          <p:nvPr/>
-        </p:nvSpPr>
-        <p:spPr>
-          <a:xfrm>
-            <a:off x="3383280" y="914400"/>
-            <a:ext cx="2560320" cy="685800"/>
-          </a:xfrm>
-          <a:prstGeom prst="rect">
-            <a:avLst/>
-          </a:prstGeom>
-          <a:noFill/>
-        </p:spPr>
-        <p:txBody>
-          <a:bodyPr wrap="square">
-            <a:spAutoFit/>
-          </a:bodyPr>
-          <a:lstStyle/>
-          <a:p>
-            <a:pPr algn="ctr"/>
-            <a:r>
-              <a:rPr sz="3000" b="1" i="0">
-                <a:solidFill>
-                  <a:srgbClr val="FF8F00"/>
-                </a:solidFill>
-                <a:latin typeface="Calibri"/>
-              </a:rPr>
-              <a:t>6,2%</a:t>
-            </a:r>
-          </a:p>
-        </p:txBody>
-      </p:sp>
-      <p:sp>
-        <p:nvSpPr>
-          <p:cNvPr id="10" name="TextBox 9"/>
-          <p:cNvSpPr txBox="1"/>
-          <p:nvPr/>
-        </p:nvSpPr>
-        <p:spPr>
-          <a:xfrm>
-            <a:off x="3383280" y="1600200"/>
-            <a:ext cx="2560320" cy="548640"/>
-          </a:xfrm>
-          <a:prstGeom prst="rect">
-            <a:avLst/>
-          </a:prstGeom>
-          <a:noFill/>
-        </p:spPr>
-        <p:txBody>
-          <a:bodyPr wrap="square">
-            <a:spAutoFit/>
-          </a:bodyPr>
-          <a:lstStyle/>
-          <a:p>
-            <a:pPr algn="ctr"/>
-            <a:r>
-              <a:rPr sz="1100" b="0" i="0">
-                <a:solidFill>
-                  <a:srgbClr val="FFFFFF"/>
-                </a:solidFill>
-                <a:latin typeface="Calibri"/>
-              </a:rPr>
-              <a:t>Discriminação pura
-(M4 HLM)</a:t>
-            </a:r>
-          </a:p>
-        </p:txBody>
-      </p:sp>
-      <p:sp>
-        <p:nvSpPr>
-          <p:cNvPr id="11" name="Rectangle 10"/>
-          <p:cNvSpPr/>
-          <p:nvPr/>
-        </p:nvSpPr>
-        <p:spPr>
-          <a:xfrm>
-            <a:off x="6217920" y="868680"/>
-            <a:ext cx="2743200" cy="1371600"/>
-          </a:xfrm>
-          <a:prstGeom prst="rect">
-            <a:avLst/>
-          </a:prstGeom>
-          <a:solidFill>
-            <a:srgbClr val="1A305C"/>
-          </a:solidFill>
-          <a:ln w="12700">
-            <a:solidFill>
-              <a:srgbClr val="FF8F00"/>
-            </a:solidFill>
-          </a:ln>
-        </p:spPr>
-        <p:style>
-          <a:lnRef idx="1">
-            <a:schemeClr val="accent1"/>
-          </a:lnRef>
-          <a:fillRef idx="3">
-            <a:schemeClr val="accent1"/>
-          </a:fillRef>
-          <a:effectRef idx="2">
-            <a:schemeClr val="accent1"/>
-          </a:effectRef>
-          <a:fontRef idx="minor">
-            <a:schemeClr val="lt1"/>
-          </a:fontRef>
-        </p:style>
-        <p:txBody>
-          <a:bodyPr rtlCol="0" anchor="ctr"/>
-          <a:lstStyle/>
-          <a:p>
-            <a:pPr algn="ctr"/>
-          </a:p>
-        </p:txBody>
-      </p:sp>
-      <p:sp>
-        <p:nvSpPr>
-          <p:cNvPr id="12" name="TextBox 11"/>
-          <p:cNvSpPr txBox="1"/>
-          <p:nvPr/>
-        </p:nvSpPr>
-        <p:spPr>
-          <a:xfrm>
-            <a:off x="6309360" y="914400"/>
-            <a:ext cx="2560320" cy="685800"/>
-          </a:xfrm>
-          <a:prstGeom prst="rect">
-            <a:avLst/>
-          </a:prstGeom>
-          <a:noFill/>
-        </p:spPr>
-        <p:txBody>
-          <a:bodyPr wrap="square">
-            <a:spAutoFit/>
-          </a:bodyPr>
-          <a:lstStyle/>
-          <a:p>
-            <a:pPr algn="ctr"/>
-            <a:r>
-              <a:rPr sz="3000" b="1" i="0">
-                <a:solidFill>
-                  <a:srgbClr val="FF8F00"/>
-                </a:solidFill>
-                <a:latin typeface="Calibri"/>
-              </a:rPr>
-              <a:t>OR=0,693</a:t>
-            </a:r>
-          </a:p>
-        </p:txBody>
-      </p:sp>
-      <p:sp>
-        <p:nvSpPr>
-          <p:cNvPr id="13" name="TextBox 12"/>
-          <p:cNvSpPr txBox="1"/>
-          <p:nvPr/>
-        </p:nvSpPr>
-        <p:spPr>
-          <a:xfrm>
-            <a:off x="6309360" y="1600200"/>
-            <a:ext cx="2560320" cy="548640"/>
-          </a:xfrm>
-          <a:prstGeom prst="rect">
-            <a:avLst/>
-          </a:prstGeom>
-          <a:noFill/>
-        </p:spPr>
-        <p:txBody>
-          <a:bodyPr wrap="square">
-            <a:spAutoFit/>
-          </a:bodyPr>
-          <a:lstStyle/>
-          <a:p>
-            <a:pPr algn="ctr"/>
-            <a:r>
-              <a:rPr sz="1100" b="0" i="0">
-                <a:solidFill>
-                  <a:srgbClr val="FFFFFF"/>
-                </a:solidFill>
-                <a:latin typeface="Calibri"/>
-              </a:rPr>
-              <a:t>Acesso qualificado
-(GLMM M2, lme4)</a:t>
-            </a:r>
-          </a:p>
-        </p:txBody>
-      </p:sp>
-      <p:sp>
-        <p:nvSpPr>
-          <p:cNvPr id="14" name="Rectangle 13"/>
-          <p:cNvSpPr/>
-          <p:nvPr/>
-        </p:nvSpPr>
-        <p:spPr>
-          <a:xfrm>
-            <a:off x="9144000" y="868680"/>
-            <a:ext cx="2743200" cy="1371600"/>
-          </a:xfrm>
-          <a:prstGeom prst="rect">
-            <a:avLst/>
-          </a:prstGeom>
-          <a:solidFill>
-            <a:srgbClr val="1A305C"/>
-          </a:solidFill>
-          <a:ln w="12700">
-            <a:solidFill>
-              <a:srgbClr val="FF8F00"/>
-            </a:solidFill>
-          </a:ln>
-        </p:spPr>
-        <p:style>
-          <a:lnRef idx="1">
-            <a:schemeClr val="accent1"/>
-          </a:lnRef>
-          <a:fillRef idx="3">
-            <a:schemeClr val="accent1"/>
-          </a:fillRef>
-          <a:effectRef idx="2">
-            <a:schemeClr val="accent1"/>
-          </a:effectRef>
-          <a:fontRef idx="minor">
-            <a:schemeClr val="lt1"/>
-          </a:fontRef>
-        </p:style>
-        <p:txBody>
-          <a:bodyPr rtlCol="0" anchor="ctr"/>
-          <a:lstStyle/>
-          <a:p>
-            <a:pPr algn="ctr"/>
-          </a:p>
-        </p:txBody>
-      </p:sp>
-      <p:sp>
-        <p:nvSpPr>
-          <p:cNvPr id="15" name="TextBox 14"/>
-          <p:cNvSpPr txBox="1"/>
-          <p:nvPr/>
-        </p:nvSpPr>
-        <p:spPr>
-          <a:xfrm>
-            <a:off x="9235440" y="914400"/>
-            <a:ext cx="2560320" cy="685800"/>
-          </a:xfrm>
-          <a:prstGeom prst="rect">
-            <a:avLst/>
-          </a:prstGeom>
-          <a:noFill/>
-        </p:spPr>
-        <p:txBody>
-          <a:bodyPr wrap="square">
-            <a:spAutoFit/>
-          </a:bodyPr>
-          <a:lstStyle/>
-          <a:p>
-            <a:pPr algn="ctr"/>
-            <a:r>
-              <a:rPr sz="3000" b="1" i="0">
-                <a:solidFill>
-                  <a:srgbClr val="FF8F00"/>
-                </a:solidFill>
-                <a:latin typeface="Calibri"/>
-              </a:rPr>
-              <a:t>χ²=191k</a:t>
-            </a:r>
-          </a:p>
-        </p:txBody>
-      </p:sp>
-      <p:sp>
-        <p:nvSpPr>
-          <p:cNvPr id="16" name="TextBox 15"/>
-          <p:cNvSpPr txBox="1"/>
-          <p:nvPr/>
-        </p:nvSpPr>
-        <p:spPr>
-          <a:xfrm>
-            <a:off x="9235440" y="1600200"/>
-            <a:ext cx="2560320" cy="548640"/>
-          </a:xfrm>
-          <a:prstGeom prst="rect">
-            <a:avLst/>
-          </a:prstGeom>
-          <a:noFill/>
-        </p:spPr>
-        <p:txBody>
-          <a:bodyPr wrap="square">
-            <a:spAutoFit/>
-          </a:bodyPr>
-          <a:lstStyle/>
-          <a:p>
-            <a:pPr algn="ctr"/>
-            <a:r>
-              <a:rPr sz="1100" b="0" i="0">
-                <a:solidFill>
-                  <a:srgbClr val="FFFFFF"/>
-                </a:solidFill>
-                <a:latin typeface="Calibri"/>
-              </a:rPr>
-              <a:t>LRT confirma
-hierarquia UPA</a:t>
-            </a:r>
-          </a:p>
-        </p:txBody>
-      </p:sp>
-      <p:sp>
-        <p:nvSpPr>
-          <p:cNvPr id="17" name="Rectangle 16"/>
-          <p:cNvSpPr/>
-          <p:nvPr/>
-        </p:nvSpPr>
-        <p:spPr>
-          <a:xfrm>
-            <a:off x="274320" y="2377440"/>
-            <a:ext cx="11612880" cy="749808"/>
-          </a:xfrm>
-          <a:prstGeom prst="rect">
-            <a:avLst/>
-          </a:prstGeom>
-          <a:solidFill>
-            <a:srgbClr val="0F274A"/>
-          </a:solidFill>
-          <a:ln w="7620">
-            <a:solidFill>
-              <a:srgbClr val="FF8F00"/>
-            </a:solidFill>
-          </a:ln>
-        </p:spPr>
-        <p:style>
-          <a:lnRef idx="1">
-            <a:schemeClr val="accent1"/>
-          </a:lnRef>
-          <a:fillRef idx="3">
-            <a:schemeClr val="accent1"/>
-          </a:fillRef>
-          <a:effectRef idx="2">
-            <a:schemeClr val="accent1"/>
-          </a:effectRef>
-          <a:fontRef idx="minor">
-            <a:schemeClr val="lt1"/>
-          </a:fontRef>
-        </p:style>
-        <p:txBody>
-          <a:bodyPr rtlCol="0" anchor="ctr"/>
-          <a:lstStyle/>
-          <a:p>
-            <a:pPr algn="ctr"/>
-          </a:p>
-        </p:txBody>
-      </p:sp>
-      <p:sp>
-        <p:nvSpPr>
-          <p:cNvPr id="18" name="TextBox 17"/>
-          <p:cNvSpPr txBox="1"/>
-          <p:nvPr/>
-        </p:nvSpPr>
-        <p:spPr>
-          <a:xfrm>
-            <a:off x="457200" y="2423160"/>
-            <a:ext cx="11247120" cy="685800"/>
-          </a:xfrm>
-          <a:prstGeom prst="rect">
-            <a:avLst/>
-          </a:prstGeom>
-          <a:noFill/>
-        </p:spPr>
-        <p:txBody>
-          <a:bodyPr wrap="square">
-            <a:spAutoFit/>
-          </a:bodyPr>
-          <a:lstStyle/>
-          <a:p>
-            <a:pPr algn="l"/>
-            <a:r>
-              <a:rPr sz="1300" b="0" i="0">
-                <a:solidFill>
-                  <a:srgbClr val="FFFFFF"/>
-                </a:solidFill>
-                <a:latin typeface="Calibri"/>
-              </a:rPr>
-              <a:t>1. A desigualdade racial no mercado de trabalho brasileiro é estrutural, multicausal e resistente à convergência espontânea.</a:t>
-            </a:r>
-          </a:p>
-        </p:txBody>
-      </p:sp>
-      <p:sp>
-        <p:nvSpPr>
-          <p:cNvPr id="19" name="Rectangle 18"/>
-          <p:cNvSpPr/>
-          <p:nvPr/>
-        </p:nvSpPr>
-        <p:spPr>
-          <a:xfrm>
-            <a:off x="274320" y="3246120"/>
-            <a:ext cx="11612880" cy="749808"/>
-          </a:xfrm>
-          <a:prstGeom prst="rect">
-            <a:avLst/>
-          </a:prstGeom>
-          <a:solidFill>
-            <a:srgbClr val="0F274A"/>
-          </a:solidFill>
-          <a:ln w="7620">
-            <a:solidFill>
-              <a:srgbClr val="1565C0"/>
-            </a:solidFill>
-          </a:ln>
-        </p:spPr>
-        <p:style>
-          <a:lnRef idx="1">
-            <a:schemeClr val="accent1"/>
-          </a:lnRef>
-          <a:fillRef idx="3">
-            <a:schemeClr val="accent1"/>
-          </a:fillRef>
-          <a:effectRef idx="2">
-            <a:schemeClr val="accent1"/>
-          </a:effectRef>
-          <a:fontRef idx="minor">
-            <a:schemeClr val="lt1"/>
-          </a:fontRef>
-        </p:style>
-        <p:txBody>
-          <a:bodyPr rtlCol="0" anchor="ctr"/>
-          <a:lstStyle/>
-          <a:p>
-            <a:pPr algn="ctr"/>
-          </a:p>
-        </p:txBody>
-      </p:sp>
-      <p:sp>
-        <p:nvSpPr>
-          <p:cNvPr id="20" name="TextBox 19"/>
-          <p:cNvSpPr txBox="1"/>
-          <p:nvPr/>
-        </p:nvSpPr>
-        <p:spPr>
-          <a:xfrm>
-            <a:off x="457200" y="3291840"/>
-            <a:ext cx="11247120" cy="685800"/>
-          </a:xfrm>
-          <a:prstGeom prst="rect">
-            <a:avLst/>
-          </a:prstGeom>
-          <a:noFill/>
-        </p:spPr>
-        <p:txBody>
-          <a:bodyPr wrap="square">
-            <a:spAutoFit/>
-          </a:bodyPr>
-          <a:lstStyle/>
-          <a:p>
-            <a:pPr algn="l"/>
-            <a:r>
-              <a:rPr sz="1300" b="0" i="0">
-                <a:solidFill>
-                  <a:srgbClr val="FFFFFF"/>
-                </a:solidFill>
-                <a:latin typeface="Calibri"/>
-              </a:rPr>
-              <a:t>2. A discriminação opera em dois estágios independentes: barreiras de ACESSO a ocupações qualificadas (GLMM: OR=0,693, AME=−4,73 p.p.) e discriminação de REMUNERAÇÃO dentro das mesmas funções (HLM M4: 6,2%).</a:t>
-            </a:r>
-          </a:p>
-        </p:txBody>
-      </p:sp>
-      <p:sp>
-        <p:nvSpPr>
-          <p:cNvPr id="21" name="Rectangle 20"/>
-          <p:cNvSpPr/>
-          <p:nvPr/>
-        </p:nvSpPr>
-        <p:spPr>
-          <a:xfrm>
-            <a:off x="274320" y="4114800"/>
-            <a:ext cx="11612880" cy="749808"/>
-          </a:xfrm>
-          <a:prstGeom prst="rect">
-            <a:avLst/>
-          </a:prstGeom>
-          <a:solidFill>
-            <a:srgbClr val="0F274A"/>
-          </a:solidFill>
-          <a:ln w="7620">
-            <a:solidFill>
-              <a:srgbClr val="1565C0"/>
-            </a:solidFill>
-          </a:ln>
-        </p:spPr>
-        <p:style>
-          <a:lnRef idx="1">
-            <a:schemeClr val="accent1"/>
-          </a:lnRef>
-          <a:fillRef idx="3">
-            <a:schemeClr val="accent1"/>
-          </a:fillRef>
-          <a:effectRef idx="2">
-            <a:schemeClr val="accent1"/>
-          </a:effectRef>
-          <a:fontRef idx="minor">
-            <a:schemeClr val="lt1"/>
-          </a:fontRef>
-        </p:style>
-        <p:txBody>
-          <a:bodyPr rtlCol="0" anchor="ctr"/>
-          <a:lstStyle/>
-          <a:p>
-            <a:pPr algn="ctr"/>
-          </a:p>
-        </p:txBody>
-      </p:sp>
-      <p:sp>
-        <p:nvSpPr>
-          <p:cNvPr id="22" name="TextBox 21"/>
-          <p:cNvSpPr txBox="1"/>
-          <p:nvPr/>
-        </p:nvSpPr>
-        <p:spPr>
-          <a:xfrm>
-            <a:off x="457200" y="4160520"/>
-            <a:ext cx="11247120" cy="685800"/>
-          </a:xfrm>
-          <a:prstGeom prst="rect">
-            <a:avLst/>
-          </a:prstGeom>
-          <a:noFill/>
-        </p:spPr>
-        <p:txBody>
-          <a:bodyPr wrap="square">
-            <a:spAutoFit/>
-          </a:bodyPr>
-          <a:lstStyle/>
-          <a:p>
-            <a:pPr algn="l"/>
-            <a:r>
-              <a:rPr sz="1300" b="0" i="0">
-                <a:solidFill>
-                  <a:srgbClr val="FFFFFF"/>
-                </a:solidFill>
-                <a:latin typeface="Calibri"/>
-              </a:rPr>
-              <a:t>3. O glass ceiling racial é real e crescente no topo da distribuição — confirmado formalmente pela regressão quantílica e consistente com o IR=0,47 nas capitais.</a:t>
-            </a:r>
-          </a:p>
-        </p:txBody>
-      </p:sp>
-      <p:sp>
-        <p:nvSpPr>
-          <p:cNvPr id="23" name="Rectangle 22"/>
-          <p:cNvSpPr/>
-          <p:nvPr/>
-        </p:nvSpPr>
-        <p:spPr>
-          <a:xfrm>
-            <a:off x="274320" y="4983480"/>
-            <a:ext cx="11612880" cy="749808"/>
-          </a:xfrm>
-          <a:prstGeom prst="rect">
-            <a:avLst/>
-          </a:prstGeom>
-          <a:solidFill>
-            <a:srgbClr val="0F274A"/>
-          </a:solidFill>
-          <a:ln w="7620">
-            <a:solidFill>
-              <a:srgbClr val="1565C0"/>
-            </a:solidFill>
-          </a:ln>
-        </p:spPr>
-        <p:style>
-          <a:lnRef idx="1">
-            <a:schemeClr val="accent1"/>
-          </a:lnRef>
-          <a:fillRef idx="3">
-            <a:schemeClr val="accent1"/>
-          </a:fillRef>
-          <a:effectRef idx="2">
-            <a:schemeClr val="accent1"/>
-          </a:effectRef>
-          <a:fontRef idx="minor">
-            <a:schemeClr val="lt1"/>
-          </a:fontRef>
-        </p:style>
-        <p:txBody>
-          <a:bodyPr rtlCol="0" anchor="ctr"/>
-          <a:lstStyle/>
-          <a:p>
-            <a:pPr algn="ctr"/>
-          </a:p>
-        </p:txBody>
-      </p:sp>
-      <p:sp>
-        <p:nvSpPr>
-          <p:cNvPr id="24" name="TextBox 23"/>
-          <p:cNvSpPr txBox="1"/>
-          <p:nvPr/>
-        </p:nvSpPr>
-        <p:spPr>
-          <a:xfrm>
-            <a:off x="457200" y="5029200"/>
-            <a:ext cx="11247120" cy="685800"/>
-          </a:xfrm>
-          <a:prstGeom prst="rect">
-            <a:avLst/>
-          </a:prstGeom>
-          <a:noFill/>
-        </p:spPr>
-        <p:txBody>
-          <a:bodyPr wrap="square">
-            <a:spAutoFit/>
-          </a:bodyPr>
-          <a:lstStyle/>
-          <a:p>
-            <a:pPr algn="l"/>
-            <a:r>
-              <a:rPr sz="1300" b="0" i="0">
-                <a:solidFill>
-                  <a:srgbClr val="FFFFFF"/>
-                </a:solidFill>
-                <a:latin typeface="Calibri"/>
-              </a:rPr>
-              <a:t>4. Políticas que atuam apenas no gap salarial direto atacam 16% do problema. Os 84% restantes requerem ação nas portas de entrada das ocupações de alto prestígio.</a:t>
-            </a:r>
-          </a:p>
-        </p:txBody>
-      </p:sp>
-      <p:sp>
-        <p:nvSpPr>
-          <p:cNvPr id="25" name="Rectangle 24"/>
-          <p:cNvSpPr/>
-          <p:nvPr/>
-        </p:nvSpPr>
-        <p:spPr>
-          <a:xfrm>
-            <a:off x="0" y="6400800"/>
-            <a:ext cx="12188952" cy="457200"/>
-          </a:xfrm>
-          <a:prstGeom prst="rect">
-            <a:avLst/>
-          </a:prstGeom>
-          <a:solidFill>
-            <a:srgbClr val="0D1F3C"/>
-          </a:solidFill>
-          <a:ln/>
-        </p:spPr>
-        <p:style>
-          <a:lnRef idx="1">
-            <a:schemeClr val="accent1"/>
-          </a:lnRef>
-          <a:fillRef idx="3">
-            <a:schemeClr val="accent1"/>
-          </a:fillRef>
-          <a:effectRef idx="2">
-            <a:schemeClr val="accent1"/>
-          </a:effectRef>
-          <a:fontRef idx="minor">
-            <a:schemeClr val="lt1"/>
-          </a:fontRef>
-        </p:style>
-        <p:txBody>
-          <a:bodyPr rtlCol="0" anchor="ctr"/>
-          <a:lstStyle/>
-          <a:p>
-            <a:pPr algn="ctr"/>
-          </a:p>
-        </p:txBody>
-      </p:sp>
-      <p:sp>
-        <p:nvSpPr>
-          <p:cNvPr id="26" name="TextBox 25"/>
-          <p:cNvSpPr txBox="1"/>
-          <p:nvPr/>
-        </p:nvSpPr>
-        <p:spPr>
-          <a:xfrm>
-            <a:off x="274320" y="6446520"/>
-            <a:ext cx="11612880" cy="365760"/>
-          </a:xfrm>
-          <a:prstGeom prst="rect">
-            <a:avLst/>
-          </a:prstGeom>
-          <a:noFill/>
-        </p:spPr>
-        <p:txBody>
-          <a:bodyPr wrap="square">
-            <a:spAutoFit/>
-          </a:bodyPr>
-          <a:lstStyle/>
-          <a:p>
-            <a:pPr algn="ctr"/>
-            <a:r>
-              <a:rPr sz="1100" b="0" i="0">
-                <a:solidFill>
-                  <a:srgbClr val="90A4AE"/>
-                </a:solidFill>
-                <a:latin typeface="Calibri"/>
-              </a:rPr>
-              <a:t>Ricardo Calheiros  |  MBA Data Science &amp; Analytics  |  USP/ESALQ  |  rickinrj@gmail.com</a:t>
+              <a:t>29/29</a:t>
             </a:r>
           </a:p>
         </p:txBody>
@@ -24506,7 +24397,1002 @@
                 </a:solidFill>
                 <a:latin typeface="Calibri"/>
               </a:rPr>
-              <a:t>3/28</a:t>
+              <a:t>3/29</a:t>
+            </a:r>
+          </a:p>
+        </p:txBody>
+      </p:sp>
+    </p:spTree>
+  </p:cSld>
+  <p:clrMapOvr>
+    <a:masterClrMapping/>
+  </p:clrMapOvr>
+</p:sld>
+</file>
+
+<file path=ppt/slides/slide30.xml><?xml version="1.0" encoding="utf-8"?>
+<p:sld xmlns:a="http://schemas.openxmlformats.org/drawingml/2006/main" xmlns:p="http://schemas.openxmlformats.org/presentationml/2006/main" xmlns:r="http://schemas.openxmlformats.org/officeDocument/2006/relationships">
+  <p:cSld>
+    <p:spTree>
+      <p:nvGrpSpPr>
+        <p:cNvPr id="1" name=""/>
+        <p:cNvGrpSpPr/>
+        <p:nvPr/>
+      </p:nvGrpSpPr>
+      <p:grpSpPr/>
+      <p:sp>
+        <p:nvSpPr>
+          <p:cNvPr id="2" name="Rectangle 1"/>
+          <p:cNvSpPr/>
+          <p:nvPr/>
+        </p:nvSpPr>
+        <p:spPr>
+          <a:xfrm>
+            <a:off x="0" y="0"/>
+            <a:ext cx="12188952" cy="6858000"/>
+          </a:xfrm>
+          <a:prstGeom prst="rect">
+            <a:avLst/>
+          </a:prstGeom>
+          <a:solidFill>
+            <a:srgbClr val="1F3864"/>
+          </a:solidFill>
+          <a:ln/>
+        </p:spPr>
+        <p:style>
+          <a:lnRef idx="1">
+            <a:schemeClr val="accent1"/>
+          </a:lnRef>
+          <a:fillRef idx="3">
+            <a:schemeClr val="accent1"/>
+          </a:fillRef>
+          <a:effectRef idx="2">
+            <a:schemeClr val="accent1"/>
+          </a:effectRef>
+          <a:fontRef idx="minor">
+            <a:schemeClr val="lt1"/>
+          </a:fontRef>
+        </p:style>
+        <p:txBody>
+          <a:bodyPr rtlCol="0" anchor="ctr"/>
+          <a:lstStyle/>
+          <a:p>
+            <a:pPr algn="ctr"/>
+          </a:p>
+        </p:txBody>
+      </p:sp>
+      <p:sp>
+        <p:nvSpPr>
+          <p:cNvPr id="3" name="Rectangle 2"/>
+          <p:cNvSpPr/>
+          <p:nvPr/>
+        </p:nvSpPr>
+        <p:spPr>
+          <a:xfrm>
+            <a:off x="0" y="0"/>
+            <a:ext cx="12188952" cy="731520"/>
+          </a:xfrm>
+          <a:prstGeom prst="rect">
+            <a:avLst/>
+          </a:prstGeom>
+          <a:solidFill>
+            <a:srgbClr val="0D1F3C"/>
+          </a:solidFill>
+          <a:ln/>
+        </p:spPr>
+        <p:style>
+          <a:lnRef idx="1">
+            <a:schemeClr val="accent1"/>
+          </a:lnRef>
+          <a:fillRef idx="3">
+            <a:schemeClr val="accent1"/>
+          </a:fillRef>
+          <a:effectRef idx="2">
+            <a:schemeClr val="accent1"/>
+          </a:effectRef>
+          <a:fontRef idx="minor">
+            <a:schemeClr val="lt1"/>
+          </a:fontRef>
+        </p:style>
+        <p:txBody>
+          <a:bodyPr rtlCol="0" anchor="ctr"/>
+          <a:lstStyle/>
+          <a:p>
+            <a:pPr algn="ctr"/>
+          </a:p>
+        </p:txBody>
+      </p:sp>
+      <p:sp>
+        <p:nvSpPr>
+          <p:cNvPr id="4" name="TextBox 3"/>
+          <p:cNvSpPr txBox="1"/>
+          <p:nvPr/>
+        </p:nvSpPr>
+        <p:spPr>
+          <a:xfrm>
+            <a:off x="365760" y="91440"/>
+            <a:ext cx="10972800" cy="594360"/>
+          </a:xfrm>
+          <a:prstGeom prst="rect">
+            <a:avLst/>
+          </a:prstGeom>
+          <a:noFill/>
+        </p:spPr>
+        <p:txBody>
+          <a:bodyPr wrap="square">
+            <a:spAutoFit/>
+          </a:bodyPr>
+          <a:lstStyle/>
+          <a:p>
+            <a:pPr algn="l"/>
+            <a:r>
+              <a:rPr sz="2600" b="1" i="0">
+                <a:solidFill>
+                  <a:srgbClr val="FFFFFF"/>
+                </a:solidFill>
+                <a:latin typeface="Calibri"/>
+              </a:rPr>
+              <a:t>29. Conclusão</a:t>
+            </a:r>
+          </a:p>
+        </p:txBody>
+      </p:sp>
+      <p:sp>
+        <p:nvSpPr>
+          <p:cNvPr id="5" name="Rectangle 4"/>
+          <p:cNvSpPr/>
+          <p:nvPr/>
+        </p:nvSpPr>
+        <p:spPr>
+          <a:xfrm>
+            <a:off x="365760" y="868680"/>
+            <a:ext cx="2743200" cy="1371600"/>
+          </a:xfrm>
+          <a:prstGeom prst="rect">
+            <a:avLst/>
+          </a:prstGeom>
+          <a:solidFill>
+            <a:srgbClr val="1A305C"/>
+          </a:solidFill>
+          <a:ln w="12700">
+            <a:solidFill>
+              <a:srgbClr val="FF8F00"/>
+            </a:solidFill>
+          </a:ln>
+        </p:spPr>
+        <p:style>
+          <a:lnRef idx="1">
+            <a:schemeClr val="accent1"/>
+          </a:lnRef>
+          <a:fillRef idx="3">
+            <a:schemeClr val="accent1"/>
+          </a:fillRef>
+          <a:effectRef idx="2">
+            <a:schemeClr val="accent1"/>
+          </a:effectRef>
+          <a:fontRef idx="minor">
+            <a:schemeClr val="lt1"/>
+          </a:fontRef>
+        </p:style>
+        <p:txBody>
+          <a:bodyPr rtlCol="0" anchor="ctr"/>
+          <a:lstStyle/>
+          <a:p>
+            <a:pPr algn="ctr"/>
+          </a:p>
+        </p:txBody>
+      </p:sp>
+      <p:sp>
+        <p:nvSpPr>
+          <p:cNvPr id="6" name="TextBox 5"/>
+          <p:cNvSpPr txBox="1"/>
+          <p:nvPr/>
+        </p:nvSpPr>
+        <p:spPr>
+          <a:xfrm>
+            <a:off x="457200" y="914400"/>
+            <a:ext cx="2560320" cy="685800"/>
+          </a:xfrm>
+          <a:prstGeom prst="rect">
+            <a:avLst/>
+          </a:prstGeom>
+          <a:noFill/>
+        </p:spPr>
+        <p:txBody>
+          <a:bodyPr wrap="square">
+            <a:spAutoFit/>
+          </a:bodyPr>
+          <a:lstStyle/>
+          <a:p>
+            <a:pPr algn="ctr"/>
+            <a:r>
+              <a:rPr sz="3000" b="1" i="0">
+                <a:solidFill>
+                  <a:srgbClr val="FF8F00"/>
+                </a:solidFill>
+                <a:latin typeface="Calibri"/>
+              </a:rPr>
+              <a:t>19,3%</a:t>
+            </a:r>
+          </a:p>
+        </p:txBody>
+      </p:sp>
+      <p:sp>
+        <p:nvSpPr>
+          <p:cNvPr id="7" name="TextBox 6"/>
+          <p:cNvSpPr txBox="1"/>
+          <p:nvPr/>
+        </p:nvSpPr>
+        <p:spPr>
+          <a:xfrm>
+            <a:off x="457200" y="1600200"/>
+            <a:ext cx="2560320" cy="548640"/>
+          </a:xfrm>
+          <a:prstGeom prst="rect">
+            <a:avLst/>
+          </a:prstGeom>
+          <a:noFill/>
+        </p:spPr>
+        <p:txBody>
+          <a:bodyPr wrap="square">
+            <a:spAutoFit/>
+          </a:bodyPr>
+          <a:lstStyle/>
+          <a:p>
+            <a:pPr algn="ctr"/>
+            <a:r>
+              <a:rPr sz="1100" b="0" i="0">
+                <a:solidFill>
+                  <a:srgbClr val="FFFFFF"/>
+                </a:solidFill>
+                <a:latin typeface="Calibri"/>
+              </a:rPr>
+              <a:t>Gap racial bruto
+(M1 HLM)</a:t>
+            </a:r>
+          </a:p>
+        </p:txBody>
+      </p:sp>
+      <p:sp>
+        <p:nvSpPr>
+          <p:cNvPr id="8" name="Rectangle 7"/>
+          <p:cNvSpPr/>
+          <p:nvPr/>
+        </p:nvSpPr>
+        <p:spPr>
+          <a:xfrm>
+            <a:off x="3291840" y="868680"/>
+            <a:ext cx="2743200" cy="1371600"/>
+          </a:xfrm>
+          <a:prstGeom prst="rect">
+            <a:avLst/>
+          </a:prstGeom>
+          <a:solidFill>
+            <a:srgbClr val="1A305C"/>
+          </a:solidFill>
+          <a:ln w="12700">
+            <a:solidFill>
+              <a:srgbClr val="FF8F00"/>
+            </a:solidFill>
+          </a:ln>
+        </p:spPr>
+        <p:style>
+          <a:lnRef idx="1">
+            <a:schemeClr val="accent1"/>
+          </a:lnRef>
+          <a:fillRef idx="3">
+            <a:schemeClr val="accent1"/>
+          </a:fillRef>
+          <a:effectRef idx="2">
+            <a:schemeClr val="accent1"/>
+          </a:effectRef>
+          <a:fontRef idx="minor">
+            <a:schemeClr val="lt1"/>
+          </a:fontRef>
+        </p:style>
+        <p:txBody>
+          <a:bodyPr rtlCol="0" anchor="ctr"/>
+          <a:lstStyle/>
+          <a:p>
+            <a:pPr algn="ctr"/>
+          </a:p>
+        </p:txBody>
+      </p:sp>
+      <p:sp>
+        <p:nvSpPr>
+          <p:cNvPr id="9" name="TextBox 8"/>
+          <p:cNvSpPr txBox="1"/>
+          <p:nvPr/>
+        </p:nvSpPr>
+        <p:spPr>
+          <a:xfrm>
+            <a:off x="3383280" y="914400"/>
+            <a:ext cx="2560320" cy="685800"/>
+          </a:xfrm>
+          <a:prstGeom prst="rect">
+            <a:avLst/>
+          </a:prstGeom>
+          <a:noFill/>
+        </p:spPr>
+        <p:txBody>
+          <a:bodyPr wrap="square">
+            <a:spAutoFit/>
+          </a:bodyPr>
+          <a:lstStyle/>
+          <a:p>
+            <a:pPr algn="ctr"/>
+            <a:r>
+              <a:rPr sz="3000" b="1" i="0">
+                <a:solidFill>
+                  <a:srgbClr val="FF8F00"/>
+                </a:solidFill>
+                <a:latin typeface="Calibri"/>
+              </a:rPr>
+              <a:t>6,2%</a:t>
+            </a:r>
+          </a:p>
+        </p:txBody>
+      </p:sp>
+      <p:sp>
+        <p:nvSpPr>
+          <p:cNvPr id="10" name="TextBox 9"/>
+          <p:cNvSpPr txBox="1"/>
+          <p:nvPr/>
+        </p:nvSpPr>
+        <p:spPr>
+          <a:xfrm>
+            <a:off x="3383280" y="1600200"/>
+            <a:ext cx="2560320" cy="548640"/>
+          </a:xfrm>
+          <a:prstGeom prst="rect">
+            <a:avLst/>
+          </a:prstGeom>
+          <a:noFill/>
+        </p:spPr>
+        <p:txBody>
+          <a:bodyPr wrap="square">
+            <a:spAutoFit/>
+          </a:bodyPr>
+          <a:lstStyle/>
+          <a:p>
+            <a:pPr algn="ctr"/>
+            <a:r>
+              <a:rPr sz="1100" b="0" i="0">
+                <a:solidFill>
+                  <a:srgbClr val="FFFFFF"/>
+                </a:solidFill>
+                <a:latin typeface="Calibri"/>
+              </a:rPr>
+              <a:t>Discriminação pura
+(M4 HLM)</a:t>
+            </a:r>
+          </a:p>
+        </p:txBody>
+      </p:sp>
+      <p:sp>
+        <p:nvSpPr>
+          <p:cNvPr id="11" name="Rectangle 10"/>
+          <p:cNvSpPr/>
+          <p:nvPr/>
+        </p:nvSpPr>
+        <p:spPr>
+          <a:xfrm>
+            <a:off x="6217920" y="868680"/>
+            <a:ext cx="2743200" cy="1371600"/>
+          </a:xfrm>
+          <a:prstGeom prst="rect">
+            <a:avLst/>
+          </a:prstGeom>
+          <a:solidFill>
+            <a:srgbClr val="1A305C"/>
+          </a:solidFill>
+          <a:ln w="12700">
+            <a:solidFill>
+              <a:srgbClr val="FF8F00"/>
+            </a:solidFill>
+          </a:ln>
+        </p:spPr>
+        <p:style>
+          <a:lnRef idx="1">
+            <a:schemeClr val="accent1"/>
+          </a:lnRef>
+          <a:fillRef idx="3">
+            <a:schemeClr val="accent1"/>
+          </a:fillRef>
+          <a:effectRef idx="2">
+            <a:schemeClr val="accent1"/>
+          </a:effectRef>
+          <a:fontRef idx="minor">
+            <a:schemeClr val="lt1"/>
+          </a:fontRef>
+        </p:style>
+        <p:txBody>
+          <a:bodyPr rtlCol="0" anchor="ctr"/>
+          <a:lstStyle/>
+          <a:p>
+            <a:pPr algn="ctr"/>
+          </a:p>
+        </p:txBody>
+      </p:sp>
+      <p:sp>
+        <p:nvSpPr>
+          <p:cNvPr id="12" name="TextBox 11"/>
+          <p:cNvSpPr txBox="1"/>
+          <p:nvPr/>
+        </p:nvSpPr>
+        <p:spPr>
+          <a:xfrm>
+            <a:off x="6309360" y="914400"/>
+            <a:ext cx="2560320" cy="685800"/>
+          </a:xfrm>
+          <a:prstGeom prst="rect">
+            <a:avLst/>
+          </a:prstGeom>
+          <a:noFill/>
+        </p:spPr>
+        <p:txBody>
+          <a:bodyPr wrap="square">
+            <a:spAutoFit/>
+          </a:bodyPr>
+          <a:lstStyle/>
+          <a:p>
+            <a:pPr algn="ctr"/>
+            <a:r>
+              <a:rPr sz="3000" b="1" i="0">
+                <a:solidFill>
+                  <a:srgbClr val="FF8F00"/>
+                </a:solidFill>
+                <a:latin typeface="Calibri"/>
+              </a:rPr>
+              <a:t>OR=0,693</a:t>
+            </a:r>
+          </a:p>
+        </p:txBody>
+      </p:sp>
+      <p:sp>
+        <p:nvSpPr>
+          <p:cNvPr id="13" name="TextBox 12"/>
+          <p:cNvSpPr txBox="1"/>
+          <p:nvPr/>
+        </p:nvSpPr>
+        <p:spPr>
+          <a:xfrm>
+            <a:off x="6309360" y="1600200"/>
+            <a:ext cx="2560320" cy="548640"/>
+          </a:xfrm>
+          <a:prstGeom prst="rect">
+            <a:avLst/>
+          </a:prstGeom>
+          <a:noFill/>
+        </p:spPr>
+        <p:txBody>
+          <a:bodyPr wrap="square">
+            <a:spAutoFit/>
+          </a:bodyPr>
+          <a:lstStyle/>
+          <a:p>
+            <a:pPr algn="ctr"/>
+            <a:r>
+              <a:rPr sz="1100" b="0" i="0">
+                <a:solidFill>
+                  <a:srgbClr val="FFFFFF"/>
+                </a:solidFill>
+                <a:latin typeface="Calibri"/>
+              </a:rPr>
+              <a:t>Acesso qualificado
+(GLMM M2, lme4)</a:t>
+            </a:r>
+          </a:p>
+        </p:txBody>
+      </p:sp>
+      <p:sp>
+        <p:nvSpPr>
+          <p:cNvPr id="14" name="Rectangle 13"/>
+          <p:cNvSpPr/>
+          <p:nvPr/>
+        </p:nvSpPr>
+        <p:spPr>
+          <a:xfrm>
+            <a:off x="9144000" y="868680"/>
+            <a:ext cx="2743200" cy="1371600"/>
+          </a:xfrm>
+          <a:prstGeom prst="rect">
+            <a:avLst/>
+          </a:prstGeom>
+          <a:solidFill>
+            <a:srgbClr val="1A305C"/>
+          </a:solidFill>
+          <a:ln w="12700">
+            <a:solidFill>
+              <a:srgbClr val="FF8F00"/>
+            </a:solidFill>
+          </a:ln>
+        </p:spPr>
+        <p:style>
+          <a:lnRef idx="1">
+            <a:schemeClr val="accent1"/>
+          </a:lnRef>
+          <a:fillRef idx="3">
+            <a:schemeClr val="accent1"/>
+          </a:fillRef>
+          <a:effectRef idx="2">
+            <a:schemeClr val="accent1"/>
+          </a:effectRef>
+          <a:fontRef idx="minor">
+            <a:schemeClr val="lt1"/>
+          </a:fontRef>
+        </p:style>
+        <p:txBody>
+          <a:bodyPr rtlCol="0" anchor="ctr"/>
+          <a:lstStyle/>
+          <a:p>
+            <a:pPr algn="ctr"/>
+          </a:p>
+        </p:txBody>
+      </p:sp>
+      <p:sp>
+        <p:nvSpPr>
+          <p:cNvPr id="15" name="TextBox 14"/>
+          <p:cNvSpPr txBox="1"/>
+          <p:nvPr/>
+        </p:nvSpPr>
+        <p:spPr>
+          <a:xfrm>
+            <a:off x="9235440" y="914400"/>
+            <a:ext cx="2560320" cy="685800"/>
+          </a:xfrm>
+          <a:prstGeom prst="rect">
+            <a:avLst/>
+          </a:prstGeom>
+          <a:noFill/>
+        </p:spPr>
+        <p:txBody>
+          <a:bodyPr wrap="square">
+            <a:spAutoFit/>
+          </a:bodyPr>
+          <a:lstStyle/>
+          <a:p>
+            <a:pPr algn="ctr"/>
+            <a:r>
+              <a:rPr sz="3000" b="1" i="0">
+                <a:solidFill>
+                  <a:srgbClr val="FF8F00"/>
+                </a:solidFill>
+                <a:latin typeface="Calibri"/>
+              </a:rPr>
+              <a:t>χ²=191k</a:t>
+            </a:r>
+          </a:p>
+        </p:txBody>
+      </p:sp>
+      <p:sp>
+        <p:nvSpPr>
+          <p:cNvPr id="16" name="TextBox 15"/>
+          <p:cNvSpPr txBox="1"/>
+          <p:nvPr/>
+        </p:nvSpPr>
+        <p:spPr>
+          <a:xfrm>
+            <a:off x="9235440" y="1600200"/>
+            <a:ext cx="2560320" cy="548640"/>
+          </a:xfrm>
+          <a:prstGeom prst="rect">
+            <a:avLst/>
+          </a:prstGeom>
+          <a:noFill/>
+        </p:spPr>
+        <p:txBody>
+          <a:bodyPr wrap="square">
+            <a:spAutoFit/>
+          </a:bodyPr>
+          <a:lstStyle/>
+          <a:p>
+            <a:pPr algn="ctr"/>
+            <a:r>
+              <a:rPr sz="1100" b="0" i="0">
+                <a:solidFill>
+                  <a:srgbClr val="FFFFFF"/>
+                </a:solidFill>
+                <a:latin typeface="Calibri"/>
+              </a:rPr>
+              <a:t>LRT confirma
+hierarquia UPA</a:t>
+            </a:r>
+          </a:p>
+        </p:txBody>
+      </p:sp>
+      <p:sp>
+        <p:nvSpPr>
+          <p:cNvPr id="17" name="Rectangle 16"/>
+          <p:cNvSpPr/>
+          <p:nvPr/>
+        </p:nvSpPr>
+        <p:spPr>
+          <a:xfrm>
+            <a:off x="274320" y="2377440"/>
+            <a:ext cx="11612880" cy="749808"/>
+          </a:xfrm>
+          <a:prstGeom prst="rect">
+            <a:avLst/>
+          </a:prstGeom>
+          <a:solidFill>
+            <a:srgbClr val="0F274A"/>
+          </a:solidFill>
+          <a:ln w="7620">
+            <a:solidFill>
+              <a:srgbClr val="FF8F00"/>
+            </a:solidFill>
+          </a:ln>
+        </p:spPr>
+        <p:style>
+          <a:lnRef idx="1">
+            <a:schemeClr val="accent1"/>
+          </a:lnRef>
+          <a:fillRef idx="3">
+            <a:schemeClr val="accent1"/>
+          </a:fillRef>
+          <a:effectRef idx="2">
+            <a:schemeClr val="accent1"/>
+          </a:effectRef>
+          <a:fontRef idx="minor">
+            <a:schemeClr val="lt1"/>
+          </a:fontRef>
+        </p:style>
+        <p:txBody>
+          <a:bodyPr rtlCol="0" anchor="ctr"/>
+          <a:lstStyle/>
+          <a:p>
+            <a:pPr algn="ctr"/>
+          </a:p>
+        </p:txBody>
+      </p:sp>
+      <p:sp>
+        <p:nvSpPr>
+          <p:cNvPr id="18" name="TextBox 17"/>
+          <p:cNvSpPr txBox="1"/>
+          <p:nvPr/>
+        </p:nvSpPr>
+        <p:spPr>
+          <a:xfrm>
+            <a:off x="457200" y="2423160"/>
+            <a:ext cx="11247120" cy="685800"/>
+          </a:xfrm>
+          <a:prstGeom prst="rect">
+            <a:avLst/>
+          </a:prstGeom>
+          <a:noFill/>
+        </p:spPr>
+        <p:txBody>
+          <a:bodyPr wrap="square">
+            <a:spAutoFit/>
+          </a:bodyPr>
+          <a:lstStyle/>
+          <a:p>
+            <a:pPr algn="l"/>
+            <a:r>
+              <a:rPr sz="1300" b="0" i="0">
+                <a:solidFill>
+                  <a:srgbClr val="FFFFFF"/>
+                </a:solidFill>
+                <a:latin typeface="Calibri"/>
+              </a:rPr>
+              <a:t>1. A desigualdade racial no mercado de trabalho brasileiro é estrutural, multicausal e resistente à convergência espontânea.</a:t>
+            </a:r>
+          </a:p>
+        </p:txBody>
+      </p:sp>
+      <p:sp>
+        <p:nvSpPr>
+          <p:cNvPr id="19" name="Rectangle 18"/>
+          <p:cNvSpPr/>
+          <p:nvPr/>
+        </p:nvSpPr>
+        <p:spPr>
+          <a:xfrm>
+            <a:off x="274320" y="3246120"/>
+            <a:ext cx="11612880" cy="749808"/>
+          </a:xfrm>
+          <a:prstGeom prst="rect">
+            <a:avLst/>
+          </a:prstGeom>
+          <a:solidFill>
+            <a:srgbClr val="0F274A"/>
+          </a:solidFill>
+          <a:ln w="7620">
+            <a:solidFill>
+              <a:srgbClr val="1565C0"/>
+            </a:solidFill>
+          </a:ln>
+        </p:spPr>
+        <p:style>
+          <a:lnRef idx="1">
+            <a:schemeClr val="accent1"/>
+          </a:lnRef>
+          <a:fillRef idx="3">
+            <a:schemeClr val="accent1"/>
+          </a:fillRef>
+          <a:effectRef idx="2">
+            <a:schemeClr val="accent1"/>
+          </a:effectRef>
+          <a:fontRef idx="minor">
+            <a:schemeClr val="lt1"/>
+          </a:fontRef>
+        </p:style>
+        <p:txBody>
+          <a:bodyPr rtlCol="0" anchor="ctr"/>
+          <a:lstStyle/>
+          <a:p>
+            <a:pPr algn="ctr"/>
+          </a:p>
+        </p:txBody>
+      </p:sp>
+      <p:sp>
+        <p:nvSpPr>
+          <p:cNvPr id="20" name="TextBox 19"/>
+          <p:cNvSpPr txBox="1"/>
+          <p:nvPr/>
+        </p:nvSpPr>
+        <p:spPr>
+          <a:xfrm>
+            <a:off x="457200" y="3291840"/>
+            <a:ext cx="11247120" cy="685800"/>
+          </a:xfrm>
+          <a:prstGeom prst="rect">
+            <a:avLst/>
+          </a:prstGeom>
+          <a:noFill/>
+        </p:spPr>
+        <p:txBody>
+          <a:bodyPr wrap="square">
+            <a:spAutoFit/>
+          </a:bodyPr>
+          <a:lstStyle/>
+          <a:p>
+            <a:pPr algn="l"/>
+            <a:r>
+              <a:rPr sz="1300" b="0" i="0">
+                <a:solidFill>
+                  <a:srgbClr val="FFFFFF"/>
+                </a:solidFill>
+                <a:latin typeface="Calibri"/>
+              </a:rPr>
+              <a:t>2. A discriminação opera em dois estágios independentes: barreiras de ACESSO a ocupações qualificadas (GLMM: OR=0,693, AME=−4,73 p.p.) e discriminação de REMUNERAÇÃO dentro das mesmas funções (HLM M4: 6,2%).</a:t>
+            </a:r>
+          </a:p>
+        </p:txBody>
+      </p:sp>
+      <p:sp>
+        <p:nvSpPr>
+          <p:cNvPr id="21" name="Rectangle 20"/>
+          <p:cNvSpPr/>
+          <p:nvPr/>
+        </p:nvSpPr>
+        <p:spPr>
+          <a:xfrm>
+            <a:off x="274320" y="4114800"/>
+            <a:ext cx="11612880" cy="749808"/>
+          </a:xfrm>
+          <a:prstGeom prst="rect">
+            <a:avLst/>
+          </a:prstGeom>
+          <a:solidFill>
+            <a:srgbClr val="0F274A"/>
+          </a:solidFill>
+          <a:ln w="7620">
+            <a:solidFill>
+              <a:srgbClr val="1565C0"/>
+            </a:solidFill>
+          </a:ln>
+        </p:spPr>
+        <p:style>
+          <a:lnRef idx="1">
+            <a:schemeClr val="accent1"/>
+          </a:lnRef>
+          <a:fillRef idx="3">
+            <a:schemeClr val="accent1"/>
+          </a:fillRef>
+          <a:effectRef idx="2">
+            <a:schemeClr val="accent1"/>
+          </a:effectRef>
+          <a:fontRef idx="minor">
+            <a:schemeClr val="lt1"/>
+          </a:fontRef>
+        </p:style>
+        <p:txBody>
+          <a:bodyPr rtlCol="0" anchor="ctr"/>
+          <a:lstStyle/>
+          <a:p>
+            <a:pPr algn="ctr"/>
+          </a:p>
+        </p:txBody>
+      </p:sp>
+      <p:sp>
+        <p:nvSpPr>
+          <p:cNvPr id="22" name="TextBox 21"/>
+          <p:cNvSpPr txBox="1"/>
+          <p:nvPr/>
+        </p:nvSpPr>
+        <p:spPr>
+          <a:xfrm>
+            <a:off x="457200" y="4160520"/>
+            <a:ext cx="11247120" cy="685800"/>
+          </a:xfrm>
+          <a:prstGeom prst="rect">
+            <a:avLst/>
+          </a:prstGeom>
+          <a:noFill/>
+        </p:spPr>
+        <p:txBody>
+          <a:bodyPr wrap="square">
+            <a:spAutoFit/>
+          </a:bodyPr>
+          <a:lstStyle/>
+          <a:p>
+            <a:pPr algn="l"/>
+            <a:r>
+              <a:rPr sz="1300" b="0" i="0">
+                <a:solidFill>
+                  <a:srgbClr val="FFFFFF"/>
+                </a:solidFill>
+                <a:latin typeface="Calibri"/>
+              </a:rPr>
+              <a:t>3. O glass ceiling racial é real e crescente no topo da distribuição — confirmado formalmente pela regressão quantílica e consistente com o IR=0,47 nas capitais.</a:t>
+            </a:r>
+          </a:p>
+        </p:txBody>
+      </p:sp>
+      <p:sp>
+        <p:nvSpPr>
+          <p:cNvPr id="23" name="Rectangle 22"/>
+          <p:cNvSpPr/>
+          <p:nvPr/>
+        </p:nvSpPr>
+        <p:spPr>
+          <a:xfrm>
+            <a:off x="274320" y="4983480"/>
+            <a:ext cx="11612880" cy="749808"/>
+          </a:xfrm>
+          <a:prstGeom prst="rect">
+            <a:avLst/>
+          </a:prstGeom>
+          <a:solidFill>
+            <a:srgbClr val="0F274A"/>
+          </a:solidFill>
+          <a:ln w="7620">
+            <a:solidFill>
+              <a:srgbClr val="1565C0"/>
+            </a:solidFill>
+          </a:ln>
+        </p:spPr>
+        <p:style>
+          <a:lnRef idx="1">
+            <a:schemeClr val="accent1"/>
+          </a:lnRef>
+          <a:fillRef idx="3">
+            <a:schemeClr val="accent1"/>
+          </a:fillRef>
+          <a:effectRef idx="2">
+            <a:schemeClr val="accent1"/>
+          </a:effectRef>
+          <a:fontRef idx="minor">
+            <a:schemeClr val="lt1"/>
+          </a:fontRef>
+        </p:style>
+        <p:txBody>
+          <a:bodyPr rtlCol="0" anchor="ctr"/>
+          <a:lstStyle/>
+          <a:p>
+            <a:pPr algn="ctr"/>
+          </a:p>
+        </p:txBody>
+      </p:sp>
+      <p:sp>
+        <p:nvSpPr>
+          <p:cNvPr id="24" name="TextBox 23"/>
+          <p:cNvSpPr txBox="1"/>
+          <p:nvPr/>
+        </p:nvSpPr>
+        <p:spPr>
+          <a:xfrm>
+            <a:off x="457200" y="5029200"/>
+            <a:ext cx="11247120" cy="685800"/>
+          </a:xfrm>
+          <a:prstGeom prst="rect">
+            <a:avLst/>
+          </a:prstGeom>
+          <a:noFill/>
+        </p:spPr>
+        <p:txBody>
+          <a:bodyPr wrap="square">
+            <a:spAutoFit/>
+          </a:bodyPr>
+          <a:lstStyle/>
+          <a:p>
+            <a:pPr algn="l"/>
+            <a:r>
+              <a:rPr sz="1300" b="0" i="0">
+                <a:solidFill>
+                  <a:srgbClr val="FFFFFF"/>
+                </a:solidFill>
+                <a:latin typeface="Calibri"/>
+              </a:rPr>
+              <a:t>4. Políticas que atuam apenas no gap salarial direto atacam 16% do problema. Os 84% restantes requerem ação nas portas de entrada das ocupações de alto prestígio.</a:t>
+            </a:r>
+          </a:p>
+        </p:txBody>
+      </p:sp>
+      <p:sp>
+        <p:nvSpPr>
+          <p:cNvPr id="25" name="Rectangle 24"/>
+          <p:cNvSpPr/>
+          <p:nvPr/>
+        </p:nvSpPr>
+        <p:spPr>
+          <a:xfrm>
+            <a:off x="0" y="6400800"/>
+            <a:ext cx="12188952" cy="457200"/>
+          </a:xfrm>
+          <a:prstGeom prst="rect">
+            <a:avLst/>
+          </a:prstGeom>
+          <a:solidFill>
+            <a:srgbClr val="0D1F3C"/>
+          </a:solidFill>
+          <a:ln/>
+        </p:spPr>
+        <p:style>
+          <a:lnRef idx="1">
+            <a:schemeClr val="accent1"/>
+          </a:lnRef>
+          <a:fillRef idx="3">
+            <a:schemeClr val="accent1"/>
+          </a:fillRef>
+          <a:effectRef idx="2">
+            <a:schemeClr val="accent1"/>
+          </a:effectRef>
+          <a:fontRef idx="minor">
+            <a:schemeClr val="lt1"/>
+          </a:fontRef>
+        </p:style>
+        <p:txBody>
+          <a:bodyPr rtlCol="0" anchor="ctr"/>
+          <a:lstStyle/>
+          <a:p>
+            <a:pPr algn="ctr"/>
+          </a:p>
+        </p:txBody>
+      </p:sp>
+      <p:sp>
+        <p:nvSpPr>
+          <p:cNvPr id="26" name="TextBox 25"/>
+          <p:cNvSpPr txBox="1"/>
+          <p:nvPr/>
+        </p:nvSpPr>
+        <p:spPr>
+          <a:xfrm>
+            <a:off x="274320" y="6446520"/>
+            <a:ext cx="11612880" cy="365760"/>
+          </a:xfrm>
+          <a:prstGeom prst="rect">
+            <a:avLst/>
+          </a:prstGeom>
+          <a:noFill/>
+        </p:spPr>
+        <p:txBody>
+          <a:bodyPr wrap="square">
+            <a:spAutoFit/>
+          </a:bodyPr>
+          <a:lstStyle/>
+          <a:p>
+            <a:pPr algn="ctr"/>
+            <a:r>
+              <a:rPr sz="1100" b="0" i="0">
+                <a:solidFill>
+                  <a:srgbClr val="90A4AE"/>
+                </a:solidFill>
+                <a:latin typeface="Calibri"/>
+              </a:rPr>
+              <a:t>Ricardo Calheiros  |  MBA Data Science &amp; Analytics  |  USP/ESALQ  |  rickinrj@gmail.com</a:t>
             </a:r>
           </a:p>
         </p:txBody>
@@ -25636,7 +26522,7 @@
                 </a:solidFill>
                 <a:latin typeface="Calibri"/>
               </a:rPr>
-              <a:t>4/28</a:t>
+              <a:t>4/29</a:t>
             </a:r>
           </a:p>
         </p:txBody>
@@ -27161,7 +28047,7 @@
                 </a:solidFill>
                 <a:latin typeface="Calibri"/>
               </a:rPr>
-              <a:t>5/28</a:t>
+              <a:t>5/29</a:t>
             </a:r>
           </a:p>
         </p:txBody>
@@ -28221,7 +29107,7 @@
                 </a:solidFill>
                 <a:latin typeface="Calibri"/>
               </a:rPr>
-              <a:t>6/28</a:t>
+              <a:t>6/29</a:t>
             </a:r>
           </a:p>
         </p:txBody>
@@ -28589,7 +29475,7 @@
                 </a:solidFill>
                 <a:latin typeface="Calibri"/>
               </a:rPr>
-              <a:t>7/28</a:t>
+              <a:t>7/29</a:t>
             </a:r>
           </a:p>
         </p:txBody>
@@ -29103,7 +29989,7 @@
                 </a:solidFill>
                 <a:latin typeface="Calibri"/>
               </a:rPr>
-              <a:t>8/28</a:t>
+              <a:t>8/29</a:t>
             </a:r>
           </a:p>
         </p:txBody>
@@ -30057,7 +30943,7 @@
                 </a:solidFill>
                 <a:latin typeface="Calibri"/>
               </a:rPr>
-              <a:t>9/28</a:t>
+              <a:t>9/29</a:t>
             </a:r>
           </a:p>
         </p:txBody>

--- a/apresentacao_tcc.pptx
+++ b/apresentacao_tcc.pptx
@@ -4869,7 +4869,7 @@
         <p:spPr>
           <a:xfrm>
             <a:off x="274320" y="1097280"/>
-            <a:ext cx="6583680" cy="3505648"/>
+            <a:ext cx="6583680" cy="3485478"/>
           </a:xfrm>
           <a:prstGeom prst="rect">
             <a:avLst/>
